--- a/build/pptx/vkr-defense-draft.pptx
+++ b/build/pptx/vkr-defense-draft.pptx
@@ -13,8 +13,6 @@
     <p:sldId id="261" r:id="rId7"/>
     <p:sldId id="262" r:id="rId8"/>
     <p:sldId id="263" r:id="rId9"/>
-    <p:sldId id="264" r:id="rId10"/>
-    <p:sldId id="265" r:id="rId11"/>
   </p:sldIdLst>
   <p:sldSz cx="12192000" cy="6858000" type="wide"/>
   <p:notesSz cx="6858000" cy="9144000"/>
@@ -107,8 +105,8 @@
         </p:nvSpPr>
         <p:spPr>
           <a:xfrm>
-            <a:off x="594360" y="411480"/>
-            <a:ext cx="10881360" cy="658368"/>
+            <a:off x="594360" y="1325880"/>
+            <a:ext cx="10881360" cy="1554480"/>
           </a:xfrm>
           <a:prstGeom prst="roundRect">
             <a:avLst/>
@@ -122,16 +120,16 @@
           <a:bodyPr wrap="square" lIns="177800" tIns="177800" rIns="177800" bIns="177800"/>
           <a:lstStyle/>
           <a:p>
-            <a:pPr algn="l"/>
-            <a:r>
-              <a:rPr lang="ru-RU" sz="3000" b="1">
-                <a:solidFill>
-                  <a:srgbClr val="18212B"/>
-                </a:solidFill>
-                <a:latin typeface="Aptos"/>
-                <a:cs typeface="Aptos"/>
-              </a:rPr>
-              <a:t>Горизонтальное масштабирование WebSocket-соединений</a:t>
+            <a:pPr algn="ctr"/>
+            <a:r>
+              <a:rPr lang="ru-RU" sz="2600" b="1">
+                <a:solidFill>
+                  <a:srgbClr val="18212B"/>
+                </a:solidFill>
+                <a:latin typeface="Aptos"/>
+                <a:cs typeface="Aptos"/>
+              </a:rPr>
+              <a:t>Разработка real-time интерфейса с поддержкой горизонтального масштабирования WebSocket-соединений для системы отслеживания задач</a:t>
             </a:r>
           </a:p>
         </p:txBody>
@@ -144,8 +142,8 @@
         </p:nvSpPr>
         <p:spPr>
           <a:xfrm>
-            <a:off x="621792" y="987552"/>
-            <a:ext cx="9875520" cy="320040"/>
+            <a:off x="594360" y="3246120"/>
+            <a:ext cx="10881360" cy="365760"/>
           </a:xfrm>
           <a:prstGeom prst="roundRect">
             <a:avLst/>
@@ -159,138 +157,30 @@
           <a:bodyPr wrap="square" lIns="177800" tIns="177800" rIns="177800" bIns="177800"/>
           <a:lstStyle/>
           <a:p>
-            <a:pPr algn="l"/>
-            <a:r>
-              <a:rPr lang="ru-RU" sz="1300" b="0">
+            <a:pPr algn="ctr"/>
+            <a:r>
+              <a:rPr lang="ru-RU" sz="1600" b="0">
                 <a:solidFill>
                   <a:srgbClr val="5E6A75"/>
                 </a:solidFill>
                 <a:latin typeface="Aptos"/>
                 <a:cs typeface="Aptos"/>
               </a:rPr>
-              <a:t>Система отслеживания задач · SignalR · Redis backplane · nginx</a:t>
-            </a:r>
-          </a:p>
-        </p:txBody>
-      </p:sp>
-      <p:sp>
-        <p:nvSpPr>
-          <p:cNvPr id="20" name="Shape 20"/>
-          <p:cNvSpPr txBox="1"/>
-          <p:nvPr/>
-        </p:nvSpPr>
-        <p:spPr>
-          <a:xfrm>
-            <a:off x="731520" y="1965960"/>
-            <a:ext cx="5212080" cy="2011680"/>
-          </a:xfrm>
-          <a:prstGeom prst="roundRect">
-            <a:avLst/>
-          </a:prstGeom>
-          <a:solidFill>
-            <a:srgbClr val="E8F3F1"/>
-          </a:solidFill>
-          <a:ln w="12700">
-            <a:solidFill>
-              <a:srgbClr val="0B6E69"/>
-            </a:solidFill>
-          </a:ln>
-        </p:spPr>
-        <p:txBody>
-          <a:bodyPr wrap="square" lIns="177800" tIns="177800" rIns="177800" bIns="177800"/>
-          <a:lstStyle/>
-          <a:p>
-            <a:pPr algn="l"/>
-            <a:r>
-              <a:rPr lang="ru-RU" sz="2200" b="1">
-                <a:solidFill>
-                  <a:srgbClr val="18212B"/>
-                </a:solidFill>
-                <a:latin typeface="Aptos"/>
-                <a:cs typeface="Aptos"/>
-              </a:rPr>
-              <a:t>Тезис</a:t>
-            </a:r>
-          </a:p>
-          <a:p>
-            <a:pPr algn="l"/>
-            <a:r>
-              <a:rPr lang="ru-RU" sz="2200" b="1">
-                <a:solidFill>
-                  <a:srgbClr val="18212B"/>
-                </a:solidFill>
-                <a:latin typeface="Aptos"/>
-                <a:cs typeface="Aptos"/>
-              </a:rPr>
-              <a:t>Разработан и проверен распределенный real-time контур, устраняющий single-node ограничение WebSocket-архитектуры.</a:t>
-            </a:r>
-          </a:p>
-        </p:txBody>
-      </p:sp>
-      <p:sp>
-        <p:nvSpPr>
-          <p:cNvPr id="21" name="Shape 21"/>
-          <p:cNvSpPr txBox="1"/>
-          <p:nvPr/>
-        </p:nvSpPr>
-        <p:spPr>
-          <a:xfrm>
-            <a:off x="6263640" y="1965960"/>
-            <a:ext cx="4846320" cy="2011680"/>
-          </a:xfrm>
-          <a:prstGeom prst="roundRect">
-            <a:avLst/>
-          </a:prstGeom>
-          <a:solidFill>
-            <a:srgbClr val="FFFFFF"/>
-          </a:solidFill>
-          <a:ln w="12700">
-            <a:solidFill>
-              <a:srgbClr val="C76F2E"/>
-            </a:solidFill>
-          </a:ln>
-        </p:spPr>
-        <p:txBody>
-          <a:bodyPr wrap="square" lIns="177800" tIns="177800" rIns="177800" bIns="177800"/>
-          <a:lstStyle/>
-          <a:p>
-            <a:pPr algn="l"/>
-            <a:r>
-              <a:rPr lang="ru-RU" sz="2100" b="0">
-                <a:solidFill>
-                  <a:srgbClr val="18212B"/>
-                </a:solidFill>
-                <a:latin typeface="Aptos"/>
-                <a:cs typeface="Aptos"/>
-              </a:rPr>
-              <a:t>Ключевой результат</a:t>
-            </a:r>
-          </a:p>
-          <a:p>
-            <a:pPr algn="l"/>
-            <a:r>
-              <a:rPr lang="ru-RU" sz="2100" b="0">
-                <a:solidFill>
-                  <a:srgbClr val="18212B"/>
-                </a:solidFill>
-                <a:latin typeface="Aptos"/>
-                <a:cs typeface="Aptos"/>
-              </a:rPr>
-              <a:t>Событие, созданное на app-api-1, доставляется клиенту на app-api-2; после отказа app-api-2 клиент восстанавливается через nginx.</a:t>
-            </a:r>
-          </a:p>
-        </p:txBody>
-      </p:sp>
-      <p:sp>
-        <p:nvSpPr>
-          <p:cNvPr id="900" name="Shape 900"/>
-          <p:cNvSpPr txBox="1"/>
-          <p:nvPr/>
-        </p:nvSpPr>
-        <p:spPr>
-          <a:xfrm>
-            <a:off x="594360" y="6510528"/>
-            <a:ext cx="10972800" cy="201168"/>
+              <a:t>Защита выпускной квалификационной работы</a:t>
+            </a:r>
+          </a:p>
+        </p:txBody>
+      </p:sp>
+      <p:sp>
+        <p:nvSpPr>
+          <p:cNvPr id="12" name="Shape 12"/>
+          <p:cNvSpPr txBox="1"/>
+          <p:nvPr/>
+        </p:nvSpPr>
+        <p:spPr>
+          <a:xfrm>
+            <a:off x="594360" y="4297680"/>
+            <a:ext cx="10881360" cy="365760"/>
           </a:xfrm>
           <a:prstGeom prst="roundRect">
             <a:avLst/>
@@ -304,63 +194,30 @@
           <a:bodyPr wrap="square" lIns="177800" tIns="177800" rIns="177800" bIns="177800"/>
           <a:lstStyle/>
           <a:p>
-            <a:pPr algn="l"/>
-            <a:r>
-              <a:rPr lang="ru-RU" sz="800" b="0">
-                <a:solidFill>
-                  <a:srgbClr val="5E6A75"/>
-                </a:solidFill>
-                <a:latin typeface="Aptos"/>
-                <a:cs typeface="Aptos"/>
-              </a:rPr>
-              <a:t>ВКР · real-time scale-out · 01</a:t>
-            </a:r>
-          </a:p>
-        </p:txBody>
-      </p:sp>
-    </p:spTree>
-  </p:cSld>
-  <p:clrMapOvr>
-    <a:masterClrMapping/>
-  </p:clrMapOvr>
-</p:sld>
-</file>
-
-<file path=ppt/slides/slide10.xml><?xml version="1.0" encoding="utf-8"?>
-<p:sld xmlns:a="http://schemas.openxmlformats.org/drawingml/2006/main" xmlns:r="http://schemas.openxmlformats.org/officeDocument/2006/relationships" xmlns:p="http://schemas.openxmlformats.org/presentationml/2006/main">
-  <p:cSld>
-    <p:bg>
-      <p:bgPr>
-        <a:solidFill>
-          <a:srgbClr val="F6F3EC"/>
-        </a:solidFill>
-        <a:effectLst/>
-      </p:bgPr>
-    </p:bg>
-    <p:spTree>
-      <p:nvGrpSpPr>
-        <p:cNvPr id="1" name=""/>
-        <p:cNvGrpSpPr/>
-        <p:nvPr/>
-      </p:nvGrpSpPr>
-      <p:grpSpPr>
-        <a:xfrm>
-          <a:off x="0" y="0"/>
-          <a:ext cx="0" cy="0"/>
-          <a:chOff x="0" y="0"/>
-          <a:chExt cx="0" cy="0"/>
-        </a:xfrm>
-      </p:grpSpPr>
-      <p:sp>
-        <p:nvSpPr>
-          <p:cNvPr id="10" name="Shape 10"/>
-          <p:cNvSpPr txBox="1"/>
-          <p:nvPr/>
-        </p:nvSpPr>
-        <p:spPr>
-          <a:xfrm>
-            <a:off x="594360" y="411480"/>
-            <a:ext cx="10881360" cy="658368"/>
+            <a:pPr algn="ctr"/>
+            <a:r>
+              <a:rPr lang="ru-RU" sz="1500" b="0">
+                <a:solidFill>
+                  <a:srgbClr val="18212B"/>
+                </a:solidFill>
+                <a:latin typeface="Aptos"/>
+                <a:cs typeface="Aptos"/>
+              </a:rPr>
+              <a:t>Студент: Зайцев А. С., группа 4131з</a:t>
+            </a:r>
+          </a:p>
+        </p:txBody>
+      </p:sp>
+      <p:sp>
+        <p:nvSpPr>
+          <p:cNvPr id="13" name="Shape 13"/>
+          <p:cNvSpPr txBox="1"/>
+          <p:nvPr/>
+        </p:nvSpPr>
+        <p:spPr>
+          <a:xfrm>
+            <a:off x="594360" y="4754880"/>
+            <a:ext cx="10881360" cy="365760"/>
           </a:xfrm>
           <a:prstGeom prst="roundRect">
             <a:avLst/>
@@ -374,233 +231,30 @@
           <a:bodyPr wrap="square" lIns="177800" tIns="177800" rIns="177800" bIns="177800"/>
           <a:lstStyle/>
           <a:p>
-            <a:pPr algn="l"/>
-            <a:r>
-              <a:rPr lang="ru-RU" sz="3000" b="1">
-                <a:solidFill>
-                  <a:srgbClr val="18212B"/>
-                </a:solidFill>
-                <a:latin typeface="Aptos"/>
-                <a:cs typeface="Aptos"/>
-              </a:rPr>
-              <a:t>Вывод для защиты</a:t>
-            </a:r>
-          </a:p>
-        </p:txBody>
-      </p:sp>
-      <p:sp>
-        <p:nvSpPr>
-          <p:cNvPr id="20" name="Shape 20"/>
-          <p:cNvSpPr txBox="1"/>
-          <p:nvPr/>
-        </p:nvSpPr>
-        <p:spPr>
-          <a:xfrm>
-            <a:off x="822960" y="1234440"/>
-            <a:ext cx="10332720" cy="1234440"/>
-          </a:xfrm>
-          <a:prstGeom prst="roundRect">
-            <a:avLst/>
-          </a:prstGeom>
-          <a:solidFill>
-            <a:srgbClr val="E8F3F1"/>
-          </a:solidFill>
-          <a:ln w="12700">
-            <a:solidFill>
-              <a:srgbClr val="0B6E69"/>
-            </a:solidFill>
-          </a:ln>
-        </p:spPr>
-        <p:txBody>
-          <a:bodyPr wrap="square" lIns="177800" tIns="177800" rIns="177800" bIns="177800"/>
-          <a:lstStyle/>
-          <a:p>
             <a:pPr algn="ctr"/>
             <a:r>
-              <a:rPr lang="ru-RU" sz="2500" b="1">
-                <a:solidFill>
-                  <a:srgbClr val="18212B"/>
-                </a:solidFill>
-                <a:latin typeface="Aptos"/>
-                <a:cs typeface="Aptos"/>
-              </a:rPr>
-              <a:t>Разработан распределенный real-time контур для системы отслеживания задач, устраняющий single-node ограничение SignalR/WebSocket-архитектуры.</a:t>
-            </a:r>
-          </a:p>
-        </p:txBody>
-      </p:sp>
-      <p:sp>
-        <p:nvSpPr>
-          <p:cNvPr id="21" name="Shape 21"/>
-          <p:cNvSpPr txBox="1"/>
-          <p:nvPr/>
-        </p:nvSpPr>
-        <p:spPr>
-          <a:xfrm>
-            <a:off x="822960" y="2788920"/>
-            <a:ext cx="3154680" cy="1417320"/>
-          </a:xfrm>
-          <a:prstGeom prst="roundRect">
-            <a:avLst/>
-          </a:prstGeom>
-          <a:solidFill>
-            <a:srgbClr val="FFFFFF"/>
-          </a:solidFill>
-          <a:ln w="12700">
-            <a:solidFill>
-              <a:srgbClr val="D7D2C7"/>
-            </a:solidFill>
-          </a:ln>
-        </p:spPr>
-        <p:txBody>
-          <a:bodyPr wrap="square" lIns="177800" tIns="177800" rIns="177800" bIns="177800"/>
-          <a:lstStyle/>
-          <a:p>
-            <a:pPr algn="l"/>
-            <a:r>
-              <a:rPr lang="ru-RU" sz="1900" b="1">
-                <a:solidFill>
-                  <a:srgbClr val="18212B"/>
-                </a:solidFill>
-                <a:latin typeface="Aptos"/>
-                <a:cs typeface="Aptos"/>
-              </a:rPr>
-              <a:t>Проблема</a:t>
-            </a:r>
-          </a:p>
-          <a:p>
-            <a:pPr algn="l"/>
-            <a:r>
-              <a:rPr lang="ru-RU" sz="1900" b="1">
-                <a:solidFill>
-                  <a:srgbClr val="18212B"/>
-                </a:solidFill>
-                <a:latin typeface="Aptos"/>
-                <a:cs typeface="Aptos"/>
-              </a:rPr>
-              <a:t>Без backplane событие не доходит между узлами.</a:t>
-            </a:r>
-          </a:p>
-        </p:txBody>
-      </p:sp>
-      <p:sp>
-        <p:nvSpPr>
-          <p:cNvPr id="22" name="Shape 22"/>
-          <p:cNvSpPr txBox="1"/>
-          <p:nvPr/>
-        </p:nvSpPr>
-        <p:spPr>
-          <a:xfrm>
-            <a:off x="4434840" y="2788920"/>
-            <a:ext cx="3154680" cy="1417320"/>
-          </a:xfrm>
-          <a:prstGeom prst="roundRect">
-            <a:avLst/>
-          </a:prstGeom>
-          <a:solidFill>
-            <a:srgbClr val="FFFFFF"/>
-          </a:solidFill>
-          <a:ln w="12700">
-            <a:solidFill>
-              <a:srgbClr val="D7D2C7"/>
-            </a:solidFill>
-          </a:ln>
-        </p:spPr>
-        <p:txBody>
-          <a:bodyPr wrap="square" lIns="177800" tIns="177800" rIns="177800" bIns="177800"/>
-          <a:lstStyle/>
-          <a:p>
-            <a:pPr algn="l"/>
-            <a:r>
-              <a:rPr lang="ru-RU" sz="1900" b="1">
-                <a:solidFill>
-                  <a:srgbClr val="18212B"/>
-                </a:solidFill>
-                <a:latin typeface="Aptos"/>
-                <a:cs typeface="Aptos"/>
-              </a:rPr>
-              <a:t>Решение</a:t>
-            </a:r>
-          </a:p>
-          <a:p>
-            <a:pPr algn="l"/>
-            <a:r>
-              <a:rPr lang="ru-RU" sz="1900" b="1">
-                <a:solidFill>
-                  <a:srgbClr val="18212B"/>
-                </a:solidFill>
-                <a:latin typeface="Aptos"/>
-                <a:cs typeface="Aptos"/>
-              </a:rPr>
-              <a:t>SignalR + Redis backplane + nginx + два app-api.</a:t>
-            </a:r>
-          </a:p>
-        </p:txBody>
-      </p:sp>
-      <p:sp>
-        <p:nvSpPr>
-          <p:cNvPr id="23" name="Shape 23"/>
-          <p:cNvSpPr txBox="1"/>
-          <p:nvPr/>
-        </p:nvSpPr>
-        <p:spPr>
-          <a:xfrm>
-            <a:off x="8046720" y="2788920"/>
-            <a:ext cx="3154680" cy="1417320"/>
-          </a:xfrm>
-          <a:prstGeom prst="roundRect">
-            <a:avLst/>
-          </a:prstGeom>
-          <a:solidFill>
-            <a:srgbClr val="FFFFFF"/>
-          </a:solidFill>
-          <a:ln w="12700">
-            <a:solidFill>
-              <a:srgbClr val="D7D2C7"/>
-            </a:solidFill>
-          </a:ln>
-        </p:spPr>
-        <p:txBody>
-          <a:bodyPr wrap="square" lIns="177800" tIns="177800" rIns="177800" bIns="177800"/>
-          <a:lstStyle/>
-          <a:p>
-            <a:pPr algn="l"/>
-            <a:r>
-              <a:rPr lang="ru-RU" sz="1900" b="1">
-                <a:solidFill>
-                  <a:srgbClr val="18212B"/>
-                </a:solidFill>
-                <a:latin typeface="Aptos"/>
-                <a:cs typeface="Aptos"/>
-              </a:rPr>
-              <a:t>Доказательство</a:t>
-            </a:r>
-          </a:p>
-          <a:p>
-            <a:pPr algn="l"/>
-            <a:r>
-              <a:rPr lang="ru-RU" sz="1900" b="1">
-                <a:solidFill>
-                  <a:srgbClr val="18212B"/>
-                </a:solidFill>
-                <a:latin typeface="Aptos"/>
-                <a:cs typeface="Aptos"/>
-              </a:rPr>
-              <a:t>Delivery, series, rejoin, failover.</a:t>
-            </a:r>
-          </a:p>
-        </p:txBody>
-      </p:sp>
-      <p:sp>
-        <p:nvSpPr>
-          <p:cNvPr id="24" name="Shape 24"/>
-          <p:cNvSpPr txBox="1"/>
-          <p:nvPr/>
-        </p:nvSpPr>
-        <p:spPr>
-          <a:xfrm>
-            <a:off x="1097280" y="4800600"/>
-            <a:ext cx="9601200" cy="502920"/>
+              <a:rPr lang="ru-RU" sz="1500" b="0">
+                <a:solidFill>
+                  <a:srgbClr val="18212B"/>
+                </a:solidFill>
+                <a:latin typeface="Aptos"/>
+                <a:cs typeface="Aptos"/>
+              </a:rPr>
+              <a:t>Руководитель: ст. преподаватель С. А. Рогачев</a:t>
+            </a:r>
+          </a:p>
+        </p:txBody>
+      </p:sp>
+      <p:sp>
+        <p:nvSpPr>
+          <p:cNvPr id="14" name="Shape 14"/>
+          <p:cNvSpPr txBox="1"/>
+          <p:nvPr/>
+        </p:nvSpPr>
+        <p:spPr>
+          <a:xfrm>
+            <a:off x="594360" y="5486400"/>
+            <a:ext cx="10881360" cy="365760"/>
           </a:xfrm>
           <a:prstGeom prst="roundRect">
             <a:avLst/>
@@ -616,14 +270,14 @@
           <a:p>
             <a:pPr algn="ctr"/>
             <a:r>
-              <a:rPr lang="ru-RU" sz="1800" b="0">
+              <a:rPr lang="ru-RU" sz="1400" b="0">
                 <a:solidFill>
                   <a:srgbClr val="5E6A75"/>
                 </a:solidFill>
                 <a:latin typeface="Aptos"/>
                 <a:cs typeface="Aptos"/>
               </a:rPr>
-              <a:t>Документ удержан в компактном формате до 35 страниц и подходит как база отчета по практике.</a:t>
+              <a:t>Санкт-Петербург, 2026</a:t>
             </a:r>
           </a:p>
         </p:txBody>
@@ -660,7 +314,7 @@
                 <a:latin typeface="Aptos"/>
                 <a:cs typeface="Aptos"/>
               </a:rPr>
-              <a:t>ВКР · real-time scale-out · 10</a:t>
+              <a:t>Real-time scale-out · 01</a:t>
             </a:r>
           </a:p>
         </p:txBody>
@@ -730,7 +384,7 @@
                 <a:latin typeface="Aptos"/>
                 <a:cs typeface="Aptos"/>
               </a:rPr>
-              <a:t>Проблема: real-time ломается не в коде события, а в границе узла</a:t>
+              <a:t>Проблема: single-node SignalR теряет события между узлами</a:t>
             </a:r>
           </a:p>
         </p:txBody>
@@ -743,8 +397,8 @@
         </p:nvSpPr>
         <p:spPr>
           <a:xfrm>
-            <a:off x="685800" y="1417320"/>
-            <a:ext cx="3246120" cy="2926080"/>
+            <a:off x="685800" y="1554480"/>
+            <a:ext cx="5212080" cy="2377440"/>
           </a:xfrm>
           <a:prstGeom prst="roundRect">
             <a:avLst/>
@@ -764,27 +418,40 @@
           <a:p>
             <a:pPr algn="l"/>
             <a:r>
-              <a:rPr lang="ru-RU" sz="2000" b="1">
-                <a:solidFill>
-                  <a:srgbClr val="18212B"/>
-                </a:solidFill>
-                <a:latin typeface="Aptos"/>
-                <a:cs typeface="Aptos"/>
-              </a:rPr>
-              <a:t>Single-node</a:t>
-            </a:r>
-          </a:p>
-          <a:p>
-            <a:pPr algn="l"/>
-            <a:r>
-              <a:rPr lang="ru-RU" sz="2000" b="1">
-                <a:solidFill>
-                  <a:srgbClr val="18212B"/>
-                </a:solidFill>
-                <a:latin typeface="Aptos"/>
-                <a:cs typeface="Aptos"/>
-              </a:rPr>
-              <a:t>Все соединения и группы живут в памяти одного процесса.</a:t>
+              <a:rPr lang="ru-RU" sz="1800" b="0">
+                <a:solidFill>
+                  <a:srgbClr val="18212B"/>
+                </a:solidFill>
+                <a:latin typeface="Aptos"/>
+                <a:cs typeface="Aptos"/>
+              </a:rPr>
+              <a:t>Без межузлового канала</a:t>
+            </a:r>
+          </a:p>
+          <a:p>
+            <a:pPr algn="l"/>
+            <a:r>
+              <a:rPr lang="ru-RU" sz="1800" b="0">
+                <a:solidFill>
+                  <a:srgbClr val="18212B"/>
+                </a:solidFill>
+                <a:latin typeface="Aptos"/>
+                <a:cs typeface="Aptos"/>
+              </a:rPr>
+              <a:t>Каждый экземпляр знает только своих клиентов.</a:t>
+            </a:r>
+          </a:p>
+          <a:p>
+            <a:pPr algn="l"/>
+            <a:r>
+              <a:rPr lang="ru-RU" sz="1800" b="0">
+                <a:solidFill>
+                  <a:srgbClr val="18212B"/>
+                </a:solidFill>
+                <a:latin typeface="Aptos"/>
+                <a:cs typeface="Aptos"/>
+              </a:rPr>
+              <a:t>Событие, созданное на одном узле, не доходит до клиента на другом.</a:t>
             </a:r>
           </a:p>
         </p:txBody>
@@ -797,18 +464,18 @@
         </p:nvSpPr>
         <p:spPr>
           <a:xfrm>
-            <a:off x="4251960" y="1417320"/>
-            <a:ext cx="3246120" cy="2926080"/>
+            <a:off x="6172200" y="1554480"/>
+            <a:ext cx="5212080" cy="2377440"/>
           </a:xfrm>
           <a:prstGeom prst="roundRect">
             <a:avLst/>
           </a:prstGeom>
           <a:solidFill>
-            <a:srgbClr val="FFF3D8"/>
+            <a:srgbClr val="E8F3F1"/>
           </a:solidFill>
           <a:ln w="12700">
             <a:solidFill>
-              <a:srgbClr val="C76F2E"/>
+              <a:srgbClr val="0B6E69"/>
             </a:solidFill>
           </a:ln>
         </p:spPr>
@@ -818,81 +485,27 @@
           <a:p>
             <a:pPr algn="l"/>
             <a:r>
-              <a:rPr lang="ru-RU" sz="2000" b="1">
-                <a:solidFill>
-                  <a:srgbClr val="18212B"/>
-                </a:solidFill>
-                <a:latin typeface="Aptos"/>
-                <a:cs typeface="Aptos"/>
-              </a:rPr>
-              <a:t>Multi-instance без backplane</a:t>
-            </a:r>
-          </a:p>
-          <a:p>
-            <a:pPr algn="l"/>
-            <a:r>
-              <a:rPr lang="ru-RU" sz="2000" b="1">
-                <a:solidFill>
-                  <a:srgbClr val="18212B"/>
-                </a:solidFill>
-                <a:latin typeface="Aptos"/>
-                <a:cs typeface="Aptos"/>
-              </a:rPr>
-              <a:t>Каждый app-api знает только своих клиентов.</a:t>
-            </a:r>
-          </a:p>
-        </p:txBody>
-      </p:sp>
-      <p:sp>
-        <p:nvSpPr>
-          <p:cNvPr id="22" name="Shape 22"/>
-          <p:cNvSpPr txBox="1"/>
-          <p:nvPr/>
-        </p:nvSpPr>
-        <p:spPr>
-          <a:xfrm>
-            <a:off x="7818120" y="1417320"/>
-            <a:ext cx="3246120" cy="2926080"/>
-          </a:xfrm>
-          <a:prstGeom prst="roundRect">
-            <a:avLst/>
-          </a:prstGeom>
-          <a:solidFill>
-            <a:srgbClr val="FFFFFF"/>
-          </a:solidFill>
-          <a:ln w="12700">
-            <a:solidFill>
-              <a:srgbClr val="D7D2C7"/>
-            </a:solidFill>
-          </a:ln>
-        </p:spPr>
-        <p:txBody>
-          <a:bodyPr wrap="square" lIns="177800" tIns="177800" rIns="177800" bIns="177800"/>
-          <a:lstStyle/>
-          <a:p>
-            <a:pPr algn="l"/>
-            <a:r>
-              <a:rPr lang="ru-RU" sz="2000" b="1">
-                <a:solidFill>
-                  <a:srgbClr val="18212B"/>
-                </a:solidFill>
-                <a:latin typeface="Aptos"/>
-                <a:cs typeface="Aptos"/>
-              </a:rPr>
-              <a:t>Следствие</a:t>
-            </a:r>
-          </a:p>
-          <a:p>
-            <a:pPr algn="l"/>
-            <a:r>
-              <a:rPr lang="ru-RU" sz="2000" b="1">
-                <a:solidFill>
-                  <a:srgbClr val="18212B"/>
-                </a:solidFill>
-                <a:latin typeface="Aptos"/>
-                <a:cs typeface="Aptos"/>
-              </a:rPr>
-              <a:t>Клиент на другом узле не получает ReceiveReportPatch.</a:t>
+              <a:rPr lang="ru-RU" sz="1800" b="1">
+                <a:solidFill>
+                  <a:srgbClr val="18212B"/>
+                </a:solidFill>
+                <a:latin typeface="Aptos"/>
+                <a:cs typeface="Aptos"/>
+              </a:rPr>
+              <a:t>Цель работы</a:t>
+            </a:r>
+          </a:p>
+          <a:p>
+            <a:pPr algn="l"/>
+            <a:r>
+              <a:rPr lang="ru-RU" sz="1800" b="1">
+                <a:solidFill>
+                  <a:srgbClr val="18212B"/>
+                </a:solidFill>
+                <a:latin typeface="Aptos"/>
+                <a:cs typeface="Aptos"/>
+              </a:rPr>
+              <a:t>Восстановить корректную доставку событий между клиентами, подключенными к разным экземплярам backend-сервиса.</a:t>
             </a:r>
           </a:p>
         </p:txBody>
@@ -929,7 +542,7 @@
                 <a:latin typeface="Aptos"/>
                 <a:cs typeface="Aptos"/>
               </a:rPr>
-              <a:t>ВКР · real-time scale-out · 02</a:t>
+              <a:t>Real-time scale-out · 02</a:t>
             </a:r>
           </a:p>
         </p:txBody>
@@ -999,7 +612,7 @@
                 <a:latin typeface="Aptos"/>
                 <a:cs typeface="Aptos"/>
               </a:rPr>
-              <a:t>Целевая архитектура: общий real-time слой поверх нескольких app-api</a:t>
+              <a:t>Целевая архитектура</a:t>
             </a:r>
           </a:p>
         </p:txBody>
@@ -1012,8 +625,8 @@
         </p:nvSpPr>
         <p:spPr>
           <a:xfrm>
-            <a:off x="640080" y="1417320"/>
-            <a:ext cx="2057400" cy="731520"/>
+            <a:off x="640080" y="1691640"/>
+            <a:ext cx="1828800" cy="640080"/>
           </a:xfrm>
           <a:prstGeom prst="roundRect">
             <a:avLst/>
@@ -1033,7 +646,7 @@
           <a:p>
             <a:pPr algn="ctr"/>
             <a:r>
-              <a:rPr lang="ru-RU" sz="1800" b="1">
+              <a:rPr lang="ru-RU" sz="1400" b="1">
                 <a:solidFill>
                   <a:srgbClr val="18212B"/>
                 </a:solidFill>
@@ -1053,8 +666,8 @@
         </p:nvSpPr>
         <p:spPr>
           <a:xfrm>
-            <a:off x="640080" y="2880360"/>
-            <a:ext cx="2057400" cy="731520"/>
+            <a:off x="640080" y="3246120"/>
+            <a:ext cx="1828800" cy="640080"/>
           </a:xfrm>
           <a:prstGeom prst="roundRect">
             <a:avLst/>
@@ -1074,7 +687,7 @@
           <a:p>
             <a:pPr algn="ctr"/>
             <a:r>
-              <a:rPr lang="ru-RU" sz="1800" b="1">
+              <a:rPr lang="ru-RU" sz="1400" b="1">
                 <a:solidFill>
                   <a:srgbClr val="18212B"/>
                 </a:solidFill>
@@ -1094,8 +707,8 @@
         </p:nvSpPr>
         <p:spPr>
           <a:xfrm>
-            <a:off x="3154680" y="2148840"/>
-            <a:ext cx="1645920" cy="822960"/>
+            <a:off x="3108960" y="2468880"/>
+            <a:ext cx="1554480" cy="777240"/>
           </a:xfrm>
           <a:prstGeom prst="roundRect">
             <a:avLst/>
@@ -1115,7 +728,7 @@
           <a:p>
             <a:pPr algn="ctr"/>
             <a:r>
-              <a:rPr lang="ru-RU" sz="1800" b="1">
+              <a:rPr lang="ru-RU" sz="1400" b="1">
                 <a:solidFill>
                   <a:srgbClr val="18212B"/>
                 </a:solidFill>
@@ -1135,8 +748,8 @@
         </p:nvSpPr>
         <p:spPr>
           <a:xfrm>
-            <a:off x="5349240" y="1417320"/>
-            <a:ext cx="1965960" cy="731520"/>
+            <a:off x="5303520" y="1691640"/>
+            <a:ext cx="1920240" cy="640080"/>
           </a:xfrm>
           <a:prstGeom prst="roundRect">
             <a:avLst/>
@@ -1156,7 +769,7 @@
           <a:p>
             <a:pPr algn="ctr"/>
             <a:r>
-              <a:rPr lang="ru-RU" sz="1800" b="1">
+              <a:rPr lang="ru-RU" sz="1400" b="1">
                 <a:solidFill>
                   <a:srgbClr val="18212B"/>
                 </a:solidFill>
@@ -1176,8 +789,8 @@
         </p:nvSpPr>
         <p:spPr>
           <a:xfrm>
-            <a:off x="5349240" y="2880360"/>
-            <a:ext cx="1965960" cy="731520"/>
+            <a:off x="5303520" y="3246120"/>
+            <a:ext cx="1920240" cy="640080"/>
           </a:xfrm>
           <a:prstGeom prst="roundRect">
             <a:avLst/>
@@ -1197,7 +810,7 @@
           <a:p>
             <a:pPr algn="ctr"/>
             <a:r>
-              <a:rPr lang="ru-RU" sz="1800" b="1">
+              <a:rPr lang="ru-RU" sz="1400" b="1">
                 <a:solidFill>
                   <a:srgbClr val="18212B"/>
                 </a:solidFill>
@@ -1217,8 +830,8 @@
         </p:nvSpPr>
         <p:spPr>
           <a:xfrm>
-            <a:off x="7909560" y="2148840"/>
-            <a:ext cx="2194560" cy="822960"/>
+            <a:off x="7818120" y="2468880"/>
+            <a:ext cx="2286000" cy="777240"/>
           </a:xfrm>
           <a:prstGeom prst="roundRect">
             <a:avLst/>
@@ -1238,7 +851,7 @@
           <a:p>
             <a:pPr algn="ctr"/>
             <a:r>
-              <a:rPr lang="ru-RU" sz="1700" b="1">
+              <a:rPr lang="ru-RU" sz="1400" b="1">
                 <a:solidFill>
                   <a:srgbClr val="18212B"/>
                 </a:solidFill>
@@ -1258,8 +871,8 @@
         </p:nvSpPr>
         <p:spPr>
           <a:xfrm>
-            <a:off x="2743200" y="4617720"/>
-            <a:ext cx="6766560" cy="594360"/>
+            <a:off x="640080" y="4754880"/>
+            <a:ext cx="10515600" cy="502920"/>
           </a:xfrm>
           <a:prstGeom prst="roundRect">
             <a:avLst/>
@@ -1275,14 +888,14 @@
           <a:p>
             <a:pPr algn="ctr"/>
             <a:r>
-              <a:rPr lang="ru-RU" sz="1700" b="0">
+              <a:rPr lang="ru-RU" sz="1400" b="0">
                 <a:solidFill>
                   <a:srgbClr val="5E6A75"/>
                 </a:solidFill>
                 <a:latin typeface="Aptos"/>
                 <a:cs typeface="Aptos"/>
               </a:rPr>
-              <a:t>События SignalR публикуются между экземплярами, а группы остаются локальным runtime-состоянием.</a:t>
+              <a:t>SignalR-события публикуются между экземплярами через Redis; группы остаются локальным runtime-состоянием.</a:t>
             </a:r>
           </a:p>
         </p:txBody>
@@ -1319,7 +932,7 @@
                 <a:latin typeface="Aptos"/>
                 <a:cs typeface="Aptos"/>
               </a:rPr>
-              <a:t>ВКР · real-time scale-out · 03</a:t>
+              <a:t>Real-time scale-out · 03</a:t>
             </a:r>
           </a:p>
         </p:txBody>
@@ -1389,7 +1002,7 @@
                 <a:latin typeface="Aptos"/>
                 <a:cs typeface="Aptos"/>
               </a:rPr>
-              <a:t>Что реализовано в отдельной ветке thesis/realtime-scaleout</a:t>
+              <a:t>Что сделано</a:t>
             </a:r>
           </a:p>
         </p:txBody>
@@ -1402,8 +1015,8 @@
         </p:nvSpPr>
         <p:spPr>
           <a:xfrm>
-            <a:off x="685800" y="1325880"/>
-            <a:ext cx="5120640" cy="914400"/>
+            <a:off x="685800" y="1554480"/>
+            <a:ext cx="5212080" cy="1097280"/>
           </a:xfrm>
           <a:prstGeom prst="roundRect">
             <a:avLst/>
@@ -1423,7 +1036,7 @@
           <a:p>
             <a:pPr algn="l"/>
             <a:r>
-              <a:rPr lang="ru-RU" sz="1800" b="0">
+              <a:rPr lang="ru-RU" sz="1500" b="0">
                 <a:solidFill>
                   <a:srgbClr val="18212B"/>
                 </a:solidFill>
@@ -1436,7 +1049,7 @@
           <a:p>
             <a:pPr algn="l"/>
             <a:r>
-              <a:rPr lang="ru-RU" sz="1800" b="0">
+              <a:rPr lang="ru-RU" sz="1500" b="0">
                 <a:solidFill>
                   <a:srgbClr val="18212B"/>
                 </a:solidFill>
@@ -1456,8 +1069,8 @@
         </p:nvSpPr>
         <p:spPr>
           <a:xfrm>
-            <a:off x="685800" y="2423160"/>
-            <a:ext cx="5120640" cy="914400"/>
+            <a:off x="685800" y="2743200"/>
+            <a:ext cx="5212080" cy="1097280"/>
           </a:xfrm>
           <a:prstGeom prst="roundRect">
             <a:avLst/>
@@ -1477,7 +1090,7 @@
           <a:p>
             <a:pPr algn="l"/>
             <a:r>
-              <a:rPr lang="ru-RU" sz="1800" b="0">
+              <a:rPr lang="ru-RU" sz="1500" b="0">
                 <a:solidFill>
                   <a:srgbClr val="18212B"/>
                 </a:solidFill>
@@ -1490,7 +1103,7 @@
           <a:p>
             <a:pPr algn="l"/>
             <a:r>
-              <a:rPr lang="ru-RU" sz="1800" b="0">
+              <a:rPr lang="ru-RU" sz="1500" b="0">
                 <a:solidFill>
                   <a:srgbClr val="18212B"/>
                 </a:solidFill>
@@ -1510,8 +1123,8 @@
         </p:nvSpPr>
         <p:spPr>
           <a:xfrm>
-            <a:off x="6172200" y="1325880"/>
-            <a:ext cx="5120640" cy="914400"/>
+            <a:off x="6172200" y="1554480"/>
+            <a:ext cx="5212080" cy="1097280"/>
           </a:xfrm>
           <a:prstGeom prst="roundRect">
             <a:avLst/>
@@ -1531,20 +1144,20 @@
           <a:p>
             <a:pPr algn="l"/>
             <a:r>
-              <a:rPr lang="ru-RU" sz="1800" b="0">
-                <a:solidFill>
-                  <a:srgbClr val="18212B"/>
-                </a:solidFill>
-                <a:latin typeface="Aptos"/>
-                <a:cs typeface="Aptos"/>
-              </a:rPr>
-              <a:t>3 · Multi-instance Docker Compose</a:t>
-            </a:r>
-          </a:p>
-          <a:p>
-            <a:pPr algn="l"/>
-            <a:r>
-              <a:rPr lang="ru-RU" sz="1800" b="0">
+              <a:rPr lang="ru-RU" sz="1500" b="0">
+                <a:solidFill>
+                  <a:srgbClr val="18212B"/>
+                </a:solidFill>
+                <a:latin typeface="Aptos"/>
+                <a:cs typeface="Aptos"/>
+              </a:rPr>
+              <a:t>3 · Стенд Docker Compose</a:t>
+            </a:r>
+          </a:p>
+          <a:p>
+            <a:pPr algn="l"/>
+            <a:r>
+              <a:rPr lang="ru-RU" sz="1500" b="0">
                 <a:solidFill>
                   <a:srgbClr val="18212B"/>
                 </a:solidFill>
@@ -1564,8 +1177,8 @@
         </p:nvSpPr>
         <p:spPr>
           <a:xfrm>
-            <a:off x="6172200" y="2423160"/>
-            <a:ext cx="5120640" cy="914400"/>
+            <a:off x="6172200" y="2743200"/>
+            <a:ext cx="5212080" cy="1097280"/>
           </a:xfrm>
           <a:prstGeom prst="roundRect">
             <a:avLst/>
@@ -1585,68 +1198,27 @@
           <a:p>
             <a:pPr algn="l"/>
             <a:r>
-              <a:rPr lang="ru-RU" sz="1800" b="0">
-                <a:solidFill>
-                  <a:srgbClr val="18212B"/>
-                </a:solidFill>
-                <a:latin typeface="Aptos"/>
-                <a:cs typeface="Aptos"/>
-              </a:rPr>
-              <a:t>4 · Автоматизированный клиент</a:t>
-            </a:r>
-          </a:p>
-          <a:p>
-            <a:pPr algn="l"/>
-            <a:r>
-              <a:rPr lang="ru-RU" sz="1800" b="0">
-                <a:solidFill>
-                  <a:srgbClr val="18212B"/>
-                </a:solidFill>
-                <a:latin typeface="Aptos"/>
-                <a:cs typeface="Aptos"/>
-              </a:rPr>
-              <a:t>Delivery, serial, rejoin и failover сценарии</a:t>
-            </a:r>
-          </a:p>
-        </p:txBody>
-      </p:sp>
-      <p:sp>
-        <p:nvSpPr>
-          <p:cNvPr id="24" name="Shape 24"/>
-          <p:cNvSpPr txBox="1"/>
-          <p:nvPr/>
-        </p:nvSpPr>
-        <p:spPr>
-          <a:xfrm>
-            <a:off x="1097280" y="4069080"/>
-            <a:ext cx="9875520" cy="868680"/>
-          </a:xfrm>
-          <a:prstGeom prst="roundRect">
-            <a:avLst/>
-          </a:prstGeom>
-          <a:solidFill>
-            <a:srgbClr val="FFF3D8"/>
-          </a:solidFill>
-          <a:ln w="12700">
-            <a:solidFill>
-              <a:srgbClr val="C76F2E"/>
-            </a:solidFill>
-          </a:ln>
-        </p:spPr>
-        <p:txBody>
-          <a:bodyPr wrap="square" lIns="177800" tIns="177800" rIns="177800" bIns="177800"/>
-          <a:lstStyle/>
-          <a:p>
-            <a:pPr algn="ctr"/>
-            <a:r>
-              <a:rPr lang="ru-RU" sz="1900" b="1">
-                <a:solidFill>
-                  <a:srgbClr val="18212B"/>
-                </a:solidFill>
-                <a:latin typeface="Aptos"/>
-                <a:cs typeface="Aptos"/>
-              </a:rPr>
-              <a:t>Важная граница: проверяется серверный real-time контур, а не полнота пользовательского интерфейса.</a:t>
+              <a:rPr lang="ru-RU" sz="1500" b="0">
+                <a:solidFill>
+                  <a:srgbClr val="18212B"/>
+                </a:solidFill>
+                <a:latin typeface="Aptos"/>
+                <a:cs typeface="Aptos"/>
+              </a:rPr>
+              <a:t>4 · Node.js-клиент</a:t>
+            </a:r>
+          </a:p>
+          <a:p>
+            <a:pPr algn="l"/>
+            <a:r>
+              <a:rPr lang="ru-RU" sz="1500" b="0">
+                <a:solidFill>
+                  <a:srgbClr val="18212B"/>
+                </a:solidFill>
+                <a:latin typeface="Aptos"/>
+                <a:cs typeface="Aptos"/>
+              </a:rPr>
+              <a:t>Delivery, серия, rejoin, failover</a:t>
             </a:r>
           </a:p>
         </p:txBody>
@@ -1683,7 +1255,7 @@
                 <a:latin typeface="Aptos"/>
                 <a:cs typeface="Aptos"/>
               </a:rPr>
-              <a:t>ВКР · real-time scale-out · 04</a:t>
+              <a:t>Real-time scale-out · 04</a:t>
             </a:r>
           </a:p>
         </p:txBody>
@@ -1753,7 +1325,7 @@
                 <a:latin typeface="Aptos"/>
                 <a:cs typeface="Aptos"/>
               </a:rPr>
-              <a:t>Стенд испытаний: минимальный, но проверяемый</a:t>
+              <a:t>Стенд и программа испытаний</a:t>
             </a:r>
           </a:p>
         </p:txBody>
@@ -1766,8 +1338,88 @@
         </p:nvSpPr>
         <p:spPr>
           <a:xfrm>
-            <a:off x="731520" y="1325880"/>
-            <a:ext cx="3200400" cy="3474720"/>
+            <a:off x="685800" y="1600200"/>
+            <a:ext cx="5212080" cy="2286000"/>
+          </a:xfrm>
+          <a:prstGeom prst="roundRect">
+            <a:avLst/>
+          </a:prstGeom>
+          <a:solidFill>
+            <a:srgbClr val="E8F3F1"/>
+          </a:solidFill>
+          <a:ln w="12700">
+            <a:solidFill>
+              <a:srgbClr val="0B6E69"/>
+            </a:solidFill>
+          </a:ln>
+        </p:spPr>
+        <p:txBody>
+          <a:bodyPr wrap="square" lIns="177800" tIns="177800" rIns="177800" bIns="177800"/>
+          <a:lstStyle/>
+          <a:p>
+            <a:pPr algn="l"/>
+            <a:r>
+              <a:rPr lang="ru-RU" sz="1500" b="0">
+                <a:solidFill>
+                  <a:srgbClr val="18212B"/>
+                </a:solidFill>
+                <a:latin typeface="Aptos"/>
+                <a:cs typeface="Aptos"/>
+              </a:rPr>
+              <a:t>Два режима</a:t>
+            </a:r>
+          </a:p>
+          <a:p>
+            <a:pPr algn="l"/>
+            <a:r>
+              <a:rPr lang="ru-RU" sz="1500" b="0">
+                <a:solidFill>
+                  <a:srgbClr val="18212B"/>
+                </a:solidFill>
+                <a:latin typeface="Aptos"/>
+                <a:cs typeface="Aptos"/>
+              </a:rPr>
+              <a:t>• С Redis backplane</a:t>
+            </a:r>
+          </a:p>
+          <a:p>
+            <a:pPr algn="l"/>
+            <a:r>
+              <a:rPr lang="ru-RU" sz="1500" b="0">
+                <a:solidFill>
+                  <a:srgbClr val="18212B"/>
+                </a:solidFill>
+                <a:latin typeface="Aptos"/>
+                <a:cs typeface="Aptos"/>
+              </a:rPr>
+              <a:t>• Без Redis backplane</a:t>
+            </a:r>
+          </a:p>
+          <a:p>
+            <a:pPr algn="l"/>
+            <a:r>
+              <a:rPr lang="ru-RU" sz="1500" b="0">
+                <a:solidFill>
+                  <a:srgbClr val="18212B"/>
+                </a:solidFill>
+                <a:latin typeface="Aptos"/>
+                <a:cs typeface="Aptos"/>
+              </a:rPr>
+              <a:t>Один и тот же код, разница — переменная окружения.</a:t>
+            </a:r>
+          </a:p>
+        </p:txBody>
+      </p:sp>
+      <p:sp>
+        <p:nvSpPr>
+          <p:cNvPr id="21" name="Shape 21"/>
+          <p:cNvSpPr txBox="1"/>
+          <p:nvPr/>
+        </p:nvSpPr>
+        <p:spPr>
+          <a:xfrm>
+            <a:off x="6172200" y="1600200"/>
+            <a:ext cx="5212080" cy="2286000"/>
           </a:xfrm>
           <a:prstGeom prst="roundRect">
             <a:avLst/>
@@ -1787,252 +1439,66 @@
           <a:p>
             <a:pPr algn="l"/>
             <a:r>
-              <a:rPr lang="ru-RU" sz="1900" b="0">
-                <a:solidFill>
-                  <a:srgbClr val="18212B"/>
-                </a:solidFill>
-                <a:latin typeface="Aptos"/>
-                <a:cs typeface="Aptos"/>
-              </a:rPr>
-              <a:t>Состав</a:t>
-            </a:r>
-          </a:p>
-          <a:p>
-            <a:pPr algn="l"/>
-            <a:r>
-              <a:rPr lang="ru-RU" sz="1900" b="0">
-                <a:solidFill>
-                  <a:srgbClr val="18212B"/>
-                </a:solidFill>
-                <a:latin typeface="Aptos"/>
-                <a:cs typeface="Aptos"/>
-              </a:rPr>
-              <a:t>postgres_app_thesis</a:t>
-            </a:r>
-          </a:p>
-          <a:p>
-            <a:pPr algn="l"/>
-            <a:r>
-              <a:rPr lang="ru-RU" sz="1900" b="0">
-                <a:solidFill>
-                  <a:srgbClr val="18212B"/>
-                </a:solidFill>
-                <a:latin typeface="Aptos"/>
-                <a:cs typeface="Aptos"/>
-              </a:rPr>
-              <a:t>redis_app_thesis</a:t>
-            </a:r>
-          </a:p>
-          <a:p>
-            <a:pPr algn="l"/>
-            <a:r>
-              <a:rPr lang="ru-RU" sz="1900" b="0">
-                <a:solidFill>
-                  <a:srgbClr val="18212B"/>
-                </a:solidFill>
-                <a:latin typeface="Aptos"/>
-                <a:cs typeface="Aptos"/>
-              </a:rPr>
-              <a:t>app-api-1</a:t>
-            </a:r>
-          </a:p>
-          <a:p>
-            <a:pPr algn="l"/>
-            <a:r>
-              <a:rPr lang="ru-RU" sz="1900" b="0">
-                <a:solidFill>
-                  <a:srgbClr val="18212B"/>
-                </a:solidFill>
-                <a:latin typeface="Aptos"/>
-                <a:cs typeface="Aptos"/>
-              </a:rPr>
-              <a:t>app-api-2</a:t>
-            </a:r>
-          </a:p>
-          <a:p>
-            <a:pPr algn="l"/>
-            <a:r>
-              <a:rPr lang="ru-RU" sz="1900" b="0">
-                <a:solidFill>
-                  <a:srgbClr val="18212B"/>
-                </a:solidFill>
-                <a:latin typeface="Aptos"/>
-                <a:cs typeface="Aptos"/>
-              </a:rPr>
-              <a:t>nginx_app_thesis</a:t>
-            </a:r>
-          </a:p>
-        </p:txBody>
-      </p:sp>
-      <p:sp>
-        <p:nvSpPr>
-          <p:cNvPr id="21" name="Shape 21"/>
-          <p:cNvSpPr txBox="1"/>
-          <p:nvPr/>
-        </p:nvSpPr>
-        <p:spPr>
-          <a:xfrm>
-            <a:off x="4343400" y="1325880"/>
-            <a:ext cx="3200400" cy="3474720"/>
-          </a:xfrm>
-          <a:prstGeom prst="roundRect">
-            <a:avLst/>
-          </a:prstGeom>
-          <a:solidFill>
-            <a:srgbClr val="E8F3F1"/>
-          </a:solidFill>
-          <a:ln w="12700">
-            <a:solidFill>
-              <a:srgbClr val="0B6E69"/>
-            </a:solidFill>
-          </a:ln>
-        </p:spPr>
-        <p:txBody>
-          <a:bodyPr wrap="square" lIns="177800" tIns="177800" rIns="177800" bIns="177800"/>
-          <a:lstStyle/>
-          <a:p>
-            <a:pPr algn="l"/>
-            <a:r>
-              <a:rPr lang="ru-RU" sz="1800" b="0">
-                <a:solidFill>
-                  <a:srgbClr val="18212B"/>
-                </a:solidFill>
-                <a:latin typeface="Aptos"/>
-                <a:cs typeface="Aptos"/>
-              </a:rPr>
-              <a:t>Две конфигурации</a:t>
-            </a:r>
-          </a:p>
-          <a:p>
-            <a:pPr algn="l"/>
-            <a:r>
-              <a:rPr lang="ru-RU" sz="1800" b="0">
-                <a:solidFill>
-                  <a:srgbClr val="18212B"/>
-                </a:solidFill>
-                <a:latin typeface="Aptos"/>
-                <a:cs typeface="Aptos"/>
-              </a:rPr>
-              <a:t>С Redis backplane</a:t>
-            </a:r>
-          </a:p>
-          <a:p>
-            <a:pPr algn="l"/>
-            <a:r>
-              <a:rPr lang="ru-RU" sz="1800" b="0">
-                <a:solidFill>
-                  <a:srgbClr val="18212B"/>
-                </a:solidFill>
-                <a:latin typeface="Aptos"/>
-                <a:cs typeface="Aptos"/>
-              </a:rPr>
-              <a:t>Без Redis backplane</a:t>
-            </a:r>
-          </a:p>
-          <a:p>
-            <a:pPr algn="l"/>
-            <a:r>
-              <a:rPr lang="ru-RU" sz="1800" b="0">
-                <a:solidFill>
-                  <a:srgbClr val="18212B"/>
-                </a:solidFill>
-                <a:latin typeface="Aptos"/>
-                <a:cs typeface="Aptos"/>
-              </a:rPr>
-              <a:t/>
-            </a:r>
-          </a:p>
-          <a:p>
-            <a:pPr algn="l"/>
-            <a:r>
-              <a:rPr lang="ru-RU" sz="1800" b="0">
-                <a:solidFill>
-                  <a:srgbClr val="18212B"/>
-                </a:solidFill>
-                <a:latin typeface="Aptos"/>
-                <a:cs typeface="Aptos"/>
-              </a:rPr>
-              <a:t>Один и тот же код, разная настройка REDIS_CONNECTION_STRING</a:t>
-            </a:r>
-          </a:p>
-        </p:txBody>
-      </p:sp>
-      <p:sp>
-        <p:nvSpPr>
-          <p:cNvPr id="22" name="Shape 22"/>
-          <p:cNvSpPr txBox="1"/>
-          <p:nvPr/>
-        </p:nvSpPr>
-        <p:spPr>
-          <a:xfrm>
-            <a:off x="7955280" y="1325880"/>
-            <a:ext cx="3200400" cy="3474720"/>
-          </a:xfrm>
-          <a:prstGeom prst="roundRect">
-            <a:avLst/>
-          </a:prstGeom>
-          <a:solidFill>
-            <a:srgbClr val="FFFFFF"/>
-          </a:solidFill>
-          <a:ln w="12700">
-            <a:solidFill>
-              <a:srgbClr val="D7D2C7"/>
-            </a:solidFill>
-          </a:ln>
-        </p:spPr>
-        <p:txBody>
-          <a:bodyPr wrap="square" lIns="177800" tIns="177800" rIns="177800" bIns="177800"/>
-          <a:lstStyle/>
-          <a:p>
-            <a:pPr algn="l"/>
-            <a:r>
-              <a:rPr lang="ru-RU" sz="1700" b="0">
-                <a:solidFill>
-                  <a:srgbClr val="18212B"/>
-                </a:solidFill>
-                <a:latin typeface="Aptos"/>
-                <a:cs typeface="Aptos"/>
-              </a:rPr>
-              <a:t>Команды</a:t>
-            </a:r>
-          </a:p>
-          <a:p>
-            <a:pPr algn="l"/>
-            <a:r>
-              <a:rPr lang="ru-RU" sz="1700" b="0">
-                <a:solidFill>
-                  <a:srgbClr val="18212B"/>
-                </a:solidFill>
-                <a:latin typeface="Aptos"/>
-                <a:cs typeface="Aptos"/>
-              </a:rPr>
-              <a:t>node scripts/realtime-scaleout-check.mjs</a:t>
-            </a:r>
-          </a:p>
-          <a:p>
-            <a:pPr algn="l"/>
-            <a:r>
-              <a:rPr lang="ru-RU" sz="1700" b="0">
-                <a:solidFill>
-                  <a:srgbClr val="18212B"/>
-                </a:solidFill>
-                <a:latin typeface="Aptos"/>
-                <a:cs typeface="Aptos"/>
-              </a:rPr>
-              <a:t>THESIS_ITERATIONS=5</a:t>
-            </a:r>
-          </a:p>
-          <a:p>
-            <a:pPr algn="l"/>
-            <a:r>
-              <a:rPr lang="ru-RU" sz="1700" b="0">
-                <a:solidFill>
-                  <a:srgbClr val="18212B"/>
-                </a:solidFill>
-                <a:latin typeface="Aptos"/>
-                <a:cs typeface="Aptos"/>
-              </a:rPr>
-              <a:t>THESIS_SCENARIO=failover</a:t>
+              <a:rPr lang="ru-RU" sz="1500" b="0">
+                <a:solidFill>
+                  <a:srgbClr val="18212B"/>
+                </a:solidFill>
+                <a:latin typeface="Aptos"/>
+                <a:cs typeface="Aptos"/>
+              </a:rPr>
+              <a:t>Четыре сценария</a:t>
+            </a:r>
+          </a:p>
+          <a:p>
+            <a:pPr algn="l"/>
+            <a:r>
+              <a:rPr lang="ru-RU" sz="1500" b="0">
+                <a:solidFill>
+                  <a:srgbClr val="18212B"/>
+                </a:solidFill>
+                <a:latin typeface="Aptos"/>
+                <a:cs typeface="Aptos"/>
+              </a:rPr>
+              <a:t>• Одиночная доставка</a:t>
+            </a:r>
+          </a:p>
+          <a:p>
+            <a:pPr algn="l"/>
+            <a:r>
+              <a:rPr lang="ru-RU" sz="1500" b="0">
+                <a:solidFill>
+                  <a:srgbClr val="18212B"/>
+                </a:solidFill>
+                <a:latin typeface="Aptos"/>
+                <a:cs typeface="Aptos"/>
+              </a:rPr>
+              <a:t>• Серия из 5 итераций</a:t>
+            </a:r>
+          </a:p>
+          <a:p>
+            <a:pPr algn="l"/>
+            <a:r>
+              <a:rPr lang="ru-RU" sz="1500" b="0">
+                <a:solidFill>
+                  <a:srgbClr val="18212B"/>
+                </a:solidFill>
+                <a:latin typeface="Aptos"/>
+                <a:cs typeface="Aptos"/>
+              </a:rPr>
+              <a:t>• Rejoin после разрыва</a:t>
+            </a:r>
+          </a:p>
+          <a:p>
+            <a:pPr algn="l"/>
+            <a:r>
+              <a:rPr lang="ru-RU" sz="1500" b="0">
+                <a:solidFill>
+                  <a:srgbClr val="18212B"/>
+                </a:solidFill>
+                <a:latin typeface="Aptos"/>
+                <a:cs typeface="Aptos"/>
+              </a:rPr>
+              <a:t>• Failover узла</a:t>
             </a:r>
           </a:p>
         </p:txBody>
@@ -2069,7 +1535,7 @@
                 <a:latin typeface="Aptos"/>
                 <a:cs typeface="Aptos"/>
               </a:rPr>
-              <a:t>ВКР · real-time scale-out · 05</a:t>
+              <a:t>Real-time scale-out · 05</a:t>
             </a:r>
           </a:p>
         </p:txBody>
@@ -2139,7 +1605,7 @@
                 <a:latin typeface="Aptos"/>
                 <a:cs typeface="Aptos"/>
               </a:rPr>
-              <a:t>Главная проверка: без backplane проблема воспроизводится</a:t>
+              <a:t>Главный результат</a:t>
             </a:r>
           </a:p>
         </p:txBody>
@@ -2152,8 +1618,8 @@
         </p:nvSpPr>
         <p:spPr>
           <a:xfrm>
-            <a:off x="822960" y="1417320"/>
-            <a:ext cx="4983480" cy="2468880"/>
+            <a:off x="685800" y="1554480"/>
+            <a:ext cx="5212080" cy="2377440"/>
           </a:xfrm>
           <a:prstGeom prst="roundRect">
             <a:avLst/>
@@ -2173,27 +1639,40 @@
           <a:p>
             <a:pPr algn="ctr"/>
             <a:r>
-              <a:rPr lang="ru-RU" sz="2500" b="1">
-                <a:solidFill>
-                  <a:srgbClr val="18212B"/>
-                </a:solidFill>
-                <a:latin typeface="Aptos"/>
-                <a:cs typeface="Aptos"/>
-              </a:rPr>
-              <a:t>Без Redis backplane</a:t>
+              <a:rPr lang="ru-RU" sz="2000" b="1">
+                <a:solidFill>
+                  <a:srgbClr val="18212B"/>
+                </a:solidFill>
+                <a:latin typeface="Aptos"/>
+                <a:cs typeface="Aptos"/>
+              </a:rPr>
+              <a:t>Без backplane</a:t>
             </a:r>
           </a:p>
           <a:p>
             <a:pPr algn="ctr"/>
             <a:r>
-              <a:rPr lang="ru-RU" sz="2500" b="1">
-                <a:solidFill>
-                  <a:srgbClr val="18212B"/>
-                </a:solidFill>
-                <a:latin typeface="Aptos"/>
-                <a:cs typeface="Aptos"/>
-              </a:rPr>
-              <a:t>ReceiveReportPatch timed out after 10000ms</a:t>
+              <a:rPr lang="ru-RU" sz="2000" b="1">
+                <a:solidFill>
+                  <a:srgbClr val="18212B"/>
+                </a:solidFill>
+                <a:latin typeface="Aptos"/>
+                <a:cs typeface="Aptos"/>
+              </a:rPr>
+              <a:t>timeout 10000 мс</a:t>
+            </a:r>
+          </a:p>
+          <a:p>
+            <a:pPr algn="ctr"/>
+            <a:r>
+              <a:rPr lang="ru-RU" sz="2000" b="1">
+                <a:solidFill>
+                  <a:srgbClr val="18212B"/>
+                </a:solidFill>
+                <a:latin typeface="Aptos"/>
+                <a:cs typeface="Aptos"/>
+              </a:rPr>
+              <a:t>событие не доставлено</a:t>
             </a:r>
           </a:p>
         </p:txBody>
@@ -2206,8 +1685,8 @@
         </p:nvSpPr>
         <p:spPr>
           <a:xfrm>
-            <a:off x="6263640" y="1417320"/>
-            <a:ext cx="4983480" cy="2468880"/>
+            <a:off x="6172200" y="1554480"/>
+            <a:ext cx="5212080" cy="2377440"/>
           </a:xfrm>
           <a:prstGeom prst="roundRect">
             <a:avLst/>
@@ -2227,40 +1706,40 @@
           <a:p>
             <a:pPr algn="ctr"/>
             <a:r>
-              <a:rPr lang="ru-RU" sz="2500" b="1">
-                <a:solidFill>
-                  <a:srgbClr val="18212B"/>
-                </a:solidFill>
-                <a:latin typeface="Aptos"/>
-                <a:cs typeface="Aptos"/>
-              </a:rPr>
-              <a:t>С Redis backplane</a:t>
+              <a:rPr lang="ru-RU" sz="2000" b="1">
+                <a:solidFill>
+                  <a:srgbClr val="18212B"/>
+                </a:solidFill>
+                <a:latin typeface="Aptos"/>
+                <a:cs typeface="Aptos"/>
+              </a:rPr>
+              <a:t>С backplane</a:t>
             </a:r>
           </a:p>
           <a:p>
             <a:pPr algn="ctr"/>
             <a:r>
-              <a:rPr lang="ru-RU" sz="2500" b="1">
-                <a:solidFill>
-                  <a:srgbClr val="18212B"/>
-                </a:solidFill>
-                <a:latin typeface="Aptos"/>
-                <a:cs typeface="Aptos"/>
-              </a:rPr>
-              <a:t>ok: true</a:t>
+              <a:rPr lang="ru-RU" sz="2000" b="1">
+                <a:solidFill>
+                  <a:srgbClr val="18212B"/>
+                </a:solidFill>
+                <a:latin typeface="Aptos"/>
+                <a:cs typeface="Aptos"/>
+              </a:rPr>
+              <a:t>ok: true · 5 из 5</a:t>
             </a:r>
           </a:p>
           <a:p>
             <a:pPr algn="ctr"/>
             <a:r>
-              <a:rPr lang="ru-RU" sz="2500" b="1">
-                <a:solidFill>
-                  <a:srgbClr val="18212B"/>
-                </a:solidFill>
-                <a:latin typeface="Aptos"/>
-                <a:cs typeface="Aptos"/>
-              </a:rPr>
-              <a:t>app-api-1 → app-api-2</a:t>
+              <a:rPr lang="ru-RU" sz="2000" b="1">
+                <a:solidFill>
+                  <a:srgbClr val="18212B"/>
+                </a:solidFill>
+                <a:latin typeface="Aptos"/>
+                <a:cs typeface="Aptos"/>
+              </a:rPr>
+              <a:t>p95 = 11,6 мс</a:t>
             </a:r>
           </a:p>
         </p:txBody>
@@ -2273,8 +1752,8 @@
         </p:nvSpPr>
         <p:spPr>
           <a:xfrm>
-            <a:off x="1097280" y="4343400"/>
-            <a:ext cx="9692640" cy="685800"/>
+            <a:off x="685800" y="4297680"/>
+            <a:ext cx="10698480" cy="502920"/>
           </a:xfrm>
           <a:prstGeom prst="roundRect">
             <a:avLst/>
@@ -2290,14 +1769,14 @@
           <a:p>
             <a:pPr algn="ctr"/>
             <a:r>
-              <a:rPr lang="ru-RU" sz="1900" b="0">
+              <a:rPr lang="ru-RU" sz="1400" b="0">
                 <a:solidFill>
                   <a:srgbClr val="5E6A75"/>
                 </a:solidFill>
                 <a:latin typeface="Aptos"/>
                 <a:cs typeface="Aptos"/>
               </a:rPr>
-              <a:t>Итог: проблема не декларативная — она воспроизводится на том же стенде и устраняется только при включенной межузловой доставке.</a:t>
+              <a:t>Один код, один сценарий — разница только в наличии межузлового канала.</a:t>
             </a:r>
           </a:p>
         </p:txBody>
@@ -2334,7 +1813,7 @@
                 <a:latin typeface="Aptos"/>
                 <a:cs typeface="Aptos"/>
               </a:rPr>
-              <a:t>ВКР · real-time scale-out · 06</a:t>
+              <a:t>Real-time scale-out · 06</a:t>
             </a:r>
           </a:p>
         </p:txBody>
@@ -2404,7 +1883,7 @@
                 <a:latin typeface="Aptos"/>
                 <a:cs typeface="Aptos"/>
               </a:rPr>
-              <a:t>Серийный прогон показывает повторяемость, а не разовый успех</a:t>
+              <a:t>Устойчивость: rejoin и failover</a:t>
             </a:r>
           </a:p>
         </p:txBody>
@@ -2417,8 +1896,75 @@
         </p:nvSpPr>
         <p:spPr>
           <a:xfrm>
-            <a:off x="777240" y="1417320"/>
-            <a:ext cx="2148840" cy="2011680"/>
+            <a:off x="685800" y="1600200"/>
+            <a:ext cx="5212080" cy="2286000"/>
+          </a:xfrm>
+          <a:prstGeom prst="roundRect">
+            <a:avLst/>
+          </a:prstGeom>
+          <a:solidFill>
+            <a:srgbClr val="FFFFFF"/>
+          </a:solidFill>
+          <a:ln w="12700">
+            <a:solidFill>
+              <a:srgbClr val="D7D2C7"/>
+            </a:solidFill>
+          </a:ln>
+        </p:spPr>
+        <p:txBody>
+          <a:bodyPr wrap="square" lIns="177800" tIns="177800" rIns="177800" bIns="177800"/>
+          <a:lstStyle/>
+          <a:p>
+            <a:pPr algn="l"/>
+            <a:r>
+              <a:rPr lang="ru-RU" sz="1500" b="0">
+                <a:solidFill>
+                  <a:srgbClr val="18212B"/>
+                </a:solidFill>
+                <a:latin typeface="Aptos"/>
+                <a:cs typeface="Aptos"/>
+              </a:rPr>
+              <a:t>Rejoin после разрыва</a:t>
+            </a:r>
+          </a:p>
+          <a:p>
+            <a:pPr algn="l"/>
+            <a:r>
+              <a:rPr lang="ru-RU" sz="1500" b="0">
+                <a:solidFill>
+                  <a:srgbClr val="18212B"/>
+                </a:solidFill>
+                <a:latin typeface="Aptos"/>
+                <a:cs typeface="Aptos"/>
+              </a:rPr>
+              <a:t>Новый connectionId, повторный JoinReportGroupAsync.</a:t>
+            </a:r>
+          </a:p>
+          <a:p>
+            <a:pPr algn="l"/>
+            <a:r>
+              <a:rPr lang="ru-RU" sz="1500" b="0">
+                <a:solidFill>
+                  <a:srgbClr val="18212B"/>
+                </a:solidFill>
+                <a:latin typeface="Aptos"/>
+                <a:cs typeface="Aptos"/>
+              </a:rPr>
+              <a:t>Событие после rejoin — 6,6 мс.</a:t>
+            </a:r>
+          </a:p>
+        </p:txBody>
+      </p:sp>
+      <p:sp>
+        <p:nvSpPr>
+          <p:cNvPr id="21" name="Shape 21"/>
+          <p:cNvSpPr txBox="1"/>
+          <p:nvPr/>
+        </p:nvSpPr>
+        <p:spPr>
+          <a:xfrm>
+            <a:off x="6172200" y="1600200"/>
+            <a:ext cx="5212080" cy="2286000"/>
           </a:xfrm>
           <a:prstGeom prst="roundRect">
             <a:avLst/>
@@ -2436,232 +1982,42 @@
           <a:bodyPr wrap="square" lIns="177800" tIns="177800" rIns="177800" bIns="177800"/>
           <a:lstStyle/>
           <a:p>
-            <a:pPr algn="ctr"/>
-            <a:r>
-              <a:rPr lang="ru-RU" sz="3000" b="1">
-                <a:solidFill>
-                  <a:srgbClr val="18212B"/>
-                </a:solidFill>
-                <a:latin typeface="Aptos"/>
-                <a:cs typeface="Aptos"/>
-              </a:rPr>
-              <a:t>5 / 5</a:t>
-            </a:r>
-          </a:p>
-          <a:p>
-            <a:pPr algn="ctr"/>
-            <a:r>
-              <a:rPr lang="ru-RU" sz="3000" b="1">
-                <a:solidFill>
-                  <a:srgbClr val="18212B"/>
-                </a:solidFill>
-                <a:latin typeface="Aptos"/>
-                <a:cs typeface="Aptos"/>
-              </a:rPr>
-              <a:t>успешно</a:t>
-            </a:r>
-          </a:p>
-        </p:txBody>
-      </p:sp>
-      <p:sp>
-        <p:nvSpPr>
-          <p:cNvPr id="21" name="Shape 21"/>
-          <p:cNvSpPr txBox="1"/>
-          <p:nvPr/>
-        </p:nvSpPr>
-        <p:spPr>
-          <a:xfrm>
-            <a:off x="3246120" y="1417320"/>
-            <a:ext cx="2148840" cy="2011680"/>
-          </a:xfrm>
-          <a:prstGeom prst="roundRect">
-            <a:avLst/>
-          </a:prstGeom>
-          <a:solidFill>
-            <a:srgbClr val="FFFFFF"/>
-          </a:solidFill>
-          <a:ln w="12700">
-            <a:solidFill>
-              <a:srgbClr val="D7D2C7"/>
-            </a:solidFill>
-          </a:ln>
-        </p:spPr>
-        <p:txBody>
-          <a:bodyPr wrap="square" lIns="177800" tIns="177800" rIns="177800" bIns="177800"/>
-          <a:lstStyle/>
-          <a:p>
-            <a:pPr algn="ctr"/>
-            <a:r>
-              <a:rPr lang="ru-RU" sz="3000" b="1">
-                <a:solidFill>
-                  <a:srgbClr val="18212B"/>
-                </a:solidFill>
-                <a:latin typeface="Aptos"/>
-                <a:cs typeface="Aptos"/>
-              </a:rPr>
-              <a:t>8,4 мс</a:t>
-            </a:r>
-          </a:p>
-          <a:p>
-            <a:pPr algn="ctr"/>
-            <a:r>
-              <a:rPr lang="ru-RU" sz="3000" b="1">
-                <a:solidFill>
-                  <a:srgbClr val="18212B"/>
-                </a:solidFill>
-                <a:latin typeface="Aptos"/>
-                <a:cs typeface="Aptos"/>
-              </a:rPr>
-              <a:t>avg</a:t>
-            </a:r>
-          </a:p>
-        </p:txBody>
-      </p:sp>
-      <p:sp>
-        <p:nvSpPr>
-          <p:cNvPr id="22" name="Shape 22"/>
-          <p:cNvSpPr txBox="1"/>
-          <p:nvPr/>
-        </p:nvSpPr>
-        <p:spPr>
-          <a:xfrm>
-            <a:off x="5715000" y="1417320"/>
-            <a:ext cx="2148840" cy="2011680"/>
-          </a:xfrm>
-          <a:prstGeom prst="roundRect">
-            <a:avLst/>
-          </a:prstGeom>
-          <a:solidFill>
-            <a:srgbClr val="FFFFFF"/>
-          </a:solidFill>
-          <a:ln w="12700">
-            <a:solidFill>
-              <a:srgbClr val="D7D2C7"/>
-            </a:solidFill>
-          </a:ln>
-        </p:spPr>
-        <p:txBody>
-          <a:bodyPr wrap="square" lIns="177800" tIns="177800" rIns="177800" bIns="177800"/>
-          <a:lstStyle/>
-          <a:p>
-            <a:pPr algn="ctr"/>
-            <a:r>
-              <a:rPr lang="ru-RU" sz="3000" b="1">
-                <a:solidFill>
-                  <a:srgbClr val="18212B"/>
-                </a:solidFill>
-                <a:latin typeface="Aptos"/>
-                <a:cs typeface="Aptos"/>
-              </a:rPr>
-              <a:t>9,1 мс</a:t>
-            </a:r>
-          </a:p>
-          <a:p>
-            <a:pPr algn="ctr"/>
-            <a:r>
-              <a:rPr lang="ru-RU" sz="3000" b="1">
-                <a:solidFill>
-                  <a:srgbClr val="18212B"/>
-                </a:solidFill>
-                <a:latin typeface="Aptos"/>
-                <a:cs typeface="Aptos"/>
-              </a:rPr>
-              <a:t>p50</a:t>
-            </a:r>
-          </a:p>
-        </p:txBody>
-      </p:sp>
-      <p:sp>
-        <p:nvSpPr>
-          <p:cNvPr id="23" name="Shape 23"/>
-          <p:cNvSpPr txBox="1"/>
-          <p:nvPr/>
-        </p:nvSpPr>
-        <p:spPr>
-          <a:xfrm>
-            <a:off x="8183880" y="1417320"/>
-            <a:ext cx="2148840" cy="2011680"/>
-          </a:xfrm>
-          <a:prstGeom prst="roundRect">
-            <a:avLst/>
-          </a:prstGeom>
-          <a:solidFill>
-            <a:srgbClr val="FFFFFF"/>
-          </a:solidFill>
-          <a:ln w="12700">
-            <a:solidFill>
-              <a:srgbClr val="D7D2C7"/>
-            </a:solidFill>
-          </a:ln>
-        </p:spPr>
-        <p:txBody>
-          <a:bodyPr wrap="square" lIns="177800" tIns="177800" rIns="177800" bIns="177800"/>
-          <a:lstStyle/>
-          <a:p>
-            <a:pPr algn="ctr"/>
-            <a:r>
-              <a:rPr lang="ru-RU" sz="3000" b="1">
-                <a:solidFill>
-                  <a:srgbClr val="18212B"/>
-                </a:solidFill>
-                <a:latin typeface="Aptos"/>
-                <a:cs typeface="Aptos"/>
-              </a:rPr>
-              <a:t>11,6 мс</a:t>
-            </a:r>
-          </a:p>
-          <a:p>
-            <a:pPr algn="ctr"/>
-            <a:r>
-              <a:rPr lang="ru-RU" sz="3000" b="1">
-                <a:solidFill>
-                  <a:srgbClr val="18212B"/>
-                </a:solidFill>
-                <a:latin typeface="Aptos"/>
-                <a:cs typeface="Aptos"/>
-              </a:rPr>
-              <a:t>p95</a:t>
-            </a:r>
-          </a:p>
-        </p:txBody>
-      </p:sp>
-      <p:sp>
-        <p:nvSpPr>
-          <p:cNvPr id="24" name="Shape 24"/>
-          <p:cNvSpPr txBox="1"/>
-          <p:nvPr/>
-        </p:nvSpPr>
-        <p:spPr>
-          <a:xfrm>
-            <a:off x="1097280" y="4069080"/>
-            <a:ext cx="9601200" cy="822960"/>
-          </a:xfrm>
-          <a:prstGeom prst="roundRect">
-            <a:avLst/>
-          </a:prstGeom>
-          <a:solidFill>
-            <a:srgbClr val="FFF3D8"/>
-          </a:solidFill>
-          <a:ln w="12700">
-            <a:solidFill>
-              <a:srgbClr val="C76F2E"/>
-            </a:solidFill>
-          </a:ln>
-        </p:spPr>
-        <p:txBody>
-          <a:bodyPr wrap="square" lIns="177800" tIns="177800" rIns="177800" bIns="177800"/>
-          <a:lstStyle/>
-          <a:p>
-            <a:pPr algn="ctr"/>
-            <a:r>
-              <a:rPr lang="ru-RU" sz="1900" b="0">
-                <a:solidFill>
-                  <a:srgbClr val="18212B"/>
-                </a:solidFill>
-                <a:latin typeface="Aptos"/>
-                <a:cs typeface="Aptos"/>
-              </a:rPr>
-              <a:t>Локальный короткий прогон не является нагрузочным тестом, но доказывает повторяемость ключевого свойства.</a:t>
+            <a:pPr algn="l"/>
+            <a:r>
+              <a:rPr lang="ru-RU" sz="1500" b="0">
+                <a:solidFill>
+                  <a:srgbClr val="18212B"/>
+                </a:solidFill>
+                <a:latin typeface="Aptos"/>
+                <a:cs typeface="Aptos"/>
+              </a:rPr>
+              <a:t>Failover узла</a:t>
+            </a:r>
+          </a:p>
+          <a:p>
+            <a:pPr algn="l"/>
+            <a:r>
+              <a:rPr lang="ru-RU" sz="1500" b="0">
+                <a:solidFill>
+                  <a:srgbClr val="18212B"/>
+                </a:solidFill>
+                <a:latin typeface="Aptos"/>
+                <a:cs typeface="Aptos"/>
+              </a:rPr>
+              <a:t>Клиент переподключился через nginx с app-api-2 на app-api-1.</a:t>
+            </a:r>
+          </a:p>
+          <a:p>
+            <a:pPr algn="l"/>
+            <a:r>
+              <a:rPr lang="ru-RU" sz="1500" b="0">
+                <a:solidFill>
+                  <a:srgbClr val="18212B"/>
+                </a:solidFill>
+                <a:latin typeface="Aptos"/>
+                <a:cs typeface="Aptos"/>
+              </a:rPr>
+              <a:t>reconnect + rejoin — 240,3 мс.</a:t>
             </a:r>
           </a:p>
         </p:txBody>
@@ -2698,7 +2054,7 @@
                 <a:latin typeface="Aptos"/>
                 <a:cs typeface="Aptos"/>
               </a:rPr>
-              <a:t>ВКР · real-time scale-out · 07</a:t>
+              <a:t>Real-time scale-out · 07</a:t>
             </a:r>
           </a:p>
         </p:txBody>
@@ -2768,7 +2124,7 @@
                 <a:latin typeface="Aptos"/>
                 <a:cs typeface="Aptos"/>
               </a:rPr>
-              <a:t>Устойчивость: подписка восстанавливается после разрыва и отказа узла</a:t>
+              <a:t>Вывод</a:t>
             </a:r>
           </a:p>
         </p:txBody>
@@ -2781,8 +2137,49 @@
         </p:nvSpPr>
         <p:spPr>
           <a:xfrm>
-            <a:off x="777240" y="1417320"/>
-            <a:ext cx="4937760" cy="2286000"/>
+            <a:off x="685800" y="1691640"/>
+            <a:ext cx="10698480" cy="1280160"/>
+          </a:xfrm>
+          <a:prstGeom prst="roundRect">
+            <a:avLst/>
+          </a:prstGeom>
+          <a:solidFill>
+            <a:srgbClr val="E8F3F1"/>
+          </a:solidFill>
+          <a:ln w="12700">
+            <a:solidFill>
+              <a:srgbClr val="0B6E69"/>
+            </a:solidFill>
+          </a:ln>
+        </p:spPr>
+        <p:txBody>
+          <a:bodyPr wrap="square" lIns="177800" tIns="177800" rIns="177800" bIns="177800"/>
+          <a:lstStyle/>
+          <a:p>
+            <a:pPr algn="ctr"/>
+            <a:r>
+              <a:rPr lang="ru-RU" sz="2000" b="1">
+                <a:solidFill>
+                  <a:srgbClr val="18212B"/>
+                </a:solidFill>
+                <a:latin typeface="Aptos"/>
+                <a:cs typeface="Aptos"/>
+              </a:rPr>
+              <a:t>Ограничение single-node WebSocket-архитектуры устранено за счёт распределённого real-time контура.</a:t>
+            </a:r>
+          </a:p>
+        </p:txBody>
+      </p:sp>
+      <p:sp>
+        <p:nvSpPr>
+          <p:cNvPr id="21" name="Shape 21"/>
+          <p:cNvSpPr txBox="1"/>
+          <p:nvPr/>
+        </p:nvSpPr>
+        <p:spPr>
+          <a:xfrm>
+            <a:off x="685800" y="3246120"/>
+            <a:ext cx="3383280" cy="1554480"/>
           </a:xfrm>
           <a:prstGeom prst="roundRect">
             <a:avLst/>
@@ -2802,133 +2199,27 @@
           <a:p>
             <a:pPr algn="l"/>
             <a:r>
-              <a:rPr lang="ru-RU" sz="2000" b="1">
-                <a:solidFill>
-                  <a:srgbClr val="18212B"/>
-                </a:solidFill>
-                <a:latin typeface="Aptos"/>
-                <a:cs typeface="Aptos"/>
-              </a:rPr>
-              <a:t>Rejoin после разрыва</a:t>
-            </a:r>
-          </a:p>
-          <a:p>
-            <a:pPr algn="l"/>
-            <a:r>
-              <a:rPr lang="ru-RU" sz="2000" b="1">
-                <a:solidFill>
-                  <a:srgbClr val="18212B"/>
-                </a:solidFill>
-                <a:latin typeface="Aptos"/>
-                <a:cs typeface="Aptos"/>
-              </a:rPr>
-              <a:t>Новый connectionId</a:t>
-            </a:r>
-          </a:p>
-          <a:p>
-            <a:pPr algn="l"/>
-            <a:r>
-              <a:rPr lang="ru-RU" sz="2000" b="1">
-                <a:solidFill>
-                  <a:srgbClr val="18212B"/>
-                </a:solidFill>
-                <a:latin typeface="Aptos"/>
-                <a:cs typeface="Aptos"/>
-              </a:rPr>
-              <a:t>Повторный JoinReportGroupAsync</a:t>
-            </a:r>
-          </a:p>
-          <a:p>
-            <a:pPr algn="l"/>
-            <a:r>
-              <a:rPr lang="ru-RU" sz="2000" b="1">
-                <a:solidFill>
-                  <a:srgbClr val="18212B"/>
-                </a:solidFill>
-                <a:latin typeface="Aptos"/>
-                <a:cs typeface="Aptos"/>
-              </a:rPr>
-              <a:t>Событие после rejoin: 6,6 мс</a:t>
-            </a:r>
-          </a:p>
-        </p:txBody>
-      </p:sp>
-      <p:sp>
-        <p:nvSpPr>
-          <p:cNvPr id="21" name="Shape 21"/>
-          <p:cNvSpPr txBox="1"/>
-          <p:nvPr/>
-        </p:nvSpPr>
-        <p:spPr>
-          <a:xfrm>
-            <a:off x="5989320" y="1417320"/>
-            <a:ext cx="4937760" cy="2286000"/>
-          </a:xfrm>
-          <a:prstGeom prst="roundRect">
-            <a:avLst/>
-          </a:prstGeom>
-          <a:solidFill>
-            <a:srgbClr val="E8F3F1"/>
-          </a:solidFill>
-          <a:ln w="12700">
-            <a:solidFill>
-              <a:srgbClr val="0B6E69"/>
-            </a:solidFill>
-          </a:ln>
-        </p:spPr>
-        <p:txBody>
-          <a:bodyPr wrap="square" lIns="177800" tIns="177800" rIns="177800" bIns="177800"/>
-          <a:lstStyle/>
-          <a:p>
-            <a:pPr algn="l"/>
-            <a:r>
-              <a:rPr lang="ru-RU" sz="1900" b="1">
-                <a:solidFill>
-                  <a:srgbClr val="18212B"/>
-                </a:solidFill>
-                <a:latin typeface="Aptos"/>
-                <a:cs typeface="Aptos"/>
-              </a:rPr>
-              <a:t>Failover app-api-2</a:t>
-            </a:r>
-          </a:p>
-          <a:p>
-            <a:pPr algn="l"/>
-            <a:r>
-              <a:rPr lang="ru-RU" sz="1900" b="1">
-                <a:solidFill>
-                  <a:srgbClr val="18212B"/>
-                </a:solidFill>
-                <a:latin typeface="Aptos"/>
-                <a:cs typeface="Aptos"/>
-              </a:rPr>
-              <a:t>Клиент через nginx перешел app-api-2 → app-api-1</a:t>
-            </a:r>
-          </a:p>
-          <a:p>
-            <a:pPr algn="l"/>
-            <a:r>
-              <a:rPr lang="ru-RU" sz="1900" b="1">
-                <a:solidFill>
-                  <a:srgbClr val="18212B"/>
-                </a:solidFill>
-                <a:latin typeface="Aptos"/>
-                <a:cs typeface="Aptos"/>
-              </a:rPr>
-              <a:t>reconnect + rejoin: 240,3 мс</a:t>
-            </a:r>
-          </a:p>
-          <a:p>
-            <a:pPr algn="l"/>
-            <a:r>
-              <a:rPr lang="ru-RU" sz="1900" b="1">
-                <a:solidFill>
-                  <a:srgbClr val="18212B"/>
-                </a:solidFill>
-                <a:latin typeface="Aptos"/>
-                <a:cs typeface="Aptos"/>
-              </a:rPr>
-              <a:t>следующее событие получено</a:t>
+              <a:rPr lang="ru-RU" sz="1400" b="1">
+                <a:solidFill>
+                  <a:srgbClr val="18212B"/>
+                </a:solidFill>
+                <a:latin typeface="Aptos"/>
+                <a:cs typeface="Aptos"/>
+              </a:rPr>
+              <a:t>Проблема</a:t>
+            </a:r>
+          </a:p>
+          <a:p>
+            <a:pPr algn="l"/>
+            <a:r>
+              <a:rPr lang="ru-RU" sz="1400" b="1">
+                <a:solidFill>
+                  <a:srgbClr val="18212B"/>
+                </a:solidFill>
+                <a:latin typeface="Aptos"/>
+                <a:cs typeface="Aptos"/>
+              </a:rPr>
+              <a:t>Без backplane событие теряется между узлами.</a:t>
             </a:r>
           </a:p>
         </p:txBody>
@@ -2941,152 +2232,8 @@
         </p:nvSpPr>
         <p:spPr>
           <a:xfrm>
-            <a:off x="1005840" y="4343400"/>
-            <a:ext cx="9875520" cy="594360"/>
-          </a:xfrm>
-          <a:prstGeom prst="roundRect">
-            <a:avLst/>
-          </a:prstGeom>
-          <a:noFill/>
-          <a:ln>
-            <a:noFill/>
-          </a:ln>
-        </p:spPr>
-        <p:txBody>
-          <a:bodyPr wrap="square" lIns="177800" tIns="177800" rIns="177800" bIns="177800"/>
-          <a:lstStyle/>
-          <a:p>
-            <a:pPr algn="ctr"/>
-            <a:r>
-              <a:rPr lang="ru-RU" sz="1700" b="0">
-                <a:solidFill>
-                  <a:srgbClr val="5E6A75"/>
-                </a:solidFill>
-                <a:latin typeface="Aptos"/>
-                <a:cs typeface="Aptos"/>
-              </a:rPr>
-              <a:t>Для WebSocket-only проверки через nginx используется skipNegotiation, чтобы не зависеть от sticky sessions на этапе negotiate.</a:t>
-            </a:r>
-          </a:p>
-        </p:txBody>
-      </p:sp>
-      <p:sp>
-        <p:nvSpPr>
-          <p:cNvPr id="900" name="Shape 900"/>
-          <p:cNvSpPr txBox="1"/>
-          <p:nvPr/>
-        </p:nvSpPr>
-        <p:spPr>
-          <a:xfrm>
-            <a:off x="594360" y="6510528"/>
-            <a:ext cx="10972800" cy="201168"/>
-          </a:xfrm>
-          <a:prstGeom prst="roundRect">
-            <a:avLst/>
-          </a:prstGeom>
-          <a:noFill/>
-          <a:ln>
-            <a:noFill/>
-          </a:ln>
-        </p:spPr>
-        <p:txBody>
-          <a:bodyPr wrap="square" lIns="177800" tIns="177800" rIns="177800" bIns="177800"/>
-          <a:lstStyle/>
-          <a:p>
-            <a:pPr algn="l"/>
-            <a:r>
-              <a:rPr lang="ru-RU" sz="800" b="0">
-                <a:solidFill>
-                  <a:srgbClr val="5E6A75"/>
-                </a:solidFill>
-                <a:latin typeface="Aptos"/>
-                <a:cs typeface="Aptos"/>
-              </a:rPr>
-              <a:t>ВКР · real-time scale-out · 08</a:t>
-            </a:r>
-          </a:p>
-        </p:txBody>
-      </p:sp>
-    </p:spTree>
-  </p:cSld>
-  <p:clrMapOvr>
-    <a:masterClrMapping/>
-  </p:clrMapOvr>
-</p:sld>
-</file>
-
-<file path=ppt/slides/slide9.xml><?xml version="1.0" encoding="utf-8"?>
-<p:sld xmlns:a="http://schemas.openxmlformats.org/drawingml/2006/main" xmlns:r="http://schemas.openxmlformats.org/officeDocument/2006/relationships" xmlns:p="http://schemas.openxmlformats.org/presentationml/2006/main">
-  <p:cSld>
-    <p:bg>
-      <p:bgPr>
-        <a:solidFill>
-          <a:srgbClr val="F6F3EC"/>
-        </a:solidFill>
-        <a:effectLst/>
-      </p:bgPr>
-    </p:bg>
-    <p:spTree>
-      <p:nvGrpSpPr>
-        <p:cNvPr id="1" name=""/>
-        <p:cNvGrpSpPr/>
-        <p:nvPr/>
-      </p:nvGrpSpPr>
-      <p:grpSpPr>
-        <a:xfrm>
-          <a:off x="0" y="0"/>
-          <a:ext cx="0" cy="0"/>
-          <a:chOff x="0" y="0"/>
-          <a:chExt cx="0" cy="0"/>
-        </a:xfrm>
-      </p:grpSpPr>
-      <p:sp>
-        <p:nvSpPr>
-          <p:cNvPr id="10" name="Shape 10"/>
-          <p:cNvSpPr txBox="1"/>
-          <p:nvPr/>
-        </p:nvSpPr>
-        <p:spPr>
-          <a:xfrm>
-            <a:off x="594360" y="411480"/>
-            <a:ext cx="10881360" cy="658368"/>
-          </a:xfrm>
-          <a:prstGeom prst="roundRect">
-            <a:avLst/>
-          </a:prstGeom>
-          <a:noFill/>
-          <a:ln>
-            <a:noFill/>
-          </a:ln>
-        </p:spPr>
-        <p:txBody>
-          <a:bodyPr wrap="square" lIns="177800" tIns="177800" rIns="177800" bIns="177800"/>
-          <a:lstStyle/>
-          <a:p>
-            <a:pPr algn="l"/>
-            <a:r>
-              <a:rPr lang="ru-RU" sz="3000" b="1">
-                <a:solidFill>
-                  <a:srgbClr val="18212B"/>
-                </a:solidFill>
-                <a:latin typeface="Aptos"/>
-                <a:cs typeface="Aptos"/>
-              </a:rPr>
-              <a:t>Что это дает системе отслеживания задач</a:t>
-            </a:r>
-          </a:p>
-        </p:txBody>
-      </p:sp>
-      <p:sp>
-        <p:nvSpPr>
-          <p:cNvPr id="20" name="Shape 20"/>
-          <p:cNvSpPr txBox="1"/>
-          <p:nvPr/>
-        </p:nvSpPr>
-        <p:spPr>
-          <a:xfrm>
-            <a:off x="731520" y="1325880"/>
-            <a:ext cx="3246120" cy="2971800"/>
+            <a:off x="4251960" y="3246120"/>
+            <a:ext cx="3383280" cy="1554480"/>
           </a:xfrm>
           <a:prstGeom prst="roundRect">
             <a:avLst/>
@@ -3106,41 +2253,41 @@
           <a:p>
             <a:pPr algn="l"/>
             <a:r>
-              <a:rPr lang="ru-RU" sz="1900" b="1">
-                <a:solidFill>
-                  <a:srgbClr val="18212B"/>
-                </a:solidFill>
-                <a:latin typeface="Aptos"/>
-                <a:cs typeface="Aptos"/>
-              </a:rPr>
-              <a:t>Масштабирование</a:t>
-            </a:r>
-          </a:p>
-          <a:p>
-            <a:pPr algn="l"/>
-            <a:r>
-              <a:rPr lang="ru-RU" sz="1900" b="1">
-                <a:solidFill>
-                  <a:srgbClr val="18212B"/>
-                </a:solidFill>
-                <a:latin typeface="Aptos"/>
-                <a:cs typeface="Aptos"/>
-              </a:rPr>
-              <a:t>Можно запускать несколько backend-экземпляров без фрагментации real-time пространства.</a:t>
-            </a:r>
-          </a:p>
-        </p:txBody>
-      </p:sp>
-      <p:sp>
-        <p:nvSpPr>
-          <p:cNvPr id="21" name="Shape 21"/>
-          <p:cNvSpPr txBox="1"/>
-          <p:nvPr/>
-        </p:nvSpPr>
-        <p:spPr>
-          <a:xfrm>
-            <a:off x="4343400" y="1325880"/>
-            <a:ext cx="3246120" cy="2971800"/>
+              <a:rPr lang="ru-RU" sz="1400" b="1">
+                <a:solidFill>
+                  <a:srgbClr val="18212B"/>
+                </a:solidFill>
+                <a:latin typeface="Aptos"/>
+                <a:cs typeface="Aptos"/>
+              </a:rPr>
+              <a:t>Решение</a:t>
+            </a:r>
+          </a:p>
+          <a:p>
+            <a:pPr algn="l"/>
+            <a:r>
+              <a:rPr lang="ru-RU" sz="1400" b="1">
+                <a:solidFill>
+                  <a:srgbClr val="18212B"/>
+                </a:solidFill>
+                <a:latin typeface="Aptos"/>
+                <a:cs typeface="Aptos"/>
+              </a:rPr>
+              <a:t>SignalR + Redis backplane + nginx + два app-api.</a:t>
+            </a:r>
+          </a:p>
+        </p:txBody>
+      </p:sp>
+      <p:sp>
+        <p:nvSpPr>
+          <p:cNvPr id="23" name="Shape 23"/>
+          <p:cNvSpPr txBox="1"/>
+          <p:nvPr/>
+        </p:nvSpPr>
+        <p:spPr>
+          <a:xfrm>
+            <a:off x="7818120" y="3246120"/>
+            <a:ext cx="3383280" cy="1554480"/>
           </a:xfrm>
           <a:prstGeom prst="roundRect">
             <a:avLst/>
@@ -3160,95 +2307,41 @@
           <a:p>
             <a:pPr algn="l"/>
             <a:r>
-              <a:rPr lang="ru-RU" sz="1900" b="1">
-                <a:solidFill>
-                  <a:srgbClr val="18212B"/>
-                </a:solidFill>
-                <a:latin typeface="Aptos"/>
-                <a:cs typeface="Aptos"/>
-              </a:rPr>
-              <a:t>Наблюдаемость</a:t>
-            </a:r>
-          </a:p>
-          <a:p>
-            <a:pPr algn="l"/>
-            <a:r>
-              <a:rPr lang="ru-RU" sz="1900" b="1">
-                <a:solidFill>
-                  <a:srgbClr val="18212B"/>
-                </a:solidFill>
-                <a:latin typeface="Aptos"/>
-                <a:cs typeface="Aptos"/>
-              </a:rPr>
-              <a:t>serverInstanceId и connectionId превращают демонстрацию в проверяемый эксперимент.</a:t>
-            </a:r>
-          </a:p>
-        </p:txBody>
-      </p:sp>
-      <p:sp>
-        <p:nvSpPr>
-          <p:cNvPr id="22" name="Shape 22"/>
-          <p:cNvSpPr txBox="1"/>
-          <p:nvPr/>
-        </p:nvSpPr>
-        <p:spPr>
-          <a:xfrm>
-            <a:off x="7955280" y="1325880"/>
-            <a:ext cx="3246120" cy="2971800"/>
-          </a:xfrm>
-          <a:prstGeom prst="roundRect">
-            <a:avLst/>
-          </a:prstGeom>
-          <a:solidFill>
-            <a:srgbClr val="FFFFFF"/>
-          </a:solidFill>
-          <a:ln w="12700">
-            <a:solidFill>
-              <a:srgbClr val="D7D2C7"/>
-            </a:solidFill>
-          </a:ln>
-        </p:spPr>
-        <p:txBody>
-          <a:bodyPr wrap="square" lIns="177800" tIns="177800" rIns="177800" bIns="177800"/>
-          <a:lstStyle/>
-          <a:p>
-            <a:pPr algn="l"/>
-            <a:r>
-              <a:rPr lang="ru-RU" sz="1900" b="1">
-                <a:solidFill>
-                  <a:srgbClr val="18212B"/>
-                </a:solidFill>
-                <a:latin typeface="Aptos"/>
-                <a:cs typeface="Aptos"/>
-              </a:rPr>
-              <a:t>Воспроизводимость</a:t>
-            </a:r>
-          </a:p>
-          <a:p>
-            <a:pPr algn="l"/>
-            <a:r>
-              <a:rPr lang="ru-RU" sz="1900" b="1">
-                <a:solidFill>
-                  <a:srgbClr val="18212B"/>
-                </a:solidFill>
-                <a:latin typeface="Aptos"/>
-                <a:cs typeface="Aptos"/>
-              </a:rPr>
-              <a:t>Compose-стенд, override без backplane и Node.js-клиент фиксируют результат.</a:t>
-            </a:r>
-          </a:p>
-        </p:txBody>
-      </p:sp>
-      <p:sp>
-        <p:nvSpPr>
-          <p:cNvPr id="23" name="Shape 23"/>
-          <p:cNvSpPr txBox="1"/>
-          <p:nvPr/>
-        </p:nvSpPr>
-        <p:spPr>
-          <a:xfrm>
-            <a:off x="1005840" y="4800600"/>
-            <a:ext cx="10058400" cy="457200"/>
+              <a:rPr lang="ru-RU" sz="1400" b="1">
+                <a:solidFill>
+                  <a:srgbClr val="18212B"/>
+                </a:solidFill>
+                <a:latin typeface="Aptos"/>
+                <a:cs typeface="Aptos"/>
+              </a:rPr>
+              <a:t>Доказательство</a:t>
+            </a:r>
+          </a:p>
+          <a:p>
+            <a:pPr algn="l"/>
+            <a:r>
+              <a:rPr lang="ru-RU" sz="1400" b="1">
+                <a:solidFill>
+                  <a:srgbClr val="18212B"/>
+                </a:solidFill>
+                <a:latin typeface="Aptos"/>
+                <a:cs typeface="Aptos"/>
+              </a:rPr>
+              <a:t>Delivery, серия, rejoin, failover.</a:t>
+            </a:r>
+          </a:p>
+        </p:txBody>
+      </p:sp>
+      <p:sp>
+        <p:nvSpPr>
+          <p:cNvPr id="900" name="Shape 900"/>
+          <p:cNvSpPr txBox="1"/>
+          <p:nvPr/>
+        </p:nvSpPr>
+        <p:spPr>
+          <a:xfrm>
+            <a:off x="594360" y="6510528"/>
+            <a:ext cx="10972800" cy="201168"/>
           </a:xfrm>
           <a:prstGeom prst="roundRect">
             <a:avLst/>
@@ -3262,53 +2355,16 @@
           <a:bodyPr wrap="square" lIns="177800" tIns="177800" rIns="177800" bIns="177800"/>
           <a:lstStyle/>
           <a:p>
-            <a:pPr algn="ctr"/>
-            <a:r>
-              <a:rPr lang="ru-RU" sz="1700" b="0">
+            <a:pPr algn="l"/>
+            <a:r>
+              <a:rPr lang="ru-RU" sz="800" b="0">
                 <a:solidFill>
                   <a:srgbClr val="5E6A75"/>
                 </a:solidFill>
                 <a:latin typeface="Aptos"/>
                 <a:cs typeface="Aptos"/>
               </a:rPr>
-              <a:t>Следующий промышленный шаг: длинная серия, больше клиентов, p99, поведение при недоступности Redis.</a:t>
-            </a:r>
-          </a:p>
-        </p:txBody>
-      </p:sp>
-      <p:sp>
-        <p:nvSpPr>
-          <p:cNvPr id="900" name="Shape 900"/>
-          <p:cNvSpPr txBox="1"/>
-          <p:nvPr/>
-        </p:nvSpPr>
-        <p:spPr>
-          <a:xfrm>
-            <a:off x="594360" y="6510528"/>
-            <a:ext cx="10972800" cy="201168"/>
-          </a:xfrm>
-          <a:prstGeom prst="roundRect">
-            <a:avLst/>
-          </a:prstGeom>
-          <a:noFill/>
-          <a:ln>
-            <a:noFill/>
-          </a:ln>
-        </p:spPr>
-        <p:txBody>
-          <a:bodyPr wrap="square" lIns="177800" tIns="177800" rIns="177800" bIns="177800"/>
-          <a:lstStyle/>
-          <a:p>
-            <a:pPr algn="l"/>
-            <a:r>
-              <a:rPr lang="ru-RU" sz="800" b="0">
-                <a:solidFill>
-                  <a:srgbClr val="5E6A75"/>
-                </a:solidFill>
-                <a:latin typeface="Aptos"/>
-                <a:cs typeface="Aptos"/>
-              </a:rPr>
-              <a:t>ВКР · real-time scale-out · 09</a:t>
+              <a:t>Real-time scale-out · 08</a:t>
             </a:r>
           </a:p>
         </p:txBody>

--- a/build/pptx/vkr-defense-draft.pptx
+++ b/build/pptx/vkr-defense-draft.pptx
@@ -13,6 +13,7 @@
     <p:sldId id="261" r:id="rId7"/>
     <p:sldId id="262" r:id="rId8"/>
     <p:sldId id="263" r:id="rId9"/>
+    <p:sldId id="264" r:id="rId10"/>
   </p:sldIdLst>
   <p:sldSz cx="12192000" cy="6858000" type="wide"/>
   <p:notesSz cx="6858000" cy="9144000"/>
@@ -384,7 +385,44 @@
                 <a:latin typeface="Aptos"/>
                 <a:cs typeface="Aptos"/>
               </a:rPr>
-              <a:t>Проблема: single-node SignalR теряет события между узлами</a:t>
+              <a:t>Проблема и цель</a:t>
+            </a:r>
+          </a:p>
+        </p:txBody>
+      </p:sp>
+      <p:sp>
+        <p:nvSpPr>
+          <p:cNvPr id="11" name="Shape 11"/>
+          <p:cNvSpPr txBox="1"/>
+          <p:nvPr/>
+        </p:nvSpPr>
+        <p:spPr>
+          <a:xfrm>
+            <a:off x="621792" y="987552"/>
+            <a:ext cx="9875520" cy="320040"/>
+          </a:xfrm>
+          <a:prstGeom prst="roundRect">
+            <a:avLst/>
+          </a:prstGeom>
+          <a:noFill/>
+          <a:ln>
+            <a:noFill/>
+          </a:ln>
+        </p:spPr>
+        <p:txBody>
+          <a:bodyPr wrap="square" lIns="177800" tIns="177800" rIns="177800" bIns="177800"/>
+          <a:lstStyle/>
+          <a:p>
+            <a:pPr algn="l"/>
+            <a:r>
+              <a:rPr lang="ru-RU" sz="1300" b="0">
+                <a:solidFill>
+                  <a:srgbClr val="5E6A75"/>
+                </a:solidFill>
+                <a:latin typeface="Aptos"/>
+                <a:cs typeface="Aptos"/>
+              </a:rPr>
+              <a:t>Single-node SignalR ограничивает горизонтальное масштабирование</a:t>
             </a:r>
           </a:p>
         </p:txBody>
@@ -397,8 +435,8 @@
         </p:nvSpPr>
         <p:spPr>
           <a:xfrm>
-            <a:off x="685800" y="1554480"/>
-            <a:ext cx="5212080" cy="2377440"/>
+            <a:off x="685800" y="1508760"/>
+            <a:ext cx="5349240" cy="4206240"/>
           </a:xfrm>
           <a:prstGeom prst="roundRect">
             <a:avLst/>
@@ -418,40 +456,92 @@
           <a:p>
             <a:pPr algn="l"/>
             <a:r>
-              <a:rPr lang="ru-RU" sz="1800" b="0">
-                <a:solidFill>
-                  <a:srgbClr val="18212B"/>
-                </a:solidFill>
-                <a:latin typeface="Aptos"/>
-                <a:cs typeface="Aptos"/>
-              </a:rPr>
-              <a:t>Без межузлового канала</a:t>
-            </a:r>
-          </a:p>
-          <a:p>
-            <a:pPr algn="l"/>
-            <a:r>
-              <a:rPr lang="ru-RU" sz="1800" b="0">
-                <a:solidFill>
-                  <a:srgbClr val="18212B"/>
-                </a:solidFill>
-                <a:latin typeface="Aptos"/>
-                <a:cs typeface="Aptos"/>
-              </a:rPr>
-              <a:t>Каждый экземпляр знает только своих клиентов.</a:t>
-            </a:r>
-          </a:p>
-          <a:p>
-            <a:pPr algn="l"/>
-            <a:r>
-              <a:rPr lang="ru-RU" sz="1800" b="0">
-                <a:solidFill>
-                  <a:srgbClr val="18212B"/>
-                </a:solidFill>
-                <a:latin typeface="Aptos"/>
-                <a:cs typeface="Aptos"/>
-              </a:rPr>
-              <a:t>Событие, созданное на одном узле, не доходит до клиента на другом.</a:t>
+              <a:rPr lang="ru-RU" sz="1600" b="0">
+                <a:solidFill>
+                  <a:srgbClr val="18212B"/>
+                </a:solidFill>
+                <a:latin typeface="Aptos"/>
+                <a:cs typeface="Aptos"/>
+              </a:rPr>
+              <a:t>Проблема</a:t>
+            </a:r>
+          </a:p>
+          <a:p>
+            <a:pPr algn="l"/>
+            <a:r>
+              <a:rPr lang="ru-RU" sz="1600" b="0">
+                <a:solidFill>
+                  <a:srgbClr val="18212B"/>
+                </a:solidFill>
+                <a:latin typeface="Aptos"/>
+                <a:cs typeface="Aptos"/>
+              </a:rPr>
+              <a:t/>
+            </a:r>
+          </a:p>
+          <a:p>
+            <a:pPr algn="l"/>
+            <a:r>
+              <a:rPr lang="ru-RU" sz="1600" b="0">
+                <a:solidFill>
+                  <a:srgbClr val="18212B"/>
+                </a:solidFill>
+                <a:latin typeface="Aptos"/>
+                <a:cs typeface="Aptos"/>
+              </a:rPr>
+              <a:t>Сведения о подключениях и группах SignalR хранятся в памяти процесса.</a:t>
+            </a:r>
+          </a:p>
+          <a:p>
+            <a:pPr algn="l"/>
+            <a:r>
+              <a:rPr lang="ru-RU" sz="1600" b="0">
+                <a:solidFill>
+                  <a:srgbClr val="18212B"/>
+                </a:solidFill>
+                <a:latin typeface="Aptos"/>
+                <a:cs typeface="Aptos"/>
+              </a:rPr>
+              <a:t/>
+            </a:r>
+          </a:p>
+          <a:p>
+            <a:pPr algn="l"/>
+            <a:r>
+              <a:rPr lang="ru-RU" sz="1600" b="0">
+                <a:solidFill>
+                  <a:srgbClr val="18212B"/>
+                </a:solidFill>
+                <a:latin typeface="Aptos"/>
+                <a:cs typeface="Aptos"/>
+              </a:rPr>
+              <a:t>При нескольких экземплярах backend событие, созданное на одном узле, не доходит до клиента, подключенного к другому узлу.</a:t>
+            </a:r>
+          </a:p>
+          <a:p>
+            <a:pPr algn="l"/>
+            <a:r>
+              <a:rPr lang="ru-RU" sz="1600" b="0">
+                <a:solidFill>
+                  <a:srgbClr val="18212B"/>
+                </a:solidFill>
+                <a:latin typeface="Aptos"/>
+                <a:cs typeface="Aptos"/>
+              </a:rPr>
+              <a:t/>
+            </a:r>
+          </a:p>
+          <a:p>
+            <a:pPr algn="l"/>
+            <a:r>
+              <a:rPr lang="ru-RU" sz="1600" b="0">
+                <a:solidFill>
+                  <a:srgbClr val="18212B"/>
+                </a:solidFill>
+                <a:latin typeface="Aptos"/>
+                <a:cs typeface="Aptos"/>
+              </a:rPr>
+              <a:t>Real-time пространство фрагментируется на независимые острова.</a:t>
             </a:r>
           </a:p>
         </p:txBody>
@@ -464,8 +554,8 @@
         </p:nvSpPr>
         <p:spPr>
           <a:xfrm>
-            <a:off x="6172200" y="1554480"/>
-            <a:ext cx="5212080" cy="2377440"/>
+            <a:off x="6172200" y="1508760"/>
+            <a:ext cx="5349240" cy="4206240"/>
           </a:xfrm>
           <a:prstGeom prst="roundRect">
             <a:avLst/>
@@ -485,7 +575,7 @@
           <a:p>
             <a:pPr algn="l"/>
             <a:r>
-              <a:rPr lang="ru-RU" sz="1800" b="1">
+              <a:rPr lang="ru-RU" sz="1600" b="1">
                 <a:solidFill>
                   <a:srgbClr val="18212B"/>
                 </a:solidFill>
@@ -498,14 +588,27 @@
           <a:p>
             <a:pPr algn="l"/>
             <a:r>
-              <a:rPr lang="ru-RU" sz="1800" b="1">
-                <a:solidFill>
-                  <a:srgbClr val="18212B"/>
-                </a:solidFill>
-                <a:latin typeface="Aptos"/>
-                <a:cs typeface="Aptos"/>
-              </a:rPr>
-              <a:t>Восстановить корректную доставку событий между клиентами, подключенными к разным экземплярам backend-сервиса.</a:t>
+              <a:rPr lang="ru-RU" sz="1600" b="1">
+                <a:solidFill>
+                  <a:srgbClr val="18212B"/>
+                </a:solidFill>
+                <a:latin typeface="Aptos"/>
+                <a:cs typeface="Aptos"/>
+              </a:rPr>
+              <a:t/>
+            </a:r>
+          </a:p>
+          <a:p>
+            <a:pPr algn="l"/>
+            <a:r>
+              <a:rPr lang="ru-RU" sz="1600" b="1">
+                <a:solidFill>
+                  <a:srgbClr val="18212B"/>
+                </a:solidFill>
+                <a:latin typeface="Aptos"/>
+                <a:cs typeface="Aptos"/>
+              </a:rPr>
+              <a:t>Real-time интерфейс системы отслеживания задач, в котором WebSocket-соединения обслуживаются несколькими экземплярами app-api, а события об изменении сущностей доставляются клиентам независимо от узла подключения.</a:t>
             </a:r>
           </a:p>
         </p:txBody>
@@ -612,7 +715,44 @@
                 <a:latin typeface="Aptos"/>
                 <a:cs typeface="Aptos"/>
               </a:rPr>
-              <a:t>Целевая архитектура</a:t>
+              <a:t>Анализ подходов к масштабированию</a:t>
+            </a:r>
+          </a:p>
+        </p:txBody>
+      </p:sp>
+      <p:sp>
+        <p:nvSpPr>
+          <p:cNvPr id="11" name="Shape 11"/>
+          <p:cNvSpPr txBox="1"/>
+          <p:nvPr/>
+        </p:nvSpPr>
+        <p:spPr>
+          <a:xfrm>
+            <a:off x="621792" y="987552"/>
+            <a:ext cx="9875520" cy="320040"/>
+          </a:xfrm>
+          <a:prstGeom prst="roundRect">
+            <a:avLst/>
+          </a:prstGeom>
+          <a:noFill/>
+          <a:ln>
+            <a:noFill/>
+          </a:ln>
+        </p:spPr>
+        <p:txBody>
+          <a:bodyPr wrap="square" lIns="177800" tIns="177800" rIns="177800" bIns="177800"/>
+          <a:lstStyle/>
+          <a:p>
+            <a:pPr algn="l"/>
+            <a:r>
+              <a:rPr lang="ru-RU" sz="1300" b="0">
+                <a:solidFill>
+                  <a:srgbClr val="5E6A75"/>
+                </a:solidFill>
+                <a:latin typeface="Aptos"/>
+                <a:cs typeface="Aptos"/>
+              </a:rPr>
+              <a:t>Шесть рассмотренных вариантов; обоснован выбор Redis backplane</a:t>
             </a:r>
           </a:p>
         </p:txBody>
@@ -625,8 +765,8 @@
         </p:nvSpPr>
         <p:spPr>
           <a:xfrm>
-            <a:off x="640080" y="1691640"/>
-            <a:ext cx="1828800" cy="640080"/>
+            <a:off x="685800" y="1554480"/>
+            <a:ext cx="3657600" cy="1325880"/>
           </a:xfrm>
           <a:prstGeom prst="roundRect">
             <a:avLst/>
@@ -644,16 +784,29 @@
           <a:bodyPr wrap="square" lIns="177800" tIns="177800" rIns="177800" bIns="177800"/>
           <a:lstStyle/>
           <a:p>
-            <a:pPr algn="ctr"/>
-            <a:r>
-              <a:rPr lang="ru-RU" sz="1400" b="1">
-                <a:solidFill>
-                  <a:srgbClr val="18212B"/>
-                </a:solidFill>
-                <a:latin typeface="Aptos"/>
-                <a:cs typeface="Aptos"/>
-              </a:rPr>
-              <a:t>Клиент A</a:t>
+            <a:pPr algn="l"/>
+            <a:r>
+              <a:rPr lang="ru-RU" sz="1300" b="0">
+                <a:solidFill>
+                  <a:srgbClr val="18212B"/>
+                </a:solidFill>
+                <a:latin typeface="Aptos"/>
+                <a:cs typeface="Aptos"/>
+              </a:rPr>
+              <a:t>Один экземпляр backend</a:t>
+            </a:r>
+          </a:p>
+          <a:p>
+            <a:pPr algn="l"/>
+            <a:r>
+              <a:rPr lang="ru-RU" sz="1300" b="0">
+                <a:solidFill>
+                  <a:srgbClr val="18212B"/>
+                </a:solidFill>
+                <a:latin typeface="Aptos"/>
+                <a:cs typeface="Aptos"/>
+              </a:rPr>
+              <a:t>Нет масштабирования; один узел — точка отказа</a:t>
             </a:r>
           </a:p>
         </p:txBody>
@@ -666,8 +819,8 @@
         </p:nvSpPr>
         <p:spPr>
           <a:xfrm>
-            <a:off x="640080" y="3246120"/>
-            <a:ext cx="1828800" cy="640080"/>
+            <a:off x="4434840" y="1554480"/>
+            <a:ext cx="3657600" cy="1325880"/>
           </a:xfrm>
           <a:prstGeom prst="roundRect">
             <a:avLst/>
@@ -685,16 +838,29 @@
           <a:bodyPr wrap="square" lIns="177800" tIns="177800" rIns="177800" bIns="177800"/>
           <a:lstStyle/>
           <a:p>
-            <a:pPr algn="ctr"/>
-            <a:r>
-              <a:rPr lang="ru-RU" sz="1400" b="1">
-                <a:solidFill>
-                  <a:srgbClr val="18212B"/>
-                </a:solidFill>
-                <a:latin typeface="Aptos"/>
-                <a:cs typeface="Aptos"/>
-              </a:rPr>
-              <a:t>Клиент B</a:t>
+            <a:pPr algn="l"/>
+            <a:r>
+              <a:rPr lang="ru-RU" sz="1300" b="0">
+                <a:solidFill>
+                  <a:srgbClr val="18212B"/>
+                </a:solidFill>
+                <a:latin typeface="Aptos"/>
+                <a:cs typeface="Aptos"/>
+              </a:rPr>
+              <a:t>Несколько экземпляров без backplane</a:t>
+            </a:r>
+          </a:p>
+          <a:p>
+            <a:pPr algn="l"/>
+            <a:r>
+              <a:rPr lang="ru-RU" sz="1300" b="0">
+                <a:solidFill>
+                  <a:srgbClr val="18212B"/>
+                </a:solidFill>
+                <a:latin typeface="Aptos"/>
+                <a:cs typeface="Aptos"/>
+              </a:rPr>
+              <a:t>Real-time пространство фрагментируется по узлам</a:t>
             </a:r>
           </a:p>
         </p:txBody>
@@ -707,8 +873,170 @@
         </p:nvSpPr>
         <p:spPr>
           <a:xfrm>
-            <a:off x="3108960" y="2468880"/>
-            <a:ext cx="1554480" cy="777240"/>
+            <a:off x="8183880" y="1554480"/>
+            <a:ext cx="3657600" cy="1325880"/>
+          </a:xfrm>
+          <a:prstGeom prst="roundRect">
+            <a:avLst/>
+          </a:prstGeom>
+          <a:solidFill>
+            <a:srgbClr val="FFFFFF"/>
+          </a:solidFill>
+          <a:ln w="12700">
+            <a:solidFill>
+              <a:srgbClr val="D7D2C7"/>
+            </a:solidFill>
+          </a:ln>
+        </p:spPr>
+        <p:txBody>
+          <a:bodyPr wrap="square" lIns="177800" tIns="177800" rIns="177800" bIns="177800"/>
+          <a:lstStyle/>
+          <a:p>
+            <a:pPr algn="l"/>
+            <a:r>
+              <a:rPr lang="ru-RU" sz="1300" b="0">
+                <a:solidFill>
+                  <a:srgbClr val="18212B"/>
+                </a:solidFill>
+                <a:latin typeface="Aptos"/>
+                <a:cs typeface="Aptos"/>
+              </a:rPr>
+              <a:t>Sticky sessions</a:t>
+            </a:r>
+          </a:p>
+          <a:p>
+            <a:pPr algn="l"/>
+            <a:r>
+              <a:rPr lang="ru-RU" sz="1300" b="0">
+                <a:solidFill>
+                  <a:srgbClr val="18212B"/>
+                </a:solidFill>
+                <a:latin typeface="Aptos"/>
+                <a:cs typeface="Aptos"/>
+              </a:rPr>
+              <a:t>Удерживают клиента на узле, но не доставляют события на другие</a:t>
+            </a:r>
+          </a:p>
+        </p:txBody>
+      </p:sp>
+      <p:sp>
+        <p:nvSpPr>
+          <p:cNvPr id="23" name="Shape 23"/>
+          <p:cNvSpPr txBox="1"/>
+          <p:nvPr/>
+        </p:nvSpPr>
+        <p:spPr>
+          <a:xfrm>
+            <a:off x="685800" y="3017520"/>
+            <a:ext cx="3657600" cy="1325880"/>
+          </a:xfrm>
+          <a:prstGeom prst="roundRect">
+            <a:avLst/>
+          </a:prstGeom>
+          <a:solidFill>
+            <a:srgbClr val="FFFFFF"/>
+          </a:solidFill>
+          <a:ln w="12700">
+            <a:solidFill>
+              <a:srgbClr val="D7D2C7"/>
+            </a:solidFill>
+          </a:ln>
+        </p:spPr>
+        <p:txBody>
+          <a:bodyPr wrap="square" lIns="177800" tIns="177800" rIns="177800" bIns="177800"/>
+          <a:lstStyle/>
+          <a:p>
+            <a:pPr algn="l"/>
+            <a:r>
+              <a:rPr lang="ru-RU" sz="1300" b="0">
+                <a:solidFill>
+                  <a:srgbClr val="18212B"/>
+                </a:solidFill>
+                <a:latin typeface="Aptos"/>
+                <a:cs typeface="Aptos"/>
+              </a:rPr>
+              <a:t>Broker / event bus</a:t>
+            </a:r>
+          </a:p>
+          <a:p>
+            <a:pPr algn="l"/>
+            <a:r>
+              <a:rPr lang="ru-RU" sz="1300" b="0">
+                <a:solidFill>
+                  <a:srgbClr val="18212B"/>
+                </a:solidFill>
+                <a:latin typeface="Aptos"/>
+                <a:cs typeface="Aptos"/>
+              </a:rPr>
+              <a:t>Даёт межузловую доставку, но требует схем событий и persistence</a:t>
+            </a:r>
+          </a:p>
+        </p:txBody>
+      </p:sp>
+      <p:sp>
+        <p:nvSpPr>
+          <p:cNvPr id="24" name="Shape 24"/>
+          <p:cNvSpPr txBox="1"/>
+          <p:nvPr/>
+        </p:nvSpPr>
+        <p:spPr>
+          <a:xfrm>
+            <a:off x="4434840" y="3017520"/>
+            <a:ext cx="3657600" cy="1325880"/>
+          </a:xfrm>
+          <a:prstGeom prst="roundRect">
+            <a:avLst/>
+          </a:prstGeom>
+          <a:solidFill>
+            <a:srgbClr val="FFFFFF"/>
+          </a:solidFill>
+          <a:ln w="12700">
+            <a:solidFill>
+              <a:srgbClr val="D7D2C7"/>
+            </a:solidFill>
+          </a:ln>
+        </p:spPr>
+        <p:txBody>
+          <a:bodyPr wrap="square" lIns="177800" tIns="177800" rIns="177800" bIns="177800"/>
+          <a:lstStyle/>
+          <a:p>
+            <a:pPr algn="l"/>
+            <a:r>
+              <a:rPr lang="ru-RU" sz="1300" b="0">
+                <a:solidFill>
+                  <a:srgbClr val="18212B"/>
+                </a:solidFill>
+                <a:latin typeface="Aptos"/>
+                <a:cs typeface="Aptos"/>
+              </a:rPr>
+              <a:t>Managed real-time service</a:t>
+            </a:r>
+          </a:p>
+          <a:p>
+            <a:pPr algn="l"/>
+            <a:r>
+              <a:rPr lang="ru-RU" sz="1300" b="0">
+                <a:solidFill>
+                  <a:srgbClr val="18212B"/>
+                </a:solidFill>
+                <a:latin typeface="Aptos"/>
+                <a:cs typeface="Aptos"/>
+              </a:rPr>
+              <a:t>Уменьшает контроль над self-hosted контуром</a:t>
+            </a:r>
+          </a:p>
+        </p:txBody>
+      </p:sp>
+      <p:sp>
+        <p:nvSpPr>
+          <p:cNvPr id="25" name="Shape 25"/>
+          <p:cNvSpPr txBox="1"/>
+          <p:nvPr/>
+        </p:nvSpPr>
+        <p:spPr>
+          <a:xfrm>
+            <a:off x="8183880" y="3017520"/>
+            <a:ext cx="3657600" cy="1325880"/>
           </a:xfrm>
           <a:prstGeom prst="roundRect">
             <a:avLst/>
@@ -726,139 +1054,29 @@
           <a:bodyPr wrap="square" lIns="177800" tIns="177800" rIns="177800" bIns="177800"/>
           <a:lstStyle/>
           <a:p>
-            <a:pPr algn="ctr"/>
-            <a:r>
-              <a:rPr lang="ru-RU" sz="1400" b="1">
-                <a:solidFill>
-                  <a:srgbClr val="18212B"/>
-                </a:solidFill>
-                <a:latin typeface="Aptos"/>
-                <a:cs typeface="Aptos"/>
-              </a:rPr>
-              <a:t>nginx</a:t>
-            </a:r>
-          </a:p>
-        </p:txBody>
-      </p:sp>
-      <p:sp>
-        <p:nvSpPr>
-          <p:cNvPr id="23" name="Shape 23"/>
-          <p:cNvSpPr txBox="1"/>
-          <p:nvPr/>
-        </p:nvSpPr>
-        <p:spPr>
-          <a:xfrm>
-            <a:off x="5303520" y="1691640"/>
-            <a:ext cx="1920240" cy="640080"/>
-          </a:xfrm>
-          <a:prstGeom prst="roundRect">
-            <a:avLst/>
-          </a:prstGeom>
-          <a:solidFill>
-            <a:srgbClr val="FFFFFF"/>
-          </a:solidFill>
-          <a:ln w="12700">
-            <a:solidFill>
-              <a:srgbClr val="D7D2C7"/>
-            </a:solidFill>
-          </a:ln>
-        </p:spPr>
-        <p:txBody>
-          <a:bodyPr wrap="square" lIns="177800" tIns="177800" rIns="177800" bIns="177800"/>
-          <a:lstStyle/>
-          <a:p>
-            <a:pPr algn="ctr"/>
-            <a:r>
-              <a:rPr lang="ru-RU" sz="1400" b="1">
-                <a:solidFill>
-                  <a:srgbClr val="18212B"/>
-                </a:solidFill>
-                <a:latin typeface="Aptos"/>
-                <a:cs typeface="Aptos"/>
-              </a:rPr>
-              <a:t>app-api-1</a:t>
-            </a:r>
-          </a:p>
-        </p:txBody>
-      </p:sp>
-      <p:sp>
-        <p:nvSpPr>
-          <p:cNvPr id="24" name="Shape 24"/>
-          <p:cNvSpPr txBox="1"/>
-          <p:nvPr/>
-        </p:nvSpPr>
-        <p:spPr>
-          <a:xfrm>
-            <a:off x="5303520" y="3246120"/>
-            <a:ext cx="1920240" cy="640080"/>
-          </a:xfrm>
-          <a:prstGeom prst="roundRect">
-            <a:avLst/>
-          </a:prstGeom>
-          <a:solidFill>
-            <a:srgbClr val="FFFFFF"/>
-          </a:solidFill>
-          <a:ln w="12700">
-            <a:solidFill>
-              <a:srgbClr val="D7D2C7"/>
-            </a:solidFill>
-          </a:ln>
-        </p:spPr>
-        <p:txBody>
-          <a:bodyPr wrap="square" lIns="177800" tIns="177800" rIns="177800" bIns="177800"/>
-          <a:lstStyle/>
-          <a:p>
-            <a:pPr algn="ctr"/>
-            <a:r>
-              <a:rPr lang="ru-RU" sz="1400" b="1">
-                <a:solidFill>
-                  <a:srgbClr val="18212B"/>
-                </a:solidFill>
-                <a:latin typeface="Aptos"/>
-                <a:cs typeface="Aptos"/>
-              </a:rPr>
-              <a:t>app-api-2</a:t>
-            </a:r>
-          </a:p>
-        </p:txBody>
-      </p:sp>
-      <p:sp>
-        <p:nvSpPr>
-          <p:cNvPr id="25" name="Shape 25"/>
-          <p:cNvSpPr txBox="1"/>
-          <p:nvPr/>
-        </p:nvSpPr>
-        <p:spPr>
-          <a:xfrm>
-            <a:off x="7818120" y="2468880"/>
-            <a:ext cx="2286000" cy="777240"/>
-          </a:xfrm>
-          <a:prstGeom prst="roundRect">
-            <a:avLst/>
-          </a:prstGeom>
-          <a:solidFill>
-            <a:srgbClr val="E8F3F1"/>
-          </a:solidFill>
-          <a:ln w="12700">
-            <a:solidFill>
-              <a:srgbClr val="0B6E69"/>
-            </a:solidFill>
-          </a:ln>
-        </p:spPr>
-        <p:txBody>
-          <a:bodyPr wrap="square" lIns="177800" tIns="177800" rIns="177800" bIns="177800"/>
-          <a:lstStyle/>
-          <a:p>
-            <a:pPr algn="ctr"/>
-            <a:r>
-              <a:rPr lang="ru-RU" sz="1400" b="1">
-                <a:solidFill>
-                  <a:srgbClr val="18212B"/>
-                </a:solidFill>
-                <a:latin typeface="Aptos"/>
-                <a:cs typeface="Aptos"/>
-              </a:rPr>
-              <a:t>Redis backplane</a:t>
+            <a:pPr algn="l"/>
+            <a:r>
+              <a:rPr lang="ru-RU" sz="1300" b="1">
+                <a:solidFill>
+                  <a:srgbClr val="18212B"/>
+                </a:solidFill>
+                <a:latin typeface="Aptos"/>
+                <a:cs typeface="Aptos"/>
+              </a:rPr>
+              <a:t>Redis backplane для SignalR — выбрано</a:t>
+            </a:r>
+          </a:p>
+          <a:p>
+            <a:pPr algn="l"/>
+            <a:r>
+              <a:rPr lang="ru-RU" sz="1300" b="1">
+                <a:solidFill>
+                  <a:srgbClr val="18212B"/>
+                </a:solidFill>
+                <a:latin typeface="Aptos"/>
+                <a:cs typeface="Aptos"/>
+              </a:rPr>
+              <a:t>self-hosted, без перестройки логики, transient pub/sub</a:t>
             </a:r>
           </a:p>
         </p:txBody>
@@ -871,8 +1089,8 @@
         </p:nvSpPr>
         <p:spPr>
           <a:xfrm>
-            <a:off x="640080" y="4754880"/>
-            <a:ext cx="10515600" cy="502920"/>
+            <a:off x="685800" y="4617720"/>
+            <a:ext cx="11155680" cy="1280160"/>
           </a:xfrm>
           <a:prstGeom prst="roundRect">
             <a:avLst/>
@@ -886,16 +1104,16 @@
           <a:bodyPr wrap="square" lIns="177800" tIns="177800" rIns="177800" bIns="177800"/>
           <a:lstStyle/>
           <a:p>
-            <a:pPr algn="ctr"/>
-            <a:r>
-              <a:rPr lang="ru-RU" sz="1400" b="0">
+            <a:pPr algn="l"/>
+            <a:r>
+              <a:rPr lang="ru-RU" sz="1200" b="0">
                 <a:solidFill>
                   <a:srgbClr val="5E6A75"/>
                 </a:solidFill>
                 <a:latin typeface="Aptos"/>
                 <a:cs typeface="Aptos"/>
               </a:rPr>
-              <a:t>SignalR-события публикуются между экземплярами через Redis; группы остаются локальным runtime-состоянием.</a:t>
+              <a:t>Критерии выбора: совместимость с self-hosted стендом, минимальная перестройка доменной логики, наличие штатной поддержки в ASP.NET Core SignalR, пригодность для transient UI-событий и воспроизводимость на локальном Docker Compose стенде.</a:t>
             </a:r>
           </a:p>
         </p:txBody>
@@ -1002,7 +1220,44 @@
                 <a:latin typeface="Aptos"/>
                 <a:cs typeface="Aptos"/>
               </a:rPr>
-              <a:t>Что сделано</a:t>
+              <a:t>Целевая архитектура</a:t>
+            </a:r>
+          </a:p>
+        </p:txBody>
+      </p:sp>
+      <p:sp>
+        <p:nvSpPr>
+          <p:cNvPr id="11" name="Shape 11"/>
+          <p:cNvSpPr txBox="1"/>
+          <p:nvPr/>
+        </p:nvSpPr>
+        <p:spPr>
+          <a:xfrm>
+            <a:off x="621792" y="987552"/>
+            <a:ext cx="9875520" cy="320040"/>
+          </a:xfrm>
+          <a:prstGeom prst="roundRect">
+            <a:avLst/>
+          </a:prstGeom>
+          <a:noFill/>
+          <a:ln>
+            <a:noFill/>
+          </a:ln>
+        </p:spPr>
+        <p:txBody>
+          <a:bodyPr wrap="square" lIns="177800" tIns="177800" rIns="177800" bIns="177800"/>
+          <a:lstStyle/>
+          <a:p>
+            <a:pPr algn="l"/>
+            <a:r>
+              <a:rPr lang="ru-RU" sz="1300" b="0">
+                <a:solidFill>
+                  <a:srgbClr val="5E6A75"/>
+                </a:solidFill>
+                <a:latin typeface="Aptos"/>
+                <a:cs typeface="Aptos"/>
+              </a:rPr>
+              <a:t>Два экземпляра app-api за nginx, общий Redis backplane для межузловой доставки</a:t>
             </a:r>
           </a:p>
         </p:txBody>
@@ -1015,8 +1270,8 @@
         </p:nvSpPr>
         <p:spPr>
           <a:xfrm>
-            <a:off x="685800" y="1554480"/>
-            <a:ext cx="5212080" cy="1097280"/>
+            <a:off x="914400" y="1874520"/>
+            <a:ext cx="1645920" cy="640080"/>
           </a:xfrm>
           <a:prstGeom prst="roundRect">
             <a:avLst/>
@@ -1034,29 +1289,16 @@
           <a:bodyPr wrap="square" lIns="177800" tIns="177800" rIns="177800" bIns="177800"/>
           <a:lstStyle/>
           <a:p>
-            <a:pPr algn="l"/>
-            <a:r>
-              <a:rPr lang="ru-RU" sz="1500" b="0">
-                <a:solidFill>
-                  <a:srgbClr val="18212B"/>
-                </a:solidFill>
-                <a:latin typeface="Aptos"/>
-                <a:cs typeface="Aptos"/>
-              </a:rPr>
-              <a:t>1 · Redis backplane для SignalR</a:t>
-            </a:r>
-          </a:p>
-          <a:p>
-            <a:pPr algn="l"/>
-            <a:r>
-              <a:rPr lang="ru-RU" sz="1500" b="0">
-                <a:solidFill>
-                  <a:srgbClr val="18212B"/>
-                </a:solidFill>
-                <a:latin typeface="Aptos"/>
-                <a:cs typeface="Aptos"/>
-              </a:rPr>
-              <a:t>Конфигурируется через REDIS_CONNECTION_STRING</a:t>
+            <a:pPr algn="ctr"/>
+            <a:r>
+              <a:rPr lang="ru-RU" sz="1400" b="1">
+                <a:solidFill>
+                  <a:srgbClr val="18212B"/>
+                </a:solidFill>
+                <a:latin typeface="Aptos"/>
+                <a:cs typeface="Aptos"/>
+              </a:rPr>
+              <a:t>Клиент A</a:t>
             </a:r>
           </a:p>
         </p:txBody>
@@ -1069,8 +1311,8 @@
         </p:nvSpPr>
         <p:spPr>
           <a:xfrm>
-            <a:off x="685800" y="2743200"/>
-            <a:ext cx="5212080" cy="1097280"/>
+            <a:off x="914400" y="3749040"/>
+            <a:ext cx="1645920" cy="640080"/>
           </a:xfrm>
           <a:prstGeom prst="roundRect">
             <a:avLst/>
@@ -1088,29 +1330,16 @@
           <a:bodyPr wrap="square" lIns="177800" tIns="177800" rIns="177800" bIns="177800"/>
           <a:lstStyle/>
           <a:p>
-            <a:pPr algn="l"/>
-            <a:r>
-              <a:rPr lang="ru-RU" sz="1500" b="0">
-                <a:solidFill>
-                  <a:srgbClr val="18212B"/>
-                </a:solidFill>
-                <a:latin typeface="Aptos"/>
-                <a:cs typeface="Aptos"/>
-              </a:rPr>
-              <a:t>2 · Диагностика узла</a:t>
-            </a:r>
-          </a:p>
-          <a:p>
-            <a:pPr algn="l"/>
-            <a:r>
-              <a:rPr lang="ru-RU" sz="1500" b="0">
-                <a:solidFill>
-                  <a:srgbClr val="18212B"/>
-                </a:solidFill>
-                <a:latin typeface="Aptos"/>
-                <a:cs typeface="Aptos"/>
-              </a:rPr>
-              <a:t>SERVER_INSTANCE_ID, connectionId, machineName</a:t>
+            <a:pPr algn="ctr"/>
+            <a:r>
+              <a:rPr lang="ru-RU" sz="1400" b="1">
+                <a:solidFill>
+                  <a:srgbClr val="18212B"/>
+                </a:solidFill>
+                <a:latin typeface="Aptos"/>
+                <a:cs typeface="Aptos"/>
+              </a:rPr>
+              <a:t>Клиент B</a:t>
             </a:r>
           </a:p>
         </p:txBody>
@@ -1123,8 +1352,49 @@
         </p:nvSpPr>
         <p:spPr>
           <a:xfrm>
-            <a:off x="6172200" y="1554480"/>
-            <a:ext cx="5212080" cy="1097280"/>
+            <a:off x="3291840" y="2788920"/>
+            <a:ext cx="1371600" cy="731520"/>
+          </a:xfrm>
+          <a:prstGeom prst="roundRect">
+            <a:avLst/>
+          </a:prstGeom>
+          <a:solidFill>
+            <a:srgbClr val="E8F3F1"/>
+          </a:solidFill>
+          <a:ln w="12700">
+            <a:solidFill>
+              <a:srgbClr val="0B6E69"/>
+            </a:solidFill>
+          </a:ln>
+        </p:spPr>
+        <p:txBody>
+          <a:bodyPr wrap="square" lIns="177800" tIns="177800" rIns="177800" bIns="177800"/>
+          <a:lstStyle/>
+          <a:p>
+            <a:pPr algn="ctr"/>
+            <a:r>
+              <a:rPr lang="ru-RU" sz="1400" b="1">
+                <a:solidFill>
+                  <a:srgbClr val="18212B"/>
+                </a:solidFill>
+                <a:latin typeface="Aptos"/>
+                <a:cs typeface="Aptos"/>
+              </a:rPr>
+              <a:t>nginx</a:t>
+            </a:r>
+          </a:p>
+        </p:txBody>
+      </p:sp>
+      <p:sp>
+        <p:nvSpPr>
+          <p:cNvPr id="23" name="Shape 23"/>
+          <p:cNvSpPr txBox="1"/>
+          <p:nvPr/>
+        </p:nvSpPr>
+        <p:spPr>
+          <a:xfrm>
+            <a:off x="5577840" y="1874520"/>
+            <a:ext cx="1828800" cy="640080"/>
           </a:xfrm>
           <a:prstGeom prst="roundRect">
             <a:avLst/>
@@ -1134,7 +1404,7 @@
           </a:solidFill>
           <a:ln w="12700">
             <a:solidFill>
-              <a:srgbClr val="D7D2C7"/>
+              <a:srgbClr val="0B6E69"/>
             </a:solidFill>
           </a:ln>
         </p:spPr>
@@ -1142,43 +1412,30 @@
           <a:bodyPr wrap="square" lIns="177800" tIns="177800" rIns="177800" bIns="177800"/>
           <a:lstStyle/>
           <a:p>
-            <a:pPr algn="l"/>
-            <a:r>
-              <a:rPr lang="ru-RU" sz="1500" b="0">
-                <a:solidFill>
-                  <a:srgbClr val="18212B"/>
-                </a:solidFill>
-                <a:latin typeface="Aptos"/>
-                <a:cs typeface="Aptos"/>
-              </a:rPr>
-              <a:t>3 · Стенд Docker Compose</a:t>
-            </a:r>
-          </a:p>
-          <a:p>
-            <a:pPr algn="l"/>
-            <a:r>
-              <a:rPr lang="ru-RU" sz="1500" b="0">
-                <a:solidFill>
-                  <a:srgbClr val="18212B"/>
-                </a:solidFill>
-                <a:latin typeface="Aptos"/>
-                <a:cs typeface="Aptos"/>
-              </a:rPr>
-              <a:t>app-api-1, app-api-2, Redis, PostgreSQL, nginx</a:t>
-            </a:r>
-          </a:p>
-        </p:txBody>
-      </p:sp>
-      <p:sp>
-        <p:nvSpPr>
-          <p:cNvPr id="23" name="Shape 23"/>
-          <p:cNvSpPr txBox="1"/>
-          <p:nvPr/>
-        </p:nvSpPr>
-        <p:spPr>
-          <a:xfrm>
-            <a:off x="6172200" y="2743200"/>
-            <a:ext cx="5212080" cy="1097280"/>
+            <a:pPr algn="ctr"/>
+            <a:r>
+              <a:rPr lang="ru-RU" sz="1400" b="1">
+                <a:solidFill>
+                  <a:srgbClr val="18212B"/>
+                </a:solidFill>
+                <a:latin typeface="Aptos"/>
+                <a:cs typeface="Aptos"/>
+              </a:rPr>
+              <a:t>app-api-1</a:t>
+            </a:r>
+          </a:p>
+        </p:txBody>
+      </p:sp>
+      <p:sp>
+        <p:nvSpPr>
+          <p:cNvPr id="24" name="Shape 24"/>
+          <p:cNvSpPr txBox="1"/>
+          <p:nvPr/>
+        </p:nvSpPr>
+        <p:spPr>
+          <a:xfrm>
+            <a:off x="5577840" y="3749040"/>
+            <a:ext cx="1828800" cy="640080"/>
           </a:xfrm>
           <a:prstGeom prst="roundRect">
             <a:avLst/>
@@ -1188,7 +1445,7 @@
           </a:solidFill>
           <a:ln w="12700">
             <a:solidFill>
-              <a:srgbClr val="D7D2C7"/>
+              <a:srgbClr val="0B6E69"/>
             </a:solidFill>
           </a:ln>
         </p:spPr>
@@ -1196,29 +1453,265 @@
           <a:bodyPr wrap="square" lIns="177800" tIns="177800" rIns="177800" bIns="177800"/>
           <a:lstStyle/>
           <a:p>
-            <a:pPr algn="l"/>
-            <a:r>
-              <a:rPr lang="ru-RU" sz="1500" b="0">
-                <a:solidFill>
-                  <a:srgbClr val="18212B"/>
-                </a:solidFill>
-                <a:latin typeface="Aptos"/>
-                <a:cs typeface="Aptos"/>
-              </a:rPr>
-              <a:t>4 · Node.js-клиент</a:t>
-            </a:r>
-          </a:p>
-          <a:p>
-            <a:pPr algn="l"/>
-            <a:r>
-              <a:rPr lang="ru-RU" sz="1500" b="0">
-                <a:solidFill>
-                  <a:srgbClr val="18212B"/>
-                </a:solidFill>
-                <a:latin typeface="Aptos"/>
-                <a:cs typeface="Aptos"/>
-              </a:rPr>
-              <a:t>Delivery, серия, rejoin, failover</a:t>
+            <a:pPr algn="ctr"/>
+            <a:r>
+              <a:rPr lang="ru-RU" sz="1400" b="1">
+                <a:solidFill>
+                  <a:srgbClr val="18212B"/>
+                </a:solidFill>
+                <a:latin typeface="Aptos"/>
+                <a:cs typeface="Aptos"/>
+              </a:rPr>
+              <a:t>app-api-2</a:t>
+            </a:r>
+          </a:p>
+        </p:txBody>
+      </p:sp>
+      <p:sp>
+        <p:nvSpPr>
+          <p:cNvPr id="25" name="Shape 25"/>
+          <p:cNvSpPr txBox="1"/>
+          <p:nvPr/>
+        </p:nvSpPr>
+        <p:spPr>
+          <a:xfrm>
+            <a:off x="8321040" y="2788920"/>
+            <a:ext cx="2194560" cy="731520"/>
+          </a:xfrm>
+          <a:prstGeom prst="roundRect">
+            <a:avLst/>
+          </a:prstGeom>
+          <a:solidFill>
+            <a:srgbClr val="E8F3F1"/>
+          </a:solidFill>
+          <a:ln w="12700">
+            <a:solidFill>
+              <a:srgbClr val="0B6E69"/>
+            </a:solidFill>
+          </a:ln>
+        </p:spPr>
+        <p:txBody>
+          <a:bodyPr wrap="square" lIns="177800" tIns="177800" rIns="177800" bIns="177800"/>
+          <a:lstStyle/>
+          <a:p>
+            <a:pPr algn="ctr"/>
+            <a:r>
+              <a:rPr lang="ru-RU" sz="1400" b="1">
+                <a:solidFill>
+                  <a:srgbClr val="18212B"/>
+                </a:solidFill>
+                <a:latin typeface="Aptos"/>
+                <a:cs typeface="Aptos"/>
+              </a:rPr>
+              <a:t>Redis backplane</a:t>
+            </a:r>
+          </a:p>
+        </p:txBody>
+      </p:sp>
+      <p:cxnSp>
+        <p:nvCxnSpPr>
+          <p:cNvPr id="50" name="Connector 50"/>
+          <p:cNvCxnSpPr/>
+          <p:nvPr/>
+        </p:nvCxnSpPr>
+        <p:spPr>
+          <a:xfrm flipH="0" flipV="0">
+            <a:off x="2560320" y="2194560"/>
+            <a:ext cx="731520" cy="795528"/>
+          </a:xfrm>
+          <a:prstGeom prst="straightConnector1">
+            <a:avLst/>
+          </a:prstGeom>
+          <a:ln w="15875" cap="flat">
+            <a:solidFill>
+              <a:srgbClr val="0B6E69"/>
+            </a:solidFill>
+            <a:tailEnd type="triangle"/>
+          </a:ln>
+        </p:spPr>
+      </p:cxnSp>
+      <p:cxnSp>
+        <p:nvCxnSpPr>
+          <p:cNvPr id="51" name="Connector 51"/>
+          <p:cNvCxnSpPr/>
+          <p:nvPr/>
+        </p:nvCxnSpPr>
+        <p:spPr>
+          <a:xfrm flipH="0" flipV="1">
+            <a:off x="2560320" y="3319272"/>
+            <a:ext cx="731520" cy="749808"/>
+          </a:xfrm>
+          <a:prstGeom prst="straightConnector1">
+            <a:avLst/>
+          </a:prstGeom>
+          <a:ln w="15875" cap="flat">
+            <a:solidFill>
+              <a:srgbClr val="0B6E69"/>
+            </a:solidFill>
+            <a:tailEnd type="triangle"/>
+          </a:ln>
+        </p:spPr>
+      </p:cxnSp>
+      <p:cxnSp>
+        <p:nvCxnSpPr>
+          <p:cNvPr id="52" name="Connector 52"/>
+          <p:cNvCxnSpPr/>
+          <p:nvPr/>
+        </p:nvCxnSpPr>
+        <p:spPr>
+          <a:xfrm flipH="0" flipV="1">
+            <a:off x="4663440" y="2194560"/>
+            <a:ext cx="914400" cy="795528"/>
+          </a:xfrm>
+          <a:prstGeom prst="straightConnector1">
+            <a:avLst/>
+          </a:prstGeom>
+          <a:ln w="15875" cap="flat">
+            <a:solidFill>
+              <a:srgbClr val="0B6E69"/>
+            </a:solidFill>
+            <a:tailEnd type="triangle"/>
+          </a:ln>
+        </p:spPr>
+      </p:cxnSp>
+      <p:cxnSp>
+        <p:nvCxnSpPr>
+          <p:cNvPr id="53" name="Connector 53"/>
+          <p:cNvCxnSpPr/>
+          <p:nvPr/>
+        </p:nvCxnSpPr>
+        <p:spPr>
+          <a:xfrm flipH="0" flipV="0">
+            <a:off x="4663440" y="3319272"/>
+            <a:ext cx="914400" cy="749808"/>
+          </a:xfrm>
+          <a:prstGeom prst="straightConnector1">
+            <a:avLst/>
+          </a:prstGeom>
+          <a:ln w="15875" cap="flat">
+            <a:solidFill>
+              <a:srgbClr val="0B6E69"/>
+            </a:solidFill>
+            <a:tailEnd type="triangle"/>
+          </a:ln>
+        </p:spPr>
+      </p:cxnSp>
+      <p:cxnSp>
+        <p:nvCxnSpPr>
+          <p:cNvPr id="54" name="Connector 54"/>
+          <p:cNvCxnSpPr/>
+          <p:nvPr/>
+        </p:nvCxnSpPr>
+        <p:spPr>
+          <a:xfrm flipH="0" flipV="0">
+            <a:off x="7406640" y="2194560"/>
+            <a:ext cx="914400" cy="795528"/>
+          </a:xfrm>
+          <a:prstGeom prst="straightConnector1">
+            <a:avLst/>
+          </a:prstGeom>
+          <a:ln w="15875" cap="flat">
+            <a:solidFill>
+              <a:srgbClr val="0B6E69"/>
+            </a:solidFill>
+            <a:headEnd type="triangle"/>
+            <a:tailEnd type="triangle"/>
+          </a:ln>
+        </p:spPr>
+      </p:cxnSp>
+      <p:cxnSp>
+        <p:nvCxnSpPr>
+          <p:cNvPr id="55" name="Connector 55"/>
+          <p:cNvCxnSpPr/>
+          <p:nvPr/>
+        </p:nvCxnSpPr>
+        <p:spPr>
+          <a:xfrm flipH="0" flipV="1">
+            <a:off x="7406640" y="3319272"/>
+            <a:ext cx="914400" cy="749808"/>
+          </a:xfrm>
+          <a:prstGeom prst="straightConnector1">
+            <a:avLst/>
+          </a:prstGeom>
+          <a:ln w="15875" cap="flat">
+            <a:solidFill>
+              <a:srgbClr val="0B6E69"/>
+            </a:solidFill>
+            <a:headEnd type="triangle"/>
+            <a:tailEnd type="triangle"/>
+          </a:ln>
+        </p:spPr>
+      </p:cxnSp>
+      <p:sp>
+        <p:nvSpPr>
+          <p:cNvPr id="26" name="Shape 26"/>
+          <p:cNvSpPr txBox="1"/>
+          <p:nvPr/>
+        </p:nvSpPr>
+        <p:spPr>
+          <a:xfrm>
+            <a:off x="640080" y="4937760"/>
+            <a:ext cx="10972800" cy="457200"/>
+          </a:xfrm>
+          <a:prstGeom prst="roundRect">
+            <a:avLst/>
+          </a:prstGeom>
+          <a:noFill/>
+          <a:ln>
+            <a:noFill/>
+          </a:ln>
+        </p:spPr>
+        <p:txBody>
+          <a:bodyPr wrap="square" lIns="177800" tIns="177800" rIns="177800" bIns="177800"/>
+          <a:lstStyle/>
+          <a:p>
+            <a:pPr algn="ctr"/>
+            <a:r>
+              <a:rPr lang="ru-RU" sz="1300" b="0">
+                <a:solidFill>
+                  <a:srgbClr val="5E6A75"/>
+                </a:solidFill>
+                <a:latin typeface="Aptos"/>
+                <a:cs typeface="Aptos"/>
+              </a:rPr>
+              <a:t>Событие публикуется в Redis · доставляется обоим узлам · группы SignalR остаются локальным runtime-состоянием</a:t>
+            </a:r>
+          </a:p>
+        </p:txBody>
+      </p:sp>
+      <p:sp>
+        <p:nvSpPr>
+          <p:cNvPr id="27" name="Shape 27"/>
+          <p:cNvSpPr txBox="1"/>
+          <p:nvPr/>
+        </p:nvSpPr>
+        <p:spPr>
+          <a:xfrm>
+            <a:off x="640080" y="5440680"/>
+            <a:ext cx="10972800" cy="365760"/>
+          </a:xfrm>
+          <a:prstGeom prst="roundRect">
+            <a:avLst/>
+          </a:prstGeom>
+          <a:noFill/>
+          <a:ln>
+            <a:noFill/>
+          </a:ln>
+        </p:spPr>
+        <p:txBody>
+          <a:bodyPr wrap="square" lIns="177800" tIns="177800" rIns="177800" bIns="177800"/>
+          <a:lstStyle/>
+          <a:p>
+            <a:pPr algn="ctr"/>
+            <a:r>
+              <a:rPr lang="ru-RU" sz="1100" b="0">
+                <a:solidFill>
+                  <a:srgbClr val="5E6A75"/>
+                </a:solidFill>
+                <a:latin typeface="Aptos"/>
+                <a:cs typeface="Aptos"/>
+              </a:rPr>
+              <a:t>Оба экземпляра подключены к общей PostgreSQL; на схеме показан только канал real-time-доставки.</a:t>
             </a:r>
           </a:p>
         </p:txBody>
@@ -1325,7 +1818,44 @@
                 <a:latin typeface="Aptos"/>
                 <a:cs typeface="Aptos"/>
               </a:rPr>
-              <a:t>Стенд и программа испытаний</a:t>
+              <a:t>Что сделано</a:t>
+            </a:r>
+          </a:p>
+        </p:txBody>
+      </p:sp>
+      <p:sp>
+        <p:nvSpPr>
+          <p:cNvPr id="11" name="Shape 11"/>
+          <p:cNvSpPr txBox="1"/>
+          <p:nvPr/>
+        </p:nvSpPr>
+        <p:spPr>
+          <a:xfrm>
+            <a:off x="621792" y="987552"/>
+            <a:ext cx="9875520" cy="320040"/>
+          </a:xfrm>
+          <a:prstGeom prst="roundRect">
+            <a:avLst/>
+          </a:prstGeom>
+          <a:noFill/>
+          <a:ln>
+            <a:noFill/>
+          </a:ln>
+        </p:spPr>
+        <p:txBody>
+          <a:bodyPr wrap="square" lIns="177800" tIns="177800" rIns="177800" bIns="177800"/>
+          <a:lstStyle/>
+          <a:p>
+            <a:pPr algn="l"/>
+            <a:r>
+              <a:rPr lang="ru-RU" sz="1300" b="0">
+                <a:solidFill>
+                  <a:srgbClr val="5E6A75"/>
+                </a:solidFill>
+                <a:latin typeface="Aptos"/>
+                <a:cs typeface="Aptos"/>
+              </a:rPr>
+              <a:t>Backend-конфигурация, диагностика, стенд и проверочный клиент</a:t>
             </a:r>
           </a:p>
         </p:txBody>
@@ -1338,14 +1868,14 @@
         </p:nvSpPr>
         <p:spPr>
           <a:xfrm>
-            <a:off x="685800" y="1600200"/>
-            <a:ext cx="5212080" cy="2286000"/>
+            <a:off x="685800" y="1554480"/>
+            <a:ext cx="5349240" cy="2194560"/>
           </a:xfrm>
           <a:prstGeom prst="roundRect">
             <a:avLst/>
           </a:prstGeom>
           <a:solidFill>
-            <a:srgbClr val="E8F3F1"/>
+            <a:srgbClr val="FFFFFF"/>
           </a:solidFill>
           <a:ln w="12700">
             <a:solidFill>
@@ -1359,53 +1889,40 @@
           <a:p>
             <a:pPr algn="l"/>
             <a:r>
-              <a:rPr lang="ru-RU" sz="1500" b="0">
-                <a:solidFill>
-                  <a:srgbClr val="18212B"/>
-                </a:solidFill>
-                <a:latin typeface="Aptos"/>
-                <a:cs typeface="Aptos"/>
-              </a:rPr>
-              <a:t>Два режима</a:t>
-            </a:r>
-          </a:p>
-          <a:p>
-            <a:pPr algn="l"/>
-            <a:r>
-              <a:rPr lang="ru-RU" sz="1500" b="0">
-                <a:solidFill>
-                  <a:srgbClr val="18212B"/>
-                </a:solidFill>
-                <a:latin typeface="Aptos"/>
-                <a:cs typeface="Aptos"/>
-              </a:rPr>
-              <a:t>• С Redis backplane</a:t>
-            </a:r>
-          </a:p>
-          <a:p>
-            <a:pPr algn="l"/>
-            <a:r>
-              <a:rPr lang="ru-RU" sz="1500" b="0">
-                <a:solidFill>
-                  <a:srgbClr val="18212B"/>
-                </a:solidFill>
-                <a:latin typeface="Aptos"/>
-                <a:cs typeface="Aptos"/>
-              </a:rPr>
-              <a:t>• Без Redis backplane</a:t>
-            </a:r>
-          </a:p>
-          <a:p>
-            <a:pPr algn="l"/>
-            <a:r>
-              <a:rPr lang="ru-RU" sz="1500" b="0">
-                <a:solidFill>
-                  <a:srgbClr val="18212B"/>
-                </a:solidFill>
-                <a:latin typeface="Aptos"/>
-                <a:cs typeface="Aptos"/>
-              </a:rPr>
-              <a:t>Один и тот же код, разница — переменная окружения.</a:t>
+              <a:rPr lang="ru-RU" sz="1400" b="0">
+                <a:solidFill>
+                  <a:srgbClr val="18212B"/>
+                </a:solidFill>
+                <a:latin typeface="Aptos"/>
+                <a:cs typeface="Aptos"/>
+              </a:rPr>
+              <a:t>1 · Redis backplane для SignalR</a:t>
+            </a:r>
+          </a:p>
+          <a:p>
+            <a:pPr algn="l"/>
+            <a:r>
+              <a:rPr lang="ru-RU" sz="1400" b="0">
+                <a:solidFill>
+                  <a:srgbClr val="18212B"/>
+                </a:solidFill>
+                <a:latin typeface="Aptos"/>
+                <a:cs typeface="Aptos"/>
+              </a:rPr>
+              <a:t/>
+            </a:r>
+          </a:p>
+          <a:p>
+            <a:pPr algn="l"/>
+            <a:r>
+              <a:rPr lang="ru-RU" sz="1400" b="0">
+                <a:solidFill>
+                  <a:srgbClr val="18212B"/>
+                </a:solidFill>
+                <a:latin typeface="Aptos"/>
+                <a:cs typeface="Aptos"/>
+              </a:rPr>
+              <a:t>AddStackExchangeRedis с prefix app-api-realtime; включается переменной REDIS_CONNECTION_STRING — один и тот же код в обоих режимах.</a:t>
             </a:r>
           </a:p>
         </p:txBody>
@@ -1418,8 +1935,8 @@
         </p:nvSpPr>
         <p:spPr>
           <a:xfrm>
-            <a:off x="6172200" y="1600200"/>
-            <a:ext cx="5212080" cy="2286000"/>
+            <a:off x="685800" y="3840480"/>
+            <a:ext cx="5349240" cy="1874520"/>
           </a:xfrm>
           <a:prstGeom prst="roundRect">
             <a:avLst/>
@@ -1439,66 +1956,174 @@
           <a:p>
             <a:pPr algn="l"/>
             <a:r>
-              <a:rPr lang="ru-RU" sz="1500" b="0">
-                <a:solidFill>
-                  <a:srgbClr val="18212B"/>
-                </a:solidFill>
-                <a:latin typeface="Aptos"/>
-                <a:cs typeface="Aptos"/>
-              </a:rPr>
-              <a:t>Четыре сценария</a:t>
-            </a:r>
-          </a:p>
-          <a:p>
-            <a:pPr algn="l"/>
-            <a:r>
-              <a:rPr lang="ru-RU" sz="1500" b="0">
-                <a:solidFill>
-                  <a:srgbClr val="18212B"/>
-                </a:solidFill>
-                <a:latin typeface="Aptos"/>
-                <a:cs typeface="Aptos"/>
-              </a:rPr>
-              <a:t>• Одиночная доставка</a:t>
-            </a:r>
-          </a:p>
-          <a:p>
-            <a:pPr algn="l"/>
-            <a:r>
-              <a:rPr lang="ru-RU" sz="1500" b="0">
-                <a:solidFill>
-                  <a:srgbClr val="18212B"/>
-                </a:solidFill>
-                <a:latin typeface="Aptos"/>
-                <a:cs typeface="Aptos"/>
-              </a:rPr>
-              <a:t>• Серия из 5 итераций</a:t>
-            </a:r>
-          </a:p>
-          <a:p>
-            <a:pPr algn="l"/>
-            <a:r>
-              <a:rPr lang="ru-RU" sz="1500" b="0">
-                <a:solidFill>
-                  <a:srgbClr val="18212B"/>
-                </a:solidFill>
-                <a:latin typeface="Aptos"/>
-                <a:cs typeface="Aptos"/>
-              </a:rPr>
-              <a:t>• Rejoin после разрыва</a:t>
-            </a:r>
-          </a:p>
-          <a:p>
-            <a:pPr algn="l"/>
-            <a:r>
-              <a:rPr lang="ru-RU" sz="1500" b="0">
-                <a:solidFill>
-                  <a:srgbClr val="18212B"/>
-                </a:solidFill>
-                <a:latin typeface="Aptos"/>
-                <a:cs typeface="Aptos"/>
-              </a:rPr>
-              <a:t>• Failover узла</a:t>
+              <a:rPr lang="ru-RU" sz="1400" b="0">
+                <a:solidFill>
+                  <a:srgbClr val="18212B"/>
+                </a:solidFill>
+                <a:latin typeface="Aptos"/>
+                <a:cs typeface="Aptos"/>
+              </a:rPr>
+              <a:t>2 · Диагностический контур</a:t>
+            </a:r>
+          </a:p>
+          <a:p>
+            <a:pPr algn="l"/>
+            <a:r>
+              <a:rPr lang="ru-RU" sz="1400" b="0">
+                <a:solidFill>
+                  <a:srgbClr val="18212B"/>
+                </a:solidFill>
+                <a:latin typeface="Aptos"/>
+                <a:cs typeface="Aptos"/>
+              </a:rPr>
+              <a:t/>
+            </a:r>
+          </a:p>
+          <a:p>
+            <a:pPr algn="l"/>
+            <a:r>
+              <a:rPr lang="ru-RU" sz="1400" b="0">
+                <a:solidFill>
+                  <a:srgbClr val="18212B"/>
+                </a:solidFill>
+                <a:latin typeface="Aptos"/>
+                <a:cs typeface="Aptos"/>
+              </a:rPr>
+              <a:t>SERVER_INSTANCE_ID, GetConnectionDiagnosticsAsync(), логирование подключения, вступления в группу и отправки события.</a:t>
+            </a:r>
+          </a:p>
+        </p:txBody>
+      </p:sp>
+      <p:sp>
+        <p:nvSpPr>
+          <p:cNvPr id="22" name="Shape 22"/>
+          <p:cNvSpPr txBox="1"/>
+          <p:nvPr/>
+        </p:nvSpPr>
+        <p:spPr>
+          <a:xfrm>
+            <a:off x="6172200" y="1554480"/>
+            <a:ext cx="5349240" cy="2194560"/>
+          </a:xfrm>
+          <a:prstGeom prst="roundRect">
+            <a:avLst/>
+          </a:prstGeom>
+          <a:solidFill>
+            <a:srgbClr val="FFFFFF"/>
+          </a:solidFill>
+          <a:ln w="12700">
+            <a:solidFill>
+              <a:srgbClr val="D7D2C7"/>
+            </a:solidFill>
+          </a:ln>
+        </p:spPr>
+        <p:txBody>
+          <a:bodyPr wrap="square" lIns="177800" tIns="177800" rIns="177800" bIns="177800"/>
+          <a:lstStyle/>
+          <a:p>
+            <a:pPr algn="l"/>
+            <a:r>
+              <a:rPr lang="ru-RU" sz="1400" b="0">
+                <a:solidFill>
+                  <a:srgbClr val="18212B"/>
+                </a:solidFill>
+                <a:latin typeface="Aptos"/>
+                <a:cs typeface="Aptos"/>
+              </a:rPr>
+              <a:t>3 · Multi-instance стенд</a:t>
+            </a:r>
+          </a:p>
+          <a:p>
+            <a:pPr algn="l"/>
+            <a:r>
+              <a:rPr lang="ru-RU" sz="1400" b="0">
+                <a:solidFill>
+                  <a:srgbClr val="18212B"/>
+                </a:solidFill>
+                <a:latin typeface="Aptos"/>
+                <a:cs typeface="Aptos"/>
+              </a:rPr>
+              <a:t/>
+            </a:r>
+          </a:p>
+          <a:p>
+            <a:pPr algn="l"/>
+            <a:r>
+              <a:rPr lang="ru-RU" sz="1400" b="0">
+                <a:solidFill>
+                  <a:srgbClr val="18212B"/>
+                </a:solidFill>
+                <a:latin typeface="Aptos"/>
+                <a:cs typeface="Aptos"/>
+              </a:rPr>
+              <a:t>docker-compose.thesis.yml: app-api-1, app-api-2, Redis, PostgreSQL, nginx; override .no-backplane.yml для воспроизведения исходной проблемы.</a:t>
+            </a:r>
+          </a:p>
+        </p:txBody>
+      </p:sp>
+      <p:sp>
+        <p:nvSpPr>
+          <p:cNvPr id="23" name="Shape 23"/>
+          <p:cNvSpPr txBox="1"/>
+          <p:nvPr/>
+        </p:nvSpPr>
+        <p:spPr>
+          <a:xfrm>
+            <a:off x="6172200" y="3840480"/>
+            <a:ext cx="5349240" cy="1874520"/>
+          </a:xfrm>
+          <a:prstGeom prst="roundRect">
+            <a:avLst/>
+          </a:prstGeom>
+          <a:solidFill>
+            <a:srgbClr val="FFFFFF"/>
+          </a:solidFill>
+          <a:ln w="12700">
+            <a:solidFill>
+              <a:srgbClr val="D7D2C7"/>
+            </a:solidFill>
+          </a:ln>
+        </p:spPr>
+        <p:txBody>
+          <a:bodyPr wrap="square" lIns="177800" tIns="177800" rIns="177800" bIns="177800"/>
+          <a:lstStyle/>
+          <a:p>
+            <a:pPr algn="l"/>
+            <a:r>
+              <a:rPr lang="ru-RU" sz="1400" b="0">
+                <a:solidFill>
+                  <a:srgbClr val="18212B"/>
+                </a:solidFill>
+                <a:latin typeface="Aptos"/>
+                <a:cs typeface="Aptos"/>
+              </a:rPr>
+              <a:t>4 · Проверочный клиент на Node.js</a:t>
+            </a:r>
+          </a:p>
+          <a:p>
+            <a:pPr algn="l"/>
+            <a:r>
+              <a:rPr lang="ru-RU" sz="1400" b="0">
+                <a:solidFill>
+                  <a:srgbClr val="18212B"/>
+                </a:solidFill>
+                <a:latin typeface="Aptos"/>
+                <a:cs typeface="Aptos"/>
+              </a:rPr>
+              <a:t/>
+            </a:r>
+          </a:p>
+          <a:p>
+            <a:pPr algn="l"/>
+            <a:r>
+              <a:rPr lang="ru-RU" sz="1400" b="0">
+                <a:solidFill>
+                  <a:srgbClr val="18212B"/>
+                </a:solidFill>
+                <a:latin typeface="Aptos"/>
+                <a:cs typeface="Aptos"/>
+              </a:rPr>
+              <a:t>realtime-scaleout-check.mjs: одиночная доставка, серия, rejoin, failover.</a:t>
             </a:r>
           </a:p>
         </p:txBody>
@@ -1605,7 +2230,44 @@
                 <a:latin typeface="Aptos"/>
                 <a:cs typeface="Aptos"/>
               </a:rPr>
-              <a:t>Главный результат</a:t>
+              <a:t>Программа испытаний</a:t>
+            </a:r>
+          </a:p>
+        </p:txBody>
+      </p:sp>
+      <p:sp>
+        <p:nvSpPr>
+          <p:cNvPr id="11" name="Shape 11"/>
+          <p:cNvSpPr txBox="1"/>
+          <p:nvPr/>
+        </p:nvSpPr>
+        <p:spPr>
+          <a:xfrm>
+            <a:off x="621792" y="987552"/>
+            <a:ext cx="9875520" cy="320040"/>
+          </a:xfrm>
+          <a:prstGeom prst="roundRect">
+            <a:avLst/>
+          </a:prstGeom>
+          <a:noFill/>
+          <a:ln>
+            <a:noFill/>
+          </a:ln>
+        </p:spPr>
+        <p:txBody>
+          <a:bodyPr wrap="square" lIns="177800" tIns="177800" rIns="177800" bIns="177800"/>
+          <a:lstStyle/>
+          <a:p>
+            <a:pPr algn="l"/>
+            <a:r>
+              <a:rPr lang="ru-RU" sz="1300" b="0">
+                <a:solidFill>
+                  <a:srgbClr val="5E6A75"/>
+                </a:solidFill>
+                <a:latin typeface="Aptos"/>
+                <a:cs typeface="Aptos"/>
+              </a:rPr>
+              <a:t>Два режима по одному коду · четыре сценария проверки</a:t>
             </a:r>
           </a:p>
         </p:txBody>
@@ -1619,74 +2281,7 @@
         <p:spPr>
           <a:xfrm>
             <a:off x="685800" y="1554480"/>
-            <a:ext cx="5212080" cy="2377440"/>
-          </a:xfrm>
-          <a:prstGeom prst="roundRect">
-            <a:avLst/>
-          </a:prstGeom>
-          <a:solidFill>
-            <a:srgbClr val="FFF3D8"/>
-          </a:solidFill>
-          <a:ln w="12700">
-            <a:solidFill>
-              <a:srgbClr val="C76F2E"/>
-            </a:solidFill>
-          </a:ln>
-        </p:spPr>
-        <p:txBody>
-          <a:bodyPr wrap="square" lIns="177800" tIns="177800" rIns="177800" bIns="177800"/>
-          <a:lstStyle/>
-          <a:p>
-            <a:pPr algn="ctr"/>
-            <a:r>
-              <a:rPr lang="ru-RU" sz="2000" b="1">
-                <a:solidFill>
-                  <a:srgbClr val="18212B"/>
-                </a:solidFill>
-                <a:latin typeface="Aptos"/>
-                <a:cs typeface="Aptos"/>
-              </a:rPr>
-              <a:t>Без backplane</a:t>
-            </a:r>
-          </a:p>
-          <a:p>
-            <a:pPr algn="ctr"/>
-            <a:r>
-              <a:rPr lang="ru-RU" sz="2000" b="1">
-                <a:solidFill>
-                  <a:srgbClr val="18212B"/>
-                </a:solidFill>
-                <a:latin typeface="Aptos"/>
-                <a:cs typeface="Aptos"/>
-              </a:rPr>
-              <a:t>timeout 10000 мс</a:t>
-            </a:r>
-          </a:p>
-          <a:p>
-            <a:pPr algn="ctr"/>
-            <a:r>
-              <a:rPr lang="ru-RU" sz="2000" b="1">
-                <a:solidFill>
-                  <a:srgbClr val="18212B"/>
-                </a:solidFill>
-                <a:latin typeface="Aptos"/>
-                <a:cs typeface="Aptos"/>
-              </a:rPr>
-              <a:t>событие не доставлено</a:t>
-            </a:r>
-          </a:p>
-        </p:txBody>
-      </p:sp>
-      <p:sp>
-        <p:nvSpPr>
-          <p:cNvPr id="21" name="Shape 21"/>
-          <p:cNvSpPr txBox="1"/>
-          <p:nvPr/>
-        </p:nvSpPr>
-        <p:spPr>
-          <a:xfrm>
-            <a:off x="6172200" y="1554480"/>
-            <a:ext cx="5212080" cy="2377440"/>
+            <a:ext cx="5349240" cy="4160520"/>
           </a:xfrm>
           <a:prstGeom prst="roundRect">
             <a:avLst/>
@@ -1704,79 +2299,239 @@
           <a:bodyPr wrap="square" lIns="177800" tIns="177800" rIns="177800" bIns="177800"/>
           <a:lstStyle/>
           <a:p>
-            <a:pPr algn="ctr"/>
-            <a:r>
-              <a:rPr lang="ru-RU" sz="2000" b="1">
-                <a:solidFill>
-                  <a:srgbClr val="18212B"/>
-                </a:solidFill>
-                <a:latin typeface="Aptos"/>
-                <a:cs typeface="Aptos"/>
-              </a:rPr>
-              <a:t>С backplane</a:t>
-            </a:r>
-          </a:p>
-          <a:p>
-            <a:pPr algn="ctr"/>
-            <a:r>
-              <a:rPr lang="ru-RU" sz="2000" b="1">
-                <a:solidFill>
-                  <a:srgbClr val="18212B"/>
-                </a:solidFill>
-                <a:latin typeface="Aptos"/>
-                <a:cs typeface="Aptos"/>
-              </a:rPr>
-              <a:t>ok: true · 5 из 5</a:t>
-            </a:r>
-          </a:p>
-          <a:p>
-            <a:pPr algn="ctr"/>
-            <a:r>
-              <a:rPr lang="ru-RU" sz="2000" b="1">
-                <a:solidFill>
-                  <a:srgbClr val="18212B"/>
-                </a:solidFill>
-                <a:latin typeface="Aptos"/>
-                <a:cs typeface="Aptos"/>
-              </a:rPr>
-              <a:t>p95 = 11,6 мс</a:t>
-            </a:r>
-          </a:p>
-        </p:txBody>
-      </p:sp>
-      <p:sp>
-        <p:nvSpPr>
-          <p:cNvPr id="22" name="Shape 22"/>
-          <p:cNvSpPr txBox="1"/>
-          <p:nvPr/>
-        </p:nvSpPr>
-        <p:spPr>
-          <a:xfrm>
-            <a:off x="685800" y="4297680"/>
-            <a:ext cx="10698480" cy="502920"/>
-          </a:xfrm>
-          <a:prstGeom prst="roundRect">
-            <a:avLst/>
-          </a:prstGeom>
-          <a:noFill/>
-          <a:ln>
-            <a:noFill/>
-          </a:ln>
-        </p:spPr>
-        <p:txBody>
-          <a:bodyPr wrap="square" lIns="177800" tIns="177800" rIns="177800" bIns="177800"/>
-          <a:lstStyle/>
-          <a:p>
-            <a:pPr algn="ctr"/>
-            <a:r>
-              <a:rPr lang="ru-RU" sz="1400" b="0">
-                <a:solidFill>
-                  <a:srgbClr val="5E6A75"/>
-                </a:solidFill>
-                <a:latin typeface="Aptos"/>
-                <a:cs typeface="Aptos"/>
-              </a:rPr>
-              <a:t>Один код, один сценарий — разница только в наличии межузлового канала.</a:t>
+            <a:pPr algn="l"/>
+            <a:r>
+              <a:rPr lang="ru-RU" sz="1500" b="1">
+                <a:solidFill>
+                  <a:srgbClr val="18212B"/>
+                </a:solidFill>
+                <a:latin typeface="Aptos"/>
+                <a:cs typeface="Aptos"/>
+              </a:rPr>
+              <a:t>Два режима</a:t>
+            </a:r>
+          </a:p>
+          <a:p>
+            <a:pPr algn="l"/>
+            <a:r>
+              <a:rPr lang="ru-RU" sz="1500" b="1">
+                <a:solidFill>
+                  <a:srgbClr val="18212B"/>
+                </a:solidFill>
+                <a:latin typeface="Aptos"/>
+                <a:cs typeface="Aptos"/>
+              </a:rPr>
+              <a:t/>
+            </a:r>
+          </a:p>
+          <a:p>
+            <a:pPr algn="l"/>
+            <a:r>
+              <a:rPr lang="ru-RU" sz="1500" b="1">
+                <a:solidFill>
+                  <a:srgbClr val="18212B"/>
+                </a:solidFill>
+                <a:latin typeface="Aptos"/>
+                <a:cs typeface="Aptos"/>
+              </a:rPr>
+              <a:t>• Multi-instance без Redis backplane — воспроизведение проблемы</a:t>
+            </a:r>
+          </a:p>
+          <a:p>
+            <a:pPr algn="l"/>
+            <a:r>
+              <a:rPr lang="ru-RU" sz="1500" b="1">
+                <a:solidFill>
+                  <a:srgbClr val="18212B"/>
+                </a:solidFill>
+                <a:latin typeface="Aptos"/>
+                <a:cs typeface="Aptos"/>
+              </a:rPr>
+              <a:t/>
+            </a:r>
+          </a:p>
+          <a:p>
+            <a:pPr algn="l"/>
+            <a:r>
+              <a:rPr lang="ru-RU" sz="1500" b="1">
+                <a:solidFill>
+                  <a:srgbClr val="18212B"/>
+                </a:solidFill>
+                <a:latin typeface="Aptos"/>
+                <a:cs typeface="Aptos"/>
+              </a:rPr>
+              <a:t>• Multi-instance с Redis backplane — проверка решения</a:t>
+            </a:r>
+          </a:p>
+          <a:p>
+            <a:pPr algn="l"/>
+            <a:r>
+              <a:rPr lang="ru-RU" sz="1500" b="1">
+                <a:solidFill>
+                  <a:srgbClr val="18212B"/>
+                </a:solidFill>
+                <a:latin typeface="Aptos"/>
+                <a:cs typeface="Aptos"/>
+              </a:rPr>
+              <a:t/>
+            </a:r>
+          </a:p>
+          <a:p>
+            <a:pPr algn="l"/>
+            <a:r>
+              <a:rPr lang="ru-RU" sz="1500" b="1">
+                <a:solidFill>
+                  <a:srgbClr val="18212B"/>
+                </a:solidFill>
+                <a:latin typeface="Aptos"/>
+                <a:cs typeface="Aptos"/>
+              </a:rPr>
+              <a:t>Один и тот же код, один и тот же сценарий; отличие — значение REDIS_CONNECTION_STRING.</a:t>
+            </a:r>
+          </a:p>
+        </p:txBody>
+      </p:sp>
+      <p:sp>
+        <p:nvSpPr>
+          <p:cNvPr id="21" name="Shape 21"/>
+          <p:cNvSpPr txBox="1"/>
+          <p:nvPr/>
+        </p:nvSpPr>
+        <p:spPr>
+          <a:xfrm>
+            <a:off x="6172200" y="1554480"/>
+            <a:ext cx="5349240" cy="4160520"/>
+          </a:xfrm>
+          <a:prstGeom prst="roundRect">
+            <a:avLst/>
+          </a:prstGeom>
+          <a:solidFill>
+            <a:srgbClr val="FFFFFF"/>
+          </a:solidFill>
+          <a:ln w="12700">
+            <a:solidFill>
+              <a:srgbClr val="D7D2C7"/>
+            </a:solidFill>
+          </a:ln>
+        </p:spPr>
+        <p:txBody>
+          <a:bodyPr wrap="square" lIns="177800" tIns="177800" rIns="177800" bIns="177800"/>
+          <a:lstStyle/>
+          <a:p>
+            <a:pPr algn="l"/>
+            <a:r>
+              <a:rPr lang="ru-RU" sz="1500" b="0">
+                <a:solidFill>
+                  <a:srgbClr val="18212B"/>
+                </a:solidFill>
+                <a:latin typeface="Aptos"/>
+                <a:cs typeface="Aptos"/>
+              </a:rPr>
+              <a:t>Четыре сценария</a:t>
+            </a:r>
+          </a:p>
+          <a:p>
+            <a:pPr algn="l"/>
+            <a:r>
+              <a:rPr lang="ru-RU" sz="1500" b="0">
+                <a:solidFill>
+                  <a:srgbClr val="18212B"/>
+                </a:solidFill>
+                <a:latin typeface="Aptos"/>
+                <a:cs typeface="Aptos"/>
+              </a:rPr>
+              <a:t/>
+            </a:r>
+          </a:p>
+          <a:p>
+            <a:pPr algn="l"/>
+            <a:r>
+              <a:rPr lang="ru-RU" sz="1500" b="0">
+                <a:solidFill>
+                  <a:srgbClr val="18212B"/>
+                </a:solidFill>
+                <a:latin typeface="Aptos"/>
+                <a:cs typeface="Aptos"/>
+              </a:rPr>
+              <a:t>• Одиночная cross-node доставка</a:t>
+            </a:r>
+          </a:p>
+          <a:p>
+            <a:pPr algn="l"/>
+            <a:r>
+              <a:rPr lang="ru-RU" sz="1500" b="0">
+                <a:solidFill>
+                  <a:srgbClr val="18212B"/>
+                </a:solidFill>
+                <a:latin typeface="Aptos"/>
+                <a:cs typeface="Aptos"/>
+              </a:rPr>
+              <a:t/>
+            </a:r>
+          </a:p>
+          <a:p>
+            <a:pPr algn="l"/>
+            <a:r>
+              <a:rPr lang="ru-RU" sz="1500" b="0">
+                <a:solidFill>
+                  <a:srgbClr val="18212B"/>
+                </a:solidFill>
+                <a:latin typeface="Aptos"/>
+                <a:cs typeface="Aptos"/>
+              </a:rPr>
+              <a:t>• Серия из 5 итераций (THESIS_ITERATIONS)</a:t>
+            </a:r>
+          </a:p>
+          <a:p>
+            <a:pPr algn="l"/>
+            <a:r>
+              <a:rPr lang="ru-RU" sz="1500" b="0">
+                <a:solidFill>
+                  <a:srgbClr val="18212B"/>
+                </a:solidFill>
+                <a:latin typeface="Aptos"/>
+                <a:cs typeface="Aptos"/>
+              </a:rPr>
+              <a:t/>
+            </a:r>
+          </a:p>
+          <a:p>
+            <a:pPr algn="l"/>
+            <a:r>
+              <a:rPr lang="ru-RU" sz="1500" b="0">
+                <a:solidFill>
+                  <a:srgbClr val="18212B"/>
+                </a:solidFill>
+                <a:latin typeface="Aptos"/>
+                <a:cs typeface="Aptos"/>
+              </a:rPr>
+              <a:t>• Rejoin после разрыва соединения</a:t>
+            </a:r>
+          </a:p>
+          <a:p>
+            <a:pPr algn="l"/>
+            <a:r>
+              <a:rPr lang="ru-RU" sz="1500" b="0">
+                <a:solidFill>
+                  <a:srgbClr val="18212B"/>
+                </a:solidFill>
+                <a:latin typeface="Aptos"/>
+                <a:cs typeface="Aptos"/>
+              </a:rPr>
+              <a:t/>
+            </a:r>
+          </a:p>
+          <a:p>
+            <a:pPr algn="l"/>
+            <a:r>
+              <a:rPr lang="ru-RU" sz="1500" b="0">
+                <a:solidFill>
+                  <a:srgbClr val="18212B"/>
+                </a:solidFill>
+                <a:latin typeface="Aptos"/>
+                <a:cs typeface="Aptos"/>
+              </a:rPr>
+              <a:t>• Failover после остановки узла</a:t>
             </a:r>
           </a:p>
         </p:txBody>
@@ -1883,7 +2638,44 @@
                 <a:latin typeface="Aptos"/>
                 <a:cs typeface="Aptos"/>
               </a:rPr>
-              <a:t>Устойчивость: rejoin и failover</a:t>
+              <a:t>Главный результат</a:t>
+            </a:r>
+          </a:p>
+        </p:txBody>
+      </p:sp>
+      <p:sp>
+        <p:nvSpPr>
+          <p:cNvPr id="11" name="Shape 11"/>
+          <p:cNvSpPr txBox="1"/>
+          <p:nvPr/>
+        </p:nvSpPr>
+        <p:spPr>
+          <a:xfrm>
+            <a:off x="621792" y="987552"/>
+            <a:ext cx="9875520" cy="320040"/>
+          </a:xfrm>
+          <a:prstGeom prst="roundRect">
+            <a:avLst/>
+          </a:prstGeom>
+          <a:noFill/>
+          <a:ln>
+            <a:noFill/>
+          </a:ln>
+        </p:spPr>
+        <p:txBody>
+          <a:bodyPr wrap="square" lIns="177800" tIns="177800" rIns="177800" bIns="177800"/>
+          <a:lstStyle/>
+          <a:p>
+            <a:pPr algn="l"/>
+            <a:r>
+              <a:rPr lang="ru-RU" sz="1300" b="0">
+                <a:solidFill>
+                  <a:srgbClr val="5E6A75"/>
+                </a:solidFill>
+                <a:latin typeface="Aptos"/>
+                <a:cs typeface="Aptos"/>
+              </a:rPr>
+              <a:t>Один код и один сценарий — разница только в наличии Redis-канала</a:t>
             </a:r>
           </a:p>
         </p:txBody>
@@ -1896,18 +2688,18 @@
         </p:nvSpPr>
         <p:spPr>
           <a:xfrm>
-            <a:off x="685800" y="1600200"/>
-            <a:ext cx="5212080" cy="2286000"/>
+            <a:off x="685800" y="1554480"/>
+            <a:ext cx="5349240" cy="3291840"/>
           </a:xfrm>
           <a:prstGeom prst="roundRect">
             <a:avLst/>
           </a:prstGeom>
           <a:solidFill>
-            <a:srgbClr val="FFFFFF"/>
+            <a:srgbClr val="FFF3D8"/>
           </a:solidFill>
           <a:ln w="12700">
             <a:solidFill>
-              <a:srgbClr val="D7D2C7"/>
+              <a:srgbClr val="C76F2E"/>
             </a:solidFill>
           </a:ln>
         </p:spPr>
@@ -1915,42 +2707,81 @@
           <a:bodyPr wrap="square" lIns="177800" tIns="177800" rIns="177800" bIns="177800"/>
           <a:lstStyle/>
           <a:p>
-            <a:pPr algn="l"/>
-            <a:r>
-              <a:rPr lang="ru-RU" sz="1500" b="0">
-                <a:solidFill>
-                  <a:srgbClr val="18212B"/>
-                </a:solidFill>
-                <a:latin typeface="Aptos"/>
-                <a:cs typeface="Aptos"/>
-              </a:rPr>
-              <a:t>Rejoin после разрыва</a:t>
-            </a:r>
-          </a:p>
-          <a:p>
-            <a:pPr algn="l"/>
-            <a:r>
-              <a:rPr lang="ru-RU" sz="1500" b="0">
-                <a:solidFill>
-                  <a:srgbClr val="18212B"/>
-                </a:solidFill>
-                <a:latin typeface="Aptos"/>
-                <a:cs typeface="Aptos"/>
-              </a:rPr>
-              <a:t>Новый connectionId, повторный JoinReportGroupAsync.</a:t>
-            </a:r>
-          </a:p>
-          <a:p>
-            <a:pPr algn="l"/>
-            <a:r>
-              <a:rPr lang="ru-RU" sz="1500" b="0">
-                <a:solidFill>
-                  <a:srgbClr val="18212B"/>
-                </a:solidFill>
-                <a:latin typeface="Aptos"/>
-                <a:cs typeface="Aptos"/>
-              </a:rPr>
-              <a:t>Событие после rejoin — 6,6 мс.</a:t>
+            <a:pPr algn="ctr"/>
+            <a:r>
+              <a:rPr lang="ru-RU" sz="1800" b="1">
+                <a:solidFill>
+                  <a:srgbClr val="18212B"/>
+                </a:solidFill>
+                <a:latin typeface="Aptos"/>
+                <a:cs typeface="Aptos"/>
+              </a:rPr>
+              <a:t>Без backplane</a:t>
+            </a:r>
+          </a:p>
+          <a:p>
+            <a:pPr algn="ctr"/>
+            <a:r>
+              <a:rPr lang="ru-RU" sz="1800" b="1">
+                <a:solidFill>
+                  <a:srgbClr val="18212B"/>
+                </a:solidFill>
+                <a:latin typeface="Aptos"/>
+                <a:cs typeface="Aptos"/>
+              </a:rPr>
+              <a:t/>
+            </a:r>
+          </a:p>
+          <a:p>
+            <a:pPr algn="ctr"/>
+            <a:r>
+              <a:rPr lang="ru-RU" sz="1800" b="1">
+                <a:solidFill>
+                  <a:srgbClr val="18212B"/>
+                </a:solidFill>
+                <a:latin typeface="Aptos"/>
+                <a:cs typeface="Aptos"/>
+              </a:rPr>
+              <a:t>ReceiveReportPatch</a:t>
+            </a:r>
+          </a:p>
+          <a:p>
+            <a:pPr algn="ctr"/>
+            <a:r>
+              <a:rPr lang="ru-RU" sz="1800" b="1">
+                <a:solidFill>
+                  <a:srgbClr val="18212B"/>
+                </a:solidFill>
+                <a:latin typeface="Aptos"/>
+                <a:cs typeface="Aptos"/>
+              </a:rPr>
+              <a:t>timed out · 10 000 мс</a:t>
+            </a:r>
+          </a:p>
+          <a:p>
+            <a:pPr algn="ctr"/>
+            <a:r>
+              <a:rPr lang="ru-RU" sz="1800" b="1">
+                <a:solidFill>
+                  <a:srgbClr val="18212B"/>
+                </a:solidFill>
+                <a:latin typeface="Aptos"/>
+                <a:cs typeface="Aptos"/>
+              </a:rPr>
+              <a:t/>
+            </a:r>
+          </a:p>
+          <a:p>
+            <a:pPr algn="ctr"/>
+            <a:r>
+              <a:rPr lang="ru-RU" sz="1800" b="1">
+                <a:solidFill>
+                  <a:srgbClr val="18212B"/>
+                </a:solidFill>
+                <a:latin typeface="Aptos"/>
+                <a:cs typeface="Aptos"/>
+              </a:rPr>
+              <a:t>Событие, созданное на app-api-1, не дошло до клиента на app-api-2</a:t>
             </a:r>
           </a:p>
         </p:txBody>
@@ -1963,8 +2794,8 @@
         </p:nvSpPr>
         <p:spPr>
           <a:xfrm>
-            <a:off x="6172200" y="1600200"/>
-            <a:ext cx="5212080" cy="2286000"/>
+            <a:off x="6172200" y="1554480"/>
+            <a:ext cx="5349240" cy="3291840"/>
           </a:xfrm>
           <a:prstGeom prst="roundRect">
             <a:avLst/>
@@ -1982,42 +2813,118 @@
           <a:bodyPr wrap="square" lIns="177800" tIns="177800" rIns="177800" bIns="177800"/>
           <a:lstStyle/>
           <a:p>
-            <a:pPr algn="l"/>
-            <a:r>
-              <a:rPr lang="ru-RU" sz="1500" b="0">
-                <a:solidFill>
-                  <a:srgbClr val="18212B"/>
-                </a:solidFill>
-                <a:latin typeface="Aptos"/>
-                <a:cs typeface="Aptos"/>
-              </a:rPr>
-              <a:t>Failover узла</a:t>
-            </a:r>
-          </a:p>
-          <a:p>
-            <a:pPr algn="l"/>
-            <a:r>
-              <a:rPr lang="ru-RU" sz="1500" b="0">
-                <a:solidFill>
-                  <a:srgbClr val="18212B"/>
-                </a:solidFill>
-                <a:latin typeface="Aptos"/>
-                <a:cs typeface="Aptos"/>
-              </a:rPr>
-              <a:t>Клиент переподключился через nginx с app-api-2 на app-api-1.</a:t>
-            </a:r>
-          </a:p>
-          <a:p>
-            <a:pPr algn="l"/>
-            <a:r>
-              <a:rPr lang="ru-RU" sz="1500" b="0">
-                <a:solidFill>
-                  <a:srgbClr val="18212B"/>
-                </a:solidFill>
-                <a:latin typeface="Aptos"/>
-                <a:cs typeface="Aptos"/>
-              </a:rPr>
-              <a:t>reconnect + rejoin — 240,3 мс.</a:t>
+            <a:pPr algn="ctr"/>
+            <a:r>
+              <a:rPr lang="ru-RU" sz="1800" b="1">
+                <a:solidFill>
+                  <a:srgbClr val="18212B"/>
+                </a:solidFill>
+                <a:latin typeface="Aptos"/>
+                <a:cs typeface="Aptos"/>
+              </a:rPr>
+              <a:t>С backplane</a:t>
+            </a:r>
+          </a:p>
+          <a:p>
+            <a:pPr algn="ctr"/>
+            <a:r>
+              <a:rPr lang="ru-RU" sz="1800" b="1">
+                <a:solidFill>
+                  <a:srgbClr val="18212B"/>
+                </a:solidFill>
+                <a:latin typeface="Aptos"/>
+                <a:cs typeface="Aptos"/>
+              </a:rPr>
+              <a:t/>
+            </a:r>
+          </a:p>
+          <a:p>
+            <a:pPr algn="ctr"/>
+            <a:r>
+              <a:rPr lang="ru-RU" sz="1800" b="1">
+                <a:solidFill>
+                  <a:srgbClr val="18212B"/>
+                </a:solidFill>
+                <a:latin typeface="Aptos"/>
+                <a:cs typeface="Aptos"/>
+              </a:rPr>
+              <a:t>ok: true · ReceiveReportPatch получен</a:t>
+            </a:r>
+          </a:p>
+          <a:p>
+            <a:pPr algn="ctr"/>
+            <a:r>
+              <a:rPr lang="ru-RU" sz="1800" b="1">
+                <a:solidFill>
+                  <a:srgbClr val="18212B"/>
+                </a:solidFill>
+                <a:latin typeface="Aptos"/>
+                <a:cs typeface="Aptos"/>
+              </a:rPr>
+              <a:t>deliveryLatencyMs ≈ 9,5 мс</a:t>
+            </a:r>
+          </a:p>
+          <a:p>
+            <a:pPr algn="ctr"/>
+            <a:r>
+              <a:rPr lang="ru-RU" sz="1800" b="1">
+                <a:solidFill>
+                  <a:srgbClr val="18212B"/>
+                </a:solidFill>
+                <a:latin typeface="Aptos"/>
+                <a:cs typeface="Aptos"/>
+              </a:rPr>
+              <a:t/>
+            </a:r>
+          </a:p>
+          <a:p>
+            <a:pPr algn="ctr"/>
+            <a:r>
+              <a:rPr lang="ru-RU" sz="1800" b="1">
+                <a:solidFill>
+                  <a:srgbClr val="18212B"/>
+                </a:solidFill>
+                <a:latin typeface="Aptos"/>
+                <a:cs typeface="Aptos"/>
+              </a:rPr>
+              <a:t>Клиент на app-api-2 получил событие с app-api-1</a:t>
+            </a:r>
+          </a:p>
+        </p:txBody>
+      </p:sp>
+      <p:sp>
+        <p:nvSpPr>
+          <p:cNvPr id="22" name="Shape 22"/>
+          <p:cNvSpPr txBox="1"/>
+          <p:nvPr/>
+        </p:nvSpPr>
+        <p:spPr>
+          <a:xfrm>
+            <a:off x="685800" y="5074920"/>
+            <a:ext cx="10835640" cy="777240"/>
+          </a:xfrm>
+          <a:prstGeom prst="roundRect">
+            <a:avLst/>
+          </a:prstGeom>
+          <a:noFill/>
+          <a:ln>
+            <a:noFill/>
+          </a:ln>
+        </p:spPr>
+        <p:txBody>
+          <a:bodyPr wrap="square" lIns="177800" tIns="177800" rIns="177800" bIns="177800"/>
+          <a:lstStyle/>
+          <a:p>
+            <a:pPr algn="ctr"/>
+            <a:r>
+              <a:rPr lang="ru-RU" sz="1300" b="0">
+                <a:solidFill>
+                  <a:srgbClr val="5E6A75"/>
+                </a:solidFill>
+                <a:latin typeface="Aptos"/>
+                <a:cs typeface="Aptos"/>
+              </a:rPr>
+              <a:t>Сопоставление двух режимов на одном стенде показывает причинную связь между включением межузлового канала SignalR и успешной доставкой события.</a:t>
             </a:r>
           </a:p>
         </p:txBody>
@@ -2124,7 +3031,44 @@
                 <a:latin typeface="Aptos"/>
                 <a:cs typeface="Aptos"/>
               </a:rPr>
-              <a:t>Вывод</a:t>
+              <a:t>Дополнительные проверки</a:t>
+            </a:r>
+          </a:p>
+        </p:txBody>
+      </p:sp>
+      <p:sp>
+        <p:nvSpPr>
+          <p:cNvPr id="11" name="Shape 11"/>
+          <p:cNvSpPr txBox="1"/>
+          <p:nvPr/>
+        </p:nvSpPr>
+        <p:spPr>
+          <a:xfrm>
+            <a:off x="621792" y="987552"/>
+            <a:ext cx="9875520" cy="320040"/>
+          </a:xfrm>
+          <a:prstGeom prst="roundRect">
+            <a:avLst/>
+          </a:prstGeom>
+          <a:noFill/>
+          <a:ln>
+            <a:noFill/>
+          </a:ln>
+        </p:spPr>
+        <p:txBody>
+          <a:bodyPr wrap="square" lIns="177800" tIns="177800" rIns="177800" bIns="177800"/>
+          <a:lstStyle/>
+          <a:p>
+            <a:pPr algn="l"/>
+            <a:r>
+              <a:rPr lang="ru-RU" sz="1300" b="0">
+                <a:solidFill>
+                  <a:srgbClr val="5E6A75"/>
+                </a:solidFill>
+                <a:latin typeface="Aptos"/>
+                <a:cs typeface="Aptos"/>
+              </a:rPr>
+              <a:t>Повторяемость, повторное вступление в группу и восстановление после отказа узла</a:t>
             </a:r>
           </a:p>
         </p:txBody>
@@ -2137,8 +3081,8 @@
         </p:nvSpPr>
         <p:spPr>
           <a:xfrm>
-            <a:off x="685800" y="1691640"/>
-            <a:ext cx="10698480" cy="1280160"/>
+            <a:off x="685800" y="1600200"/>
+            <a:ext cx="3657600" cy="4114800"/>
           </a:xfrm>
           <a:prstGeom prst="roundRect">
             <a:avLst/>
@@ -2156,16 +3100,133 @@
           <a:bodyPr wrap="square" lIns="177800" tIns="177800" rIns="177800" bIns="177800"/>
           <a:lstStyle/>
           <a:p>
-            <a:pPr algn="ctr"/>
-            <a:r>
-              <a:rPr lang="ru-RU" sz="2000" b="1">
-                <a:solidFill>
-                  <a:srgbClr val="18212B"/>
-                </a:solidFill>
-                <a:latin typeface="Aptos"/>
-                <a:cs typeface="Aptos"/>
-              </a:rPr>
-              <a:t>Ограничение single-node WebSocket-архитектуры устранено за счёт распределённого real-time контура.</a:t>
+            <a:pPr algn="l"/>
+            <a:r>
+              <a:rPr lang="ru-RU" sz="1500" b="0">
+                <a:solidFill>
+                  <a:srgbClr val="18212B"/>
+                </a:solidFill>
+                <a:latin typeface="Aptos"/>
+                <a:cs typeface="Aptos"/>
+              </a:rPr>
+              <a:t>Серия 5 итераций</a:t>
+            </a:r>
+          </a:p>
+          <a:p>
+            <a:pPr algn="l"/>
+            <a:r>
+              <a:rPr lang="ru-RU" sz="1500" b="0">
+                <a:solidFill>
+                  <a:srgbClr val="18212B"/>
+                </a:solidFill>
+                <a:latin typeface="Aptos"/>
+                <a:cs typeface="Aptos"/>
+              </a:rPr>
+              <a:t/>
+            </a:r>
+          </a:p>
+          <a:p>
+            <a:pPr algn="l"/>
+            <a:r>
+              <a:rPr lang="ru-RU" sz="1500" b="0">
+                <a:solidFill>
+                  <a:srgbClr val="18212B"/>
+                </a:solidFill>
+                <a:latin typeface="Aptos"/>
+                <a:cs typeface="Aptos"/>
+              </a:rPr>
+              <a:t>successful 5 / 5</a:t>
+            </a:r>
+          </a:p>
+          <a:p>
+            <a:pPr algn="l"/>
+            <a:r>
+              <a:rPr lang="ru-RU" sz="1500" b="0">
+                <a:solidFill>
+                  <a:srgbClr val="18212B"/>
+                </a:solidFill>
+                <a:latin typeface="Aptos"/>
+                <a:cs typeface="Aptos"/>
+              </a:rPr>
+              <a:t/>
+            </a:r>
+          </a:p>
+          <a:p>
+            <a:pPr algn="l"/>
+            <a:r>
+              <a:rPr lang="ru-RU" sz="1500" b="0">
+                <a:solidFill>
+                  <a:srgbClr val="18212B"/>
+                </a:solidFill>
+                <a:latin typeface="Aptos"/>
+                <a:cs typeface="Aptos"/>
+              </a:rPr>
+              <a:t>min 5,5 мс</a:t>
+            </a:r>
+          </a:p>
+          <a:p>
+            <a:pPr algn="l"/>
+            <a:r>
+              <a:rPr lang="ru-RU" sz="1500" b="0">
+                <a:solidFill>
+                  <a:srgbClr val="18212B"/>
+                </a:solidFill>
+                <a:latin typeface="Aptos"/>
+                <a:cs typeface="Aptos"/>
+              </a:rPr>
+              <a:t>avg 8,4 мс</a:t>
+            </a:r>
+          </a:p>
+          <a:p>
+            <a:pPr algn="l"/>
+            <a:r>
+              <a:rPr lang="ru-RU" sz="1500" b="0">
+                <a:solidFill>
+                  <a:srgbClr val="18212B"/>
+                </a:solidFill>
+                <a:latin typeface="Aptos"/>
+                <a:cs typeface="Aptos"/>
+              </a:rPr>
+              <a:t>p50 9,1 мс</a:t>
+            </a:r>
+          </a:p>
+          <a:p>
+            <a:pPr algn="l"/>
+            <a:r>
+              <a:rPr lang="ru-RU" sz="1500" b="0">
+                <a:solidFill>
+                  <a:srgbClr val="18212B"/>
+                </a:solidFill>
+                <a:latin typeface="Aptos"/>
+                <a:cs typeface="Aptos"/>
+              </a:rPr>
+              <a:t>p95 11,6 мс</a:t>
+            </a:r>
+          </a:p>
+          <a:p>
+            <a:pPr algn="l"/>
+            <a:r>
+              <a:rPr lang="ru-RU" sz="1500" b="0">
+                <a:solidFill>
+                  <a:srgbClr val="18212B"/>
+                </a:solidFill>
+                <a:latin typeface="Aptos"/>
+                <a:cs typeface="Aptos"/>
+              </a:rPr>
+              <a:t/>
+            </a:r>
+          </a:p>
+          <a:p>
+            <a:pPr algn="l"/>
+            <a:r>
+              <a:rPr lang="ru-RU" sz="1500" b="0">
+                <a:solidFill>
+                  <a:srgbClr val="18212B"/>
+                </a:solidFill>
+                <a:latin typeface="Aptos"/>
+                <a:cs typeface="Aptos"/>
+              </a:rPr>
+              <a:t>Подтверждена повторяемость доставки.</a:t>
             </a:r>
           </a:p>
         </p:txBody>
@@ -2178,8 +3239,8 @@
         </p:nvSpPr>
         <p:spPr>
           <a:xfrm>
-            <a:off x="685800" y="3246120"/>
-            <a:ext cx="3383280" cy="1554480"/>
+            <a:off x="4434840" y="1600200"/>
+            <a:ext cx="3657600" cy="4114800"/>
           </a:xfrm>
           <a:prstGeom prst="roundRect">
             <a:avLst/>
@@ -2199,27 +3260,118 @@
           <a:p>
             <a:pPr algn="l"/>
             <a:r>
-              <a:rPr lang="ru-RU" sz="1400" b="1">
-                <a:solidFill>
-                  <a:srgbClr val="18212B"/>
-                </a:solidFill>
-                <a:latin typeface="Aptos"/>
-                <a:cs typeface="Aptos"/>
-              </a:rPr>
-              <a:t>Проблема</a:t>
-            </a:r>
-          </a:p>
-          <a:p>
-            <a:pPr algn="l"/>
-            <a:r>
-              <a:rPr lang="ru-RU" sz="1400" b="1">
-                <a:solidFill>
-                  <a:srgbClr val="18212B"/>
-                </a:solidFill>
-                <a:latin typeface="Aptos"/>
-                <a:cs typeface="Aptos"/>
-              </a:rPr>
-              <a:t>Без backplane событие теряется между узлами.</a:t>
+              <a:rPr lang="ru-RU" sz="1500" b="0">
+                <a:solidFill>
+                  <a:srgbClr val="18212B"/>
+                </a:solidFill>
+                <a:latin typeface="Aptos"/>
+                <a:cs typeface="Aptos"/>
+              </a:rPr>
+              <a:t>Rejoin после разрыва</a:t>
+            </a:r>
+          </a:p>
+          <a:p>
+            <a:pPr algn="l"/>
+            <a:r>
+              <a:rPr lang="ru-RU" sz="1500" b="0">
+                <a:solidFill>
+                  <a:srgbClr val="18212B"/>
+                </a:solidFill>
+                <a:latin typeface="Aptos"/>
+                <a:cs typeface="Aptos"/>
+              </a:rPr>
+              <a:t/>
+            </a:r>
+          </a:p>
+          <a:p>
+            <a:pPr algn="l"/>
+            <a:r>
+              <a:rPr lang="ru-RU" sz="1500" b="0">
+                <a:solidFill>
+                  <a:srgbClr val="18212B"/>
+                </a:solidFill>
+                <a:latin typeface="Aptos"/>
+                <a:cs typeface="Aptos"/>
+              </a:rPr>
+              <a:t>Новый connectionId</a:t>
+            </a:r>
+          </a:p>
+          <a:p>
+            <a:pPr algn="l"/>
+            <a:r>
+              <a:rPr lang="ru-RU" sz="1500" b="0">
+                <a:solidFill>
+                  <a:srgbClr val="18212B"/>
+                </a:solidFill>
+                <a:latin typeface="Aptos"/>
+                <a:cs typeface="Aptos"/>
+              </a:rPr>
+              <a:t>повторный JoinReportGroupAsync</a:t>
+            </a:r>
+          </a:p>
+          <a:p>
+            <a:pPr algn="l"/>
+            <a:r>
+              <a:rPr lang="ru-RU" sz="1500" b="0">
+                <a:solidFill>
+                  <a:srgbClr val="18212B"/>
+                </a:solidFill>
+                <a:latin typeface="Aptos"/>
+                <a:cs typeface="Aptos"/>
+              </a:rPr>
+              <a:t/>
+            </a:r>
+          </a:p>
+          <a:p>
+            <a:pPr algn="l"/>
+            <a:r>
+              <a:rPr lang="ru-RU" sz="1500" b="0">
+                <a:solidFill>
+                  <a:srgbClr val="18212B"/>
+                </a:solidFill>
+                <a:latin typeface="Aptos"/>
+                <a:cs typeface="Aptos"/>
+              </a:rPr>
+              <a:t>rejoin 12,9 мс</a:t>
+            </a:r>
+          </a:p>
+          <a:p>
+            <a:pPr algn="l"/>
+            <a:r>
+              <a:rPr lang="ru-RU" sz="1500" b="0">
+                <a:solidFill>
+                  <a:srgbClr val="18212B"/>
+                </a:solidFill>
+                <a:latin typeface="Aptos"/>
+                <a:cs typeface="Aptos"/>
+              </a:rPr>
+              <a:t>delivery 6,6 мс</a:t>
+            </a:r>
+          </a:p>
+          <a:p>
+            <a:pPr algn="l"/>
+            <a:r>
+              <a:rPr lang="ru-RU" sz="1500" b="0">
+                <a:solidFill>
+                  <a:srgbClr val="18212B"/>
+                </a:solidFill>
+                <a:latin typeface="Aptos"/>
+                <a:cs typeface="Aptos"/>
+              </a:rPr>
+              <a:t/>
+            </a:r>
+          </a:p>
+          <a:p>
+            <a:pPr algn="l"/>
+            <a:r>
+              <a:rPr lang="ru-RU" sz="1500" b="0">
+                <a:solidFill>
+                  <a:srgbClr val="18212B"/>
+                </a:solidFill>
+                <a:latin typeface="Aptos"/>
+                <a:cs typeface="Aptos"/>
+              </a:rPr>
+              <a:t>Подтверждена повторная подписка.</a:t>
             </a:r>
           </a:p>
         </p:txBody>
@@ -2232,8 +3384,8 @@
         </p:nvSpPr>
         <p:spPr>
           <a:xfrm>
-            <a:off x="4251960" y="3246120"/>
-            <a:ext cx="3383280" cy="1554480"/>
+            <a:off x="8183880" y="1600200"/>
+            <a:ext cx="3657600" cy="4114800"/>
           </a:xfrm>
           <a:prstGeom prst="roundRect">
             <a:avLst/>
@@ -2253,41 +3405,280 @@
           <a:p>
             <a:pPr algn="l"/>
             <a:r>
-              <a:rPr lang="ru-RU" sz="1400" b="1">
-                <a:solidFill>
-                  <a:srgbClr val="18212B"/>
-                </a:solidFill>
-                <a:latin typeface="Aptos"/>
-                <a:cs typeface="Aptos"/>
-              </a:rPr>
-              <a:t>Решение</a:t>
-            </a:r>
-          </a:p>
-          <a:p>
-            <a:pPr algn="l"/>
-            <a:r>
-              <a:rPr lang="ru-RU" sz="1400" b="1">
-                <a:solidFill>
-                  <a:srgbClr val="18212B"/>
-                </a:solidFill>
-                <a:latin typeface="Aptos"/>
-                <a:cs typeface="Aptos"/>
-              </a:rPr>
-              <a:t>SignalR + Redis backplane + nginx + два app-api.</a:t>
-            </a:r>
-          </a:p>
-        </p:txBody>
-      </p:sp>
-      <p:sp>
-        <p:nvSpPr>
-          <p:cNvPr id="23" name="Shape 23"/>
-          <p:cNvSpPr txBox="1"/>
-          <p:nvPr/>
-        </p:nvSpPr>
-        <p:spPr>
-          <a:xfrm>
-            <a:off x="7818120" y="3246120"/>
-            <a:ext cx="3383280" cy="1554480"/>
+              <a:rPr lang="ru-RU" sz="1500" b="0">
+                <a:solidFill>
+                  <a:srgbClr val="18212B"/>
+                </a:solidFill>
+                <a:latin typeface="Aptos"/>
+                <a:cs typeface="Aptos"/>
+              </a:rPr>
+              <a:t>Failover узла</a:t>
+            </a:r>
+          </a:p>
+          <a:p>
+            <a:pPr algn="l"/>
+            <a:r>
+              <a:rPr lang="ru-RU" sz="1500" b="0">
+                <a:solidFill>
+                  <a:srgbClr val="18212B"/>
+                </a:solidFill>
+                <a:latin typeface="Aptos"/>
+                <a:cs typeface="Aptos"/>
+              </a:rPr>
+              <a:t/>
+            </a:r>
+          </a:p>
+          <a:p>
+            <a:pPr algn="l"/>
+            <a:r>
+              <a:rPr lang="ru-RU" sz="1500" b="0">
+                <a:solidFill>
+                  <a:srgbClr val="18212B"/>
+                </a:solidFill>
+                <a:latin typeface="Aptos"/>
+                <a:cs typeface="Aptos"/>
+              </a:rPr>
+              <a:t>Контейнер app-api-2 остановлен</a:t>
+            </a:r>
+          </a:p>
+          <a:p>
+            <a:pPr algn="l"/>
+            <a:r>
+              <a:rPr lang="ru-RU" sz="1500" b="0">
+                <a:solidFill>
+                  <a:srgbClr val="18212B"/>
+                </a:solidFill>
+                <a:latin typeface="Aptos"/>
+                <a:cs typeface="Aptos"/>
+              </a:rPr>
+              <a:t>клиент переподключился через nginx к app-api-1</a:t>
+            </a:r>
+          </a:p>
+          <a:p>
+            <a:pPr algn="l"/>
+            <a:r>
+              <a:rPr lang="ru-RU" sz="1500" b="0">
+                <a:solidFill>
+                  <a:srgbClr val="18212B"/>
+                </a:solidFill>
+                <a:latin typeface="Aptos"/>
+                <a:cs typeface="Aptos"/>
+              </a:rPr>
+              <a:t/>
+            </a:r>
+          </a:p>
+          <a:p>
+            <a:pPr algn="l"/>
+            <a:r>
+              <a:rPr lang="ru-RU" sz="1500" b="0">
+                <a:solidFill>
+                  <a:srgbClr val="18212B"/>
+                </a:solidFill>
+                <a:latin typeface="Aptos"/>
+                <a:cs typeface="Aptos"/>
+              </a:rPr>
+              <a:t>reconnect 240,3 мс</a:t>
+            </a:r>
+          </a:p>
+          <a:p>
+            <a:pPr algn="l"/>
+            <a:r>
+              <a:rPr lang="ru-RU" sz="1500" b="0">
+                <a:solidFill>
+                  <a:srgbClr val="18212B"/>
+                </a:solidFill>
+                <a:latin typeface="Aptos"/>
+                <a:cs typeface="Aptos"/>
+              </a:rPr>
+              <a:t>delivery 7,3 мс</a:t>
+            </a:r>
+          </a:p>
+          <a:p>
+            <a:pPr algn="l"/>
+            <a:r>
+              <a:rPr lang="ru-RU" sz="1500" b="0">
+                <a:solidFill>
+                  <a:srgbClr val="18212B"/>
+                </a:solidFill>
+                <a:latin typeface="Aptos"/>
+                <a:cs typeface="Aptos"/>
+              </a:rPr>
+              <a:t/>
+            </a:r>
+          </a:p>
+          <a:p>
+            <a:pPr algn="l"/>
+            <a:r>
+              <a:rPr lang="ru-RU" sz="1500" b="0">
+                <a:solidFill>
+                  <a:srgbClr val="18212B"/>
+                </a:solidFill>
+                <a:latin typeface="Aptos"/>
+                <a:cs typeface="Aptos"/>
+              </a:rPr>
+              <a:t>Подтверждено восстановление после отказа узла.</a:t>
+            </a:r>
+          </a:p>
+        </p:txBody>
+      </p:sp>
+      <p:sp>
+        <p:nvSpPr>
+          <p:cNvPr id="900" name="Shape 900"/>
+          <p:cNvSpPr txBox="1"/>
+          <p:nvPr/>
+        </p:nvSpPr>
+        <p:spPr>
+          <a:xfrm>
+            <a:off x="594360" y="6510528"/>
+            <a:ext cx="10972800" cy="201168"/>
+          </a:xfrm>
+          <a:prstGeom prst="roundRect">
+            <a:avLst/>
+          </a:prstGeom>
+          <a:noFill/>
+          <a:ln>
+            <a:noFill/>
+          </a:ln>
+        </p:spPr>
+        <p:txBody>
+          <a:bodyPr wrap="square" lIns="177800" tIns="177800" rIns="177800" bIns="177800"/>
+          <a:lstStyle/>
+          <a:p>
+            <a:pPr algn="l"/>
+            <a:r>
+              <a:rPr lang="ru-RU" sz="800" b="0">
+                <a:solidFill>
+                  <a:srgbClr val="5E6A75"/>
+                </a:solidFill>
+                <a:latin typeface="Aptos"/>
+                <a:cs typeface="Aptos"/>
+              </a:rPr>
+              <a:t>Real-time scale-out · 08</a:t>
+            </a:r>
+          </a:p>
+        </p:txBody>
+      </p:sp>
+    </p:spTree>
+  </p:cSld>
+  <p:clrMapOvr>
+    <a:masterClrMapping/>
+  </p:clrMapOvr>
+</p:sld>
+</file>
+
+<file path=ppt/slides/slide9.xml><?xml version="1.0" encoding="utf-8"?>
+<p:sld xmlns:a="http://schemas.openxmlformats.org/drawingml/2006/main" xmlns:r="http://schemas.openxmlformats.org/officeDocument/2006/relationships" xmlns:p="http://schemas.openxmlformats.org/presentationml/2006/main">
+  <p:cSld>
+    <p:bg>
+      <p:bgPr>
+        <a:solidFill>
+          <a:srgbClr val="F6F3EC"/>
+        </a:solidFill>
+        <a:effectLst/>
+      </p:bgPr>
+    </p:bg>
+    <p:spTree>
+      <p:nvGrpSpPr>
+        <p:cNvPr id="1" name=""/>
+        <p:cNvGrpSpPr/>
+        <p:nvPr/>
+      </p:nvGrpSpPr>
+      <p:grpSpPr>
+        <a:xfrm>
+          <a:off x="0" y="0"/>
+          <a:ext cx="0" cy="0"/>
+          <a:chOff x="0" y="0"/>
+          <a:chExt cx="0" cy="0"/>
+        </a:xfrm>
+      </p:grpSpPr>
+      <p:sp>
+        <p:nvSpPr>
+          <p:cNvPr id="10" name="Shape 10"/>
+          <p:cNvSpPr txBox="1"/>
+          <p:nvPr/>
+        </p:nvSpPr>
+        <p:spPr>
+          <a:xfrm>
+            <a:off x="594360" y="411480"/>
+            <a:ext cx="10881360" cy="658368"/>
+          </a:xfrm>
+          <a:prstGeom prst="roundRect">
+            <a:avLst/>
+          </a:prstGeom>
+          <a:noFill/>
+          <a:ln>
+            <a:noFill/>
+          </a:ln>
+        </p:spPr>
+        <p:txBody>
+          <a:bodyPr wrap="square" lIns="177800" tIns="177800" rIns="177800" bIns="177800"/>
+          <a:lstStyle/>
+          <a:p>
+            <a:pPr algn="l"/>
+            <a:r>
+              <a:rPr lang="ru-RU" sz="3000" b="1">
+                <a:solidFill>
+                  <a:srgbClr val="18212B"/>
+                </a:solidFill>
+                <a:latin typeface="Aptos"/>
+                <a:cs typeface="Aptos"/>
+              </a:rPr>
+              <a:t>Вывод</a:t>
+            </a:r>
+          </a:p>
+        </p:txBody>
+      </p:sp>
+      <p:sp>
+        <p:nvSpPr>
+          <p:cNvPr id="20" name="Shape 20"/>
+          <p:cNvSpPr txBox="1"/>
+          <p:nvPr/>
+        </p:nvSpPr>
+        <p:spPr>
+          <a:xfrm>
+            <a:off x="685800" y="1554480"/>
+            <a:ext cx="10835640" cy="1371600"/>
+          </a:xfrm>
+          <a:prstGeom prst="roundRect">
+            <a:avLst/>
+          </a:prstGeom>
+          <a:solidFill>
+            <a:srgbClr val="E8F3F1"/>
+          </a:solidFill>
+          <a:ln w="12700">
+            <a:solidFill>
+              <a:srgbClr val="0B6E69"/>
+            </a:solidFill>
+          </a:ln>
+        </p:spPr>
+        <p:txBody>
+          <a:bodyPr wrap="square" lIns="177800" tIns="177800" rIns="177800" bIns="177800"/>
+          <a:lstStyle/>
+          <a:p>
+            <a:pPr algn="ctr"/>
+            <a:r>
+              <a:rPr lang="ru-RU" sz="1800" b="1">
+                <a:solidFill>
+                  <a:srgbClr val="18212B"/>
+                </a:solidFill>
+                <a:latin typeface="Aptos"/>
+                <a:cs typeface="Aptos"/>
+              </a:rPr>
+              <a:t>Ограничение single-node WebSocket-архитектуры устранено за счёт распределённого real-time контура; тезис работы подтверждён экспериментально.</a:t>
+            </a:r>
+          </a:p>
+        </p:txBody>
+      </p:sp>
+      <p:sp>
+        <p:nvSpPr>
+          <p:cNvPr id="21" name="Shape 21"/>
+          <p:cNvSpPr txBox="1"/>
+          <p:nvPr/>
+        </p:nvSpPr>
+        <p:spPr>
+          <a:xfrm>
+            <a:off x="685800" y="3108960"/>
+            <a:ext cx="3520440" cy="2606040"/>
           </a:xfrm>
           <a:prstGeom prst="roundRect">
             <a:avLst/>
@@ -2314,6 +3705,140 @@
                 <a:latin typeface="Aptos"/>
                 <a:cs typeface="Aptos"/>
               </a:rPr>
+              <a:t>Проблема</a:t>
+            </a:r>
+          </a:p>
+          <a:p>
+            <a:pPr algn="l"/>
+            <a:r>
+              <a:rPr lang="ru-RU" sz="1400" b="1">
+                <a:solidFill>
+                  <a:srgbClr val="18212B"/>
+                </a:solidFill>
+                <a:latin typeface="Aptos"/>
+                <a:cs typeface="Aptos"/>
+              </a:rPr>
+              <a:t/>
+            </a:r>
+          </a:p>
+          <a:p>
+            <a:pPr algn="l"/>
+            <a:r>
+              <a:rPr lang="ru-RU" sz="1400" b="1">
+                <a:solidFill>
+                  <a:srgbClr val="18212B"/>
+                </a:solidFill>
+                <a:latin typeface="Aptos"/>
+                <a:cs typeface="Aptos"/>
+              </a:rPr>
+              <a:t>Single-node SignalR: события не пересекают границу узла.</a:t>
+            </a:r>
+          </a:p>
+        </p:txBody>
+      </p:sp>
+      <p:sp>
+        <p:nvSpPr>
+          <p:cNvPr id="22" name="Shape 22"/>
+          <p:cNvSpPr txBox="1"/>
+          <p:nvPr/>
+        </p:nvSpPr>
+        <p:spPr>
+          <a:xfrm>
+            <a:off x="4343400" y="3108960"/>
+            <a:ext cx="3520440" cy="2606040"/>
+          </a:xfrm>
+          <a:prstGeom prst="roundRect">
+            <a:avLst/>
+          </a:prstGeom>
+          <a:solidFill>
+            <a:srgbClr val="FFFFFF"/>
+          </a:solidFill>
+          <a:ln w="12700">
+            <a:solidFill>
+              <a:srgbClr val="D7D2C7"/>
+            </a:solidFill>
+          </a:ln>
+        </p:spPr>
+        <p:txBody>
+          <a:bodyPr wrap="square" lIns="177800" tIns="177800" rIns="177800" bIns="177800"/>
+          <a:lstStyle/>
+          <a:p>
+            <a:pPr algn="l"/>
+            <a:r>
+              <a:rPr lang="ru-RU" sz="1400" b="1">
+                <a:solidFill>
+                  <a:srgbClr val="18212B"/>
+                </a:solidFill>
+                <a:latin typeface="Aptos"/>
+                <a:cs typeface="Aptos"/>
+              </a:rPr>
+              <a:t>Решение</a:t>
+            </a:r>
+          </a:p>
+          <a:p>
+            <a:pPr algn="l"/>
+            <a:r>
+              <a:rPr lang="ru-RU" sz="1400" b="1">
+                <a:solidFill>
+                  <a:srgbClr val="18212B"/>
+                </a:solidFill>
+                <a:latin typeface="Aptos"/>
+                <a:cs typeface="Aptos"/>
+              </a:rPr>
+              <a:t/>
+            </a:r>
+          </a:p>
+          <a:p>
+            <a:pPr algn="l"/>
+            <a:r>
+              <a:rPr lang="ru-RU" sz="1400" b="1">
+                <a:solidFill>
+                  <a:srgbClr val="18212B"/>
+                </a:solidFill>
+                <a:latin typeface="Aptos"/>
+                <a:cs typeface="Aptos"/>
+              </a:rPr>
+              <a:t>SignalR + Redis backplane + nginx + два app-api; общий код, конфигурация через переменную окружения.</a:t>
+            </a:r>
+          </a:p>
+        </p:txBody>
+      </p:sp>
+      <p:sp>
+        <p:nvSpPr>
+          <p:cNvPr id="23" name="Shape 23"/>
+          <p:cNvSpPr txBox="1"/>
+          <p:nvPr/>
+        </p:nvSpPr>
+        <p:spPr>
+          <a:xfrm>
+            <a:off x="8001000" y="3108960"/>
+            <a:ext cx="3520440" cy="2606040"/>
+          </a:xfrm>
+          <a:prstGeom prst="roundRect">
+            <a:avLst/>
+          </a:prstGeom>
+          <a:solidFill>
+            <a:srgbClr val="FFFFFF"/>
+          </a:solidFill>
+          <a:ln w="12700">
+            <a:solidFill>
+              <a:srgbClr val="D7D2C7"/>
+            </a:solidFill>
+          </a:ln>
+        </p:spPr>
+        <p:txBody>
+          <a:bodyPr wrap="square" lIns="177800" tIns="177800" rIns="177800" bIns="177800"/>
+          <a:lstStyle/>
+          <a:p>
+            <a:pPr algn="l"/>
+            <a:r>
+              <a:rPr lang="ru-RU" sz="1400" b="1">
+                <a:solidFill>
+                  <a:srgbClr val="18212B"/>
+                </a:solidFill>
+                <a:latin typeface="Aptos"/>
+                <a:cs typeface="Aptos"/>
+              </a:rPr>
               <a:t>Доказательство</a:t>
             </a:r>
           </a:p>
@@ -2327,7 +3852,20 @@
                 <a:latin typeface="Aptos"/>
                 <a:cs typeface="Aptos"/>
               </a:rPr>
-              <a:t>Delivery, серия, rejoin, failover.</a:t>
+              <a:t/>
+            </a:r>
+          </a:p>
+          <a:p>
+            <a:pPr algn="l"/>
+            <a:r>
+              <a:rPr lang="ru-RU" sz="1400" b="1">
+                <a:solidFill>
+                  <a:srgbClr val="18212B"/>
+                </a:solidFill>
+                <a:latin typeface="Aptos"/>
+                <a:cs typeface="Aptos"/>
+              </a:rPr>
+              <a:t>Delivery (без / с) · серия 5 / 5 · rejoin · failover — воспроизводимый Docker Compose стенд.</a:t>
             </a:r>
           </a:p>
         </p:txBody>
@@ -2364,7 +3902,7 @@
                 <a:latin typeface="Aptos"/>
                 <a:cs typeface="Aptos"/>
               </a:rPr>
-              <a:t>Real-time scale-out · 08</a:t>
+              <a:t>Real-time scale-out · 09</a:t>
             </a:r>
           </a:p>
         </p:txBody>

--- a/build/pptx/vkr-defense-draft.pptx
+++ b/build/pptx/vkr-defense-draft.pptx
@@ -806,7 +806,7 @@
                 <a:latin typeface="Aptos"/>
                 <a:cs typeface="Aptos"/>
               </a:rPr>
-              <a:t>Нет масштабирования; один узел — точка отказа</a:t>
+              <a:t>Нет масштабирования; один узел — единственная точка отказа</a:t>
             </a:r>
           </a:p>
         </p:txBody>
@@ -847,7 +847,7 @@
                 <a:latin typeface="Aptos"/>
                 <a:cs typeface="Aptos"/>
               </a:rPr>
-              <a:t>Несколько экземпляров без backplane</a:t>
+              <a:t>Несколько экземпляров без общего канала</a:t>
             </a:r>
           </a:p>
           <a:p>
@@ -860,7 +860,7 @@
                 <a:latin typeface="Aptos"/>
                 <a:cs typeface="Aptos"/>
               </a:rPr>
-              <a:t>Real-time пространство фрагментируется по узлам</a:t>
+              <a:t>События не доходят до клиентов, подключённых к другим узлам</a:t>
             </a:r>
           </a:p>
         </p:txBody>
@@ -901,7 +901,7 @@
                 <a:latin typeface="Aptos"/>
                 <a:cs typeface="Aptos"/>
               </a:rPr>
-              <a:t>Sticky sessions</a:t>
+              <a:t>Привязка клиента к узлу (sticky)</a:t>
             </a:r>
           </a:p>
           <a:p>
@@ -914,7 +914,7 @@
                 <a:latin typeface="Aptos"/>
                 <a:cs typeface="Aptos"/>
               </a:rPr>
-              <a:t>Удерживают клиента на узле, но не доставляют события на другие</a:t>
+              <a:t>Клиент остаётся на одном узле, но события на другие не приходят</a:t>
             </a:r>
           </a:p>
         </p:txBody>
@@ -955,7 +955,7 @@
                 <a:latin typeface="Aptos"/>
                 <a:cs typeface="Aptos"/>
               </a:rPr>
-              <a:t>Broker / event bus</a:t>
+              <a:t>Внешняя шина событий</a:t>
             </a:r>
           </a:p>
           <a:p>
@@ -968,7 +968,7 @@
                 <a:latin typeface="Aptos"/>
                 <a:cs typeface="Aptos"/>
               </a:rPr>
-              <a:t>Даёт межузловую доставку, но требует схем событий и persistence</a:t>
+              <a:t>Доставка между узлами есть, но требуется отдельная схема событий</a:t>
             </a:r>
           </a:p>
         </p:txBody>
@@ -1009,7 +1009,7 @@
                 <a:latin typeface="Aptos"/>
                 <a:cs typeface="Aptos"/>
               </a:rPr>
-              <a:t>Managed real-time service</a:t>
+              <a:t>Облачный real-time сервис</a:t>
             </a:r>
           </a:p>
           <a:p>
@@ -1022,7 +1022,7 @@
                 <a:latin typeface="Aptos"/>
                 <a:cs typeface="Aptos"/>
               </a:rPr>
-              <a:t>Уменьшает контроль над self-hosted контуром</a:t>
+              <a:t>Готовое решение, но снижает контроль над собственным контуром</a:t>
             </a:r>
           </a:p>
         </p:txBody>
@@ -1076,7 +1076,7 @@
                 <a:latin typeface="Aptos"/>
                 <a:cs typeface="Aptos"/>
               </a:rPr>
-              <a:t>self-hosted, без перестройки логики, transient pub/sub</a:t>
+              <a:t>Штатный механизм, без перестройки кода, подходит для событий интерфейса</a:t>
             </a:r>
           </a:p>
         </p:txBody>
@@ -1113,7 +1113,7 @@
                 <a:latin typeface="Aptos"/>
                 <a:cs typeface="Aptos"/>
               </a:rPr>
-              <a:t>Критерии выбора: совместимость с self-hosted стендом, минимальная перестройка доменной логики, наличие штатной поддержки в ASP.NET Core SignalR, пригодность для transient UI-событий и воспроизводимость на локальном Docker Compose стенде.</a:t>
+              <a:t>Критерии выбора: запускается на локальном стенде, сохраняет существующий код доставки событий, штатно поддерживается в ASP.NET Core SignalR, подходит для коротких событий интерфейса и легко воспроизводится.</a:t>
             </a:r>
           </a:p>
         </p:txBody>
@@ -1855,7 +1855,7 @@
                 <a:latin typeface="Aptos"/>
                 <a:cs typeface="Aptos"/>
               </a:rPr>
-              <a:t>Backend-конфигурация, диагностика, стенд и проверочный клиент</a:t>
+              <a:t>Подключён межузловой канал, добавлена диагностика, собран стенд и клиент проверки</a:t>
             </a:r>
           </a:p>
         </p:txBody>
@@ -1870,73 +1870,6 @@
           <a:xfrm>
             <a:off x="685800" y="1554480"/>
             <a:ext cx="5349240" cy="2194560"/>
-          </a:xfrm>
-          <a:prstGeom prst="roundRect">
-            <a:avLst/>
-          </a:prstGeom>
-          <a:solidFill>
-            <a:srgbClr val="FFFFFF"/>
-          </a:solidFill>
-          <a:ln w="12700">
-            <a:solidFill>
-              <a:srgbClr val="0B6E69"/>
-            </a:solidFill>
-          </a:ln>
-        </p:spPr>
-        <p:txBody>
-          <a:bodyPr wrap="square" lIns="177800" tIns="177800" rIns="177800" bIns="177800"/>
-          <a:lstStyle/>
-          <a:p>
-            <a:pPr algn="l"/>
-            <a:r>
-              <a:rPr lang="ru-RU" sz="1400" b="0">
-                <a:solidFill>
-                  <a:srgbClr val="18212B"/>
-                </a:solidFill>
-                <a:latin typeface="Aptos"/>
-                <a:cs typeface="Aptos"/>
-              </a:rPr>
-              <a:t>1 · Redis backplane для SignalR</a:t>
-            </a:r>
-          </a:p>
-          <a:p>
-            <a:pPr algn="l"/>
-            <a:r>
-              <a:rPr lang="ru-RU" sz="1400" b="0">
-                <a:solidFill>
-                  <a:srgbClr val="18212B"/>
-                </a:solidFill>
-                <a:latin typeface="Aptos"/>
-                <a:cs typeface="Aptos"/>
-              </a:rPr>
-              <a:t/>
-            </a:r>
-          </a:p>
-          <a:p>
-            <a:pPr algn="l"/>
-            <a:r>
-              <a:rPr lang="ru-RU" sz="1400" b="0">
-                <a:solidFill>
-                  <a:srgbClr val="18212B"/>
-                </a:solidFill>
-                <a:latin typeface="Aptos"/>
-                <a:cs typeface="Aptos"/>
-              </a:rPr>
-              <a:t>AddStackExchangeRedis с prefix app-api-realtime; включается переменной REDIS_CONNECTION_STRING — один и тот же код в обоих режимах.</a:t>
-            </a:r>
-          </a:p>
-        </p:txBody>
-      </p:sp>
-      <p:sp>
-        <p:nvSpPr>
-          <p:cNvPr id="21" name="Shape 21"/>
-          <p:cNvSpPr txBox="1"/>
-          <p:nvPr/>
-        </p:nvSpPr>
-        <p:spPr>
-          <a:xfrm>
-            <a:off x="685800" y="3840480"/>
-            <a:ext cx="5349240" cy="1874520"/>
           </a:xfrm>
           <a:prstGeom prst="roundRect">
             <a:avLst/>
@@ -1963,7 +1896,7 @@
                 <a:latin typeface="Aptos"/>
                 <a:cs typeface="Aptos"/>
               </a:rPr>
-              <a:t>2 · Диагностический контур</a:t>
+              <a:t>1 · Межузловая доставка событий</a:t>
             </a:r>
           </a:p>
           <a:p>
@@ -1989,21 +1922,21 @@
                 <a:latin typeface="Aptos"/>
                 <a:cs typeface="Aptos"/>
               </a:rPr>
-              <a:t>SERVER_INSTANCE_ID, GetConnectionDiagnosticsAsync(), логирование подключения, вступления в группу и отправки события.</a:t>
-            </a:r>
-          </a:p>
-        </p:txBody>
-      </p:sp>
-      <p:sp>
-        <p:nvSpPr>
-          <p:cNvPr id="22" name="Shape 22"/>
-          <p:cNvSpPr txBox="1"/>
-          <p:nvPr/>
-        </p:nvSpPr>
-        <p:spPr>
-          <a:xfrm>
-            <a:off x="6172200" y="1554480"/>
-            <a:ext cx="5349240" cy="2194560"/>
+              <a:t>К SignalR подключён Redis backplane. Включается переменной окружения — один и тот же код работает и в режиме с межузловым каналом, и без него.</a:t>
+            </a:r>
+          </a:p>
+        </p:txBody>
+      </p:sp>
+      <p:sp>
+        <p:nvSpPr>
+          <p:cNvPr id="21" name="Shape 21"/>
+          <p:cNvSpPr txBox="1"/>
+          <p:nvPr/>
+        </p:nvSpPr>
+        <p:spPr>
+          <a:xfrm>
+            <a:off x="685800" y="3840480"/>
+            <a:ext cx="5349240" cy="1874520"/>
           </a:xfrm>
           <a:prstGeom prst="roundRect">
             <a:avLst/>
@@ -2030,7 +1963,7 @@
                 <a:latin typeface="Aptos"/>
                 <a:cs typeface="Aptos"/>
               </a:rPr>
-              <a:t>3 · Multi-instance стенд</a:t>
+              <a:t>2 · Диагностика подключения</a:t>
             </a:r>
           </a:p>
           <a:p>
@@ -2056,21 +1989,21 @@
                 <a:latin typeface="Aptos"/>
                 <a:cs typeface="Aptos"/>
               </a:rPr>
-              <a:t>docker-compose.thesis.yml: app-api-1, app-api-2, Redis, PostgreSQL, nginx; override .no-backplane.yml для воспроизведения исходной проблемы.</a:t>
-            </a:r>
-          </a:p>
-        </p:txBody>
-      </p:sp>
-      <p:sp>
-        <p:nvSpPr>
-          <p:cNvPr id="23" name="Shape 23"/>
-          <p:cNvSpPr txBox="1"/>
-          <p:nvPr/>
-        </p:nvSpPr>
-        <p:spPr>
-          <a:xfrm>
-            <a:off x="6172200" y="3840480"/>
-            <a:ext cx="5349240" cy="1874520"/>
+              <a:t>Узел сообщает свой идентификатор и идентификатор соединения; ключевые события жизненного цикла соединения логируются.</a:t>
+            </a:r>
+          </a:p>
+        </p:txBody>
+      </p:sp>
+      <p:sp>
+        <p:nvSpPr>
+          <p:cNvPr id="22" name="Shape 22"/>
+          <p:cNvSpPr txBox="1"/>
+          <p:nvPr/>
+        </p:nvSpPr>
+        <p:spPr>
+          <a:xfrm>
+            <a:off x="6172200" y="1554480"/>
+            <a:ext cx="5349240" cy="2194560"/>
           </a:xfrm>
           <a:prstGeom prst="roundRect">
             <a:avLst/>
@@ -2097,7 +2030,7 @@
                 <a:latin typeface="Aptos"/>
                 <a:cs typeface="Aptos"/>
               </a:rPr>
-              <a:t>4 · Проверочный клиент на Node.js</a:t>
+              <a:t>3 · Многоэкземплярный стенд</a:t>
             </a:r>
           </a:p>
           <a:p>
@@ -2123,7 +2056,74 @@
                 <a:latin typeface="Aptos"/>
                 <a:cs typeface="Aptos"/>
               </a:rPr>
-              <a:t>realtime-scaleout-check.mjs: одиночная доставка, серия, rejoin, failover.</a:t>
+              <a:t>Два экземпляра backend за nginx, общая база данных и Redis, отдельный режим без межузлового канала — для воспроизведения исходной проблемы.</a:t>
+            </a:r>
+          </a:p>
+        </p:txBody>
+      </p:sp>
+      <p:sp>
+        <p:nvSpPr>
+          <p:cNvPr id="23" name="Shape 23"/>
+          <p:cNvSpPr txBox="1"/>
+          <p:nvPr/>
+        </p:nvSpPr>
+        <p:spPr>
+          <a:xfrm>
+            <a:off x="6172200" y="3840480"/>
+            <a:ext cx="5349240" cy="1874520"/>
+          </a:xfrm>
+          <a:prstGeom prst="roundRect">
+            <a:avLst/>
+          </a:prstGeom>
+          <a:solidFill>
+            <a:srgbClr val="FFFFFF"/>
+          </a:solidFill>
+          <a:ln w="12700">
+            <a:solidFill>
+              <a:srgbClr val="D7D2C7"/>
+            </a:solidFill>
+          </a:ln>
+        </p:spPr>
+        <p:txBody>
+          <a:bodyPr wrap="square" lIns="177800" tIns="177800" rIns="177800" bIns="177800"/>
+          <a:lstStyle/>
+          <a:p>
+            <a:pPr algn="l"/>
+            <a:r>
+              <a:rPr lang="ru-RU" sz="1400" b="0">
+                <a:solidFill>
+                  <a:srgbClr val="18212B"/>
+                </a:solidFill>
+                <a:latin typeface="Aptos"/>
+                <a:cs typeface="Aptos"/>
+              </a:rPr>
+              <a:t>4 · Проверочный клиент</a:t>
+            </a:r>
+          </a:p>
+          <a:p>
+            <a:pPr algn="l"/>
+            <a:r>
+              <a:rPr lang="ru-RU" sz="1400" b="0">
+                <a:solidFill>
+                  <a:srgbClr val="18212B"/>
+                </a:solidFill>
+                <a:latin typeface="Aptos"/>
+                <a:cs typeface="Aptos"/>
+              </a:rPr>
+              <a:t/>
+            </a:r>
+          </a:p>
+          <a:p>
+            <a:pPr algn="l"/>
+            <a:r>
+              <a:rPr lang="ru-RU" sz="1400" b="0">
+                <a:solidFill>
+                  <a:srgbClr val="18212B"/>
+                </a:solidFill>
+                <a:latin typeface="Aptos"/>
+                <a:cs typeface="Aptos"/>
+              </a:rPr>
+              <a:t>Подключается к разным узлам, фиксирует доставку события и поддерживает четыре сценария проверки.</a:t>
             </a:r>
           </a:p>
         </p:txBody>
@@ -2287,11 +2287,11 @@
             <a:avLst/>
           </a:prstGeom>
           <a:solidFill>
-            <a:srgbClr val="E8F3F1"/>
+            <a:srgbClr val="FFFFFF"/>
           </a:solidFill>
           <a:ln w="12700">
             <a:solidFill>
-              <a:srgbClr val="0B6E69"/>
+              <a:srgbClr val="D7D2C7"/>
             </a:solidFill>
           </a:ln>
         </p:spPr>
@@ -2301,7 +2301,7 @@
           <a:p>
             <a:pPr algn="l"/>
             <a:r>
-              <a:rPr lang="ru-RU" sz="1500" b="1">
+              <a:rPr lang="ru-RU" sz="1500" b="0">
                 <a:solidFill>
                   <a:srgbClr val="18212B"/>
                 </a:solidFill>
@@ -2314,7 +2314,7 @@
           <a:p>
             <a:pPr algn="l"/>
             <a:r>
-              <a:rPr lang="ru-RU" sz="1500" b="1">
+              <a:rPr lang="ru-RU" sz="1500" b="0">
                 <a:solidFill>
                   <a:srgbClr val="18212B"/>
                 </a:solidFill>
@@ -2327,20 +2327,20 @@
           <a:p>
             <a:pPr algn="l"/>
             <a:r>
-              <a:rPr lang="ru-RU" sz="1500" b="1">
-                <a:solidFill>
-                  <a:srgbClr val="18212B"/>
-                </a:solidFill>
-                <a:latin typeface="Aptos"/>
-                <a:cs typeface="Aptos"/>
-              </a:rPr>
-              <a:t>• Multi-instance без Redis backplane — воспроизведение проблемы</a:t>
-            </a:r>
-          </a:p>
-          <a:p>
-            <a:pPr algn="l"/>
-            <a:r>
-              <a:rPr lang="ru-RU" sz="1500" b="1">
+              <a:rPr lang="ru-RU" sz="1500" b="0">
+                <a:solidFill>
+                  <a:srgbClr val="18212B"/>
+                </a:solidFill>
+                <a:latin typeface="Aptos"/>
+                <a:cs typeface="Aptos"/>
+              </a:rPr>
+              <a:t>• Без межузлового канала — воспроизведение проблемы</a:t>
+            </a:r>
+          </a:p>
+          <a:p>
+            <a:pPr algn="l"/>
+            <a:r>
+              <a:rPr lang="ru-RU" sz="1500" b="0">
                 <a:solidFill>
                   <a:srgbClr val="18212B"/>
                 </a:solidFill>
@@ -2353,20 +2353,20 @@
           <a:p>
             <a:pPr algn="l"/>
             <a:r>
-              <a:rPr lang="ru-RU" sz="1500" b="1">
-                <a:solidFill>
-                  <a:srgbClr val="18212B"/>
-                </a:solidFill>
-                <a:latin typeface="Aptos"/>
-                <a:cs typeface="Aptos"/>
-              </a:rPr>
-              <a:t>• Multi-instance с Redis backplane — проверка решения</a:t>
-            </a:r>
-          </a:p>
-          <a:p>
-            <a:pPr algn="l"/>
-            <a:r>
-              <a:rPr lang="ru-RU" sz="1500" b="1">
+              <a:rPr lang="ru-RU" sz="1500" b="0">
+                <a:solidFill>
+                  <a:srgbClr val="18212B"/>
+                </a:solidFill>
+                <a:latin typeface="Aptos"/>
+                <a:cs typeface="Aptos"/>
+              </a:rPr>
+              <a:t>• С межузловым каналом — проверка решения</a:t>
+            </a:r>
+          </a:p>
+          <a:p>
+            <a:pPr algn="l"/>
+            <a:r>
+              <a:rPr lang="ru-RU" sz="1500" b="0">
                 <a:solidFill>
                   <a:srgbClr val="18212B"/>
                 </a:solidFill>
@@ -2379,14 +2379,14 @@
           <a:p>
             <a:pPr algn="l"/>
             <a:r>
-              <a:rPr lang="ru-RU" sz="1500" b="1">
-                <a:solidFill>
-                  <a:srgbClr val="18212B"/>
-                </a:solidFill>
-                <a:latin typeface="Aptos"/>
-                <a:cs typeface="Aptos"/>
-              </a:rPr>
-              <a:t>Один и тот же код, один и тот же сценарий; отличие — значение REDIS_CONNECTION_STRING.</a:t>
+              <a:rPr lang="ru-RU" sz="1500" b="0">
+                <a:solidFill>
+                  <a:srgbClr val="18212B"/>
+                </a:solidFill>
+                <a:latin typeface="Aptos"/>
+                <a:cs typeface="Aptos"/>
+              </a:rPr>
+              <a:t>Один и тот же код, один и тот же сценарий; отличие — наличие Redis backplane.</a:t>
             </a:r>
           </a:p>
         </p:txBody>
@@ -2453,7 +2453,7 @@
                 <a:latin typeface="Aptos"/>
                 <a:cs typeface="Aptos"/>
               </a:rPr>
-              <a:t>• Одиночная cross-node доставка</a:t>
+              <a:t>• Одиночная доставка между узлами</a:t>
             </a:r>
           </a:p>
           <a:p>
@@ -2479,7 +2479,7 @@
                 <a:latin typeface="Aptos"/>
                 <a:cs typeface="Aptos"/>
               </a:rPr>
-              <a:t>• Серия из 5 итераций (THESIS_ITERATIONS)</a:t>
+              <a:t>• Серия из пяти итераций</a:t>
             </a:r>
           </a:p>
           <a:p>
@@ -2505,7 +2505,7 @@
                 <a:latin typeface="Aptos"/>
                 <a:cs typeface="Aptos"/>
               </a:rPr>
-              <a:t>• Rejoin после разрыва соединения</a:t>
+              <a:t>• Восстановление подписки после разрыва</a:t>
             </a:r>
           </a:p>
           <a:p>
@@ -2531,7 +2531,7 @@
                 <a:latin typeface="Aptos"/>
                 <a:cs typeface="Aptos"/>
               </a:rPr>
-              <a:t>• Failover после остановки узла</a:t>
+              <a:t>• Переключение на другой узел после отказа</a:t>
             </a:r>
           </a:p>
         </p:txBody>
@@ -3068,7 +3068,7 @@
                 <a:latin typeface="Aptos"/>
                 <a:cs typeface="Aptos"/>
               </a:rPr>
-              <a:t>Повторяемость, повторное вступление в группу и восстановление после отказа узла</a:t>
+              <a:t>Повторяемость, восстановление подписки и переключение после отказа узла</a:t>
             </a:r>
           </a:p>
         </p:txBody>
@@ -3082,164 +3082,6 @@
         <p:spPr>
           <a:xfrm>
             <a:off x="685800" y="1600200"/>
-            <a:ext cx="3657600" cy="4114800"/>
-          </a:xfrm>
-          <a:prstGeom prst="roundRect">
-            <a:avLst/>
-          </a:prstGeom>
-          <a:solidFill>
-            <a:srgbClr val="E8F3F1"/>
-          </a:solidFill>
-          <a:ln w="12700">
-            <a:solidFill>
-              <a:srgbClr val="0B6E69"/>
-            </a:solidFill>
-          </a:ln>
-        </p:spPr>
-        <p:txBody>
-          <a:bodyPr wrap="square" lIns="177800" tIns="177800" rIns="177800" bIns="177800"/>
-          <a:lstStyle/>
-          <a:p>
-            <a:pPr algn="l"/>
-            <a:r>
-              <a:rPr lang="ru-RU" sz="1500" b="0">
-                <a:solidFill>
-                  <a:srgbClr val="18212B"/>
-                </a:solidFill>
-                <a:latin typeface="Aptos"/>
-                <a:cs typeface="Aptos"/>
-              </a:rPr>
-              <a:t>Серия 5 итераций</a:t>
-            </a:r>
-          </a:p>
-          <a:p>
-            <a:pPr algn="l"/>
-            <a:r>
-              <a:rPr lang="ru-RU" sz="1500" b="0">
-                <a:solidFill>
-                  <a:srgbClr val="18212B"/>
-                </a:solidFill>
-                <a:latin typeface="Aptos"/>
-                <a:cs typeface="Aptos"/>
-              </a:rPr>
-              <a:t/>
-            </a:r>
-          </a:p>
-          <a:p>
-            <a:pPr algn="l"/>
-            <a:r>
-              <a:rPr lang="ru-RU" sz="1500" b="0">
-                <a:solidFill>
-                  <a:srgbClr val="18212B"/>
-                </a:solidFill>
-                <a:latin typeface="Aptos"/>
-                <a:cs typeface="Aptos"/>
-              </a:rPr>
-              <a:t>successful 5 / 5</a:t>
-            </a:r>
-          </a:p>
-          <a:p>
-            <a:pPr algn="l"/>
-            <a:r>
-              <a:rPr lang="ru-RU" sz="1500" b="0">
-                <a:solidFill>
-                  <a:srgbClr val="18212B"/>
-                </a:solidFill>
-                <a:latin typeface="Aptos"/>
-                <a:cs typeface="Aptos"/>
-              </a:rPr>
-              <a:t/>
-            </a:r>
-          </a:p>
-          <a:p>
-            <a:pPr algn="l"/>
-            <a:r>
-              <a:rPr lang="ru-RU" sz="1500" b="0">
-                <a:solidFill>
-                  <a:srgbClr val="18212B"/>
-                </a:solidFill>
-                <a:latin typeface="Aptos"/>
-                <a:cs typeface="Aptos"/>
-              </a:rPr>
-              <a:t>min 5,5 мс</a:t>
-            </a:r>
-          </a:p>
-          <a:p>
-            <a:pPr algn="l"/>
-            <a:r>
-              <a:rPr lang="ru-RU" sz="1500" b="0">
-                <a:solidFill>
-                  <a:srgbClr val="18212B"/>
-                </a:solidFill>
-                <a:latin typeface="Aptos"/>
-                <a:cs typeface="Aptos"/>
-              </a:rPr>
-              <a:t>avg 8,4 мс</a:t>
-            </a:r>
-          </a:p>
-          <a:p>
-            <a:pPr algn="l"/>
-            <a:r>
-              <a:rPr lang="ru-RU" sz="1500" b="0">
-                <a:solidFill>
-                  <a:srgbClr val="18212B"/>
-                </a:solidFill>
-                <a:latin typeface="Aptos"/>
-                <a:cs typeface="Aptos"/>
-              </a:rPr>
-              <a:t>p50 9,1 мс</a:t>
-            </a:r>
-          </a:p>
-          <a:p>
-            <a:pPr algn="l"/>
-            <a:r>
-              <a:rPr lang="ru-RU" sz="1500" b="0">
-                <a:solidFill>
-                  <a:srgbClr val="18212B"/>
-                </a:solidFill>
-                <a:latin typeface="Aptos"/>
-                <a:cs typeface="Aptos"/>
-              </a:rPr>
-              <a:t>p95 11,6 мс</a:t>
-            </a:r>
-          </a:p>
-          <a:p>
-            <a:pPr algn="l"/>
-            <a:r>
-              <a:rPr lang="ru-RU" sz="1500" b="0">
-                <a:solidFill>
-                  <a:srgbClr val="18212B"/>
-                </a:solidFill>
-                <a:latin typeface="Aptos"/>
-                <a:cs typeface="Aptos"/>
-              </a:rPr>
-              <a:t/>
-            </a:r>
-          </a:p>
-          <a:p>
-            <a:pPr algn="l"/>
-            <a:r>
-              <a:rPr lang="ru-RU" sz="1500" b="0">
-                <a:solidFill>
-                  <a:srgbClr val="18212B"/>
-                </a:solidFill>
-                <a:latin typeface="Aptos"/>
-                <a:cs typeface="Aptos"/>
-              </a:rPr>
-              <a:t>Подтверждена повторяемость доставки.</a:t>
-            </a:r>
-          </a:p>
-        </p:txBody>
-      </p:sp>
-      <p:sp>
-        <p:nvSpPr>
-          <p:cNvPr id="21" name="Shape 21"/>
-          <p:cNvSpPr txBox="1"/>
-          <p:nvPr/>
-        </p:nvSpPr>
-        <p:spPr>
-          <a:xfrm>
-            <a:off x="4434840" y="1600200"/>
             <a:ext cx="3657600" cy="4114800"/>
           </a:xfrm>
           <a:prstGeom prst="roundRect">
@@ -3267,7 +3109,7 @@
                 <a:latin typeface="Aptos"/>
                 <a:cs typeface="Aptos"/>
               </a:rPr>
-              <a:t>Rejoin после разрыва</a:t>
+              <a:t>Серия из 5 итераций</a:t>
             </a:r>
           </a:p>
           <a:p>
@@ -3293,20 +3135,7 @@
                 <a:latin typeface="Aptos"/>
                 <a:cs typeface="Aptos"/>
               </a:rPr>
-              <a:t>Новый connectionId</a:t>
-            </a:r>
-          </a:p>
-          <a:p>
-            <a:pPr algn="l"/>
-            <a:r>
-              <a:rPr lang="ru-RU" sz="1500" b="0">
-                <a:solidFill>
-                  <a:srgbClr val="18212B"/>
-                </a:solidFill>
-                <a:latin typeface="Aptos"/>
-                <a:cs typeface="Aptos"/>
-              </a:rPr>
-              <a:t>повторный JoinReportGroupAsync</a:t>
+              <a:t>Успешно: 5 из 5</a:t>
             </a:r>
           </a:p>
           <a:p>
@@ -3332,20 +3161,46 @@
                 <a:latin typeface="Aptos"/>
                 <a:cs typeface="Aptos"/>
               </a:rPr>
-              <a:t>rejoin 12,9 мс</a:t>
-            </a:r>
-          </a:p>
-          <a:p>
-            <a:pPr algn="l"/>
-            <a:r>
-              <a:rPr lang="ru-RU" sz="1500" b="0">
-                <a:solidFill>
-                  <a:srgbClr val="18212B"/>
-                </a:solidFill>
-                <a:latin typeface="Aptos"/>
-                <a:cs typeface="Aptos"/>
-              </a:rPr>
-              <a:t>delivery 6,6 мс</a:t>
+              <a:t>min 5,5 мс</a:t>
+            </a:r>
+          </a:p>
+          <a:p>
+            <a:pPr algn="l"/>
+            <a:r>
+              <a:rPr lang="ru-RU" sz="1500" b="0">
+                <a:solidFill>
+                  <a:srgbClr val="18212B"/>
+                </a:solidFill>
+                <a:latin typeface="Aptos"/>
+                <a:cs typeface="Aptos"/>
+              </a:rPr>
+              <a:t>avg 8,4 мс</a:t>
+            </a:r>
+          </a:p>
+          <a:p>
+            <a:pPr algn="l"/>
+            <a:r>
+              <a:rPr lang="ru-RU" sz="1500" b="0">
+                <a:solidFill>
+                  <a:srgbClr val="18212B"/>
+                </a:solidFill>
+                <a:latin typeface="Aptos"/>
+                <a:cs typeface="Aptos"/>
+              </a:rPr>
+              <a:t>p50 9,1 мс</a:t>
+            </a:r>
+          </a:p>
+          <a:p>
+            <a:pPr algn="l"/>
+            <a:r>
+              <a:rPr lang="ru-RU" sz="1500" b="0">
+                <a:solidFill>
+                  <a:srgbClr val="18212B"/>
+                </a:solidFill>
+                <a:latin typeface="Aptos"/>
+                <a:cs typeface="Aptos"/>
+              </a:rPr>
+              <a:t>p95 11,6 мс</a:t>
             </a:r>
           </a:p>
           <a:p>
@@ -3371,20 +3226,20 @@
                 <a:latin typeface="Aptos"/>
                 <a:cs typeface="Aptos"/>
               </a:rPr>
-              <a:t>Подтверждена повторная подписка.</a:t>
-            </a:r>
-          </a:p>
-        </p:txBody>
-      </p:sp>
-      <p:sp>
-        <p:nvSpPr>
-          <p:cNvPr id="22" name="Shape 22"/>
-          <p:cNvSpPr txBox="1"/>
-          <p:nvPr/>
-        </p:nvSpPr>
-        <p:spPr>
-          <a:xfrm>
-            <a:off x="8183880" y="1600200"/>
+              <a:t>Подтверждена повторяемость доставки.</a:t>
+            </a:r>
+          </a:p>
+        </p:txBody>
+      </p:sp>
+      <p:sp>
+        <p:nvSpPr>
+          <p:cNvPr id="21" name="Shape 21"/>
+          <p:cNvSpPr txBox="1"/>
+          <p:nvPr/>
+        </p:nvSpPr>
+        <p:spPr>
+          <a:xfrm>
+            <a:off x="4434840" y="1600200"/>
             <a:ext cx="3657600" cy="4114800"/>
           </a:xfrm>
           <a:prstGeom prst="roundRect">
@@ -3412,7 +3267,7 @@
                 <a:latin typeface="Aptos"/>
                 <a:cs typeface="Aptos"/>
               </a:rPr>
-              <a:t>Failover узла</a:t>
+              <a:t>Восстановление подписки</a:t>
             </a:r>
           </a:p>
           <a:p>
@@ -3438,20 +3293,7 @@
                 <a:latin typeface="Aptos"/>
                 <a:cs typeface="Aptos"/>
               </a:rPr>
-              <a:t>Контейнер app-api-2 остановлен</a:t>
-            </a:r>
-          </a:p>
-          <a:p>
-            <a:pPr algn="l"/>
-            <a:r>
-              <a:rPr lang="ru-RU" sz="1500" b="0">
-                <a:solidFill>
-                  <a:srgbClr val="18212B"/>
-                </a:solidFill>
-                <a:latin typeface="Aptos"/>
-                <a:cs typeface="Aptos"/>
-              </a:rPr>
-              <a:t>клиент переподключился через nginx к app-api-1</a:t>
+              <a:t>После разрыва клиент создаёт новое соединение и снова вступает в группу отчёта.</a:t>
             </a:r>
           </a:p>
           <a:p>
@@ -3477,20 +3319,20 @@
                 <a:latin typeface="Aptos"/>
                 <a:cs typeface="Aptos"/>
               </a:rPr>
-              <a:t>reconnect 240,3 мс</a:t>
-            </a:r>
-          </a:p>
-          <a:p>
-            <a:pPr algn="l"/>
-            <a:r>
-              <a:rPr lang="ru-RU" sz="1500" b="0">
-                <a:solidFill>
-                  <a:srgbClr val="18212B"/>
-                </a:solidFill>
-                <a:latin typeface="Aptos"/>
-                <a:cs typeface="Aptos"/>
-              </a:rPr>
-              <a:t>delivery 7,3 мс</a:t>
+              <a:t>переподключение 12,9 мс</a:t>
+            </a:r>
+          </a:p>
+          <a:p>
+            <a:pPr algn="l"/>
+            <a:r>
+              <a:rPr lang="ru-RU" sz="1500" b="0">
+                <a:solidFill>
+                  <a:srgbClr val="18212B"/>
+                </a:solidFill>
+                <a:latin typeface="Aptos"/>
+                <a:cs typeface="Aptos"/>
+              </a:rPr>
+              <a:t>доставка 6,6 мс</a:t>
             </a:r>
           </a:p>
           <a:p>
@@ -3516,7 +3358,139 @@
                 <a:latin typeface="Aptos"/>
                 <a:cs typeface="Aptos"/>
               </a:rPr>
-              <a:t>Подтверждено восстановление после отказа узла.</a:t>
+              <a:t>Подтверждена повторная подписка.</a:t>
+            </a:r>
+          </a:p>
+        </p:txBody>
+      </p:sp>
+      <p:sp>
+        <p:nvSpPr>
+          <p:cNvPr id="22" name="Shape 22"/>
+          <p:cNvSpPr txBox="1"/>
+          <p:nvPr/>
+        </p:nvSpPr>
+        <p:spPr>
+          <a:xfrm>
+            <a:off x="8183880" y="1600200"/>
+            <a:ext cx="3657600" cy="4114800"/>
+          </a:xfrm>
+          <a:prstGeom prst="roundRect">
+            <a:avLst/>
+          </a:prstGeom>
+          <a:solidFill>
+            <a:srgbClr val="FFFFFF"/>
+          </a:solidFill>
+          <a:ln w="12700">
+            <a:solidFill>
+              <a:srgbClr val="D7D2C7"/>
+            </a:solidFill>
+          </a:ln>
+        </p:spPr>
+        <p:txBody>
+          <a:bodyPr wrap="square" lIns="177800" tIns="177800" rIns="177800" bIns="177800"/>
+          <a:lstStyle/>
+          <a:p>
+            <a:pPr algn="l"/>
+            <a:r>
+              <a:rPr lang="ru-RU" sz="1500" b="0">
+                <a:solidFill>
+                  <a:srgbClr val="18212B"/>
+                </a:solidFill>
+                <a:latin typeface="Aptos"/>
+                <a:cs typeface="Aptos"/>
+              </a:rPr>
+              <a:t>Переключение после отказа узла</a:t>
+            </a:r>
+          </a:p>
+          <a:p>
+            <a:pPr algn="l"/>
+            <a:r>
+              <a:rPr lang="ru-RU" sz="1500" b="0">
+                <a:solidFill>
+                  <a:srgbClr val="18212B"/>
+                </a:solidFill>
+                <a:latin typeface="Aptos"/>
+                <a:cs typeface="Aptos"/>
+              </a:rPr>
+              <a:t/>
+            </a:r>
+          </a:p>
+          <a:p>
+            <a:pPr algn="l"/>
+            <a:r>
+              <a:rPr lang="ru-RU" sz="1500" b="0">
+                <a:solidFill>
+                  <a:srgbClr val="18212B"/>
+                </a:solidFill>
+                <a:latin typeface="Aptos"/>
+                <a:cs typeface="Aptos"/>
+              </a:rPr>
+              <a:t>Один backend остановлен; nginx переключает клиента на другой экземпляр.</a:t>
+            </a:r>
+          </a:p>
+          <a:p>
+            <a:pPr algn="l"/>
+            <a:r>
+              <a:rPr lang="ru-RU" sz="1500" b="0">
+                <a:solidFill>
+                  <a:srgbClr val="18212B"/>
+                </a:solidFill>
+                <a:latin typeface="Aptos"/>
+                <a:cs typeface="Aptos"/>
+              </a:rPr>
+              <a:t/>
+            </a:r>
+          </a:p>
+          <a:p>
+            <a:pPr algn="l"/>
+            <a:r>
+              <a:rPr lang="ru-RU" sz="1500" b="0">
+                <a:solidFill>
+                  <a:srgbClr val="18212B"/>
+                </a:solidFill>
+                <a:latin typeface="Aptos"/>
+                <a:cs typeface="Aptos"/>
+              </a:rPr>
+              <a:t>переподключение 240,3 мс</a:t>
+            </a:r>
+          </a:p>
+          <a:p>
+            <a:pPr algn="l"/>
+            <a:r>
+              <a:rPr lang="ru-RU" sz="1500" b="0">
+                <a:solidFill>
+                  <a:srgbClr val="18212B"/>
+                </a:solidFill>
+                <a:latin typeface="Aptos"/>
+                <a:cs typeface="Aptos"/>
+              </a:rPr>
+              <a:t>доставка 7,3 мс</a:t>
+            </a:r>
+          </a:p>
+          <a:p>
+            <a:pPr algn="l"/>
+            <a:r>
+              <a:rPr lang="ru-RU" sz="1500" b="0">
+                <a:solidFill>
+                  <a:srgbClr val="18212B"/>
+                </a:solidFill>
+                <a:latin typeface="Aptos"/>
+                <a:cs typeface="Aptos"/>
+              </a:rPr>
+              <a:t/>
+            </a:r>
+          </a:p>
+          <a:p>
+            <a:pPr algn="l"/>
+            <a:r>
+              <a:rPr lang="ru-RU" sz="1500" b="0">
+                <a:solidFill>
+                  <a:srgbClr val="18212B"/>
+                </a:solidFill>
+                <a:latin typeface="Aptos"/>
+                <a:cs typeface="Aptos"/>
+              </a:rPr>
+              <a:t>Подтверждено восстановление после отказа.</a:t>
             </a:r>
           </a:p>
         </p:txBody>
@@ -3637,7 +3611,7 @@
         <p:spPr>
           <a:xfrm>
             <a:off x="685800" y="1554480"/>
-            <a:ext cx="10835640" cy="1371600"/>
+            <a:ext cx="10835640" cy="1280160"/>
           </a:xfrm>
           <a:prstGeom prst="roundRect">
             <a:avLst/>
@@ -3657,7 +3631,7 @@
           <a:p>
             <a:pPr algn="ctr"/>
             <a:r>
-              <a:rPr lang="ru-RU" sz="1800" b="1">
+              <a:rPr lang="ru-RU" sz="1700" b="1">
                 <a:solidFill>
                   <a:srgbClr val="18212B"/>
                 </a:solidFill>
@@ -3677,8 +3651,49 @@
         </p:nvSpPr>
         <p:spPr>
           <a:xfrm>
-            <a:off x="685800" y="3108960"/>
-            <a:ext cx="3520440" cy="2606040"/>
+            <a:off x="685800" y="2971800"/>
+            <a:ext cx="10835640" cy="1417320"/>
+          </a:xfrm>
+          <a:prstGeom prst="roundRect">
+            <a:avLst/>
+          </a:prstGeom>
+          <a:solidFill>
+            <a:srgbClr val="FFF3D8"/>
+          </a:solidFill>
+          <a:ln w="12700">
+            <a:solidFill>
+              <a:srgbClr val="C76F2E"/>
+            </a:solidFill>
+          </a:ln>
+        </p:spPr>
+        <p:txBody>
+          <a:bodyPr wrap="square" lIns="177800" tIns="177800" rIns="177800" bIns="177800"/>
+          <a:lstStyle/>
+          <a:p>
+            <a:pPr algn="ctr"/>
+            <a:r>
+              <a:rPr lang="ru-RU" sz="1500" b="1">
+                <a:solidFill>
+                  <a:srgbClr val="18212B"/>
+                </a:solidFill>
+                <a:latin typeface="Aptos"/>
+                <a:cs typeface="Aptos"/>
+              </a:rPr>
+              <a:t>Дополнительный эффект — повышение отказоустойчивости: при отказе одного узла клиенты продолжают получать события через другой экземпляр backend, тогда как single-node архитектура такой возможности не предоставляет.</a:t>
+            </a:r>
+          </a:p>
+        </p:txBody>
+      </p:sp>
+      <p:sp>
+        <p:nvSpPr>
+          <p:cNvPr id="22" name="Shape 22"/>
+          <p:cNvSpPr txBox="1"/>
+          <p:nvPr/>
+        </p:nvSpPr>
+        <p:spPr>
+          <a:xfrm>
+            <a:off x="685800" y="4572000"/>
+            <a:ext cx="3520440" cy="1691640"/>
           </a:xfrm>
           <a:prstGeom prst="roundRect">
             <a:avLst/>
@@ -3698,7 +3713,7 @@
           <a:p>
             <a:pPr algn="l"/>
             <a:r>
-              <a:rPr lang="ru-RU" sz="1400" b="1">
+              <a:rPr lang="ru-RU" sz="1300" b="1">
                 <a:solidFill>
                   <a:srgbClr val="18212B"/>
                 </a:solidFill>
@@ -3711,7 +3726,7 @@
           <a:p>
             <a:pPr algn="l"/>
             <a:r>
-              <a:rPr lang="ru-RU" sz="1400" b="1">
+              <a:rPr lang="ru-RU" sz="1300" b="1">
                 <a:solidFill>
                   <a:srgbClr val="18212B"/>
                 </a:solidFill>
@@ -3724,7 +3739,7 @@
           <a:p>
             <a:pPr algn="l"/>
             <a:r>
-              <a:rPr lang="ru-RU" sz="1400" b="1">
+              <a:rPr lang="ru-RU" sz="1300" b="1">
                 <a:solidFill>
                   <a:srgbClr val="18212B"/>
                 </a:solidFill>
@@ -3738,14 +3753,14 @@
       </p:sp>
       <p:sp>
         <p:nvSpPr>
-          <p:cNvPr id="22" name="Shape 22"/>
-          <p:cNvSpPr txBox="1"/>
-          <p:nvPr/>
-        </p:nvSpPr>
-        <p:spPr>
-          <a:xfrm>
-            <a:off x="4343400" y="3108960"/>
-            <a:ext cx="3520440" cy="2606040"/>
+          <p:cNvPr id="23" name="Shape 23"/>
+          <p:cNvSpPr txBox="1"/>
+          <p:nvPr/>
+        </p:nvSpPr>
+        <p:spPr>
+          <a:xfrm>
+            <a:off x="4343400" y="4572000"/>
+            <a:ext cx="3520440" cy="1691640"/>
           </a:xfrm>
           <a:prstGeom prst="roundRect">
             <a:avLst/>
@@ -3765,7 +3780,7 @@
           <a:p>
             <a:pPr algn="l"/>
             <a:r>
-              <a:rPr lang="ru-RU" sz="1400" b="1">
+              <a:rPr lang="ru-RU" sz="1300" b="1">
                 <a:solidFill>
                   <a:srgbClr val="18212B"/>
                 </a:solidFill>
@@ -3778,7 +3793,7 @@
           <a:p>
             <a:pPr algn="l"/>
             <a:r>
-              <a:rPr lang="ru-RU" sz="1400" b="1">
+              <a:rPr lang="ru-RU" sz="1300" b="1">
                 <a:solidFill>
                   <a:srgbClr val="18212B"/>
                 </a:solidFill>
@@ -3791,28 +3806,28 @@
           <a:p>
             <a:pPr algn="l"/>
             <a:r>
-              <a:rPr lang="ru-RU" sz="1400" b="1">
-                <a:solidFill>
-                  <a:srgbClr val="18212B"/>
-                </a:solidFill>
-                <a:latin typeface="Aptos"/>
-                <a:cs typeface="Aptos"/>
-              </a:rPr>
-              <a:t>SignalR + Redis backplane + nginx + два app-api; общий код, конфигурация через переменную окружения.</a:t>
-            </a:r>
-          </a:p>
-        </p:txBody>
-      </p:sp>
-      <p:sp>
-        <p:nvSpPr>
-          <p:cNvPr id="23" name="Shape 23"/>
-          <p:cNvSpPr txBox="1"/>
-          <p:nvPr/>
-        </p:nvSpPr>
-        <p:spPr>
-          <a:xfrm>
-            <a:off x="8001000" y="3108960"/>
-            <a:ext cx="3520440" cy="2606040"/>
+              <a:rPr lang="ru-RU" sz="1300" b="1">
+                <a:solidFill>
+                  <a:srgbClr val="18212B"/>
+                </a:solidFill>
+                <a:latin typeface="Aptos"/>
+                <a:cs typeface="Aptos"/>
+              </a:rPr>
+              <a:t>Несколько экземпляров backend за nginx + Redis backplane; общий код, переключение режима — переменной окружения.</a:t>
+            </a:r>
+          </a:p>
+        </p:txBody>
+      </p:sp>
+      <p:sp>
+        <p:nvSpPr>
+          <p:cNvPr id="24" name="Shape 24"/>
+          <p:cNvSpPr txBox="1"/>
+          <p:nvPr/>
+        </p:nvSpPr>
+        <p:spPr>
+          <a:xfrm>
+            <a:off x="8001000" y="4572000"/>
+            <a:ext cx="3520440" cy="1691640"/>
           </a:xfrm>
           <a:prstGeom prst="roundRect">
             <a:avLst/>
@@ -3832,7 +3847,7 @@
           <a:p>
             <a:pPr algn="l"/>
             <a:r>
-              <a:rPr lang="ru-RU" sz="1400" b="1">
+              <a:rPr lang="ru-RU" sz="1300" b="1">
                 <a:solidFill>
                   <a:srgbClr val="18212B"/>
                 </a:solidFill>
@@ -3845,7 +3860,7 @@
           <a:p>
             <a:pPr algn="l"/>
             <a:r>
-              <a:rPr lang="ru-RU" sz="1400" b="1">
+              <a:rPr lang="ru-RU" sz="1300" b="1">
                 <a:solidFill>
                   <a:srgbClr val="18212B"/>
                 </a:solidFill>
@@ -3858,14 +3873,14 @@
           <a:p>
             <a:pPr algn="l"/>
             <a:r>
-              <a:rPr lang="ru-RU" sz="1400" b="1">
-                <a:solidFill>
-                  <a:srgbClr val="18212B"/>
-                </a:solidFill>
-                <a:latin typeface="Aptos"/>
-                <a:cs typeface="Aptos"/>
-              </a:rPr>
-              <a:t>Delivery (без / с) · серия 5 / 5 · rejoin · failover — воспроизводимый Docker Compose стенд.</a:t>
+              <a:rPr lang="ru-RU" sz="1300" b="1">
+                <a:solidFill>
+                  <a:srgbClr val="18212B"/>
+                </a:solidFill>
+                <a:latin typeface="Aptos"/>
+                <a:cs typeface="Aptos"/>
+              </a:rPr>
+              <a:t>Доставка (без / с) · серия · восстановление подписки · переключение после отказа.</a:t>
             </a:r>
           </a:p>
         </p:txBody>

--- a/build/pptx/vkr-defense-draft.pptx
+++ b/build/pptx/vkr-defense-draft.pptx
@@ -14,6 +14,9 @@
     <p:sldId id="262" r:id="rId8"/>
     <p:sldId id="263" r:id="rId9"/>
     <p:sldId id="264" r:id="rId10"/>
+    <p:sldId id="265" r:id="rId11"/>
+    <p:sldId id="266" r:id="rId12"/>
+    <p:sldId id="267" r:id="rId13"/>
   </p:sldIdLst>
   <p:sldSz cx="12192000" cy="6858000" type="wide"/>
   <p:notesSz cx="6858000" cy="9144000"/>
@@ -241,7 +244,7 @@
                 <a:latin typeface="Aptos"/>
                 <a:cs typeface="Aptos"/>
               </a:rPr>
-              <a:t>Руководитель: ст. преподаватель С. А. Рогачев</a:t>
+              <a:t>Руководитель: канд. техн. наук, доцент А. В. Фомин</a:t>
             </a:r>
           </a:p>
         </p:txBody>
@@ -316,6 +319,1411 @@
                 <a:cs typeface="Aptos"/>
               </a:rPr>
               <a:t>Real-time scale-out · 01</a:t>
+            </a:r>
+          </a:p>
+        </p:txBody>
+      </p:sp>
+    </p:spTree>
+  </p:cSld>
+  <p:clrMapOvr>
+    <a:masterClrMapping/>
+  </p:clrMapOvr>
+</p:sld>
+</file>
+
+<file path=ppt/slides/slide10.xml><?xml version="1.0" encoding="utf-8"?>
+<p:sld xmlns:a="http://schemas.openxmlformats.org/drawingml/2006/main" xmlns:r="http://schemas.openxmlformats.org/officeDocument/2006/relationships" xmlns:p="http://schemas.openxmlformats.org/presentationml/2006/main">
+  <p:cSld>
+    <p:bg>
+      <p:bgPr>
+        <a:solidFill>
+          <a:srgbClr val="F6F3EC"/>
+        </a:solidFill>
+        <a:effectLst/>
+      </p:bgPr>
+    </p:bg>
+    <p:spTree>
+      <p:nvGrpSpPr>
+        <p:cNvPr id="1" name=""/>
+        <p:cNvGrpSpPr/>
+        <p:nvPr/>
+      </p:nvGrpSpPr>
+      <p:grpSpPr>
+        <a:xfrm>
+          <a:off x="0" y="0"/>
+          <a:ext cx="0" cy="0"/>
+          <a:chOff x="0" y="0"/>
+          <a:chExt cx="0" cy="0"/>
+        </a:xfrm>
+      </p:grpSpPr>
+      <p:sp>
+        <p:nvSpPr>
+          <p:cNvPr id="10" name="Shape 10"/>
+          <p:cNvSpPr txBox="1"/>
+          <p:nvPr/>
+        </p:nvSpPr>
+        <p:spPr>
+          <a:xfrm>
+            <a:off x="594360" y="411480"/>
+            <a:ext cx="10881360" cy="658368"/>
+          </a:xfrm>
+          <a:prstGeom prst="roundRect">
+            <a:avLst/>
+          </a:prstGeom>
+          <a:noFill/>
+          <a:ln>
+            <a:noFill/>
+          </a:ln>
+        </p:spPr>
+        <p:txBody>
+          <a:bodyPr wrap="square" lIns="177800" tIns="177800" rIns="177800" bIns="177800"/>
+          <a:lstStyle/>
+          <a:p>
+            <a:pPr algn="l"/>
+            <a:r>
+              <a:rPr lang="ru-RU" sz="3000" b="1">
+                <a:solidFill>
+                  <a:srgbClr val="18212B"/>
+                </a:solidFill>
+                <a:latin typeface="Aptos"/>
+                <a:cs typeface="Aptos"/>
+              </a:rPr>
+              <a:t>Дополнительные проверки</a:t>
+            </a:r>
+          </a:p>
+        </p:txBody>
+      </p:sp>
+      <p:sp>
+        <p:nvSpPr>
+          <p:cNvPr id="11" name="Shape 11"/>
+          <p:cNvSpPr txBox="1"/>
+          <p:nvPr/>
+        </p:nvSpPr>
+        <p:spPr>
+          <a:xfrm>
+            <a:off x="621792" y="987552"/>
+            <a:ext cx="9875520" cy="320040"/>
+          </a:xfrm>
+          <a:prstGeom prst="roundRect">
+            <a:avLst/>
+          </a:prstGeom>
+          <a:noFill/>
+          <a:ln>
+            <a:noFill/>
+          </a:ln>
+        </p:spPr>
+        <p:txBody>
+          <a:bodyPr wrap="square" lIns="177800" tIns="177800" rIns="177800" bIns="177800"/>
+          <a:lstStyle/>
+          <a:p>
+            <a:pPr algn="l"/>
+            <a:r>
+              <a:rPr lang="ru-RU" sz="1300" b="0">
+                <a:solidFill>
+                  <a:srgbClr val="5E6A75"/>
+                </a:solidFill>
+                <a:latin typeface="Aptos"/>
+                <a:cs typeface="Aptos"/>
+              </a:rPr>
+              <a:t>Повторяемость, восстановление подписки и переключение после отказа узла</a:t>
+            </a:r>
+          </a:p>
+        </p:txBody>
+      </p:sp>
+      <p:sp>
+        <p:nvSpPr>
+          <p:cNvPr id="20" name="Shape 20"/>
+          <p:cNvSpPr txBox="1"/>
+          <p:nvPr/>
+        </p:nvSpPr>
+        <p:spPr>
+          <a:xfrm>
+            <a:off x="685800" y="1600200"/>
+            <a:ext cx="3657600" cy="4114800"/>
+          </a:xfrm>
+          <a:prstGeom prst="roundRect">
+            <a:avLst/>
+          </a:prstGeom>
+          <a:solidFill>
+            <a:srgbClr val="FFFFFF"/>
+          </a:solidFill>
+          <a:ln w="12700">
+            <a:solidFill>
+              <a:srgbClr val="D7D2C7"/>
+            </a:solidFill>
+          </a:ln>
+        </p:spPr>
+        <p:txBody>
+          <a:bodyPr wrap="square" lIns="177800" tIns="177800" rIns="177800" bIns="177800"/>
+          <a:lstStyle/>
+          <a:p>
+            <a:pPr algn="l"/>
+            <a:r>
+              <a:rPr lang="ru-RU" sz="1500" b="0">
+                <a:solidFill>
+                  <a:srgbClr val="18212B"/>
+                </a:solidFill>
+                <a:latin typeface="Aptos"/>
+                <a:cs typeface="Aptos"/>
+              </a:rPr>
+              <a:t>Серия из 30 итераций</a:t>
+            </a:r>
+          </a:p>
+          <a:p>
+            <a:pPr algn="l"/>
+            <a:r>
+              <a:rPr lang="ru-RU" sz="1500" b="0">
+                <a:solidFill>
+                  <a:srgbClr val="18212B"/>
+                </a:solidFill>
+                <a:latin typeface="Aptos"/>
+                <a:cs typeface="Aptos"/>
+              </a:rPr>
+              <a:t/>
+            </a:r>
+          </a:p>
+          <a:p>
+            <a:pPr algn="l"/>
+            <a:r>
+              <a:rPr lang="ru-RU" sz="1500" b="0">
+                <a:solidFill>
+                  <a:srgbClr val="18212B"/>
+                </a:solidFill>
+                <a:latin typeface="Aptos"/>
+                <a:cs typeface="Aptos"/>
+              </a:rPr>
+              <a:t>Успешно: 30 из 30</a:t>
+            </a:r>
+          </a:p>
+          <a:p>
+            <a:pPr algn="l"/>
+            <a:r>
+              <a:rPr lang="ru-RU" sz="1500" b="0">
+                <a:solidFill>
+                  <a:srgbClr val="18212B"/>
+                </a:solidFill>
+                <a:latin typeface="Aptos"/>
+                <a:cs typeface="Aptos"/>
+              </a:rPr>
+              <a:t/>
+            </a:r>
+          </a:p>
+          <a:p>
+            <a:pPr algn="l"/>
+            <a:r>
+              <a:rPr lang="ru-RU" sz="1500" b="0">
+                <a:solidFill>
+                  <a:srgbClr val="18212B"/>
+                </a:solidFill>
+                <a:latin typeface="Aptos"/>
+                <a:cs typeface="Aptos"/>
+              </a:rPr>
+              <a:t>min 3,8 мс</a:t>
+            </a:r>
+          </a:p>
+          <a:p>
+            <a:pPr algn="l"/>
+            <a:r>
+              <a:rPr lang="ru-RU" sz="1500" b="0">
+                <a:solidFill>
+                  <a:srgbClr val="18212B"/>
+                </a:solidFill>
+                <a:latin typeface="Aptos"/>
+                <a:cs typeface="Aptos"/>
+              </a:rPr>
+              <a:t>avg 7,2 мс</a:t>
+            </a:r>
+          </a:p>
+          <a:p>
+            <a:pPr algn="l"/>
+            <a:r>
+              <a:rPr lang="ru-RU" sz="1500" b="0">
+                <a:solidFill>
+                  <a:srgbClr val="18212B"/>
+                </a:solidFill>
+                <a:latin typeface="Aptos"/>
+                <a:cs typeface="Aptos"/>
+              </a:rPr>
+              <a:t>p50 6,1 мс</a:t>
+            </a:r>
+          </a:p>
+          <a:p>
+            <a:pPr algn="l"/>
+            <a:r>
+              <a:rPr lang="ru-RU" sz="1500" b="0">
+                <a:solidFill>
+                  <a:srgbClr val="18212B"/>
+                </a:solidFill>
+                <a:latin typeface="Aptos"/>
+                <a:cs typeface="Aptos"/>
+              </a:rPr>
+              <a:t>p95 13,8 мс</a:t>
+            </a:r>
+          </a:p>
+          <a:p>
+            <a:pPr algn="l"/>
+            <a:r>
+              <a:rPr lang="ru-RU" sz="1500" b="0">
+                <a:solidFill>
+                  <a:srgbClr val="18212B"/>
+                </a:solidFill>
+                <a:latin typeface="Aptos"/>
+                <a:cs typeface="Aptos"/>
+              </a:rPr>
+              <a:t/>
+            </a:r>
+          </a:p>
+          <a:p>
+            <a:pPr algn="l"/>
+            <a:r>
+              <a:rPr lang="ru-RU" sz="1500" b="0">
+                <a:solidFill>
+                  <a:srgbClr val="18212B"/>
+                </a:solidFill>
+                <a:latin typeface="Aptos"/>
+                <a:cs typeface="Aptos"/>
+              </a:rPr>
+              <a:t>Подтверждена повторяемость доставки.</a:t>
+            </a:r>
+          </a:p>
+        </p:txBody>
+      </p:sp>
+      <p:sp>
+        <p:nvSpPr>
+          <p:cNvPr id="21" name="Shape 21"/>
+          <p:cNvSpPr txBox="1"/>
+          <p:nvPr/>
+        </p:nvSpPr>
+        <p:spPr>
+          <a:xfrm>
+            <a:off x="4434840" y="1600200"/>
+            <a:ext cx="3657600" cy="4114800"/>
+          </a:xfrm>
+          <a:prstGeom prst="roundRect">
+            <a:avLst/>
+          </a:prstGeom>
+          <a:solidFill>
+            <a:srgbClr val="FFFFFF"/>
+          </a:solidFill>
+          <a:ln w="12700">
+            <a:solidFill>
+              <a:srgbClr val="D7D2C7"/>
+            </a:solidFill>
+          </a:ln>
+        </p:spPr>
+        <p:txBody>
+          <a:bodyPr wrap="square" lIns="177800" tIns="177800" rIns="177800" bIns="177800"/>
+          <a:lstStyle/>
+          <a:p>
+            <a:pPr algn="l"/>
+            <a:r>
+              <a:rPr lang="ru-RU" sz="1500" b="0">
+                <a:solidFill>
+                  <a:srgbClr val="18212B"/>
+                </a:solidFill>
+                <a:latin typeface="Aptos"/>
+                <a:cs typeface="Aptos"/>
+              </a:rPr>
+              <a:t>Восстановление подписки</a:t>
+            </a:r>
+          </a:p>
+          <a:p>
+            <a:pPr algn="l"/>
+            <a:r>
+              <a:rPr lang="ru-RU" sz="1500" b="0">
+                <a:solidFill>
+                  <a:srgbClr val="18212B"/>
+                </a:solidFill>
+                <a:latin typeface="Aptos"/>
+                <a:cs typeface="Aptos"/>
+              </a:rPr>
+              <a:t/>
+            </a:r>
+          </a:p>
+          <a:p>
+            <a:pPr algn="l"/>
+            <a:r>
+              <a:rPr lang="ru-RU" sz="1500" b="0">
+                <a:solidFill>
+                  <a:srgbClr val="18212B"/>
+                </a:solidFill>
+                <a:latin typeface="Aptos"/>
+                <a:cs typeface="Aptos"/>
+              </a:rPr>
+              <a:t>После разрыва клиент создаёт новое соединение и снова вступает в группу отчёта.</a:t>
+            </a:r>
+          </a:p>
+          <a:p>
+            <a:pPr algn="l"/>
+            <a:r>
+              <a:rPr lang="ru-RU" sz="1500" b="0">
+                <a:solidFill>
+                  <a:srgbClr val="18212B"/>
+                </a:solidFill>
+                <a:latin typeface="Aptos"/>
+                <a:cs typeface="Aptos"/>
+              </a:rPr>
+              <a:t/>
+            </a:r>
+          </a:p>
+          <a:p>
+            <a:pPr algn="l"/>
+            <a:r>
+              <a:rPr lang="ru-RU" sz="1500" b="0">
+                <a:solidFill>
+                  <a:srgbClr val="18212B"/>
+                </a:solidFill>
+                <a:latin typeface="Aptos"/>
+                <a:cs typeface="Aptos"/>
+              </a:rPr>
+              <a:t>переподключение 6,5 мс</a:t>
+            </a:r>
+          </a:p>
+          <a:p>
+            <a:pPr algn="l"/>
+            <a:r>
+              <a:rPr lang="ru-RU" sz="1500" b="0">
+                <a:solidFill>
+                  <a:srgbClr val="18212B"/>
+                </a:solidFill>
+                <a:latin typeface="Aptos"/>
+                <a:cs typeface="Aptos"/>
+              </a:rPr>
+              <a:t>доставка 15,2 мс</a:t>
+            </a:r>
+          </a:p>
+          <a:p>
+            <a:pPr algn="l"/>
+            <a:r>
+              <a:rPr lang="ru-RU" sz="1500" b="0">
+                <a:solidFill>
+                  <a:srgbClr val="18212B"/>
+                </a:solidFill>
+                <a:latin typeface="Aptos"/>
+                <a:cs typeface="Aptos"/>
+              </a:rPr>
+              <a:t/>
+            </a:r>
+          </a:p>
+          <a:p>
+            <a:pPr algn="l"/>
+            <a:r>
+              <a:rPr lang="ru-RU" sz="1500" b="0">
+                <a:solidFill>
+                  <a:srgbClr val="18212B"/>
+                </a:solidFill>
+                <a:latin typeface="Aptos"/>
+                <a:cs typeface="Aptos"/>
+              </a:rPr>
+              <a:t>Подтверждена повторная подписка.</a:t>
+            </a:r>
+          </a:p>
+        </p:txBody>
+      </p:sp>
+      <p:sp>
+        <p:nvSpPr>
+          <p:cNvPr id="22" name="Shape 22"/>
+          <p:cNvSpPr txBox="1"/>
+          <p:nvPr/>
+        </p:nvSpPr>
+        <p:spPr>
+          <a:xfrm>
+            <a:off x="8183880" y="1600200"/>
+            <a:ext cx="3657600" cy="4114800"/>
+          </a:xfrm>
+          <a:prstGeom prst="roundRect">
+            <a:avLst/>
+          </a:prstGeom>
+          <a:solidFill>
+            <a:srgbClr val="FFFFFF"/>
+          </a:solidFill>
+          <a:ln w="12700">
+            <a:solidFill>
+              <a:srgbClr val="D7D2C7"/>
+            </a:solidFill>
+          </a:ln>
+        </p:spPr>
+        <p:txBody>
+          <a:bodyPr wrap="square" lIns="177800" tIns="177800" rIns="177800" bIns="177800"/>
+          <a:lstStyle/>
+          <a:p>
+            <a:pPr algn="l"/>
+            <a:r>
+              <a:rPr lang="ru-RU" sz="1500" b="0">
+                <a:solidFill>
+                  <a:srgbClr val="18212B"/>
+                </a:solidFill>
+                <a:latin typeface="Aptos"/>
+                <a:cs typeface="Aptos"/>
+              </a:rPr>
+              <a:t>Переключение после отказа узла</a:t>
+            </a:r>
+          </a:p>
+          <a:p>
+            <a:pPr algn="l"/>
+            <a:r>
+              <a:rPr lang="ru-RU" sz="1500" b="0">
+                <a:solidFill>
+                  <a:srgbClr val="18212B"/>
+                </a:solidFill>
+                <a:latin typeface="Aptos"/>
+                <a:cs typeface="Aptos"/>
+              </a:rPr>
+              <a:t/>
+            </a:r>
+          </a:p>
+          <a:p>
+            <a:pPr algn="l"/>
+            <a:r>
+              <a:rPr lang="ru-RU" sz="1500" b="0">
+                <a:solidFill>
+                  <a:srgbClr val="18212B"/>
+                </a:solidFill>
+                <a:latin typeface="Aptos"/>
+                <a:cs typeface="Aptos"/>
+              </a:rPr>
+              <a:t>Один backend остановлен; nginx переключает клиента на другой экземпляр.</a:t>
+            </a:r>
+          </a:p>
+          <a:p>
+            <a:pPr algn="l"/>
+            <a:r>
+              <a:rPr lang="ru-RU" sz="1500" b="0">
+                <a:solidFill>
+                  <a:srgbClr val="18212B"/>
+                </a:solidFill>
+                <a:latin typeface="Aptos"/>
+                <a:cs typeface="Aptos"/>
+              </a:rPr>
+              <a:t/>
+            </a:r>
+          </a:p>
+          <a:p>
+            <a:pPr algn="l"/>
+            <a:r>
+              <a:rPr lang="ru-RU" sz="1500" b="0">
+                <a:solidFill>
+                  <a:srgbClr val="18212B"/>
+                </a:solidFill>
+                <a:latin typeface="Aptos"/>
+                <a:cs typeface="Aptos"/>
+              </a:rPr>
+              <a:t>переподключение 352,0 мс</a:t>
+            </a:r>
+          </a:p>
+          <a:p>
+            <a:pPr algn="l"/>
+            <a:r>
+              <a:rPr lang="ru-RU" sz="1500" b="0">
+                <a:solidFill>
+                  <a:srgbClr val="18212B"/>
+                </a:solidFill>
+                <a:latin typeface="Aptos"/>
+                <a:cs typeface="Aptos"/>
+              </a:rPr>
+              <a:t>доставка 5,4 мс</a:t>
+            </a:r>
+          </a:p>
+          <a:p>
+            <a:pPr algn="l"/>
+            <a:r>
+              <a:rPr lang="ru-RU" sz="1500" b="0">
+                <a:solidFill>
+                  <a:srgbClr val="18212B"/>
+                </a:solidFill>
+                <a:latin typeface="Aptos"/>
+                <a:cs typeface="Aptos"/>
+              </a:rPr>
+              <a:t/>
+            </a:r>
+          </a:p>
+          <a:p>
+            <a:pPr algn="l"/>
+            <a:r>
+              <a:rPr lang="ru-RU" sz="1500" b="0">
+                <a:solidFill>
+                  <a:srgbClr val="18212B"/>
+                </a:solidFill>
+                <a:latin typeface="Aptos"/>
+                <a:cs typeface="Aptos"/>
+              </a:rPr>
+              <a:t>Подтверждено восстановление после отказа.</a:t>
+            </a:r>
+          </a:p>
+        </p:txBody>
+      </p:sp>
+      <p:sp>
+        <p:nvSpPr>
+          <p:cNvPr id="900" name="Shape 900"/>
+          <p:cNvSpPr txBox="1"/>
+          <p:nvPr/>
+        </p:nvSpPr>
+        <p:spPr>
+          <a:xfrm>
+            <a:off x="594360" y="6510528"/>
+            <a:ext cx="10972800" cy="201168"/>
+          </a:xfrm>
+          <a:prstGeom prst="roundRect">
+            <a:avLst/>
+          </a:prstGeom>
+          <a:noFill/>
+          <a:ln>
+            <a:noFill/>
+          </a:ln>
+        </p:spPr>
+        <p:txBody>
+          <a:bodyPr wrap="square" lIns="177800" tIns="177800" rIns="177800" bIns="177800"/>
+          <a:lstStyle/>
+          <a:p>
+            <a:pPr algn="l"/>
+            <a:r>
+              <a:rPr lang="ru-RU" sz="800" b="0">
+                <a:solidFill>
+                  <a:srgbClr val="5E6A75"/>
+                </a:solidFill>
+                <a:latin typeface="Aptos"/>
+                <a:cs typeface="Aptos"/>
+              </a:rPr>
+              <a:t>Real-time scale-out · 10</a:t>
+            </a:r>
+          </a:p>
+        </p:txBody>
+      </p:sp>
+    </p:spTree>
+  </p:cSld>
+  <p:clrMapOvr>
+    <a:masterClrMapping/>
+  </p:clrMapOvr>
+</p:sld>
+</file>
+
+<file path=ppt/slides/slide11.xml><?xml version="1.0" encoding="utf-8"?>
+<p:sld xmlns:a="http://schemas.openxmlformats.org/drawingml/2006/main" xmlns:r="http://schemas.openxmlformats.org/officeDocument/2006/relationships" xmlns:p="http://schemas.openxmlformats.org/presentationml/2006/main">
+  <p:cSld>
+    <p:bg>
+      <p:bgPr>
+        <a:solidFill>
+          <a:srgbClr val="F6F3EC"/>
+        </a:solidFill>
+        <a:effectLst/>
+      </p:bgPr>
+    </p:bg>
+    <p:spTree>
+      <p:nvGrpSpPr>
+        <p:cNvPr id="1" name=""/>
+        <p:cNvGrpSpPr/>
+        <p:nvPr/>
+      </p:nvGrpSpPr>
+      <p:grpSpPr>
+        <a:xfrm>
+          <a:off x="0" y="0"/>
+          <a:ext cx="0" cy="0"/>
+          <a:chOff x="0" y="0"/>
+          <a:chExt cx="0" cy="0"/>
+        </a:xfrm>
+      </p:grpSpPr>
+      <p:sp>
+        <p:nvSpPr>
+          <p:cNvPr id="10" name="Shape 10"/>
+          <p:cNvSpPr txBox="1"/>
+          <p:nvPr/>
+        </p:nvSpPr>
+        <p:spPr>
+          <a:xfrm>
+            <a:off x="594360" y="411480"/>
+            <a:ext cx="10881360" cy="658368"/>
+          </a:xfrm>
+          <a:prstGeom prst="roundRect">
+            <a:avLst/>
+          </a:prstGeom>
+          <a:noFill/>
+          <a:ln>
+            <a:noFill/>
+          </a:ln>
+        </p:spPr>
+        <p:txBody>
+          <a:bodyPr wrap="square" lIns="177800" tIns="177800" rIns="177800" bIns="177800"/>
+          <a:lstStyle/>
+          <a:p>
+            <a:pPr algn="l"/>
+            <a:r>
+              <a:rPr lang="ru-RU" sz="3000" b="1">
+                <a:solidFill>
+                  <a:srgbClr val="18212B"/>
+                </a:solidFill>
+                <a:latin typeface="Aptos"/>
+                <a:cs typeface="Aptos"/>
+              </a:rPr>
+              <a:t>Ограничения</a:t>
+            </a:r>
+          </a:p>
+        </p:txBody>
+      </p:sp>
+      <p:sp>
+        <p:nvSpPr>
+          <p:cNvPr id="11" name="Shape 11"/>
+          <p:cNvSpPr txBox="1"/>
+          <p:nvPr/>
+        </p:nvSpPr>
+        <p:spPr>
+          <a:xfrm>
+            <a:off x="621792" y="987552"/>
+            <a:ext cx="9875520" cy="320040"/>
+          </a:xfrm>
+          <a:prstGeom prst="roundRect">
+            <a:avLst/>
+          </a:prstGeom>
+          <a:noFill/>
+          <a:ln>
+            <a:noFill/>
+          </a:ln>
+        </p:spPr>
+        <p:txBody>
+          <a:bodyPr wrap="square" lIns="177800" tIns="177800" rIns="177800" bIns="177800"/>
+          <a:lstStyle/>
+          <a:p>
+            <a:pPr algn="l"/>
+            <a:r>
+              <a:rPr lang="ru-RU" sz="1300" b="0">
+                <a:solidFill>
+                  <a:srgbClr val="5E6A75"/>
+                </a:solidFill>
+                <a:latin typeface="Aptos"/>
+                <a:cs typeface="Aptos"/>
+              </a:rPr>
+              <a:t>Решение предназначено для интерфейсной синхронизации, а не для жёсткого real-time</a:t>
+            </a:r>
+          </a:p>
+        </p:txBody>
+      </p:sp>
+      <p:sp>
+        <p:nvSpPr>
+          <p:cNvPr id="20" name="Shape 20"/>
+          <p:cNvSpPr txBox="1"/>
+          <p:nvPr/>
+        </p:nvSpPr>
+        <p:spPr>
+          <a:xfrm>
+            <a:off x="685800" y="1508760"/>
+            <a:ext cx="3520440" cy="4343400"/>
+          </a:xfrm>
+          <a:prstGeom prst="roundRect">
+            <a:avLst/>
+          </a:prstGeom>
+          <a:solidFill>
+            <a:srgbClr val="FFFFFF"/>
+          </a:solidFill>
+          <a:ln w="12700">
+            <a:solidFill>
+              <a:srgbClr val="D7D2C7"/>
+            </a:solidFill>
+          </a:ln>
+        </p:spPr>
+        <p:txBody>
+          <a:bodyPr wrap="square" lIns="177800" tIns="177800" rIns="177800" bIns="177800"/>
+          <a:lstStyle/>
+          <a:p>
+            <a:pPr algn="l"/>
+            <a:r>
+              <a:rPr lang="ru-RU" sz="1400" b="0">
+                <a:solidFill>
+                  <a:srgbClr val="18212B"/>
+                </a:solidFill>
+                <a:latin typeface="Aptos"/>
+                <a:cs typeface="Aptos"/>
+              </a:rPr>
+              <a:t>Ненулевая задержка</a:t>
+            </a:r>
+          </a:p>
+          <a:p>
+            <a:pPr algn="l"/>
+            <a:r>
+              <a:rPr lang="ru-RU" sz="1400" b="0">
+                <a:solidFill>
+                  <a:srgbClr val="18212B"/>
+                </a:solidFill>
+                <a:latin typeface="Aptos"/>
+                <a:cs typeface="Aptos"/>
+              </a:rPr>
+              <a:t/>
+            </a:r>
+          </a:p>
+          <a:p>
+            <a:pPr algn="l"/>
+            <a:r>
+              <a:rPr lang="ru-RU" sz="1400" b="0">
+                <a:solidFill>
+                  <a:srgbClr val="18212B"/>
+                </a:solidFill>
+                <a:latin typeface="Aptos"/>
+                <a:cs typeface="Aptos"/>
+              </a:rPr>
+              <a:t>Событие проходит через app-api, Redis backplane и другой app-api.</a:t>
+            </a:r>
+          </a:p>
+          <a:p>
+            <a:pPr algn="l"/>
+            <a:r>
+              <a:rPr lang="ru-RU" sz="1400" b="0">
+                <a:solidFill>
+                  <a:srgbClr val="18212B"/>
+                </a:solidFill>
+                <a:latin typeface="Aptos"/>
+                <a:cs typeface="Aptos"/>
+              </a:rPr>
+              <a:t/>
+            </a:r>
+          </a:p>
+          <a:p>
+            <a:pPr algn="l"/>
+            <a:r>
+              <a:rPr lang="ru-RU" sz="1400" b="0">
+                <a:solidFill>
+                  <a:srgbClr val="18212B"/>
+                </a:solidFill>
+                <a:latin typeface="Aptos"/>
+                <a:cs typeface="Aptos"/>
+              </a:rPr>
+              <a:t>В локальной серии: avg 7,2 мс, p95 13,8 мс.</a:t>
+            </a:r>
+          </a:p>
+        </p:txBody>
+      </p:sp>
+      <p:sp>
+        <p:nvSpPr>
+          <p:cNvPr id="21" name="Shape 21"/>
+          <p:cNvSpPr txBox="1"/>
+          <p:nvPr/>
+        </p:nvSpPr>
+        <p:spPr>
+          <a:xfrm>
+            <a:off x="4389120" y="1508760"/>
+            <a:ext cx="3520440" cy="4343400"/>
+          </a:xfrm>
+          <a:prstGeom prst="roundRect">
+            <a:avLst/>
+          </a:prstGeom>
+          <a:solidFill>
+            <a:srgbClr val="FFFFFF"/>
+          </a:solidFill>
+          <a:ln w="12700">
+            <a:solidFill>
+              <a:srgbClr val="D7D2C7"/>
+            </a:solidFill>
+          </a:ln>
+        </p:spPr>
+        <p:txBody>
+          <a:bodyPr wrap="square" lIns="177800" tIns="177800" rIns="177800" bIns="177800"/>
+          <a:lstStyle/>
+          <a:p>
+            <a:pPr algn="l"/>
+            <a:r>
+              <a:rPr lang="ru-RU" sz="1400" b="0">
+                <a:solidFill>
+                  <a:srgbClr val="18212B"/>
+                </a:solidFill>
+                <a:latin typeface="Aptos"/>
+                <a:cs typeface="Aptos"/>
+              </a:rPr>
+              <a:t>Transient UI-events</a:t>
+            </a:r>
+          </a:p>
+          <a:p>
+            <a:pPr algn="l"/>
+            <a:r>
+              <a:rPr lang="ru-RU" sz="1400" b="0">
+                <a:solidFill>
+                  <a:srgbClr val="18212B"/>
+                </a:solidFill>
+                <a:latin typeface="Aptos"/>
+                <a:cs typeface="Aptos"/>
+              </a:rPr>
+              <a:t/>
+            </a:r>
+          </a:p>
+          <a:p>
+            <a:pPr algn="l"/>
+            <a:r>
+              <a:rPr lang="ru-RU" sz="1400" b="0">
+                <a:solidFill>
+                  <a:srgbClr val="18212B"/>
+                </a:solidFill>
+                <a:latin typeface="Aptos"/>
+                <a:cs typeface="Aptos"/>
+              </a:rPr>
+              <a:t>Источник истины — PostgreSQL.</a:t>
+            </a:r>
+          </a:p>
+          <a:p>
+            <a:pPr algn="l"/>
+            <a:r>
+              <a:rPr lang="ru-RU" sz="1400" b="0">
+                <a:solidFill>
+                  <a:srgbClr val="18212B"/>
+                </a:solidFill>
+                <a:latin typeface="Aptos"/>
+                <a:cs typeface="Aptos"/>
+              </a:rPr>
+              <a:t/>
+            </a:r>
+          </a:p>
+          <a:p>
+            <a:pPr algn="l"/>
+            <a:r>
+              <a:rPr lang="ru-RU" sz="1400" b="0">
+                <a:solidFill>
+                  <a:srgbClr val="18212B"/>
+                </a:solidFill>
+                <a:latin typeface="Aptos"/>
+                <a:cs typeface="Aptos"/>
+              </a:rPr>
+              <a:t>При сомнениях клиент восстанавливает согласованность повторным HTTP-запросом состояния.</a:t>
+            </a:r>
+          </a:p>
+        </p:txBody>
+      </p:sp>
+      <p:sp>
+        <p:nvSpPr>
+          <p:cNvPr id="22" name="Shape 22"/>
+          <p:cNvSpPr txBox="1"/>
+          <p:nvPr/>
+        </p:nvSpPr>
+        <p:spPr>
+          <a:xfrm>
+            <a:off x="8092440" y="1508760"/>
+            <a:ext cx="3520440" cy="4343400"/>
+          </a:xfrm>
+          <a:prstGeom prst="roundRect">
+            <a:avLst/>
+          </a:prstGeom>
+          <a:solidFill>
+            <a:srgbClr val="FFF3D8"/>
+          </a:solidFill>
+          <a:ln w="12700">
+            <a:solidFill>
+              <a:srgbClr val="C76F2E"/>
+            </a:solidFill>
+          </a:ln>
+        </p:spPr>
+        <p:txBody>
+          <a:bodyPr wrap="square" lIns="177800" tIns="177800" rIns="177800" bIns="177800"/>
+          <a:lstStyle/>
+          <a:p>
+            <a:pPr algn="l"/>
+            <a:r>
+              <a:rPr lang="ru-RU" sz="1400" b="1">
+                <a:solidFill>
+                  <a:srgbClr val="18212B"/>
+                </a:solidFill>
+                <a:latin typeface="Aptos"/>
+                <a:cs typeface="Aptos"/>
+              </a:rPr>
+              <a:t>Дальнейшее развитие</a:t>
+            </a:r>
+          </a:p>
+          <a:p>
+            <a:pPr algn="l"/>
+            <a:r>
+              <a:rPr lang="ru-RU" sz="1400" b="1">
+                <a:solidFill>
+                  <a:srgbClr val="18212B"/>
+                </a:solidFill>
+                <a:latin typeface="Aptos"/>
+                <a:cs typeface="Aptos"/>
+              </a:rPr>
+              <a:t/>
+            </a:r>
+          </a:p>
+          <a:p>
+            <a:pPr algn="l"/>
+            <a:r>
+              <a:rPr lang="ru-RU" sz="1400" b="1">
+                <a:solidFill>
+                  <a:srgbClr val="18212B"/>
+                </a:solidFill>
+                <a:latin typeface="Aptos"/>
+                <a:cs typeface="Aptos"/>
+              </a:rPr>
+              <a:t>Durable broker/event log</a:t>
+            </a:r>
+          </a:p>
+          <a:p>
+            <a:pPr algn="l"/>
+            <a:r>
+              <a:rPr lang="ru-RU" sz="1400" b="1">
+                <a:solidFill>
+                  <a:srgbClr val="18212B"/>
+                </a:solidFill>
+                <a:latin typeface="Aptos"/>
+                <a:cs typeface="Aptos"/>
+              </a:rPr>
+              <a:t>версии сущностей</a:t>
+            </a:r>
+          </a:p>
+          <a:p>
+            <a:pPr algn="l"/>
+            <a:r>
+              <a:rPr lang="ru-RU" sz="1400" b="1">
+                <a:solidFill>
+                  <a:srgbClr val="18212B"/>
+                </a:solidFill>
+                <a:latin typeface="Aptos"/>
+                <a:cs typeface="Aptos"/>
+              </a:rPr>
+              <a:t>optimistic concurrency</a:t>
+            </a:r>
+          </a:p>
+          <a:p>
+            <a:pPr algn="l"/>
+            <a:r>
+              <a:rPr lang="ru-RU" sz="1400" b="1">
+                <a:solidFill>
+                  <a:srgbClr val="18212B"/>
+                </a:solidFill>
+                <a:latin typeface="Aptos"/>
+                <a:cs typeface="Aptos"/>
+              </a:rPr>
+              <a:t>outbox/inbox</a:t>
+            </a:r>
+          </a:p>
+          <a:p>
+            <a:pPr algn="l"/>
+            <a:r>
+              <a:rPr lang="ru-RU" sz="1400" b="1">
+                <a:solidFill>
+                  <a:srgbClr val="18212B"/>
+                </a:solidFill>
+                <a:latin typeface="Aptos"/>
+                <a:cs typeface="Aptos"/>
+              </a:rPr>
+              <a:t>повторная синхронизация по версии</a:t>
+            </a:r>
+          </a:p>
+        </p:txBody>
+      </p:sp>
+      <p:sp>
+        <p:nvSpPr>
+          <p:cNvPr id="900" name="Shape 900"/>
+          <p:cNvSpPr txBox="1"/>
+          <p:nvPr/>
+        </p:nvSpPr>
+        <p:spPr>
+          <a:xfrm>
+            <a:off x="594360" y="6510528"/>
+            <a:ext cx="10972800" cy="201168"/>
+          </a:xfrm>
+          <a:prstGeom prst="roundRect">
+            <a:avLst/>
+          </a:prstGeom>
+          <a:noFill/>
+          <a:ln>
+            <a:noFill/>
+          </a:ln>
+        </p:spPr>
+        <p:txBody>
+          <a:bodyPr wrap="square" lIns="177800" tIns="177800" rIns="177800" bIns="177800"/>
+          <a:lstStyle/>
+          <a:p>
+            <a:pPr algn="l"/>
+            <a:r>
+              <a:rPr lang="ru-RU" sz="800" b="0">
+                <a:solidFill>
+                  <a:srgbClr val="5E6A75"/>
+                </a:solidFill>
+                <a:latin typeface="Aptos"/>
+                <a:cs typeface="Aptos"/>
+              </a:rPr>
+              <a:t>Real-time scale-out · 11</a:t>
+            </a:r>
+          </a:p>
+        </p:txBody>
+      </p:sp>
+    </p:spTree>
+  </p:cSld>
+  <p:clrMapOvr>
+    <a:masterClrMapping/>
+  </p:clrMapOvr>
+</p:sld>
+</file>
+
+<file path=ppt/slides/slide12.xml><?xml version="1.0" encoding="utf-8"?>
+<p:sld xmlns:a="http://schemas.openxmlformats.org/drawingml/2006/main" xmlns:r="http://schemas.openxmlformats.org/officeDocument/2006/relationships" xmlns:p="http://schemas.openxmlformats.org/presentationml/2006/main">
+  <p:cSld>
+    <p:bg>
+      <p:bgPr>
+        <a:solidFill>
+          <a:srgbClr val="F6F3EC"/>
+        </a:solidFill>
+        <a:effectLst/>
+      </p:bgPr>
+    </p:bg>
+    <p:spTree>
+      <p:nvGrpSpPr>
+        <p:cNvPr id="1" name=""/>
+        <p:cNvGrpSpPr/>
+        <p:nvPr/>
+      </p:nvGrpSpPr>
+      <p:grpSpPr>
+        <a:xfrm>
+          <a:off x="0" y="0"/>
+          <a:ext cx="0" cy="0"/>
+          <a:chOff x="0" y="0"/>
+          <a:chExt cx="0" cy="0"/>
+        </a:xfrm>
+      </p:grpSpPr>
+      <p:sp>
+        <p:nvSpPr>
+          <p:cNvPr id="10" name="Shape 10"/>
+          <p:cNvSpPr txBox="1"/>
+          <p:nvPr/>
+        </p:nvSpPr>
+        <p:spPr>
+          <a:xfrm>
+            <a:off x="594360" y="411480"/>
+            <a:ext cx="10881360" cy="658368"/>
+          </a:xfrm>
+          <a:prstGeom prst="roundRect">
+            <a:avLst/>
+          </a:prstGeom>
+          <a:noFill/>
+          <a:ln>
+            <a:noFill/>
+          </a:ln>
+        </p:spPr>
+        <p:txBody>
+          <a:bodyPr wrap="square" lIns="177800" tIns="177800" rIns="177800" bIns="177800"/>
+          <a:lstStyle/>
+          <a:p>
+            <a:pPr algn="l"/>
+            <a:r>
+              <a:rPr lang="ru-RU" sz="3000" b="1">
+                <a:solidFill>
+                  <a:srgbClr val="18212B"/>
+                </a:solidFill>
+                <a:latin typeface="Aptos"/>
+                <a:cs typeface="Aptos"/>
+              </a:rPr>
+              <a:t>Вывод</a:t>
+            </a:r>
+          </a:p>
+        </p:txBody>
+      </p:sp>
+      <p:sp>
+        <p:nvSpPr>
+          <p:cNvPr id="20" name="Shape 20"/>
+          <p:cNvSpPr txBox="1"/>
+          <p:nvPr/>
+        </p:nvSpPr>
+        <p:spPr>
+          <a:xfrm>
+            <a:off x="685800" y="1554480"/>
+            <a:ext cx="10835640" cy="1280160"/>
+          </a:xfrm>
+          <a:prstGeom prst="roundRect">
+            <a:avLst/>
+          </a:prstGeom>
+          <a:solidFill>
+            <a:srgbClr val="E8F3F1"/>
+          </a:solidFill>
+          <a:ln w="12700">
+            <a:solidFill>
+              <a:srgbClr val="0B6E69"/>
+            </a:solidFill>
+          </a:ln>
+        </p:spPr>
+        <p:txBody>
+          <a:bodyPr wrap="square" lIns="177800" tIns="177800" rIns="177800" bIns="177800"/>
+          <a:lstStyle/>
+          <a:p>
+            <a:pPr algn="ctr"/>
+            <a:r>
+              <a:rPr lang="ru-RU" sz="1700" b="1">
+                <a:solidFill>
+                  <a:srgbClr val="18212B"/>
+                </a:solidFill>
+                <a:latin typeface="Aptos"/>
+                <a:cs typeface="Aptos"/>
+              </a:rPr>
+              <a:t>Ограничение single-node WebSocket-архитектуры устранено за счёт распределённого real-time контура; тезис работы подтверждён экспериментально.</a:t>
+            </a:r>
+          </a:p>
+        </p:txBody>
+      </p:sp>
+      <p:sp>
+        <p:nvSpPr>
+          <p:cNvPr id="21" name="Shape 21"/>
+          <p:cNvSpPr txBox="1"/>
+          <p:nvPr/>
+        </p:nvSpPr>
+        <p:spPr>
+          <a:xfrm>
+            <a:off x="685800" y="2971800"/>
+            <a:ext cx="10835640" cy="1417320"/>
+          </a:xfrm>
+          <a:prstGeom prst="roundRect">
+            <a:avLst/>
+          </a:prstGeom>
+          <a:solidFill>
+            <a:srgbClr val="FFF3D8"/>
+          </a:solidFill>
+          <a:ln w="12700">
+            <a:solidFill>
+              <a:srgbClr val="C76F2E"/>
+            </a:solidFill>
+          </a:ln>
+        </p:spPr>
+        <p:txBody>
+          <a:bodyPr wrap="square" lIns="177800" tIns="177800" rIns="177800" bIns="177800"/>
+          <a:lstStyle/>
+          <a:p>
+            <a:pPr algn="ctr"/>
+            <a:r>
+              <a:rPr lang="ru-RU" sz="1500" b="1">
+                <a:solidFill>
+                  <a:srgbClr val="18212B"/>
+                </a:solidFill>
+                <a:latin typeface="Aptos"/>
+                <a:cs typeface="Aptos"/>
+              </a:rPr>
+              <a:t>Дополнительный эффект — повышение отказоустойчивости: при отказе одного узла клиенты продолжают получать события через другой экземпляр backend, тогда как single-node архитектура такой возможности не предоставляет.</a:t>
+            </a:r>
+          </a:p>
+        </p:txBody>
+      </p:sp>
+      <p:sp>
+        <p:nvSpPr>
+          <p:cNvPr id="22" name="Shape 22"/>
+          <p:cNvSpPr txBox="1"/>
+          <p:nvPr/>
+        </p:nvSpPr>
+        <p:spPr>
+          <a:xfrm>
+            <a:off x="685800" y="4572000"/>
+            <a:ext cx="3520440" cy="1691640"/>
+          </a:xfrm>
+          <a:prstGeom prst="roundRect">
+            <a:avLst/>
+          </a:prstGeom>
+          <a:solidFill>
+            <a:srgbClr val="FFFFFF"/>
+          </a:solidFill>
+          <a:ln w="12700">
+            <a:solidFill>
+              <a:srgbClr val="D7D2C7"/>
+            </a:solidFill>
+          </a:ln>
+        </p:spPr>
+        <p:txBody>
+          <a:bodyPr wrap="square" lIns="177800" tIns="177800" rIns="177800" bIns="177800"/>
+          <a:lstStyle/>
+          <a:p>
+            <a:pPr algn="l"/>
+            <a:r>
+              <a:rPr lang="ru-RU" sz="1300" b="1">
+                <a:solidFill>
+                  <a:srgbClr val="18212B"/>
+                </a:solidFill>
+                <a:latin typeface="Aptos"/>
+                <a:cs typeface="Aptos"/>
+              </a:rPr>
+              <a:t>Проблема</a:t>
+            </a:r>
+          </a:p>
+          <a:p>
+            <a:pPr algn="l"/>
+            <a:r>
+              <a:rPr lang="ru-RU" sz="1300" b="1">
+                <a:solidFill>
+                  <a:srgbClr val="18212B"/>
+                </a:solidFill>
+                <a:latin typeface="Aptos"/>
+                <a:cs typeface="Aptos"/>
+              </a:rPr>
+              <a:t/>
+            </a:r>
+          </a:p>
+          <a:p>
+            <a:pPr algn="l"/>
+            <a:r>
+              <a:rPr lang="ru-RU" sz="1300" b="1">
+                <a:solidFill>
+                  <a:srgbClr val="18212B"/>
+                </a:solidFill>
+                <a:latin typeface="Aptos"/>
+                <a:cs typeface="Aptos"/>
+              </a:rPr>
+              <a:t>Single-node SignalR: события не пересекают границу узла.</a:t>
+            </a:r>
+          </a:p>
+        </p:txBody>
+      </p:sp>
+      <p:sp>
+        <p:nvSpPr>
+          <p:cNvPr id="23" name="Shape 23"/>
+          <p:cNvSpPr txBox="1"/>
+          <p:nvPr/>
+        </p:nvSpPr>
+        <p:spPr>
+          <a:xfrm>
+            <a:off x="4343400" y="4572000"/>
+            <a:ext cx="3520440" cy="1691640"/>
+          </a:xfrm>
+          <a:prstGeom prst="roundRect">
+            <a:avLst/>
+          </a:prstGeom>
+          <a:solidFill>
+            <a:srgbClr val="FFFFFF"/>
+          </a:solidFill>
+          <a:ln w="12700">
+            <a:solidFill>
+              <a:srgbClr val="D7D2C7"/>
+            </a:solidFill>
+          </a:ln>
+        </p:spPr>
+        <p:txBody>
+          <a:bodyPr wrap="square" lIns="177800" tIns="177800" rIns="177800" bIns="177800"/>
+          <a:lstStyle/>
+          <a:p>
+            <a:pPr algn="l"/>
+            <a:r>
+              <a:rPr lang="ru-RU" sz="1300" b="1">
+                <a:solidFill>
+                  <a:srgbClr val="18212B"/>
+                </a:solidFill>
+                <a:latin typeface="Aptos"/>
+                <a:cs typeface="Aptos"/>
+              </a:rPr>
+              <a:t>Решение</a:t>
+            </a:r>
+          </a:p>
+          <a:p>
+            <a:pPr algn="l"/>
+            <a:r>
+              <a:rPr lang="ru-RU" sz="1300" b="1">
+                <a:solidFill>
+                  <a:srgbClr val="18212B"/>
+                </a:solidFill>
+                <a:latin typeface="Aptos"/>
+                <a:cs typeface="Aptos"/>
+              </a:rPr>
+              <a:t/>
+            </a:r>
+          </a:p>
+          <a:p>
+            <a:pPr algn="l"/>
+            <a:r>
+              <a:rPr lang="ru-RU" sz="1300" b="1">
+                <a:solidFill>
+                  <a:srgbClr val="18212B"/>
+                </a:solidFill>
+                <a:latin typeface="Aptos"/>
+                <a:cs typeface="Aptos"/>
+              </a:rPr>
+              <a:t>Несколько экземпляров backend за nginx + Redis backplane; общий код, переключение режима — переменной окружения.</a:t>
+            </a:r>
+          </a:p>
+        </p:txBody>
+      </p:sp>
+      <p:sp>
+        <p:nvSpPr>
+          <p:cNvPr id="24" name="Shape 24"/>
+          <p:cNvSpPr txBox="1"/>
+          <p:nvPr/>
+        </p:nvSpPr>
+        <p:spPr>
+          <a:xfrm>
+            <a:off x="8001000" y="4572000"/>
+            <a:ext cx="3520440" cy="1691640"/>
+          </a:xfrm>
+          <a:prstGeom prst="roundRect">
+            <a:avLst/>
+          </a:prstGeom>
+          <a:solidFill>
+            <a:srgbClr val="FFFFFF"/>
+          </a:solidFill>
+          <a:ln w="12700">
+            <a:solidFill>
+              <a:srgbClr val="D7D2C7"/>
+            </a:solidFill>
+          </a:ln>
+        </p:spPr>
+        <p:txBody>
+          <a:bodyPr wrap="square" lIns="177800" tIns="177800" rIns="177800" bIns="177800"/>
+          <a:lstStyle/>
+          <a:p>
+            <a:pPr algn="l"/>
+            <a:r>
+              <a:rPr lang="ru-RU" sz="1300" b="1">
+                <a:solidFill>
+                  <a:srgbClr val="18212B"/>
+                </a:solidFill>
+                <a:latin typeface="Aptos"/>
+                <a:cs typeface="Aptos"/>
+              </a:rPr>
+              <a:t>Доказательство</a:t>
+            </a:r>
+          </a:p>
+          <a:p>
+            <a:pPr algn="l"/>
+            <a:r>
+              <a:rPr lang="ru-RU" sz="1300" b="1">
+                <a:solidFill>
+                  <a:srgbClr val="18212B"/>
+                </a:solidFill>
+                <a:latin typeface="Aptos"/>
+                <a:cs typeface="Aptos"/>
+              </a:rPr>
+              <a:t/>
+            </a:r>
+          </a:p>
+          <a:p>
+            <a:pPr algn="l"/>
+            <a:r>
+              <a:rPr lang="ru-RU" sz="1300" b="1">
+                <a:solidFill>
+                  <a:srgbClr val="18212B"/>
+                </a:solidFill>
+                <a:latin typeface="Aptos"/>
+                <a:cs typeface="Aptos"/>
+              </a:rPr>
+              <a:t>Доставка (без / с) · серия · восстановление подписки · переключение после отказа.</a:t>
+            </a:r>
+          </a:p>
+        </p:txBody>
+      </p:sp>
+      <p:sp>
+        <p:nvSpPr>
+          <p:cNvPr id="900" name="Shape 900"/>
+          <p:cNvSpPr txBox="1"/>
+          <p:nvPr/>
+        </p:nvSpPr>
+        <p:spPr>
+          <a:xfrm>
+            <a:off x="594360" y="6510528"/>
+            <a:ext cx="10972800" cy="201168"/>
+          </a:xfrm>
+          <a:prstGeom prst="roundRect">
+            <a:avLst/>
+          </a:prstGeom>
+          <a:noFill/>
+          <a:ln>
+            <a:noFill/>
+          </a:ln>
+        </p:spPr>
+        <p:txBody>
+          <a:bodyPr wrap="square" lIns="177800" tIns="177800" rIns="177800" bIns="177800"/>
+          <a:lstStyle/>
+          <a:p>
+            <a:pPr algn="l"/>
+            <a:r>
+              <a:rPr lang="ru-RU" sz="800" b="0">
+                <a:solidFill>
+                  <a:srgbClr val="5E6A75"/>
+                </a:solidFill>
+                <a:latin typeface="Aptos"/>
+                <a:cs typeface="Aptos"/>
+              </a:rPr>
+              <a:t>Real-time scale-out · 12</a:t>
             </a:r>
           </a:p>
         </p:txBody>
@@ -715,7 +2123,7 @@
                 <a:latin typeface="Aptos"/>
                 <a:cs typeface="Aptos"/>
               </a:rPr>
-              <a:t>Анализ подходов к масштабированию</a:t>
+              <a:t>Современный контекст</a:t>
             </a:r>
           </a:p>
         </p:txBody>
@@ -752,7 +2160,7 @@
                 <a:latin typeface="Aptos"/>
                 <a:cs typeface="Aptos"/>
               </a:rPr>
-              <a:t>Шесть рассмотренных вариантов; обоснован выбор Redis backplane</a:t>
+              <a:t>Интерфейсы становятся событийными; AI-инструменты усиливают ожидание живой синхронизации</a:t>
             </a:r>
           </a:p>
         </p:txBody>
@@ -765,8 +2173,8 @@
         </p:nvSpPr>
         <p:spPr>
           <a:xfrm>
-            <a:off x="685800" y="1554480"/>
-            <a:ext cx="3657600" cy="1325880"/>
+            <a:off x="685800" y="1508760"/>
+            <a:ext cx="3520440" cy="4343400"/>
           </a:xfrm>
           <a:prstGeom prst="roundRect">
             <a:avLst/>
@@ -786,27 +2194,66 @@
           <a:p>
             <a:pPr algn="l"/>
             <a:r>
-              <a:rPr lang="ru-RU" sz="1300" b="0">
-                <a:solidFill>
-                  <a:srgbClr val="18212B"/>
-                </a:solidFill>
-                <a:latin typeface="Aptos"/>
-                <a:cs typeface="Aptos"/>
-              </a:rPr>
-              <a:t>Один экземпляр backend</a:t>
-            </a:r>
-          </a:p>
-          <a:p>
-            <a:pPr algn="l"/>
-            <a:r>
-              <a:rPr lang="ru-RU" sz="1300" b="0">
-                <a:solidFill>
-                  <a:srgbClr val="18212B"/>
-                </a:solidFill>
-                <a:latin typeface="Aptos"/>
-                <a:cs typeface="Aptos"/>
-              </a:rPr>
-              <a:t>Нет масштабирования; один узел — единственная точка отказа</a:t>
+              <a:rPr lang="ru-RU" sz="1400" b="0">
+                <a:solidFill>
+                  <a:srgbClr val="18212B"/>
+                </a:solidFill>
+                <a:latin typeface="Aptos"/>
+                <a:cs typeface="Aptos"/>
+              </a:rPr>
+              <a:t>Рост сложности продуктов</a:t>
+            </a:r>
+          </a:p>
+          <a:p>
+            <a:pPr algn="l"/>
+            <a:r>
+              <a:rPr lang="ru-RU" sz="1400" b="0">
+                <a:solidFill>
+                  <a:srgbClr val="18212B"/>
+                </a:solidFill>
+                <a:latin typeface="Aptos"/>
+                <a:cs typeface="Aptos"/>
+              </a:rPr>
+              <a:t/>
+            </a:r>
+          </a:p>
+          <a:p>
+            <a:pPr algn="l"/>
+            <a:r>
+              <a:rPr lang="ru-RU" sz="1400" b="0">
+                <a:solidFill>
+                  <a:srgbClr val="18212B"/>
+                </a:solidFill>
+                <a:latin typeface="Aptos"/>
+                <a:cs typeface="Aptos"/>
+              </a:rPr>
+              <a:t>Пользователь работает не с одной формой, а с отчётом, багами, комментариями, вложениями, статусами и участниками.</a:t>
+            </a:r>
+          </a:p>
+          <a:p>
+            <a:pPr algn="l"/>
+            <a:r>
+              <a:rPr lang="ru-RU" sz="1400" b="0">
+                <a:solidFill>
+                  <a:srgbClr val="18212B"/>
+                </a:solidFill>
+                <a:latin typeface="Aptos"/>
+                <a:cs typeface="Aptos"/>
+              </a:rPr>
+              <a:t/>
+            </a:r>
+          </a:p>
+          <a:p>
+            <a:pPr algn="l"/>
+            <a:r>
+              <a:rPr lang="ru-RU" sz="1400" b="0">
+                <a:solidFill>
+                  <a:srgbClr val="18212B"/>
+                </a:solidFill>
+                <a:latin typeface="Aptos"/>
+                <a:cs typeface="Aptos"/>
+              </a:rPr>
+              <a:t>Изменения должны становиться видимыми без ручного обновления страницы.</a:t>
             </a:r>
           </a:p>
         </p:txBody>
@@ -819,18 +2266,18 @@
         </p:nvSpPr>
         <p:spPr>
           <a:xfrm>
-            <a:off x="4434840" y="1554480"/>
-            <a:ext cx="3657600" cy="1325880"/>
+            <a:off x="4389120" y="1508760"/>
+            <a:ext cx="3520440" cy="4343400"/>
           </a:xfrm>
           <a:prstGeom prst="roundRect">
             <a:avLst/>
           </a:prstGeom>
           <a:solidFill>
-            <a:srgbClr val="FFFFFF"/>
+            <a:srgbClr val="FFF3D8"/>
           </a:solidFill>
           <a:ln w="12700">
             <a:solidFill>
-              <a:srgbClr val="D7D2C7"/>
+              <a:srgbClr val="C76F2E"/>
             </a:solidFill>
           </a:ln>
         </p:spPr>
@@ -840,27 +2287,66 @@
           <a:p>
             <a:pPr algn="l"/>
             <a:r>
-              <a:rPr lang="ru-RU" sz="1300" b="0">
-                <a:solidFill>
-                  <a:srgbClr val="18212B"/>
-                </a:solidFill>
-                <a:latin typeface="Aptos"/>
-                <a:cs typeface="Aptos"/>
-              </a:rPr>
-              <a:t>Несколько экземпляров без общего канала</a:t>
-            </a:r>
-          </a:p>
-          <a:p>
-            <a:pPr algn="l"/>
-            <a:r>
-              <a:rPr lang="ru-RU" sz="1300" b="0">
-                <a:solidFill>
-                  <a:srgbClr val="18212B"/>
-                </a:solidFill>
-                <a:latin typeface="Aptos"/>
-                <a:cs typeface="Aptos"/>
-              </a:rPr>
-              <a:t>События не доходят до клиентов, подключённых к другим узлам</a:t>
+              <a:rPr lang="ru-RU" sz="1400" b="0">
+                <a:solidFill>
+                  <a:srgbClr val="18212B"/>
+                </a:solidFill>
+                <a:latin typeface="Aptos"/>
+                <a:cs typeface="Aptos"/>
+              </a:rPr>
+              <a:t>AI-ready сценарии</a:t>
+            </a:r>
+          </a:p>
+          <a:p>
+            <a:pPr algn="l"/>
+            <a:r>
+              <a:rPr lang="ru-RU" sz="1400" b="0">
+                <a:solidFill>
+                  <a:srgbClr val="18212B"/>
+                </a:solidFill>
+                <a:latin typeface="Aptos"/>
+                <a:cs typeface="Aptos"/>
+              </a:rPr>
+              <a:t/>
+            </a:r>
+          </a:p>
+          <a:p>
+            <a:pPr algn="l"/>
+            <a:r>
+              <a:rPr lang="ru-RU" sz="1400" b="0">
+                <a:solidFill>
+                  <a:srgbClr val="18212B"/>
+                </a:solidFill>
+                <a:latin typeface="Aptos"/>
+                <a:cs typeface="Aptos"/>
+              </a:rPr>
+              <a:t>Фоновый сервис или ассистент может предложить исполнителя, дополнить описание, создать комментарий или изменить статус.</a:t>
+            </a:r>
+          </a:p>
+          <a:p>
+            <a:pPr algn="l"/>
+            <a:r>
+              <a:rPr lang="ru-RU" sz="1400" b="0">
+                <a:solidFill>
+                  <a:srgbClr val="18212B"/>
+                </a:solidFill>
+                <a:latin typeface="Aptos"/>
+                <a:cs typeface="Aptos"/>
+              </a:rPr>
+              <a:t/>
+            </a:r>
+          </a:p>
+          <a:p>
+            <a:pPr algn="l"/>
+            <a:r>
+              <a:rPr lang="ru-RU" sz="1400" b="0">
+                <a:solidFill>
+                  <a:srgbClr val="18212B"/>
+                </a:solidFill>
+                <a:latin typeface="Aptos"/>
+                <a:cs typeface="Aptos"/>
+              </a:rPr>
+              <a:t>В ВКР это контекст актуальности, а не заявление о готовой AI-функции.</a:t>
             </a:r>
           </a:p>
         </p:txBody>
@@ -873,170 +2359,8 @@
         </p:nvSpPr>
         <p:spPr>
           <a:xfrm>
-            <a:off x="8183880" y="1554480"/>
-            <a:ext cx="3657600" cy="1325880"/>
-          </a:xfrm>
-          <a:prstGeom prst="roundRect">
-            <a:avLst/>
-          </a:prstGeom>
-          <a:solidFill>
-            <a:srgbClr val="FFFFFF"/>
-          </a:solidFill>
-          <a:ln w="12700">
-            <a:solidFill>
-              <a:srgbClr val="D7D2C7"/>
-            </a:solidFill>
-          </a:ln>
-        </p:spPr>
-        <p:txBody>
-          <a:bodyPr wrap="square" lIns="177800" tIns="177800" rIns="177800" bIns="177800"/>
-          <a:lstStyle/>
-          <a:p>
-            <a:pPr algn="l"/>
-            <a:r>
-              <a:rPr lang="ru-RU" sz="1300" b="0">
-                <a:solidFill>
-                  <a:srgbClr val="18212B"/>
-                </a:solidFill>
-                <a:latin typeface="Aptos"/>
-                <a:cs typeface="Aptos"/>
-              </a:rPr>
-              <a:t>Привязка клиента к узлу (sticky)</a:t>
-            </a:r>
-          </a:p>
-          <a:p>
-            <a:pPr algn="l"/>
-            <a:r>
-              <a:rPr lang="ru-RU" sz="1300" b="0">
-                <a:solidFill>
-                  <a:srgbClr val="18212B"/>
-                </a:solidFill>
-                <a:latin typeface="Aptos"/>
-                <a:cs typeface="Aptos"/>
-              </a:rPr>
-              <a:t>Клиент остаётся на одном узле, но события на другие не приходят</a:t>
-            </a:r>
-          </a:p>
-        </p:txBody>
-      </p:sp>
-      <p:sp>
-        <p:nvSpPr>
-          <p:cNvPr id="23" name="Shape 23"/>
-          <p:cNvSpPr txBox="1"/>
-          <p:nvPr/>
-        </p:nvSpPr>
-        <p:spPr>
-          <a:xfrm>
-            <a:off x="685800" y="3017520"/>
-            <a:ext cx="3657600" cy="1325880"/>
-          </a:xfrm>
-          <a:prstGeom prst="roundRect">
-            <a:avLst/>
-          </a:prstGeom>
-          <a:solidFill>
-            <a:srgbClr val="FFFFFF"/>
-          </a:solidFill>
-          <a:ln w="12700">
-            <a:solidFill>
-              <a:srgbClr val="D7D2C7"/>
-            </a:solidFill>
-          </a:ln>
-        </p:spPr>
-        <p:txBody>
-          <a:bodyPr wrap="square" lIns="177800" tIns="177800" rIns="177800" bIns="177800"/>
-          <a:lstStyle/>
-          <a:p>
-            <a:pPr algn="l"/>
-            <a:r>
-              <a:rPr lang="ru-RU" sz="1300" b="0">
-                <a:solidFill>
-                  <a:srgbClr val="18212B"/>
-                </a:solidFill>
-                <a:latin typeface="Aptos"/>
-                <a:cs typeface="Aptos"/>
-              </a:rPr>
-              <a:t>Внешняя шина событий</a:t>
-            </a:r>
-          </a:p>
-          <a:p>
-            <a:pPr algn="l"/>
-            <a:r>
-              <a:rPr lang="ru-RU" sz="1300" b="0">
-                <a:solidFill>
-                  <a:srgbClr val="18212B"/>
-                </a:solidFill>
-                <a:latin typeface="Aptos"/>
-                <a:cs typeface="Aptos"/>
-              </a:rPr>
-              <a:t>Доставка между узлами есть, но требуется отдельная схема событий</a:t>
-            </a:r>
-          </a:p>
-        </p:txBody>
-      </p:sp>
-      <p:sp>
-        <p:nvSpPr>
-          <p:cNvPr id="24" name="Shape 24"/>
-          <p:cNvSpPr txBox="1"/>
-          <p:nvPr/>
-        </p:nvSpPr>
-        <p:spPr>
-          <a:xfrm>
-            <a:off x="4434840" y="3017520"/>
-            <a:ext cx="3657600" cy="1325880"/>
-          </a:xfrm>
-          <a:prstGeom prst="roundRect">
-            <a:avLst/>
-          </a:prstGeom>
-          <a:solidFill>
-            <a:srgbClr val="FFFFFF"/>
-          </a:solidFill>
-          <a:ln w="12700">
-            <a:solidFill>
-              <a:srgbClr val="D7D2C7"/>
-            </a:solidFill>
-          </a:ln>
-        </p:spPr>
-        <p:txBody>
-          <a:bodyPr wrap="square" lIns="177800" tIns="177800" rIns="177800" bIns="177800"/>
-          <a:lstStyle/>
-          <a:p>
-            <a:pPr algn="l"/>
-            <a:r>
-              <a:rPr lang="ru-RU" sz="1300" b="0">
-                <a:solidFill>
-                  <a:srgbClr val="18212B"/>
-                </a:solidFill>
-                <a:latin typeface="Aptos"/>
-                <a:cs typeface="Aptos"/>
-              </a:rPr>
-              <a:t>Облачный real-time сервис</a:t>
-            </a:r>
-          </a:p>
-          <a:p>
-            <a:pPr algn="l"/>
-            <a:r>
-              <a:rPr lang="ru-RU" sz="1300" b="0">
-                <a:solidFill>
-                  <a:srgbClr val="18212B"/>
-                </a:solidFill>
-                <a:latin typeface="Aptos"/>
-                <a:cs typeface="Aptos"/>
-              </a:rPr>
-              <a:t>Готовое решение, но снижает контроль над собственным контуром</a:t>
-            </a:r>
-          </a:p>
-        </p:txBody>
-      </p:sp>
-      <p:sp>
-        <p:nvSpPr>
-          <p:cNvPr id="25" name="Shape 25"/>
-          <p:cNvSpPr txBox="1"/>
-          <p:nvPr/>
-        </p:nvSpPr>
-        <p:spPr>
-          <a:xfrm>
-            <a:off x="8183880" y="3017520"/>
-            <a:ext cx="3657600" cy="1325880"/>
+            <a:off x="8092440" y="1508760"/>
+            <a:ext cx="3520440" cy="4343400"/>
           </a:xfrm>
           <a:prstGeom prst="roundRect">
             <a:avLst/>
@@ -1056,64 +2380,66 @@
           <a:p>
             <a:pPr algn="l"/>
             <a:r>
-              <a:rPr lang="ru-RU" sz="1300" b="1">
-                <a:solidFill>
-                  <a:srgbClr val="18212B"/>
-                </a:solidFill>
-                <a:latin typeface="Aptos"/>
-                <a:cs typeface="Aptos"/>
-              </a:rPr>
-              <a:t>Redis backplane для SignalR — выбрано</a:t>
-            </a:r>
-          </a:p>
-          <a:p>
-            <a:pPr algn="l"/>
-            <a:r>
-              <a:rPr lang="ru-RU" sz="1300" b="1">
-                <a:solidFill>
-                  <a:srgbClr val="18212B"/>
-                </a:solidFill>
-                <a:latin typeface="Aptos"/>
-                <a:cs typeface="Aptos"/>
-              </a:rPr>
-              <a:t>Штатный механизм, без перестройки кода, подходит для событий интерфейса</a:t>
-            </a:r>
-          </a:p>
-        </p:txBody>
-      </p:sp>
-      <p:sp>
-        <p:nvSpPr>
-          <p:cNvPr id="26" name="Shape 26"/>
-          <p:cNvSpPr txBox="1"/>
-          <p:nvPr/>
-        </p:nvSpPr>
-        <p:spPr>
-          <a:xfrm>
-            <a:off x="685800" y="4617720"/>
-            <a:ext cx="11155680" cy="1280160"/>
-          </a:xfrm>
-          <a:prstGeom prst="roundRect">
-            <a:avLst/>
-          </a:prstGeom>
-          <a:noFill/>
-          <a:ln>
-            <a:noFill/>
-          </a:ln>
-        </p:spPr>
-        <p:txBody>
-          <a:bodyPr wrap="square" lIns="177800" tIns="177800" rIns="177800" bIns="177800"/>
-          <a:lstStyle/>
-          <a:p>
-            <a:pPr algn="l"/>
-            <a:r>
-              <a:rPr lang="ru-RU" sz="1200" b="0">
-                <a:solidFill>
-                  <a:srgbClr val="5E6A75"/>
-                </a:solidFill>
-                <a:latin typeface="Aptos"/>
-                <a:cs typeface="Aptos"/>
-              </a:rPr>
-              <a:t>Критерии выбора: запускается на локальном стенде, сохраняет существующий код доставки событий, штатно поддерживается в ASP.NET Core SignalR, подходит для коротких событий интерфейса и легко воспроизводится.</a:t>
+              <a:rPr lang="ru-RU" sz="1400" b="1">
+                <a:solidFill>
+                  <a:srgbClr val="18212B"/>
+                </a:solidFill>
+                <a:latin typeface="Aptos"/>
+                <a:cs typeface="Aptos"/>
+              </a:rPr>
+              <a:t>REST + real-time</a:t>
+            </a:r>
+          </a:p>
+          <a:p>
+            <a:pPr algn="l"/>
+            <a:r>
+              <a:rPr lang="ru-RU" sz="1400" b="1">
+                <a:solidFill>
+                  <a:srgbClr val="18212B"/>
+                </a:solidFill>
+                <a:latin typeface="Aptos"/>
+                <a:cs typeface="Aptos"/>
+              </a:rPr>
+              <a:t/>
+            </a:r>
+          </a:p>
+          <a:p>
+            <a:pPr algn="l"/>
+            <a:r>
+              <a:rPr lang="ru-RU" sz="1400" b="1">
+                <a:solidFill>
+                  <a:srgbClr val="18212B"/>
+                </a:solidFill>
+                <a:latin typeface="Aptos"/>
+                <a:cs typeface="Aptos"/>
+              </a:rPr>
+              <a:t>HTTP-запрос фиксирует изменение состояния.</a:t>
+            </a:r>
+          </a:p>
+          <a:p>
+            <a:pPr algn="l"/>
+            <a:r>
+              <a:rPr lang="ru-RU" sz="1400" b="1">
+                <a:solidFill>
+                  <a:srgbClr val="18212B"/>
+                </a:solidFill>
+                <a:latin typeface="Aptos"/>
+                <a:cs typeface="Aptos"/>
+              </a:rPr>
+              <a:t/>
+            </a:r>
+          </a:p>
+          <a:p>
+            <a:pPr algn="l"/>
+            <a:r>
+              <a:rPr lang="ru-RU" sz="1400" b="1">
+                <a:solidFill>
+                  <a:srgbClr val="18212B"/>
+                </a:solidFill>
+                <a:latin typeface="Aptos"/>
+                <a:cs typeface="Aptos"/>
+              </a:rPr>
+              <a:t>SignalR-событие распространяет изменение активным участникам, включая клиентов на других backend-узлах.</a:t>
             </a:r>
           </a:p>
         </p:txBody>
@@ -1220,7 +2546,7 @@
                 <a:latin typeface="Aptos"/>
                 <a:cs typeface="Aptos"/>
               </a:rPr>
-              <a:t>Целевая архитектура</a:t>
+              <a:t>Предметная область</a:t>
             </a:r>
           </a:p>
         </p:txBody>
@@ -1257,7 +2583,7 @@
                 <a:latin typeface="Aptos"/>
                 <a:cs typeface="Aptos"/>
               </a:rPr>
-              <a:t>Два экземпляра app-api за nginx, общий Redis backplane для межузловой доставки</a:t>
+              <a:t>Real-time связан с сущностями продукта, а не с абстрактным WebSocket-демо</a:t>
             </a:r>
           </a:p>
         </p:txBody>
@@ -1270,8 +2596,49 @@
         </p:nvSpPr>
         <p:spPr>
           <a:xfrm>
-            <a:off x="914400" y="1874520"/>
-            <a:ext cx="1645920" cy="640080"/>
+            <a:off x="685800" y="1508760"/>
+            <a:ext cx="10972800" cy="685800"/>
+          </a:xfrm>
+          <a:prstGeom prst="roundRect">
+            <a:avLst/>
+          </a:prstGeom>
+          <a:solidFill>
+            <a:srgbClr val="E8F3F1"/>
+          </a:solidFill>
+          <a:ln w="12700">
+            <a:solidFill>
+              <a:srgbClr val="0B6E69"/>
+            </a:solidFill>
+          </a:ln>
+        </p:spPr>
+        <p:txBody>
+          <a:bodyPr wrap="square" lIns="177800" tIns="177800" rIns="177800" bIns="177800"/>
+          <a:lstStyle/>
+          <a:p>
+            <a:pPr algn="ctr"/>
+            <a:r>
+              <a:rPr lang="ru-RU" sz="1600" b="1">
+                <a:solidFill>
+                  <a:srgbClr val="18212B"/>
+                </a:solidFill>
+                <a:latin typeface="Aptos"/>
+                <a:cs typeface="Aptos"/>
+              </a:rPr>
+              <a:t>Система отслеживания задач: отчёты · баги · комментарии · вложения · ссылки · шаги воспроизведения · статусы</a:t>
+            </a:r>
+          </a:p>
+        </p:txBody>
+      </p:sp>
+      <p:sp>
+        <p:nvSpPr>
+          <p:cNvPr id="21" name="Shape 21"/>
+          <p:cNvSpPr txBox="1"/>
+          <p:nvPr/>
+        </p:nvSpPr>
+        <p:spPr>
+          <a:xfrm>
+            <a:off x="685800" y="2468880"/>
+            <a:ext cx="3520440" cy="2926080"/>
           </a:xfrm>
           <a:prstGeom prst="roundRect">
             <a:avLst/>
@@ -1289,7 +2656,7 @@
           <a:bodyPr wrap="square" lIns="177800" tIns="177800" rIns="177800" bIns="177800"/>
           <a:lstStyle/>
           <a:p>
-            <a:pPr algn="ctr"/>
+            <a:pPr algn="l"/>
             <a:r>
               <a:rPr lang="ru-RU" sz="1400" b="1">
                 <a:solidFill>
@@ -1298,21 +2665,73 @@
                 <a:latin typeface="Aptos"/>
                 <a:cs typeface="Aptos"/>
               </a:rPr>
-              <a:t>Клиент A</a:t>
-            </a:r>
-          </a:p>
-        </p:txBody>
-      </p:sp>
-      <p:sp>
-        <p:nvSpPr>
-          <p:cNvPr id="21" name="Shape 21"/>
-          <p:cNvSpPr txBox="1"/>
-          <p:nvPr/>
-        </p:nvSpPr>
-        <p:spPr>
-          <a:xfrm>
-            <a:off x="914400" y="3749040"/>
-            <a:ext cx="1645920" cy="640080"/>
+              <a:t>Открытие отчёта</a:t>
+            </a:r>
+          </a:p>
+          <a:p>
+            <a:pPr algn="l"/>
+            <a:r>
+              <a:rPr lang="ru-RU" sz="1400" b="1">
+                <a:solidFill>
+                  <a:srgbClr val="18212B"/>
+                </a:solidFill>
+                <a:latin typeface="Aptos"/>
+                <a:cs typeface="Aptos"/>
+              </a:rPr>
+              <a:t/>
+            </a:r>
+          </a:p>
+          <a:p>
+            <a:pPr algn="l"/>
+            <a:r>
+              <a:rPr lang="ru-RU" sz="1400" b="1">
+                <a:solidFill>
+                  <a:srgbClr val="18212B"/>
+                </a:solidFill>
+                <a:latin typeface="Aptos"/>
+                <a:cs typeface="Aptos"/>
+              </a:rPr>
+              <a:t>JoinReportGroupAsync</a:t>
+            </a:r>
+          </a:p>
+          <a:p>
+            <a:pPr algn="l"/>
+            <a:r>
+              <a:rPr lang="ru-RU" sz="1400" b="1">
+                <a:solidFill>
+                  <a:srgbClr val="18212B"/>
+                </a:solidFill>
+                <a:latin typeface="Aptos"/>
+                <a:cs typeface="Aptos"/>
+              </a:rPr>
+              <a:t/>
+            </a:r>
+          </a:p>
+          <a:p>
+            <a:pPr algn="l"/>
+            <a:r>
+              <a:rPr lang="ru-RU" sz="1400" b="1">
+                <a:solidFill>
+                  <a:srgbClr val="18212B"/>
+                </a:solidFill>
+                <a:latin typeface="Aptos"/>
+                <a:cs typeface="Aptos"/>
+              </a:rPr>
+              <a:t>Клиент вступает в группу отчёта и получает только релевантные события.</a:t>
+            </a:r>
+          </a:p>
+        </p:txBody>
+      </p:sp>
+      <p:sp>
+        <p:nvSpPr>
+          <p:cNvPr id="22" name="Shape 22"/>
+          <p:cNvSpPr txBox="1"/>
+          <p:nvPr/>
+        </p:nvSpPr>
+        <p:spPr>
+          <a:xfrm>
+            <a:off x="4389120" y="2468880"/>
+            <a:ext cx="3520440" cy="2926080"/>
           </a:xfrm>
           <a:prstGeom prst="roundRect">
             <a:avLst/>
@@ -1330,7 +2749,7 @@
           <a:bodyPr wrap="square" lIns="177800" tIns="177800" rIns="177800" bIns="177800"/>
           <a:lstStyle/>
           <a:p>
-            <a:pPr algn="ctr"/>
+            <a:pPr algn="l"/>
             <a:r>
               <a:rPr lang="ru-RU" sz="1400" b="1">
                 <a:solidFill>
@@ -1339,39 +2758,11 @@
                 <a:latin typeface="Aptos"/>
                 <a:cs typeface="Aptos"/>
               </a:rPr>
-              <a:t>Клиент B</a:t>
-            </a:r>
-          </a:p>
-        </p:txBody>
-      </p:sp>
-      <p:sp>
-        <p:nvSpPr>
-          <p:cNvPr id="22" name="Shape 22"/>
-          <p:cNvSpPr txBox="1"/>
-          <p:nvPr/>
-        </p:nvSpPr>
-        <p:spPr>
-          <a:xfrm>
-            <a:off x="3291840" y="2788920"/>
-            <a:ext cx="1371600" cy="731520"/>
-          </a:xfrm>
-          <a:prstGeom prst="roundRect">
-            <a:avLst/>
-          </a:prstGeom>
-          <a:solidFill>
-            <a:srgbClr val="E8F3F1"/>
-          </a:solidFill>
-          <a:ln w="12700">
-            <a:solidFill>
-              <a:srgbClr val="0B6E69"/>
-            </a:solidFill>
-          </a:ln>
-        </p:spPr>
-        <p:txBody>
-          <a:bodyPr wrap="square" lIns="177800" tIns="177800" rIns="177800" bIns="177800"/>
-          <a:lstStyle/>
-          <a:p>
-            <a:pPr algn="ctr"/>
+              <a:t>Изменение сущностей</a:t>
+            </a:r>
+          </a:p>
+          <a:p>
+            <a:pPr algn="l"/>
             <a:r>
               <a:rPr lang="ru-RU" sz="1400" b="1">
                 <a:solidFill>
@@ -1380,7 +2771,72 @@
                 <a:latin typeface="Aptos"/>
                 <a:cs typeface="Aptos"/>
               </a:rPr>
-              <a:t>nginx</a:t>
+              <a:t/>
+            </a:r>
+          </a:p>
+          <a:p>
+            <a:pPr algn="l"/>
+            <a:r>
+              <a:rPr lang="ru-RU" sz="1400" b="1">
+                <a:solidFill>
+                  <a:srgbClr val="18212B"/>
+                </a:solidFill>
+                <a:latin typeface="Aptos"/>
+                <a:cs typeface="Aptos"/>
+              </a:rPr>
+              <a:t>ReceiveReportPatch</a:t>
+            </a:r>
+          </a:p>
+          <a:p>
+            <a:pPr algn="l"/>
+            <a:r>
+              <a:rPr lang="ru-RU" sz="1400" b="1">
+                <a:solidFill>
+                  <a:srgbClr val="18212B"/>
+                </a:solidFill>
+                <a:latin typeface="Aptos"/>
+                <a:cs typeface="Aptos"/>
+              </a:rPr>
+              <a:t>ReceiveBugCreate</a:t>
+            </a:r>
+          </a:p>
+          <a:p>
+            <a:pPr algn="l"/>
+            <a:r>
+              <a:rPr lang="ru-RU" sz="1400" b="1">
+                <a:solidFill>
+                  <a:srgbClr val="18212B"/>
+                </a:solidFill>
+                <a:latin typeface="Aptos"/>
+                <a:cs typeface="Aptos"/>
+              </a:rPr>
+              <a:t>ReceiveCommentUpdate</a:t>
+            </a:r>
+          </a:p>
+          <a:p>
+            <a:pPr algn="l"/>
+            <a:r>
+              <a:rPr lang="ru-RU" sz="1400" b="1">
+                <a:solidFill>
+                  <a:srgbClr val="18212B"/>
+                </a:solidFill>
+                <a:latin typeface="Aptos"/>
+                <a:cs typeface="Aptos"/>
+              </a:rPr>
+              <a:t/>
+            </a:r>
+          </a:p>
+          <a:p>
+            <a:pPr algn="l"/>
+            <a:r>
+              <a:rPr lang="ru-RU" sz="1400" b="1">
+                <a:solidFill>
+                  <a:srgbClr val="18212B"/>
+                </a:solidFill>
+                <a:latin typeface="Aptos"/>
+                <a:cs typeface="Aptos"/>
+              </a:rPr>
+              <a:t>События применяются к состоянию интерфейса.</a:t>
             </a:r>
           </a:p>
         </p:txBody>
@@ -1393,8 +2849,8 @@
         </p:nvSpPr>
         <p:spPr>
           <a:xfrm>
-            <a:off x="5577840" y="1874520"/>
-            <a:ext cx="1828800" cy="640080"/>
+            <a:off x="8092440" y="2468880"/>
+            <a:ext cx="3520440" cy="2926080"/>
           </a:xfrm>
           <a:prstGeom prst="roundRect">
             <a:avLst/>
@@ -1404,7 +2860,7 @@
           </a:solidFill>
           <a:ln w="12700">
             <a:solidFill>
-              <a:srgbClr val="0B6E69"/>
+              <a:srgbClr val="D7D2C7"/>
             </a:solidFill>
           </a:ln>
         </p:spPr>
@@ -1412,7 +2868,7 @@
           <a:bodyPr wrap="square" lIns="177800" tIns="177800" rIns="177800" bIns="177800"/>
           <a:lstStyle/>
           <a:p>
-            <a:pPr algn="ctr"/>
+            <a:pPr algn="l"/>
             <a:r>
               <a:rPr lang="ru-RU" sz="1400" b="1">
                 <a:solidFill>
@@ -1421,39 +2877,11 @@
                 <a:latin typeface="Aptos"/>
                 <a:cs typeface="Aptos"/>
               </a:rPr>
-              <a:t>app-api-1</a:t>
-            </a:r>
-          </a:p>
-        </p:txBody>
-      </p:sp>
-      <p:sp>
-        <p:nvSpPr>
-          <p:cNvPr id="24" name="Shape 24"/>
-          <p:cNvSpPr txBox="1"/>
-          <p:nvPr/>
-        </p:nvSpPr>
-        <p:spPr>
-          <a:xfrm>
-            <a:off x="5577840" y="3749040"/>
-            <a:ext cx="1828800" cy="640080"/>
-          </a:xfrm>
-          <a:prstGeom prst="roundRect">
-            <a:avLst/>
-          </a:prstGeom>
-          <a:solidFill>
-            <a:srgbClr val="FFFFFF"/>
-          </a:solidFill>
-          <a:ln w="12700">
-            <a:solidFill>
-              <a:srgbClr val="0B6E69"/>
-            </a:solidFill>
-          </a:ln>
-        </p:spPr>
-        <p:txBody>
-          <a:bodyPr wrap="square" lIns="177800" tIns="177800" rIns="177800" bIns="177800"/>
-          <a:lstStyle/>
-          <a:p>
-            <a:pPr algn="ctr"/>
+              <a:t>Восстановление</a:t>
+            </a:r>
+          </a:p>
+          <a:p>
+            <a:pPr algn="l"/>
             <a:r>
               <a:rPr lang="ru-RU" sz="1400" b="1">
                 <a:solidFill>
@@ -1462,39 +2890,11 @@
                 <a:latin typeface="Aptos"/>
                 <a:cs typeface="Aptos"/>
               </a:rPr>
-              <a:t>app-api-2</a:t>
-            </a:r>
-          </a:p>
-        </p:txBody>
-      </p:sp>
-      <p:sp>
-        <p:nvSpPr>
-          <p:cNvPr id="25" name="Shape 25"/>
-          <p:cNvSpPr txBox="1"/>
-          <p:nvPr/>
-        </p:nvSpPr>
-        <p:spPr>
-          <a:xfrm>
-            <a:off x="8321040" y="2788920"/>
-            <a:ext cx="2194560" cy="731520"/>
-          </a:xfrm>
-          <a:prstGeom prst="roundRect">
-            <a:avLst/>
-          </a:prstGeom>
-          <a:solidFill>
-            <a:srgbClr val="E8F3F1"/>
-          </a:solidFill>
-          <a:ln w="12700">
-            <a:solidFill>
-              <a:srgbClr val="0B6E69"/>
-            </a:solidFill>
-          </a:ln>
-        </p:spPr>
-        <p:txBody>
-          <a:bodyPr wrap="square" lIns="177800" tIns="177800" rIns="177800" bIns="177800"/>
-          <a:lstStyle/>
-          <a:p>
-            <a:pPr algn="ctr"/>
+              <a:t/>
+            </a:r>
+          </a:p>
+          <a:p>
+            <a:pPr algn="l"/>
             <a:r>
               <a:rPr lang="ru-RU" sz="1400" b="1">
                 <a:solidFill>
@@ -1503,215 +2903,46 @@
                 <a:latin typeface="Aptos"/>
                 <a:cs typeface="Aptos"/>
               </a:rPr>
-              <a:t>Redis backplane</a:t>
-            </a:r>
-          </a:p>
-        </p:txBody>
-      </p:sp>
-      <p:cxnSp>
-        <p:nvCxnSpPr>
-          <p:cNvPr id="50" name="Connector 50"/>
-          <p:cNvCxnSpPr/>
-          <p:nvPr/>
-        </p:nvCxnSpPr>
-        <p:spPr>
-          <a:xfrm flipH="0" flipV="0">
-            <a:off x="2560320" y="2194560"/>
-            <a:ext cx="731520" cy="795528"/>
-          </a:xfrm>
-          <a:prstGeom prst="straightConnector1">
-            <a:avLst/>
-          </a:prstGeom>
-          <a:ln w="15875" cap="flat">
-            <a:solidFill>
-              <a:srgbClr val="0B6E69"/>
-            </a:solidFill>
-            <a:tailEnd type="triangle"/>
-          </a:ln>
-        </p:spPr>
-      </p:cxnSp>
-      <p:cxnSp>
-        <p:nvCxnSpPr>
-          <p:cNvPr id="51" name="Connector 51"/>
-          <p:cNvCxnSpPr/>
-          <p:nvPr/>
-        </p:nvCxnSpPr>
-        <p:spPr>
-          <a:xfrm flipH="0" flipV="1">
-            <a:off x="2560320" y="3319272"/>
-            <a:ext cx="731520" cy="749808"/>
-          </a:xfrm>
-          <a:prstGeom prst="straightConnector1">
-            <a:avLst/>
-          </a:prstGeom>
-          <a:ln w="15875" cap="flat">
-            <a:solidFill>
-              <a:srgbClr val="0B6E69"/>
-            </a:solidFill>
-            <a:tailEnd type="triangle"/>
-          </a:ln>
-        </p:spPr>
-      </p:cxnSp>
-      <p:cxnSp>
-        <p:nvCxnSpPr>
-          <p:cNvPr id="52" name="Connector 52"/>
-          <p:cNvCxnSpPr/>
-          <p:nvPr/>
-        </p:nvCxnSpPr>
-        <p:spPr>
-          <a:xfrm flipH="0" flipV="1">
-            <a:off x="4663440" y="2194560"/>
-            <a:ext cx="914400" cy="795528"/>
-          </a:xfrm>
-          <a:prstGeom prst="straightConnector1">
-            <a:avLst/>
-          </a:prstGeom>
-          <a:ln w="15875" cap="flat">
-            <a:solidFill>
-              <a:srgbClr val="0B6E69"/>
-            </a:solidFill>
-            <a:tailEnd type="triangle"/>
-          </a:ln>
-        </p:spPr>
-      </p:cxnSp>
-      <p:cxnSp>
-        <p:nvCxnSpPr>
-          <p:cNvPr id="53" name="Connector 53"/>
-          <p:cNvCxnSpPr/>
-          <p:nvPr/>
-        </p:nvCxnSpPr>
-        <p:spPr>
-          <a:xfrm flipH="0" flipV="0">
-            <a:off x="4663440" y="3319272"/>
-            <a:ext cx="914400" cy="749808"/>
-          </a:xfrm>
-          <a:prstGeom prst="straightConnector1">
-            <a:avLst/>
-          </a:prstGeom>
-          <a:ln w="15875" cap="flat">
-            <a:solidFill>
-              <a:srgbClr val="0B6E69"/>
-            </a:solidFill>
-            <a:tailEnd type="triangle"/>
-          </a:ln>
-        </p:spPr>
-      </p:cxnSp>
-      <p:cxnSp>
-        <p:nvCxnSpPr>
-          <p:cNvPr id="54" name="Connector 54"/>
-          <p:cNvCxnSpPr/>
-          <p:nvPr/>
-        </p:nvCxnSpPr>
-        <p:spPr>
-          <a:xfrm flipH="0" flipV="0">
-            <a:off x="7406640" y="2194560"/>
-            <a:ext cx="914400" cy="795528"/>
-          </a:xfrm>
-          <a:prstGeom prst="straightConnector1">
-            <a:avLst/>
-          </a:prstGeom>
-          <a:ln w="15875" cap="flat">
-            <a:solidFill>
-              <a:srgbClr val="0B6E69"/>
-            </a:solidFill>
-            <a:headEnd type="triangle"/>
-            <a:tailEnd type="triangle"/>
-          </a:ln>
-        </p:spPr>
-      </p:cxnSp>
-      <p:cxnSp>
-        <p:nvCxnSpPr>
-          <p:cNvPr id="55" name="Connector 55"/>
-          <p:cNvCxnSpPr/>
-          <p:nvPr/>
-        </p:nvCxnSpPr>
-        <p:spPr>
-          <a:xfrm flipH="0" flipV="1">
-            <a:off x="7406640" y="3319272"/>
-            <a:ext cx="914400" cy="749808"/>
-          </a:xfrm>
-          <a:prstGeom prst="straightConnector1">
-            <a:avLst/>
-          </a:prstGeom>
-          <a:ln w="15875" cap="flat">
-            <a:solidFill>
-              <a:srgbClr val="0B6E69"/>
-            </a:solidFill>
-            <a:headEnd type="triangle"/>
-            <a:tailEnd type="triangle"/>
-          </a:ln>
-        </p:spPr>
-      </p:cxnSp>
-      <p:sp>
-        <p:nvSpPr>
-          <p:cNvPr id="26" name="Shape 26"/>
-          <p:cNvSpPr txBox="1"/>
-          <p:nvPr/>
-        </p:nvSpPr>
-        <p:spPr>
-          <a:xfrm>
-            <a:off x="640080" y="4937760"/>
-            <a:ext cx="10972800" cy="457200"/>
-          </a:xfrm>
-          <a:prstGeom prst="roundRect">
-            <a:avLst/>
-          </a:prstGeom>
-          <a:noFill/>
-          <a:ln>
-            <a:noFill/>
-          </a:ln>
-        </p:spPr>
-        <p:txBody>
-          <a:bodyPr wrap="square" lIns="177800" tIns="177800" rIns="177800" bIns="177800"/>
-          <a:lstStyle/>
-          <a:p>
-            <a:pPr algn="ctr"/>
-            <a:r>
-              <a:rPr lang="ru-RU" sz="1300" b="0">
-                <a:solidFill>
-                  <a:srgbClr val="5E6A75"/>
-                </a:solidFill>
-                <a:latin typeface="Aptos"/>
-                <a:cs typeface="Aptos"/>
-              </a:rPr>
-              <a:t>Событие публикуется в Redis · доставляется обоим узлам · группы SignalR остаются локальным runtime-состоянием</a:t>
-            </a:r>
-          </a:p>
-        </p:txBody>
-      </p:sp>
-      <p:sp>
-        <p:nvSpPr>
-          <p:cNvPr id="27" name="Shape 27"/>
-          <p:cNvSpPr txBox="1"/>
-          <p:nvPr/>
-        </p:nvSpPr>
-        <p:spPr>
-          <a:xfrm>
-            <a:off x="640080" y="5440680"/>
-            <a:ext cx="10972800" cy="365760"/>
-          </a:xfrm>
-          <a:prstGeom prst="roundRect">
-            <a:avLst/>
-          </a:prstGeom>
-          <a:noFill/>
-          <a:ln>
-            <a:noFill/>
-          </a:ln>
-        </p:spPr>
-        <p:txBody>
-          <a:bodyPr wrap="square" lIns="177800" tIns="177800" rIns="177800" bIns="177800"/>
-          <a:lstStyle/>
-          <a:p>
-            <a:pPr algn="ctr"/>
-            <a:r>
-              <a:rPr lang="ru-RU" sz="1100" b="0">
-                <a:solidFill>
-                  <a:srgbClr val="5E6A75"/>
-                </a:solidFill>
-                <a:latin typeface="Aptos"/>
-                <a:cs typeface="Aptos"/>
-              </a:rPr>
-              <a:t>Оба экземпляра подключены к общей PostgreSQL; на схеме показан только канал real-time-доставки.</a:t>
+              <a:t>onreconnected</a:t>
+            </a:r>
+          </a:p>
+          <a:p>
+            <a:pPr algn="l"/>
+            <a:r>
+              <a:rPr lang="ru-RU" sz="1400" b="1">
+                <a:solidFill>
+                  <a:srgbClr val="18212B"/>
+                </a:solidFill>
+                <a:latin typeface="Aptos"/>
+                <a:cs typeface="Aptos"/>
+              </a:rPr>
+              <a:t>JoinReportGroupAsync</a:t>
+            </a:r>
+          </a:p>
+          <a:p>
+            <a:pPr algn="l"/>
+            <a:r>
+              <a:rPr lang="ru-RU" sz="1400" b="1">
+                <a:solidFill>
+                  <a:srgbClr val="18212B"/>
+                </a:solidFill>
+                <a:latin typeface="Aptos"/>
+                <a:cs typeface="Aptos"/>
+              </a:rPr>
+              <a:t/>
+            </a:r>
+          </a:p>
+          <a:p>
+            <a:pPr algn="l"/>
+            <a:r>
+              <a:rPr lang="ru-RU" sz="1400" b="1">
+                <a:solidFill>
+                  <a:srgbClr val="18212B"/>
+                </a:solidFill>
+                <a:latin typeface="Aptos"/>
+                <a:cs typeface="Aptos"/>
+              </a:rPr>
+              <a:t>После reconnect клиент повторно восстанавливает подписку на текущий отчёт.</a:t>
             </a:r>
           </a:p>
         </p:txBody>
@@ -1818,7 +3049,7 @@
                 <a:latin typeface="Aptos"/>
                 <a:cs typeface="Aptos"/>
               </a:rPr>
-              <a:t>Что сделано</a:t>
+              <a:t>Анализ подходов к масштабированию</a:t>
             </a:r>
           </a:p>
         </p:txBody>
@@ -1855,7 +3086,7 @@
                 <a:latin typeface="Aptos"/>
                 <a:cs typeface="Aptos"/>
               </a:rPr>
-              <a:t>Подключён межузловой канал, добавлена диагностика, собран стенд и клиент проверки</a:t>
+              <a:t>Шесть рассмотренных вариантов; для реализации выбран подход 4</a:t>
             </a:r>
           </a:p>
         </p:txBody>
@@ -1869,7 +3100,7 @@
         <p:spPr>
           <a:xfrm>
             <a:off x="685800" y="1554480"/>
-            <a:ext cx="5349240" cy="2194560"/>
+            <a:ext cx="3657600" cy="1325880"/>
           </a:xfrm>
           <a:prstGeom prst="roundRect">
             <a:avLst/>
@@ -1889,40 +3120,27 @@
           <a:p>
             <a:pPr algn="l"/>
             <a:r>
-              <a:rPr lang="ru-RU" sz="1400" b="0">
-                <a:solidFill>
-                  <a:srgbClr val="18212B"/>
-                </a:solidFill>
-                <a:latin typeface="Aptos"/>
-                <a:cs typeface="Aptos"/>
-              </a:rPr>
-              <a:t>1 · Межузловая доставка событий</a:t>
-            </a:r>
-          </a:p>
-          <a:p>
-            <a:pPr algn="l"/>
-            <a:r>
-              <a:rPr lang="ru-RU" sz="1400" b="0">
-                <a:solidFill>
-                  <a:srgbClr val="18212B"/>
-                </a:solidFill>
-                <a:latin typeface="Aptos"/>
-                <a:cs typeface="Aptos"/>
-              </a:rPr>
-              <a:t/>
-            </a:r>
-          </a:p>
-          <a:p>
-            <a:pPr algn="l"/>
-            <a:r>
-              <a:rPr lang="ru-RU" sz="1400" b="0">
-                <a:solidFill>
-                  <a:srgbClr val="18212B"/>
-                </a:solidFill>
-                <a:latin typeface="Aptos"/>
-                <a:cs typeface="Aptos"/>
-              </a:rPr>
-              <a:t>К SignalR подключён Redis backplane. Включается переменной окружения — один и тот же код работает и в режиме с межузловым каналом, и без него.</a:t>
+              <a:rPr lang="ru-RU" sz="1300" b="0">
+                <a:solidFill>
+                  <a:srgbClr val="18212B"/>
+                </a:solidFill>
+                <a:latin typeface="Aptos"/>
+                <a:cs typeface="Aptos"/>
+              </a:rPr>
+              <a:t>Один экземпляр backend</a:t>
+            </a:r>
+          </a:p>
+          <a:p>
+            <a:pPr algn="l"/>
+            <a:r>
+              <a:rPr lang="ru-RU" sz="1300" b="0">
+                <a:solidFill>
+                  <a:srgbClr val="18212B"/>
+                </a:solidFill>
+                <a:latin typeface="Aptos"/>
+                <a:cs typeface="Aptos"/>
+              </a:rPr>
+              <a:t>Нет масштабирования; один узел — единственная точка отказа</a:t>
             </a:r>
           </a:p>
         </p:txBody>
@@ -1935,8 +3153,8 @@
         </p:nvSpPr>
         <p:spPr>
           <a:xfrm>
-            <a:off x="685800" y="3840480"/>
-            <a:ext cx="5349240" cy="1874520"/>
+            <a:off x="4434840" y="1554480"/>
+            <a:ext cx="3657600" cy="1325880"/>
           </a:xfrm>
           <a:prstGeom prst="roundRect">
             <a:avLst/>
@@ -1956,40 +3174,27 @@
           <a:p>
             <a:pPr algn="l"/>
             <a:r>
-              <a:rPr lang="ru-RU" sz="1400" b="0">
-                <a:solidFill>
-                  <a:srgbClr val="18212B"/>
-                </a:solidFill>
-                <a:latin typeface="Aptos"/>
-                <a:cs typeface="Aptos"/>
-              </a:rPr>
-              <a:t>2 · Диагностика подключения</a:t>
-            </a:r>
-          </a:p>
-          <a:p>
-            <a:pPr algn="l"/>
-            <a:r>
-              <a:rPr lang="ru-RU" sz="1400" b="0">
-                <a:solidFill>
-                  <a:srgbClr val="18212B"/>
-                </a:solidFill>
-                <a:latin typeface="Aptos"/>
-                <a:cs typeface="Aptos"/>
-              </a:rPr>
-              <a:t/>
-            </a:r>
-          </a:p>
-          <a:p>
-            <a:pPr algn="l"/>
-            <a:r>
-              <a:rPr lang="ru-RU" sz="1400" b="0">
-                <a:solidFill>
-                  <a:srgbClr val="18212B"/>
-                </a:solidFill>
-                <a:latin typeface="Aptos"/>
-                <a:cs typeface="Aptos"/>
-              </a:rPr>
-              <a:t>Узел сообщает свой идентификатор и идентификатор соединения; ключевые события жизненного цикла соединения логируются.</a:t>
+              <a:rPr lang="ru-RU" sz="1300" b="0">
+                <a:solidFill>
+                  <a:srgbClr val="18212B"/>
+                </a:solidFill>
+                <a:latin typeface="Aptos"/>
+                <a:cs typeface="Aptos"/>
+              </a:rPr>
+              <a:t>Несколько экземпляров без общего канала</a:t>
+            </a:r>
+          </a:p>
+          <a:p>
+            <a:pPr algn="l"/>
+            <a:r>
+              <a:rPr lang="ru-RU" sz="1300" b="0">
+                <a:solidFill>
+                  <a:srgbClr val="18212B"/>
+                </a:solidFill>
+                <a:latin typeface="Aptos"/>
+                <a:cs typeface="Aptos"/>
+              </a:rPr>
+              <a:t>События не доходят до клиентов, подключённых к другим узлам</a:t>
             </a:r>
           </a:p>
         </p:txBody>
@@ -2002,8 +3207,8 @@
         </p:nvSpPr>
         <p:spPr>
           <a:xfrm>
-            <a:off x="6172200" y="1554480"/>
-            <a:ext cx="5349240" cy="2194560"/>
+            <a:off x="8183880" y="1554480"/>
+            <a:ext cx="3657600" cy="1325880"/>
           </a:xfrm>
           <a:prstGeom prst="roundRect">
             <a:avLst/>
@@ -2023,40 +3228,27 @@
           <a:p>
             <a:pPr algn="l"/>
             <a:r>
-              <a:rPr lang="ru-RU" sz="1400" b="0">
-                <a:solidFill>
-                  <a:srgbClr val="18212B"/>
-                </a:solidFill>
-                <a:latin typeface="Aptos"/>
-                <a:cs typeface="Aptos"/>
-              </a:rPr>
-              <a:t>3 · Многоэкземплярный стенд</a:t>
-            </a:r>
-          </a:p>
-          <a:p>
-            <a:pPr algn="l"/>
-            <a:r>
-              <a:rPr lang="ru-RU" sz="1400" b="0">
-                <a:solidFill>
-                  <a:srgbClr val="18212B"/>
-                </a:solidFill>
-                <a:latin typeface="Aptos"/>
-                <a:cs typeface="Aptos"/>
-              </a:rPr>
-              <a:t/>
-            </a:r>
-          </a:p>
-          <a:p>
-            <a:pPr algn="l"/>
-            <a:r>
-              <a:rPr lang="ru-RU" sz="1400" b="0">
-                <a:solidFill>
-                  <a:srgbClr val="18212B"/>
-                </a:solidFill>
-                <a:latin typeface="Aptos"/>
-                <a:cs typeface="Aptos"/>
-              </a:rPr>
-              <a:t>Два экземпляра backend за nginx, общая база данных и Redis, отдельный режим без межузлового канала — для воспроизведения исходной проблемы.</a:t>
+              <a:rPr lang="ru-RU" sz="1300" b="0">
+                <a:solidFill>
+                  <a:srgbClr val="18212B"/>
+                </a:solidFill>
+                <a:latin typeface="Aptos"/>
+                <a:cs typeface="Aptos"/>
+              </a:rPr>
+              <a:t>Привязка клиента к узлу (sticky)</a:t>
+            </a:r>
+          </a:p>
+          <a:p>
+            <a:pPr algn="l"/>
+            <a:r>
+              <a:rPr lang="ru-RU" sz="1300" b="0">
+                <a:solidFill>
+                  <a:srgbClr val="18212B"/>
+                </a:solidFill>
+                <a:latin typeface="Aptos"/>
+                <a:cs typeface="Aptos"/>
+              </a:rPr>
+              <a:t>Клиент остаётся на одном узле, но события на другие не приходят</a:t>
             </a:r>
           </a:p>
         </p:txBody>
@@ -2069,8 +3261,8 @@
         </p:nvSpPr>
         <p:spPr>
           <a:xfrm>
-            <a:off x="6172200" y="3840480"/>
-            <a:ext cx="5349240" cy="1874520"/>
+            <a:off x="685800" y="3017520"/>
+            <a:ext cx="3657600" cy="1325880"/>
           </a:xfrm>
           <a:prstGeom prst="roundRect">
             <a:avLst/>
@@ -2090,40 +3282,172 @@
           <a:p>
             <a:pPr algn="l"/>
             <a:r>
-              <a:rPr lang="ru-RU" sz="1400" b="0">
-                <a:solidFill>
-                  <a:srgbClr val="18212B"/>
-                </a:solidFill>
-                <a:latin typeface="Aptos"/>
-                <a:cs typeface="Aptos"/>
-              </a:rPr>
-              <a:t>4 · Проверочный клиент</a:t>
-            </a:r>
-          </a:p>
-          <a:p>
-            <a:pPr algn="l"/>
-            <a:r>
-              <a:rPr lang="ru-RU" sz="1400" b="0">
-                <a:solidFill>
-                  <a:srgbClr val="18212B"/>
-                </a:solidFill>
-                <a:latin typeface="Aptos"/>
-                <a:cs typeface="Aptos"/>
-              </a:rPr>
-              <a:t/>
-            </a:r>
-          </a:p>
-          <a:p>
-            <a:pPr algn="l"/>
-            <a:r>
-              <a:rPr lang="ru-RU" sz="1400" b="0">
-                <a:solidFill>
-                  <a:srgbClr val="18212B"/>
-                </a:solidFill>
-                <a:latin typeface="Aptos"/>
-                <a:cs typeface="Aptos"/>
-              </a:rPr>
-              <a:t>Подключается к разным узлам, фиксирует доставку события и поддерживает четыре сценария проверки.</a:t>
+              <a:rPr lang="ru-RU" sz="1300" b="0">
+                <a:solidFill>
+                  <a:srgbClr val="18212B"/>
+                </a:solidFill>
+                <a:latin typeface="Aptos"/>
+                <a:cs typeface="Aptos"/>
+              </a:rPr>
+              <a:t>Внешняя шина событий</a:t>
+            </a:r>
+          </a:p>
+          <a:p>
+            <a:pPr algn="l"/>
+            <a:r>
+              <a:rPr lang="ru-RU" sz="1300" b="0">
+                <a:solidFill>
+                  <a:srgbClr val="18212B"/>
+                </a:solidFill>
+                <a:latin typeface="Aptos"/>
+                <a:cs typeface="Aptos"/>
+              </a:rPr>
+              <a:t>Доставка между узлами есть, но требуется отдельная схема событий</a:t>
+            </a:r>
+          </a:p>
+        </p:txBody>
+      </p:sp>
+      <p:sp>
+        <p:nvSpPr>
+          <p:cNvPr id="24" name="Shape 24"/>
+          <p:cNvSpPr txBox="1"/>
+          <p:nvPr/>
+        </p:nvSpPr>
+        <p:spPr>
+          <a:xfrm>
+            <a:off x="4434840" y="3017520"/>
+            <a:ext cx="3657600" cy="1325880"/>
+          </a:xfrm>
+          <a:prstGeom prst="roundRect">
+            <a:avLst/>
+          </a:prstGeom>
+          <a:solidFill>
+            <a:srgbClr val="FFFFFF"/>
+          </a:solidFill>
+          <a:ln w="12700">
+            <a:solidFill>
+              <a:srgbClr val="D7D2C7"/>
+            </a:solidFill>
+          </a:ln>
+        </p:spPr>
+        <p:txBody>
+          <a:bodyPr wrap="square" lIns="177800" tIns="177800" rIns="177800" bIns="177800"/>
+          <a:lstStyle/>
+          <a:p>
+            <a:pPr algn="l"/>
+            <a:r>
+              <a:rPr lang="ru-RU" sz="1300" b="0">
+                <a:solidFill>
+                  <a:srgbClr val="18212B"/>
+                </a:solidFill>
+                <a:latin typeface="Aptos"/>
+                <a:cs typeface="Aptos"/>
+              </a:rPr>
+              <a:t>Облачный real-time сервис</a:t>
+            </a:r>
+          </a:p>
+          <a:p>
+            <a:pPr algn="l"/>
+            <a:r>
+              <a:rPr lang="ru-RU" sz="1300" b="0">
+                <a:solidFill>
+                  <a:srgbClr val="18212B"/>
+                </a:solidFill>
+                <a:latin typeface="Aptos"/>
+                <a:cs typeface="Aptos"/>
+              </a:rPr>
+              <a:t>Готовое решение, но снижает контроль над собственным контуром</a:t>
+            </a:r>
+          </a:p>
+        </p:txBody>
+      </p:sp>
+      <p:sp>
+        <p:nvSpPr>
+          <p:cNvPr id="25" name="Shape 25"/>
+          <p:cNvSpPr txBox="1"/>
+          <p:nvPr/>
+        </p:nvSpPr>
+        <p:spPr>
+          <a:xfrm>
+            <a:off x="8183880" y="3017520"/>
+            <a:ext cx="3657600" cy="1325880"/>
+          </a:xfrm>
+          <a:prstGeom prst="roundRect">
+            <a:avLst/>
+          </a:prstGeom>
+          <a:solidFill>
+            <a:srgbClr val="E8F3F1"/>
+          </a:solidFill>
+          <a:ln w="12700">
+            <a:solidFill>
+              <a:srgbClr val="0B6E69"/>
+            </a:solidFill>
+          </a:ln>
+        </p:spPr>
+        <p:txBody>
+          <a:bodyPr wrap="square" lIns="177800" tIns="177800" rIns="177800" bIns="177800"/>
+          <a:lstStyle/>
+          <a:p>
+            <a:pPr algn="l"/>
+            <a:r>
+              <a:rPr lang="ru-RU" sz="1300" b="1">
+                <a:solidFill>
+                  <a:srgbClr val="18212B"/>
+                </a:solidFill>
+                <a:latin typeface="Aptos"/>
+                <a:cs typeface="Aptos"/>
+              </a:rPr>
+              <a:t>Redis backplane для SignalR — выбрано</a:t>
+            </a:r>
+          </a:p>
+          <a:p>
+            <a:pPr algn="l"/>
+            <a:r>
+              <a:rPr lang="ru-RU" sz="1300" b="1">
+                <a:solidFill>
+                  <a:srgbClr val="18212B"/>
+                </a:solidFill>
+                <a:latin typeface="Aptos"/>
+                <a:cs typeface="Aptos"/>
+              </a:rPr>
+              <a:t>Штатный механизм, без перестройки кода, подходит для событий интерфейса</a:t>
+            </a:r>
+          </a:p>
+        </p:txBody>
+      </p:sp>
+      <p:sp>
+        <p:nvSpPr>
+          <p:cNvPr id="26" name="Shape 26"/>
+          <p:cNvSpPr txBox="1"/>
+          <p:nvPr/>
+        </p:nvSpPr>
+        <p:spPr>
+          <a:xfrm>
+            <a:off x="685800" y="4617720"/>
+            <a:ext cx="11155680" cy="1280160"/>
+          </a:xfrm>
+          <a:prstGeom prst="roundRect">
+            <a:avLst/>
+          </a:prstGeom>
+          <a:noFill/>
+          <a:ln>
+            <a:noFill/>
+          </a:ln>
+        </p:spPr>
+        <p:txBody>
+          <a:bodyPr wrap="square" lIns="177800" tIns="177800" rIns="177800" bIns="177800"/>
+          <a:lstStyle/>
+          <a:p>
+            <a:pPr algn="l"/>
+            <a:r>
+              <a:rPr lang="ru-RU" sz="1200" b="0">
+                <a:solidFill>
+                  <a:srgbClr val="5E6A75"/>
+                </a:solidFill>
+                <a:latin typeface="Aptos"/>
+                <a:cs typeface="Aptos"/>
+              </a:rPr>
+              <a:t>Критерии выбора: запускается на локальном стенде, сохраняет существующий код доставки событий, штатно поддерживается в ASP.NET Core SignalR, подходит для коротких событий интерфейса и легко воспроизводится.</a:t>
             </a:r>
           </a:p>
         </p:txBody>
@@ -2230,7 +3554,7 @@
                 <a:latin typeface="Aptos"/>
                 <a:cs typeface="Aptos"/>
               </a:rPr>
-              <a:t>Программа испытаний</a:t>
+              <a:t>Целевая архитектура</a:t>
             </a:r>
           </a:p>
         </p:txBody>
@@ -2267,7 +3591,7 @@
                 <a:latin typeface="Aptos"/>
                 <a:cs typeface="Aptos"/>
               </a:rPr>
-              <a:t>Два режима по одному коду · четыре сценария проверки</a:t>
+              <a:t>Два экземпляра app-api за nginx, общий Redis backplane для межузловой доставки</a:t>
             </a:r>
           </a:p>
         </p:txBody>
@@ -2280,8 +3604,8 @@
         </p:nvSpPr>
         <p:spPr>
           <a:xfrm>
-            <a:off x="685800" y="1554480"/>
-            <a:ext cx="5349240" cy="4160520"/>
+            <a:off x="914400" y="1874520"/>
+            <a:ext cx="1645920" cy="640080"/>
           </a:xfrm>
           <a:prstGeom prst="roundRect">
             <a:avLst/>
@@ -2299,94 +3623,16 @@
           <a:bodyPr wrap="square" lIns="177800" tIns="177800" rIns="177800" bIns="177800"/>
           <a:lstStyle/>
           <a:p>
-            <a:pPr algn="l"/>
-            <a:r>
-              <a:rPr lang="ru-RU" sz="1500" b="0">
-                <a:solidFill>
-                  <a:srgbClr val="18212B"/>
-                </a:solidFill>
-                <a:latin typeface="Aptos"/>
-                <a:cs typeface="Aptos"/>
-              </a:rPr>
-              <a:t>Два режима</a:t>
-            </a:r>
-          </a:p>
-          <a:p>
-            <a:pPr algn="l"/>
-            <a:r>
-              <a:rPr lang="ru-RU" sz="1500" b="0">
-                <a:solidFill>
-                  <a:srgbClr val="18212B"/>
-                </a:solidFill>
-                <a:latin typeface="Aptos"/>
-                <a:cs typeface="Aptos"/>
-              </a:rPr>
-              <a:t/>
-            </a:r>
-          </a:p>
-          <a:p>
-            <a:pPr algn="l"/>
-            <a:r>
-              <a:rPr lang="ru-RU" sz="1500" b="0">
-                <a:solidFill>
-                  <a:srgbClr val="18212B"/>
-                </a:solidFill>
-                <a:latin typeface="Aptos"/>
-                <a:cs typeface="Aptos"/>
-              </a:rPr>
-              <a:t>• Без межузлового канала — воспроизведение проблемы</a:t>
-            </a:r>
-          </a:p>
-          <a:p>
-            <a:pPr algn="l"/>
-            <a:r>
-              <a:rPr lang="ru-RU" sz="1500" b="0">
-                <a:solidFill>
-                  <a:srgbClr val="18212B"/>
-                </a:solidFill>
-                <a:latin typeface="Aptos"/>
-                <a:cs typeface="Aptos"/>
-              </a:rPr>
-              <a:t/>
-            </a:r>
-          </a:p>
-          <a:p>
-            <a:pPr algn="l"/>
-            <a:r>
-              <a:rPr lang="ru-RU" sz="1500" b="0">
-                <a:solidFill>
-                  <a:srgbClr val="18212B"/>
-                </a:solidFill>
-                <a:latin typeface="Aptos"/>
-                <a:cs typeface="Aptos"/>
-              </a:rPr>
-              <a:t>• С межузловым каналом — проверка решения</a:t>
-            </a:r>
-          </a:p>
-          <a:p>
-            <a:pPr algn="l"/>
-            <a:r>
-              <a:rPr lang="ru-RU" sz="1500" b="0">
-                <a:solidFill>
-                  <a:srgbClr val="18212B"/>
-                </a:solidFill>
-                <a:latin typeface="Aptos"/>
-                <a:cs typeface="Aptos"/>
-              </a:rPr>
-              <a:t/>
-            </a:r>
-          </a:p>
-          <a:p>
-            <a:pPr algn="l"/>
-            <a:r>
-              <a:rPr lang="ru-RU" sz="1500" b="0">
-                <a:solidFill>
-                  <a:srgbClr val="18212B"/>
-                </a:solidFill>
-                <a:latin typeface="Aptos"/>
-                <a:cs typeface="Aptos"/>
-              </a:rPr>
-              <a:t>Один и тот же код, один и тот же сценарий; отличие — наличие Redis backplane.</a:t>
+            <a:pPr algn="ctr"/>
+            <a:r>
+              <a:rPr lang="ru-RU" sz="1400" b="1">
+                <a:solidFill>
+                  <a:srgbClr val="18212B"/>
+                </a:solidFill>
+                <a:latin typeface="Aptos"/>
+                <a:cs typeface="Aptos"/>
+              </a:rPr>
+              <a:t>Клиент A</a:t>
             </a:r>
           </a:p>
         </p:txBody>
@@ -2399,8 +3645,8 @@
         </p:nvSpPr>
         <p:spPr>
           <a:xfrm>
-            <a:off x="6172200" y="1554480"/>
-            <a:ext cx="5349240" cy="4160520"/>
+            <a:off x="914400" y="3749040"/>
+            <a:ext cx="1645920" cy="640080"/>
           </a:xfrm>
           <a:prstGeom prst="roundRect">
             <a:avLst/>
@@ -2418,120 +3664,388 @@
           <a:bodyPr wrap="square" lIns="177800" tIns="177800" rIns="177800" bIns="177800"/>
           <a:lstStyle/>
           <a:p>
-            <a:pPr algn="l"/>
-            <a:r>
-              <a:rPr lang="ru-RU" sz="1500" b="0">
-                <a:solidFill>
-                  <a:srgbClr val="18212B"/>
-                </a:solidFill>
-                <a:latin typeface="Aptos"/>
-                <a:cs typeface="Aptos"/>
-              </a:rPr>
-              <a:t>Четыре сценария</a:t>
-            </a:r>
-          </a:p>
-          <a:p>
-            <a:pPr algn="l"/>
-            <a:r>
-              <a:rPr lang="ru-RU" sz="1500" b="0">
-                <a:solidFill>
-                  <a:srgbClr val="18212B"/>
-                </a:solidFill>
-                <a:latin typeface="Aptos"/>
-                <a:cs typeface="Aptos"/>
-              </a:rPr>
-              <a:t/>
-            </a:r>
-          </a:p>
-          <a:p>
-            <a:pPr algn="l"/>
-            <a:r>
-              <a:rPr lang="ru-RU" sz="1500" b="0">
-                <a:solidFill>
-                  <a:srgbClr val="18212B"/>
-                </a:solidFill>
-                <a:latin typeface="Aptos"/>
-                <a:cs typeface="Aptos"/>
-              </a:rPr>
-              <a:t>• Одиночная доставка между узлами</a:t>
-            </a:r>
-          </a:p>
-          <a:p>
-            <a:pPr algn="l"/>
-            <a:r>
-              <a:rPr lang="ru-RU" sz="1500" b="0">
-                <a:solidFill>
-                  <a:srgbClr val="18212B"/>
-                </a:solidFill>
-                <a:latin typeface="Aptos"/>
-                <a:cs typeface="Aptos"/>
-              </a:rPr>
-              <a:t/>
-            </a:r>
-          </a:p>
-          <a:p>
-            <a:pPr algn="l"/>
-            <a:r>
-              <a:rPr lang="ru-RU" sz="1500" b="0">
-                <a:solidFill>
-                  <a:srgbClr val="18212B"/>
-                </a:solidFill>
-                <a:latin typeface="Aptos"/>
-                <a:cs typeface="Aptos"/>
-              </a:rPr>
-              <a:t>• Серия из пяти итераций</a:t>
-            </a:r>
-          </a:p>
-          <a:p>
-            <a:pPr algn="l"/>
-            <a:r>
-              <a:rPr lang="ru-RU" sz="1500" b="0">
-                <a:solidFill>
-                  <a:srgbClr val="18212B"/>
-                </a:solidFill>
-                <a:latin typeface="Aptos"/>
-                <a:cs typeface="Aptos"/>
-              </a:rPr>
-              <a:t/>
-            </a:r>
-          </a:p>
-          <a:p>
-            <a:pPr algn="l"/>
-            <a:r>
-              <a:rPr lang="ru-RU" sz="1500" b="0">
-                <a:solidFill>
-                  <a:srgbClr val="18212B"/>
-                </a:solidFill>
-                <a:latin typeface="Aptos"/>
-                <a:cs typeface="Aptos"/>
-              </a:rPr>
-              <a:t>• Восстановление подписки после разрыва</a:t>
-            </a:r>
-          </a:p>
-          <a:p>
-            <a:pPr algn="l"/>
-            <a:r>
-              <a:rPr lang="ru-RU" sz="1500" b="0">
-                <a:solidFill>
-                  <a:srgbClr val="18212B"/>
-                </a:solidFill>
-                <a:latin typeface="Aptos"/>
-                <a:cs typeface="Aptos"/>
-              </a:rPr>
-              <a:t/>
-            </a:r>
-          </a:p>
-          <a:p>
-            <a:pPr algn="l"/>
-            <a:r>
-              <a:rPr lang="ru-RU" sz="1500" b="0">
-                <a:solidFill>
-                  <a:srgbClr val="18212B"/>
-                </a:solidFill>
-                <a:latin typeface="Aptos"/>
-                <a:cs typeface="Aptos"/>
-              </a:rPr>
-              <a:t>• Переключение на другой узел после отказа</a:t>
+            <a:pPr algn="ctr"/>
+            <a:r>
+              <a:rPr lang="ru-RU" sz="1400" b="1">
+                <a:solidFill>
+                  <a:srgbClr val="18212B"/>
+                </a:solidFill>
+                <a:latin typeface="Aptos"/>
+                <a:cs typeface="Aptos"/>
+              </a:rPr>
+              <a:t>Клиент B</a:t>
+            </a:r>
+          </a:p>
+        </p:txBody>
+      </p:sp>
+      <p:sp>
+        <p:nvSpPr>
+          <p:cNvPr id="22" name="Shape 22"/>
+          <p:cNvSpPr txBox="1"/>
+          <p:nvPr/>
+        </p:nvSpPr>
+        <p:spPr>
+          <a:xfrm>
+            <a:off x="3291840" y="2788920"/>
+            <a:ext cx="1371600" cy="731520"/>
+          </a:xfrm>
+          <a:prstGeom prst="roundRect">
+            <a:avLst/>
+          </a:prstGeom>
+          <a:solidFill>
+            <a:srgbClr val="E8F3F1"/>
+          </a:solidFill>
+          <a:ln w="12700">
+            <a:solidFill>
+              <a:srgbClr val="0B6E69"/>
+            </a:solidFill>
+          </a:ln>
+        </p:spPr>
+        <p:txBody>
+          <a:bodyPr wrap="square" lIns="177800" tIns="177800" rIns="177800" bIns="177800"/>
+          <a:lstStyle/>
+          <a:p>
+            <a:pPr algn="ctr"/>
+            <a:r>
+              <a:rPr lang="ru-RU" sz="1400" b="1">
+                <a:solidFill>
+                  <a:srgbClr val="18212B"/>
+                </a:solidFill>
+                <a:latin typeface="Aptos"/>
+                <a:cs typeface="Aptos"/>
+              </a:rPr>
+              <a:t>nginx</a:t>
+            </a:r>
+          </a:p>
+        </p:txBody>
+      </p:sp>
+      <p:sp>
+        <p:nvSpPr>
+          <p:cNvPr id="23" name="Shape 23"/>
+          <p:cNvSpPr txBox="1"/>
+          <p:nvPr/>
+        </p:nvSpPr>
+        <p:spPr>
+          <a:xfrm>
+            <a:off x="5577840" y="1874520"/>
+            <a:ext cx="1828800" cy="640080"/>
+          </a:xfrm>
+          <a:prstGeom prst="roundRect">
+            <a:avLst/>
+          </a:prstGeom>
+          <a:solidFill>
+            <a:srgbClr val="FFFFFF"/>
+          </a:solidFill>
+          <a:ln w="12700">
+            <a:solidFill>
+              <a:srgbClr val="0B6E69"/>
+            </a:solidFill>
+          </a:ln>
+        </p:spPr>
+        <p:txBody>
+          <a:bodyPr wrap="square" lIns="177800" tIns="177800" rIns="177800" bIns="177800"/>
+          <a:lstStyle/>
+          <a:p>
+            <a:pPr algn="ctr"/>
+            <a:r>
+              <a:rPr lang="ru-RU" sz="1400" b="1">
+                <a:solidFill>
+                  <a:srgbClr val="18212B"/>
+                </a:solidFill>
+                <a:latin typeface="Aptos"/>
+                <a:cs typeface="Aptos"/>
+              </a:rPr>
+              <a:t>app-api-1</a:t>
+            </a:r>
+          </a:p>
+        </p:txBody>
+      </p:sp>
+      <p:sp>
+        <p:nvSpPr>
+          <p:cNvPr id="24" name="Shape 24"/>
+          <p:cNvSpPr txBox="1"/>
+          <p:nvPr/>
+        </p:nvSpPr>
+        <p:spPr>
+          <a:xfrm>
+            <a:off x="5577840" y="3749040"/>
+            <a:ext cx="1828800" cy="640080"/>
+          </a:xfrm>
+          <a:prstGeom prst="roundRect">
+            <a:avLst/>
+          </a:prstGeom>
+          <a:solidFill>
+            <a:srgbClr val="FFFFFF"/>
+          </a:solidFill>
+          <a:ln w="12700">
+            <a:solidFill>
+              <a:srgbClr val="0B6E69"/>
+            </a:solidFill>
+          </a:ln>
+        </p:spPr>
+        <p:txBody>
+          <a:bodyPr wrap="square" lIns="177800" tIns="177800" rIns="177800" bIns="177800"/>
+          <a:lstStyle/>
+          <a:p>
+            <a:pPr algn="ctr"/>
+            <a:r>
+              <a:rPr lang="ru-RU" sz="1400" b="1">
+                <a:solidFill>
+                  <a:srgbClr val="18212B"/>
+                </a:solidFill>
+                <a:latin typeface="Aptos"/>
+                <a:cs typeface="Aptos"/>
+              </a:rPr>
+              <a:t>app-api-2</a:t>
+            </a:r>
+          </a:p>
+        </p:txBody>
+      </p:sp>
+      <p:sp>
+        <p:nvSpPr>
+          <p:cNvPr id="25" name="Shape 25"/>
+          <p:cNvSpPr txBox="1"/>
+          <p:nvPr/>
+        </p:nvSpPr>
+        <p:spPr>
+          <a:xfrm>
+            <a:off x="8321040" y="2788920"/>
+            <a:ext cx="2194560" cy="731520"/>
+          </a:xfrm>
+          <a:prstGeom prst="roundRect">
+            <a:avLst/>
+          </a:prstGeom>
+          <a:solidFill>
+            <a:srgbClr val="E8F3F1"/>
+          </a:solidFill>
+          <a:ln w="12700">
+            <a:solidFill>
+              <a:srgbClr val="0B6E69"/>
+            </a:solidFill>
+          </a:ln>
+        </p:spPr>
+        <p:txBody>
+          <a:bodyPr wrap="square" lIns="177800" tIns="177800" rIns="177800" bIns="177800"/>
+          <a:lstStyle/>
+          <a:p>
+            <a:pPr algn="ctr"/>
+            <a:r>
+              <a:rPr lang="ru-RU" sz="1400" b="1">
+                <a:solidFill>
+                  <a:srgbClr val="18212B"/>
+                </a:solidFill>
+                <a:latin typeface="Aptos"/>
+                <a:cs typeface="Aptos"/>
+              </a:rPr>
+              <a:t>Redis backplane</a:t>
+            </a:r>
+          </a:p>
+        </p:txBody>
+      </p:sp>
+      <p:cxnSp>
+        <p:nvCxnSpPr>
+          <p:cNvPr id="50" name="Connector 50"/>
+          <p:cNvCxnSpPr/>
+          <p:nvPr/>
+        </p:nvCxnSpPr>
+        <p:spPr>
+          <a:xfrm flipH="0" flipV="0">
+            <a:off x="2560320" y="2194560"/>
+            <a:ext cx="731520" cy="795528"/>
+          </a:xfrm>
+          <a:prstGeom prst="straightConnector1">
+            <a:avLst/>
+          </a:prstGeom>
+          <a:ln w="15875" cap="flat">
+            <a:solidFill>
+              <a:srgbClr val="0B6E69"/>
+            </a:solidFill>
+            <a:tailEnd type="triangle"/>
+          </a:ln>
+        </p:spPr>
+      </p:cxnSp>
+      <p:cxnSp>
+        <p:nvCxnSpPr>
+          <p:cNvPr id="51" name="Connector 51"/>
+          <p:cNvCxnSpPr/>
+          <p:nvPr/>
+        </p:nvCxnSpPr>
+        <p:spPr>
+          <a:xfrm flipH="0" flipV="1">
+            <a:off x="2560320" y="3319272"/>
+            <a:ext cx="731520" cy="749808"/>
+          </a:xfrm>
+          <a:prstGeom prst="straightConnector1">
+            <a:avLst/>
+          </a:prstGeom>
+          <a:ln w="15875" cap="flat">
+            <a:solidFill>
+              <a:srgbClr val="0B6E69"/>
+            </a:solidFill>
+            <a:tailEnd type="triangle"/>
+          </a:ln>
+        </p:spPr>
+      </p:cxnSp>
+      <p:cxnSp>
+        <p:nvCxnSpPr>
+          <p:cNvPr id="52" name="Connector 52"/>
+          <p:cNvCxnSpPr/>
+          <p:nvPr/>
+        </p:nvCxnSpPr>
+        <p:spPr>
+          <a:xfrm flipH="0" flipV="1">
+            <a:off x="4663440" y="2194560"/>
+            <a:ext cx="914400" cy="795528"/>
+          </a:xfrm>
+          <a:prstGeom prst="straightConnector1">
+            <a:avLst/>
+          </a:prstGeom>
+          <a:ln w="15875" cap="flat">
+            <a:solidFill>
+              <a:srgbClr val="0B6E69"/>
+            </a:solidFill>
+            <a:tailEnd type="triangle"/>
+          </a:ln>
+        </p:spPr>
+      </p:cxnSp>
+      <p:cxnSp>
+        <p:nvCxnSpPr>
+          <p:cNvPr id="53" name="Connector 53"/>
+          <p:cNvCxnSpPr/>
+          <p:nvPr/>
+        </p:nvCxnSpPr>
+        <p:spPr>
+          <a:xfrm flipH="0" flipV="0">
+            <a:off x="4663440" y="3319272"/>
+            <a:ext cx="914400" cy="749808"/>
+          </a:xfrm>
+          <a:prstGeom prst="straightConnector1">
+            <a:avLst/>
+          </a:prstGeom>
+          <a:ln w="15875" cap="flat">
+            <a:solidFill>
+              <a:srgbClr val="0B6E69"/>
+            </a:solidFill>
+            <a:tailEnd type="triangle"/>
+          </a:ln>
+        </p:spPr>
+      </p:cxnSp>
+      <p:cxnSp>
+        <p:nvCxnSpPr>
+          <p:cNvPr id="54" name="Connector 54"/>
+          <p:cNvCxnSpPr/>
+          <p:nvPr/>
+        </p:nvCxnSpPr>
+        <p:spPr>
+          <a:xfrm flipH="0" flipV="0">
+            <a:off x="7406640" y="2194560"/>
+            <a:ext cx="914400" cy="795528"/>
+          </a:xfrm>
+          <a:prstGeom prst="straightConnector1">
+            <a:avLst/>
+          </a:prstGeom>
+          <a:ln w="15875" cap="flat">
+            <a:solidFill>
+              <a:srgbClr val="0B6E69"/>
+            </a:solidFill>
+            <a:headEnd type="triangle"/>
+            <a:tailEnd type="triangle"/>
+          </a:ln>
+        </p:spPr>
+      </p:cxnSp>
+      <p:cxnSp>
+        <p:nvCxnSpPr>
+          <p:cNvPr id="55" name="Connector 55"/>
+          <p:cNvCxnSpPr/>
+          <p:nvPr/>
+        </p:nvCxnSpPr>
+        <p:spPr>
+          <a:xfrm flipH="0" flipV="1">
+            <a:off x="7406640" y="3319272"/>
+            <a:ext cx="914400" cy="749808"/>
+          </a:xfrm>
+          <a:prstGeom prst="straightConnector1">
+            <a:avLst/>
+          </a:prstGeom>
+          <a:ln w="15875" cap="flat">
+            <a:solidFill>
+              <a:srgbClr val="0B6E69"/>
+            </a:solidFill>
+            <a:headEnd type="triangle"/>
+            <a:tailEnd type="triangle"/>
+          </a:ln>
+        </p:spPr>
+      </p:cxnSp>
+      <p:sp>
+        <p:nvSpPr>
+          <p:cNvPr id="26" name="Shape 26"/>
+          <p:cNvSpPr txBox="1"/>
+          <p:nvPr/>
+        </p:nvSpPr>
+        <p:spPr>
+          <a:xfrm>
+            <a:off x="640080" y="4937760"/>
+            <a:ext cx="10972800" cy="457200"/>
+          </a:xfrm>
+          <a:prstGeom prst="roundRect">
+            <a:avLst/>
+          </a:prstGeom>
+          <a:noFill/>
+          <a:ln>
+            <a:noFill/>
+          </a:ln>
+        </p:spPr>
+        <p:txBody>
+          <a:bodyPr wrap="square" lIns="177800" tIns="177800" rIns="177800" bIns="177800"/>
+          <a:lstStyle/>
+          <a:p>
+            <a:pPr algn="ctr"/>
+            <a:r>
+              <a:rPr lang="ru-RU" sz="1300" b="0">
+                <a:solidFill>
+                  <a:srgbClr val="5E6A75"/>
+                </a:solidFill>
+                <a:latin typeface="Aptos"/>
+                <a:cs typeface="Aptos"/>
+              </a:rPr>
+              <a:t>Событие публикуется в Redis · доставляется обоим узлам · группы SignalR остаются локальным runtime-состоянием</a:t>
+            </a:r>
+          </a:p>
+        </p:txBody>
+      </p:sp>
+      <p:sp>
+        <p:nvSpPr>
+          <p:cNvPr id="27" name="Shape 27"/>
+          <p:cNvSpPr txBox="1"/>
+          <p:nvPr/>
+        </p:nvSpPr>
+        <p:spPr>
+          <a:xfrm>
+            <a:off x="640080" y="5440680"/>
+            <a:ext cx="10972800" cy="365760"/>
+          </a:xfrm>
+          <a:prstGeom prst="roundRect">
+            <a:avLst/>
+          </a:prstGeom>
+          <a:noFill/>
+          <a:ln>
+            <a:noFill/>
+          </a:ln>
+        </p:spPr>
+        <p:txBody>
+          <a:bodyPr wrap="square" lIns="177800" tIns="177800" rIns="177800" bIns="177800"/>
+          <a:lstStyle/>
+          <a:p>
+            <a:pPr algn="ctr"/>
+            <a:r>
+              <a:rPr lang="ru-RU" sz="1100" b="0">
+                <a:solidFill>
+                  <a:srgbClr val="5E6A75"/>
+                </a:solidFill>
+                <a:latin typeface="Aptos"/>
+                <a:cs typeface="Aptos"/>
+              </a:rPr>
+              <a:t>Оба экземпляра подключены к общей PostgreSQL; на схеме показан только канал real-time-доставки.</a:t>
             </a:r>
           </a:p>
         </p:txBody>
@@ -2638,7 +4152,7 @@
                 <a:latin typeface="Aptos"/>
                 <a:cs typeface="Aptos"/>
               </a:rPr>
-              <a:t>Главный результат</a:t>
+              <a:t>Программная реализация</a:t>
             </a:r>
           </a:p>
         </p:txBody>
@@ -2675,7 +4189,7 @@
                 <a:latin typeface="Aptos"/>
                 <a:cs typeface="Aptos"/>
               </a:rPr>
-              <a:t>Один код и один сценарий — разница только в наличии Redis-канала</a:t>
+              <a:t>Backend, frontend, тесты и проверочный клиент закрывают задачу как разработку ПО</a:t>
             </a:r>
           </a:p>
         </p:txBody>
@@ -2688,18 +4202,18 @@
         </p:nvSpPr>
         <p:spPr>
           <a:xfrm>
-            <a:off x="685800" y="1554480"/>
-            <a:ext cx="5349240" cy="3291840"/>
+            <a:off x="685800" y="1508760"/>
+            <a:ext cx="5349240" cy="1828800"/>
           </a:xfrm>
           <a:prstGeom prst="roundRect">
             <a:avLst/>
           </a:prstGeom>
           <a:solidFill>
-            <a:srgbClr val="FFF3D8"/>
+            <a:srgbClr val="FFFFFF"/>
           </a:solidFill>
           <a:ln w="12700">
             <a:solidFill>
-              <a:srgbClr val="C76F2E"/>
+              <a:srgbClr val="D7D2C7"/>
             </a:solidFill>
           </a:ln>
         </p:spPr>
@@ -2707,22 +4221,22 @@
           <a:bodyPr wrap="square" lIns="177800" tIns="177800" rIns="177800" bIns="177800"/>
           <a:lstStyle/>
           <a:p>
-            <a:pPr algn="ctr"/>
-            <a:r>
-              <a:rPr lang="ru-RU" sz="1800" b="1">
-                <a:solidFill>
-                  <a:srgbClr val="18212B"/>
-                </a:solidFill>
-                <a:latin typeface="Aptos"/>
-                <a:cs typeface="Aptos"/>
-              </a:rPr>
-              <a:t>Без backplane</a:t>
-            </a:r>
-          </a:p>
-          <a:p>
-            <a:pPr algn="ctr"/>
-            <a:r>
-              <a:rPr lang="ru-RU" sz="1800" b="1">
+            <a:pPr algn="l"/>
+            <a:r>
+              <a:rPr lang="ru-RU" sz="1400" b="0">
+                <a:solidFill>
+                  <a:srgbClr val="18212B"/>
+                </a:solidFill>
+                <a:latin typeface="Aptos"/>
+                <a:cs typeface="Aptos"/>
+              </a:rPr>
+              <a:t>Backend</a:t>
+            </a:r>
+          </a:p>
+          <a:p>
+            <a:pPr algn="l"/>
+            <a:r>
+              <a:rPr lang="ru-RU" sz="1400" b="0">
                 <a:solidFill>
                   <a:srgbClr val="18212B"/>
                 </a:solidFill>
@@ -2733,35 +4247,89 @@
             </a:r>
           </a:p>
           <a:p>
-            <a:pPr algn="ctr"/>
-            <a:r>
-              <a:rPr lang="ru-RU" sz="1800" b="1">
-                <a:solidFill>
-                  <a:srgbClr val="18212B"/>
-                </a:solidFill>
-                <a:latin typeface="Aptos"/>
-                <a:cs typeface="Aptos"/>
-              </a:rPr>
-              <a:t>ReceiveReportPatch</a:t>
-            </a:r>
-          </a:p>
-          <a:p>
-            <a:pPr algn="ctr"/>
-            <a:r>
-              <a:rPr lang="ru-RU" sz="1800" b="1">
-                <a:solidFill>
-                  <a:srgbClr val="18212B"/>
-                </a:solidFill>
-                <a:latin typeface="Aptos"/>
-                <a:cs typeface="Aptos"/>
-              </a:rPr>
-              <a:t>timed out · 10 000 мс</a:t>
-            </a:r>
-          </a:p>
-          <a:p>
-            <a:pPr algn="ctr"/>
-            <a:r>
-              <a:rPr lang="ru-RU" sz="1800" b="1">
+            <a:pPr algn="l"/>
+            <a:r>
+              <a:rPr lang="ru-RU" sz="1400" b="0">
+                <a:solidFill>
+                  <a:srgbClr val="18212B"/>
+                </a:solidFill>
+                <a:latin typeface="Aptos"/>
+                <a:cs typeface="Aptos"/>
+              </a:rPr>
+              <a:t>AddStackExchangeRedis через REDIS_CONNECTION_STRING</a:t>
+            </a:r>
+          </a:p>
+          <a:p>
+            <a:pPr algn="l"/>
+            <a:r>
+              <a:rPr lang="ru-RU" sz="1400" b="0">
+                <a:solidFill>
+                  <a:srgbClr val="18212B"/>
+                </a:solidFill>
+                <a:latin typeface="Aptos"/>
+                <a:cs typeface="Aptos"/>
+              </a:rPr>
+              <a:t>GetConnectionDiagnosticsAsync</a:t>
+            </a:r>
+          </a:p>
+          <a:p>
+            <a:pPr algn="l"/>
+            <a:r>
+              <a:rPr lang="ru-RU" sz="1400" b="0">
+                <a:solidFill>
+                  <a:srgbClr val="18212B"/>
+                </a:solidFill>
+                <a:latin typeface="Aptos"/>
+                <a:cs typeface="Aptos"/>
+              </a:rPr>
+              <a:t>SendToGroupAsync с eventId и GroupExcept</a:t>
+            </a:r>
+          </a:p>
+        </p:txBody>
+      </p:sp>
+      <p:sp>
+        <p:nvSpPr>
+          <p:cNvPr id="21" name="Shape 21"/>
+          <p:cNvSpPr txBox="1"/>
+          <p:nvPr/>
+        </p:nvSpPr>
+        <p:spPr>
+          <a:xfrm>
+            <a:off x="6172200" y="1508760"/>
+            <a:ext cx="5349240" cy="1828800"/>
+          </a:xfrm>
+          <a:prstGeom prst="roundRect">
+            <a:avLst/>
+          </a:prstGeom>
+          <a:solidFill>
+            <a:srgbClr val="FFFFFF"/>
+          </a:solidFill>
+          <a:ln w="12700">
+            <a:solidFill>
+              <a:srgbClr val="D7D2C7"/>
+            </a:solidFill>
+          </a:ln>
+        </p:spPr>
+        <p:txBody>
+          <a:bodyPr wrap="square" lIns="177800" tIns="177800" rIns="177800" bIns="177800"/>
+          <a:lstStyle/>
+          <a:p>
+            <a:pPr algn="l"/>
+            <a:r>
+              <a:rPr lang="ru-RU" sz="1400" b="0">
+                <a:solidFill>
+                  <a:srgbClr val="18212B"/>
+                </a:solidFill>
+                <a:latin typeface="Aptos"/>
+                <a:cs typeface="Aptos"/>
+              </a:rPr>
+              <a:t>Frontend</a:t>
+            </a:r>
+          </a:p>
+          <a:p>
+            <a:pPr algn="l"/>
+            <a:r>
+              <a:rPr lang="ru-RU" sz="1400" b="0">
                 <a:solidFill>
                   <a:srgbClr val="18212B"/>
                 </a:solidFill>
@@ -2772,30 +4340,56 @@
             </a:r>
           </a:p>
           <a:p>
-            <a:pPr algn="ctr"/>
-            <a:r>
-              <a:rPr lang="ru-RU" sz="1800" b="1">
-                <a:solidFill>
-                  <a:srgbClr val="18212B"/>
-                </a:solidFill>
-                <a:latin typeface="Aptos"/>
-                <a:cs typeface="Aptos"/>
-              </a:rPr>
-              <a:t>Событие, созданное на app-api-1, не дошло до клиента на app-api-2</a:t>
-            </a:r>
-          </a:p>
-        </p:txBody>
-      </p:sp>
-      <p:sp>
-        <p:nvSpPr>
-          <p:cNvPr id="21" name="Shape 21"/>
-          <p:cNvSpPr txBox="1"/>
-          <p:nvPr/>
-        </p:nvSpPr>
-        <p:spPr>
-          <a:xfrm>
-            <a:off x="6172200" y="1554480"/>
-            <a:ext cx="5349240" cy="3291840"/>
+            <a:pPr algn="l"/>
+            <a:r>
+              <a:rPr lang="ru-RU" sz="1400" b="0">
+                <a:solidFill>
+                  <a:srgbClr val="18212B"/>
+                </a:solidFill>
+                <a:latin typeface="Aptos"/>
+                <a:cs typeface="Aptos"/>
+              </a:rPr>
+              <a:t>WebSocket transport</a:t>
+            </a:r>
+          </a:p>
+          <a:p>
+            <a:pPr algn="l"/>
+            <a:r>
+              <a:rPr lang="ru-RU" sz="1400" b="0">
+                <a:solidFill>
+                  <a:srgbClr val="18212B"/>
+                </a:solidFill>
+                <a:latin typeface="Aptos"/>
+                <a:cs typeface="Aptos"/>
+              </a:rPr>
+              <a:t>automatic reconnect</a:t>
+            </a:r>
+          </a:p>
+          <a:p>
+            <a:pPr algn="l"/>
+            <a:r>
+              <a:rPr lang="ru-RU" sz="1400" b="0">
+                <a:solidFill>
+                  <a:srgbClr val="18212B"/>
+                </a:solidFill>
+                <a:latin typeface="Aptos"/>
+                <a:cs typeface="Aptos"/>
+              </a:rPr>
+              <a:t>повторный JoinReportGroupAsync после reconnect</a:t>
+            </a:r>
+          </a:p>
+        </p:txBody>
+      </p:sp>
+      <p:sp>
+        <p:nvSpPr>
+          <p:cNvPr id="22" name="Shape 22"/>
+          <p:cNvSpPr txBox="1"/>
+          <p:nvPr/>
+        </p:nvSpPr>
+        <p:spPr>
+          <a:xfrm>
+            <a:off x="685800" y="3703320"/>
+            <a:ext cx="5349240" cy="1920240"/>
           </a:xfrm>
           <a:prstGeom prst="roundRect">
             <a:avLst/>
@@ -2813,22 +4407,22 @@
           <a:bodyPr wrap="square" lIns="177800" tIns="177800" rIns="177800" bIns="177800"/>
           <a:lstStyle/>
           <a:p>
-            <a:pPr algn="ctr"/>
-            <a:r>
-              <a:rPr lang="ru-RU" sz="1800" b="1">
-                <a:solidFill>
-                  <a:srgbClr val="18212B"/>
-                </a:solidFill>
-                <a:latin typeface="Aptos"/>
-                <a:cs typeface="Aptos"/>
-              </a:rPr>
-              <a:t>С backplane</a:t>
-            </a:r>
-          </a:p>
-          <a:p>
-            <a:pPr algn="ctr"/>
-            <a:r>
-              <a:rPr lang="ru-RU" sz="1800" b="1">
+            <a:pPr algn="l"/>
+            <a:r>
+              <a:rPr lang="ru-RU" sz="1400" b="1">
+                <a:solidFill>
+                  <a:srgbClr val="18212B"/>
+                </a:solidFill>
+                <a:latin typeface="Aptos"/>
+                <a:cs typeface="Aptos"/>
+              </a:rPr>
+              <a:t>Тесты</a:t>
+            </a:r>
+          </a:p>
+          <a:p>
+            <a:pPr algn="l"/>
+            <a:r>
+              <a:rPr lang="ru-RU" sz="1400" b="1">
                 <a:solidFill>
                   <a:srgbClr val="18212B"/>
                 </a:solidFill>
@@ -2839,35 +4433,63 @@
             </a:r>
           </a:p>
           <a:p>
-            <a:pPr algn="ctr"/>
-            <a:r>
-              <a:rPr lang="ru-RU" sz="1800" b="1">
-                <a:solidFill>
-                  <a:srgbClr val="18212B"/>
-                </a:solidFill>
-                <a:latin typeface="Aptos"/>
-                <a:cs typeface="Aptos"/>
-              </a:rPr>
-              <a:t>ok: true · ReceiveReportPatch получен</a:t>
-            </a:r>
-          </a:p>
-          <a:p>
-            <a:pPr algn="ctr"/>
-            <a:r>
-              <a:rPr lang="ru-RU" sz="1800" b="1">
-                <a:solidFill>
-                  <a:srgbClr val="18212B"/>
-                </a:solidFill>
-                <a:latin typeface="Aptos"/>
-                <a:cs typeface="Aptos"/>
-              </a:rPr>
-              <a:t>deliveryLatencyMs ≈ 9,5 мс</a:t>
-            </a:r>
-          </a:p>
-          <a:p>
-            <a:pPr algn="ctr"/>
-            <a:r>
-              <a:rPr lang="ru-RU" sz="1800" b="1">
+            <a:pPr algn="l"/>
+            <a:r>
+              <a:rPr lang="ru-RU" sz="1400" b="1">
+                <a:solidFill>
+                  <a:srgbClr val="18212B"/>
+                </a:solidFill>
+                <a:latin typeface="Aptos"/>
+                <a:cs typeface="Aptos"/>
+              </a:rPr>
+              <a:t>reconnectJoinHandler проверяет отсутствие лишнего join, повторное вступление и использование актуального reportId.</a:t>
+            </a:r>
+          </a:p>
+        </p:txBody>
+      </p:sp>
+      <p:sp>
+        <p:nvSpPr>
+          <p:cNvPr id="23" name="Shape 23"/>
+          <p:cNvSpPr txBox="1"/>
+          <p:nvPr/>
+        </p:nvSpPr>
+        <p:spPr>
+          <a:xfrm>
+            <a:off x="6172200" y="3703320"/>
+            <a:ext cx="5349240" cy="1920240"/>
+          </a:xfrm>
+          <a:prstGeom prst="roundRect">
+            <a:avLst/>
+          </a:prstGeom>
+          <a:solidFill>
+            <a:srgbClr val="E8F3F1"/>
+          </a:solidFill>
+          <a:ln w="12700">
+            <a:solidFill>
+              <a:srgbClr val="0B6E69"/>
+            </a:solidFill>
+          </a:ln>
+        </p:spPr>
+        <p:txBody>
+          <a:bodyPr wrap="square" lIns="177800" tIns="177800" rIns="177800" bIns="177800"/>
+          <a:lstStyle/>
+          <a:p>
+            <a:pPr algn="l"/>
+            <a:r>
+              <a:rPr lang="ru-RU" sz="1400" b="1">
+                <a:solidFill>
+                  <a:srgbClr val="18212B"/>
+                </a:solidFill>
+                <a:latin typeface="Aptos"/>
+                <a:cs typeface="Aptos"/>
+              </a:rPr>
+              <a:t>Проверочный клиент</a:t>
+            </a:r>
+          </a:p>
+          <a:p>
+            <a:pPr algn="l"/>
+            <a:r>
+              <a:rPr lang="ru-RU" sz="1400" b="1">
                 <a:solidFill>
                   <a:srgbClr val="18212B"/>
                 </a:solidFill>
@@ -2878,53 +4500,29 @@
             </a:r>
           </a:p>
           <a:p>
-            <a:pPr algn="ctr"/>
-            <a:r>
-              <a:rPr lang="ru-RU" sz="1800" b="1">
-                <a:solidFill>
-                  <a:srgbClr val="18212B"/>
-                </a:solidFill>
-                <a:latin typeface="Aptos"/>
-                <a:cs typeface="Aptos"/>
-              </a:rPr>
-              <a:t>Клиент на app-api-2 получил событие с app-api-1</a:t>
-            </a:r>
-          </a:p>
-        </p:txBody>
-      </p:sp>
-      <p:sp>
-        <p:nvSpPr>
-          <p:cNvPr id="22" name="Shape 22"/>
-          <p:cNvSpPr txBox="1"/>
-          <p:nvPr/>
-        </p:nvSpPr>
-        <p:spPr>
-          <a:xfrm>
-            <a:off x="685800" y="5074920"/>
-            <a:ext cx="10835640" cy="777240"/>
-          </a:xfrm>
-          <a:prstGeom prst="roundRect">
-            <a:avLst/>
-          </a:prstGeom>
-          <a:noFill/>
-          <a:ln>
-            <a:noFill/>
-          </a:ln>
-        </p:spPr>
-        <p:txBody>
-          <a:bodyPr wrap="square" lIns="177800" tIns="177800" rIns="177800" bIns="177800"/>
-          <a:lstStyle/>
-          <a:p>
-            <a:pPr algn="ctr"/>
-            <a:r>
-              <a:rPr lang="ru-RU" sz="1300" b="0">
-                <a:solidFill>
-                  <a:srgbClr val="5E6A75"/>
-                </a:solidFill>
-                <a:latin typeface="Aptos"/>
-                <a:cs typeface="Aptos"/>
-              </a:rPr>
-              <a:t>Сопоставление двух режимов на одном стенде показывает причинную связь между включением межузлового канала SignalR и успешной доставкой события.</a:t>
+            <a:pPr algn="l"/>
+            <a:r>
+              <a:rPr lang="ru-RU" sz="1400" b="1">
+                <a:solidFill>
+                  <a:srgbClr val="18212B"/>
+                </a:solidFill>
+                <a:latin typeface="Aptos"/>
+                <a:cs typeface="Aptos"/>
+              </a:rPr>
+              <a:t>delivery · rejoin · failover · series</a:t>
+            </a:r>
+          </a:p>
+          <a:p>
+            <a:pPr algn="l"/>
+            <a:r>
+              <a:rPr lang="ru-RU" sz="1400" b="1">
+                <a:solidFill>
+                  <a:srgbClr val="18212B"/>
+                </a:solidFill>
+                <a:latin typeface="Aptos"/>
+                <a:cs typeface="Aptos"/>
+              </a:rPr>
+              <a:t>Фиксирует serverInstanceId, connectionId, событие и задержку.</a:t>
             </a:r>
           </a:p>
         </p:txBody>
@@ -3031,7 +4629,7 @@
                 <a:latin typeface="Aptos"/>
                 <a:cs typeface="Aptos"/>
               </a:rPr>
-              <a:t>Дополнительные проверки</a:t>
+              <a:t>Программа испытаний</a:t>
             </a:r>
           </a:p>
         </p:txBody>
@@ -3068,7 +4666,7 @@
                 <a:latin typeface="Aptos"/>
                 <a:cs typeface="Aptos"/>
               </a:rPr>
-              <a:t>Повторяемость, восстановление подписки и переключение после отказа узла</a:t>
+              <a:t>Два режима по одному коду · четыре сценария проверки</a:t>
             </a:r>
           </a:p>
         </p:txBody>
@@ -3081,8 +4679,8 @@
         </p:nvSpPr>
         <p:spPr>
           <a:xfrm>
-            <a:off x="685800" y="1600200"/>
-            <a:ext cx="3657600" cy="4114800"/>
+            <a:off x="685800" y="1554480"/>
+            <a:ext cx="5349240" cy="4160520"/>
           </a:xfrm>
           <a:prstGeom prst="roundRect">
             <a:avLst/>
@@ -3109,7 +4707,7 @@
                 <a:latin typeface="Aptos"/>
                 <a:cs typeface="Aptos"/>
               </a:rPr>
-              <a:t>Серия из 5 итераций</a:t>
+              <a:t>Два режима</a:t>
             </a:r>
           </a:p>
           <a:p>
@@ -3135,7 +4733,7 @@
                 <a:latin typeface="Aptos"/>
                 <a:cs typeface="Aptos"/>
               </a:rPr>
-              <a:t>Успешно: 5 из 5</a:t>
+              <a:t>• Без межузлового канала — воспроизведение проблемы</a:t>
             </a:r>
           </a:p>
           <a:p>
@@ -3161,7 +4759,7 @@
                 <a:latin typeface="Aptos"/>
                 <a:cs typeface="Aptos"/>
               </a:rPr>
-              <a:t>min 5,5 мс</a:t>
+              <a:t>• С межузловым каналом — проверка решения</a:t>
             </a:r>
           </a:p>
           <a:p>
@@ -3174,7 +4772,7 @@
                 <a:latin typeface="Aptos"/>
                 <a:cs typeface="Aptos"/>
               </a:rPr>
-              <a:t>avg 8,4 мс</a:t>
+              <a:t/>
             </a:r>
           </a:p>
           <a:p>
@@ -3187,46 +4785,7 @@
                 <a:latin typeface="Aptos"/>
                 <a:cs typeface="Aptos"/>
               </a:rPr>
-              <a:t>p50 9,1 мс</a:t>
-            </a:r>
-          </a:p>
-          <a:p>
-            <a:pPr algn="l"/>
-            <a:r>
-              <a:rPr lang="ru-RU" sz="1500" b="0">
-                <a:solidFill>
-                  <a:srgbClr val="18212B"/>
-                </a:solidFill>
-                <a:latin typeface="Aptos"/>
-                <a:cs typeface="Aptos"/>
-              </a:rPr>
-              <a:t>p95 11,6 мс</a:t>
-            </a:r>
-          </a:p>
-          <a:p>
-            <a:pPr algn="l"/>
-            <a:r>
-              <a:rPr lang="ru-RU" sz="1500" b="0">
-                <a:solidFill>
-                  <a:srgbClr val="18212B"/>
-                </a:solidFill>
-                <a:latin typeface="Aptos"/>
-                <a:cs typeface="Aptos"/>
-              </a:rPr>
-              <a:t/>
-            </a:r>
-          </a:p>
-          <a:p>
-            <a:pPr algn="l"/>
-            <a:r>
-              <a:rPr lang="ru-RU" sz="1500" b="0">
-                <a:solidFill>
-                  <a:srgbClr val="18212B"/>
-                </a:solidFill>
-                <a:latin typeface="Aptos"/>
-                <a:cs typeface="Aptos"/>
-              </a:rPr>
-              <a:t>Подтверждена повторяемость доставки.</a:t>
+              <a:t>Один и тот же код, один и тот же сценарий; отличие — наличие Redis backplane.</a:t>
             </a:r>
           </a:p>
         </p:txBody>
@@ -3239,8 +4798,8 @@
         </p:nvSpPr>
         <p:spPr>
           <a:xfrm>
-            <a:off x="4434840" y="1600200"/>
-            <a:ext cx="3657600" cy="4114800"/>
+            <a:off x="6172200" y="1554480"/>
+            <a:ext cx="5349240" cy="4160520"/>
           </a:xfrm>
           <a:prstGeom prst="roundRect">
             <a:avLst/>
@@ -3267,7 +4826,7 @@
                 <a:latin typeface="Aptos"/>
                 <a:cs typeface="Aptos"/>
               </a:rPr>
-              <a:t>Восстановление подписки</a:t>
+              <a:t>Четыре сценария</a:t>
             </a:r>
           </a:p>
           <a:p>
@@ -3293,7 +4852,7 @@
                 <a:latin typeface="Aptos"/>
                 <a:cs typeface="Aptos"/>
               </a:rPr>
-              <a:t>После разрыва клиент создаёт новое соединение и снова вступает в группу отчёта.</a:t>
+              <a:t>• Одиночная доставка между узлами</a:t>
             </a:r>
           </a:p>
           <a:p>
@@ -3319,7 +4878,7 @@
                 <a:latin typeface="Aptos"/>
                 <a:cs typeface="Aptos"/>
               </a:rPr>
-              <a:t>переподключение 12,9 мс</a:t>
+              <a:t>• Серия из 30 итераций</a:t>
             </a:r>
           </a:p>
           <a:p>
@@ -3332,7 +4891,7 @@
                 <a:latin typeface="Aptos"/>
                 <a:cs typeface="Aptos"/>
               </a:rPr>
-              <a:t>доставка 6,6 мс</a:t>
+              <a:t/>
             </a:r>
           </a:p>
           <a:p>
@@ -3345,6 +4904,19 @@
                 <a:latin typeface="Aptos"/>
                 <a:cs typeface="Aptos"/>
               </a:rPr>
+              <a:t>• Восстановление подписки после разрыва</a:t>
+            </a:r>
+          </a:p>
+          <a:p>
+            <a:pPr algn="l"/>
+            <a:r>
+              <a:rPr lang="ru-RU" sz="1500" b="0">
+                <a:solidFill>
+                  <a:srgbClr val="18212B"/>
+                </a:solidFill>
+                <a:latin typeface="Aptos"/>
+                <a:cs typeface="Aptos"/>
+              </a:rPr>
               <a:t/>
             </a:r>
           </a:p>
@@ -3358,139 +4930,7 @@
                 <a:latin typeface="Aptos"/>
                 <a:cs typeface="Aptos"/>
               </a:rPr>
-              <a:t>Подтверждена повторная подписка.</a:t>
-            </a:r>
-          </a:p>
-        </p:txBody>
-      </p:sp>
-      <p:sp>
-        <p:nvSpPr>
-          <p:cNvPr id="22" name="Shape 22"/>
-          <p:cNvSpPr txBox="1"/>
-          <p:nvPr/>
-        </p:nvSpPr>
-        <p:spPr>
-          <a:xfrm>
-            <a:off x="8183880" y="1600200"/>
-            <a:ext cx="3657600" cy="4114800"/>
-          </a:xfrm>
-          <a:prstGeom prst="roundRect">
-            <a:avLst/>
-          </a:prstGeom>
-          <a:solidFill>
-            <a:srgbClr val="FFFFFF"/>
-          </a:solidFill>
-          <a:ln w="12700">
-            <a:solidFill>
-              <a:srgbClr val="D7D2C7"/>
-            </a:solidFill>
-          </a:ln>
-        </p:spPr>
-        <p:txBody>
-          <a:bodyPr wrap="square" lIns="177800" tIns="177800" rIns="177800" bIns="177800"/>
-          <a:lstStyle/>
-          <a:p>
-            <a:pPr algn="l"/>
-            <a:r>
-              <a:rPr lang="ru-RU" sz="1500" b="0">
-                <a:solidFill>
-                  <a:srgbClr val="18212B"/>
-                </a:solidFill>
-                <a:latin typeface="Aptos"/>
-                <a:cs typeface="Aptos"/>
-              </a:rPr>
-              <a:t>Переключение после отказа узла</a:t>
-            </a:r>
-          </a:p>
-          <a:p>
-            <a:pPr algn="l"/>
-            <a:r>
-              <a:rPr lang="ru-RU" sz="1500" b="0">
-                <a:solidFill>
-                  <a:srgbClr val="18212B"/>
-                </a:solidFill>
-                <a:latin typeface="Aptos"/>
-                <a:cs typeface="Aptos"/>
-              </a:rPr>
-              <a:t/>
-            </a:r>
-          </a:p>
-          <a:p>
-            <a:pPr algn="l"/>
-            <a:r>
-              <a:rPr lang="ru-RU" sz="1500" b="0">
-                <a:solidFill>
-                  <a:srgbClr val="18212B"/>
-                </a:solidFill>
-                <a:latin typeface="Aptos"/>
-                <a:cs typeface="Aptos"/>
-              </a:rPr>
-              <a:t>Один backend остановлен; nginx переключает клиента на другой экземпляр.</a:t>
-            </a:r>
-          </a:p>
-          <a:p>
-            <a:pPr algn="l"/>
-            <a:r>
-              <a:rPr lang="ru-RU" sz="1500" b="0">
-                <a:solidFill>
-                  <a:srgbClr val="18212B"/>
-                </a:solidFill>
-                <a:latin typeface="Aptos"/>
-                <a:cs typeface="Aptos"/>
-              </a:rPr>
-              <a:t/>
-            </a:r>
-          </a:p>
-          <a:p>
-            <a:pPr algn="l"/>
-            <a:r>
-              <a:rPr lang="ru-RU" sz="1500" b="0">
-                <a:solidFill>
-                  <a:srgbClr val="18212B"/>
-                </a:solidFill>
-                <a:latin typeface="Aptos"/>
-                <a:cs typeface="Aptos"/>
-              </a:rPr>
-              <a:t>переподключение 240,3 мс</a:t>
-            </a:r>
-          </a:p>
-          <a:p>
-            <a:pPr algn="l"/>
-            <a:r>
-              <a:rPr lang="ru-RU" sz="1500" b="0">
-                <a:solidFill>
-                  <a:srgbClr val="18212B"/>
-                </a:solidFill>
-                <a:latin typeface="Aptos"/>
-                <a:cs typeface="Aptos"/>
-              </a:rPr>
-              <a:t>доставка 7,3 мс</a:t>
-            </a:r>
-          </a:p>
-          <a:p>
-            <a:pPr algn="l"/>
-            <a:r>
-              <a:rPr lang="ru-RU" sz="1500" b="0">
-                <a:solidFill>
-                  <a:srgbClr val="18212B"/>
-                </a:solidFill>
-                <a:latin typeface="Aptos"/>
-                <a:cs typeface="Aptos"/>
-              </a:rPr>
-              <a:t/>
-            </a:r>
-          </a:p>
-          <a:p>
-            <a:pPr algn="l"/>
-            <a:r>
-              <a:rPr lang="ru-RU" sz="1500" b="0">
-                <a:solidFill>
-                  <a:srgbClr val="18212B"/>
-                </a:solidFill>
-                <a:latin typeface="Aptos"/>
-                <a:cs typeface="Aptos"/>
-              </a:rPr>
-              <a:t>Подтверждено восстановление после отказа.</a:t>
+              <a:t>• Переключение на другой узел после отказа</a:t>
             </a:r>
           </a:p>
         </p:txBody>
@@ -3597,7 +5037,44 @@
                 <a:latin typeface="Aptos"/>
                 <a:cs typeface="Aptos"/>
               </a:rPr>
-              <a:t>Вывод</a:t>
+              <a:t>Главный результат</a:t>
+            </a:r>
+          </a:p>
+        </p:txBody>
+      </p:sp>
+      <p:sp>
+        <p:nvSpPr>
+          <p:cNvPr id="11" name="Shape 11"/>
+          <p:cNvSpPr txBox="1"/>
+          <p:nvPr/>
+        </p:nvSpPr>
+        <p:spPr>
+          <a:xfrm>
+            <a:off x="621792" y="987552"/>
+            <a:ext cx="9875520" cy="320040"/>
+          </a:xfrm>
+          <a:prstGeom prst="roundRect">
+            <a:avLst/>
+          </a:prstGeom>
+          <a:noFill/>
+          <a:ln>
+            <a:noFill/>
+          </a:ln>
+        </p:spPr>
+        <p:txBody>
+          <a:bodyPr wrap="square" lIns="177800" tIns="177800" rIns="177800" bIns="177800"/>
+          <a:lstStyle/>
+          <a:p>
+            <a:pPr algn="l"/>
+            <a:r>
+              <a:rPr lang="ru-RU" sz="1300" b="0">
+                <a:solidFill>
+                  <a:srgbClr val="5E6A75"/>
+                </a:solidFill>
+                <a:latin typeface="Aptos"/>
+                <a:cs typeface="Aptos"/>
+              </a:rPr>
+              <a:t>Один код и один сценарий — разница только в наличии Redis-канала</a:t>
             </a:r>
           </a:p>
         </p:txBody>
@@ -3611,7 +5088,113 @@
         <p:spPr>
           <a:xfrm>
             <a:off x="685800" y="1554480"/>
-            <a:ext cx="10835640" cy="1280160"/>
+            <a:ext cx="5349240" cy="3291840"/>
+          </a:xfrm>
+          <a:prstGeom prst="roundRect">
+            <a:avLst/>
+          </a:prstGeom>
+          <a:solidFill>
+            <a:srgbClr val="FFF3D8"/>
+          </a:solidFill>
+          <a:ln w="12700">
+            <a:solidFill>
+              <a:srgbClr val="C76F2E"/>
+            </a:solidFill>
+          </a:ln>
+        </p:spPr>
+        <p:txBody>
+          <a:bodyPr wrap="square" lIns="177800" tIns="177800" rIns="177800" bIns="177800"/>
+          <a:lstStyle/>
+          <a:p>
+            <a:pPr algn="ctr"/>
+            <a:r>
+              <a:rPr lang="ru-RU" sz="1800" b="1">
+                <a:solidFill>
+                  <a:srgbClr val="18212B"/>
+                </a:solidFill>
+                <a:latin typeface="Aptos"/>
+                <a:cs typeface="Aptos"/>
+              </a:rPr>
+              <a:t>Без backplane</a:t>
+            </a:r>
+          </a:p>
+          <a:p>
+            <a:pPr algn="ctr"/>
+            <a:r>
+              <a:rPr lang="ru-RU" sz="1800" b="1">
+                <a:solidFill>
+                  <a:srgbClr val="18212B"/>
+                </a:solidFill>
+                <a:latin typeface="Aptos"/>
+                <a:cs typeface="Aptos"/>
+              </a:rPr>
+              <a:t/>
+            </a:r>
+          </a:p>
+          <a:p>
+            <a:pPr algn="ctr"/>
+            <a:r>
+              <a:rPr lang="ru-RU" sz="1800" b="1">
+                <a:solidFill>
+                  <a:srgbClr val="18212B"/>
+                </a:solidFill>
+                <a:latin typeface="Aptos"/>
+                <a:cs typeface="Aptos"/>
+              </a:rPr>
+              <a:t>ReceiveReportPatch</a:t>
+            </a:r>
+          </a:p>
+          <a:p>
+            <a:pPr algn="ctr"/>
+            <a:r>
+              <a:rPr lang="ru-RU" sz="1800" b="1">
+                <a:solidFill>
+                  <a:srgbClr val="18212B"/>
+                </a:solidFill>
+                <a:latin typeface="Aptos"/>
+                <a:cs typeface="Aptos"/>
+              </a:rPr>
+              <a:t>timed out · 10 000 мс</a:t>
+            </a:r>
+          </a:p>
+          <a:p>
+            <a:pPr algn="ctr"/>
+            <a:r>
+              <a:rPr lang="ru-RU" sz="1800" b="1">
+                <a:solidFill>
+                  <a:srgbClr val="18212B"/>
+                </a:solidFill>
+                <a:latin typeface="Aptos"/>
+                <a:cs typeface="Aptos"/>
+              </a:rPr>
+              <a:t/>
+            </a:r>
+          </a:p>
+          <a:p>
+            <a:pPr algn="ctr"/>
+            <a:r>
+              <a:rPr lang="ru-RU" sz="1800" b="1">
+                <a:solidFill>
+                  <a:srgbClr val="18212B"/>
+                </a:solidFill>
+                <a:latin typeface="Aptos"/>
+                <a:cs typeface="Aptos"/>
+              </a:rPr>
+              <a:t>Событие, созданное на app-api-1, не дошло до клиента на app-api-2</a:t>
+            </a:r>
+          </a:p>
+        </p:txBody>
+      </p:sp>
+      <p:sp>
+        <p:nvSpPr>
+          <p:cNvPr id="21" name="Shape 21"/>
+          <p:cNvSpPr txBox="1"/>
+          <p:nvPr/>
+        </p:nvSpPr>
+        <p:spPr>
+          <a:xfrm>
+            <a:off x="6172200" y="1554480"/>
+            <a:ext cx="5349240" cy="3291840"/>
           </a:xfrm>
           <a:prstGeom prst="roundRect">
             <a:avLst/>
@@ -3631,55 +5214,79 @@
           <a:p>
             <a:pPr algn="ctr"/>
             <a:r>
-              <a:rPr lang="ru-RU" sz="1700" b="1">
-                <a:solidFill>
-                  <a:srgbClr val="18212B"/>
-                </a:solidFill>
-                <a:latin typeface="Aptos"/>
-                <a:cs typeface="Aptos"/>
-              </a:rPr>
-              <a:t>Ограничение single-node WebSocket-архитектуры устранено за счёт распределённого real-time контура; тезис работы подтверждён экспериментально.</a:t>
-            </a:r>
-          </a:p>
-        </p:txBody>
-      </p:sp>
-      <p:sp>
-        <p:nvSpPr>
-          <p:cNvPr id="21" name="Shape 21"/>
-          <p:cNvSpPr txBox="1"/>
-          <p:nvPr/>
-        </p:nvSpPr>
-        <p:spPr>
-          <a:xfrm>
-            <a:off x="685800" y="2971800"/>
-            <a:ext cx="10835640" cy="1417320"/>
-          </a:xfrm>
-          <a:prstGeom prst="roundRect">
-            <a:avLst/>
-          </a:prstGeom>
-          <a:solidFill>
-            <a:srgbClr val="FFF3D8"/>
-          </a:solidFill>
-          <a:ln w="12700">
-            <a:solidFill>
-              <a:srgbClr val="C76F2E"/>
-            </a:solidFill>
-          </a:ln>
-        </p:spPr>
-        <p:txBody>
-          <a:bodyPr wrap="square" lIns="177800" tIns="177800" rIns="177800" bIns="177800"/>
-          <a:lstStyle/>
+              <a:rPr lang="ru-RU" sz="1800" b="1">
+                <a:solidFill>
+                  <a:srgbClr val="18212B"/>
+                </a:solidFill>
+                <a:latin typeface="Aptos"/>
+                <a:cs typeface="Aptos"/>
+              </a:rPr>
+              <a:t>С backplane</a:t>
+            </a:r>
+          </a:p>
           <a:p>
             <a:pPr algn="ctr"/>
             <a:r>
-              <a:rPr lang="ru-RU" sz="1500" b="1">
-                <a:solidFill>
-                  <a:srgbClr val="18212B"/>
-                </a:solidFill>
-                <a:latin typeface="Aptos"/>
-                <a:cs typeface="Aptos"/>
-              </a:rPr>
-              <a:t>Дополнительный эффект — повышение отказоустойчивости: при отказе одного узла клиенты продолжают получать события через другой экземпляр backend, тогда как single-node архитектура такой возможности не предоставляет.</a:t>
+              <a:rPr lang="ru-RU" sz="1800" b="1">
+                <a:solidFill>
+                  <a:srgbClr val="18212B"/>
+                </a:solidFill>
+                <a:latin typeface="Aptos"/>
+                <a:cs typeface="Aptos"/>
+              </a:rPr>
+              <a:t/>
+            </a:r>
+          </a:p>
+          <a:p>
+            <a:pPr algn="ctr"/>
+            <a:r>
+              <a:rPr lang="ru-RU" sz="1800" b="1">
+                <a:solidFill>
+                  <a:srgbClr val="18212B"/>
+                </a:solidFill>
+                <a:latin typeface="Aptos"/>
+                <a:cs typeface="Aptos"/>
+              </a:rPr>
+              <a:t>ok: true · ReceiveReportPatch получен</a:t>
+            </a:r>
+          </a:p>
+          <a:p>
+            <a:pPr algn="ctr"/>
+            <a:r>
+              <a:rPr lang="ru-RU" sz="1800" b="1">
+                <a:solidFill>
+                  <a:srgbClr val="18212B"/>
+                </a:solidFill>
+                <a:latin typeface="Aptos"/>
+                <a:cs typeface="Aptos"/>
+              </a:rPr>
+              <a:t>deliveryLatencyMs ≈ 9,5 мс</a:t>
+            </a:r>
+          </a:p>
+          <a:p>
+            <a:pPr algn="ctr"/>
+            <a:r>
+              <a:rPr lang="ru-RU" sz="1800" b="1">
+                <a:solidFill>
+                  <a:srgbClr val="18212B"/>
+                </a:solidFill>
+                <a:latin typeface="Aptos"/>
+                <a:cs typeface="Aptos"/>
+              </a:rPr>
+              <a:t/>
+            </a:r>
+          </a:p>
+          <a:p>
+            <a:pPr algn="ctr"/>
+            <a:r>
+              <a:rPr lang="ru-RU" sz="1800" b="1">
+                <a:solidFill>
+                  <a:srgbClr val="18212B"/>
+                </a:solidFill>
+                <a:latin typeface="Aptos"/>
+                <a:cs typeface="Aptos"/>
+              </a:rPr>
+              <a:t>Клиент на app-api-2 получил событие с app-api-1</a:t>
             </a:r>
           </a:p>
         </p:txBody>
@@ -3692,195 +5299,31 @@
         </p:nvSpPr>
         <p:spPr>
           <a:xfrm>
-            <a:off x="685800" y="4572000"/>
-            <a:ext cx="3520440" cy="1691640"/>
-          </a:xfrm>
-          <a:prstGeom prst="roundRect">
-            <a:avLst/>
-          </a:prstGeom>
-          <a:solidFill>
-            <a:srgbClr val="FFFFFF"/>
-          </a:solidFill>
-          <a:ln w="12700">
-            <a:solidFill>
-              <a:srgbClr val="D7D2C7"/>
-            </a:solidFill>
-          </a:ln>
-        </p:spPr>
-        <p:txBody>
-          <a:bodyPr wrap="square" lIns="177800" tIns="177800" rIns="177800" bIns="177800"/>
-          <a:lstStyle/>
-          <a:p>
-            <a:pPr algn="l"/>
-            <a:r>
-              <a:rPr lang="ru-RU" sz="1300" b="1">
-                <a:solidFill>
-                  <a:srgbClr val="18212B"/>
-                </a:solidFill>
-                <a:latin typeface="Aptos"/>
-                <a:cs typeface="Aptos"/>
-              </a:rPr>
-              <a:t>Проблема</a:t>
-            </a:r>
-          </a:p>
-          <a:p>
-            <a:pPr algn="l"/>
-            <a:r>
-              <a:rPr lang="ru-RU" sz="1300" b="1">
-                <a:solidFill>
-                  <a:srgbClr val="18212B"/>
-                </a:solidFill>
-                <a:latin typeface="Aptos"/>
-                <a:cs typeface="Aptos"/>
-              </a:rPr>
-              <a:t/>
-            </a:r>
-          </a:p>
-          <a:p>
-            <a:pPr algn="l"/>
-            <a:r>
-              <a:rPr lang="ru-RU" sz="1300" b="1">
-                <a:solidFill>
-                  <a:srgbClr val="18212B"/>
-                </a:solidFill>
-                <a:latin typeface="Aptos"/>
-                <a:cs typeface="Aptos"/>
-              </a:rPr>
-              <a:t>Single-node SignalR: события не пересекают границу узла.</a:t>
-            </a:r>
-          </a:p>
-        </p:txBody>
-      </p:sp>
-      <p:sp>
-        <p:nvSpPr>
-          <p:cNvPr id="23" name="Shape 23"/>
-          <p:cNvSpPr txBox="1"/>
-          <p:nvPr/>
-        </p:nvSpPr>
-        <p:spPr>
-          <a:xfrm>
-            <a:off x="4343400" y="4572000"/>
-            <a:ext cx="3520440" cy="1691640"/>
-          </a:xfrm>
-          <a:prstGeom prst="roundRect">
-            <a:avLst/>
-          </a:prstGeom>
-          <a:solidFill>
-            <a:srgbClr val="FFFFFF"/>
-          </a:solidFill>
-          <a:ln w="12700">
-            <a:solidFill>
-              <a:srgbClr val="D7D2C7"/>
-            </a:solidFill>
-          </a:ln>
-        </p:spPr>
-        <p:txBody>
-          <a:bodyPr wrap="square" lIns="177800" tIns="177800" rIns="177800" bIns="177800"/>
-          <a:lstStyle/>
-          <a:p>
-            <a:pPr algn="l"/>
-            <a:r>
-              <a:rPr lang="ru-RU" sz="1300" b="1">
-                <a:solidFill>
-                  <a:srgbClr val="18212B"/>
-                </a:solidFill>
-                <a:latin typeface="Aptos"/>
-                <a:cs typeface="Aptos"/>
-              </a:rPr>
-              <a:t>Решение</a:t>
-            </a:r>
-          </a:p>
-          <a:p>
-            <a:pPr algn="l"/>
-            <a:r>
-              <a:rPr lang="ru-RU" sz="1300" b="1">
-                <a:solidFill>
-                  <a:srgbClr val="18212B"/>
-                </a:solidFill>
-                <a:latin typeface="Aptos"/>
-                <a:cs typeface="Aptos"/>
-              </a:rPr>
-              <a:t/>
-            </a:r>
-          </a:p>
-          <a:p>
-            <a:pPr algn="l"/>
-            <a:r>
-              <a:rPr lang="ru-RU" sz="1300" b="1">
-                <a:solidFill>
-                  <a:srgbClr val="18212B"/>
-                </a:solidFill>
-                <a:latin typeface="Aptos"/>
-                <a:cs typeface="Aptos"/>
-              </a:rPr>
-              <a:t>Несколько экземпляров backend за nginx + Redis backplane; общий код, переключение режима — переменной окружения.</a:t>
-            </a:r>
-          </a:p>
-        </p:txBody>
-      </p:sp>
-      <p:sp>
-        <p:nvSpPr>
-          <p:cNvPr id="24" name="Shape 24"/>
-          <p:cNvSpPr txBox="1"/>
-          <p:nvPr/>
-        </p:nvSpPr>
-        <p:spPr>
-          <a:xfrm>
-            <a:off x="8001000" y="4572000"/>
-            <a:ext cx="3520440" cy="1691640"/>
-          </a:xfrm>
-          <a:prstGeom prst="roundRect">
-            <a:avLst/>
-          </a:prstGeom>
-          <a:solidFill>
-            <a:srgbClr val="FFFFFF"/>
-          </a:solidFill>
-          <a:ln w="12700">
-            <a:solidFill>
-              <a:srgbClr val="D7D2C7"/>
-            </a:solidFill>
-          </a:ln>
-        </p:spPr>
-        <p:txBody>
-          <a:bodyPr wrap="square" lIns="177800" tIns="177800" rIns="177800" bIns="177800"/>
-          <a:lstStyle/>
-          <a:p>
-            <a:pPr algn="l"/>
-            <a:r>
-              <a:rPr lang="ru-RU" sz="1300" b="1">
-                <a:solidFill>
-                  <a:srgbClr val="18212B"/>
-                </a:solidFill>
-                <a:latin typeface="Aptos"/>
-                <a:cs typeface="Aptos"/>
-              </a:rPr>
-              <a:t>Доказательство</a:t>
-            </a:r>
-          </a:p>
-          <a:p>
-            <a:pPr algn="l"/>
-            <a:r>
-              <a:rPr lang="ru-RU" sz="1300" b="1">
-                <a:solidFill>
-                  <a:srgbClr val="18212B"/>
-                </a:solidFill>
-                <a:latin typeface="Aptos"/>
-                <a:cs typeface="Aptos"/>
-              </a:rPr>
-              <a:t/>
-            </a:r>
-          </a:p>
-          <a:p>
-            <a:pPr algn="l"/>
-            <a:r>
-              <a:rPr lang="ru-RU" sz="1300" b="1">
-                <a:solidFill>
-                  <a:srgbClr val="18212B"/>
-                </a:solidFill>
-                <a:latin typeface="Aptos"/>
-                <a:cs typeface="Aptos"/>
-              </a:rPr>
-              <a:t>Доставка (без / с) · серия · восстановление подписки · переключение после отказа.</a:t>
+            <a:off x="685800" y="5074920"/>
+            <a:ext cx="10835640" cy="777240"/>
+          </a:xfrm>
+          <a:prstGeom prst="roundRect">
+            <a:avLst/>
+          </a:prstGeom>
+          <a:noFill/>
+          <a:ln>
+            <a:noFill/>
+          </a:ln>
+        </p:spPr>
+        <p:txBody>
+          <a:bodyPr wrap="square" lIns="177800" tIns="177800" rIns="177800" bIns="177800"/>
+          <a:lstStyle/>
+          <a:p>
+            <a:pPr algn="ctr"/>
+            <a:r>
+              <a:rPr lang="ru-RU" sz="1300" b="0">
+                <a:solidFill>
+                  <a:srgbClr val="5E6A75"/>
+                </a:solidFill>
+                <a:latin typeface="Aptos"/>
+                <a:cs typeface="Aptos"/>
+              </a:rPr>
+              <a:t>Сопоставление двух режимов на одном стенде показывает причинную связь между включением межузлового канала SignalR и успешной доставкой события.</a:t>
             </a:r>
           </a:p>
         </p:txBody>

--- a/build/pptx/vkr-defense-draft.pptx
+++ b/build/pptx/vkr-defense-draft.pptx
@@ -17,6 +17,8 @@
     <p:sldId id="265" r:id="rId11"/>
     <p:sldId id="266" r:id="rId12"/>
     <p:sldId id="267" r:id="rId13"/>
+    <p:sldId id="268" r:id="rId14"/>
+    <p:sldId id="269" r:id="rId15"/>
   </p:sldIdLst>
   <p:sldSz cx="12192000" cy="6858000" type="wide"/>
   <p:notesSz cx="6858000" cy="9144000"/>
@@ -388,7 +390,7 @@
                 <a:latin typeface="Aptos"/>
                 <a:cs typeface="Aptos"/>
               </a:rPr>
-              <a:t>Дополнительные проверки</a:t>
+              <a:t>Программа испытаний</a:t>
             </a:r>
           </a:p>
         </p:txBody>
@@ -425,7 +427,7 @@
                 <a:latin typeface="Aptos"/>
                 <a:cs typeface="Aptos"/>
               </a:rPr>
-              <a:t>Повторяемость, восстановление подписки и переключение после отказа узла</a:t>
+              <a:t>Два режима по одному коду · четыре сценария проверки</a:t>
             </a:r>
           </a:p>
         </p:txBody>
@@ -438,8 +440,8 @@
         </p:nvSpPr>
         <p:spPr>
           <a:xfrm>
-            <a:off x="685800" y="1600200"/>
-            <a:ext cx="3657600" cy="4114800"/>
+            <a:off x="685800" y="1554480"/>
+            <a:ext cx="5349240" cy="4160520"/>
           </a:xfrm>
           <a:prstGeom prst="roundRect">
             <a:avLst/>
@@ -466,7 +468,7 @@
                 <a:latin typeface="Aptos"/>
                 <a:cs typeface="Aptos"/>
               </a:rPr>
-              <a:t>Серия из 30 итераций</a:t>
+              <a:t>Два режима</a:t>
             </a:r>
           </a:p>
           <a:p>
@@ -492,7 +494,7 @@
                 <a:latin typeface="Aptos"/>
                 <a:cs typeface="Aptos"/>
               </a:rPr>
-              <a:t>Успешно: 30 из 30</a:t>
+              <a:t>• Без межузлового канала — воспроизведение проблемы</a:t>
             </a:r>
           </a:p>
           <a:p>
@@ -518,7 +520,7 @@
                 <a:latin typeface="Aptos"/>
                 <a:cs typeface="Aptos"/>
               </a:rPr>
-              <a:t>min 3,8 мс</a:t>
+              <a:t>• С межузловым каналом — проверка решения</a:t>
             </a:r>
           </a:p>
           <a:p>
@@ -531,7 +533,7 @@
                 <a:latin typeface="Aptos"/>
                 <a:cs typeface="Aptos"/>
               </a:rPr>
-              <a:t>avg 7,2 мс</a:t>
+              <a:t/>
             </a:r>
           </a:p>
           <a:p>
@@ -544,46 +546,7 @@
                 <a:latin typeface="Aptos"/>
                 <a:cs typeface="Aptos"/>
               </a:rPr>
-              <a:t>p50 6,1 мс</a:t>
-            </a:r>
-          </a:p>
-          <a:p>
-            <a:pPr algn="l"/>
-            <a:r>
-              <a:rPr lang="ru-RU" sz="1500" b="0">
-                <a:solidFill>
-                  <a:srgbClr val="18212B"/>
-                </a:solidFill>
-                <a:latin typeface="Aptos"/>
-                <a:cs typeface="Aptos"/>
-              </a:rPr>
-              <a:t>p95 13,8 мс</a:t>
-            </a:r>
-          </a:p>
-          <a:p>
-            <a:pPr algn="l"/>
-            <a:r>
-              <a:rPr lang="ru-RU" sz="1500" b="0">
-                <a:solidFill>
-                  <a:srgbClr val="18212B"/>
-                </a:solidFill>
-                <a:latin typeface="Aptos"/>
-                <a:cs typeface="Aptos"/>
-              </a:rPr>
-              <a:t/>
-            </a:r>
-          </a:p>
-          <a:p>
-            <a:pPr algn="l"/>
-            <a:r>
-              <a:rPr lang="ru-RU" sz="1500" b="0">
-                <a:solidFill>
-                  <a:srgbClr val="18212B"/>
-                </a:solidFill>
-                <a:latin typeface="Aptos"/>
-                <a:cs typeface="Aptos"/>
-              </a:rPr>
-              <a:t>Подтверждена повторяемость доставки.</a:t>
+              <a:t>Один и тот же код, один и тот же сценарий; отличие — наличие Redis backplane.</a:t>
             </a:r>
           </a:p>
         </p:txBody>
@@ -596,8 +559,8 @@
         </p:nvSpPr>
         <p:spPr>
           <a:xfrm>
-            <a:off x="4434840" y="1600200"/>
-            <a:ext cx="3657600" cy="4114800"/>
+            <a:off x="6172200" y="1554480"/>
+            <a:ext cx="5349240" cy="4160520"/>
           </a:xfrm>
           <a:prstGeom prst="roundRect">
             <a:avLst/>
@@ -624,7 +587,7 @@
                 <a:latin typeface="Aptos"/>
                 <a:cs typeface="Aptos"/>
               </a:rPr>
-              <a:t>Восстановление подписки</a:t>
+              <a:t>Четыре сценария</a:t>
             </a:r>
           </a:p>
           <a:p>
@@ -650,7 +613,7 @@
                 <a:latin typeface="Aptos"/>
                 <a:cs typeface="Aptos"/>
               </a:rPr>
-              <a:t>После разрыва клиент создаёт новое соединение и снова вступает в группу отчёта.</a:t>
+              <a:t>• Одиночная доставка между узлами</a:t>
             </a:r>
           </a:p>
           <a:p>
@@ -676,7 +639,7 @@
                 <a:latin typeface="Aptos"/>
                 <a:cs typeface="Aptos"/>
               </a:rPr>
-              <a:t>переподключение 6,5 мс</a:t>
+              <a:t>• Серия из 30 итераций</a:t>
             </a:r>
           </a:p>
           <a:p>
@@ -689,7 +652,7 @@
                 <a:latin typeface="Aptos"/>
                 <a:cs typeface="Aptos"/>
               </a:rPr>
-              <a:t>доставка 15,2 мс</a:t>
+              <a:t/>
             </a:r>
           </a:p>
           <a:p>
@@ -702,6 +665,19 @@
                 <a:latin typeface="Aptos"/>
                 <a:cs typeface="Aptos"/>
               </a:rPr>
+              <a:t>• Восстановление подписки после разрыва</a:t>
+            </a:r>
+          </a:p>
+          <a:p>
+            <a:pPr algn="l"/>
+            <a:r>
+              <a:rPr lang="ru-RU" sz="1500" b="0">
+                <a:solidFill>
+                  <a:srgbClr val="18212B"/>
+                </a:solidFill>
+                <a:latin typeface="Aptos"/>
+                <a:cs typeface="Aptos"/>
+              </a:rPr>
               <a:t/>
             </a:r>
           </a:p>
@@ -715,139 +691,7 @@
                 <a:latin typeface="Aptos"/>
                 <a:cs typeface="Aptos"/>
               </a:rPr>
-              <a:t>Подтверждена повторная подписка.</a:t>
-            </a:r>
-          </a:p>
-        </p:txBody>
-      </p:sp>
-      <p:sp>
-        <p:nvSpPr>
-          <p:cNvPr id="22" name="Shape 22"/>
-          <p:cNvSpPr txBox="1"/>
-          <p:nvPr/>
-        </p:nvSpPr>
-        <p:spPr>
-          <a:xfrm>
-            <a:off x="8183880" y="1600200"/>
-            <a:ext cx="3657600" cy="4114800"/>
-          </a:xfrm>
-          <a:prstGeom prst="roundRect">
-            <a:avLst/>
-          </a:prstGeom>
-          <a:solidFill>
-            <a:srgbClr val="FFFFFF"/>
-          </a:solidFill>
-          <a:ln w="12700">
-            <a:solidFill>
-              <a:srgbClr val="D7D2C7"/>
-            </a:solidFill>
-          </a:ln>
-        </p:spPr>
-        <p:txBody>
-          <a:bodyPr wrap="square" lIns="177800" tIns="177800" rIns="177800" bIns="177800"/>
-          <a:lstStyle/>
-          <a:p>
-            <a:pPr algn="l"/>
-            <a:r>
-              <a:rPr lang="ru-RU" sz="1500" b="0">
-                <a:solidFill>
-                  <a:srgbClr val="18212B"/>
-                </a:solidFill>
-                <a:latin typeface="Aptos"/>
-                <a:cs typeface="Aptos"/>
-              </a:rPr>
-              <a:t>Переключение после отказа узла</a:t>
-            </a:r>
-          </a:p>
-          <a:p>
-            <a:pPr algn="l"/>
-            <a:r>
-              <a:rPr lang="ru-RU" sz="1500" b="0">
-                <a:solidFill>
-                  <a:srgbClr val="18212B"/>
-                </a:solidFill>
-                <a:latin typeface="Aptos"/>
-                <a:cs typeface="Aptos"/>
-              </a:rPr>
-              <a:t/>
-            </a:r>
-          </a:p>
-          <a:p>
-            <a:pPr algn="l"/>
-            <a:r>
-              <a:rPr lang="ru-RU" sz="1500" b="0">
-                <a:solidFill>
-                  <a:srgbClr val="18212B"/>
-                </a:solidFill>
-                <a:latin typeface="Aptos"/>
-                <a:cs typeface="Aptos"/>
-              </a:rPr>
-              <a:t>Один backend остановлен; nginx переключает клиента на другой экземпляр.</a:t>
-            </a:r>
-          </a:p>
-          <a:p>
-            <a:pPr algn="l"/>
-            <a:r>
-              <a:rPr lang="ru-RU" sz="1500" b="0">
-                <a:solidFill>
-                  <a:srgbClr val="18212B"/>
-                </a:solidFill>
-                <a:latin typeface="Aptos"/>
-                <a:cs typeface="Aptos"/>
-              </a:rPr>
-              <a:t/>
-            </a:r>
-          </a:p>
-          <a:p>
-            <a:pPr algn="l"/>
-            <a:r>
-              <a:rPr lang="ru-RU" sz="1500" b="0">
-                <a:solidFill>
-                  <a:srgbClr val="18212B"/>
-                </a:solidFill>
-                <a:latin typeface="Aptos"/>
-                <a:cs typeface="Aptos"/>
-              </a:rPr>
-              <a:t>переподключение 352,0 мс</a:t>
-            </a:r>
-          </a:p>
-          <a:p>
-            <a:pPr algn="l"/>
-            <a:r>
-              <a:rPr lang="ru-RU" sz="1500" b="0">
-                <a:solidFill>
-                  <a:srgbClr val="18212B"/>
-                </a:solidFill>
-                <a:latin typeface="Aptos"/>
-                <a:cs typeface="Aptos"/>
-              </a:rPr>
-              <a:t>доставка 5,4 мс</a:t>
-            </a:r>
-          </a:p>
-          <a:p>
-            <a:pPr algn="l"/>
-            <a:r>
-              <a:rPr lang="ru-RU" sz="1500" b="0">
-                <a:solidFill>
-                  <a:srgbClr val="18212B"/>
-                </a:solidFill>
-                <a:latin typeface="Aptos"/>
-                <a:cs typeface="Aptos"/>
-              </a:rPr>
-              <a:t/>
-            </a:r>
-          </a:p>
-          <a:p>
-            <a:pPr algn="l"/>
-            <a:r>
-              <a:rPr lang="ru-RU" sz="1500" b="0">
-                <a:solidFill>
-                  <a:srgbClr val="18212B"/>
-                </a:solidFill>
-                <a:latin typeface="Aptos"/>
-                <a:cs typeface="Aptos"/>
-              </a:rPr>
-              <a:t>Подтверждено восстановление после отказа.</a:t>
+              <a:t>• Переключение на другой узел после отказа</a:t>
             </a:r>
           </a:p>
         </p:txBody>
@@ -954,7 +798,7 @@
                 <a:latin typeface="Aptos"/>
                 <a:cs typeface="Aptos"/>
               </a:rPr>
-              <a:t>Ограничения</a:t>
+              <a:t>Главный результат</a:t>
             </a:r>
           </a:p>
         </p:txBody>
@@ -991,7 +835,7 @@
                 <a:latin typeface="Aptos"/>
                 <a:cs typeface="Aptos"/>
               </a:rPr>
-              <a:t>Решение предназначено для интерфейсной синхронизации, а не для жёсткого real-time</a:t>
+              <a:t>Один код и один сценарий — разница только в наличии Redis-канала</a:t>
             </a:r>
           </a:p>
         </p:txBody>
@@ -1004,194 +848,8 @@
         </p:nvSpPr>
         <p:spPr>
           <a:xfrm>
-            <a:off x="685800" y="1508760"/>
-            <a:ext cx="3520440" cy="4343400"/>
-          </a:xfrm>
-          <a:prstGeom prst="roundRect">
-            <a:avLst/>
-          </a:prstGeom>
-          <a:solidFill>
-            <a:srgbClr val="FFFFFF"/>
-          </a:solidFill>
-          <a:ln w="12700">
-            <a:solidFill>
-              <a:srgbClr val="D7D2C7"/>
-            </a:solidFill>
-          </a:ln>
-        </p:spPr>
-        <p:txBody>
-          <a:bodyPr wrap="square" lIns="177800" tIns="177800" rIns="177800" bIns="177800"/>
-          <a:lstStyle/>
-          <a:p>
-            <a:pPr algn="l"/>
-            <a:r>
-              <a:rPr lang="ru-RU" sz="1400" b="0">
-                <a:solidFill>
-                  <a:srgbClr val="18212B"/>
-                </a:solidFill>
-                <a:latin typeface="Aptos"/>
-                <a:cs typeface="Aptos"/>
-              </a:rPr>
-              <a:t>Ненулевая задержка</a:t>
-            </a:r>
-          </a:p>
-          <a:p>
-            <a:pPr algn="l"/>
-            <a:r>
-              <a:rPr lang="ru-RU" sz="1400" b="0">
-                <a:solidFill>
-                  <a:srgbClr val="18212B"/>
-                </a:solidFill>
-                <a:latin typeface="Aptos"/>
-                <a:cs typeface="Aptos"/>
-              </a:rPr>
-              <a:t/>
-            </a:r>
-          </a:p>
-          <a:p>
-            <a:pPr algn="l"/>
-            <a:r>
-              <a:rPr lang="ru-RU" sz="1400" b="0">
-                <a:solidFill>
-                  <a:srgbClr val="18212B"/>
-                </a:solidFill>
-                <a:latin typeface="Aptos"/>
-                <a:cs typeface="Aptos"/>
-              </a:rPr>
-              <a:t>Событие проходит через app-api, Redis backplane и другой app-api.</a:t>
-            </a:r>
-          </a:p>
-          <a:p>
-            <a:pPr algn="l"/>
-            <a:r>
-              <a:rPr lang="ru-RU" sz="1400" b="0">
-                <a:solidFill>
-                  <a:srgbClr val="18212B"/>
-                </a:solidFill>
-                <a:latin typeface="Aptos"/>
-                <a:cs typeface="Aptos"/>
-              </a:rPr>
-              <a:t/>
-            </a:r>
-          </a:p>
-          <a:p>
-            <a:pPr algn="l"/>
-            <a:r>
-              <a:rPr lang="ru-RU" sz="1400" b="0">
-                <a:solidFill>
-                  <a:srgbClr val="18212B"/>
-                </a:solidFill>
-                <a:latin typeface="Aptos"/>
-                <a:cs typeface="Aptos"/>
-              </a:rPr>
-              <a:t>В локальной серии: avg 7,2 мс, p95 13,8 мс.</a:t>
-            </a:r>
-          </a:p>
-        </p:txBody>
-      </p:sp>
-      <p:sp>
-        <p:nvSpPr>
-          <p:cNvPr id="21" name="Shape 21"/>
-          <p:cNvSpPr txBox="1"/>
-          <p:nvPr/>
-        </p:nvSpPr>
-        <p:spPr>
-          <a:xfrm>
-            <a:off x="4389120" y="1508760"/>
-            <a:ext cx="3520440" cy="4343400"/>
-          </a:xfrm>
-          <a:prstGeom prst="roundRect">
-            <a:avLst/>
-          </a:prstGeom>
-          <a:solidFill>
-            <a:srgbClr val="FFFFFF"/>
-          </a:solidFill>
-          <a:ln w="12700">
-            <a:solidFill>
-              <a:srgbClr val="D7D2C7"/>
-            </a:solidFill>
-          </a:ln>
-        </p:spPr>
-        <p:txBody>
-          <a:bodyPr wrap="square" lIns="177800" tIns="177800" rIns="177800" bIns="177800"/>
-          <a:lstStyle/>
-          <a:p>
-            <a:pPr algn="l"/>
-            <a:r>
-              <a:rPr lang="ru-RU" sz="1400" b="0">
-                <a:solidFill>
-                  <a:srgbClr val="18212B"/>
-                </a:solidFill>
-                <a:latin typeface="Aptos"/>
-                <a:cs typeface="Aptos"/>
-              </a:rPr>
-              <a:t>Transient UI-events</a:t>
-            </a:r>
-          </a:p>
-          <a:p>
-            <a:pPr algn="l"/>
-            <a:r>
-              <a:rPr lang="ru-RU" sz="1400" b="0">
-                <a:solidFill>
-                  <a:srgbClr val="18212B"/>
-                </a:solidFill>
-                <a:latin typeface="Aptos"/>
-                <a:cs typeface="Aptos"/>
-              </a:rPr>
-              <a:t/>
-            </a:r>
-          </a:p>
-          <a:p>
-            <a:pPr algn="l"/>
-            <a:r>
-              <a:rPr lang="ru-RU" sz="1400" b="0">
-                <a:solidFill>
-                  <a:srgbClr val="18212B"/>
-                </a:solidFill>
-                <a:latin typeface="Aptos"/>
-                <a:cs typeface="Aptos"/>
-              </a:rPr>
-              <a:t>Источник истины — PostgreSQL.</a:t>
-            </a:r>
-          </a:p>
-          <a:p>
-            <a:pPr algn="l"/>
-            <a:r>
-              <a:rPr lang="ru-RU" sz="1400" b="0">
-                <a:solidFill>
-                  <a:srgbClr val="18212B"/>
-                </a:solidFill>
-                <a:latin typeface="Aptos"/>
-                <a:cs typeface="Aptos"/>
-              </a:rPr>
-              <a:t/>
-            </a:r>
-          </a:p>
-          <a:p>
-            <a:pPr algn="l"/>
-            <a:r>
-              <a:rPr lang="ru-RU" sz="1400" b="0">
-                <a:solidFill>
-                  <a:srgbClr val="18212B"/>
-                </a:solidFill>
-                <a:latin typeface="Aptos"/>
-                <a:cs typeface="Aptos"/>
-              </a:rPr>
-              <a:t>При сомнениях клиент восстанавливает согласованность повторным HTTP-запросом состояния.</a:t>
-            </a:r>
-          </a:p>
-        </p:txBody>
-      </p:sp>
-      <p:sp>
-        <p:nvSpPr>
-          <p:cNvPr id="22" name="Shape 22"/>
-          <p:cNvSpPr txBox="1"/>
-          <p:nvPr/>
-        </p:nvSpPr>
-        <p:spPr>
-          <a:xfrm>
-            <a:off x="8092440" y="1508760"/>
-            <a:ext cx="3520440" cy="4343400"/>
+            <a:off x="685800" y="1554480"/>
+            <a:ext cx="5349240" cy="3291840"/>
           </a:xfrm>
           <a:prstGeom prst="roundRect">
             <a:avLst/>
@@ -1209,22 +867,22 @@
           <a:bodyPr wrap="square" lIns="177800" tIns="177800" rIns="177800" bIns="177800"/>
           <a:lstStyle/>
           <a:p>
-            <a:pPr algn="l"/>
-            <a:r>
-              <a:rPr lang="ru-RU" sz="1400" b="1">
-                <a:solidFill>
-                  <a:srgbClr val="18212B"/>
-                </a:solidFill>
-                <a:latin typeface="Aptos"/>
-                <a:cs typeface="Aptos"/>
-              </a:rPr>
-              <a:t>Дальнейшее развитие</a:t>
-            </a:r>
-          </a:p>
-          <a:p>
-            <a:pPr algn="l"/>
-            <a:r>
-              <a:rPr lang="ru-RU" sz="1400" b="1">
+            <a:pPr algn="ctr"/>
+            <a:r>
+              <a:rPr lang="ru-RU" sz="1800" b="1">
+                <a:solidFill>
+                  <a:srgbClr val="18212B"/>
+                </a:solidFill>
+                <a:latin typeface="Aptos"/>
+                <a:cs typeface="Aptos"/>
+              </a:rPr>
+              <a:t>Без backplane</a:t>
+            </a:r>
+          </a:p>
+          <a:p>
+            <a:pPr algn="ctr"/>
+            <a:r>
+              <a:rPr lang="ru-RU" sz="1800" b="1">
                 <a:solidFill>
                   <a:srgbClr val="18212B"/>
                 </a:solidFill>
@@ -1235,68 +893,198 @@
             </a:r>
           </a:p>
           <a:p>
-            <a:pPr algn="l"/>
-            <a:r>
-              <a:rPr lang="ru-RU" sz="1400" b="1">
-                <a:solidFill>
-                  <a:srgbClr val="18212B"/>
-                </a:solidFill>
-                <a:latin typeface="Aptos"/>
-                <a:cs typeface="Aptos"/>
-              </a:rPr>
-              <a:t>Durable broker/event log</a:t>
-            </a:r>
-          </a:p>
-          <a:p>
-            <a:pPr algn="l"/>
-            <a:r>
-              <a:rPr lang="ru-RU" sz="1400" b="1">
-                <a:solidFill>
-                  <a:srgbClr val="18212B"/>
-                </a:solidFill>
-                <a:latin typeface="Aptos"/>
-                <a:cs typeface="Aptos"/>
-              </a:rPr>
-              <a:t>версии сущностей</a:t>
-            </a:r>
-          </a:p>
-          <a:p>
-            <a:pPr algn="l"/>
-            <a:r>
-              <a:rPr lang="ru-RU" sz="1400" b="1">
-                <a:solidFill>
-                  <a:srgbClr val="18212B"/>
-                </a:solidFill>
-                <a:latin typeface="Aptos"/>
-                <a:cs typeface="Aptos"/>
-              </a:rPr>
-              <a:t>optimistic concurrency</a:t>
-            </a:r>
-          </a:p>
-          <a:p>
-            <a:pPr algn="l"/>
-            <a:r>
-              <a:rPr lang="ru-RU" sz="1400" b="1">
-                <a:solidFill>
-                  <a:srgbClr val="18212B"/>
-                </a:solidFill>
-                <a:latin typeface="Aptos"/>
-                <a:cs typeface="Aptos"/>
-              </a:rPr>
-              <a:t>outbox/inbox</a:t>
-            </a:r>
-          </a:p>
-          <a:p>
-            <a:pPr algn="l"/>
-            <a:r>
-              <a:rPr lang="ru-RU" sz="1400" b="1">
-                <a:solidFill>
-                  <a:srgbClr val="18212B"/>
-                </a:solidFill>
-                <a:latin typeface="Aptos"/>
-                <a:cs typeface="Aptos"/>
-              </a:rPr>
-              <a:t>повторная синхронизация по версии</a:t>
+            <a:pPr algn="ctr"/>
+            <a:r>
+              <a:rPr lang="ru-RU" sz="1800" b="1">
+                <a:solidFill>
+                  <a:srgbClr val="18212B"/>
+                </a:solidFill>
+                <a:latin typeface="Aptos"/>
+                <a:cs typeface="Aptos"/>
+              </a:rPr>
+              <a:t>ReceiveReportPatch</a:t>
+            </a:r>
+          </a:p>
+          <a:p>
+            <a:pPr algn="ctr"/>
+            <a:r>
+              <a:rPr lang="ru-RU" sz="1800" b="1">
+                <a:solidFill>
+                  <a:srgbClr val="18212B"/>
+                </a:solidFill>
+                <a:latin typeface="Aptos"/>
+                <a:cs typeface="Aptos"/>
+              </a:rPr>
+              <a:t>timed out · 10 000 мс</a:t>
+            </a:r>
+          </a:p>
+          <a:p>
+            <a:pPr algn="ctr"/>
+            <a:r>
+              <a:rPr lang="ru-RU" sz="1800" b="1">
+                <a:solidFill>
+                  <a:srgbClr val="18212B"/>
+                </a:solidFill>
+                <a:latin typeface="Aptos"/>
+                <a:cs typeface="Aptos"/>
+              </a:rPr>
+              <a:t/>
+            </a:r>
+          </a:p>
+          <a:p>
+            <a:pPr algn="ctr"/>
+            <a:r>
+              <a:rPr lang="ru-RU" sz="1800" b="1">
+                <a:solidFill>
+                  <a:srgbClr val="18212B"/>
+                </a:solidFill>
+                <a:latin typeface="Aptos"/>
+                <a:cs typeface="Aptos"/>
+              </a:rPr>
+              <a:t>Событие, созданное на app-api-1, не дошло до клиента на app-api-2</a:t>
+            </a:r>
+          </a:p>
+        </p:txBody>
+      </p:sp>
+      <p:sp>
+        <p:nvSpPr>
+          <p:cNvPr id="21" name="Shape 21"/>
+          <p:cNvSpPr txBox="1"/>
+          <p:nvPr/>
+        </p:nvSpPr>
+        <p:spPr>
+          <a:xfrm>
+            <a:off x="6172200" y="1554480"/>
+            <a:ext cx="5349240" cy="3291840"/>
+          </a:xfrm>
+          <a:prstGeom prst="roundRect">
+            <a:avLst/>
+          </a:prstGeom>
+          <a:solidFill>
+            <a:srgbClr val="E8F3F1"/>
+          </a:solidFill>
+          <a:ln w="12700">
+            <a:solidFill>
+              <a:srgbClr val="0B6E69"/>
+            </a:solidFill>
+          </a:ln>
+        </p:spPr>
+        <p:txBody>
+          <a:bodyPr wrap="square" lIns="177800" tIns="177800" rIns="177800" bIns="177800"/>
+          <a:lstStyle/>
+          <a:p>
+            <a:pPr algn="ctr"/>
+            <a:r>
+              <a:rPr lang="ru-RU" sz="1800" b="1">
+                <a:solidFill>
+                  <a:srgbClr val="18212B"/>
+                </a:solidFill>
+                <a:latin typeface="Aptos"/>
+                <a:cs typeface="Aptos"/>
+              </a:rPr>
+              <a:t>С backplane</a:t>
+            </a:r>
+          </a:p>
+          <a:p>
+            <a:pPr algn="ctr"/>
+            <a:r>
+              <a:rPr lang="ru-RU" sz="1800" b="1">
+                <a:solidFill>
+                  <a:srgbClr val="18212B"/>
+                </a:solidFill>
+                <a:latin typeface="Aptos"/>
+                <a:cs typeface="Aptos"/>
+              </a:rPr>
+              <a:t/>
+            </a:r>
+          </a:p>
+          <a:p>
+            <a:pPr algn="ctr"/>
+            <a:r>
+              <a:rPr lang="ru-RU" sz="1800" b="1">
+                <a:solidFill>
+                  <a:srgbClr val="18212B"/>
+                </a:solidFill>
+                <a:latin typeface="Aptos"/>
+                <a:cs typeface="Aptos"/>
+              </a:rPr>
+              <a:t>ok: true · ReceiveReportPatch получен</a:t>
+            </a:r>
+          </a:p>
+          <a:p>
+            <a:pPr algn="ctr"/>
+            <a:r>
+              <a:rPr lang="ru-RU" sz="1800" b="1">
+                <a:solidFill>
+                  <a:srgbClr val="18212B"/>
+                </a:solidFill>
+                <a:latin typeface="Aptos"/>
+                <a:cs typeface="Aptos"/>
+              </a:rPr>
+              <a:t>deliveryLatencyMs ≈ 9,5 мс</a:t>
+            </a:r>
+          </a:p>
+          <a:p>
+            <a:pPr algn="ctr"/>
+            <a:r>
+              <a:rPr lang="ru-RU" sz="1800" b="1">
+                <a:solidFill>
+                  <a:srgbClr val="18212B"/>
+                </a:solidFill>
+                <a:latin typeface="Aptos"/>
+                <a:cs typeface="Aptos"/>
+              </a:rPr>
+              <a:t/>
+            </a:r>
+          </a:p>
+          <a:p>
+            <a:pPr algn="ctr"/>
+            <a:r>
+              <a:rPr lang="ru-RU" sz="1800" b="1">
+                <a:solidFill>
+                  <a:srgbClr val="18212B"/>
+                </a:solidFill>
+                <a:latin typeface="Aptos"/>
+                <a:cs typeface="Aptos"/>
+              </a:rPr>
+              <a:t>Клиент на app-api-2 получил событие с app-api-1</a:t>
+            </a:r>
+          </a:p>
+        </p:txBody>
+      </p:sp>
+      <p:sp>
+        <p:nvSpPr>
+          <p:cNvPr id="22" name="Shape 22"/>
+          <p:cNvSpPr txBox="1"/>
+          <p:nvPr/>
+        </p:nvSpPr>
+        <p:spPr>
+          <a:xfrm>
+            <a:off x="685800" y="5074920"/>
+            <a:ext cx="10835640" cy="777240"/>
+          </a:xfrm>
+          <a:prstGeom prst="roundRect">
+            <a:avLst/>
+          </a:prstGeom>
+          <a:noFill/>
+          <a:ln>
+            <a:noFill/>
+          </a:ln>
+        </p:spPr>
+        <p:txBody>
+          <a:bodyPr wrap="square" lIns="177800" tIns="177800" rIns="177800" bIns="177800"/>
+          <a:lstStyle/>
+          <a:p>
+            <a:pPr algn="ctr"/>
+            <a:r>
+              <a:rPr lang="ru-RU" sz="1300" b="0">
+                <a:solidFill>
+                  <a:srgbClr val="5E6A75"/>
+                </a:solidFill>
+                <a:latin typeface="Aptos"/>
+                <a:cs typeface="Aptos"/>
+              </a:rPr>
+              <a:t>Сопоставление двух режимов на одном стенде показывает причинную связь между включением межузлового канала SignalR и успешной доставкой события.</a:t>
             </a:r>
           </a:p>
         </p:txBody>
@@ -1403,6 +1191,1021 @@
                 <a:latin typeface="Aptos"/>
                 <a:cs typeface="Aptos"/>
               </a:rPr>
+              <a:t>Дополнительные проверки</a:t>
+            </a:r>
+          </a:p>
+        </p:txBody>
+      </p:sp>
+      <p:sp>
+        <p:nvSpPr>
+          <p:cNvPr id="11" name="Shape 11"/>
+          <p:cNvSpPr txBox="1"/>
+          <p:nvPr/>
+        </p:nvSpPr>
+        <p:spPr>
+          <a:xfrm>
+            <a:off x="621792" y="987552"/>
+            <a:ext cx="9875520" cy="320040"/>
+          </a:xfrm>
+          <a:prstGeom prst="roundRect">
+            <a:avLst/>
+          </a:prstGeom>
+          <a:noFill/>
+          <a:ln>
+            <a:noFill/>
+          </a:ln>
+        </p:spPr>
+        <p:txBody>
+          <a:bodyPr wrap="square" lIns="177800" tIns="177800" rIns="177800" bIns="177800"/>
+          <a:lstStyle/>
+          <a:p>
+            <a:pPr algn="l"/>
+            <a:r>
+              <a:rPr lang="ru-RU" sz="1300" b="0">
+                <a:solidFill>
+                  <a:srgbClr val="5E6A75"/>
+                </a:solidFill>
+                <a:latin typeface="Aptos"/>
+                <a:cs typeface="Aptos"/>
+              </a:rPr>
+              <a:t>Повторяемость, восстановление подписки и переключение после отказа узла</a:t>
+            </a:r>
+          </a:p>
+        </p:txBody>
+      </p:sp>
+      <p:sp>
+        <p:nvSpPr>
+          <p:cNvPr id="20" name="Shape 20"/>
+          <p:cNvSpPr txBox="1"/>
+          <p:nvPr/>
+        </p:nvSpPr>
+        <p:spPr>
+          <a:xfrm>
+            <a:off x="685800" y="1600200"/>
+            <a:ext cx="3657600" cy="4114800"/>
+          </a:xfrm>
+          <a:prstGeom prst="roundRect">
+            <a:avLst/>
+          </a:prstGeom>
+          <a:solidFill>
+            <a:srgbClr val="FFFFFF"/>
+          </a:solidFill>
+          <a:ln w="12700">
+            <a:solidFill>
+              <a:srgbClr val="D7D2C7"/>
+            </a:solidFill>
+          </a:ln>
+        </p:spPr>
+        <p:txBody>
+          <a:bodyPr wrap="square" lIns="177800" tIns="177800" rIns="177800" bIns="177800"/>
+          <a:lstStyle/>
+          <a:p>
+            <a:pPr algn="l"/>
+            <a:r>
+              <a:rPr lang="ru-RU" sz="1500" b="0">
+                <a:solidFill>
+                  <a:srgbClr val="18212B"/>
+                </a:solidFill>
+                <a:latin typeface="Aptos"/>
+                <a:cs typeface="Aptos"/>
+              </a:rPr>
+              <a:t>Серия из 30 итераций</a:t>
+            </a:r>
+          </a:p>
+          <a:p>
+            <a:pPr algn="l"/>
+            <a:r>
+              <a:rPr lang="ru-RU" sz="1500" b="0">
+                <a:solidFill>
+                  <a:srgbClr val="18212B"/>
+                </a:solidFill>
+                <a:latin typeface="Aptos"/>
+                <a:cs typeface="Aptos"/>
+              </a:rPr>
+              <a:t/>
+            </a:r>
+          </a:p>
+          <a:p>
+            <a:pPr algn="l"/>
+            <a:r>
+              <a:rPr lang="ru-RU" sz="1500" b="0">
+                <a:solidFill>
+                  <a:srgbClr val="18212B"/>
+                </a:solidFill>
+                <a:latin typeface="Aptos"/>
+                <a:cs typeface="Aptos"/>
+              </a:rPr>
+              <a:t>Успешно: 30 из 30</a:t>
+            </a:r>
+          </a:p>
+          <a:p>
+            <a:pPr algn="l"/>
+            <a:r>
+              <a:rPr lang="ru-RU" sz="1500" b="0">
+                <a:solidFill>
+                  <a:srgbClr val="18212B"/>
+                </a:solidFill>
+                <a:latin typeface="Aptos"/>
+                <a:cs typeface="Aptos"/>
+              </a:rPr>
+              <a:t/>
+            </a:r>
+          </a:p>
+          <a:p>
+            <a:pPr algn="l"/>
+            <a:r>
+              <a:rPr lang="ru-RU" sz="1500" b="0">
+                <a:solidFill>
+                  <a:srgbClr val="18212B"/>
+                </a:solidFill>
+                <a:latin typeface="Aptos"/>
+                <a:cs typeface="Aptos"/>
+              </a:rPr>
+              <a:t>min 3,8 мс</a:t>
+            </a:r>
+          </a:p>
+          <a:p>
+            <a:pPr algn="l"/>
+            <a:r>
+              <a:rPr lang="ru-RU" sz="1500" b="0">
+                <a:solidFill>
+                  <a:srgbClr val="18212B"/>
+                </a:solidFill>
+                <a:latin typeface="Aptos"/>
+                <a:cs typeface="Aptos"/>
+              </a:rPr>
+              <a:t>avg 7,2 мс</a:t>
+            </a:r>
+          </a:p>
+          <a:p>
+            <a:pPr algn="l"/>
+            <a:r>
+              <a:rPr lang="ru-RU" sz="1500" b="0">
+                <a:solidFill>
+                  <a:srgbClr val="18212B"/>
+                </a:solidFill>
+                <a:latin typeface="Aptos"/>
+                <a:cs typeface="Aptos"/>
+              </a:rPr>
+              <a:t>p50 6,1 мс</a:t>
+            </a:r>
+          </a:p>
+          <a:p>
+            <a:pPr algn="l"/>
+            <a:r>
+              <a:rPr lang="ru-RU" sz="1500" b="0">
+                <a:solidFill>
+                  <a:srgbClr val="18212B"/>
+                </a:solidFill>
+                <a:latin typeface="Aptos"/>
+                <a:cs typeface="Aptos"/>
+              </a:rPr>
+              <a:t>p95 13,8 мс</a:t>
+            </a:r>
+          </a:p>
+          <a:p>
+            <a:pPr algn="l"/>
+            <a:r>
+              <a:rPr lang="ru-RU" sz="1500" b="0">
+                <a:solidFill>
+                  <a:srgbClr val="18212B"/>
+                </a:solidFill>
+                <a:latin typeface="Aptos"/>
+                <a:cs typeface="Aptos"/>
+              </a:rPr>
+              <a:t/>
+            </a:r>
+          </a:p>
+          <a:p>
+            <a:pPr algn="l"/>
+            <a:r>
+              <a:rPr lang="ru-RU" sz="1500" b="0">
+                <a:solidFill>
+                  <a:srgbClr val="18212B"/>
+                </a:solidFill>
+                <a:latin typeface="Aptos"/>
+                <a:cs typeface="Aptos"/>
+              </a:rPr>
+              <a:t>Подтверждена повторяемость доставки.</a:t>
+            </a:r>
+          </a:p>
+        </p:txBody>
+      </p:sp>
+      <p:sp>
+        <p:nvSpPr>
+          <p:cNvPr id="21" name="Shape 21"/>
+          <p:cNvSpPr txBox="1"/>
+          <p:nvPr/>
+        </p:nvSpPr>
+        <p:spPr>
+          <a:xfrm>
+            <a:off x="4434840" y="1600200"/>
+            <a:ext cx="3657600" cy="4114800"/>
+          </a:xfrm>
+          <a:prstGeom prst="roundRect">
+            <a:avLst/>
+          </a:prstGeom>
+          <a:solidFill>
+            <a:srgbClr val="FFFFFF"/>
+          </a:solidFill>
+          <a:ln w="12700">
+            <a:solidFill>
+              <a:srgbClr val="D7D2C7"/>
+            </a:solidFill>
+          </a:ln>
+        </p:spPr>
+        <p:txBody>
+          <a:bodyPr wrap="square" lIns="177800" tIns="177800" rIns="177800" bIns="177800"/>
+          <a:lstStyle/>
+          <a:p>
+            <a:pPr algn="l"/>
+            <a:r>
+              <a:rPr lang="ru-RU" sz="1500" b="0">
+                <a:solidFill>
+                  <a:srgbClr val="18212B"/>
+                </a:solidFill>
+                <a:latin typeface="Aptos"/>
+                <a:cs typeface="Aptos"/>
+              </a:rPr>
+              <a:t>Восстановление подписки</a:t>
+            </a:r>
+          </a:p>
+          <a:p>
+            <a:pPr algn="l"/>
+            <a:r>
+              <a:rPr lang="ru-RU" sz="1500" b="0">
+                <a:solidFill>
+                  <a:srgbClr val="18212B"/>
+                </a:solidFill>
+                <a:latin typeface="Aptos"/>
+                <a:cs typeface="Aptos"/>
+              </a:rPr>
+              <a:t/>
+            </a:r>
+          </a:p>
+          <a:p>
+            <a:pPr algn="l"/>
+            <a:r>
+              <a:rPr lang="ru-RU" sz="1500" b="0">
+                <a:solidFill>
+                  <a:srgbClr val="18212B"/>
+                </a:solidFill>
+                <a:latin typeface="Aptos"/>
+                <a:cs typeface="Aptos"/>
+              </a:rPr>
+              <a:t>После разрыва клиент создаёт новое соединение и снова вступает в группу отчёта.</a:t>
+            </a:r>
+          </a:p>
+          <a:p>
+            <a:pPr algn="l"/>
+            <a:r>
+              <a:rPr lang="ru-RU" sz="1500" b="0">
+                <a:solidFill>
+                  <a:srgbClr val="18212B"/>
+                </a:solidFill>
+                <a:latin typeface="Aptos"/>
+                <a:cs typeface="Aptos"/>
+              </a:rPr>
+              <a:t/>
+            </a:r>
+          </a:p>
+          <a:p>
+            <a:pPr algn="l"/>
+            <a:r>
+              <a:rPr lang="ru-RU" sz="1500" b="0">
+                <a:solidFill>
+                  <a:srgbClr val="18212B"/>
+                </a:solidFill>
+                <a:latin typeface="Aptos"/>
+                <a:cs typeface="Aptos"/>
+              </a:rPr>
+              <a:t>переподключение 6,5 мс</a:t>
+            </a:r>
+          </a:p>
+          <a:p>
+            <a:pPr algn="l"/>
+            <a:r>
+              <a:rPr lang="ru-RU" sz="1500" b="0">
+                <a:solidFill>
+                  <a:srgbClr val="18212B"/>
+                </a:solidFill>
+                <a:latin typeface="Aptos"/>
+                <a:cs typeface="Aptos"/>
+              </a:rPr>
+              <a:t>доставка 15,2 мс</a:t>
+            </a:r>
+          </a:p>
+          <a:p>
+            <a:pPr algn="l"/>
+            <a:r>
+              <a:rPr lang="ru-RU" sz="1500" b="0">
+                <a:solidFill>
+                  <a:srgbClr val="18212B"/>
+                </a:solidFill>
+                <a:latin typeface="Aptos"/>
+                <a:cs typeface="Aptos"/>
+              </a:rPr>
+              <a:t/>
+            </a:r>
+          </a:p>
+          <a:p>
+            <a:pPr algn="l"/>
+            <a:r>
+              <a:rPr lang="ru-RU" sz="1500" b="0">
+                <a:solidFill>
+                  <a:srgbClr val="18212B"/>
+                </a:solidFill>
+                <a:latin typeface="Aptos"/>
+                <a:cs typeface="Aptos"/>
+              </a:rPr>
+              <a:t>Подтверждена повторная подписка.</a:t>
+            </a:r>
+          </a:p>
+        </p:txBody>
+      </p:sp>
+      <p:sp>
+        <p:nvSpPr>
+          <p:cNvPr id="22" name="Shape 22"/>
+          <p:cNvSpPr txBox="1"/>
+          <p:nvPr/>
+        </p:nvSpPr>
+        <p:spPr>
+          <a:xfrm>
+            <a:off x="8183880" y="1600200"/>
+            <a:ext cx="3657600" cy="4114800"/>
+          </a:xfrm>
+          <a:prstGeom prst="roundRect">
+            <a:avLst/>
+          </a:prstGeom>
+          <a:solidFill>
+            <a:srgbClr val="FFFFFF"/>
+          </a:solidFill>
+          <a:ln w="12700">
+            <a:solidFill>
+              <a:srgbClr val="D7D2C7"/>
+            </a:solidFill>
+          </a:ln>
+        </p:spPr>
+        <p:txBody>
+          <a:bodyPr wrap="square" lIns="177800" tIns="177800" rIns="177800" bIns="177800"/>
+          <a:lstStyle/>
+          <a:p>
+            <a:pPr algn="l"/>
+            <a:r>
+              <a:rPr lang="ru-RU" sz="1500" b="0">
+                <a:solidFill>
+                  <a:srgbClr val="18212B"/>
+                </a:solidFill>
+                <a:latin typeface="Aptos"/>
+                <a:cs typeface="Aptos"/>
+              </a:rPr>
+              <a:t>Переключение после отказа узла</a:t>
+            </a:r>
+          </a:p>
+          <a:p>
+            <a:pPr algn="l"/>
+            <a:r>
+              <a:rPr lang="ru-RU" sz="1500" b="0">
+                <a:solidFill>
+                  <a:srgbClr val="18212B"/>
+                </a:solidFill>
+                <a:latin typeface="Aptos"/>
+                <a:cs typeface="Aptos"/>
+              </a:rPr>
+              <a:t/>
+            </a:r>
+          </a:p>
+          <a:p>
+            <a:pPr algn="l"/>
+            <a:r>
+              <a:rPr lang="ru-RU" sz="1500" b="0">
+                <a:solidFill>
+                  <a:srgbClr val="18212B"/>
+                </a:solidFill>
+                <a:latin typeface="Aptos"/>
+                <a:cs typeface="Aptos"/>
+              </a:rPr>
+              <a:t>Один backend остановлен; nginx переключает клиента на другой экземпляр.</a:t>
+            </a:r>
+          </a:p>
+          <a:p>
+            <a:pPr algn="l"/>
+            <a:r>
+              <a:rPr lang="ru-RU" sz="1500" b="0">
+                <a:solidFill>
+                  <a:srgbClr val="18212B"/>
+                </a:solidFill>
+                <a:latin typeface="Aptos"/>
+                <a:cs typeface="Aptos"/>
+              </a:rPr>
+              <a:t/>
+            </a:r>
+          </a:p>
+          <a:p>
+            <a:pPr algn="l"/>
+            <a:r>
+              <a:rPr lang="ru-RU" sz="1500" b="0">
+                <a:solidFill>
+                  <a:srgbClr val="18212B"/>
+                </a:solidFill>
+                <a:latin typeface="Aptos"/>
+                <a:cs typeface="Aptos"/>
+              </a:rPr>
+              <a:t>переподключение 352,0 мс</a:t>
+            </a:r>
+          </a:p>
+          <a:p>
+            <a:pPr algn="l"/>
+            <a:r>
+              <a:rPr lang="ru-RU" sz="1500" b="0">
+                <a:solidFill>
+                  <a:srgbClr val="18212B"/>
+                </a:solidFill>
+                <a:latin typeface="Aptos"/>
+                <a:cs typeface="Aptos"/>
+              </a:rPr>
+              <a:t>доставка 5,4 мс</a:t>
+            </a:r>
+          </a:p>
+          <a:p>
+            <a:pPr algn="l"/>
+            <a:r>
+              <a:rPr lang="ru-RU" sz="1500" b="0">
+                <a:solidFill>
+                  <a:srgbClr val="18212B"/>
+                </a:solidFill>
+                <a:latin typeface="Aptos"/>
+                <a:cs typeface="Aptos"/>
+              </a:rPr>
+              <a:t/>
+            </a:r>
+          </a:p>
+          <a:p>
+            <a:pPr algn="l"/>
+            <a:r>
+              <a:rPr lang="ru-RU" sz="1500" b="0">
+                <a:solidFill>
+                  <a:srgbClr val="18212B"/>
+                </a:solidFill>
+                <a:latin typeface="Aptos"/>
+                <a:cs typeface="Aptos"/>
+              </a:rPr>
+              <a:t>Подтверждено восстановление после отказа.</a:t>
+            </a:r>
+          </a:p>
+        </p:txBody>
+      </p:sp>
+      <p:sp>
+        <p:nvSpPr>
+          <p:cNvPr id="900" name="Shape 900"/>
+          <p:cNvSpPr txBox="1"/>
+          <p:nvPr/>
+        </p:nvSpPr>
+        <p:spPr>
+          <a:xfrm>
+            <a:off x="594360" y="6510528"/>
+            <a:ext cx="10972800" cy="201168"/>
+          </a:xfrm>
+          <a:prstGeom prst="roundRect">
+            <a:avLst/>
+          </a:prstGeom>
+          <a:noFill/>
+          <a:ln>
+            <a:noFill/>
+          </a:ln>
+        </p:spPr>
+        <p:txBody>
+          <a:bodyPr wrap="square" lIns="177800" tIns="177800" rIns="177800" bIns="177800"/>
+          <a:lstStyle/>
+          <a:p>
+            <a:pPr algn="l"/>
+            <a:r>
+              <a:rPr lang="ru-RU" sz="800" b="0">
+                <a:solidFill>
+                  <a:srgbClr val="5E6A75"/>
+                </a:solidFill>
+                <a:latin typeface="Aptos"/>
+                <a:cs typeface="Aptos"/>
+              </a:rPr>
+              <a:t>Real-time scale-out · 12</a:t>
+            </a:r>
+          </a:p>
+        </p:txBody>
+      </p:sp>
+    </p:spTree>
+  </p:cSld>
+  <p:clrMapOvr>
+    <a:masterClrMapping/>
+  </p:clrMapOvr>
+</p:sld>
+</file>
+
+<file path=ppt/slides/slide13.xml><?xml version="1.0" encoding="utf-8"?>
+<p:sld xmlns:a="http://schemas.openxmlformats.org/drawingml/2006/main" xmlns:r="http://schemas.openxmlformats.org/officeDocument/2006/relationships" xmlns:p="http://schemas.openxmlformats.org/presentationml/2006/main">
+  <p:cSld>
+    <p:bg>
+      <p:bgPr>
+        <a:solidFill>
+          <a:srgbClr val="F6F3EC"/>
+        </a:solidFill>
+        <a:effectLst/>
+      </p:bgPr>
+    </p:bg>
+    <p:spTree>
+      <p:nvGrpSpPr>
+        <p:cNvPr id="1" name=""/>
+        <p:cNvGrpSpPr/>
+        <p:nvPr/>
+      </p:nvGrpSpPr>
+      <p:grpSpPr>
+        <a:xfrm>
+          <a:off x="0" y="0"/>
+          <a:ext cx="0" cy="0"/>
+          <a:chOff x="0" y="0"/>
+          <a:chExt cx="0" cy="0"/>
+        </a:xfrm>
+      </p:grpSpPr>
+      <p:sp>
+        <p:nvSpPr>
+          <p:cNvPr id="10" name="Shape 10"/>
+          <p:cNvSpPr txBox="1"/>
+          <p:nvPr/>
+        </p:nvSpPr>
+        <p:spPr>
+          <a:xfrm>
+            <a:off x="594360" y="411480"/>
+            <a:ext cx="10881360" cy="658368"/>
+          </a:xfrm>
+          <a:prstGeom prst="roundRect">
+            <a:avLst/>
+          </a:prstGeom>
+          <a:noFill/>
+          <a:ln>
+            <a:noFill/>
+          </a:ln>
+        </p:spPr>
+        <p:txBody>
+          <a:bodyPr wrap="square" lIns="177800" tIns="177800" rIns="177800" bIns="177800"/>
+          <a:lstStyle/>
+          <a:p>
+            <a:pPr algn="l"/>
+            <a:r>
+              <a:rPr lang="ru-RU" sz="3000" b="1">
+                <a:solidFill>
+                  <a:srgbClr val="18212B"/>
+                </a:solidFill>
+                <a:latin typeface="Aptos"/>
+                <a:cs typeface="Aptos"/>
+              </a:rPr>
+              <a:t>Ограничения</a:t>
+            </a:r>
+          </a:p>
+        </p:txBody>
+      </p:sp>
+      <p:sp>
+        <p:nvSpPr>
+          <p:cNvPr id="11" name="Shape 11"/>
+          <p:cNvSpPr txBox="1"/>
+          <p:nvPr/>
+        </p:nvSpPr>
+        <p:spPr>
+          <a:xfrm>
+            <a:off x="621792" y="987552"/>
+            <a:ext cx="9875520" cy="320040"/>
+          </a:xfrm>
+          <a:prstGeom prst="roundRect">
+            <a:avLst/>
+          </a:prstGeom>
+          <a:noFill/>
+          <a:ln>
+            <a:noFill/>
+          </a:ln>
+        </p:spPr>
+        <p:txBody>
+          <a:bodyPr wrap="square" lIns="177800" tIns="177800" rIns="177800" bIns="177800"/>
+          <a:lstStyle/>
+          <a:p>
+            <a:pPr algn="l"/>
+            <a:r>
+              <a:rPr lang="ru-RU" sz="1300" b="0">
+                <a:solidFill>
+                  <a:srgbClr val="5E6A75"/>
+                </a:solidFill>
+                <a:latin typeface="Aptos"/>
+                <a:cs typeface="Aptos"/>
+              </a:rPr>
+              <a:t>Решение предназначено для интерфейсной синхронизации, а не для жёсткого real-time</a:t>
+            </a:r>
+          </a:p>
+        </p:txBody>
+      </p:sp>
+      <p:sp>
+        <p:nvSpPr>
+          <p:cNvPr id="20" name="Shape 20"/>
+          <p:cNvSpPr txBox="1"/>
+          <p:nvPr/>
+        </p:nvSpPr>
+        <p:spPr>
+          <a:xfrm>
+            <a:off x="685800" y="1508760"/>
+            <a:ext cx="3520440" cy="4343400"/>
+          </a:xfrm>
+          <a:prstGeom prst="roundRect">
+            <a:avLst/>
+          </a:prstGeom>
+          <a:solidFill>
+            <a:srgbClr val="FFFFFF"/>
+          </a:solidFill>
+          <a:ln w="12700">
+            <a:solidFill>
+              <a:srgbClr val="D7D2C7"/>
+            </a:solidFill>
+          </a:ln>
+        </p:spPr>
+        <p:txBody>
+          <a:bodyPr wrap="square" lIns="177800" tIns="177800" rIns="177800" bIns="177800"/>
+          <a:lstStyle/>
+          <a:p>
+            <a:pPr algn="l"/>
+            <a:r>
+              <a:rPr lang="ru-RU" sz="1400" b="0">
+                <a:solidFill>
+                  <a:srgbClr val="18212B"/>
+                </a:solidFill>
+                <a:latin typeface="Aptos"/>
+                <a:cs typeface="Aptos"/>
+              </a:rPr>
+              <a:t>Ненулевая задержка</a:t>
+            </a:r>
+          </a:p>
+          <a:p>
+            <a:pPr algn="l"/>
+            <a:r>
+              <a:rPr lang="ru-RU" sz="1400" b="0">
+                <a:solidFill>
+                  <a:srgbClr val="18212B"/>
+                </a:solidFill>
+                <a:latin typeface="Aptos"/>
+                <a:cs typeface="Aptos"/>
+              </a:rPr>
+              <a:t/>
+            </a:r>
+          </a:p>
+          <a:p>
+            <a:pPr algn="l"/>
+            <a:r>
+              <a:rPr lang="ru-RU" sz="1400" b="0">
+                <a:solidFill>
+                  <a:srgbClr val="18212B"/>
+                </a:solidFill>
+                <a:latin typeface="Aptos"/>
+                <a:cs typeface="Aptos"/>
+              </a:rPr>
+              <a:t>Событие проходит через app-api, Redis backplane и другой app-api.</a:t>
+            </a:r>
+          </a:p>
+          <a:p>
+            <a:pPr algn="l"/>
+            <a:r>
+              <a:rPr lang="ru-RU" sz="1400" b="0">
+                <a:solidFill>
+                  <a:srgbClr val="18212B"/>
+                </a:solidFill>
+                <a:latin typeface="Aptos"/>
+                <a:cs typeface="Aptos"/>
+              </a:rPr>
+              <a:t/>
+            </a:r>
+          </a:p>
+          <a:p>
+            <a:pPr algn="l"/>
+            <a:r>
+              <a:rPr lang="ru-RU" sz="1400" b="0">
+                <a:solidFill>
+                  <a:srgbClr val="18212B"/>
+                </a:solidFill>
+                <a:latin typeface="Aptos"/>
+                <a:cs typeface="Aptos"/>
+              </a:rPr>
+              <a:t>В локальной серии: avg 7,2 мс, p95 13,8 мс.</a:t>
+            </a:r>
+          </a:p>
+        </p:txBody>
+      </p:sp>
+      <p:sp>
+        <p:nvSpPr>
+          <p:cNvPr id="21" name="Shape 21"/>
+          <p:cNvSpPr txBox="1"/>
+          <p:nvPr/>
+        </p:nvSpPr>
+        <p:spPr>
+          <a:xfrm>
+            <a:off x="4389120" y="1508760"/>
+            <a:ext cx="3520440" cy="4343400"/>
+          </a:xfrm>
+          <a:prstGeom prst="roundRect">
+            <a:avLst/>
+          </a:prstGeom>
+          <a:solidFill>
+            <a:srgbClr val="FFFFFF"/>
+          </a:solidFill>
+          <a:ln w="12700">
+            <a:solidFill>
+              <a:srgbClr val="D7D2C7"/>
+            </a:solidFill>
+          </a:ln>
+        </p:spPr>
+        <p:txBody>
+          <a:bodyPr wrap="square" lIns="177800" tIns="177800" rIns="177800" bIns="177800"/>
+          <a:lstStyle/>
+          <a:p>
+            <a:pPr algn="l"/>
+            <a:r>
+              <a:rPr lang="ru-RU" sz="1400" b="0">
+                <a:solidFill>
+                  <a:srgbClr val="18212B"/>
+                </a:solidFill>
+                <a:latin typeface="Aptos"/>
+                <a:cs typeface="Aptos"/>
+              </a:rPr>
+              <a:t>Transient UI-events</a:t>
+            </a:r>
+          </a:p>
+          <a:p>
+            <a:pPr algn="l"/>
+            <a:r>
+              <a:rPr lang="ru-RU" sz="1400" b="0">
+                <a:solidFill>
+                  <a:srgbClr val="18212B"/>
+                </a:solidFill>
+                <a:latin typeface="Aptos"/>
+                <a:cs typeface="Aptos"/>
+              </a:rPr>
+              <a:t/>
+            </a:r>
+          </a:p>
+          <a:p>
+            <a:pPr algn="l"/>
+            <a:r>
+              <a:rPr lang="ru-RU" sz="1400" b="0">
+                <a:solidFill>
+                  <a:srgbClr val="18212B"/>
+                </a:solidFill>
+                <a:latin typeface="Aptos"/>
+                <a:cs typeface="Aptos"/>
+              </a:rPr>
+              <a:t>Источник истины — PostgreSQL.</a:t>
+            </a:r>
+          </a:p>
+          <a:p>
+            <a:pPr algn="l"/>
+            <a:r>
+              <a:rPr lang="ru-RU" sz="1400" b="0">
+                <a:solidFill>
+                  <a:srgbClr val="18212B"/>
+                </a:solidFill>
+                <a:latin typeface="Aptos"/>
+                <a:cs typeface="Aptos"/>
+              </a:rPr>
+              <a:t/>
+            </a:r>
+          </a:p>
+          <a:p>
+            <a:pPr algn="l"/>
+            <a:r>
+              <a:rPr lang="ru-RU" sz="1400" b="0">
+                <a:solidFill>
+                  <a:srgbClr val="18212B"/>
+                </a:solidFill>
+                <a:latin typeface="Aptos"/>
+                <a:cs typeface="Aptos"/>
+              </a:rPr>
+              <a:t>При сомнениях клиент восстанавливает согласованность повторным HTTP-запросом состояния.</a:t>
+            </a:r>
+          </a:p>
+        </p:txBody>
+      </p:sp>
+      <p:sp>
+        <p:nvSpPr>
+          <p:cNvPr id="22" name="Shape 22"/>
+          <p:cNvSpPr txBox="1"/>
+          <p:nvPr/>
+        </p:nvSpPr>
+        <p:spPr>
+          <a:xfrm>
+            <a:off x="8092440" y="1508760"/>
+            <a:ext cx="3520440" cy="4343400"/>
+          </a:xfrm>
+          <a:prstGeom prst="roundRect">
+            <a:avLst/>
+          </a:prstGeom>
+          <a:solidFill>
+            <a:srgbClr val="FFF3D8"/>
+          </a:solidFill>
+          <a:ln w="12700">
+            <a:solidFill>
+              <a:srgbClr val="C76F2E"/>
+            </a:solidFill>
+          </a:ln>
+        </p:spPr>
+        <p:txBody>
+          <a:bodyPr wrap="square" lIns="177800" tIns="177800" rIns="177800" bIns="177800"/>
+          <a:lstStyle/>
+          <a:p>
+            <a:pPr algn="l"/>
+            <a:r>
+              <a:rPr lang="ru-RU" sz="1400" b="1">
+                <a:solidFill>
+                  <a:srgbClr val="18212B"/>
+                </a:solidFill>
+                <a:latin typeface="Aptos"/>
+                <a:cs typeface="Aptos"/>
+              </a:rPr>
+              <a:t>Дальнейшее развитие</a:t>
+            </a:r>
+          </a:p>
+          <a:p>
+            <a:pPr algn="l"/>
+            <a:r>
+              <a:rPr lang="ru-RU" sz="1400" b="1">
+                <a:solidFill>
+                  <a:srgbClr val="18212B"/>
+                </a:solidFill>
+                <a:latin typeface="Aptos"/>
+                <a:cs typeface="Aptos"/>
+              </a:rPr>
+              <a:t/>
+            </a:r>
+          </a:p>
+          <a:p>
+            <a:pPr algn="l"/>
+            <a:r>
+              <a:rPr lang="ru-RU" sz="1400" b="1">
+                <a:solidFill>
+                  <a:srgbClr val="18212B"/>
+                </a:solidFill>
+                <a:latin typeface="Aptos"/>
+                <a:cs typeface="Aptos"/>
+              </a:rPr>
+              <a:t>Durable broker/event log</a:t>
+            </a:r>
+          </a:p>
+          <a:p>
+            <a:pPr algn="l"/>
+            <a:r>
+              <a:rPr lang="ru-RU" sz="1400" b="1">
+                <a:solidFill>
+                  <a:srgbClr val="18212B"/>
+                </a:solidFill>
+                <a:latin typeface="Aptos"/>
+                <a:cs typeface="Aptos"/>
+              </a:rPr>
+              <a:t>версии сущностей</a:t>
+            </a:r>
+          </a:p>
+          <a:p>
+            <a:pPr algn="l"/>
+            <a:r>
+              <a:rPr lang="ru-RU" sz="1400" b="1">
+                <a:solidFill>
+                  <a:srgbClr val="18212B"/>
+                </a:solidFill>
+                <a:latin typeface="Aptos"/>
+                <a:cs typeface="Aptos"/>
+              </a:rPr>
+              <a:t>optimistic concurrency</a:t>
+            </a:r>
+          </a:p>
+          <a:p>
+            <a:pPr algn="l"/>
+            <a:r>
+              <a:rPr lang="ru-RU" sz="1400" b="1">
+                <a:solidFill>
+                  <a:srgbClr val="18212B"/>
+                </a:solidFill>
+                <a:latin typeface="Aptos"/>
+                <a:cs typeface="Aptos"/>
+              </a:rPr>
+              <a:t>outbox/inbox</a:t>
+            </a:r>
+          </a:p>
+          <a:p>
+            <a:pPr algn="l"/>
+            <a:r>
+              <a:rPr lang="ru-RU" sz="1400" b="1">
+                <a:solidFill>
+                  <a:srgbClr val="18212B"/>
+                </a:solidFill>
+                <a:latin typeface="Aptos"/>
+                <a:cs typeface="Aptos"/>
+              </a:rPr>
+              <a:t>повторная синхронизация по версии</a:t>
+            </a:r>
+          </a:p>
+        </p:txBody>
+      </p:sp>
+      <p:sp>
+        <p:nvSpPr>
+          <p:cNvPr id="900" name="Shape 900"/>
+          <p:cNvSpPr txBox="1"/>
+          <p:nvPr/>
+        </p:nvSpPr>
+        <p:spPr>
+          <a:xfrm>
+            <a:off x="594360" y="6510528"/>
+            <a:ext cx="10972800" cy="201168"/>
+          </a:xfrm>
+          <a:prstGeom prst="roundRect">
+            <a:avLst/>
+          </a:prstGeom>
+          <a:noFill/>
+          <a:ln>
+            <a:noFill/>
+          </a:ln>
+        </p:spPr>
+        <p:txBody>
+          <a:bodyPr wrap="square" lIns="177800" tIns="177800" rIns="177800" bIns="177800"/>
+          <a:lstStyle/>
+          <a:p>
+            <a:pPr algn="l"/>
+            <a:r>
+              <a:rPr lang="ru-RU" sz="800" b="0">
+                <a:solidFill>
+                  <a:srgbClr val="5E6A75"/>
+                </a:solidFill>
+                <a:latin typeface="Aptos"/>
+                <a:cs typeface="Aptos"/>
+              </a:rPr>
+              <a:t>Real-time scale-out · 13</a:t>
+            </a:r>
+          </a:p>
+        </p:txBody>
+      </p:sp>
+    </p:spTree>
+  </p:cSld>
+  <p:clrMapOvr>
+    <a:masterClrMapping/>
+  </p:clrMapOvr>
+</p:sld>
+</file>
+
+<file path=ppt/slides/slide14.xml><?xml version="1.0" encoding="utf-8"?>
+<p:sld xmlns:a="http://schemas.openxmlformats.org/drawingml/2006/main" xmlns:r="http://schemas.openxmlformats.org/officeDocument/2006/relationships" xmlns:p="http://schemas.openxmlformats.org/presentationml/2006/main">
+  <p:cSld>
+    <p:bg>
+      <p:bgPr>
+        <a:solidFill>
+          <a:srgbClr val="F6F3EC"/>
+        </a:solidFill>
+        <a:effectLst/>
+      </p:bgPr>
+    </p:bg>
+    <p:spTree>
+      <p:nvGrpSpPr>
+        <p:cNvPr id="1" name=""/>
+        <p:cNvGrpSpPr/>
+        <p:nvPr/>
+      </p:nvGrpSpPr>
+      <p:grpSpPr>
+        <a:xfrm>
+          <a:off x="0" y="0"/>
+          <a:ext cx="0" cy="0"/>
+          <a:chOff x="0" y="0"/>
+          <a:chExt cx="0" cy="0"/>
+        </a:xfrm>
+      </p:grpSpPr>
+      <p:sp>
+        <p:nvSpPr>
+          <p:cNvPr id="10" name="Shape 10"/>
+          <p:cNvSpPr txBox="1"/>
+          <p:nvPr/>
+        </p:nvSpPr>
+        <p:spPr>
+          <a:xfrm>
+            <a:off x="594360" y="411480"/>
+            <a:ext cx="10881360" cy="658368"/>
+          </a:xfrm>
+          <a:prstGeom prst="roundRect">
+            <a:avLst/>
+          </a:prstGeom>
+          <a:noFill/>
+          <a:ln>
+            <a:noFill/>
+          </a:ln>
+        </p:spPr>
+        <p:txBody>
+          <a:bodyPr wrap="square" lIns="177800" tIns="177800" rIns="177800" bIns="177800"/>
+          <a:lstStyle/>
+          <a:p>
+            <a:pPr algn="l"/>
+            <a:r>
+              <a:rPr lang="ru-RU" sz="3000" b="1">
+                <a:solidFill>
+                  <a:srgbClr val="18212B"/>
+                </a:solidFill>
+                <a:latin typeface="Aptos"/>
+                <a:cs typeface="Aptos"/>
+              </a:rPr>
               <a:t>Вывод</a:t>
             </a:r>
           </a:p>
@@ -1723,7 +2526,7 @@
                 <a:latin typeface="Aptos"/>
                 <a:cs typeface="Aptos"/>
               </a:rPr>
-              <a:t>Real-time scale-out · 12</a:t>
+              <a:t>Real-time scale-out · 14</a:t>
             </a:r>
           </a:p>
         </p:txBody>
@@ -1793,7 +2596,7 @@
                 <a:latin typeface="Aptos"/>
                 <a:cs typeface="Aptos"/>
               </a:rPr>
-              <a:t>Проблема и цель</a:t>
+              <a:t>Целевой продукт: дашборд</a:t>
             </a:r>
           </a:p>
         </p:txBody>
@@ -1830,7 +2633,7 @@
                 <a:latin typeface="Aptos"/>
                 <a:cs typeface="Aptos"/>
               </a:rPr>
-              <a:t>Single-node SignalR ограничивает горизонтальное масштабирование</a:t>
+              <a:t>Пользователь видит отчёты команды, статусы, ответственных и активность по задачам</a:t>
             </a:r>
           </a:p>
         </p:txBody>
@@ -1843,10 +2646,10 @@
         </p:nvSpPr>
         <p:spPr>
           <a:xfrm>
-            <a:off x="685800" y="1508760"/>
-            <a:ext cx="5349240" cy="4206240"/>
-          </a:xfrm>
-          <a:prstGeom prst="roundRect">
+            <a:off x="1078992" y="1353312"/>
+            <a:ext cx="10003536" cy="5047488"/>
+          </a:xfrm>
+          <a:prstGeom prst="rect">
             <a:avLst/>
           </a:prstGeom>
           <a:solidFill>
@@ -1861,166 +2664,38 @@
         <p:txBody>
           <a:bodyPr wrap="square" lIns="177800" tIns="177800" rIns="177800" bIns="177800"/>
           <a:lstStyle/>
-          <a:p>
-            <a:pPr algn="l"/>
-            <a:r>
-              <a:rPr lang="ru-RU" sz="1600" b="0">
-                <a:solidFill>
-                  <a:srgbClr val="18212B"/>
-                </a:solidFill>
-                <a:latin typeface="Aptos"/>
-                <a:cs typeface="Aptos"/>
-              </a:rPr>
-              <a:t>Проблема</a:t>
-            </a:r>
-          </a:p>
-          <a:p>
-            <a:pPr algn="l"/>
-            <a:r>
-              <a:rPr lang="ru-RU" sz="1600" b="0">
-                <a:solidFill>
-                  <a:srgbClr val="18212B"/>
-                </a:solidFill>
-                <a:latin typeface="Aptos"/>
-                <a:cs typeface="Aptos"/>
-              </a:rPr>
-              <a:t/>
-            </a:r>
-          </a:p>
-          <a:p>
-            <a:pPr algn="l"/>
-            <a:r>
-              <a:rPr lang="ru-RU" sz="1600" b="0">
-                <a:solidFill>
-                  <a:srgbClr val="18212B"/>
-                </a:solidFill>
-                <a:latin typeface="Aptos"/>
-                <a:cs typeface="Aptos"/>
-              </a:rPr>
-              <a:t>Сведения о подключениях и группах SignalR хранятся в памяти процесса.</a:t>
-            </a:r>
-          </a:p>
-          <a:p>
-            <a:pPr algn="l"/>
-            <a:r>
-              <a:rPr lang="ru-RU" sz="1600" b="0">
-                <a:solidFill>
-                  <a:srgbClr val="18212B"/>
-                </a:solidFill>
-                <a:latin typeface="Aptos"/>
-                <a:cs typeface="Aptos"/>
-              </a:rPr>
-              <a:t/>
-            </a:r>
-          </a:p>
-          <a:p>
-            <a:pPr algn="l"/>
-            <a:r>
-              <a:rPr lang="ru-RU" sz="1600" b="0">
-                <a:solidFill>
-                  <a:srgbClr val="18212B"/>
-                </a:solidFill>
-                <a:latin typeface="Aptos"/>
-                <a:cs typeface="Aptos"/>
-              </a:rPr>
-              <a:t>При нескольких экземплярах backend событие, созданное на одном узле, не доходит до клиента, подключенного к другому узлу.</a:t>
-            </a:r>
-          </a:p>
-          <a:p>
-            <a:pPr algn="l"/>
-            <a:r>
-              <a:rPr lang="ru-RU" sz="1600" b="0">
-                <a:solidFill>
-                  <a:srgbClr val="18212B"/>
-                </a:solidFill>
-                <a:latin typeface="Aptos"/>
-                <a:cs typeface="Aptos"/>
-              </a:rPr>
-              <a:t/>
-            </a:r>
-          </a:p>
-          <a:p>
-            <a:pPr algn="l"/>
-            <a:r>
-              <a:rPr lang="ru-RU" sz="1600" b="0">
-                <a:solidFill>
-                  <a:srgbClr val="18212B"/>
-                </a:solidFill>
-                <a:latin typeface="Aptos"/>
-                <a:cs typeface="Aptos"/>
-              </a:rPr>
-              <a:t>Real-time пространство фрагментируется на независимые острова.</a:t>
-            </a:r>
-          </a:p>
-        </p:txBody>
-      </p:sp>
-      <p:sp>
-        <p:nvSpPr>
-          <p:cNvPr id="21" name="Shape 21"/>
-          <p:cNvSpPr txBox="1"/>
-          <p:nvPr/>
-        </p:nvSpPr>
-        <p:spPr>
-          <a:xfrm>
-            <a:off x="6172200" y="1508760"/>
-            <a:ext cx="5349240" cy="4206240"/>
-          </a:xfrm>
-          <a:prstGeom prst="roundRect">
-            <a:avLst/>
-          </a:prstGeom>
-          <a:solidFill>
-            <a:srgbClr val="E8F3F1"/>
-          </a:solidFill>
+          <a:p/>
+        </p:txBody>
+      </p:sp>
+      <p:pic>
+        <p:nvPicPr>
+          <p:cNvPr id="21" name="interface-dashboard.png"/>
+          <p:cNvPicPr>
+            <a:picLocks noChangeAspect="1"/>
+          </p:cNvPicPr>
+          <p:nvPr/>
+        </p:nvPicPr>
+        <p:blipFill>
+          <a:blip r:embed="rId2"/>
+          <a:stretch>
+            <a:fillRect/>
+          </a:stretch>
+        </p:blipFill>
+        <p:spPr>
+          <a:xfrm>
+            <a:off x="1143000" y="1417320"/>
+            <a:ext cx="9875520" cy="4992624"/>
+          </a:xfrm>
+          <a:prstGeom prst="rect">
+            <a:avLst/>
+          </a:prstGeom>
           <a:ln w="12700">
             <a:solidFill>
-              <a:srgbClr val="0B6E69"/>
+              <a:srgbClr val="D7D2C7"/>
             </a:solidFill>
           </a:ln>
         </p:spPr>
-        <p:txBody>
-          <a:bodyPr wrap="square" lIns="177800" tIns="177800" rIns="177800" bIns="177800"/>
-          <a:lstStyle/>
-          <a:p>
-            <a:pPr algn="l"/>
-            <a:r>
-              <a:rPr lang="ru-RU" sz="1600" b="1">
-                <a:solidFill>
-                  <a:srgbClr val="18212B"/>
-                </a:solidFill>
-                <a:latin typeface="Aptos"/>
-                <a:cs typeface="Aptos"/>
-              </a:rPr>
-              <a:t>Цель работы</a:t>
-            </a:r>
-          </a:p>
-          <a:p>
-            <a:pPr algn="l"/>
-            <a:r>
-              <a:rPr lang="ru-RU" sz="1600" b="1">
-                <a:solidFill>
-                  <a:srgbClr val="18212B"/>
-                </a:solidFill>
-                <a:latin typeface="Aptos"/>
-                <a:cs typeface="Aptos"/>
-              </a:rPr>
-              <a:t/>
-            </a:r>
-          </a:p>
-          <a:p>
-            <a:pPr algn="l"/>
-            <a:r>
-              <a:rPr lang="ru-RU" sz="1600" b="1">
-                <a:solidFill>
-                  <a:srgbClr val="18212B"/>
-                </a:solidFill>
-                <a:latin typeface="Aptos"/>
-                <a:cs typeface="Aptos"/>
-              </a:rPr>
-              <a:t>Real-time интерфейс системы отслеживания задач, в котором WebSocket-соединения обслуживаются несколькими экземплярами app-api, а события об изменении сущностей доставляются клиентам независимо от узла подключения.</a:t>
-            </a:r>
-          </a:p>
-        </p:txBody>
-      </p:sp>
+      </p:pic>
       <p:sp>
         <p:nvSpPr>
           <p:cNvPr id="900" name="Shape 900"/>
@@ -2123,7 +2798,7 @@
                 <a:latin typeface="Aptos"/>
                 <a:cs typeface="Aptos"/>
               </a:rPr>
-              <a:t>Современный контекст</a:t>
+              <a:t>Целевой продукт: страница отчёта</a:t>
             </a:r>
           </a:p>
         </p:txBody>
@@ -2160,7 +2835,7 @@
                 <a:latin typeface="Aptos"/>
                 <a:cs typeface="Aptos"/>
               </a:rPr>
-              <a:t>Интерфейсы становятся событийными; AI-инструменты усиливают ожидание живой синхронизации</a:t>
+              <a:t>Основной рабочий экран: отчёт, баги, шаги воспроизведения, комментарии и участники</a:t>
             </a:r>
           </a:p>
         </p:txBody>
@@ -2173,10 +2848,10 @@
         </p:nvSpPr>
         <p:spPr>
           <a:xfrm>
-            <a:off x="685800" y="1508760"/>
-            <a:ext cx="3520440" cy="4343400"/>
-          </a:xfrm>
-          <a:prstGeom prst="roundRect">
+            <a:off x="1078992" y="1353312"/>
+            <a:ext cx="10003536" cy="5047488"/>
+          </a:xfrm>
+          <a:prstGeom prst="rect">
             <a:avLst/>
           </a:prstGeom>
           <a:solidFill>
@@ -2191,259 +2866,38 @@
         <p:txBody>
           <a:bodyPr wrap="square" lIns="177800" tIns="177800" rIns="177800" bIns="177800"/>
           <a:lstStyle/>
-          <a:p>
-            <a:pPr algn="l"/>
-            <a:r>
-              <a:rPr lang="ru-RU" sz="1400" b="0">
-                <a:solidFill>
-                  <a:srgbClr val="18212B"/>
-                </a:solidFill>
-                <a:latin typeface="Aptos"/>
-                <a:cs typeface="Aptos"/>
-              </a:rPr>
-              <a:t>Рост сложности продуктов</a:t>
-            </a:r>
-          </a:p>
-          <a:p>
-            <a:pPr algn="l"/>
-            <a:r>
-              <a:rPr lang="ru-RU" sz="1400" b="0">
-                <a:solidFill>
-                  <a:srgbClr val="18212B"/>
-                </a:solidFill>
-                <a:latin typeface="Aptos"/>
-                <a:cs typeface="Aptos"/>
-              </a:rPr>
-              <a:t/>
-            </a:r>
-          </a:p>
-          <a:p>
-            <a:pPr algn="l"/>
-            <a:r>
-              <a:rPr lang="ru-RU" sz="1400" b="0">
-                <a:solidFill>
-                  <a:srgbClr val="18212B"/>
-                </a:solidFill>
-                <a:latin typeface="Aptos"/>
-                <a:cs typeface="Aptos"/>
-              </a:rPr>
-              <a:t>Пользователь работает не с одной формой, а с отчётом, багами, комментариями, вложениями, статусами и участниками.</a:t>
-            </a:r>
-          </a:p>
-          <a:p>
-            <a:pPr algn="l"/>
-            <a:r>
-              <a:rPr lang="ru-RU" sz="1400" b="0">
-                <a:solidFill>
-                  <a:srgbClr val="18212B"/>
-                </a:solidFill>
-                <a:latin typeface="Aptos"/>
-                <a:cs typeface="Aptos"/>
-              </a:rPr>
-              <a:t/>
-            </a:r>
-          </a:p>
-          <a:p>
-            <a:pPr algn="l"/>
-            <a:r>
-              <a:rPr lang="ru-RU" sz="1400" b="0">
-                <a:solidFill>
-                  <a:srgbClr val="18212B"/>
-                </a:solidFill>
-                <a:latin typeface="Aptos"/>
-                <a:cs typeface="Aptos"/>
-              </a:rPr>
-              <a:t>Изменения должны становиться видимыми без ручного обновления страницы.</a:t>
-            </a:r>
-          </a:p>
-        </p:txBody>
-      </p:sp>
-      <p:sp>
-        <p:nvSpPr>
-          <p:cNvPr id="21" name="Shape 21"/>
-          <p:cNvSpPr txBox="1"/>
-          <p:nvPr/>
-        </p:nvSpPr>
-        <p:spPr>
-          <a:xfrm>
-            <a:off x="4389120" y="1508760"/>
-            <a:ext cx="3520440" cy="4343400"/>
-          </a:xfrm>
-          <a:prstGeom prst="roundRect">
-            <a:avLst/>
-          </a:prstGeom>
-          <a:solidFill>
-            <a:srgbClr val="FFF3D8"/>
-          </a:solidFill>
+          <a:p/>
+        </p:txBody>
+      </p:sp>
+      <p:pic>
+        <p:nvPicPr>
+          <p:cNvPr id="21" name="interface-report-page.png"/>
+          <p:cNvPicPr>
+            <a:picLocks noChangeAspect="1"/>
+          </p:cNvPicPr>
+          <p:nvPr/>
+        </p:nvPicPr>
+        <p:blipFill>
+          <a:blip r:embed="rId2"/>
+          <a:stretch>
+            <a:fillRect/>
+          </a:stretch>
+        </p:blipFill>
+        <p:spPr>
+          <a:xfrm>
+            <a:off x="1143000" y="1417320"/>
+            <a:ext cx="9875520" cy="4992624"/>
+          </a:xfrm>
+          <a:prstGeom prst="rect">
+            <a:avLst/>
+          </a:prstGeom>
           <a:ln w="12700">
             <a:solidFill>
-              <a:srgbClr val="C76F2E"/>
+              <a:srgbClr val="D7D2C7"/>
             </a:solidFill>
           </a:ln>
         </p:spPr>
-        <p:txBody>
-          <a:bodyPr wrap="square" lIns="177800" tIns="177800" rIns="177800" bIns="177800"/>
-          <a:lstStyle/>
-          <a:p>
-            <a:pPr algn="l"/>
-            <a:r>
-              <a:rPr lang="ru-RU" sz="1400" b="0">
-                <a:solidFill>
-                  <a:srgbClr val="18212B"/>
-                </a:solidFill>
-                <a:latin typeface="Aptos"/>
-                <a:cs typeface="Aptos"/>
-              </a:rPr>
-              <a:t>AI-ready сценарии</a:t>
-            </a:r>
-          </a:p>
-          <a:p>
-            <a:pPr algn="l"/>
-            <a:r>
-              <a:rPr lang="ru-RU" sz="1400" b="0">
-                <a:solidFill>
-                  <a:srgbClr val="18212B"/>
-                </a:solidFill>
-                <a:latin typeface="Aptos"/>
-                <a:cs typeface="Aptos"/>
-              </a:rPr>
-              <a:t/>
-            </a:r>
-          </a:p>
-          <a:p>
-            <a:pPr algn="l"/>
-            <a:r>
-              <a:rPr lang="ru-RU" sz="1400" b="0">
-                <a:solidFill>
-                  <a:srgbClr val="18212B"/>
-                </a:solidFill>
-                <a:latin typeface="Aptos"/>
-                <a:cs typeface="Aptos"/>
-              </a:rPr>
-              <a:t>Фоновый сервис или ассистент может предложить исполнителя, дополнить описание, создать комментарий или изменить статус.</a:t>
-            </a:r>
-          </a:p>
-          <a:p>
-            <a:pPr algn="l"/>
-            <a:r>
-              <a:rPr lang="ru-RU" sz="1400" b="0">
-                <a:solidFill>
-                  <a:srgbClr val="18212B"/>
-                </a:solidFill>
-                <a:latin typeface="Aptos"/>
-                <a:cs typeface="Aptos"/>
-              </a:rPr>
-              <a:t/>
-            </a:r>
-          </a:p>
-          <a:p>
-            <a:pPr algn="l"/>
-            <a:r>
-              <a:rPr lang="ru-RU" sz="1400" b="0">
-                <a:solidFill>
-                  <a:srgbClr val="18212B"/>
-                </a:solidFill>
-                <a:latin typeface="Aptos"/>
-                <a:cs typeface="Aptos"/>
-              </a:rPr>
-              <a:t>В ВКР это контекст актуальности, а не заявление о готовой AI-функции.</a:t>
-            </a:r>
-          </a:p>
-        </p:txBody>
-      </p:sp>
-      <p:sp>
-        <p:nvSpPr>
-          <p:cNvPr id="22" name="Shape 22"/>
-          <p:cNvSpPr txBox="1"/>
-          <p:nvPr/>
-        </p:nvSpPr>
-        <p:spPr>
-          <a:xfrm>
-            <a:off x="8092440" y="1508760"/>
-            <a:ext cx="3520440" cy="4343400"/>
-          </a:xfrm>
-          <a:prstGeom prst="roundRect">
-            <a:avLst/>
-          </a:prstGeom>
-          <a:solidFill>
-            <a:srgbClr val="E8F3F1"/>
-          </a:solidFill>
-          <a:ln w="12700">
-            <a:solidFill>
-              <a:srgbClr val="0B6E69"/>
-            </a:solidFill>
-          </a:ln>
-        </p:spPr>
-        <p:txBody>
-          <a:bodyPr wrap="square" lIns="177800" tIns="177800" rIns="177800" bIns="177800"/>
-          <a:lstStyle/>
-          <a:p>
-            <a:pPr algn="l"/>
-            <a:r>
-              <a:rPr lang="ru-RU" sz="1400" b="1">
-                <a:solidFill>
-                  <a:srgbClr val="18212B"/>
-                </a:solidFill>
-                <a:latin typeface="Aptos"/>
-                <a:cs typeface="Aptos"/>
-              </a:rPr>
-              <a:t>REST + real-time</a:t>
-            </a:r>
-          </a:p>
-          <a:p>
-            <a:pPr algn="l"/>
-            <a:r>
-              <a:rPr lang="ru-RU" sz="1400" b="1">
-                <a:solidFill>
-                  <a:srgbClr val="18212B"/>
-                </a:solidFill>
-                <a:latin typeface="Aptos"/>
-                <a:cs typeface="Aptos"/>
-              </a:rPr>
-              <a:t/>
-            </a:r>
-          </a:p>
-          <a:p>
-            <a:pPr algn="l"/>
-            <a:r>
-              <a:rPr lang="ru-RU" sz="1400" b="1">
-                <a:solidFill>
-                  <a:srgbClr val="18212B"/>
-                </a:solidFill>
-                <a:latin typeface="Aptos"/>
-                <a:cs typeface="Aptos"/>
-              </a:rPr>
-              <a:t>HTTP-запрос фиксирует изменение состояния.</a:t>
-            </a:r>
-          </a:p>
-          <a:p>
-            <a:pPr algn="l"/>
-            <a:r>
-              <a:rPr lang="ru-RU" sz="1400" b="1">
-                <a:solidFill>
-                  <a:srgbClr val="18212B"/>
-                </a:solidFill>
-                <a:latin typeface="Aptos"/>
-                <a:cs typeface="Aptos"/>
-              </a:rPr>
-              <a:t/>
-            </a:r>
-          </a:p>
-          <a:p>
-            <a:pPr algn="l"/>
-            <a:r>
-              <a:rPr lang="ru-RU" sz="1400" b="1">
-                <a:solidFill>
-                  <a:srgbClr val="18212B"/>
-                </a:solidFill>
-                <a:latin typeface="Aptos"/>
-                <a:cs typeface="Aptos"/>
-              </a:rPr>
-              <a:t>SignalR-событие распространяет изменение активным участникам, включая клиентов на других backend-узлах.</a:t>
-            </a:r>
-          </a:p>
-        </p:txBody>
-      </p:sp>
+      </p:pic>
       <p:sp>
         <p:nvSpPr>
           <p:cNvPr id="900" name="Shape 900"/>
@@ -2546,7 +3000,7 @@
                 <a:latin typeface="Aptos"/>
                 <a:cs typeface="Aptos"/>
               </a:rPr>
-              <a:t>Предметная область</a:t>
+              <a:t>Проблема и цель</a:t>
             </a:r>
           </a:p>
         </p:txBody>
@@ -2583,7 +3037,7 @@
                 <a:latin typeface="Aptos"/>
                 <a:cs typeface="Aptos"/>
               </a:rPr>
-              <a:t>Real-time связан с сущностями продукта, а не с абстрактным WebSocket-демо</a:t>
+              <a:t>Single-node SignalR ограничивает горизонтальное масштабирование</a:t>
             </a:r>
           </a:p>
         </p:txBody>
@@ -2597,7 +3051,126 @@
         <p:spPr>
           <a:xfrm>
             <a:off x="685800" y="1508760"/>
-            <a:ext cx="10972800" cy="685800"/>
+            <a:ext cx="5349240" cy="4206240"/>
+          </a:xfrm>
+          <a:prstGeom prst="roundRect">
+            <a:avLst/>
+          </a:prstGeom>
+          <a:solidFill>
+            <a:srgbClr val="FFFFFF"/>
+          </a:solidFill>
+          <a:ln w="12700">
+            <a:solidFill>
+              <a:srgbClr val="D7D2C7"/>
+            </a:solidFill>
+          </a:ln>
+        </p:spPr>
+        <p:txBody>
+          <a:bodyPr wrap="square" lIns="177800" tIns="177800" rIns="177800" bIns="177800"/>
+          <a:lstStyle/>
+          <a:p>
+            <a:pPr algn="l"/>
+            <a:r>
+              <a:rPr lang="ru-RU" sz="1600" b="0">
+                <a:solidFill>
+                  <a:srgbClr val="18212B"/>
+                </a:solidFill>
+                <a:latin typeface="Aptos"/>
+                <a:cs typeface="Aptos"/>
+              </a:rPr>
+              <a:t>Проблема</a:t>
+            </a:r>
+          </a:p>
+          <a:p>
+            <a:pPr algn="l"/>
+            <a:r>
+              <a:rPr lang="ru-RU" sz="1600" b="0">
+                <a:solidFill>
+                  <a:srgbClr val="18212B"/>
+                </a:solidFill>
+                <a:latin typeface="Aptos"/>
+                <a:cs typeface="Aptos"/>
+              </a:rPr>
+              <a:t/>
+            </a:r>
+          </a:p>
+          <a:p>
+            <a:pPr algn="l"/>
+            <a:r>
+              <a:rPr lang="ru-RU" sz="1600" b="0">
+                <a:solidFill>
+                  <a:srgbClr val="18212B"/>
+                </a:solidFill>
+                <a:latin typeface="Aptos"/>
+                <a:cs typeface="Aptos"/>
+              </a:rPr>
+              <a:t>Сведения о подключениях и группах SignalR хранятся в памяти процесса.</a:t>
+            </a:r>
+          </a:p>
+          <a:p>
+            <a:pPr algn="l"/>
+            <a:r>
+              <a:rPr lang="ru-RU" sz="1600" b="0">
+                <a:solidFill>
+                  <a:srgbClr val="18212B"/>
+                </a:solidFill>
+                <a:latin typeface="Aptos"/>
+                <a:cs typeface="Aptos"/>
+              </a:rPr>
+              <a:t/>
+            </a:r>
+          </a:p>
+          <a:p>
+            <a:pPr algn="l"/>
+            <a:r>
+              <a:rPr lang="ru-RU" sz="1600" b="0">
+                <a:solidFill>
+                  <a:srgbClr val="18212B"/>
+                </a:solidFill>
+                <a:latin typeface="Aptos"/>
+                <a:cs typeface="Aptos"/>
+              </a:rPr>
+              <a:t>При нескольких экземплярах backend событие, созданное на одном узле, не доходит до клиента, подключенного к другому узлу.</a:t>
+            </a:r>
+          </a:p>
+          <a:p>
+            <a:pPr algn="l"/>
+            <a:r>
+              <a:rPr lang="ru-RU" sz="1600" b="0">
+                <a:solidFill>
+                  <a:srgbClr val="18212B"/>
+                </a:solidFill>
+                <a:latin typeface="Aptos"/>
+                <a:cs typeface="Aptos"/>
+              </a:rPr>
+              <a:t/>
+            </a:r>
+          </a:p>
+          <a:p>
+            <a:pPr algn="l"/>
+            <a:r>
+              <a:rPr lang="ru-RU" sz="1600" b="0">
+                <a:solidFill>
+                  <a:srgbClr val="18212B"/>
+                </a:solidFill>
+                <a:latin typeface="Aptos"/>
+                <a:cs typeface="Aptos"/>
+              </a:rPr>
+              <a:t>Real-time пространство фрагментируется на независимые острова.</a:t>
+            </a:r>
+          </a:p>
+        </p:txBody>
+      </p:sp>
+      <p:sp>
+        <p:nvSpPr>
+          <p:cNvPr id="21" name="Shape 21"/>
+          <p:cNvSpPr txBox="1"/>
+          <p:nvPr/>
+        </p:nvSpPr>
+        <p:spPr>
+          <a:xfrm>
+            <a:off x="6172200" y="1508760"/>
+            <a:ext cx="5349240" cy="4206240"/>
           </a:xfrm>
           <a:prstGeom prst="roundRect">
             <a:avLst/>
@@ -2615,7 +3188,7 @@
           <a:bodyPr wrap="square" lIns="177800" tIns="177800" rIns="177800" bIns="177800"/>
           <a:lstStyle/>
           <a:p>
-            <a:pPr algn="ctr"/>
+            <a:pPr algn="l"/>
             <a:r>
               <a:rPr lang="ru-RU" sz="1600" b="1">
                 <a:solidFill>
@@ -2624,54 +3197,13 @@
                 <a:latin typeface="Aptos"/>
                 <a:cs typeface="Aptos"/>
               </a:rPr>
-              <a:t>Система отслеживания задач: отчёты · баги · комментарии · вложения · ссылки · шаги воспроизведения · статусы</a:t>
-            </a:r>
-          </a:p>
-        </p:txBody>
-      </p:sp>
-      <p:sp>
-        <p:nvSpPr>
-          <p:cNvPr id="21" name="Shape 21"/>
-          <p:cNvSpPr txBox="1"/>
-          <p:nvPr/>
-        </p:nvSpPr>
-        <p:spPr>
-          <a:xfrm>
-            <a:off x="685800" y="2468880"/>
-            <a:ext cx="3520440" cy="2926080"/>
-          </a:xfrm>
-          <a:prstGeom prst="roundRect">
-            <a:avLst/>
-          </a:prstGeom>
-          <a:solidFill>
-            <a:srgbClr val="FFFFFF"/>
-          </a:solidFill>
-          <a:ln w="12700">
-            <a:solidFill>
-              <a:srgbClr val="D7D2C7"/>
-            </a:solidFill>
-          </a:ln>
-        </p:spPr>
-        <p:txBody>
-          <a:bodyPr wrap="square" lIns="177800" tIns="177800" rIns="177800" bIns="177800"/>
-          <a:lstStyle/>
-          <a:p>
-            <a:pPr algn="l"/>
-            <a:r>
-              <a:rPr lang="ru-RU" sz="1400" b="1">
-                <a:solidFill>
-                  <a:srgbClr val="18212B"/>
-                </a:solidFill>
-                <a:latin typeface="Aptos"/>
-                <a:cs typeface="Aptos"/>
-              </a:rPr>
-              <a:t>Открытие отчёта</a:t>
-            </a:r>
-          </a:p>
-          <a:p>
-            <a:pPr algn="l"/>
-            <a:r>
-              <a:rPr lang="ru-RU" sz="1400" b="1">
+              <a:t>Цель работы</a:t>
+            </a:r>
+          </a:p>
+          <a:p>
+            <a:pPr algn="l"/>
+            <a:r>
+              <a:rPr lang="ru-RU" sz="1600" b="1">
                 <a:solidFill>
                   <a:srgbClr val="18212B"/>
                 </a:solidFill>
@@ -2684,265 +3216,14 @@
           <a:p>
             <a:pPr algn="l"/>
             <a:r>
-              <a:rPr lang="ru-RU" sz="1400" b="1">
-                <a:solidFill>
-                  <a:srgbClr val="18212B"/>
-                </a:solidFill>
-                <a:latin typeface="Aptos"/>
-                <a:cs typeface="Aptos"/>
-              </a:rPr>
-              <a:t>JoinReportGroupAsync</a:t>
-            </a:r>
-          </a:p>
-          <a:p>
-            <a:pPr algn="l"/>
-            <a:r>
-              <a:rPr lang="ru-RU" sz="1400" b="1">
-                <a:solidFill>
-                  <a:srgbClr val="18212B"/>
-                </a:solidFill>
-                <a:latin typeface="Aptos"/>
-                <a:cs typeface="Aptos"/>
-              </a:rPr>
-              <a:t/>
-            </a:r>
-          </a:p>
-          <a:p>
-            <a:pPr algn="l"/>
-            <a:r>
-              <a:rPr lang="ru-RU" sz="1400" b="1">
-                <a:solidFill>
-                  <a:srgbClr val="18212B"/>
-                </a:solidFill>
-                <a:latin typeface="Aptos"/>
-                <a:cs typeface="Aptos"/>
-              </a:rPr>
-              <a:t>Клиент вступает в группу отчёта и получает только релевантные события.</a:t>
-            </a:r>
-          </a:p>
-        </p:txBody>
-      </p:sp>
-      <p:sp>
-        <p:nvSpPr>
-          <p:cNvPr id="22" name="Shape 22"/>
-          <p:cNvSpPr txBox="1"/>
-          <p:nvPr/>
-        </p:nvSpPr>
-        <p:spPr>
-          <a:xfrm>
-            <a:off x="4389120" y="2468880"/>
-            <a:ext cx="3520440" cy="2926080"/>
-          </a:xfrm>
-          <a:prstGeom prst="roundRect">
-            <a:avLst/>
-          </a:prstGeom>
-          <a:solidFill>
-            <a:srgbClr val="FFFFFF"/>
-          </a:solidFill>
-          <a:ln w="12700">
-            <a:solidFill>
-              <a:srgbClr val="D7D2C7"/>
-            </a:solidFill>
-          </a:ln>
-        </p:spPr>
-        <p:txBody>
-          <a:bodyPr wrap="square" lIns="177800" tIns="177800" rIns="177800" bIns="177800"/>
-          <a:lstStyle/>
-          <a:p>
-            <a:pPr algn="l"/>
-            <a:r>
-              <a:rPr lang="ru-RU" sz="1400" b="1">
-                <a:solidFill>
-                  <a:srgbClr val="18212B"/>
-                </a:solidFill>
-                <a:latin typeface="Aptos"/>
-                <a:cs typeface="Aptos"/>
-              </a:rPr>
-              <a:t>Изменение сущностей</a:t>
-            </a:r>
-          </a:p>
-          <a:p>
-            <a:pPr algn="l"/>
-            <a:r>
-              <a:rPr lang="ru-RU" sz="1400" b="1">
-                <a:solidFill>
-                  <a:srgbClr val="18212B"/>
-                </a:solidFill>
-                <a:latin typeface="Aptos"/>
-                <a:cs typeface="Aptos"/>
-              </a:rPr>
-              <a:t/>
-            </a:r>
-          </a:p>
-          <a:p>
-            <a:pPr algn="l"/>
-            <a:r>
-              <a:rPr lang="ru-RU" sz="1400" b="1">
-                <a:solidFill>
-                  <a:srgbClr val="18212B"/>
-                </a:solidFill>
-                <a:latin typeface="Aptos"/>
-                <a:cs typeface="Aptos"/>
-              </a:rPr>
-              <a:t>ReceiveReportPatch</a:t>
-            </a:r>
-          </a:p>
-          <a:p>
-            <a:pPr algn="l"/>
-            <a:r>
-              <a:rPr lang="ru-RU" sz="1400" b="1">
-                <a:solidFill>
-                  <a:srgbClr val="18212B"/>
-                </a:solidFill>
-                <a:latin typeface="Aptos"/>
-                <a:cs typeface="Aptos"/>
-              </a:rPr>
-              <a:t>ReceiveBugCreate</a:t>
-            </a:r>
-          </a:p>
-          <a:p>
-            <a:pPr algn="l"/>
-            <a:r>
-              <a:rPr lang="ru-RU" sz="1400" b="1">
-                <a:solidFill>
-                  <a:srgbClr val="18212B"/>
-                </a:solidFill>
-                <a:latin typeface="Aptos"/>
-                <a:cs typeface="Aptos"/>
-              </a:rPr>
-              <a:t>ReceiveCommentUpdate</a:t>
-            </a:r>
-          </a:p>
-          <a:p>
-            <a:pPr algn="l"/>
-            <a:r>
-              <a:rPr lang="ru-RU" sz="1400" b="1">
-                <a:solidFill>
-                  <a:srgbClr val="18212B"/>
-                </a:solidFill>
-                <a:latin typeface="Aptos"/>
-                <a:cs typeface="Aptos"/>
-              </a:rPr>
-              <a:t/>
-            </a:r>
-          </a:p>
-          <a:p>
-            <a:pPr algn="l"/>
-            <a:r>
-              <a:rPr lang="ru-RU" sz="1400" b="1">
-                <a:solidFill>
-                  <a:srgbClr val="18212B"/>
-                </a:solidFill>
-                <a:latin typeface="Aptos"/>
-                <a:cs typeface="Aptos"/>
-              </a:rPr>
-              <a:t>События применяются к состоянию интерфейса.</a:t>
-            </a:r>
-          </a:p>
-        </p:txBody>
-      </p:sp>
-      <p:sp>
-        <p:nvSpPr>
-          <p:cNvPr id="23" name="Shape 23"/>
-          <p:cNvSpPr txBox="1"/>
-          <p:nvPr/>
-        </p:nvSpPr>
-        <p:spPr>
-          <a:xfrm>
-            <a:off x="8092440" y="2468880"/>
-            <a:ext cx="3520440" cy="2926080"/>
-          </a:xfrm>
-          <a:prstGeom prst="roundRect">
-            <a:avLst/>
-          </a:prstGeom>
-          <a:solidFill>
-            <a:srgbClr val="FFFFFF"/>
-          </a:solidFill>
-          <a:ln w="12700">
-            <a:solidFill>
-              <a:srgbClr val="D7D2C7"/>
-            </a:solidFill>
-          </a:ln>
-        </p:spPr>
-        <p:txBody>
-          <a:bodyPr wrap="square" lIns="177800" tIns="177800" rIns="177800" bIns="177800"/>
-          <a:lstStyle/>
-          <a:p>
-            <a:pPr algn="l"/>
-            <a:r>
-              <a:rPr lang="ru-RU" sz="1400" b="1">
-                <a:solidFill>
-                  <a:srgbClr val="18212B"/>
-                </a:solidFill>
-                <a:latin typeface="Aptos"/>
-                <a:cs typeface="Aptos"/>
-              </a:rPr>
-              <a:t>Восстановление</a:t>
-            </a:r>
-          </a:p>
-          <a:p>
-            <a:pPr algn="l"/>
-            <a:r>
-              <a:rPr lang="ru-RU" sz="1400" b="1">
-                <a:solidFill>
-                  <a:srgbClr val="18212B"/>
-                </a:solidFill>
-                <a:latin typeface="Aptos"/>
-                <a:cs typeface="Aptos"/>
-              </a:rPr>
-              <a:t/>
-            </a:r>
-          </a:p>
-          <a:p>
-            <a:pPr algn="l"/>
-            <a:r>
-              <a:rPr lang="ru-RU" sz="1400" b="1">
-                <a:solidFill>
-                  <a:srgbClr val="18212B"/>
-                </a:solidFill>
-                <a:latin typeface="Aptos"/>
-                <a:cs typeface="Aptos"/>
-              </a:rPr>
-              <a:t>onreconnected</a:t>
-            </a:r>
-          </a:p>
-          <a:p>
-            <a:pPr algn="l"/>
-            <a:r>
-              <a:rPr lang="ru-RU" sz="1400" b="1">
-                <a:solidFill>
-                  <a:srgbClr val="18212B"/>
-                </a:solidFill>
-                <a:latin typeface="Aptos"/>
-                <a:cs typeface="Aptos"/>
-              </a:rPr>
-              <a:t>JoinReportGroupAsync</a:t>
-            </a:r>
-          </a:p>
-          <a:p>
-            <a:pPr algn="l"/>
-            <a:r>
-              <a:rPr lang="ru-RU" sz="1400" b="1">
-                <a:solidFill>
-                  <a:srgbClr val="18212B"/>
-                </a:solidFill>
-                <a:latin typeface="Aptos"/>
-                <a:cs typeface="Aptos"/>
-              </a:rPr>
-              <a:t/>
-            </a:r>
-          </a:p>
-          <a:p>
-            <a:pPr algn="l"/>
-            <a:r>
-              <a:rPr lang="ru-RU" sz="1400" b="1">
-                <a:solidFill>
-                  <a:srgbClr val="18212B"/>
-                </a:solidFill>
-                <a:latin typeface="Aptos"/>
-                <a:cs typeface="Aptos"/>
-              </a:rPr>
-              <a:t>После reconnect клиент повторно восстанавливает подписку на текущий отчёт.</a:t>
+              <a:rPr lang="ru-RU" sz="1600" b="1">
+                <a:solidFill>
+                  <a:srgbClr val="18212B"/>
+                </a:solidFill>
+                <a:latin typeface="Aptos"/>
+                <a:cs typeface="Aptos"/>
+              </a:rPr>
+              <a:t>Real-time интерфейс системы отслеживания задач, в котором WebSocket-соединения обслуживаются несколькими экземплярами app-api, а события об изменении сущностей доставляются клиентам независимо от узла подключения.</a:t>
             </a:r>
           </a:p>
         </p:txBody>
@@ -3049,7 +3330,7 @@
                 <a:latin typeface="Aptos"/>
                 <a:cs typeface="Aptos"/>
               </a:rPr>
-              <a:t>Анализ подходов к масштабированию</a:t>
+              <a:t>Современный контекст</a:t>
             </a:r>
           </a:p>
         </p:txBody>
@@ -3086,7 +3367,7 @@
                 <a:latin typeface="Aptos"/>
                 <a:cs typeface="Aptos"/>
               </a:rPr>
-              <a:t>Шесть рассмотренных вариантов; для реализации выбран подход 4</a:t>
+              <a:t>Интерфейсы становятся событийными; AI-инструменты усиливают ожидание живой синхронизации</a:t>
             </a:r>
           </a:p>
         </p:txBody>
@@ -3099,8 +3380,8 @@
         </p:nvSpPr>
         <p:spPr>
           <a:xfrm>
-            <a:off x="685800" y="1554480"/>
-            <a:ext cx="3657600" cy="1325880"/>
+            <a:off x="685800" y="1508760"/>
+            <a:ext cx="3520440" cy="4343400"/>
           </a:xfrm>
           <a:prstGeom prst="roundRect">
             <a:avLst/>
@@ -3120,27 +3401,66 @@
           <a:p>
             <a:pPr algn="l"/>
             <a:r>
-              <a:rPr lang="ru-RU" sz="1300" b="0">
-                <a:solidFill>
-                  <a:srgbClr val="18212B"/>
-                </a:solidFill>
-                <a:latin typeface="Aptos"/>
-                <a:cs typeface="Aptos"/>
-              </a:rPr>
-              <a:t>Один экземпляр backend</a:t>
-            </a:r>
-          </a:p>
-          <a:p>
-            <a:pPr algn="l"/>
-            <a:r>
-              <a:rPr lang="ru-RU" sz="1300" b="0">
-                <a:solidFill>
-                  <a:srgbClr val="18212B"/>
-                </a:solidFill>
-                <a:latin typeface="Aptos"/>
-                <a:cs typeface="Aptos"/>
-              </a:rPr>
-              <a:t>Нет масштабирования; один узел — единственная точка отказа</a:t>
+              <a:rPr lang="ru-RU" sz="1400" b="0">
+                <a:solidFill>
+                  <a:srgbClr val="18212B"/>
+                </a:solidFill>
+                <a:latin typeface="Aptos"/>
+                <a:cs typeface="Aptos"/>
+              </a:rPr>
+              <a:t>Рост сложности продуктов</a:t>
+            </a:r>
+          </a:p>
+          <a:p>
+            <a:pPr algn="l"/>
+            <a:r>
+              <a:rPr lang="ru-RU" sz="1400" b="0">
+                <a:solidFill>
+                  <a:srgbClr val="18212B"/>
+                </a:solidFill>
+                <a:latin typeface="Aptos"/>
+                <a:cs typeface="Aptos"/>
+              </a:rPr>
+              <a:t/>
+            </a:r>
+          </a:p>
+          <a:p>
+            <a:pPr algn="l"/>
+            <a:r>
+              <a:rPr lang="ru-RU" sz="1400" b="0">
+                <a:solidFill>
+                  <a:srgbClr val="18212B"/>
+                </a:solidFill>
+                <a:latin typeface="Aptos"/>
+                <a:cs typeface="Aptos"/>
+              </a:rPr>
+              <a:t>Пользователь работает не с одной формой, а с отчётом, багами, комментариями, вложениями, статусами и участниками.</a:t>
+            </a:r>
+          </a:p>
+          <a:p>
+            <a:pPr algn="l"/>
+            <a:r>
+              <a:rPr lang="ru-RU" sz="1400" b="0">
+                <a:solidFill>
+                  <a:srgbClr val="18212B"/>
+                </a:solidFill>
+                <a:latin typeface="Aptos"/>
+                <a:cs typeface="Aptos"/>
+              </a:rPr>
+              <a:t/>
+            </a:r>
+          </a:p>
+          <a:p>
+            <a:pPr algn="l"/>
+            <a:r>
+              <a:rPr lang="ru-RU" sz="1400" b="0">
+                <a:solidFill>
+                  <a:srgbClr val="18212B"/>
+                </a:solidFill>
+                <a:latin typeface="Aptos"/>
+                <a:cs typeface="Aptos"/>
+              </a:rPr>
+              <a:t>Изменения должны становиться видимыми без ручного обновления страницы.</a:t>
             </a:r>
           </a:p>
         </p:txBody>
@@ -3153,18 +3473,18 @@
         </p:nvSpPr>
         <p:spPr>
           <a:xfrm>
-            <a:off x="4434840" y="1554480"/>
-            <a:ext cx="3657600" cy="1325880"/>
+            <a:off x="4389120" y="1508760"/>
+            <a:ext cx="3520440" cy="4343400"/>
           </a:xfrm>
           <a:prstGeom prst="roundRect">
             <a:avLst/>
           </a:prstGeom>
           <a:solidFill>
-            <a:srgbClr val="FFFFFF"/>
+            <a:srgbClr val="FFF3D8"/>
           </a:solidFill>
           <a:ln w="12700">
             <a:solidFill>
-              <a:srgbClr val="D7D2C7"/>
+              <a:srgbClr val="C76F2E"/>
             </a:solidFill>
           </a:ln>
         </p:spPr>
@@ -3174,27 +3494,66 @@
           <a:p>
             <a:pPr algn="l"/>
             <a:r>
-              <a:rPr lang="ru-RU" sz="1300" b="0">
-                <a:solidFill>
-                  <a:srgbClr val="18212B"/>
-                </a:solidFill>
-                <a:latin typeface="Aptos"/>
-                <a:cs typeface="Aptos"/>
-              </a:rPr>
-              <a:t>Несколько экземпляров без общего канала</a:t>
-            </a:r>
-          </a:p>
-          <a:p>
-            <a:pPr algn="l"/>
-            <a:r>
-              <a:rPr lang="ru-RU" sz="1300" b="0">
-                <a:solidFill>
-                  <a:srgbClr val="18212B"/>
-                </a:solidFill>
-                <a:latin typeface="Aptos"/>
-                <a:cs typeface="Aptos"/>
-              </a:rPr>
-              <a:t>События не доходят до клиентов, подключённых к другим узлам</a:t>
+              <a:rPr lang="ru-RU" sz="1400" b="0">
+                <a:solidFill>
+                  <a:srgbClr val="18212B"/>
+                </a:solidFill>
+                <a:latin typeface="Aptos"/>
+                <a:cs typeface="Aptos"/>
+              </a:rPr>
+              <a:t>AI-ready сценарии</a:t>
+            </a:r>
+          </a:p>
+          <a:p>
+            <a:pPr algn="l"/>
+            <a:r>
+              <a:rPr lang="ru-RU" sz="1400" b="0">
+                <a:solidFill>
+                  <a:srgbClr val="18212B"/>
+                </a:solidFill>
+                <a:latin typeface="Aptos"/>
+                <a:cs typeface="Aptos"/>
+              </a:rPr>
+              <a:t/>
+            </a:r>
+          </a:p>
+          <a:p>
+            <a:pPr algn="l"/>
+            <a:r>
+              <a:rPr lang="ru-RU" sz="1400" b="0">
+                <a:solidFill>
+                  <a:srgbClr val="18212B"/>
+                </a:solidFill>
+                <a:latin typeface="Aptos"/>
+                <a:cs typeface="Aptos"/>
+              </a:rPr>
+              <a:t>Фоновый сервис или ассистент может предложить исполнителя, дополнить описание, создать комментарий или изменить статус.</a:t>
+            </a:r>
+          </a:p>
+          <a:p>
+            <a:pPr algn="l"/>
+            <a:r>
+              <a:rPr lang="ru-RU" sz="1400" b="0">
+                <a:solidFill>
+                  <a:srgbClr val="18212B"/>
+                </a:solidFill>
+                <a:latin typeface="Aptos"/>
+                <a:cs typeface="Aptos"/>
+              </a:rPr>
+              <a:t/>
+            </a:r>
+          </a:p>
+          <a:p>
+            <a:pPr algn="l"/>
+            <a:r>
+              <a:rPr lang="ru-RU" sz="1400" b="0">
+                <a:solidFill>
+                  <a:srgbClr val="18212B"/>
+                </a:solidFill>
+                <a:latin typeface="Aptos"/>
+                <a:cs typeface="Aptos"/>
+              </a:rPr>
+              <a:t>В ВКР это контекст актуальности, а не заявление о готовой AI-функции.</a:t>
             </a:r>
           </a:p>
         </p:txBody>
@@ -3207,170 +3566,8 @@
         </p:nvSpPr>
         <p:spPr>
           <a:xfrm>
-            <a:off x="8183880" y="1554480"/>
-            <a:ext cx="3657600" cy="1325880"/>
-          </a:xfrm>
-          <a:prstGeom prst="roundRect">
-            <a:avLst/>
-          </a:prstGeom>
-          <a:solidFill>
-            <a:srgbClr val="FFFFFF"/>
-          </a:solidFill>
-          <a:ln w="12700">
-            <a:solidFill>
-              <a:srgbClr val="D7D2C7"/>
-            </a:solidFill>
-          </a:ln>
-        </p:spPr>
-        <p:txBody>
-          <a:bodyPr wrap="square" lIns="177800" tIns="177800" rIns="177800" bIns="177800"/>
-          <a:lstStyle/>
-          <a:p>
-            <a:pPr algn="l"/>
-            <a:r>
-              <a:rPr lang="ru-RU" sz="1300" b="0">
-                <a:solidFill>
-                  <a:srgbClr val="18212B"/>
-                </a:solidFill>
-                <a:latin typeface="Aptos"/>
-                <a:cs typeface="Aptos"/>
-              </a:rPr>
-              <a:t>Привязка клиента к узлу (sticky)</a:t>
-            </a:r>
-          </a:p>
-          <a:p>
-            <a:pPr algn="l"/>
-            <a:r>
-              <a:rPr lang="ru-RU" sz="1300" b="0">
-                <a:solidFill>
-                  <a:srgbClr val="18212B"/>
-                </a:solidFill>
-                <a:latin typeface="Aptos"/>
-                <a:cs typeface="Aptos"/>
-              </a:rPr>
-              <a:t>Клиент остаётся на одном узле, но события на другие не приходят</a:t>
-            </a:r>
-          </a:p>
-        </p:txBody>
-      </p:sp>
-      <p:sp>
-        <p:nvSpPr>
-          <p:cNvPr id="23" name="Shape 23"/>
-          <p:cNvSpPr txBox="1"/>
-          <p:nvPr/>
-        </p:nvSpPr>
-        <p:spPr>
-          <a:xfrm>
-            <a:off x="685800" y="3017520"/>
-            <a:ext cx="3657600" cy="1325880"/>
-          </a:xfrm>
-          <a:prstGeom prst="roundRect">
-            <a:avLst/>
-          </a:prstGeom>
-          <a:solidFill>
-            <a:srgbClr val="FFFFFF"/>
-          </a:solidFill>
-          <a:ln w="12700">
-            <a:solidFill>
-              <a:srgbClr val="D7D2C7"/>
-            </a:solidFill>
-          </a:ln>
-        </p:spPr>
-        <p:txBody>
-          <a:bodyPr wrap="square" lIns="177800" tIns="177800" rIns="177800" bIns="177800"/>
-          <a:lstStyle/>
-          <a:p>
-            <a:pPr algn="l"/>
-            <a:r>
-              <a:rPr lang="ru-RU" sz="1300" b="0">
-                <a:solidFill>
-                  <a:srgbClr val="18212B"/>
-                </a:solidFill>
-                <a:latin typeface="Aptos"/>
-                <a:cs typeface="Aptos"/>
-              </a:rPr>
-              <a:t>Внешняя шина событий</a:t>
-            </a:r>
-          </a:p>
-          <a:p>
-            <a:pPr algn="l"/>
-            <a:r>
-              <a:rPr lang="ru-RU" sz="1300" b="0">
-                <a:solidFill>
-                  <a:srgbClr val="18212B"/>
-                </a:solidFill>
-                <a:latin typeface="Aptos"/>
-                <a:cs typeface="Aptos"/>
-              </a:rPr>
-              <a:t>Доставка между узлами есть, но требуется отдельная схема событий</a:t>
-            </a:r>
-          </a:p>
-        </p:txBody>
-      </p:sp>
-      <p:sp>
-        <p:nvSpPr>
-          <p:cNvPr id="24" name="Shape 24"/>
-          <p:cNvSpPr txBox="1"/>
-          <p:nvPr/>
-        </p:nvSpPr>
-        <p:spPr>
-          <a:xfrm>
-            <a:off x="4434840" y="3017520"/>
-            <a:ext cx="3657600" cy="1325880"/>
-          </a:xfrm>
-          <a:prstGeom prst="roundRect">
-            <a:avLst/>
-          </a:prstGeom>
-          <a:solidFill>
-            <a:srgbClr val="FFFFFF"/>
-          </a:solidFill>
-          <a:ln w="12700">
-            <a:solidFill>
-              <a:srgbClr val="D7D2C7"/>
-            </a:solidFill>
-          </a:ln>
-        </p:spPr>
-        <p:txBody>
-          <a:bodyPr wrap="square" lIns="177800" tIns="177800" rIns="177800" bIns="177800"/>
-          <a:lstStyle/>
-          <a:p>
-            <a:pPr algn="l"/>
-            <a:r>
-              <a:rPr lang="ru-RU" sz="1300" b="0">
-                <a:solidFill>
-                  <a:srgbClr val="18212B"/>
-                </a:solidFill>
-                <a:latin typeface="Aptos"/>
-                <a:cs typeface="Aptos"/>
-              </a:rPr>
-              <a:t>Облачный real-time сервис</a:t>
-            </a:r>
-          </a:p>
-          <a:p>
-            <a:pPr algn="l"/>
-            <a:r>
-              <a:rPr lang="ru-RU" sz="1300" b="0">
-                <a:solidFill>
-                  <a:srgbClr val="18212B"/>
-                </a:solidFill>
-                <a:latin typeface="Aptos"/>
-                <a:cs typeface="Aptos"/>
-              </a:rPr>
-              <a:t>Готовое решение, но снижает контроль над собственным контуром</a:t>
-            </a:r>
-          </a:p>
-        </p:txBody>
-      </p:sp>
-      <p:sp>
-        <p:nvSpPr>
-          <p:cNvPr id="25" name="Shape 25"/>
-          <p:cNvSpPr txBox="1"/>
-          <p:nvPr/>
-        </p:nvSpPr>
-        <p:spPr>
-          <a:xfrm>
-            <a:off x="8183880" y="3017520"/>
-            <a:ext cx="3657600" cy="1325880"/>
+            <a:off x="8092440" y="1508760"/>
+            <a:ext cx="3520440" cy="4343400"/>
           </a:xfrm>
           <a:prstGeom prst="roundRect">
             <a:avLst/>
@@ -3390,64 +3587,66 @@
           <a:p>
             <a:pPr algn="l"/>
             <a:r>
-              <a:rPr lang="ru-RU" sz="1300" b="1">
-                <a:solidFill>
-                  <a:srgbClr val="18212B"/>
-                </a:solidFill>
-                <a:latin typeface="Aptos"/>
-                <a:cs typeface="Aptos"/>
-              </a:rPr>
-              <a:t>Redis backplane для SignalR — выбрано</a:t>
-            </a:r>
-          </a:p>
-          <a:p>
-            <a:pPr algn="l"/>
-            <a:r>
-              <a:rPr lang="ru-RU" sz="1300" b="1">
-                <a:solidFill>
-                  <a:srgbClr val="18212B"/>
-                </a:solidFill>
-                <a:latin typeface="Aptos"/>
-                <a:cs typeface="Aptos"/>
-              </a:rPr>
-              <a:t>Штатный механизм, без перестройки кода, подходит для событий интерфейса</a:t>
-            </a:r>
-          </a:p>
-        </p:txBody>
-      </p:sp>
-      <p:sp>
-        <p:nvSpPr>
-          <p:cNvPr id="26" name="Shape 26"/>
-          <p:cNvSpPr txBox="1"/>
-          <p:nvPr/>
-        </p:nvSpPr>
-        <p:spPr>
-          <a:xfrm>
-            <a:off x="685800" y="4617720"/>
-            <a:ext cx="11155680" cy="1280160"/>
-          </a:xfrm>
-          <a:prstGeom prst="roundRect">
-            <a:avLst/>
-          </a:prstGeom>
-          <a:noFill/>
-          <a:ln>
-            <a:noFill/>
-          </a:ln>
-        </p:spPr>
-        <p:txBody>
-          <a:bodyPr wrap="square" lIns="177800" tIns="177800" rIns="177800" bIns="177800"/>
-          <a:lstStyle/>
-          <a:p>
-            <a:pPr algn="l"/>
-            <a:r>
-              <a:rPr lang="ru-RU" sz="1200" b="0">
-                <a:solidFill>
-                  <a:srgbClr val="5E6A75"/>
-                </a:solidFill>
-                <a:latin typeface="Aptos"/>
-                <a:cs typeface="Aptos"/>
-              </a:rPr>
-              <a:t>Критерии выбора: запускается на локальном стенде, сохраняет существующий код доставки событий, штатно поддерживается в ASP.NET Core SignalR, подходит для коротких событий интерфейса и легко воспроизводится.</a:t>
+              <a:rPr lang="ru-RU" sz="1400" b="1">
+                <a:solidFill>
+                  <a:srgbClr val="18212B"/>
+                </a:solidFill>
+                <a:latin typeface="Aptos"/>
+                <a:cs typeface="Aptos"/>
+              </a:rPr>
+              <a:t>REST + real-time</a:t>
+            </a:r>
+          </a:p>
+          <a:p>
+            <a:pPr algn="l"/>
+            <a:r>
+              <a:rPr lang="ru-RU" sz="1400" b="1">
+                <a:solidFill>
+                  <a:srgbClr val="18212B"/>
+                </a:solidFill>
+                <a:latin typeface="Aptos"/>
+                <a:cs typeface="Aptos"/>
+              </a:rPr>
+              <a:t/>
+            </a:r>
+          </a:p>
+          <a:p>
+            <a:pPr algn="l"/>
+            <a:r>
+              <a:rPr lang="ru-RU" sz="1400" b="1">
+                <a:solidFill>
+                  <a:srgbClr val="18212B"/>
+                </a:solidFill>
+                <a:latin typeface="Aptos"/>
+                <a:cs typeface="Aptos"/>
+              </a:rPr>
+              <a:t>HTTP-запрос фиксирует изменение состояния.</a:t>
+            </a:r>
+          </a:p>
+          <a:p>
+            <a:pPr algn="l"/>
+            <a:r>
+              <a:rPr lang="ru-RU" sz="1400" b="1">
+                <a:solidFill>
+                  <a:srgbClr val="18212B"/>
+                </a:solidFill>
+                <a:latin typeface="Aptos"/>
+                <a:cs typeface="Aptos"/>
+              </a:rPr>
+              <a:t/>
+            </a:r>
+          </a:p>
+          <a:p>
+            <a:pPr algn="l"/>
+            <a:r>
+              <a:rPr lang="ru-RU" sz="1400" b="1">
+                <a:solidFill>
+                  <a:srgbClr val="18212B"/>
+                </a:solidFill>
+                <a:latin typeface="Aptos"/>
+                <a:cs typeface="Aptos"/>
+              </a:rPr>
+              <a:t>SignalR-событие распространяет изменение активным участникам, включая клиентов на других backend-узлах.</a:t>
             </a:r>
           </a:p>
         </p:txBody>
@@ -3554,7 +3753,7 @@
                 <a:latin typeface="Aptos"/>
                 <a:cs typeface="Aptos"/>
               </a:rPr>
-              <a:t>Целевая архитектура</a:t>
+              <a:t>Предметная область</a:t>
             </a:r>
           </a:p>
         </p:txBody>
@@ -3591,7 +3790,7 @@
                 <a:latin typeface="Aptos"/>
                 <a:cs typeface="Aptos"/>
               </a:rPr>
-              <a:t>Два экземпляра app-api за nginx, общий Redis backplane для межузловой доставки</a:t>
+              <a:t>Real-time связан с сущностями продукта, а не с абстрактным WebSocket-демо</a:t>
             </a:r>
           </a:p>
         </p:txBody>
@@ -3604,8 +3803,49 @@
         </p:nvSpPr>
         <p:spPr>
           <a:xfrm>
-            <a:off x="914400" y="1874520"/>
-            <a:ext cx="1645920" cy="640080"/>
+            <a:off x="685800" y="1508760"/>
+            <a:ext cx="10972800" cy="685800"/>
+          </a:xfrm>
+          <a:prstGeom prst="roundRect">
+            <a:avLst/>
+          </a:prstGeom>
+          <a:solidFill>
+            <a:srgbClr val="E8F3F1"/>
+          </a:solidFill>
+          <a:ln w="12700">
+            <a:solidFill>
+              <a:srgbClr val="0B6E69"/>
+            </a:solidFill>
+          </a:ln>
+        </p:spPr>
+        <p:txBody>
+          <a:bodyPr wrap="square" lIns="177800" tIns="177800" rIns="177800" bIns="177800"/>
+          <a:lstStyle/>
+          <a:p>
+            <a:pPr algn="ctr"/>
+            <a:r>
+              <a:rPr lang="ru-RU" sz="1600" b="1">
+                <a:solidFill>
+                  <a:srgbClr val="18212B"/>
+                </a:solidFill>
+                <a:latin typeface="Aptos"/>
+                <a:cs typeface="Aptos"/>
+              </a:rPr>
+              <a:t>Система отслеживания задач: отчёты · баги · комментарии · вложения · ссылки · шаги воспроизведения · статусы</a:t>
+            </a:r>
+          </a:p>
+        </p:txBody>
+      </p:sp>
+      <p:sp>
+        <p:nvSpPr>
+          <p:cNvPr id="21" name="Shape 21"/>
+          <p:cNvSpPr txBox="1"/>
+          <p:nvPr/>
+        </p:nvSpPr>
+        <p:spPr>
+          <a:xfrm>
+            <a:off x="685800" y="2468880"/>
+            <a:ext cx="3520440" cy="2926080"/>
           </a:xfrm>
           <a:prstGeom prst="roundRect">
             <a:avLst/>
@@ -3623,7 +3863,7 @@
           <a:bodyPr wrap="square" lIns="177800" tIns="177800" rIns="177800" bIns="177800"/>
           <a:lstStyle/>
           <a:p>
-            <a:pPr algn="ctr"/>
+            <a:pPr algn="l"/>
             <a:r>
               <a:rPr lang="ru-RU" sz="1400" b="1">
                 <a:solidFill>
@@ -3632,21 +3872,73 @@
                 <a:latin typeface="Aptos"/>
                 <a:cs typeface="Aptos"/>
               </a:rPr>
-              <a:t>Клиент A</a:t>
-            </a:r>
-          </a:p>
-        </p:txBody>
-      </p:sp>
-      <p:sp>
-        <p:nvSpPr>
-          <p:cNvPr id="21" name="Shape 21"/>
-          <p:cNvSpPr txBox="1"/>
-          <p:nvPr/>
-        </p:nvSpPr>
-        <p:spPr>
-          <a:xfrm>
-            <a:off x="914400" y="3749040"/>
-            <a:ext cx="1645920" cy="640080"/>
+              <a:t>Открытие отчёта</a:t>
+            </a:r>
+          </a:p>
+          <a:p>
+            <a:pPr algn="l"/>
+            <a:r>
+              <a:rPr lang="ru-RU" sz="1400" b="1">
+                <a:solidFill>
+                  <a:srgbClr val="18212B"/>
+                </a:solidFill>
+                <a:latin typeface="Aptos"/>
+                <a:cs typeface="Aptos"/>
+              </a:rPr>
+              <a:t/>
+            </a:r>
+          </a:p>
+          <a:p>
+            <a:pPr algn="l"/>
+            <a:r>
+              <a:rPr lang="ru-RU" sz="1400" b="1">
+                <a:solidFill>
+                  <a:srgbClr val="18212B"/>
+                </a:solidFill>
+                <a:latin typeface="Aptos"/>
+                <a:cs typeface="Aptos"/>
+              </a:rPr>
+              <a:t>JoinReportGroupAsync</a:t>
+            </a:r>
+          </a:p>
+          <a:p>
+            <a:pPr algn="l"/>
+            <a:r>
+              <a:rPr lang="ru-RU" sz="1400" b="1">
+                <a:solidFill>
+                  <a:srgbClr val="18212B"/>
+                </a:solidFill>
+                <a:latin typeface="Aptos"/>
+                <a:cs typeface="Aptos"/>
+              </a:rPr>
+              <a:t/>
+            </a:r>
+          </a:p>
+          <a:p>
+            <a:pPr algn="l"/>
+            <a:r>
+              <a:rPr lang="ru-RU" sz="1400" b="1">
+                <a:solidFill>
+                  <a:srgbClr val="18212B"/>
+                </a:solidFill>
+                <a:latin typeface="Aptos"/>
+                <a:cs typeface="Aptos"/>
+              </a:rPr>
+              <a:t>Клиент вступает в группу отчёта и получает только релевантные события.</a:t>
+            </a:r>
+          </a:p>
+        </p:txBody>
+      </p:sp>
+      <p:sp>
+        <p:nvSpPr>
+          <p:cNvPr id="22" name="Shape 22"/>
+          <p:cNvSpPr txBox="1"/>
+          <p:nvPr/>
+        </p:nvSpPr>
+        <p:spPr>
+          <a:xfrm>
+            <a:off x="4389120" y="2468880"/>
+            <a:ext cx="3520440" cy="2926080"/>
           </a:xfrm>
           <a:prstGeom prst="roundRect">
             <a:avLst/>
@@ -3664,7 +3956,7 @@
           <a:bodyPr wrap="square" lIns="177800" tIns="177800" rIns="177800" bIns="177800"/>
           <a:lstStyle/>
           <a:p>
-            <a:pPr algn="ctr"/>
+            <a:pPr algn="l"/>
             <a:r>
               <a:rPr lang="ru-RU" sz="1400" b="1">
                 <a:solidFill>
@@ -3673,39 +3965,11 @@
                 <a:latin typeface="Aptos"/>
                 <a:cs typeface="Aptos"/>
               </a:rPr>
-              <a:t>Клиент B</a:t>
-            </a:r>
-          </a:p>
-        </p:txBody>
-      </p:sp>
-      <p:sp>
-        <p:nvSpPr>
-          <p:cNvPr id="22" name="Shape 22"/>
-          <p:cNvSpPr txBox="1"/>
-          <p:nvPr/>
-        </p:nvSpPr>
-        <p:spPr>
-          <a:xfrm>
-            <a:off x="3291840" y="2788920"/>
-            <a:ext cx="1371600" cy="731520"/>
-          </a:xfrm>
-          <a:prstGeom prst="roundRect">
-            <a:avLst/>
-          </a:prstGeom>
-          <a:solidFill>
-            <a:srgbClr val="E8F3F1"/>
-          </a:solidFill>
-          <a:ln w="12700">
-            <a:solidFill>
-              <a:srgbClr val="0B6E69"/>
-            </a:solidFill>
-          </a:ln>
-        </p:spPr>
-        <p:txBody>
-          <a:bodyPr wrap="square" lIns="177800" tIns="177800" rIns="177800" bIns="177800"/>
-          <a:lstStyle/>
-          <a:p>
-            <a:pPr algn="ctr"/>
+              <a:t>Изменение сущностей</a:t>
+            </a:r>
+          </a:p>
+          <a:p>
+            <a:pPr algn="l"/>
             <a:r>
               <a:rPr lang="ru-RU" sz="1400" b="1">
                 <a:solidFill>
@@ -3714,7 +3978,72 @@
                 <a:latin typeface="Aptos"/>
                 <a:cs typeface="Aptos"/>
               </a:rPr>
-              <a:t>nginx</a:t>
+              <a:t/>
+            </a:r>
+          </a:p>
+          <a:p>
+            <a:pPr algn="l"/>
+            <a:r>
+              <a:rPr lang="ru-RU" sz="1400" b="1">
+                <a:solidFill>
+                  <a:srgbClr val="18212B"/>
+                </a:solidFill>
+                <a:latin typeface="Aptos"/>
+                <a:cs typeface="Aptos"/>
+              </a:rPr>
+              <a:t>ReceiveReportPatch</a:t>
+            </a:r>
+          </a:p>
+          <a:p>
+            <a:pPr algn="l"/>
+            <a:r>
+              <a:rPr lang="ru-RU" sz="1400" b="1">
+                <a:solidFill>
+                  <a:srgbClr val="18212B"/>
+                </a:solidFill>
+                <a:latin typeface="Aptos"/>
+                <a:cs typeface="Aptos"/>
+              </a:rPr>
+              <a:t>ReceiveBugCreate</a:t>
+            </a:r>
+          </a:p>
+          <a:p>
+            <a:pPr algn="l"/>
+            <a:r>
+              <a:rPr lang="ru-RU" sz="1400" b="1">
+                <a:solidFill>
+                  <a:srgbClr val="18212B"/>
+                </a:solidFill>
+                <a:latin typeface="Aptos"/>
+                <a:cs typeface="Aptos"/>
+              </a:rPr>
+              <a:t>ReceiveCommentUpdate</a:t>
+            </a:r>
+          </a:p>
+          <a:p>
+            <a:pPr algn="l"/>
+            <a:r>
+              <a:rPr lang="ru-RU" sz="1400" b="1">
+                <a:solidFill>
+                  <a:srgbClr val="18212B"/>
+                </a:solidFill>
+                <a:latin typeface="Aptos"/>
+                <a:cs typeface="Aptos"/>
+              </a:rPr>
+              <a:t/>
+            </a:r>
+          </a:p>
+          <a:p>
+            <a:pPr algn="l"/>
+            <a:r>
+              <a:rPr lang="ru-RU" sz="1400" b="1">
+                <a:solidFill>
+                  <a:srgbClr val="18212B"/>
+                </a:solidFill>
+                <a:latin typeface="Aptos"/>
+                <a:cs typeface="Aptos"/>
+              </a:rPr>
+              <a:t>События применяются к состоянию интерфейса.</a:t>
             </a:r>
           </a:p>
         </p:txBody>
@@ -3727,8 +4056,8 @@
         </p:nvSpPr>
         <p:spPr>
           <a:xfrm>
-            <a:off x="5577840" y="1874520"/>
-            <a:ext cx="1828800" cy="640080"/>
+            <a:off x="8092440" y="2468880"/>
+            <a:ext cx="3520440" cy="2926080"/>
           </a:xfrm>
           <a:prstGeom prst="roundRect">
             <a:avLst/>
@@ -3738,7 +4067,7 @@
           </a:solidFill>
           <a:ln w="12700">
             <a:solidFill>
-              <a:srgbClr val="0B6E69"/>
+              <a:srgbClr val="D7D2C7"/>
             </a:solidFill>
           </a:ln>
         </p:spPr>
@@ -3746,7 +4075,7 @@
           <a:bodyPr wrap="square" lIns="177800" tIns="177800" rIns="177800" bIns="177800"/>
           <a:lstStyle/>
           <a:p>
-            <a:pPr algn="ctr"/>
+            <a:pPr algn="l"/>
             <a:r>
               <a:rPr lang="ru-RU" sz="1400" b="1">
                 <a:solidFill>
@@ -3755,39 +4084,11 @@
                 <a:latin typeface="Aptos"/>
                 <a:cs typeface="Aptos"/>
               </a:rPr>
-              <a:t>app-api-1</a:t>
-            </a:r>
-          </a:p>
-        </p:txBody>
-      </p:sp>
-      <p:sp>
-        <p:nvSpPr>
-          <p:cNvPr id="24" name="Shape 24"/>
-          <p:cNvSpPr txBox="1"/>
-          <p:nvPr/>
-        </p:nvSpPr>
-        <p:spPr>
-          <a:xfrm>
-            <a:off x="5577840" y="3749040"/>
-            <a:ext cx="1828800" cy="640080"/>
-          </a:xfrm>
-          <a:prstGeom prst="roundRect">
-            <a:avLst/>
-          </a:prstGeom>
-          <a:solidFill>
-            <a:srgbClr val="FFFFFF"/>
-          </a:solidFill>
-          <a:ln w="12700">
-            <a:solidFill>
-              <a:srgbClr val="0B6E69"/>
-            </a:solidFill>
-          </a:ln>
-        </p:spPr>
-        <p:txBody>
-          <a:bodyPr wrap="square" lIns="177800" tIns="177800" rIns="177800" bIns="177800"/>
-          <a:lstStyle/>
-          <a:p>
-            <a:pPr algn="ctr"/>
+              <a:t>Восстановление</a:t>
+            </a:r>
+          </a:p>
+          <a:p>
+            <a:pPr algn="l"/>
             <a:r>
               <a:rPr lang="ru-RU" sz="1400" b="1">
                 <a:solidFill>
@@ -3796,39 +4097,11 @@
                 <a:latin typeface="Aptos"/>
                 <a:cs typeface="Aptos"/>
               </a:rPr>
-              <a:t>app-api-2</a:t>
-            </a:r>
-          </a:p>
-        </p:txBody>
-      </p:sp>
-      <p:sp>
-        <p:nvSpPr>
-          <p:cNvPr id="25" name="Shape 25"/>
-          <p:cNvSpPr txBox="1"/>
-          <p:nvPr/>
-        </p:nvSpPr>
-        <p:spPr>
-          <a:xfrm>
-            <a:off x="8321040" y="2788920"/>
-            <a:ext cx="2194560" cy="731520"/>
-          </a:xfrm>
-          <a:prstGeom prst="roundRect">
-            <a:avLst/>
-          </a:prstGeom>
-          <a:solidFill>
-            <a:srgbClr val="E8F3F1"/>
-          </a:solidFill>
-          <a:ln w="12700">
-            <a:solidFill>
-              <a:srgbClr val="0B6E69"/>
-            </a:solidFill>
-          </a:ln>
-        </p:spPr>
-        <p:txBody>
-          <a:bodyPr wrap="square" lIns="177800" tIns="177800" rIns="177800" bIns="177800"/>
-          <a:lstStyle/>
-          <a:p>
-            <a:pPr algn="ctr"/>
+              <a:t/>
+            </a:r>
+          </a:p>
+          <a:p>
+            <a:pPr algn="l"/>
             <a:r>
               <a:rPr lang="ru-RU" sz="1400" b="1">
                 <a:solidFill>
@@ -3837,215 +4110,46 @@
                 <a:latin typeface="Aptos"/>
                 <a:cs typeface="Aptos"/>
               </a:rPr>
-              <a:t>Redis backplane</a:t>
-            </a:r>
-          </a:p>
-        </p:txBody>
-      </p:sp>
-      <p:cxnSp>
-        <p:nvCxnSpPr>
-          <p:cNvPr id="50" name="Connector 50"/>
-          <p:cNvCxnSpPr/>
-          <p:nvPr/>
-        </p:nvCxnSpPr>
-        <p:spPr>
-          <a:xfrm flipH="0" flipV="0">
-            <a:off x="2560320" y="2194560"/>
-            <a:ext cx="731520" cy="795528"/>
-          </a:xfrm>
-          <a:prstGeom prst="straightConnector1">
-            <a:avLst/>
-          </a:prstGeom>
-          <a:ln w="15875" cap="flat">
-            <a:solidFill>
-              <a:srgbClr val="0B6E69"/>
-            </a:solidFill>
-            <a:tailEnd type="triangle"/>
-          </a:ln>
-        </p:spPr>
-      </p:cxnSp>
-      <p:cxnSp>
-        <p:nvCxnSpPr>
-          <p:cNvPr id="51" name="Connector 51"/>
-          <p:cNvCxnSpPr/>
-          <p:nvPr/>
-        </p:nvCxnSpPr>
-        <p:spPr>
-          <a:xfrm flipH="0" flipV="1">
-            <a:off x="2560320" y="3319272"/>
-            <a:ext cx="731520" cy="749808"/>
-          </a:xfrm>
-          <a:prstGeom prst="straightConnector1">
-            <a:avLst/>
-          </a:prstGeom>
-          <a:ln w="15875" cap="flat">
-            <a:solidFill>
-              <a:srgbClr val="0B6E69"/>
-            </a:solidFill>
-            <a:tailEnd type="triangle"/>
-          </a:ln>
-        </p:spPr>
-      </p:cxnSp>
-      <p:cxnSp>
-        <p:nvCxnSpPr>
-          <p:cNvPr id="52" name="Connector 52"/>
-          <p:cNvCxnSpPr/>
-          <p:nvPr/>
-        </p:nvCxnSpPr>
-        <p:spPr>
-          <a:xfrm flipH="0" flipV="1">
-            <a:off x="4663440" y="2194560"/>
-            <a:ext cx="914400" cy="795528"/>
-          </a:xfrm>
-          <a:prstGeom prst="straightConnector1">
-            <a:avLst/>
-          </a:prstGeom>
-          <a:ln w="15875" cap="flat">
-            <a:solidFill>
-              <a:srgbClr val="0B6E69"/>
-            </a:solidFill>
-            <a:tailEnd type="triangle"/>
-          </a:ln>
-        </p:spPr>
-      </p:cxnSp>
-      <p:cxnSp>
-        <p:nvCxnSpPr>
-          <p:cNvPr id="53" name="Connector 53"/>
-          <p:cNvCxnSpPr/>
-          <p:nvPr/>
-        </p:nvCxnSpPr>
-        <p:spPr>
-          <a:xfrm flipH="0" flipV="0">
-            <a:off x="4663440" y="3319272"/>
-            <a:ext cx="914400" cy="749808"/>
-          </a:xfrm>
-          <a:prstGeom prst="straightConnector1">
-            <a:avLst/>
-          </a:prstGeom>
-          <a:ln w="15875" cap="flat">
-            <a:solidFill>
-              <a:srgbClr val="0B6E69"/>
-            </a:solidFill>
-            <a:tailEnd type="triangle"/>
-          </a:ln>
-        </p:spPr>
-      </p:cxnSp>
-      <p:cxnSp>
-        <p:nvCxnSpPr>
-          <p:cNvPr id="54" name="Connector 54"/>
-          <p:cNvCxnSpPr/>
-          <p:nvPr/>
-        </p:nvCxnSpPr>
-        <p:spPr>
-          <a:xfrm flipH="0" flipV="0">
-            <a:off x="7406640" y="2194560"/>
-            <a:ext cx="914400" cy="795528"/>
-          </a:xfrm>
-          <a:prstGeom prst="straightConnector1">
-            <a:avLst/>
-          </a:prstGeom>
-          <a:ln w="15875" cap="flat">
-            <a:solidFill>
-              <a:srgbClr val="0B6E69"/>
-            </a:solidFill>
-            <a:headEnd type="triangle"/>
-            <a:tailEnd type="triangle"/>
-          </a:ln>
-        </p:spPr>
-      </p:cxnSp>
-      <p:cxnSp>
-        <p:nvCxnSpPr>
-          <p:cNvPr id="55" name="Connector 55"/>
-          <p:cNvCxnSpPr/>
-          <p:nvPr/>
-        </p:nvCxnSpPr>
-        <p:spPr>
-          <a:xfrm flipH="0" flipV="1">
-            <a:off x="7406640" y="3319272"/>
-            <a:ext cx="914400" cy="749808"/>
-          </a:xfrm>
-          <a:prstGeom prst="straightConnector1">
-            <a:avLst/>
-          </a:prstGeom>
-          <a:ln w="15875" cap="flat">
-            <a:solidFill>
-              <a:srgbClr val="0B6E69"/>
-            </a:solidFill>
-            <a:headEnd type="triangle"/>
-            <a:tailEnd type="triangle"/>
-          </a:ln>
-        </p:spPr>
-      </p:cxnSp>
-      <p:sp>
-        <p:nvSpPr>
-          <p:cNvPr id="26" name="Shape 26"/>
-          <p:cNvSpPr txBox="1"/>
-          <p:nvPr/>
-        </p:nvSpPr>
-        <p:spPr>
-          <a:xfrm>
-            <a:off x="640080" y="4937760"/>
-            <a:ext cx="10972800" cy="457200"/>
-          </a:xfrm>
-          <a:prstGeom prst="roundRect">
-            <a:avLst/>
-          </a:prstGeom>
-          <a:noFill/>
-          <a:ln>
-            <a:noFill/>
-          </a:ln>
-        </p:spPr>
-        <p:txBody>
-          <a:bodyPr wrap="square" lIns="177800" tIns="177800" rIns="177800" bIns="177800"/>
-          <a:lstStyle/>
-          <a:p>
-            <a:pPr algn="ctr"/>
-            <a:r>
-              <a:rPr lang="ru-RU" sz="1300" b="0">
-                <a:solidFill>
-                  <a:srgbClr val="5E6A75"/>
-                </a:solidFill>
-                <a:latin typeface="Aptos"/>
-                <a:cs typeface="Aptos"/>
-              </a:rPr>
-              <a:t>Событие публикуется в Redis · доставляется обоим узлам · группы SignalR остаются локальным runtime-состоянием</a:t>
-            </a:r>
-          </a:p>
-        </p:txBody>
-      </p:sp>
-      <p:sp>
-        <p:nvSpPr>
-          <p:cNvPr id="27" name="Shape 27"/>
-          <p:cNvSpPr txBox="1"/>
-          <p:nvPr/>
-        </p:nvSpPr>
-        <p:spPr>
-          <a:xfrm>
-            <a:off x="640080" y="5440680"/>
-            <a:ext cx="10972800" cy="365760"/>
-          </a:xfrm>
-          <a:prstGeom prst="roundRect">
-            <a:avLst/>
-          </a:prstGeom>
-          <a:noFill/>
-          <a:ln>
-            <a:noFill/>
-          </a:ln>
-        </p:spPr>
-        <p:txBody>
-          <a:bodyPr wrap="square" lIns="177800" tIns="177800" rIns="177800" bIns="177800"/>
-          <a:lstStyle/>
-          <a:p>
-            <a:pPr algn="ctr"/>
-            <a:r>
-              <a:rPr lang="ru-RU" sz="1100" b="0">
-                <a:solidFill>
-                  <a:srgbClr val="5E6A75"/>
-                </a:solidFill>
-                <a:latin typeface="Aptos"/>
-                <a:cs typeface="Aptos"/>
-              </a:rPr>
-              <a:t>Оба экземпляра подключены к общей PostgreSQL; на схеме показан только канал real-time-доставки.</a:t>
+              <a:t>onreconnected</a:t>
+            </a:r>
+          </a:p>
+          <a:p>
+            <a:pPr algn="l"/>
+            <a:r>
+              <a:rPr lang="ru-RU" sz="1400" b="1">
+                <a:solidFill>
+                  <a:srgbClr val="18212B"/>
+                </a:solidFill>
+                <a:latin typeface="Aptos"/>
+                <a:cs typeface="Aptos"/>
+              </a:rPr>
+              <a:t>JoinReportGroupAsync</a:t>
+            </a:r>
+          </a:p>
+          <a:p>
+            <a:pPr algn="l"/>
+            <a:r>
+              <a:rPr lang="ru-RU" sz="1400" b="1">
+                <a:solidFill>
+                  <a:srgbClr val="18212B"/>
+                </a:solidFill>
+                <a:latin typeface="Aptos"/>
+                <a:cs typeface="Aptos"/>
+              </a:rPr>
+              <a:t/>
+            </a:r>
+          </a:p>
+          <a:p>
+            <a:pPr algn="l"/>
+            <a:r>
+              <a:rPr lang="ru-RU" sz="1400" b="1">
+                <a:solidFill>
+                  <a:srgbClr val="18212B"/>
+                </a:solidFill>
+                <a:latin typeface="Aptos"/>
+                <a:cs typeface="Aptos"/>
+              </a:rPr>
+              <a:t>После reconnect клиент повторно восстанавливает подписку на текущий отчёт.</a:t>
             </a:r>
           </a:p>
         </p:txBody>
@@ -4152,7 +4256,7 @@
                 <a:latin typeface="Aptos"/>
                 <a:cs typeface="Aptos"/>
               </a:rPr>
-              <a:t>Программная реализация</a:t>
+              <a:t>Анализ подходов к масштабированию</a:t>
             </a:r>
           </a:p>
         </p:txBody>
@@ -4189,7 +4293,7 @@
                 <a:latin typeface="Aptos"/>
                 <a:cs typeface="Aptos"/>
               </a:rPr>
-              <a:t>Backend, frontend, тесты и проверочный клиент закрывают задачу как разработку ПО</a:t>
+              <a:t>Шесть рассмотренных вариантов; для реализации выбран подход 4</a:t>
             </a:r>
           </a:p>
         </p:txBody>
@@ -4202,8 +4306,8 @@
         </p:nvSpPr>
         <p:spPr>
           <a:xfrm>
-            <a:off x="685800" y="1508760"/>
-            <a:ext cx="5349240" cy="1828800"/>
+            <a:off x="685800" y="1554480"/>
+            <a:ext cx="3657600" cy="1325880"/>
           </a:xfrm>
           <a:prstGeom prst="roundRect">
             <a:avLst/>
@@ -4223,66 +4327,27 @@
           <a:p>
             <a:pPr algn="l"/>
             <a:r>
-              <a:rPr lang="ru-RU" sz="1400" b="0">
-                <a:solidFill>
-                  <a:srgbClr val="18212B"/>
-                </a:solidFill>
-                <a:latin typeface="Aptos"/>
-                <a:cs typeface="Aptos"/>
-              </a:rPr>
-              <a:t>Backend</a:t>
-            </a:r>
-          </a:p>
-          <a:p>
-            <a:pPr algn="l"/>
-            <a:r>
-              <a:rPr lang="ru-RU" sz="1400" b="0">
-                <a:solidFill>
-                  <a:srgbClr val="18212B"/>
-                </a:solidFill>
-                <a:latin typeface="Aptos"/>
-                <a:cs typeface="Aptos"/>
-              </a:rPr>
-              <a:t/>
-            </a:r>
-          </a:p>
-          <a:p>
-            <a:pPr algn="l"/>
-            <a:r>
-              <a:rPr lang="ru-RU" sz="1400" b="0">
-                <a:solidFill>
-                  <a:srgbClr val="18212B"/>
-                </a:solidFill>
-                <a:latin typeface="Aptos"/>
-                <a:cs typeface="Aptos"/>
-              </a:rPr>
-              <a:t>AddStackExchangeRedis через REDIS_CONNECTION_STRING</a:t>
-            </a:r>
-          </a:p>
-          <a:p>
-            <a:pPr algn="l"/>
-            <a:r>
-              <a:rPr lang="ru-RU" sz="1400" b="0">
-                <a:solidFill>
-                  <a:srgbClr val="18212B"/>
-                </a:solidFill>
-                <a:latin typeface="Aptos"/>
-                <a:cs typeface="Aptos"/>
-              </a:rPr>
-              <a:t>GetConnectionDiagnosticsAsync</a:t>
-            </a:r>
-          </a:p>
-          <a:p>
-            <a:pPr algn="l"/>
-            <a:r>
-              <a:rPr lang="ru-RU" sz="1400" b="0">
-                <a:solidFill>
-                  <a:srgbClr val="18212B"/>
-                </a:solidFill>
-                <a:latin typeface="Aptos"/>
-                <a:cs typeface="Aptos"/>
-              </a:rPr>
-              <a:t>SendToGroupAsync с eventId и GroupExcept</a:t>
+              <a:rPr lang="ru-RU" sz="1300" b="0">
+                <a:solidFill>
+                  <a:srgbClr val="18212B"/>
+                </a:solidFill>
+                <a:latin typeface="Aptos"/>
+                <a:cs typeface="Aptos"/>
+              </a:rPr>
+              <a:t>Один экземпляр backend</a:t>
+            </a:r>
+          </a:p>
+          <a:p>
+            <a:pPr algn="l"/>
+            <a:r>
+              <a:rPr lang="ru-RU" sz="1300" b="0">
+                <a:solidFill>
+                  <a:srgbClr val="18212B"/>
+                </a:solidFill>
+                <a:latin typeface="Aptos"/>
+                <a:cs typeface="Aptos"/>
+              </a:rPr>
+              <a:t>Нет масштабирования; один узел — единственная точка отказа</a:t>
             </a:r>
           </a:p>
         </p:txBody>
@@ -4295,8 +4360,8 @@
         </p:nvSpPr>
         <p:spPr>
           <a:xfrm>
-            <a:off x="6172200" y="1508760"/>
-            <a:ext cx="5349240" cy="1828800"/>
+            <a:off x="4434840" y="1554480"/>
+            <a:ext cx="3657600" cy="1325880"/>
           </a:xfrm>
           <a:prstGeom prst="roundRect">
             <a:avLst/>
@@ -4316,66 +4381,27 @@
           <a:p>
             <a:pPr algn="l"/>
             <a:r>
-              <a:rPr lang="ru-RU" sz="1400" b="0">
-                <a:solidFill>
-                  <a:srgbClr val="18212B"/>
-                </a:solidFill>
-                <a:latin typeface="Aptos"/>
-                <a:cs typeface="Aptos"/>
-              </a:rPr>
-              <a:t>Frontend</a:t>
-            </a:r>
-          </a:p>
-          <a:p>
-            <a:pPr algn="l"/>
-            <a:r>
-              <a:rPr lang="ru-RU" sz="1400" b="0">
-                <a:solidFill>
-                  <a:srgbClr val="18212B"/>
-                </a:solidFill>
-                <a:latin typeface="Aptos"/>
-                <a:cs typeface="Aptos"/>
-              </a:rPr>
-              <a:t/>
-            </a:r>
-          </a:p>
-          <a:p>
-            <a:pPr algn="l"/>
-            <a:r>
-              <a:rPr lang="ru-RU" sz="1400" b="0">
-                <a:solidFill>
-                  <a:srgbClr val="18212B"/>
-                </a:solidFill>
-                <a:latin typeface="Aptos"/>
-                <a:cs typeface="Aptos"/>
-              </a:rPr>
-              <a:t>WebSocket transport</a:t>
-            </a:r>
-          </a:p>
-          <a:p>
-            <a:pPr algn="l"/>
-            <a:r>
-              <a:rPr lang="ru-RU" sz="1400" b="0">
-                <a:solidFill>
-                  <a:srgbClr val="18212B"/>
-                </a:solidFill>
-                <a:latin typeface="Aptos"/>
-                <a:cs typeface="Aptos"/>
-              </a:rPr>
-              <a:t>automatic reconnect</a:t>
-            </a:r>
-          </a:p>
-          <a:p>
-            <a:pPr algn="l"/>
-            <a:r>
-              <a:rPr lang="ru-RU" sz="1400" b="0">
-                <a:solidFill>
-                  <a:srgbClr val="18212B"/>
-                </a:solidFill>
-                <a:latin typeface="Aptos"/>
-                <a:cs typeface="Aptos"/>
-              </a:rPr>
-              <a:t>повторный JoinReportGroupAsync после reconnect</a:t>
+              <a:rPr lang="ru-RU" sz="1300" b="0">
+                <a:solidFill>
+                  <a:srgbClr val="18212B"/>
+                </a:solidFill>
+                <a:latin typeface="Aptos"/>
+                <a:cs typeface="Aptos"/>
+              </a:rPr>
+              <a:t>Несколько экземпляров без общего канала</a:t>
+            </a:r>
+          </a:p>
+          <a:p>
+            <a:pPr algn="l"/>
+            <a:r>
+              <a:rPr lang="ru-RU" sz="1300" b="0">
+                <a:solidFill>
+                  <a:srgbClr val="18212B"/>
+                </a:solidFill>
+                <a:latin typeface="Aptos"/>
+                <a:cs typeface="Aptos"/>
+              </a:rPr>
+              <a:t>События не доходят до клиентов, подключённых к другим узлам</a:t>
             </a:r>
           </a:p>
         </p:txBody>
@@ -4388,8 +4414,170 @@
         </p:nvSpPr>
         <p:spPr>
           <a:xfrm>
-            <a:off x="685800" y="3703320"/>
-            <a:ext cx="5349240" cy="1920240"/>
+            <a:off x="8183880" y="1554480"/>
+            <a:ext cx="3657600" cy="1325880"/>
+          </a:xfrm>
+          <a:prstGeom prst="roundRect">
+            <a:avLst/>
+          </a:prstGeom>
+          <a:solidFill>
+            <a:srgbClr val="FFFFFF"/>
+          </a:solidFill>
+          <a:ln w="12700">
+            <a:solidFill>
+              <a:srgbClr val="D7D2C7"/>
+            </a:solidFill>
+          </a:ln>
+        </p:spPr>
+        <p:txBody>
+          <a:bodyPr wrap="square" lIns="177800" tIns="177800" rIns="177800" bIns="177800"/>
+          <a:lstStyle/>
+          <a:p>
+            <a:pPr algn="l"/>
+            <a:r>
+              <a:rPr lang="ru-RU" sz="1300" b="0">
+                <a:solidFill>
+                  <a:srgbClr val="18212B"/>
+                </a:solidFill>
+                <a:latin typeface="Aptos"/>
+                <a:cs typeface="Aptos"/>
+              </a:rPr>
+              <a:t>Привязка клиента к узлу (sticky)</a:t>
+            </a:r>
+          </a:p>
+          <a:p>
+            <a:pPr algn="l"/>
+            <a:r>
+              <a:rPr lang="ru-RU" sz="1300" b="0">
+                <a:solidFill>
+                  <a:srgbClr val="18212B"/>
+                </a:solidFill>
+                <a:latin typeface="Aptos"/>
+                <a:cs typeface="Aptos"/>
+              </a:rPr>
+              <a:t>Клиент остаётся на одном узле, но события на другие не приходят</a:t>
+            </a:r>
+          </a:p>
+        </p:txBody>
+      </p:sp>
+      <p:sp>
+        <p:nvSpPr>
+          <p:cNvPr id="23" name="Shape 23"/>
+          <p:cNvSpPr txBox="1"/>
+          <p:nvPr/>
+        </p:nvSpPr>
+        <p:spPr>
+          <a:xfrm>
+            <a:off x="685800" y="3017520"/>
+            <a:ext cx="3657600" cy="1325880"/>
+          </a:xfrm>
+          <a:prstGeom prst="roundRect">
+            <a:avLst/>
+          </a:prstGeom>
+          <a:solidFill>
+            <a:srgbClr val="FFFFFF"/>
+          </a:solidFill>
+          <a:ln w="12700">
+            <a:solidFill>
+              <a:srgbClr val="D7D2C7"/>
+            </a:solidFill>
+          </a:ln>
+        </p:spPr>
+        <p:txBody>
+          <a:bodyPr wrap="square" lIns="177800" tIns="177800" rIns="177800" bIns="177800"/>
+          <a:lstStyle/>
+          <a:p>
+            <a:pPr algn="l"/>
+            <a:r>
+              <a:rPr lang="ru-RU" sz="1300" b="0">
+                <a:solidFill>
+                  <a:srgbClr val="18212B"/>
+                </a:solidFill>
+                <a:latin typeface="Aptos"/>
+                <a:cs typeface="Aptos"/>
+              </a:rPr>
+              <a:t>Внешняя шина событий</a:t>
+            </a:r>
+          </a:p>
+          <a:p>
+            <a:pPr algn="l"/>
+            <a:r>
+              <a:rPr lang="ru-RU" sz="1300" b="0">
+                <a:solidFill>
+                  <a:srgbClr val="18212B"/>
+                </a:solidFill>
+                <a:latin typeface="Aptos"/>
+                <a:cs typeface="Aptos"/>
+              </a:rPr>
+              <a:t>Доставка между узлами есть, но требуется отдельная схема событий</a:t>
+            </a:r>
+          </a:p>
+        </p:txBody>
+      </p:sp>
+      <p:sp>
+        <p:nvSpPr>
+          <p:cNvPr id="24" name="Shape 24"/>
+          <p:cNvSpPr txBox="1"/>
+          <p:nvPr/>
+        </p:nvSpPr>
+        <p:spPr>
+          <a:xfrm>
+            <a:off x="4434840" y="3017520"/>
+            <a:ext cx="3657600" cy="1325880"/>
+          </a:xfrm>
+          <a:prstGeom prst="roundRect">
+            <a:avLst/>
+          </a:prstGeom>
+          <a:solidFill>
+            <a:srgbClr val="FFFFFF"/>
+          </a:solidFill>
+          <a:ln w="12700">
+            <a:solidFill>
+              <a:srgbClr val="D7D2C7"/>
+            </a:solidFill>
+          </a:ln>
+        </p:spPr>
+        <p:txBody>
+          <a:bodyPr wrap="square" lIns="177800" tIns="177800" rIns="177800" bIns="177800"/>
+          <a:lstStyle/>
+          <a:p>
+            <a:pPr algn="l"/>
+            <a:r>
+              <a:rPr lang="ru-RU" sz="1300" b="0">
+                <a:solidFill>
+                  <a:srgbClr val="18212B"/>
+                </a:solidFill>
+                <a:latin typeface="Aptos"/>
+                <a:cs typeface="Aptos"/>
+              </a:rPr>
+              <a:t>Облачный real-time сервис</a:t>
+            </a:r>
+          </a:p>
+          <a:p>
+            <a:pPr algn="l"/>
+            <a:r>
+              <a:rPr lang="ru-RU" sz="1300" b="0">
+                <a:solidFill>
+                  <a:srgbClr val="18212B"/>
+                </a:solidFill>
+                <a:latin typeface="Aptos"/>
+                <a:cs typeface="Aptos"/>
+              </a:rPr>
+              <a:t>Готовое решение, но снижает контроль над собственным контуром</a:t>
+            </a:r>
+          </a:p>
+        </p:txBody>
+      </p:sp>
+      <p:sp>
+        <p:nvSpPr>
+          <p:cNvPr id="25" name="Shape 25"/>
+          <p:cNvSpPr txBox="1"/>
+          <p:nvPr/>
+        </p:nvSpPr>
+        <p:spPr>
+          <a:xfrm>
+            <a:off x="8183880" y="3017520"/>
+            <a:ext cx="3657600" cy="1325880"/>
           </a:xfrm>
           <a:prstGeom prst="roundRect">
             <a:avLst/>
@@ -4409,120 +4597,64 @@
           <a:p>
             <a:pPr algn="l"/>
             <a:r>
-              <a:rPr lang="ru-RU" sz="1400" b="1">
-                <a:solidFill>
-                  <a:srgbClr val="18212B"/>
-                </a:solidFill>
-                <a:latin typeface="Aptos"/>
-                <a:cs typeface="Aptos"/>
-              </a:rPr>
-              <a:t>Тесты</a:t>
-            </a:r>
-          </a:p>
-          <a:p>
-            <a:pPr algn="l"/>
-            <a:r>
-              <a:rPr lang="ru-RU" sz="1400" b="1">
-                <a:solidFill>
-                  <a:srgbClr val="18212B"/>
-                </a:solidFill>
-                <a:latin typeface="Aptos"/>
-                <a:cs typeface="Aptos"/>
-              </a:rPr>
-              <a:t/>
-            </a:r>
-          </a:p>
-          <a:p>
-            <a:pPr algn="l"/>
-            <a:r>
-              <a:rPr lang="ru-RU" sz="1400" b="1">
-                <a:solidFill>
-                  <a:srgbClr val="18212B"/>
-                </a:solidFill>
-                <a:latin typeface="Aptos"/>
-                <a:cs typeface="Aptos"/>
-              </a:rPr>
-              <a:t>reconnectJoinHandler проверяет отсутствие лишнего join, повторное вступление и использование актуального reportId.</a:t>
-            </a:r>
-          </a:p>
-        </p:txBody>
-      </p:sp>
-      <p:sp>
-        <p:nvSpPr>
-          <p:cNvPr id="23" name="Shape 23"/>
-          <p:cNvSpPr txBox="1"/>
-          <p:nvPr/>
-        </p:nvSpPr>
-        <p:spPr>
-          <a:xfrm>
-            <a:off x="6172200" y="3703320"/>
-            <a:ext cx="5349240" cy="1920240"/>
-          </a:xfrm>
-          <a:prstGeom prst="roundRect">
-            <a:avLst/>
-          </a:prstGeom>
-          <a:solidFill>
-            <a:srgbClr val="E8F3F1"/>
-          </a:solidFill>
-          <a:ln w="12700">
-            <a:solidFill>
-              <a:srgbClr val="0B6E69"/>
-            </a:solidFill>
-          </a:ln>
-        </p:spPr>
-        <p:txBody>
-          <a:bodyPr wrap="square" lIns="177800" tIns="177800" rIns="177800" bIns="177800"/>
-          <a:lstStyle/>
-          <a:p>
-            <a:pPr algn="l"/>
-            <a:r>
-              <a:rPr lang="ru-RU" sz="1400" b="1">
-                <a:solidFill>
-                  <a:srgbClr val="18212B"/>
-                </a:solidFill>
-                <a:latin typeface="Aptos"/>
-                <a:cs typeface="Aptos"/>
-              </a:rPr>
-              <a:t>Проверочный клиент</a:t>
-            </a:r>
-          </a:p>
-          <a:p>
-            <a:pPr algn="l"/>
-            <a:r>
-              <a:rPr lang="ru-RU" sz="1400" b="1">
-                <a:solidFill>
-                  <a:srgbClr val="18212B"/>
-                </a:solidFill>
-                <a:latin typeface="Aptos"/>
-                <a:cs typeface="Aptos"/>
-              </a:rPr>
-              <a:t/>
-            </a:r>
-          </a:p>
-          <a:p>
-            <a:pPr algn="l"/>
-            <a:r>
-              <a:rPr lang="ru-RU" sz="1400" b="1">
-                <a:solidFill>
-                  <a:srgbClr val="18212B"/>
-                </a:solidFill>
-                <a:latin typeface="Aptos"/>
-                <a:cs typeface="Aptos"/>
-              </a:rPr>
-              <a:t>delivery · rejoin · failover · series</a:t>
-            </a:r>
-          </a:p>
-          <a:p>
-            <a:pPr algn="l"/>
-            <a:r>
-              <a:rPr lang="ru-RU" sz="1400" b="1">
-                <a:solidFill>
-                  <a:srgbClr val="18212B"/>
-                </a:solidFill>
-                <a:latin typeface="Aptos"/>
-                <a:cs typeface="Aptos"/>
-              </a:rPr>
-              <a:t>Фиксирует serverInstanceId, connectionId, событие и задержку.</a:t>
+              <a:rPr lang="ru-RU" sz="1300" b="1">
+                <a:solidFill>
+                  <a:srgbClr val="18212B"/>
+                </a:solidFill>
+                <a:latin typeface="Aptos"/>
+                <a:cs typeface="Aptos"/>
+              </a:rPr>
+              <a:t>Redis backplane для SignalR — выбрано</a:t>
+            </a:r>
+          </a:p>
+          <a:p>
+            <a:pPr algn="l"/>
+            <a:r>
+              <a:rPr lang="ru-RU" sz="1300" b="1">
+                <a:solidFill>
+                  <a:srgbClr val="18212B"/>
+                </a:solidFill>
+                <a:latin typeface="Aptos"/>
+                <a:cs typeface="Aptos"/>
+              </a:rPr>
+              <a:t>Штатный механизм, без перестройки кода, подходит для событий интерфейса</a:t>
+            </a:r>
+          </a:p>
+        </p:txBody>
+      </p:sp>
+      <p:sp>
+        <p:nvSpPr>
+          <p:cNvPr id="26" name="Shape 26"/>
+          <p:cNvSpPr txBox="1"/>
+          <p:nvPr/>
+        </p:nvSpPr>
+        <p:spPr>
+          <a:xfrm>
+            <a:off x="685800" y="4617720"/>
+            <a:ext cx="11155680" cy="1280160"/>
+          </a:xfrm>
+          <a:prstGeom prst="roundRect">
+            <a:avLst/>
+          </a:prstGeom>
+          <a:noFill/>
+          <a:ln>
+            <a:noFill/>
+          </a:ln>
+        </p:spPr>
+        <p:txBody>
+          <a:bodyPr wrap="square" lIns="177800" tIns="177800" rIns="177800" bIns="177800"/>
+          <a:lstStyle/>
+          <a:p>
+            <a:pPr algn="l"/>
+            <a:r>
+              <a:rPr lang="ru-RU" sz="1200" b="0">
+                <a:solidFill>
+                  <a:srgbClr val="5E6A75"/>
+                </a:solidFill>
+                <a:latin typeface="Aptos"/>
+                <a:cs typeface="Aptos"/>
+              </a:rPr>
+              <a:t>Критерии выбора: запускается на локальном стенде, сохраняет существующий код доставки событий, штатно поддерживается в ASP.NET Core SignalR, подходит для коротких событий интерфейса и легко воспроизводится.</a:t>
             </a:r>
           </a:p>
         </p:txBody>
@@ -4629,7 +4761,7 @@
                 <a:latin typeface="Aptos"/>
                 <a:cs typeface="Aptos"/>
               </a:rPr>
-              <a:t>Программа испытаний</a:t>
+              <a:t>Целевая архитектура</a:t>
             </a:r>
           </a:p>
         </p:txBody>
@@ -4666,7 +4798,7 @@
                 <a:latin typeface="Aptos"/>
                 <a:cs typeface="Aptos"/>
               </a:rPr>
-              <a:t>Два режима по одному коду · четыре сценария проверки</a:t>
+              <a:t>Два экземпляра app-api за nginx, общий Redis backplane для межузловой доставки</a:t>
             </a:r>
           </a:p>
         </p:txBody>
@@ -4679,8 +4811,8 @@
         </p:nvSpPr>
         <p:spPr>
           <a:xfrm>
-            <a:off x="685800" y="1554480"/>
-            <a:ext cx="5349240" cy="4160520"/>
+            <a:off x="914400" y="1874520"/>
+            <a:ext cx="1645920" cy="640080"/>
           </a:xfrm>
           <a:prstGeom prst="roundRect">
             <a:avLst/>
@@ -4698,94 +4830,16 @@
           <a:bodyPr wrap="square" lIns="177800" tIns="177800" rIns="177800" bIns="177800"/>
           <a:lstStyle/>
           <a:p>
-            <a:pPr algn="l"/>
-            <a:r>
-              <a:rPr lang="ru-RU" sz="1500" b="0">
-                <a:solidFill>
-                  <a:srgbClr val="18212B"/>
-                </a:solidFill>
-                <a:latin typeface="Aptos"/>
-                <a:cs typeface="Aptos"/>
-              </a:rPr>
-              <a:t>Два режима</a:t>
-            </a:r>
-          </a:p>
-          <a:p>
-            <a:pPr algn="l"/>
-            <a:r>
-              <a:rPr lang="ru-RU" sz="1500" b="0">
-                <a:solidFill>
-                  <a:srgbClr val="18212B"/>
-                </a:solidFill>
-                <a:latin typeface="Aptos"/>
-                <a:cs typeface="Aptos"/>
-              </a:rPr>
-              <a:t/>
-            </a:r>
-          </a:p>
-          <a:p>
-            <a:pPr algn="l"/>
-            <a:r>
-              <a:rPr lang="ru-RU" sz="1500" b="0">
-                <a:solidFill>
-                  <a:srgbClr val="18212B"/>
-                </a:solidFill>
-                <a:latin typeface="Aptos"/>
-                <a:cs typeface="Aptos"/>
-              </a:rPr>
-              <a:t>• Без межузлового канала — воспроизведение проблемы</a:t>
-            </a:r>
-          </a:p>
-          <a:p>
-            <a:pPr algn="l"/>
-            <a:r>
-              <a:rPr lang="ru-RU" sz="1500" b="0">
-                <a:solidFill>
-                  <a:srgbClr val="18212B"/>
-                </a:solidFill>
-                <a:latin typeface="Aptos"/>
-                <a:cs typeface="Aptos"/>
-              </a:rPr>
-              <a:t/>
-            </a:r>
-          </a:p>
-          <a:p>
-            <a:pPr algn="l"/>
-            <a:r>
-              <a:rPr lang="ru-RU" sz="1500" b="0">
-                <a:solidFill>
-                  <a:srgbClr val="18212B"/>
-                </a:solidFill>
-                <a:latin typeface="Aptos"/>
-                <a:cs typeface="Aptos"/>
-              </a:rPr>
-              <a:t>• С межузловым каналом — проверка решения</a:t>
-            </a:r>
-          </a:p>
-          <a:p>
-            <a:pPr algn="l"/>
-            <a:r>
-              <a:rPr lang="ru-RU" sz="1500" b="0">
-                <a:solidFill>
-                  <a:srgbClr val="18212B"/>
-                </a:solidFill>
-                <a:latin typeface="Aptos"/>
-                <a:cs typeface="Aptos"/>
-              </a:rPr>
-              <a:t/>
-            </a:r>
-          </a:p>
-          <a:p>
-            <a:pPr algn="l"/>
-            <a:r>
-              <a:rPr lang="ru-RU" sz="1500" b="0">
-                <a:solidFill>
-                  <a:srgbClr val="18212B"/>
-                </a:solidFill>
-                <a:latin typeface="Aptos"/>
-                <a:cs typeface="Aptos"/>
-              </a:rPr>
-              <a:t>Один и тот же код, один и тот же сценарий; отличие — наличие Redis backplane.</a:t>
+            <a:pPr algn="ctr"/>
+            <a:r>
+              <a:rPr lang="ru-RU" sz="1400" b="1">
+                <a:solidFill>
+                  <a:srgbClr val="18212B"/>
+                </a:solidFill>
+                <a:latin typeface="Aptos"/>
+                <a:cs typeface="Aptos"/>
+              </a:rPr>
+              <a:t>Клиент A</a:t>
             </a:r>
           </a:p>
         </p:txBody>
@@ -4798,8 +4852,8 @@
         </p:nvSpPr>
         <p:spPr>
           <a:xfrm>
-            <a:off x="6172200" y="1554480"/>
-            <a:ext cx="5349240" cy="4160520"/>
+            <a:off x="914400" y="3749040"/>
+            <a:ext cx="1645920" cy="640080"/>
           </a:xfrm>
           <a:prstGeom prst="roundRect">
             <a:avLst/>
@@ -4817,120 +4871,388 @@
           <a:bodyPr wrap="square" lIns="177800" tIns="177800" rIns="177800" bIns="177800"/>
           <a:lstStyle/>
           <a:p>
-            <a:pPr algn="l"/>
-            <a:r>
-              <a:rPr lang="ru-RU" sz="1500" b="0">
-                <a:solidFill>
-                  <a:srgbClr val="18212B"/>
-                </a:solidFill>
-                <a:latin typeface="Aptos"/>
-                <a:cs typeface="Aptos"/>
-              </a:rPr>
-              <a:t>Четыре сценария</a:t>
-            </a:r>
-          </a:p>
-          <a:p>
-            <a:pPr algn="l"/>
-            <a:r>
-              <a:rPr lang="ru-RU" sz="1500" b="0">
-                <a:solidFill>
-                  <a:srgbClr val="18212B"/>
-                </a:solidFill>
-                <a:latin typeface="Aptos"/>
-                <a:cs typeface="Aptos"/>
-              </a:rPr>
-              <a:t/>
-            </a:r>
-          </a:p>
-          <a:p>
-            <a:pPr algn="l"/>
-            <a:r>
-              <a:rPr lang="ru-RU" sz="1500" b="0">
-                <a:solidFill>
-                  <a:srgbClr val="18212B"/>
-                </a:solidFill>
-                <a:latin typeface="Aptos"/>
-                <a:cs typeface="Aptos"/>
-              </a:rPr>
-              <a:t>• Одиночная доставка между узлами</a:t>
-            </a:r>
-          </a:p>
-          <a:p>
-            <a:pPr algn="l"/>
-            <a:r>
-              <a:rPr lang="ru-RU" sz="1500" b="0">
-                <a:solidFill>
-                  <a:srgbClr val="18212B"/>
-                </a:solidFill>
-                <a:latin typeface="Aptos"/>
-                <a:cs typeface="Aptos"/>
-              </a:rPr>
-              <a:t/>
-            </a:r>
-          </a:p>
-          <a:p>
-            <a:pPr algn="l"/>
-            <a:r>
-              <a:rPr lang="ru-RU" sz="1500" b="0">
-                <a:solidFill>
-                  <a:srgbClr val="18212B"/>
-                </a:solidFill>
-                <a:latin typeface="Aptos"/>
-                <a:cs typeface="Aptos"/>
-              </a:rPr>
-              <a:t>• Серия из 30 итераций</a:t>
-            </a:r>
-          </a:p>
-          <a:p>
-            <a:pPr algn="l"/>
-            <a:r>
-              <a:rPr lang="ru-RU" sz="1500" b="0">
-                <a:solidFill>
-                  <a:srgbClr val="18212B"/>
-                </a:solidFill>
-                <a:latin typeface="Aptos"/>
-                <a:cs typeface="Aptos"/>
-              </a:rPr>
-              <a:t/>
-            </a:r>
-          </a:p>
-          <a:p>
-            <a:pPr algn="l"/>
-            <a:r>
-              <a:rPr lang="ru-RU" sz="1500" b="0">
-                <a:solidFill>
-                  <a:srgbClr val="18212B"/>
-                </a:solidFill>
-                <a:latin typeface="Aptos"/>
-                <a:cs typeface="Aptos"/>
-              </a:rPr>
-              <a:t>• Восстановление подписки после разрыва</a:t>
-            </a:r>
-          </a:p>
-          <a:p>
-            <a:pPr algn="l"/>
-            <a:r>
-              <a:rPr lang="ru-RU" sz="1500" b="0">
-                <a:solidFill>
-                  <a:srgbClr val="18212B"/>
-                </a:solidFill>
-                <a:latin typeface="Aptos"/>
-                <a:cs typeface="Aptos"/>
-              </a:rPr>
-              <a:t/>
-            </a:r>
-          </a:p>
-          <a:p>
-            <a:pPr algn="l"/>
-            <a:r>
-              <a:rPr lang="ru-RU" sz="1500" b="0">
-                <a:solidFill>
-                  <a:srgbClr val="18212B"/>
-                </a:solidFill>
-                <a:latin typeface="Aptos"/>
-                <a:cs typeface="Aptos"/>
-              </a:rPr>
-              <a:t>• Переключение на другой узел после отказа</a:t>
+            <a:pPr algn="ctr"/>
+            <a:r>
+              <a:rPr lang="ru-RU" sz="1400" b="1">
+                <a:solidFill>
+                  <a:srgbClr val="18212B"/>
+                </a:solidFill>
+                <a:latin typeface="Aptos"/>
+                <a:cs typeface="Aptos"/>
+              </a:rPr>
+              <a:t>Клиент B</a:t>
+            </a:r>
+          </a:p>
+        </p:txBody>
+      </p:sp>
+      <p:sp>
+        <p:nvSpPr>
+          <p:cNvPr id="22" name="Shape 22"/>
+          <p:cNvSpPr txBox="1"/>
+          <p:nvPr/>
+        </p:nvSpPr>
+        <p:spPr>
+          <a:xfrm>
+            <a:off x="3291840" y="2788920"/>
+            <a:ext cx="1371600" cy="731520"/>
+          </a:xfrm>
+          <a:prstGeom prst="roundRect">
+            <a:avLst/>
+          </a:prstGeom>
+          <a:solidFill>
+            <a:srgbClr val="E8F3F1"/>
+          </a:solidFill>
+          <a:ln w="12700">
+            <a:solidFill>
+              <a:srgbClr val="0B6E69"/>
+            </a:solidFill>
+          </a:ln>
+        </p:spPr>
+        <p:txBody>
+          <a:bodyPr wrap="square" lIns="177800" tIns="177800" rIns="177800" bIns="177800"/>
+          <a:lstStyle/>
+          <a:p>
+            <a:pPr algn="ctr"/>
+            <a:r>
+              <a:rPr lang="ru-RU" sz="1400" b="1">
+                <a:solidFill>
+                  <a:srgbClr val="18212B"/>
+                </a:solidFill>
+                <a:latin typeface="Aptos"/>
+                <a:cs typeface="Aptos"/>
+              </a:rPr>
+              <a:t>nginx</a:t>
+            </a:r>
+          </a:p>
+        </p:txBody>
+      </p:sp>
+      <p:sp>
+        <p:nvSpPr>
+          <p:cNvPr id="23" name="Shape 23"/>
+          <p:cNvSpPr txBox="1"/>
+          <p:nvPr/>
+        </p:nvSpPr>
+        <p:spPr>
+          <a:xfrm>
+            <a:off x="5577840" y="1874520"/>
+            <a:ext cx="1828800" cy="640080"/>
+          </a:xfrm>
+          <a:prstGeom prst="roundRect">
+            <a:avLst/>
+          </a:prstGeom>
+          <a:solidFill>
+            <a:srgbClr val="FFFFFF"/>
+          </a:solidFill>
+          <a:ln w="12700">
+            <a:solidFill>
+              <a:srgbClr val="0B6E69"/>
+            </a:solidFill>
+          </a:ln>
+        </p:spPr>
+        <p:txBody>
+          <a:bodyPr wrap="square" lIns="177800" tIns="177800" rIns="177800" bIns="177800"/>
+          <a:lstStyle/>
+          <a:p>
+            <a:pPr algn="ctr"/>
+            <a:r>
+              <a:rPr lang="ru-RU" sz="1400" b="1">
+                <a:solidFill>
+                  <a:srgbClr val="18212B"/>
+                </a:solidFill>
+                <a:latin typeface="Aptos"/>
+                <a:cs typeface="Aptos"/>
+              </a:rPr>
+              <a:t>app-api-1</a:t>
+            </a:r>
+          </a:p>
+        </p:txBody>
+      </p:sp>
+      <p:sp>
+        <p:nvSpPr>
+          <p:cNvPr id="24" name="Shape 24"/>
+          <p:cNvSpPr txBox="1"/>
+          <p:nvPr/>
+        </p:nvSpPr>
+        <p:spPr>
+          <a:xfrm>
+            <a:off x="5577840" y="3749040"/>
+            <a:ext cx="1828800" cy="640080"/>
+          </a:xfrm>
+          <a:prstGeom prst="roundRect">
+            <a:avLst/>
+          </a:prstGeom>
+          <a:solidFill>
+            <a:srgbClr val="FFFFFF"/>
+          </a:solidFill>
+          <a:ln w="12700">
+            <a:solidFill>
+              <a:srgbClr val="0B6E69"/>
+            </a:solidFill>
+          </a:ln>
+        </p:spPr>
+        <p:txBody>
+          <a:bodyPr wrap="square" lIns="177800" tIns="177800" rIns="177800" bIns="177800"/>
+          <a:lstStyle/>
+          <a:p>
+            <a:pPr algn="ctr"/>
+            <a:r>
+              <a:rPr lang="ru-RU" sz="1400" b="1">
+                <a:solidFill>
+                  <a:srgbClr val="18212B"/>
+                </a:solidFill>
+                <a:latin typeface="Aptos"/>
+                <a:cs typeface="Aptos"/>
+              </a:rPr>
+              <a:t>app-api-2</a:t>
+            </a:r>
+          </a:p>
+        </p:txBody>
+      </p:sp>
+      <p:sp>
+        <p:nvSpPr>
+          <p:cNvPr id="25" name="Shape 25"/>
+          <p:cNvSpPr txBox="1"/>
+          <p:nvPr/>
+        </p:nvSpPr>
+        <p:spPr>
+          <a:xfrm>
+            <a:off x="8321040" y="2788920"/>
+            <a:ext cx="2194560" cy="731520"/>
+          </a:xfrm>
+          <a:prstGeom prst="roundRect">
+            <a:avLst/>
+          </a:prstGeom>
+          <a:solidFill>
+            <a:srgbClr val="E8F3F1"/>
+          </a:solidFill>
+          <a:ln w="12700">
+            <a:solidFill>
+              <a:srgbClr val="0B6E69"/>
+            </a:solidFill>
+          </a:ln>
+        </p:spPr>
+        <p:txBody>
+          <a:bodyPr wrap="square" lIns="177800" tIns="177800" rIns="177800" bIns="177800"/>
+          <a:lstStyle/>
+          <a:p>
+            <a:pPr algn="ctr"/>
+            <a:r>
+              <a:rPr lang="ru-RU" sz="1400" b="1">
+                <a:solidFill>
+                  <a:srgbClr val="18212B"/>
+                </a:solidFill>
+                <a:latin typeface="Aptos"/>
+                <a:cs typeface="Aptos"/>
+              </a:rPr>
+              <a:t>Redis backplane</a:t>
+            </a:r>
+          </a:p>
+        </p:txBody>
+      </p:sp>
+      <p:cxnSp>
+        <p:nvCxnSpPr>
+          <p:cNvPr id="50" name="Connector 50"/>
+          <p:cNvCxnSpPr/>
+          <p:nvPr/>
+        </p:nvCxnSpPr>
+        <p:spPr>
+          <a:xfrm flipH="0" flipV="0">
+            <a:off x="2560320" y="2194560"/>
+            <a:ext cx="731520" cy="795528"/>
+          </a:xfrm>
+          <a:prstGeom prst="straightConnector1">
+            <a:avLst/>
+          </a:prstGeom>
+          <a:ln w="15875" cap="flat">
+            <a:solidFill>
+              <a:srgbClr val="0B6E69"/>
+            </a:solidFill>
+            <a:tailEnd type="triangle"/>
+          </a:ln>
+        </p:spPr>
+      </p:cxnSp>
+      <p:cxnSp>
+        <p:nvCxnSpPr>
+          <p:cNvPr id="51" name="Connector 51"/>
+          <p:cNvCxnSpPr/>
+          <p:nvPr/>
+        </p:nvCxnSpPr>
+        <p:spPr>
+          <a:xfrm flipH="0" flipV="1">
+            <a:off x="2560320" y="3319272"/>
+            <a:ext cx="731520" cy="749808"/>
+          </a:xfrm>
+          <a:prstGeom prst="straightConnector1">
+            <a:avLst/>
+          </a:prstGeom>
+          <a:ln w="15875" cap="flat">
+            <a:solidFill>
+              <a:srgbClr val="0B6E69"/>
+            </a:solidFill>
+            <a:tailEnd type="triangle"/>
+          </a:ln>
+        </p:spPr>
+      </p:cxnSp>
+      <p:cxnSp>
+        <p:nvCxnSpPr>
+          <p:cNvPr id="52" name="Connector 52"/>
+          <p:cNvCxnSpPr/>
+          <p:nvPr/>
+        </p:nvCxnSpPr>
+        <p:spPr>
+          <a:xfrm flipH="0" flipV="1">
+            <a:off x="4663440" y="2194560"/>
+            <a:ext cx="914400" cy="795528"/>
+          </a:xfrm>
+          <a:prstGeom prst="straightConnector1">
+            <a:avLst/>
+          </a:prstGeom>
+          <a:ln w="15875" cap="flat">
+            <a:solidFill>
+              <a:srgbClr val="0B6E69"/>
+            </a:solidFill>
+            <a:tailEnd type="triangle"/>
+          </a:ln>
+        </p:spPr>
+      </p:cxnSp>
+      <p:cxnSp>
+        <p:nvCxnSpPr>
+          <p:cNvPr id="53" name="Connector 53"/>
+          <p:cNvCxnSpPr/>
+          <p:nvPr/>
+        </p:nvCxnSpPr>
+        <p:spPr>
+          <a:xfrm flipH="0" flipV="0">
+            <a:off x="4663440" y="3319272"/>
+            <a:ext cx="914400" cy="749808"/>
+          </a:xfrm>
+          <a:prstGeom prst="straightConnector1">
+            <a:avLst/>
+          </a:prstGeom>
+          <a:ln w="15875" cap="flat">
+            <a:solidFill>
+              <a:srgbClr val="0B6E69"/>
+            </a:solidFill>
+            <a:tailEnd type="triangle"/>
+          </a:ln>
+        </p:spPr>
+      </p:cxnSp>
+      <p:cxnSp>
+        <p:nvCxnSpPr>
+          <p:cNvPr id="54" name="Connector 54"/>
+          <p:cNvCxnSpPr/>
+          <p:nvPr/>
+        </p:nvCxnSpPr>
+        <p:spPr>
+          <a:xfrm flipH="0" flipV="0">
+            <a:off x="7406640" y="2194560"/>
+            <a:ext cx="914400" cy="795528"/>
+          </a:xfrm>
+          <a:prstGeom prst="straightConnector1">
+            <a:avLst/>
+          </a:prstGeom>
+          <a:ln w="15875" cap="flat">
+            <a:solidFill>
+              <a:srgbClr val="0B6E69"/>
+            </a:solidFill>
+            <a:headEnd type="triangle"/>
+            <a:tailEnd type="triangle"/>
+          </a:ln>
+        </p:spPr>
+      </p:cxnSp>
+      <p:cxnSp>
+        <p:nvCxnSpPr>
+          <p:cNvPr id="55" name="Connector 55"/>
+          <p:cNvCxnSpPr/>
+          <p:nvPr/>
+        </p:nvCxnSpPr>
+        <p:spPr>
+          <a:xfrm flipH="0" flipV="1">
+            <a:off x="7406640" y="3319272"/>
+            <a:ext cx="914400" cy="749808"/>
+          </a:xfrm>
+          <a:prstGeom prst="straightConnector1">
+            <a:avLst/>
+          </a:prstGeom>
+          <a:ln w="15875" cap="flat">
+            <a:solidFill>
+              <a:srgbClr val="0B6E69"/>
+            </a:solidFill>
+            <a:headEnd type="triangle"/>
+            <a:tailEnd type="triangle"/>
+          </a:ln>
+        </p:spPr>
+      </p:cxnSp>
+      <p:sp>
+        <p:nvSpPr>
+          <p:cNvPr id="26" name="Shape 26"/>
+          <p:cNvSpPr txBox="1"/>
+          <p:nvPr/>
+        </p:nvSpPr>
+        <p:spPr>
+          <a:xfrm>
+            <a:off x="640080" y="4937760"/>
+            <a:ext cx="10972800" cy="457200"/>
+          </a:xfrm>
+          <a:prstGeom prst="roundRect">
+            <a:avLst/>
+          </a:prstGeom>
+          <a:noFill/>
+          <a:ln>
+            <a:noFill/>
+          </a:ln>
+        </p:spPr>
+        <p:txBody>
+          <a:bodyPr wrap="square" lIns="177800" tIns="177800" rIns="177800" bIns="177800"/>
+          <a:lstStyle/>
+          <a:p>
+            <a:pPr algn="ctr"/>
+            <a:r>
+              <a:rPr lang="ru-RU" sz="1300" b="0">
+                <a:solidFill>
+                  <a:srgbClr val="5E6A75"/>
+                </a:solidFill>
+                <a:latin typeface="Aptos"/>
+                <a:cs typeface="Aptos"/>
+              </a:rPr>
+              <a:t>Событие публикуется в Redis · доставляется обоим узлам · группы SignalR остаются локальным runtime-состоянием</a:t>
+            </a:r>
+          </a:p>
+        </p:txBody>
+      </p:sp>
+      <p:sp>
+        <p:nvSpPr>
+          <p:cNvPr id="27" name="Shape 27"/>
+          <p:cNvSpPr txBox="1"/>
+          <p:nvPr/>
+        </p:nvSpPr>
+        <p:spPr>
+          <a:xfrm>
+            <a:off x="640080" y="5440680"/>
+            <a:ext cx="10972800" cy="365760"/>
+          </a:xfrm>
+          <a:prstGeom prst="roundRect">
+            <a:avLst/>
+          </a:prstGeom>
+          <a:noFill/>
+          <a:ln>
+            <a:noFill/>
+          </a:ln>
+        </p:spPr>
+        <p:txBody>
+          <a:bodyPr wrap="square" lIns="177800" tIns="177800" rIns="177800" bIns="177800"/>
+          <a:lstStyle/>
+          <a:p>
+            <a:pPr algn="ctr"/>
+            <a:r>
+              <a:rPr lang="ru-RU" sz="1100" b="0">
+                <a:solidFill>
+                  <a:srgbClr val="5E6A75"/>
+                </a:solidFill>
+                <a:latin typeface="Aptos"/>
+                <a:cs typeface="Aptos"/>
+              </a:rPr>
+              <a:t>Оба экземпляра подключены к общей PostgreSQL; на схеме показан только канал real-time-доставки.</a:t>
             </a:r>
           </a:p>
         </p:txBody>
@@ -5037,7 +5359,7 @@
                 <a:latin typeface="Aptos"/>
                 <a:cs typeface="Aptos"/>
               </a:rPr>
-              <a:t>Главный результат</a:t>
+              <a:t>Программная реализация</a:t>
             </a:r>
           </a:p>
         </p:txBody>
@@ -5074,7 +5396,7 @@
                 <a:latin typeface="Aptos"/>
                 <a:cs typeface="Aptos"/>
               </a:rPr>
-              <a:t>Один код и один сценарий — разница только в наличии Redis-канала</a:t>
+              <a:t>Backend, frontend, тесты и проверочный клиент закрывают задачу как разработку ПО</a:t>
             </a:r>
           </a:p>
         </p:txBody>
@@ -5087,18 +5409,18 @@
         </p:nvSpPr>
         <p:spPr>
           <a:xfrm>
-            <a:off x="685800" y="1554480"/>
-            <a:ext cx="5349240" cy="3291840"/>
+            <a:off x="685800" y="1508760"/>
+            <a:ext cx="5349240" cy="1828800"/>
           </a:xfrm>
           <a:prstGeom prst="roundRect">
             <a:avLst/>
           </a:prstGeom>
           <a:solidFill>
-            <a:srgbClr val="FFF3D8"/>
+            <a:srgbClr val="FFFFFF"/>
           </a:solidFill>
           <a:ln w="12700">
             <a:solidFill>
-              <a:srgbClr val="C76F2E"/>
+              <a:srgbClr val="D7D2C7"/>
             </a:solidFill>
           </a:ln>
         </p:spPr>
@@ -5106,22 +5428,22 @@
           <a:bodyPr wrap="square" lIns="177800" tIns="177800" rIns="177800" bIns="177800"/>
           <a:lstStyle/>
           <a:p>
-            <a:pPr algn="ctr"/>
-            <a:r>
-              <a:rPr lang="ru-RU" sz="1800" b="1">
-                <a:solidFill>
-                  <a:srgbClr val="18212B"/>
-                </a:solidFill>
-                <a:latin typeface="Aptos"/>
-                <a:cs typeface="Aptos"/>
-              </a:rPr>
-              <a:t>Без backplane</a:t>
-            </a:r>
-          </a:p>
-          <a:p>
-            <a:pPr algn="ctr"/>
-            <a:r>
-              <a:rPr lang="ru-RU" sz="1800" b="1">
+            <a:pPr algn="l"/>
+            <a:r>
+              <a:rPr lang="ru-RU" sz="1400" b="0">
+                <a:solidFill>
+                  <a:srgbClr val="18212B"/>
+                </a:solidFill>
+                <a:latin typeface="Aptos"/>
+                <a:cs typeface="Aptos"/>
+              </a:rPr>
+              <a:t>Backend</a:t>
+            </a:r>
+          </a:p>
+          <a:p>
+            <a:pPr algn="l"/>
+            <a:r>
+              <a:rPr lang="ru-RU" sz="1400" b="0">
                 <a:solidFill>
                   <a:srgbClr val="18212B"/>
                 </a:solidFill>
@@ -5132,35 +5454,89 @@
             </a:r>
           </a:p>
           <a:p>
-            <a:pPr algn="ctr"/>
-            <a:r>
-              <a:rPr lang="ru-RU" sz="1800" b="1">
-                <a:solidFill>
-                  <a:srgbClr val="18212B"/>
-                </a:solidFill>
-                <a:latin typeface="Aptos"/>
-                <a:cs typeface="Aptos"/>
-              </a:rPr>
-              <a:t>ReceiveReportPatch</a:t>
-            </a:r>
-          </a:p>
-          <a:p>
-            <a:pPr algn="ctr"/>
-            <a:r>
-              <a:rPr lang="ru-RU" sz="1800" b="1">
-                <a:solidFill>
-                  <a:srgbClr val="18212B"/>
-                </a:solidFill>
-                <a:latin typeface="Aptos"/>
-                <a:cs typeface="Aptos"/>
-              </a:rPr>
-              <a:t>timed out · 10 000 мс</a:t>
-            </a:r>
-          </a:p>
-          <a:p>
-            <a:pPr algn="ctr"/>
-            <a:r>
-              <a:rPr lang="ru-RU" sz="1800" b="1">
+            <a:pPr algn="l"/>
+            <a:r>
+              <a:rPr lang="ru-RU" sz="1400" b="0">
+                <a:solidFill>
+                  <a:srgbClr val="18212B"/>
+                </a:solidFill>
+                <a:latin typeface="Aptos"/>
+                <a:cs typeface="Aptos"/>
+              </a:rPr>
+              <a:t>AddStackExchangeRedis через REDIS_CONNECTION_STRING</a:t>
+            </a:r>
+          </a:p>
+          <a:p>
+            <a:pPr algn="l"/>
+            <a:r>
+              <a:rPr lang="ru-RU" sz="1400" b="0">
+                <a:solidFill>
+                  <a:srgbClr val="18212B"/>
+                </a:solidFill>
+                <a:latin typeface="Aptos"/>
+                <a:cs typeface="Aptos"/>
+              </a:rPr>
+              <a:t>GetConnectionDiagnosticsAsync</a:t>
+            </a:r>
+          </a:p>
+          <a:p>
+            <a:pPr algn="l"/>
+            <a:r>
+              <a:rPr lang="ru-RU" sz="1400" b="0">
+                <a:solidFill>
+                  <a:srgbClr val="18212B"/>
+                </a:solidFill>
+                <a:latin typeface="Aptos"/>
+                <a:cs typeface="Aptos"/>
+              </a:rPr>
+              <a:t>SendToGroupAsync с eventId и GroupExcept</a:t>
+            </a:r>
+          </a:p>
+        </p:txBody>
+      </p:sp>
+      <p:sp>
+        <p:nvSpPr>
+          <p:cNvPr id="21" name="Shape 21"/>
+          <p:cNvSpPr txBox="1"/>
+          <p:nvPr/>
+        </p:nvSpPr>
+        <p:spPr>
+          <a:xfrm>
+            <a:off x="6172200" y="1508760"/>
+            <a:ext cx="5349240" cy="1828800"/>
+          </a:xfrm>
+          <a:prstGeom prst="roundRect">
+            <a:avLst/>
+          </a:prstGeom>
+          <a:solidFill>
+            <a:srgbClr val="FFFFFF"/>
+          </a:solidFill>
+          <a:ln w="12700">
+            <a:solidFill>
+              <a:srgbClr val="D7D2C7"/>
+            </a:solidFill>
+          </a:ln>
+        </p:spPr>
+        <p:txBody>
+          <a:bodyPr wrap="square" lIns="177800" tIns="177800" rIns="177800" bIns="177800"/>
+          <a:lstStyle/>
+          <a:p>
+            <a:pPr algn="l"/>
+            <a:r>
+              <a:rPr lang="ru-RU" sz="1400" b="0">
+                <a:solidFill>
+                  <a:srgbClr val="18212B"/>
+                </a:solidFill>
+                <a:latin typeface="Aptos"/>
+                <a:cs typeface="Aptos"/>
+              </a:rPr>
+              <a:t>Frontend</a:t>
+            </a:r>
+          </a:p>
+          <a:p>
+            <a:pPr algn="l"/>
+            <a:r>
+              <a:rPr lang="ru-RU" sz="1400" b="0">
                 <a:solidFill>
                   <a:srgbClr val="18212B"/>
                 </a:solidFill>
@@ -5171,30 +5547,56 @@
             </a:r>
           </a:p>
           <a:p>
-            <a:pPr algn="ctr"/>
-            <a:r>
-              <a:rPr lang="ru-RU" sz="1800" b="1">
-                <a:solidFill>
-                  <a:srgbClr val="18212B"/>
-                </a:solidFill>
-                <a:latin typeface="Aptos"/>
-                <a:cs typeface="Aptos"/>
-              </a:rPr>
-              <a:t>Событие, созданное на app-api-1, не дошло до клиента на app-api-2</a:t>
-            </a:r>
-          </a:p>
-        </p:txBody>
-      </p:sp>
-      <p:sp>
-        <p:nvSpPr>
-          <p:cNvPr id="21" name="Shape 21"/>
-          <p:cNvSpPr txBox="1"/>
-          <p:nvPr/>
-        </p:nvSpPr>
-        <p:spPr>
-          <a:xfrm>
-            <a:off x="6172200" y="1554480"/>
-            <a:ext cx="5349240" cy="3291840"/>
+            <a:pPr algn="l"/>
+            <a:r>
+              <a:rPr lang="ru-RU" sz="1400" b="0">
+                <a:solidFill>
+                  <a:srgbClr val="18212B"/>
+                </a:solidFill>
+                <a:latin typeface="Aptos"/>
+                <a:cs typeface="Aptos"/>
+              </a:rPr>
+              <a:t>WebSocket transport</a:t>
+            </a:r>
+          </a:p>
+          <a:p>
+            <a:pPr algn="l"/>
+            <a:r>
+              <a:rPr lang="ru-RU" sz="1400" b="0">
+                <a:solidFill>
+                  <a:srgbClr val="18212B"/>
+                </a:solidFill>
+                <a:latin typeface="Aptos"/>
+                <a:cs typeface="Aptos"/>
+              </a:rPr>
+              <a:t>automatic reconnect</a:t>
+            </a:r>
+          </a:p>
+          <a:p>
+            <a:pPr algn="l"/>
+            <a:r>
+              <a:rPr lang="ru-RU" sz="1400" b="0">
+                <a:solidFill>
+                  <a:srgbClr val="18212B"/>
+                </a:solidFill>
+                <a:latin typeface="Aptos"/>
+                <a:cs typeface="Aptos"/>
+              </a:rPr>
+              <a:t>повторный JoinReportGroupAsync после reconnect</a:t>
+            </a:r>
+          </a:p>
+        </p:txBody>
+      </p:sp>
+      <p:sp>
+        <p:nvSpPr>
+          <p:cNvPr id="22" name="Shape 22"/>
+          <p:cNvSpPr txBox="1"/>
+          <p:nvPr/>
+        </p:nvSpPr>
+        <p:spPr>
+          <a:xfrm>
+            <a:off x="685800" y="3703320"/>
+            <a:ext cx="5349240" cy="1920240"/>
           </a:xfrm>
           <a:prstGeom prst="roundRect">
             <a:avLst/>
@@ -5212,22 +5614,22 @@
           <a:bodyPr wrap="square" lIns="177800" tIns="177800" rIns="177800" bIns="177800"/>
           <a:lstStyle/>
           <a:p>
-            <a:pPr algn="ctr"/>
-            <a:r>
-              <a:rPr lang="ru-RU" sz="1800" b="1">
-                <a:solidFill>
-                  <a:srgbClr val="18212B"/>
-                </a:solidFill>
-                <a:latin typeface="Aptos"/>
-                <a:cs typeface="Aptos"/>
-              </a:rPr>
-              <a:t>С backplane</a:t>
-            </a:r>
-          </a:p>
-          <a:p>
-            <a:pPr algn="ctr"/>
-            <a:r>
-              <a:rPr lang="ru-RU" sz="1800" b="1">
+            <a:pPr algn="l"/>
+            <a:r>
+              <a:rPr lang="ru-RU" sz="1400" b="1">
+                <a:solidFill>
+                  <a:srgbClr val="18212B"/>
+                </a:solidFill>
+                <a:latin typeface="Aptos"/>
+                <a:cs typeface="Aptos"/>
+              </a:rPr>
+              <a:t>Тесты</a:t>
+            </a:r>
+          </a:p>
+          <a:p>
+            <a:pPr algn="l"/>
+            <a:r>
+              <a:rPr lang="ru-RU" sz="1400" b="1">
                 <a:solidFill>
                   <a:srgbClr val="18212B"/>
                 </a:solidFill>
@@ -5238,35 +5640,63 @@
             </a:r>
           </a:p>
           <a:p>
-            <a:pPr algn="ctr"/>
-            <a:r>
-              <a:rPr lang="ru-RU" sz="1800" b="1">
-                <a:solidFill>
-                  <a:srgbClr val="18212B"/>
-                </a:solidFill>
-                <a:latin typeface="Aptos"/>
-                <a:cs typeface="Aptos"/>
-              </a:rPr>
-              <a:t>ok: true · ReceiveReportPatch получен</a:t>
-            </a:r>
-          </a:p>
-          <a:p>
-            <a:pPr algn="ctr"/>
-            <a:r>
-              <a:rPr lang="ru-RU" sz="1800" b="1">
-                <a:solidFill>
-                  <a:srgbClr val="18212B"/>
-                </a:solidFill>
-                <a:latin typeface="Aptos"/>
-                <a:cs typeface="Aptos"/>
-              </a:rPr>
-              <a:t>deliveryLatencyMs ≈ 9,5 мс</a:t>
-            </a:r>
-          </a:p>
-          <a:p>
-            <a:pPr algn="ctr"/>
-            <a:r>
-              <a:rPr lang="ru-RU" sz="1800" b="1">
+            <a:pPr algn="l"/>
+            <a:r>
+              <a:rPr lang="ru-RU" sz="1400" b="1">
+                <a:solidFill>
+                  <a:srgbClr val="18212B"/>
+                </a:solidFill>
+                <a:latin typeface="Aptos"/>
+                <a:cs typeface="Aptos"/>
+              </a:rPr>
+              <a:t>reconnectJoinHandler проверяет отсутствие лишнего join, повторное вступление и использование актуального reportId.</a:t>
+            </a:r>
+          </a:p>
+        </p:txBody>
+      </p:sp>
+      <p:sp>
+        <p:nvSpPr>
+          <p:cNvPr id="23" name="Shape 23"/>
+          <p:cNvSpPr txBox="1"/>
+          <p:nvPr/>
+        </p:nvSpPr>
+        <p:spPr>
+          <a:xfrm>
+            <a:off x="6172200" y="3703320"/>
+            <a:ext cx="5349240" cy="1920240"/>
+          </a:xfrm>
+          <a:prstGeom prst="roundRect">
+            <a:avLst/>
+          </a:prstGeom>
+          <a:solidFill>
+            <a:srgbClr val="E8F3F1"/>
+          </a:solidFill>
+          <a:ln w="12700">
+            <a:solidFill>
+              <a:srgbClr val="0B6E69"/>
+            </a:solidFill>
+          </a:ln>
+        </p:spPr>
+        <p:txBody>
+          <a:bodyPr wrap="square" lIns="177800" tIns="177800" rIns="177800" bIns="177800"/>
+          <a:lstStyle/>
+          <a:p>
+            <a:pPr algn="l"/>
+            <a:r>
+              <a:rPr lang="ru-RU" sz="1400" b="1">
+                <a:solidFill>
+                  <a:srgbClr val="18212B"/>
+                </a:solidFill>
+                <a:latin typeface="Aptos"/>
+                <a:cs typeface="Aptos"/>
+              </a:rPr>
+              <a:t>Проверочный клиент</a:t>
+            </a:r>
+          </a:p>
+          <a:p>
+            <a:pPr algn="l"/>
+            <a:r>
+              <a:rPr lang="ru-RU" sz="1400" b="1">
                 <a:solidFill>
                   <a:srgbClr val="18212B"/>
                 </a:solidFill>
@@ -5277,53 +5707,29 @@
             </a:r>
           </a:p>
           <a:p>
-            <a:pPr algn="ctr"/>
-            <a:r>
-              <a:rPr lang="ru-RU" sz="1800" b="1">
-                <a:solidFill>
-                  <a:srgbClr val="18212B"/>
-                </a:solidFill>
-                <a:latin typeface="Aptos"/>
-                <a:cs typeface="Aptos"/>
-              </a:rPr>
-              <a:t>Клиент на app-api-2 получил событие с app-api-1</a:t>
-            </a:r>
-          </a:p>
-        </p:txBody>
-      </p:sp>
-      <p:sp>
-        <p:nvSpPr>
-          <p:cNvPr id="22" name="Shape 22"/>
-          <p:cNvSpPr txBox="1"/>
-          <p:nvPr/>
-        </p:nvSpPr>
-        <p:spPr>
-          <a:xfrm>
-            <a:off x="685800" y="5074920"/>
-            <a:ext cx="10835640" cy="777240"/>
-          </a:xfrm>
-          <a:prstGeom prst="roundRect">
-            <a:avLst/>
-          </a:prstGeom>
-          <a:noFill/>
-          <a:ln>
-            <a:noFill/>
-          </a:ln>
-        </p:spPr>
-        <p:txBody>
-          <a:bodyPr wrap="square" lIns="177800" tIns="177800" rIns="177800" bIns="177800"/>
-          <a:lstStyle/>
-          <a:p>
-            <a:pPr algn="ctr"/>
-            <a:r>
-              <a:rPr lang="ru-RU" sz="1300" b="0">
-                <a:solidFill>
-                  <a:srgbClr val="5E6A75"/>
-                </a:solidFill>
-                <a:latin typeface="Aptos"/>
-                <a:cs typeface="Aptos"/>
-              </a:rPr>
-              <a:t>Сопоставление двух режимов на одном стенде показывает причинную связь между включением межузлового канала SignalR и успешной доставкой события.</a:t>
+            <a:pPr algn="l"/>
+            <a:r>
+              <a:rPr lang="ru-RU" sz="1400" b="1">
+                <a:solidFill>
+                  <a:srgbClr val="18212B"/>
+                </a:solidFill>
+                <a:latin typeface="Aptos"/>
+                <a:cs typeface="Aptos"/>
+              </a:rPr>
+              <a:t>delivery · rejoin · failover · series</a:t>
+            </a:r>
+          </a:p>
+          <a:p>
+            <a:pPr algn="l"/>
+            <a:r>
+              <a:rPr lang="ru-RU" sz="1400" b="1">
+                <a:solidFill>
+                  <a:srgbClr val="18212B"/>
+                </a:solidFill>
+                <a:latin typeface="Aptos"/>
+                <a:cs typeface="Aptos"/>
+              </a:rPr>
+              <a:t>Фиксирует serverInstanceId, connectionId, событие и задержку.</a:t>
             </a:r>
           </a:p>
         </p:txBody>

--- a/build/pptx/vkr-defense-draft.pptx
+++ b/build/pptx/vkr-defense-draft.pptx
@@ -19,6 +19,7 @@
     <p:sldId id="267" r:id="rId13"/>
     <p:sldId id="268" r:id="rId14"/>
     <p:sldId id="269" r:id="rId15"/>
+    <p:sldId id="270" r:id="rId16"/>
   </p:sldIdLst>
   <p:sldSz cx="12192000" cy="6858000" type="wide"/>
   <p:notesSz cx="6858000" cy="9144000"/>
@@ -390,7 +391,7 @@
                 <a:latin typeface="Aptos"/>
                 <a:cs typeface="Aptos"/>
               </a:rPr>
-              <a:t>Программа испытаний</a:t>
+              <a:t>Программная реализация</a:t>
             </a:r>
           </a:p>
         </p:txBody>
@@ -427,7 +428,7 @@
                 <a:latin typeface="Aptos"/>
                 <a:cs typeface="Aptos"/>
               </a:rPr>
-              <a:t>Два режима по одному коду · четыре сценария проверки</a:t>
+              <a:t>Backend, frontend, тесты и проверочный клиент закрывают задачу как разработку ПО</a:t>
             </a:r>
           </a:p>
         </p:txBody>
@@ -440,8 +441,8 @@
         </p:nvSpPr>
         <p:spPr>
           <a:xfrm>
-            <a:off x="685800" y="1554480"/>
-            <a:ext cx="5349240" cy="4160520"/>
+            <a:off x="685800" y="1508760"/>
+            <a:ext cx="5349240" cy="1828800"/>
           </a:xfrm>
           <a:prstGeom prst="roundRect">
             <a:avLst/>
@@ -461,20 +462,20 @@
           <a:p>
             <a:pPr algn="l"/>
             <a:r>
-              <a:rPr lang="ru-RU" sz="1500" b="0">
-                <a:solidFill>
-                  <a:srgbClr val="18212B"/>
-                </a:solidFill>
-                <a:latin typeface="Aptos"/>
-                <a:cs typeface="Aptos"/>
-              </a:rPr>
-              <a:t>Два режима</a:t>
-            </a:r>
-          </a:p>
-          <a:p>
-            <a:pPr algn="l"/>
-            <a:r>
-              <a:rPr lang="ru-RU" sz="1500" b="0">
+              <a:rPr lang="ru-RU" sz="1400" b="0">
+                <a:solidFill>
+                  <a:srgbClr val="18212B"/>
+                </a:solidFill>
+                <a:latin typeface="Aptos"/>
+                <a:cs typeface="Aptos"/>
+              </a:rPr>
+              <a:t>Backend</a:t>
+            </a:r>
+          </a:p>
+          <a:p>
+            <a:pPr algn="l"/>
+            <a:r>
+              <a:rPr lang="ru-RU" sz="1400" b="0">
                 <a:solidFill>
                   <a:srgbClr val="18212B"/>
                 </a:solidFill>
@@ -487,66 +488,40 @@
           <a:p>
             <a:pPr algn="l"/>
             <a:r>
-              <a:rPr lang="ru-RU" sz="1500" b="0">
-                <a:solidFill>
-                  <a:srgbClr val="18212B"/>
-                </a:solidFill>
-                <a:latin typeface="Aptos"/>
-                <a:cs typeface="Aptos"/>
-              </a:rPr>
-              <a:t>• Без межузлового канала — воспроизведение проблемы</a:t>
-            </a:r>
-          </a:p>
-          <a:p>
-            <a:pPr algn="l"/>
-            <a:r>
-              <a:rPr lang="ru-RU" sz="1500" b="0">
-                <a:solidFill>
-                  <a:srgbClr val="18212B"/>
-                </a:solidFill>
-                <a:latin typeface="Aptos"/>
-                <a:cs typeface="Aptos"/>
-              </a:rPr>
-              <a:t/>
-            </a:r>
-          </a:p>
-          <a:p>
-            <a:pPr algn="l"/>
-            <a:r>
-              <a:rPr lang="ru-RU" sz="1500" b="0">
-                <a:solidFill>
-                  <a:srgbClr val="18212B"/>
-                </a:solidFill>
-                <a:latin typeface="Aptos"/>
-                <a:cs typeface="Aptos"/>
-              </a:rPr>
-              <a:t>• С межузловым каналом — проверка решения</a:t>
-            </a:r>
-          </a:p>
-          <a:p>
-            <a:pPr algn="l"/>
-            <a:r>
-              <a:rPr lang="ru-RU" sz="1500" b="0">
-                <a:solidFill>
-                  <a:srgbClr val="18212B"/>
-                </a:solidFill>
-                <a:latin typeface="Aptos"/>
-                <a:cs typeface="Aptos"/>
-              </a:rPr>
-              <a:t/>
-            </a:r>
-          </a:p>
-          <a:p>
-            <a:pPr algn="l"/>
-            <a:r>
-              <a:rPr lang="ru-RU" sz="1500" b="0">
-                <a:solidFill>
-                  <a:srgbClr val="18212B"/>
-                </a:solidFill>
-                <a:latin typeface="Aptos"/>
-                <a:cs typeface="Aptos"/>
-              </a:rPr>
-              <a:t>Один и тот же код, один и тот же сценарий; отличие — наличие Redis backplane.</a:t>
+              <a:rPr lang="ru-RU" sz="1400" b="0">
+                <a:solidFill>
+                  <a:srgbClr val="18212B"/>
+                </a:solidFill>
+                <a:latin typeface="Aptos"/>
+                <a:cs typeface="Aptos"/>
+              </a:rPr>
+              <a:t>AddStackExchangeRedis через REDIS_CONNECTION_STRING</a:t>
+            </a:r>
+          </a:p>
+          <a:p>
+            <a:pPr algn="l"/>
+            <a:r>
+              <a:rPr lang="ru-RU" sz="1400" b="0">
+                <a:solidFill>
+                  <a:srgbClr val="18212B"/>
+                </a:solidFill>
+                <a:latin typeface="Aptos"/>
+                <a:cs typeface="Aptos"/>
+              </a:rPr>
+              <a:t>GetConnectionDiagnosticsAsync</a:t>
+            </a:r>
+          </a:p>
+          <a:p>
+            <a:pPr algn="l"/>
+            <a:r>
+              <a:rPr lang="ru-RU" sz="1400" b="0">
+                <a:solidFill>
+                  <a:srgbClr val="18212B"/>
+                </a:solidFill>
+                <a:latin typeface="Aptos"/>
+                <a:cs typeface="Aptos"/>
+              </a:rPr>
+              <a:t>SendToGroupAsync с eventId и GroupExcept</a:t>
             </a:r>
           </a:p>
         </p:txBody>
@@ -559,8 +534,8 @@
         </p:nvSpPr>
         <p:spPr>
           <a:xfrm>
-            <a:off x="6172200" y="1554480"/>
-            <a:ext cx="5349240" cy="4160520"/>
+            <a:off x="6172200" y="1508760"/>
+            <a:ext cx="5349240" cy="1828800"/>
           </a:xfrm>
           <a:prstGeom prst="roundRect">
             <a:avLst/>
@@ -580,20 +555,20 @@
           <a:p>
             <a:pPr algn="l"/>
             <a:r>
-              <a:rPr lang="ru-RU" sz="1500" b="0">
-                <a:solidFill>
-                  <a:srgbClr val="18212B"/>
-                </a:solidFill>
-                <a:latin typeface="Aptos"/>
-                <a:cs typeface="Aptos"/>
-              </a:rPr>
-              <a:t>Четыре сценария</a:t>
-            </a:r>
-          </a:p>
-          <a:p>
-            <a:pPr algn="l"/>
-            <a:r>
-              <a:rPr lang="ru-RU" sz="1500" b="0">
+              <a:rPr lang="ru-RU" sz="1400" b="0">
+                <a:solidFill>
+                  <a:srgbClr val="18212B"/>
+                </a:solidFill>
+                <a:latin typeface="Aptos"/>
+                <a:cs typeface="Aptos"/>
+              </a:rPr>
+              <a:t>Frontend</a:t>
+            </a:r>
+          </a:p>
+          <a:p>
+            <a:pPr algn="l"/>
+            <a:r>
+              <a:rPr lang="ru-RU" sz="1400" b="0">
                 <a:solidFill>
                   <a:srgbClr val="18212B"/>
                 </a:solidFill>
@@ -606,20 +581,87 @@
           <a:p>
             <a:pPr algn="l"/>
             <a:r>
-              <a:rPr lang="ru-RU" sz="1500" b="0">
-                <a:solidFill>
-                  <a:srgbClr val="18212B"/>
-                </a:solidFill>
-                <a:latin typeface="Aptos"/>
-                <a:cs typeface="Aptos"/>
-              </a:rPr>
-              <a:t>• Одиночная доставка между узлами</a:t>
-            </a:r>
-          </a:p>
-          <a:p>
-            <a:pPr algn="l"/>
-            <a:r>
-              <a:rPr lang="ru-RU" sz="1500" b="0">
+              <a:rPr lang="ru-RU" sz="1400" b="0">
+                <a:solidFill>
+                  <a:srgbClr val="18212B"/>
+                </a:solidFill>
+                <a:latin typeface="Aptos"/>
+                <a:cs typeface="Aptos"/>
+              </a:rPr>
+              <a:t>WebSocket transport</a:t>
+            </a:r>
+          </a:p>
+          <a:p>
+            <a:pPr algn="l"/>
+            <a:r>
+              <a:rPr lang="ru-RU" sz="1400" b="0">
+                <a:solidFill>
+                  <a:srgbClr val="18212B"/>
+                </a:solidFill>
+                <a:latin typeface="Aptos"/>
+                <a:cs typeface="Aptos"/>
+              </a:rPr>
+              <a:t>automatic reconnect</a:t>
+            </a:r>
+          </a:p>
+          <a:p>
+            <a:pPr algn="l"/>
+            <a:r>
+              <a:rPr lang="ru-RU" sz="1400" b="0">
+                <a:solidFill>
+                  <a:srgbClr val="18212B"/>
+                </a:solidFill>
+                <a:latin typeface="Aptos"/>
+                <a:cs typeface="Aptos"/>
+              </a:rPr>
+              <a:t>повторный JoinReportGroupAsync после reconnect</a:t>
+            </a:r>
+          </a:p>
+        </p:txBody>
+      </p:sp>
+      <p:sp>
+        <p:nvSpPr>
+          <p:cNvPr id="22" name="Shape 22"/>
+          <p:cNvSpPr txBox="1"/>
+          <p:nvPr/>
+        </p:nvSpPr>
+        <p:spPr>
+          <a:xfrm>
+            <a:off x="685800" y="3703320"/>
+            <a:ext cx="5349240" cy="1920240"/>
+          </a:xfrm>
+          <a:prstGeom prst="roundRect">
+            <a:avLst/>
+          </a:prstGeom>
+          <a:solidFill>
+            <a:srgbClr val="E8F3F1"/>
+          </a:solidFill>
+          <a:ln w="12700">
+            <a:solidFill>
+              <a:srgbClr val="0B6E69"/>
+            </a:solidFill>
+          </a:ln>
+        </p:spPr>
+        <p:txBody>
+          <a:bodyPr wrap="square" lIns="177800" tIns="177800" rIns="177800" bIns="177800"/>
+          <a:lstStyle/>
+          <a:p>
+            <a:pPr algn="l"/>
+            <a:r>
+              <a:rPr lang="ru-RU" sz="1400" b="1">
+                <a:solidFill>
+                  <a:srgbClr val="18212B"/>
+                </a:solidFill>
+                <a:latin typeface="Aptos"/>
+                <a:cs typeface="Aptos"/>
+              </a:rPr>
+              <a:t>Тесты</a:t>
+            </a:r>
+          </a:p>
+          <a:p>
+            <a:pPr algn="l"/>
+            <a:r>
+              <a:rPr lang="ru-RU" sz="1400" b="1">
                 <a:solidFill>
                   <a:srgbClr val="18212B"/>
                 </a:solidFill>
@@ -632,20 +674,61 @@
           <a:p>
             <a:pPr algn="l"/>
             <a:r>
-              <a:rPr lang="ru-RU" sz="1500" b="0">
-                <a:solidFill>
-                  <a:srgbClr val="18212B"/>
-                </a:solidFill>
-                <a:latin typeface="Aptos"/>
-                <a:cs typeface="Aptos"/>
-              </a:rPr>
-              <a:t>• Серия из 30 итераций</a:t>
-            </a:r>
-          </a:p>
-          <a:p>
-            <a:pPr algn="l"/>
-            <a:r>
-              <a:rPr lang="ru-RU" sz="1500" b="0">
+              <a:rPr lang="ru-RU" sz="1400" b="1">
+                <a:solidFill>
+                  <a:srgbClr val="18212B"/>
+                </a:solidFill>
+                <a:latin typeface="Aptos"/>
+                <a:cs typeface="Aptos"/>
+              </a:rPr>
+              <a:t>reconnectJoinHandler проверяет отсутствие лишнего join, повторное вступление и использование актуального reportId.</a:t>
+            </a:r>
+          </a:p>
+        </p:txBody>
+      </p:sp>
+      <p:sp>
+        <p:nvSpPr>
+          <p:cNvPr id="23" name="Shape 23"/>
+          <p:cNvSpPr txBox="1"/>
+          <p:nvPr/>
+        </p:nvSpPr>
+        <p:spPr>
+          <a:xfrm>
+            <a:off x="6172200" y="3703320"/>
+            <a:ext cx="5349240" cy="1920240"/>
+          </a:xfrm>
+          <a:prstGeom prst="roundRect">
+            <a:avLst/>
+          </a:prstGeom>
+          <a:solidFill>
+            <a:srgbClr val="E8F3F1"/>
+          </a:solidFill>
+          <a:ln w="12700">
+            <a:solidFill>
+              <a:srgbClr val="0B6E69"/>
+            </a:solidFill>
+          </a:ln>
+        </p:spPr>
+        <p:txBody>
+          <a:bodyPr wrap="square" lIns="177800" tIns="177800" rIns="177800" bIns="177800"/>
+          <a:lstStyle/>
+          <a:p>
+            <a:pPr algn="l"/>
+            <a:r>
+              <a:rPr lang="ru-RU" sz="1400" b="1">
+                <a:solidFill>
+                  <a:srgbClr val="18212B"/>
+                </a:solidFill>
+                <a:latin typeface="Aptos"/>
+                <a:cs typeface="Aptos"/>
+              </a:rPr>
+              <a:t>Проверочный клиент</a:t>
+            </a:r>
+          </a:p>
+          <a:p>
+            <a:pPr algn="l"/>
+            <a:r>
+              <a:rPr lang="ru-RU" sz="1400" b="1">
                 <a:solidFill>
                   <a:srgbClr val="18212B"/>
                 </a:solidFill>
@@ -658,40 +741,27 @@
           <a:p>
             <a:pPr algn="l"/>
             <a:r>
-              <a:rPr lang="ru-RU" sz="1500" b="0">
-                <a:solidFill>
-                  <a:srgbClr val="18212B"/>
-                </a:solidFill>
-                <a:latin typeface="Aptos"/>
-                <a:cs typeface="Aptos"/>
-              </a:rPr>
-              <a:t>• Восстановление подписки после разрыва</a:t>
-            </a:r>
-          </a:p>
-          <a:p>
-            <a:pPr algn="l"/>
-            <a:r>
-              <a:rPr lang="ru-RU" sz="1500" b="0">
-                <a:solidFill>
-                  <a:srgbClr val="18212B"/>
-                </a:solidFill>
-                <a:latin typeface="Aptos"/>
-                <a:cs typeface="Aptos"/>
-              </a:rPr>
-              <a:t/>
-            </a:r>
-          </a:p>
-          <a:p>
-            <a:pPr algn="l"/>
-            <a:r>
-              <a:rPr lang="ru-RU" sz="1500" b="0">
-                <a:solidFill>
-                  <a:srgbClr val="18212B"/>
-                </a:solidFill>
-                <a:latin typeface="Aptos"/>
-                <a:cs typeface="Aptos"/>
-              </a:rPr>
-              <a:t>• Переключение на другой узел после отказа</a:t>
+              <a:rPr lang="ru-RU" sz="1400" b="1">
+                <a:solidFill>
+                  <a:srgbClr val="18212B"/>
+                </a:solidFill>
+                <a:latin typeface="Aptos"/>
+                <a:cs typeface="Aptos"/>
+              </a:rPr>
+              <a:t>delivery · rejoin · failover · series</a:t>
+            </a:r>
+          </a:p>
+          <a:p>
+            <a:pPr algn="l"/>
+            <a:r>
+              <a:rPr lang="ru-RU" sz="1400" b="1">
+                <a:solidFill>
+                  <a:srgbClr val="18212B"/>
+                </a:solidFill>
+                <a:latin typeface="Aptos"/>
+                <a:cs typeface="Aptos"/>
+              </a:rPr>
+              <a:t>Фиксирует serverInstanceId, connectionId, событие и задержку.</a:t>
             </a:r>
           </a:p>
         </p:txBody>
@@ -798,7 +868,7 @@
                 <a:latin typeface="Aptos"/>
                 <a:cs typeface="Aptos"/>
               </a:rPr>
-              <a:t>Главный результат</a:t>
+              <a:t>Программа испытаний</a:t>
             </a:r>
           </a:p>
         </p:txBody>
@@ -835,7 +905,7 @@
                 <a:latin typeface="Aptos"/>
                 <a:cs typeface="Aptos"/>
               </a:rPr>
-              <a:t>Один код и один сценарий — разница только в наличии Redis-канала</a:t>
+              <a:t>Два режима по одному коду · четыре сценария проверки</a:t>
             </a:r>
           </a:p>
         </p:txBody>
@@ -849,17 +919,17 @@
         <p:spPr>
           <a:xfrm>
             <a:off x="685800" y="1554480"/>
-            <a:ext cx="5349240" cy="3291840"/>
+            <a:ext cx="5349240" cy="4160520"/>
           </a:xfrm>
           <a:prstGeom prst="roundRect">
             <a:avLst/>
           </a:prstGeom>
           <a:solidFill>
-            <a:srgbClr val="FFF3D8"/>
+            <a:srgbClr val="FFFFFF"/>
           </a:solidFill>
           <a:ln w="12700">
             <a:solidFill>
-              <a:srgbClr val="C76F2E"/>
+              <a:srgbClr val="D7D2C7"/>
             </a:solidFill>
           </a:ln>
         </p:spPr>
@@ -867,22 +937,22 @@
           <a:bodyPr wrap="square" lIns="177800" tIns="177800" rIns="177800" bIns="177800"/>
           <a:lstStyle/>
           <a:p>
-            <a:pPr algn="ctr"/>
-            <a:r>
-              <a:rPr lang="ru-RU" sz="1800" b="1">
-                <a:solidFill>
-                  <a:srgbClr val="18212B"/>
-                </a:solidFill>
-                <a:latin typeface="Aptos"/>
-                <a:cs typeface="Aptos"/>
-              </a:rPr>
-              <a:t>Без backplane</a:t>
-            </a:r>
-          </a:p>
-          <a:p>
-            <a:pPr algn="ctr"/>
-            <a:r>
-              <a:rPr lang="ru-RU" sz="1800" b="1">
+            <a:pPr algn="l"/>
+            <a:r>
+              <a:rPr lang="ru-RU" sz="1500" b="0">
+                <a:solidFill>
+                  <a:srgbClr val="18212B"/>
+                </a:solidFill>
+                <a:latin typeface="Aptos"/>
+                <a:cs typeface="Aptos"/>
+              </a:rPr>
+              <a:t>Два режима</a:t>
+            </a:r>
+          </a:p>
+          <a:p>
+            <a:pPr algn="l"/>
+            <a:r>
+              <a:rPr lang="ru-RU" sz="1500" b="0">
                 <a:solidFill>
                   <a:srgbClr val="18212B"/>
                 </a:solidFill>
@@ -893,35 +963,22 @@
             </a:r>
           </a:p>
           <a:p>
-            <a:pPr algn="ctr"/>
-            <a:r>
-              <a:rPr lang="ru-RU" sz="1800" b="1">
-                <a:solidFill>
-                  <a:srgbClr val="18212B"/>
-                </a:solidFill>
-                <a:latin typeface="Aptos"/>
-                <a:cs typeface="Aptos"/>
-              </a:rPr>
-              <a:t>ReceiveReportPatch</a:t>
-            </a:r>
-          </a:p>
-          <a:p>
-            <a:pPr algn="ctr"/>
-            <a:r>
-              <a:rPr lang="ru-RU" sz="1800" b="1">
-                <a:solidFill>
-                  <a:srgbClr val="18212B"/>
-                </a:solidFill>
-                <a:latin typeface="Aptos"/>
-                <a:cs typeface="Aptos"/>
-              </a:rPr>
-              <a:t>timed out · 10 000 мс</a:t>
-            </a:r>
-          </a:p>
-          <a:p>
-            <a:pPr algn="ctr"/>
-            <a:r>
-              <a:rPr lang="ru-RU" sz="1800" b="1">
+            <a:pPr algn="l"/>
+            <a:r>
+              <a:rPr lang="ru-RU" sz="1500" b="0">
+                <a:solidFill>
+                  <a:srgbClr val="18212B"/>
+                </a:solidFill>
+                <a:latin typeface="Aptos"/>
+                <a:cs typeface="Aptos"/>
+              </a:rPr>
+              <a:t>• Без межузлового канала — воспроизведение проблемы</a:t>
+            </a:r>
+          </a:p>
+          <a:p>
+            <a:pPr algn="l"/>
+            <a:r>
+              <a:rPr lang="ru-RU" sz="1500" b="0">
                 <a:solidFill>
                   <a:srgbClr val="18212B"/>
                 </a:solidFill>
@@ -932,16 +989,42 @@
             </a:r>
           </a:p>
           <a:p>
-            <a:pPr algn="ctr"/>
-            <a:r>
-              <a:rPr lang="ru-RU" sz="1800" b="1">
-                <a:solidFill>
-                  <a:srgbClr val="18212B"/>
-                </a:solidFill>
-                <a:latin typeface="Aptos"/>
-                <a:cs typeface="Aptos"/>
-              </a:rPr>
-              <a:t>Событие, созданное на app-api-1, не дошло до клиента на app-api-2</a:t>
+            <a:pPr algn="l"/>
+            <a:r>
+              <a:rPr lang="ru-RU" sz="1500" b="0">
+                <a:solidFill>
+                  <a:srgbClr val="18212B"/>
+                </a:solidFill>
+                <a:latin typeface="Aptos"/>
+                <a:cs typeface="Aptos"/>
+              </a:rPr>
+              <a:t>• С межузловым каналом — проверка решения</a:t>
+            </a:r>
+          </a:p>
+          <a:p>
+            <a:pPr algn="l"/>
+            <a:r>
+              <a:rPr lang="ru-RU" sz="1500" b="0">
+                <a:solidFill>
+                  <a:srgbClr val="18212B"/>
+                </a:solidFill>
+                <a:latin typeface="Aptos"/>
+                <a:cs typeface="Aptos"/>
+              </a:rPr>
+              <a:t/>
+            </a:r>
+          </a:p>
+          <a:p>
+            <a:pPr algn="l"/>
+            <a:r>
+              <a:rPr lang="ru-RU" sz="1500" b="0">
+                <a:solidFill>
+                  <a:srgbClr val="18212B"/>
+                </a:solidFill>
+                <a:latin typeface="Aptos"/>
+                <a:cs typeface="Aptos"/>
+              </a:rPr>
+              <a:t>Один и тот же код, один и тот же сценарий; отличие — наличие Redis backplane.</a:t>
             </a:r>
           </a:p>
         </p:txBody>
@@ -955,17 +1038,17 @@
         <p:spPr>
           <a:xfrm>
             <a:off x="6172200" y="1554480"/>
-            <a:ext cx="5349240" cy="3291840"/>
+            <a:ext cx="5349240" cy="4160520"/>
           </a:xfrm>
           <a:prstGeom prst="roundRect">
             <a:avLst/>
           </a:prstGeom>
           <a:solidFill>
-            <a:srgbClr val="E8F3F1"/>
+            <a:srgbClr val="FFFFFF"/>
           </a:solidFill>
           <a:ln w="12700">
             <a:solidFill>
-              <a:srgbClr val="0B6E69"/>
+              <a:srgbClr val="D7D2C7"/>
             </a:solidFill>
           </a:ln>
         </p:spPr>
@@ -973,22 +1056,22 @@
           <a:bodyPr wrap="square" lIns="177800" tIns="177800" rIns="177800" bIns="177800"/>
           <a:lstStyle/>
           <a:p>
-            <a:pPr algn="ctr"/>
-            <a:r>
-              <a:rPr lang="ru-RU" sz="1800" b="1">
-                <a:solidFill>
-                  <a:srgbClr val="18212B"/>
-                </a:solidFill>
-                <a:latin typeface="Aptos"/>
-                <a:cs typeface="Aptos"/>
-              </a:rPr>
-              <a:t>С backplane</a:t>
-            </a:r>
-          </a:p>
-          <a:p>
-            <a:pPr algn="ctr"/>
-            <a:r>
-              <a:rPr lang="ru-RU" sz="1800" b="1">
+            <a:pPr algn="l"/>
+            <a:r>
+              <a:rPr lang="ru-RU" sz="1500" b="0">
+                <a:solidFill>
+                  <a:srgbClr val="18212B"/>
+                </a:solidFill>
+                <a:latin typeface="Aptos"/>
+                <a:cs typeface="Aptos"/>
+              </a:rPr>
+              <a:t>Четыре сценария</a:t>
+            </a:r>
+          </a:p>
+          <a:p>
+            <a:pPr algn="l"/>
+            <a:r>
+              <a:rPr lang="ru-RU" sz="1500" b="0">
                 <a:solidFill>
                   <a:srgbClr val="18212B"/>
                 </a:solidFill>
@@ -999,35 +1082,22 @@
             </a:r>
           </a:p>
           <a:p>
-            <a:pPr algn="ctr"/>
-            <a:r>
-              <a:rPr lang="ru-RU" sz="1800" b="1">
-                <a:solidFill>
-                  <a:srgbClr val="18212B"/>
-                </a:solidFill>
-                <a:latin typeface="Aptos"/>
-                <a:cs typeface="Aptos"/>
-              </a:rPr>
-              <a:t>ok: true · ReceiveReportPatch получен</a:t>
-            </a:r>
-          </a:p>
-          <a:p>
-            <a:pPr algn="ctr"/>
-            <a:r>
-              <a:rPr lang="ru-RU" sz="1800" b="1">
-                <a:solidFill>
-                  <a:srgbClr val="18212B"/>
-                </a:solidFill>
-                <a:latin typeface="Aptos"/>
-                <a:cs typeface="Aptos"/>
-              </a:rPr>
-              <a:t>deliveryLatencyMs ≈ 9,5 мс</a:t>
-            </a:r>
-          </a:p>
-          <a:p>
-            <a:pPr algn="ctr"/>
-            <a:r>
-              <a:rPr lang="ru-RU" sz="1800" b="1">
+            <a:pPr algn="l"/>
+            <a:r>
+              <a:rPr lang="ru-RU" sz="1500" b="0">
+                <a:solidFill>
+                  <a:srgbClr val="18212B"/>
+                </a:solidFill>
+                <a:latin typeface="Aptos"/>
+                <a:cs typeface="Aptos"/>
+              </a:rPr>
+              <a:t>• Одиночная доставка между узлами</a:t>
+            </a:r>
+          </a:p>
+          <a:p>
+            <a:pPr algn="l"/>
+            <a:r>
+              <a:rPr lang="ru-RU" sz="1500" b="0">
                 <a:solidFill>
                   <a:srgbClr val="18212B"/>
                 </a:solidFill>
@@ -1038,53 +1108,68 @@
             </a:r>
           </a:p>
           <a:p>
-            <a:pPr algn="ctr"/>
-            <a:r>
-              <a:rPr lang="ru-RU" sz="1800" b="1">
-                <a:solidFill>
-                  <a:srgbClr val="18212B"/>
-                </a:solidFill>
-                <a:latin typeface="Aptos"/>
-                <a:cs typeface="Aptos"/>
-              </a:rPr>
-              <a:t>Клиент на app-api-2 получил событие с app-api-1</a:t>
-            </a:r>
-          </a:p>
-        </p:txBody>
-      </p:sp>
-      <p:sp>
-        <p:nvSpPr>
-          <p:cNvPr id="22" name="Shape 22"/>
-          <p:cNvSpPr txBox="1"/>
-          <p:nvPr/>
-        </p:nvSpPr>
-        <p:spPr>
-          <a:xfrm>
-            <a:off x="685800" y="5074920"/>
-            <a:ext cx="10835640" cy="777240"/>
-          </a:xfrm>
-          <a:prstGeom prst="roundRect">
-            <a:avLst/>
-          </a:prstGeom>
-          <a:noFill/>
-          <a:ln>
-            <a:noFill/>
-          </a:ln>
-        </p:spPr>
-        <p:txBody>
-          <a:bodyPr wrap="square" lIns="177800" tIns="177800" rIns="177800" bIns="177800"/>
-          <a:lstStyle/>
-          <a:p>
-            <a:pPr algn="ctr"/>
-            <a:r>
-              <a:rPr lang="ru-RU" sz="1300" b="0">
-                <a:solidFill>
-                  <a:srgbClr val="5E6A75"/>
-                </a:solidFill>
-                <a:latin typeface="Aptos"/>
-                <a:cs typeface="Aptos"/>
-              </a:rPr>
-              <a:t>Сопоставление двух режимов на одном стенде показывает причинную связь между включением межузлового канала SignalR и успешной доставкой события.</a:t>
+            <a:pPr algn="l"/>
+            <a:r>
+              <a:rPr lang="ru-RU" sz="1500" b="0">
+                <a:solidFill>
+                  <a:srgbClr val="18212B"/>
+                </a:solidFill>
+                <a:latin typeface="Aptos"/>
+                <a:cs typeface="Aptos"/>
+              </a:rPr>
+              <a:t>• Серия из 30 итераций</a:t>
+            </a:r>
+          </a:p>
+          <a:p>
+            <a:pPr algn="l"/>
+            <a:r>
+              <a:rPr lang="ru-RU" sz="1500" b="0">
+                <a:solidFill>
+                  <a:srgbClr val="18212B"/>
+                </a:solidFill>
+                <a:latin typeface="Aptos"/>
+                <a:cs typeface="Aptos"/>
+              </a:rPr>
+              <a:t/>
+            </a:r>
+          </a:p>
+          <a:p>
+            <a:pPr algn="l"/>
+            <a:r>
+              <a:rPr lang="ru-RU" sz="1500" b="0">
+                <a:solidFill>
+                  <a:srgbClr val="18212B"/>
+                </a:solidFill>
+                <a:latin typeface="Aptos"/>
+                <a:cs typeface="Aptos"/>
+              </a:rPr>
+              <a:t>• Восстановление подписки после разрыва</a:t>
+            </a:r>
+          </a:p>
+          <a:p>
+            <a:pPr algn="l"/>
+            <a:r>
+              <a:rPr lang="ru-RU" sz="1500" b="0">
+                <a:solidFill>
+                  <a:srgbClr val="18212B"/>
+                </a:solidFill>
+                <a:latin typeface="Aptos"/>
+                <a:cs typeface="Aptos"/>
+              </a:rPr>
+              <a:t/>
+            </a:r>
+          </a:p>
+          <a:p>
+            <a:pPr algn="l"/>
+            <a:r>
+              <a:rPr lang="ru-RU" sz="1500" b="0">
+                <a:solidFill>
+                  <a:srgbClr val="18212B"/>
+                </a:solidFill>
+                <a:latin typeface="Aptos"/>
+                <a:cs typeface="Aptos"/>
+              </a:rPr>
+              <a:t>• Переключение на другой узел после отказа</a:t>
             </a:r>
           </a:p>
         </p:txBody>
@@ -1191,7 +1276,7 @@
                 <a:latin typeface="Aptos"/>
                 <a:cs typeface="Aptos"/>
               </a:rPr>
-              <a:t>Дополнительные проверки</a:t>
+              <a:t>Главный результат</a:t>
             </a:r>
           </a:p>
         </p:txBody>
@@ -1228,7 +1313,7 @@
                 <a:latin typeface="Aptos"/>
                 <a:cs typeface="Aptos"/>
               </a:rPr>
-              <a:t>Повторяемость, восстановление подписки и переключение после отказа узла</a:t>
+              <a:t>Один код и один сценарий — разница только в наличии Redis-канала</a:t>
             </a:r>
           </a:p>
         </p:txBody>
@@ -1241,18 +1326,18 @@
         </p:nvSpPr>
         <p:spPr>
           <a:xfrm>
-            <a:off x="685800" y="1600200"/>
-            <a:ext cx="3657600" cy="4114800"/>
+            <a:off x="685800" y="1554480"/>
+            <a:ext cx="5349240" cy="3291840"/>
           </a:xfrm>
           <a:prstGeom prst="roundRect">
             <a:avLst/>
           </a:prstGeom>
           <a:solidFill>
-            <a:srgbClr val="FFFFFF"/>
+            <a:srgbClr val="FFF3D8"/>
           </a:solidFill>
           <a:ln w="12700">
             <a:solidFill>
-              <a:srgbClr val="D7D2C7"/>
+              <a:srgbClr val="C76F2E"/>
             </a:solidFill>
           </a:ln>
         </p:spPr>
@@ -1260,22 +1345,22 @@
           <a:bodyPr wrap="square" lIns="177800" tIns="177800" rIns="177800" bIns="177800"/>
           <a:lstStyle/>
           <a:p>
-            <a:pPr algn="l"/>
-            <a:r>
-              <a:rPr lang="ru-RU" sz="1500" b="0">
-                <a:solidFill>
-                  <a:srgbClr val="18212B"/>
-                </a:solidFill>
-                <a:latin typeface="Aptos"/>
-                <a:cs typeface="Aptos"/>
-              </a:rPr>
-              <a:t>Серия из 30 итераций</a:t>
-            </a:r>
-          </a:p>
-          <a:p>
-            <a:pPr algn="l"/>
-            <a:r>
-              <a:rPr lang="ru-RU" sz="1500" b="0">
+            <a:pPr algn="ctr"/>
+            <a:r>
+              <a:rPr lang="ru-RU" sz="1800" b="1">
+                <a:solidFill>
+                  <a:srgbClr val="18212B"/>
+                </a:solidFill>
+                <a:latin typeface="Aptos"/>
+                <a:cs typeface="Aptos"/>
+              </a:rPr>
+              <a:t>Без backplane</a:t>
+            </a:r>
+          </a:p>
+          <a:p>
+            <a:pPr algn="ctr"/>
+            <a:r>
+              <a:rPr lang="ru-RU" sz="1800" b="1">
                 <a:solidFill>
                   <a:srgbClr val="18212B"/>
                 </a:solidFill>
@@ -1286,22 +1371,35 @@
             </a:r>
           </a:p>
           <a:p>
-            <a:pPr algn="l"/>
-            <a:r>
-              <a:rPr lang="ru-RU" sz="1500" b="0">
-                <a:solidFill>
-                  <a:srgbClr val="18212B"/>
-                </a:solidFill>
-                <a:latin typeface="Aptos"/>
-                <a:cs typeface="Aptos"/>
-              </a:rPr>
-              <a:t>Успешно: 30 из 30</a:t>
-            </a:r>
-          </a:p>
-          <a:p>
-            <a:pPr algn="l"/>
-            <a:r>
-              <a:rPr lang="ru-RU" sz="1500" b="0">
+            <a:pPr algn="ctr"/>
+            <a:r>
+              <a:rPr lang="ru-RU" sz="1800" b="1">
+                <a:solidFill>
+                  <a:srgbClr val="18212B"/>
+                </a:solidFill>
+                <a:latin typeface="Aptos"/>
+                <a:cs typeface="Aptos"/>
+              </a:rPr>
+              <a:t>ReceiveReportPatch</a:t>
+            </a:r>
+          </a:p>
+          <a:p>
+            <a:pPr algn="ctr"/>
+            <a:r>
+              <a:rPr lang="ru-RU" sz="1800" b="1">
+                <a:solidFill>
+                  <a:srgbClr val="18212B"/>
+                </a:solidFill>
+                <a:latin typeface="Aptos"/>
+                <a:cs typeface="Aptos"/>
+              </a:rPr>
+              <a:t>timed out · 10 000 мс</a:t>
+            </a:r>
+          </a:p>
+          <a:p>
+            <a:pPr algn="ctr"/>
+            <a:r>
+              <a:rPr lang="ru-RU" sz="1800" b="1">
                 <a:solidFill>
                   <a:srgbClr val="18212B"/>
                 </a:solidFill>
@@ -1312,81 +1410,16 @@
             </a:r>
           </a:p>
           <a:p>
-            <a:pPr algn="l"/>
-            <a:r>
-              <a:rPr lang="ru-RU" sz="1500" b="0">
-                <a:solidFill>
-                  <a:srgbClr val="18212B"/>
-                </a:solidFill>
-                <a:latin typeface="Aptos"/>
-                <a:cs typeface="Aptos"/>
-              </a:rPr>
-              <a:t>min 3,8 мс</a:t>
-            </a:r>
-          </a:p>
-          <a:p>
-            <a:pPr algn="l"/>
-            <a:r>
-              <a:rPr lang="ru-RU" sz="1500" b="0">
-                <a:solidFill>
-                  <a:srgbClr val="18212B"/>
-                </a:solidFill>
-                <a:latin typeface="Aptos"/>
-                <a:cs typeface="Aptos"/>
-              </a:rPr>
-              <a:t>avg 7,2 мс</a:t>
-            </a:r>
-          </a:p>
-          <a:p>
-            <a:pPr algn="l"/>
-            <a:r>
-              <a:rPr lang="ru-RU" sz="1500" b="0">
-                <a:solidFill>
-                  <a:srgbClr val="18212B"/>
-                </a:solidFill>
-                <a:latin typeface="Aptos"/>
-                <a:cs typeface="Aptos"/>
-              </a:rPr>
-              <a:t>p50 6,1 мс</a:t>
-            </a:r>
-          </a:p>
-          <a:p>
-            <a:pPr algn="l"/>
-            <a:r>
-              <a:rPr lang="ru-RU" sz="1500" b="0">
-                <a:solidFill>
-                  <a:srgbClr val="18212B"/>
-                </a:solidFill>
-                <a:latin typeface="Aptos"/>
-                <a:cs typeface="Aptos"/>
-              </a:rPr>
-              <a:t>p95 13,8 мс</a:t>
-            </a:r>
-          </a:p>
-          <a:p>
-            <a:pPr algn="l"/>
-            <a:r>
-              <a:rPr lang="ru-RU" sz="1500" b="0">
-                <a:solidFill>
-                  <a:srgbClr val="18212B"/>
-                </a:solidFill>
-                <a:latin typeface="Aptos"/>
-                <a:cs typeface="Aptos"/>
-              </a:rPr>
-              <a:t/>
-            </a:r>
-          </a:p>
-          <a:p>
-            <a:pPr algn="l"/>
-            <a:r>
-              <a:rPr lang="ru-RU" sz="1500" b="0">
-                <a:solidFill>
-                  <a:srgbClr val="18212B"/>
-                </a:solidFill>
-                <a:latin typeface="Aptos"/>
-                <a:cs typeface="Aptos"/>
-              </a:rPr>
-              <a:t>Подтверждена повторяемость доставки.</a:t>
+            <a:pPr algn="ctr"/>
+            <a:r>
+              <a:rPr lang="ru-RU" sz="1800" b="1">
+                <a:solidFill>
+                  <a:srgbClr val="18212B"/>
+                </a:solidFill>
+                <a:latin typeface="Aptos"/>
+                <a:cs typeface="Aptos"/>
+              </a:rPr>
+              <a:t>Событие, созданное на app-api-1, не дошло до клиента на app-api-2</a:t>
             </a:r>
           </a:p>
         </p:txBody>
@@ -1399,18 +1432,18 @@
         </p:nvSpPr>
         <p:spPr>
           <a:xfrm>
-            <a:off x="4434840" y="1600200"/>
-            <a:ext cx="3657600" cy="4114800"/>
+            <a:off x="6172200" y="1554480"/>
+            <a:ext cx="5349240" cy="3291840"/>
           </a:xfrm>
           <a:prstGeom prst="roundRect">
             <a:avLst/>
           </a:prstGeom>
           <a:solidFill>
-            <a:srgbClr val="FFFFFF"/>
+            <a:srgbClr val="E8F3F1"/>
           </a:solidFill>
           <a:ln w="12700">
             <a:solidFill>
-              <a:srgbClr val="D7D2C7"/>
+              <a:srgbClr val="0B6E69"/>
             </a:solidFill>
           </a:ln>
         </p:spPr>
@@ -1418,22 +1451,22 @@
           <a:bodyPr wrap="square" lIns="177800" tIns="177800" rIns="177800" bIns="177800"/>
           <a:lstStyle/>
           <a:p>
-            <a:pPr algn="l"/>
-            <a:r>
-              <a:rPr lang="ru-RU" sz="1500" b="0">
-                <a:solidFill>
-                  <a:srgbClr val="18212B"/>
-                </a:solidFill>
-                <a:latin typeface="Aptos"/>
-                <a:cs typeface="Aptos"/>
-              </a:rPr>
-              <a:t>Восстановление подписки</a:t>
-            </a:r>
-          </a:p>
-          <a:p>
-            <a:pPr algn="l"/>
-            <a:r>
-              <a:rPr lang="ru-RU" sz="1500" b="0">
+            <a:pPr algn="ctr"/>
+            <a:r>
+              <a:rPr lang="ru-RU" sz="1800" b="1">
+                <a:solidFill>
+                  <a:srgbClr val="18212B"/>
+                </a:solidFill>
+                <a:latin typeface="Aptos"/>
+                <a:cs typeface="Aptos"/>
+              </a:rPr>
+              <a:t>С backplane</a:t>
+            </a:r>
+          </a:p>
+          <a:p>
+            <a:pPr algn="ctr"/>
+            <a:r>
+              <a:rPr lang="ru-RU" sz="1800" b="1">
                 <a:solidFill>
                   <a:srgbClr val="18212B"/>
                 </a:solidFill>
@@ -1444,22 +1477,35 @@
             </a:r>
           </a:p>
           <a:p>
-            <a:pPr algn="l"/>
-            <a:r>
-              <a:rPr lang="ru-RU" sz="1500" b="0">
-                <a:solidFill>
-                  <a:srgbClr val="18212B"/>
-                </a:solidFill>
-                <a:latin typeface="Aptos"/>
-                <a:cs typeface="Aptos"/>
-              </a:rPr>
-              <a:t>После разрыва клиент создаёт новое соединение и снова вступает в группу отчёта.</a:t>
-            </a:r>
-          </a:p>
-          <a:p>
-            <a:pPr algn="l"/>
-            <a:r>
-              <a:rPr lang="ru-RU" sz="1500" b="0">
+            <a:pPr algn="ctr"/>
+            <a:r>
+              <a:rPr lang="ru-RU" sz="1800" b="1">
+                <a:solidFill>
+                  <a:srgbClr val="18212B"/>
+                </a:solidFill>
+                <a:latin typeface="Aptos"/>
+                <a:cs typeface="Aptos"/>
+              </a:rPr>
+              <a:t>ok: true · ReceiveReportPatch получен</a:t>
+            </a:r>
+          </a:p>
+          <a:p>
+            <a:pPr algn="ctr"/>
+            <a:r>
+              <a:rPr lang="ru-RU" sz="1800" b="1">
+                <a:solidFill>
+                  <a:srgbClr val="18212B"/>
+                </a:solidFill>
+                <a:latin typeface="Aptos"/>
+                <a:cs typeface="Aptos"/>
+              </a:rPr>
+              <a:t>deliveryLatencyMs ≈ 9,5 мс</a:t>
+            </a:r>
+          </a:p>
+          <a:p>
+            <a:pPr algn="ctr"/>
+            <a:r>
+              <a:rPr lang="ru-RU" sz="1800" b="1">
                 <a:solidFill>
                   <a:srgbClr val="18212B"/>
                 </a:solidFill>
@@ -1470,55 +1516,16 @@
             </a:r>
           </a:p>
           <a:p>
-            <a:pPr algn="l"/>
-            <a:r>
-              <a:rPr lang="ru-RU" sz="1500" b="0">
-                <a:solidFill>
-                  <a:srgbClr val="18212B"/>
-                </a:solidFill>
-                <a:latin typeface="Aptos"/>
-                <a:cs typeface="Aptos"/>
-              </a:rPr>
-              <a:t>переподключение 6,5 мс</a:t>
-            </a:r>
-          </a:p>
-          <a:p>
-            <a:pPr algn="l"/>
-            <a:r>
-              <a:rPr lang="ru-RU" sz="1500" b="0">
-                <a:solidFill>
-                  <a:srgbClr val="18212B"/>
-                </a:solidFill>
-                <a:latin typeface="Aptos"/>
-                <a:cs typeface="Aptos"/>
-              </a:rPr>
-              <a:t>доставка 15,2 мс</a:t>
-            </a:r>
-          </a:p>
-          <a:p>
-            <a:pPr algn="l"/>
-            <a:r>
-              <a:rPr lang="ru-RU" sz="1500" b="0">
-                <a:solidFill>
-                  <a:srgbClr val="18212B"/>
-                </a:solidFill>
-                <a:latin typeface="Aptos"/>
-                <a:cs typeface="Aptos"/>
-              </a:rPr>
-              <a:t/>
-            </a:r>
-          </a:p>
-          <a:p>
-            <a:pPr algn="l"/>
-            <a:r>
-              <a:rPr lang="ru-RU" sz="1500" b="0">
-                <a:solidFill>
-                  <a:srgbClr val="18212B"/>
-                </a:solidFill>
-                <a:latin typeface="Aptos"/>
-                <a:cs typeface="Aptos"/>
-              </a:rPr>
-              <a:t>Подтверждена повторная подписка.</a:t>
+            <a:pPr algn="ctr"/>
+            <a:r>
+              <a:rPr lang="ru-RU" sz="1800" b="1">
+                <a:solidFill>
+                  <a:srgbClr val="18212B"/>
+                </a:solidFill>
+                <a:latin typeface="Aptos"/>
+                <a:cs typeface="Aptos"/>
+              </a:rPr>
+              <a:t>Клиент на app-api-2 получил событие с app-api-1</a:t>
             </a:r>
           </a:p>
         </p:txBody>
@@ -1531,126 +1538,31 @@
         </p:nvSpPr>
         <p:spPr>
           <a:xfrm>
-            <a:off x="8183880" y="1600200"/>
-            <a:ext cx="3657600" cy="4114800"/>
-          </a:xfrm>
-          <a:prstGeom prst="roundRect">
-            <a:avLst/>
-          </a:prstGeom>
-          <a:solidFill>
-            <a:srgbClr val="FFFFFF"/>
-          </a:solidFill>
-          <a:ln w="12700">
-            <a:solidFill>
-              <a:srgbClr val="D7D2C7"/>
-            </a:solidFill>
-          </a:ln>
-        </p:spPr>
-        <p:txBody>
-          <a:bodyPr wrap="square" lIns="177800" tIns="177800" rIns="177800" bIns="177800"/>
-          <a:lstStyle/>
-          <a:p>
-            <a:pPr algn="l"/>
-            <a:r>
-              <a:rPr lang="ru-RU" sz="1500" b="0">
-                <a:solidFill>
-                  <a:srgbClr val="18212B"/>
-                </a:solidFill>
-                <a:latin typeface="Aptos"/>
-                <a:cs typeface="Aptos"/>
-              </a:rPr>
-              <a:t>Переключение после отказа узла</a:t>
-            </a:r>
-          </a:p>
-          <a:p>
-            <a:pPr algn="l"/>
-            <a:r>
-              <a:rPr lang="ru-RU" sz="1500" b="0">
-                <a:solidFill>
-                  <a:srgbClr val="18212B"/>
-                </a:solidFill>
-                <a:latin typeface="Aptos"/>
-                <a:cs typeface="Aptos"/>
-              </a:rPr>
-              <a:t/>
-            </a:r>
-          </a:p>
-          <a:p>
-            <a:pPr algn="l"/>
-            <a:r>
-              <a:rPr lang="ru-RU" sz="1500" b="0">
-                <a:solidFill>
-                  <a:srgbClr val="18212B"/>
-                </a:solidFill>
-                <a:latin typeface="Aptos"/>
-                <a:cs typeface="Aptos"/>
-              </a:rPr>
-              <a:t>Один backend остановлен; nginx переключает клиента на другой экземпляр.</a:t>
-            </a:r>
-          </a:p>
-          <a:p>
-            <a:pPr algn="l"/>
-            <a:r>
-              <a:rPr lang="ru-RU" sz="1500" b="0">
-                <a:solidFill>
-                  <a:srgbClr val="18212B"/>
-                </a:solidFill>
-                <a:latin typeface="Aptos"/>
-                <a:cs typeface="Aptos"/>
-              </a:rPr>
-              <a:t/>
-            </a:r>
-          </a:p>
-          <a:p>
-            <a:pPr algn="l"/>
-            <a:r>
-              <a:rPr lang="ru-RU" sz="1500" b="0">
-                <a:solidFill>
-                  <a:srgbClr val="18212B"/>
-                </a:solidFill>
-                <a:latin typeface="Aptos"/>
-                <a:cs typeface="Aptos"/>
-              </a:rPr>
-              <a:t>переподключение 352,0 мс</a:t>
-            </a:r>
-          </a:p>
-          <a:p>
-            <a:pPr algn="l"/>
-            <a:r>
-              <a:rPr lang="ru-RU" sz="1500" b="0">
-                <a:solidFill>
-                  <a:srgbClr val="18212B"/>
-                </a:solidFill>
-                <a:latin typeface="Aptos"/>
-                <a:cs typeface="Aptos"/>
-              </a:rPr>
-              <a:t>доставка 5,4 мс</a:t>
-            </a:r>
-          </a:p>
-          <a:p>
-            <a:pPr algn="l"/>
-            <a:r>
-              <a:rPr lang="ru-RU" sz="1500" b="0">
-                <a:solidFill>
-                  <a:srgbClr val="18212B"/>
-                </a:solidFill>
-                <a:latin typeface="Aptos"/>
-                <a:cs typeface="Aptos"/>
-              </a:rPr>
-              <a:t/>
-            </a:r>
-          </a:p>
-          <a:p>
-            <a:pPr algn="l"/>
-            <a:r>
-              <a:rPr lang="ru-RU" sz="1500" b="0">
-                <a:solidFill>
-                  <a:srgbClr val="18212B"/>
-                </a:solidFill>
-                <a:latin typeface="Aptos"/>
-                <a:cs typeface="Aptos"/>
-              </a:rPr>
-              <a:t>Подтверждено восстановление после отказа.</a:t>
+            <a:off x="685800" y="5074920"/>
+            <a:ext cx="10835640" cy="777240"/>
+          </a:xfrm>
+          <a:prstGeom prst="roundRect">
+            <a:avLst/>
+          </a:prstGeom>
+          <a:noFill/>
+          <a:ln>
+            <a:noFill/>
+          </a:ln>
+        </p:spPr>
+        <p:txBody>
+          <a:bodyPr wrap="square" lIns="177800" tIns="177800" rIns="177800" bIns="177800"/>
+          <a:lstStyle/>
+          <a:p>
+            <a:pPr algn="ctr"/>
+            <a:r>
+              <a:rPr lang="ru-RU" sz="1300" b="0">
+                <a:solidFill>
+                  <a:srgbClr val="5E6A75"/>
+                </a:solidFill>
+                <a:latin typeface="Aptos"/>
+                <a:cs typeface="Aptos"/>
+              </a:rPr>
+              <a:t>Сопоставление двух режимов на одном стенде показывает причинную связь между включением межузлового канала SignalR и успешной доставкой события.</a:t>
             </a:r>
           </a:p>
         </p:txBody>
@@ -1757,7 +1669,7 @@
                 <a:latin typeface="Aptos"/>
                 <a:cs typeface="Aptos"/>
               </a:rPr>
-              <a:t>Ограничения</a:t>
+              <a:t>Дополнительные проверки</a:t>
             </a:r>
           </a:p>
         </p:txBody>
@@ -1794,7 +1706,7 @@
                 <a:latin typeface="Aptos"/>
                 <a:cs typeface="Aptos"/>
               </a:rPr>
-              <a:t>Решение предназначено для интерфейсной синхронизации, а не для жёсткого real-time</a:t>
+              <a:t>Повторяемость, восстановление подписки и переключение после отказа узла</a:t>
             </a:r>
           </a:p>
         </p:txBody>
@@ -1807,8 +1719,8 @@
         </p:nvSpPr>
         <p:spPr>
           <a:xfrm>
-            <a:off x="685800" y="1508760"/>
-            <a:ext cx="3520440" cy="4343400"/>
+            <a:off x="685800" y="1600200"/>
+            <a:ext cx="3657600" cy="4114800"/>
           </a:xfrm>
           <a:prstGeom prst="roundRect">
             <a:avLst/>
@@ -1828,20 +1740,20 @@
           <a:p>
             <a:pPr algn="l"/>
             <a:r>
-              <a:rPr lang="ru-RU" sz="1400" b="0">
-                <a:solidFill>
-                  <a:srgbClr val="18212B"/>
-                </a:solidFill>
-                <a:latin typeface="Aptos"/>
-                <a:cs typeface="Aptos"/>
-              </a:rPr>
-              <a:t>Ненулевая задержка</a:t>
-            </a:r>
-          </a:p>
-          <a:p>
-            <a:pPr algn="l"/>
-            <a:r>
-              <a:rPr lang="ru-RU" sz="1400" b="0">
+              <a:rPr lang="ru-RU" sz="1500" b="0">
+                <a:solidFill>
+                  <a:srgbClr val="18212B"/>
+                </a:solidFill>
+                <a:latin typeface="Aptos"/>
+                <a:cs typeface="Aptos"/>
+              </a:rPr>
+              <a:t>Серия из 30 итераций</a:t>
+            </a:r>
+          </a:p>
+          <a:p>
+            <a:pPr algn="l"/>
+            <a:r>
+              <a:rPr lang="ru-RU" sz="1500" b="0">
                 <a:solidFill>
                   <a:srgbClr val="18212B"/>
                 </a:solidFill>
@@ -1854,20 +1766,20 @@
           <a:p>
             <a:pPr algn="l"/>
             <a:r>
-              <a:rPr lang="ru-RU" sz="1400" b="0">
-                <a:solidFill>
-                  <a:srgbClr val="18212B"/>
-                </a:solidFill>
-                <a:latin typeface="Aptos"/>
-                <a:cs typeface="Aptos"/>
-              </a:rPr>
-              <a:t>Событие проходит через app-api, Redis backplane и другой app-api.</a:t>
-            </a:r>
-          </a:p>
-          <a:p>
-            <a:pPr algn="l"/>
-            <a:r>
-              <a:rPr lang="ru-RU" sz="1400" b="0">
+              <a:rPr lang="ru-RU" sz="1500" b="0">
+                <a:solidFill>
+                  <a:srgbClr val="18212B"/>
+                </a:solidFill>
+                <a:latin typeface="Aptos"/>
+                <a:cs typeface="Aptos"/>
+              </a:rPr>
+              <a:t>Успешно: 30 из 30</a:t>
+            </a:r>
+          </a:p>
+          <a:p>
+            <a:pPr algn="l"/>
+            <a:r>
+              <a:rPr lang="ru-RU" sz="1500" b="0">
                 <a:solidFill>
                   <a:srgbClr val="18212B"/>
                 </a:solidFill>
@@ -1880,14 +1792,79 @@
           <a:p>
             <a:pPr algn="l"/>
             <a:r>
-              <a:rPr lang="ru-RU" sz="1400" b="0">
-                <a:solidFill>
-                  <a:srgbClr val="18212B"/>
-                </a:solidFill>
-                <a:latin typeface="Aptos"/>
-                <a:cs typeface="Aptos"/>
-              </a:rPr>
-              <a:t>В локальной серии: avg 7,2 мс, p95 13,8 мс.</a:t>
+              <a:rPr lang="ru-RU" sz="1500" b="0">
+                <a:solidFill>
+                  <a:srgbClr val="18212B"/>
+                </a:solidFill>
+                <a:latin typeface="Aptos"/>
+                <a:cs typeface="Aptos"/>
+              </a:rPr>
+              <a:t>min 3,8 мс</a:t>
+            </a:r>
+          </a:p>
+          <a:p>
+            <a:pPr algn="l"/>
+            <a:r>
+              <a:rPr lang="ru-RU" sz="1500" b="0">
+                <a:solidFill>
+                  <a:srgbClr val="18212B"/>
+                </a:solidFill>
+                <a:latin typeface="Aptos"/>
+                <a:cs typeface="Aptos"/>
+              </a:rPr>
+              <a:t>avg 7,2 мс</a:t>
+            </a:r>
+          </a:p>
+          <a:p>
+            <a:pPr algn="l"/>
+            <a:r>
+              <a:rPr lang="ru-RU" sz="1500" b="0">
+                <a:solidFill>
+                  <a:srgbClr val="18212B"/>
+                </a:solidFill>
+                <a:latin typeface="Aptos"/>
+                <a:cs typeface="Aptos"/>
+              </a:rPr>
+              <a:t>p50 6,1 мс</a:t>
+            </a:r>
+          </a:p>
+          <a:p>
+            <a:pPr algn="l"/>
+            <a:r>
+              <a:rPr lang="ru-RU" sz="1500" b="0">
+                <a:solidFill>
+                  <a:srgbClr val="18212B"/>
+                </a:solidFill>
+                <a:latin typeface="Aptos"/>
+                <a:cs typeface="Aptos"/>
+              </a:rPr>
+              <a:t>p95 13,8 мс</a:t>
+            </a:r>
+          </a:p>
+          <a:p>
+            <a:pPr algn="l"/>
+            <a:r>
+              <a:rPr lang="ru-RU" sz="1500" b="0">
+                <a:solidFill>
+                  <a:srgbClr val="18212B"/>
+                </a:solidFill>
+                <a:latin typeface="Aptos"/>
+                <a:cs typeface="Aptos"/>
+              </a:rPr>
+              <a:t/>
+            </a:r>
+          </a:p>
+          <a:p>
+            <a:pPr algn="l"/>
+            <a:r>
+              <a:rPr lang="ru-RU" sz="1500" b="0">
+                <a:solidFill>
+                  <a:srgbClr val="18212B"/>
+                </a:solidFill>
+                <a:latin typeface="Aptos"/>
+                <a:cs typeface="Aptos"/>
+              </a:rPr>
+              <a:t>Подтверждена повторяемость доставки.</a:t>
             </a:r>
           </a:p>
         </p:txBody>
@@ -1900,8 +1877,8 @@
         </p:nvSpPr>
         <p:spPr>
           <a:xfrm>
-            <a:off x="4389120" y="1508760"/>
-            <a:ext cx="3520440" cy="4343400"/>
+            <a:off x="4434840" y="1600200"/>
+            <a:ext cx="3657600" cy="4114800"/>
           </a:xfrm>
           <a:prstGeom prst="roundRect">
             <a:avLst/>
@@ -1921,20 +1898,20 @@
           <a:p>
             <a:pPr algn="l"/>
             <a:r>
-              <a:rPr lang="ru-RU" sz="1400" b="0">
-                <a:solidFill>
-                  <a:srgbClr val="18212B"/>
-                </a:solidFill>
-                <a:latin typeface="Aptos"/>
-                <a:cs typeface="Aptos"/>
-              </a:rPr>
-              <a:t>Transient UI-events</a:t>
-            </a:r>
-          </a:p>
-          <a:p>
-            <a:pPr algn="l"/>
-            <a:r>
-              <a:rPr lang="ru-RU" sz="1400" b="0">
+              <a:rPr lang="ru-RU" sz="1500" b="0">
+                <a:solidFill>
+                  <a:srgbClr val="18212B"/>
+                </a:solidFill>
+                <a:latin typeface="Aptos"/>
+                <a:cs typeface="Aptos"/>
+              </a:rPr>
+              <a:t>Восстановление подписки</a:t>
+            </a:r>
+          </a:p>
+          <a:p>
+            <a:pPr algn="l"/>
+            <a:r>
+              <a:rPr lang="ru-RU" sz="1500" b="0">
                 <a:solidFill>
                   <a:srgbClr val="18212B"/>
                 </a:solidFill>
@@ -1947,20 +1924,20 @@
           <a:p>
             <a:pPr algn="l"/>
             <a:r>
-              <a:rPr lang="ru-RU" sz="1400" b="0">
-                <a:solidFill>
-                  <a:srgbClr val="18212B"/>
-                </a:solidFill>
-                <a:latin typeface="Aptos"/>
-                <a:cs typeface="Aptos"/>
-              </a:rPr>
-              <a:t>Источник истины — PostgreSQL.</a:t>
-            </a:r>
-          </a:p>
-          <a:p>
-            <a:pPr algn="l"/>
-            <a:r>
-              <a:rPr lang="ru-RU" sz="1400" b="0">
+              <a:rPr lang="ru-RU" sz="1500" b="0">
+                <a:solidFill>
+                  <a:srgbClr val="18212B"/>
+                </a:solidFill>
+                <a:latin typeface="Aptos"/>
+                <a:cs typeface="Aptos"/>
+              </a:rPr>
+              <a:t>После разрыва клиент создаёт новое соединение и снова вступает в группу отчёта.</a:t>
+            </a:r>
+          </a:p>
+          <a:p>
+            <a:pPr algn="l"/>
+            <a:r>
+              <a:rPr lang="ru-RU" sz="1500" b="0">
                 <a:solidFill>
                   <a:srgbClr val="18212B"/>
                 </a:solidFill>
@@ -1973,14 +1950,53 @@
           <a:p>
             <a:pPr algn="l"/>
             <a:r>
-              <a:rPr lang="ru-RU" sz="1400" b="0">
-                <a:solidFill>
-                  <a:srgbClr val="18212B"/>
-                </a:solidFill>
-                <a:latin typeface="Aptos"/>
-                <a:cs typeface="Aptos"/>
-              </a:rPr>
-              <a:t>При сомнениях клиент восстанавливает согласованность повторным HTTP-запросом состояния.</a:t>
+              <a:rPr lang="ru-RU" sz="1500" b="0">
+                <a:solidFill>
+                  <a:srgbClr val="18212B"/>
+                </a:solidFill>
+                <a:latin typeface="Aptos"/>
+                <a:cs typeface="Aptos"/>
+              </a:rPr>
+              <a:t>переподключение 6,5 мс</a:t>
+            </a:r>
+          </a:p>
+          <a:p>
+            <a:pPr algn="l"/>
+            <a:r>
+              <a:rPr lang="ru-RU" sz="1500" b="0">
+                <a:solidFill>
+                  <a:srgbClr val="18212B"/>
+                </a:solidFill>
+                <a:latin typeface="Aptos"/>
+                <a:cs typeface="Aptos"/>
+              </a:rPr>
+              <a:t>доставка 15,2 мс</a:t>
+            </a:r>
+          </a:p>
+          <a:p>
+            <a:pPr algn="l"/>
+            <a:r>
+              <a:rPr lang="ru-RU" sz="1500" b="0">
+                <a:solidFill>
+                  <a:srgbClr val="18212B"/>
+                </a:solidFill>
+                <a:latin typeface="Aptos"/>
+                <a:cs typeface="Aptos"/>
+              </a:rPr>
+              <a:t/>
+            </a:r>
+          </a:p>
+          <a:p>
+            <a:pPr algn="l"/>
+            <a:r>
+              <a:rPr lang="ru-RU" sz="1500" b="0">
+                <a:solidFill>
+                  <a:srgbClr val="18212B"/>
+                </a:solidFill>
+                <a:latin typeface="Aptos"/>
+                <a:cs typeface="Aptos"/>
+              </a:rPr>
+              <a:t>Подтверждена повторная подписка.</a:t>
             </a:r>
           </a:p>
         </p:txBody>
@@ -1993,18 +2009,18 @@
         </p:nvSpPr>
         <p:spPr>
           <a:xfrm>
-            <a:off x="8092440" y="1508760"/>
-            <a:ext cx="3520440" cy="4343400"/>
+            <a:off x="8183880" y="1600200"/>
+            <a:ext cx="3657600" cy="4114800"/>
           </a:xfrm>
           <a:prstGeom prst="roundRect">
             <a:avLst/>
           </a:prstGeom>
           <a:solidFill>
-            <a:srgbClr val="FFF3D8"/>
+            <a:srgbClr val="FFFFFF"/>
           </a:solidFill>
           <a:ln w="12700">
             <a:solidFill>
-              <a:srgbClr val="C76F2E"/>
+              <a:srgbClr val="D7D2C7"/>
             </a:solidFill>
           </a:ln>
         </p:spPr>
@@ -2014,20 +2030,20 @@
           <a:p>
             <a:pPr algn="l"/>
             <a:r>
-              <a:rPr lang="ru-RU" sz="1400" b="1">
-                <a:solidFill>
-                  <a:srgbClr val="18212B"/>
-                </a:solidFill>
-                <a:latin typeface="Aptos"/>
-                <a:cs typeface="Aptos"/>
-              </a:rPr>
-              <a:t>Дальнейшее развитие</a:t>
-            </a:r>
-          </a:p>
-          <a:p>
-            <a:pPr algn="l"/>
-            <a:r>
-              <a:rPr lang="ru-RU" sz="1400" b="1">
+              <a:rPr lang="ru-RU" sz="1500" b="0">
+                <a:solidFill>
+                  <a:srgbClr val="18212B"/>
+                </a:solidFill>
+                <a:latin typeface="Aptos"/>
+                <a:cs typeface="Aptos"/>
+              </a:rPr>
+              <a:t>Переключение после отказа узла</a:t>
+            </a:r>
+          </a:p>
+          <a:p>
+            <a:pPr algn="l"/>
+            <a:r>
+              <a:rPr lang="ru-RU" sz="1500" b="0">
                 <a:solidFill>
                   <a:srgbClr val="18212B"/>
                 </a:solidFill>
@@ -2040,66 +2056,79 @@
           <a:p>
             <a:pPr algn="l"/>
             <a:r>
-              <a:rPr lang="ru-RU" sz="1400" b="1">
-                <a:solidFill>
-                  <a:srgbClr val="18212B"/>
-                </a:solidFill>
-                <a:latin typeface="Aptos"/>
-                <a:cs typeface="Aptos"/>
-              </a:rPr>
-              <a:t>Durable broker/event log</a:t>
-            </a:r>
-          </a:p>
-          <a:p>
-            <a:pPr algn="l"/>
-            <a:r>
-              <a:rPr lang="ru-RU" sz="1400" b="1">
-                <a:solidFill>
-                  <a:srgbClr val="18212B"/>
-                </a:solidFill>
-                <a:latin typeface="Aptos"/>
-                <a:cs typeface="Aptos"/>
-              </a:rPr>
-              <a:t>версии сущностей</a:t>
-            </a:r>
-          </a:p>
-          <a:p>
-            <a:pPr algn="l"/>
-            <a:r>
-              <a:rPr lang="ru-RU" sz="1400" b="1">
-                <a:solidFill>
-                  <a:srgbClr val="18212B"/>
-                </a:solidFill>
-                <a:latin typeface="Aptos"/>
-                <a:cs typeface="Aptos"/>
-              </a:rPr>
-              <a:t>optimistic concurrency</a:t>
-            </a:r>
-          </a:p>
-          <a:p>
-            <a:pPr algn="l"/>
-            <a:r>
-              <a:rPr lang="ru-RU" sz="1400" b="1">
-                <a:solidFill>
-                  <a:srgbClr val="18212B"/>
-                </a:solidFill>
-                <a:latin typeface="Aptos"/>
-                <a:cs typeface="Aptos"/>
-              </a:rPr>
-              <a:t>outbox/inbox</a:t>
-            </a:r>
-          </a:p>
-          <a:p>
-            <a:pPr algn="l"/>
-            <a:r>
-              <a:rPr lang="ru-RU" sz="1400" b="1">
-                <a:solidFill>
-                  <a:srgbClr val="18212B"/>
-                </a:solidFill>
-                <a:latin typeface="Aptos"/>
-                <a:cs typeface="Aptos"/>
-              </a:rPr>
-              <a:t>повторная синхронизация по версии</a:t>
+              <a:rPr lang="ru-RU" sz="1500" b="0">
+                <a:solidFill>
+                  <a:srgbClr val="18212B"/>
+                </a:solidFill>
+                <a:latin typeface="Aptos"/>
+                <a:cs typeface="Aptos"/>
+              </a:rPr>
+              <a:t>Один backend остановлен; nginx переключает клиента на другой экземпляр.</a:t>
+            </a:r>
+          </a:p>
+          <a:p>
+            <a:pPr algn="l"/>
+            <a:r>
+              <a:rPr lang="ru-RU" sz="1500" b="0">
+                <a:solidFill>
+                  <a:srgbClr val="18212B"/>
+                </a:solidFill>
+                <a:latin typeface="Aptos"/>
+                <a:cs typeface="Aptos"/>
+              </a:rPr>
+              <a:t/>
+            </a:r>
+          </a:p>
+          <a:p>
+            <a:pPr algn="l"/>
+            <a:r>
+              <a:rPr lang="ru-RU" sz="1500" b="0">
+                <a:solidFill>
+                  <a:srgbClr val="18212B"/>
+                </a:solidFill>
+                <a:latin typeface="Aptos"/>
+                <a:cs typeface="Aptos"/>
+              </a:rPr>
+              <a:t>переподключение 352,0 мс</a:t>
+            </a:r>
+          </a:p>
+          <a:p>
+            <a:pPr algn="l"/>
+            <a:r>
+              <a:rPr lang="ru-RU" sz="1500" b="0">
+                <a:solidFill>
+                  <a:srgbClr val="18212B"/>
+                </a:solidFill>
+                <a:latin typeface="Aptos"/>
+                <a:cs typeface="Aptos"/>
+              </a:rPr>
+              <a:t>доставка 5,4 мс</a:t>
+            </a:r>
+          </a:p>
+          <a:p>
+            <a:pPr algn="l"/>
+            <a:r>
+              <a:rPr lang="ru-RU" sz="1500" b="0">
+                <a:solidFill>
+                  <a:srgbClr val="18212B"/>
+                </a:solidFill>
+                <a:latin typeface="Aptos"/>
+                <a:cs typeface="Aptos"/>
+              </a:rPr>
+              <a:t/>
+            </a:r>
+          </a:p>
+          <a:p>
+            <a:pPr algn="l"/>
+            <a:r>
+              <a:rPr lang="ru-RU" sz="1500" b="0">
+                <a:solidFill>
+                  <a:srgbClr val="18212B"/>
+                </a:solidFill>
+                <a:latin typeface="Aptos"/>
+                <a:cs typeface="Aptos"/>
+              </a:rPr>
+              <a:t>Подтверждено восстановление после отказа.</a:t>
             </a:r>
           </a:p>
         </p:txBody>
@@ -2206,6 +2235,455 @@
                 <a:latin typeface="Aptos"/>
                 <a:cs typeface="Aptos"/>
               </a:rPr>
+              <a:t>Ограничения</a:t>
+            </a:r>
+          </a:p>
+        </p:txBody>
+      </p:sp>
+      <p:sp>
+        <p:nvSpPr>
+          <p:cNvPr id="11" name="Shape 11"/>
+          <p:cNvSpPr txBox="1"/>
+          <p:nvPr/>
+        </p:nvSpPr>
+        <p:spPr>
+          <a:xfrm>
+            <a:off x="621792" y="987552"/>
+            <a:ext cx="9875520" cy="320040"/>
+          </a:xfrm>
+          <a:prstGeom prst="roundRect">
+            <a:avLst/>
+          </a:prstGeom>
+          <a:noFill/>
+          <a:ln>
+            <a:noFill/>
+          </a:ln>
+        </p:spPr>
+        <p:txBody>
+          <a:bodyPr wrap="square" lIns="177800" tIns="177800" rIns="177800" bIns="177800"/>
+          <a:lstStyle/>
+          <a:p>
+            <a:pPr algn="l"/>
+            <a:r>
+              <a:rPr lang="ru-RU" sz="1300" b="0">
+                <a:solidFill>
+                  <a:srgbClr val="5E6A75"/>
+                </a:solidFill>
+                <a:latin typeface="Aptos"/>
+                <a:cs typeface="Aptos"/>
+              </a:rPr>
+              <a:t>Решение предназначено для интерфейсной синхронизации, а не для жёсткого real-time</a:t>
+            </a:r>
+          </a:p>
+        </p:txBody>
+      </p:sp>
+      <p:sp>
+        <p:nvSpPr>
+          <p:cNvPr id="20" name="Shape 20"/>
+          <p:cNvSpPr txBox="1"/>
+          <p:nvPr/>
+        </p:nvSpPr>
+        <p:spPr>
+          <a:xfrm>
+            <a:off x="685800" y="1508760"/>
+            <a:ext cx="3520440" cy="4343400"/>
+          </a:xfrm>
+          <a:prstGeom prst="roundRect">
+            <a:avLst/>
+          </a:prstGeom>
+          <a:solidFill>
+            <a:srgbClr val="FFFFFF"/>
+          </a:solidFill>
+          <a:ln w="12700">
+            <a:solidFill>
+              <a:srgbClr val="D7D2C7"/>
+            </a:solidFill>
+          </a:ln>
+        </p:spPr>
+        <p:txBody>
+          <a:bodyPr wrap="square" lIns="177800" tIns="177800" rIns="177800" bIns="177800"/>
+          <a:lstStyle/>
+          <a:p>
+            <a:pPr algn="l"/>
+            <a:r>
+              <a:rPr lang="ru-RU" sz="1400" b="0">
+                <a:solidFill>
+                  <a:srgbClr val="18212B"/>
+                </a:solidFill>
+                <a:latin typeface="Aptos"/>
+                <a:cs typeface="Aptos"/>
+              </a:rPr>
+              <a:t>Ненулевая задержка</a:t>
+            </a:r>
+          </a:p>
+          <a:p>
+            <a:pPr algn="l"/>
+            <a:r>
+              <a:rPr lang="ru-RU" sz="1400" b="0">
+                <a:solidFill>
+                  <a:srgbClr val="18212B"/>
+                </a:solidFill>
+                <a:latin typeface="Aptos"/>
+                <a:cs typeface="Aptos"/>
+              </a:rPr>
+              <a:t/>
+            </a:r>
+          </a:p>
+          <a:p>
+            <a:pPr algn="l"/>
+            <a:r>
+              <a:rPr lang="ru-RU" sz="1400" b="0">
+                <a:solidFill>
+                  <a:srgbClr val="18212B"/>
+                </a:solidFill>
+                <a:latin typeface="Aptos"/>
+                <a:cs typeface="Aptos"/>
+              </a:rPr>
+              <a:t>Событие проходит через app-api, Redis backplane и другой app-api.</a:t>
+            </a:r>
+          </a:p>
+          <a:p>
+            <a:pPr algn="l"/>
+            <a:r>
+              <a:rPr lang="ru-RU" sz="1400" b="0">
+                <a:solidFill>
+                  <a:srgbClr val="18212B"/>
+                </a:solidFill>
+                <a:latin typeface="Aptos"/>
+                <a:cs typeface="Aptos"/>
+              </a:rPr>
+              <a:t/>
+            </a:r>
+          </a:p>
+          <a:p>
+            <a:pPr algn="l"/>
+            <a:r>
+              <a:rPr lang="ru-RU" sz="1400" b="0">
+                <a:solidFill>
+                  <a:srgbClr val="18212B"/>
+                </a:solidFill>
+                <a:latin typeface="Aptos"/>
+                <a:cs typeface="Aptos"/>
+              </a:rPr>
+              <a:t>В локальной серии: avg 7,2 мс, p95 13,8 мс.</a:t>
+            </a:r>
+          </a:p>
+        </p:txBody>
+      </p:sp>
+      <p:sp>
+        <p:nvSpPr>
+          <p:cNvPr id="21" name="Shape 21"/>
+          <p:cNvSpPr txBox="1"/>
+          <p:nvPr/>
+        </p:nvSpPr>
+        <p:spPr>
+          <a:xfrm>
+            <a:off x="4389120" y="1508760"/>
+            <a:ext cx="3520440" cy="4343400"/>
+          </a:xfrm>
+          <a:prstGeom prst="roundRect">
+            <a:avLst/>
+          </a:prstGeom>
+          <a:solidFill>
+            <a:srgbClr val="FFFFFF"/>
+          </a:solidFill>
+          <a:ln w="12700">
+            <a:solidFill>
+              <a:srgbClr val="D7D2C7"/>
+            </a:solidFill>
+          </a:ln>
+        </p:spPr>
+        <p:txBody>
+          <a:bodyPr wrap="square" lIns="177800" tIns="177800" rIns="177800" bIns="177800"/>
+          <a:lstStyle/>
+          <a:p>
+            <a:pPr algn="l"/>
+            <a:r>
+              <a:rPr lang="ru-RU" sz="1400" b="0">
+                <a:solidFill>
+                  <a:srgbClr val="18212B"/>
+                </a:solidFill>
+                <a:latin typeface="Aptos"/>
+                <a:cs typeface="Aptos"/>
+              </a:rPr>
+              <a:t>Transient UI-events</a:t>
+            </a:r>
+          </a:p>
+          <a:p>
+            <a:pPr algn="l"/>
+            <a:r>
+              <a:rPr lang="ru-RU" sz="1400" b="0">
+                <a:solidFill>
+                  <a:srgbClr val="18212B"/>
+                </a:solidFill>
+                <a:latin typeface="Aptos"/>
+                <a:cs typeface="Aptos"/>
+              </a:rPr>
+              <a:t/>
+            </a:r>
+          </a:p>
+          <a:p>
+            <a:pPr algn="l"/>
+            <a:r>
+              <a:rPr lang="ru-RU" sz="1400" b="0">
+                <a:solidFill>
+                  <a:srgbClr val="18212B"/>
+                </a:solidFill>
+                <a:latin typeface="Aptos"/>
+                <a:cs typeface="Aptos"/>
+              </a:rPr>
+              <a:t>Источник истины — PostgreSQL.</a:t>
+            </a:r>
+          </a:p>
+          <a:p>
+            <a:pPr algn="l"/>
+            <a:r>
+              <a:rPr lang="ru-RU" sz="1400" b="0">
+                <a:solidFill>
+                  <a:srgbClr val="18212B"/>
+                </a:solidFill>
+                <a:latin typeface="Aptos"/>
+                <a:cs typeface="Aptos"/>
+              </a:rPr>
+              <a:t/>
+            </a:r>
+          </a:p>
+          <a:p>
+            <a:pPr algn="l"/>
+            <a:r>
+              <a:rPr lang="ru-RU" sz="1400" b="0">
+                <a:solidFill>
+                  <a:srgbClr val="18212B"/>
+                </a:solidFill>
+                <a:latin typeface="Aptos"/>
+                <a:cs typeface="Aptos"/>
+              </a:rPr>
+              <a:t>При сомнениях клиент восстанавливает согласованность повторным HTTP-запросом состояния.</a:t>
+            </a:r>
+          </a:p>
+        </p:txBody>
+      </p:sp>
+      <p:sp>
+        <p:nvSpPr>
+          <p:cNvPr id="22" name="Shape 22"/>
+          <p:cNvSpPr txBox="1"/>
+          <p:nvPr/>
+        </p:nvSpPr>
+        <p:spPr>
+          <a:xfrm>
+            <a:off x="8092440" y="1508760"/>
+            <a:ext cx="3520440" cy="4343400"/>
+          </a:xfrm>
+          <a:prstGeom prst="roundRect">
+            <a:avLst/>
+          </a:prstGeom>
+          <a:solidFill>
+            <a:srgbClr val="FFF3D8"/>
+          </a:solidFill>
+          <a:ln w="12700">
+            <a:solidFill>
+              <a:srgbClr val="C76F2E"/>
+            </a:solidFill>
+          </a:ln>
+        </p:spPr>
+        <p:txBody>
+          <a:bodyPr wrap="square" lIns="177800" tIns="177800" rIns="177800" bIns="177800"/>
+          <a:lstStyle/>
+          <a:p>
+            <a:pPr algn="l"/>
+            <a:r>
+              <a:rPr lang="ru-RU" sz="1400" b="1">
+                <a:solidFill>
+                  <a:srgbClr val="18212B"/>
+                </a:solidFill>
+                <a:latin typeface="Aptos"/>
+                <a:cs typeface="Aptos"/>
+              </a:rPr>
+              <a:t>Дальнейшее развитие</a:t>
+            </a:r>
+          </a:p>
+          <a:p>
+            <a:pPr algn="l"/>
+            <a:r>
+              <a:rPr lang="ru-RU" sz="1400" b="1">
+                <a:solidFill>
+                  <a:srgbClr val="18212B"/>
+                </a:solidFill>
+                <a:latin typeface="Aptos"/>
+                <a:cs typeface="Aptos"/>
+              </a:rPr>
+              <a:t/>
+            </a:r>
+          </a:p>
+          <a:p>
+            <a:pPr algn="l"/>
+            <a:r>
+              <a:rPr lang="ru-RU" sz="1400" b="1">
+                <a:solidFill>
+                  <a:srgbClr val="18212B"/>
+                </a:solidFill>
+                <a:latin typeface="Aptos"/>
+                <a:cs typeface="Aptos"/>
+              </a:rPr>
+              <a:t>Durable broker/event log</a:t>
+            </a:r>
+          </a:p>
+          <a:p>
+            <a:pPr algn="l"/>
+            <a:r>
+              <a:rPr lang="ru-RU" sz="1400" b="1">
+                <a:solidFill>
+                  <a:srgbClr val="18212B"/>
+                </a:solidFill>
+                <a:latin typeface="Aptos"/>
+                <a:cs typeface="Aptos"/>
+              </a:rPr>
+              <a:t>версии сущностей</a:t>
+            </a:r>
+          </a:p>
+          <a:p>
+            <a:pPr algn="l"/>
+            <a:r>
+              <a:rPr lang="ru-RU" sz="1400" b="1">
+                <a:solidFill>
+                  <a:srgbClr val="18212B"/>
+                </a:solidFill>
+                <a:latin typeface="Aptos"/>
+                <a:cs typeface="Aptos"/>
+              </a:rPr>
+              <a:t>optimistic concurrency</a:t>
+            </a:r>
+          </a:p>
+          <a:p>
+            <a:pPr algn="l"/>
+            <a:r>
+              <a:rPr lang="ru-RU" sz="1400" b="1">
+                <a:solidFill>
+                  <a:srgbClr val="18212B"/>
+                </a:solidFill>
+                <a:latin typeface="Aptos"/>
+                <a:cs typeface="Aptos"/>
+              </a:rPr>
+              <a:t>outbox/inbox</a:t>
+            </a:r>
+          </a:p>
+          <a:p>
+            <a:pPr algn="l"/>
+            <a:r>
+              <a:rPr lang="ru-RU" sz="1400" b="1">
+                <a:solidFill>
+                  <a:srgbClr val="18212B"/>
+                </a:solidFill>
+                <a:latin typeface="Aptos"/>
+                <a:cs typeface="Aptos"/>
+              </a:rPr>
+              <a:t>повторная синхронизация по версии</a:t>
+            </a:r>
+          </a:p>
+        </p:txBody>
+      </p:sp>
+      <p:sp>
+        <p:nvSpPr>
+          <p:cNvPr id="900" name="Shape 900"/>
+          <p:cNvSpPr txBox="1"/>
+          <p:nvPr/>
+        </p:nvSpPr>
+        <p:spPr>
+          <a:xfrm>
+            <a:off x="594360" y="6510528"/>
+            <a:ext cx="10972800" cy="201168"/>
+          </a:xfrm>
+          <a:prstGeom prst="roundRect">
+            <a:avLst/>
+          </a:prstGeom>
+          <a:noFill/>
+          <a:ln>
+            <a:noFill/>
+          </a:ln>
+        </p:spPr>
+        <p:txBody>
+          <a:bodyPr wrap="square" lIns="177800" tIns="177800" rIns="177800" bIns="177800"/>
+          <a:lstStyle/>
+          <a:p>
+            <a:pPr algn="l"/>
+            <a:r>
+              <a:rPr lang="ru-RU" sz="800" b="0">
+                <a:solidFill>
+                  <a:srgbClr val="5E6A75"/>
+                </a:solidFill>
+                <a:latin typeface="Aptos"/>
+                <a:cs typeface="Aptos"/>
+              </a:rPr>
+              <a:t>Real-time scale-out · 14</a:t>
+            </a:r>
+          </a:p>
+        </p:txBody>
+      </p:sp>
+    </p:spTree>
+  </p:cSld>
+  <p:clrMapOvr>
+    <a:masterClrMapping/>
+  </p:clrMapOvr>
+</p:sld>
+</file>
+
+<file path=ppt/slides/slide15.xml><?xml version="1.0" encoding="utf-8"?>
+<p:sld xmlns:a="http://schemas.openxmlformats.org/drawingml/2006/main" xmlns:r="http://schemas.openxmlformats.org/officeDocument/2006/relationships" xmlns:p="http://schemas.openxmlformats.org/presentationml/2006/main">
+  <p:cSld>
+    <p:bg>
+      <p:bgPr>
+        <a:solidFill>
+          <a:srgbClr val="F6F3EC"/>
+        </a:solidFill>
+        <a:effectLst/>
+      </p:bgPr>
+    </p:bg>
+    <p:spTree>
+      <p:nvGrpSpPr>
+        <p:cNvPr id="1" name=""/>
+        <p:cNvGrpSpPr/>
+        <p:nvPr/>
+      </p:nvGrpSpPr>
+      <p:grpSpPr>
+        <a:xfrm>
+          <a:off x="0" y="0"/>
+          <a:ext cx="0" cy="0"/>
+          <a:chOff x="0" y="0"/>
+          <a:chExt cx="0" cy="0"/>
+        </a:xfrm>
+      </p:grpSpPr>
+      <p:sp>
+        <p:nvSpPr>
+          <p:cNvPr id="10" name="Shape 10"/>
+          <p:cNvSpPr txBox="1"/>
+          <p:nvPr/>
+        </p:nvSpPr>
+        <p:spPr>
+          <a:xfrm>
+            <a:off x="594360" y="411480"/>
+            <a:ext cx="10881360" cy="658368"/>
+          </a:xfrm>
+          <a:prstGeom prst="roundRect">
+            <a:avLst/>
+          </a:prstGeom>
+          <a:noFill/>
+          <a:ln>
+            <a:noFill/>
+          </a:ln>
+        </p:spPr>
+        <p:txBody>
+          <a:bodyPr wrap="square" lIns="177800" tIns="177800" rIns="177800" bIns="177800"/>
+          <a:lstStyle/>
+          <a:p>
+            <a:pPr algn="l"/>
+            <a:r>
+              <a:rPr lang="ru-RU" sz="3000" b="1">
+                <a:solidFill>
+                  <a:srgbClr val="18212B"/>
+                </a:solidFill>
+                <a:latin typeface="Aptos"/>
+                <a:cs typeface="Aptos"/>
+              </a:rPr>
               <a:t>Вывод</a:t>
             </a:r>
           </a:p>
@@ -2526,7 +3004,7 @@
                 <a:latin typeface="Aptos"/>
                 <a:cs typeface="Aptos"/>
               </a:rPr>
-              <a:t>Real-time scale-out · 14</a:t>
+              <a:t>Real-time scale-out · 15</a:t>
             </a:r>
           </a:p>
         </p:txBody>
@@ -2596,7 +3074,7 @@
                 <a:latin typeface="Aptos"/>
                 <a:cs typeface="Aptos"/>
               </a:rPr>
-              <a:t>Целевой продукт: дашборд</a:t>
+              <a:t>Контекст продукта в SDLC компании</a:t>
             </a:r>
           </a:p>
         </p:txBody>
@@ -2633,7 +3111,7 @@
                 <a:latin typeface="Aptos"/>
                 <a:cs typeface="Aptos"/>
               </a:rPr>
-              <a:t>Пользователь видит отчёты команды, статусы, ответственных и активность по задачам</a:t>
+              <a:t>Аналитика → разработка → тестирование → деплой; продукт усиливает этап проверки</a:t>
             </a:r>
           </a:p>
         </p:txBody>
@@ -2646,10 +3124,10 @@
         </p:nvSpPr>
         <p:spPr>
           <a:xfrm>
-            <a:off x="1078992" y="1353312"/>
-            <a:ext cx="10003536" cy="5047488"/>
-          </a:xfrm>
-          <a:prstGeom prst="rect">
+            <a:off x="685800" y="1627632"/>
+            <a:ext cx="2286000" cy="1143000"/>
+          </a:xfrm>
+          <a:prstGeom prst="roundRect">
             <a:avLst/>
           </a:prstGeom>
           <a:solidFill>
@@ -2664,38 +3142,485 @@
         <p:txBody>
           <a:bodyPr wrap="square" lIns="177800" tIns="177800" rIns="177800" bIns="177800"/>
           <a:lstStyle/>
-          <a:p/>
-        </p:txBody>
-      </p:sp>
-      <p:pic>
-        <p:nvPicPr>
-          <p:cNvPr id="21" name="interface-dashboard.png"/>
-          <p:cNvPicPr>
-            <a:picLocks noChangeAspect="1"/>
-          </p:cNvPicPr>
-          <p:nvPr/>
-        </p:nvPicPr>
-        <p:blipFill>
-          <a:blip r:embed="rId2"/>
-          <a:stretch>
-            <a:fillRect/>
-          </a:stretch>
-        </p:blipFill>
-        <p:spPr>
-          <a:xfrm>
-            <a:off x="1143000" y="1417320"/>
-            <a:ext cx="9875520" cy="4992624"/>
-          </a:xfrm>
-          <a:prstGeom prst="rect">
-            <a:avLst/>
-          </a:prstGeom>
+          <a:p>
+            <a:pPr algn="ctr"/>
+            <a:r>
+              <a:rPr lang="ru-RU" sz="1400" b="1">
+                <a:solidFill>
+                  <a:srgbClr val="18212B"/>
+                </a:solidFill>
+                <a:latin typeface="Aptos"/>
+                <a:cs typeface="Aptos"/>
+              </a:rPr>
+              <a:t>Аналитика</a:t>
+            </a:r>
+          </a:p>
+          <a:p>
+            <a:pPr algn="ctr"/>
+            <a:r>
+              <a:rPr lang="ru-RU" sz="1400" b="1">
+                <a:solidFill>
+                  <a:srgbClr val="18212B"/>
+                </a:solidFill>
+                <a:latin typeface="Aptos"/>
+                <a:cs typeface="Aptos"/>
+              </a:rPr>
+              <a:t/>
+            </a:r>
+          </a:p>
+          <a:p>
+            <a:pPr algn="ctr"/>
+            <a:r>
+              <a:rPr lang="ru-RU" sz="1400" b="1">
+                <a:solidFill>
+                  <a:srgbClr val="18212B"/>
+                </a:solidFill>
+                <a:latin typeface="Aptos"/>
+                <a:cs typeface="Aptos"/>
+              </a:rPr>
+              <a:t>Требования, сценарии, постановка задачи</a:t>
+            </a:r>
+          </a:p>
+        </p:txBody>
+      </p:sp>
+      <p:sp>
+        <p:nvSpPr>
+          <p:cNvPr id="21" name="Shape 21"/>
+          <p:cNvSpPr txBox="1"/>
+          <p:nvPr/>
+        </p:nvSpPr>
+        <p:spPr>
+          <a:xfrm>
+            <a:off x="3246120" y="1627632"/>
+            <a:ext cx="2286000" cy="1143000"/>
+          </a:xfrm>
+          <a:prstGeom prst="roundRect">
+            <a:avLst/>
+          </a:prstGeom>
+          <a:solidFill>
+            <a:srgbClr val="FFFFFF"/>
+          </a:solidFill>
           <a:ln w="12700">
             <a:solidFill>
               <a:srgbClr val="D7D2C7"/>
             </a:solidFill>
           </a:ln>
         </p:spPr>
-      </p:pic>
+        <p:txBody>
+          <a:bodyPr wrap="square" lIns="177800" tIns="177800" rIns="177800" bIns="177800"/>
+          <a:lstStyle/>
+          <a:p>
+            <a:pPr algn="ctr"/>
+            <a:r>
+              <a:rPr lang="ru-RU" sz="1400" b="1">
+                <a:solidFill>
+                  <a:srgbClr val="18212B"/>
+                </a:solidFill>
+                <a:latin typeface="Aptos"/>
+                <a:cs typeface="Aptos"/>
+              </a:rPr>
+              <a:t>Разработка</a:t>
+            </a:r>
+          </a:p>
+          <a:p>
+            <a:pPr algn="ctr"/>
+            <a:r>
+              <a:rPr lang="ru-RU" sz="1400" b="1">
+                <a:solidFill>
+                  <a:srgbClr val="18212B"/>
+                </a:solidFill>
+                <a:latin typeface="Aptos"/>
+                <a:cs typeface="Aptos"/>
+              </a:rPr>
+              <a:t/>
+            </a:r>
+          </a:p>
+          <a:p>
+            <a:pPr algn="ctr"/>
+            <a:r>
+              <a:rPr lang="ru-RU" sz="1400" b="1">
+                <a:solidFill>
+                  <a:srgbClr val="18212B"/>
+                </a:solidFill>
+                <a:latin typeface="Aptos"/>
+                <a:cs typeface="Aptos"/>
+              </a:rPr>
+              <a:t>Реализация изменений и исправлений</a:t>
+            </a:r>
+          </a:p>
+        </p:txBody>
+      </p:sp>
+      <p:sp>
+        <p:nvSpPr>
+          <p:cNvPr id="22" name="Shape 22"/>
+          <p:cNvSpPr txBox="1"/>
+          <p:nvPr/>
+        </p:nvSpPr>
+        <p:spPr>
+          <a:xfrm>
+            <a:off x="5806440" y="1481328"/>
+            <a:ext cx="2468880" cy="1444752"/>
+          </a:xfrm>
+          <a:prstGeom prst="roundRect">
+            <a:avLst/>
+          </a:prstGeom>
+          <a:solidFill>
+            <a:srgbClr val="E8F3F1"/>
+          </a:solidFill>
+          <a:ln w="12700">
+            <a:solidFill>
+              <a:srgbClr val="0B6E69"/>
+            </a:solidFill>
+          </a:ln>
+        </p:spPr>
+        <p:txBody>
+          <a:bodyPr wrap="square" lIns="177800" tIns="177800" rIns="177800" bIns="177800"/>
+          <a:lstStyle/>
+          <a:p>
+            <a:pPr algn="ctr"/>
+            <a:r>
+              <a:rPr lang="ru-RU" sz="1400" b="1">
+                <a:solidFill>
+                  <a:srgbClr val="18212B"/>
+                </a:solidFill>
+                <a:latin typeface="Aptos"/>
+                <a:cs typeface="Aptos"/>
+              </a:rPr>
+              <a:t>Тестирование</a:t>
+            </a:r>
+          </a:p>
+          <a:p>
+            <a:pPr algn="ctr"/>
+            <a:r>
+              <a:rPr lang="ru-RU" sz="1400" b="1">
+                <a:solidFill>
+                  <a:srgbClr val="18212B"/>
+                </a:solidFill>
+                <a:latin typeface="Aptos"/>
+                <a:cs typeface="Aptos"/>
+              </a:rPr>
+              <a:t/>
+            </a:r>
+          </a:p>
+          <a:p>
+            <a:pPr algn="ctr"/>
+            <a:r>
+              <a:rPr lang="ru-RU" sz="1400" b="1">
+                <a:solidFill>
+                  <a:srgbClr val="18212B"/>
+                </a:solidFill>
+                <a:latin typeface="Aptos"/>
+                <a:cs typeface="Aptos"/>
+              </a:rPr>
+              <a:t>Баги, шаги воспроизведения, фактический и ожидаемый результат</a:t>
+            </a:r>
+          </a:p>
+        </p:txBody>
+      </p:sp>
+      <p:sp>
+        <p:nvSpPr>
+          <p:cNvPr id="23" name="Shape 23"/>
+          <p:cNvSpPr txBox="1"/>
+          <p:nvPr/>
+        </p:nvSpPr>
+        <p:spPr>
+          <a:xfrm>
+            <a:off x="8641080" y="1627632"/>
+            <a:ext cx="2286000" cy="1143000"/>
+          </a:xfrm>
+          <a:prstGeom prst="roundRect">
+            <a:avLst/>
+          </a:prstGeom>
+          <a:solidFill>
+            <a:srgbClr val="FFFFFF"/>
+          </a:solidFill>
+          <a:ln w="12700">
+            <a:solidFill>
+              <a:srgbClr val="D7D2C7"/>
+            </a:solidFill>
+          </a:ln>
+        </p:spPr>
+        <p:txBody>
+          <a:bodyPr wrap="square" lIns="177800" tIns="177800" rIns="177800" bIns="177800"/>
+          <a:lstStyle/>
+          <a:p>
+            <a:pPr algn="ctr"/>
+            <a:r>
+              <a:rPr lang="ru-RU" sz="1400" b="1">
+                <a:solidFill>
+                  <a:srgbClr val="18212B"/>
+                </a:solidFill>
+                <a:latin typeface="Aptos"/>
+                <a:cs typeface="Aptos"/>
+              </a:rPr>
+              <a:t>Деплой</a:t>
+            </a:r>
+          </a:p>
+          <a:p>
+            <a:pPr algn="ctr"/>
+            <a:r>
+              <a:rPr lang="ru-RU" sz="1400" b="1">
+                <a:solidFill>
+                  <a:srgbClr val="18212B"/>
+                </a:solidFill>
+                <a:latin typeface="Aptos"/>
+                <a:cs typeface="Aptos"/>
+              </a:rPr>
+              <a:t/>
+            </a:r>
+          </a:p>
+          <a:p>
+            <a:pPr algn="ctr"/>
+            <a:r>
+              <a:rPr lang="ru-RU" sz="1400" b="1">
+                <a:solidFill>
+                  <a:srgbClr val="18212B"/>
+                </a:solidFill>
+                <a:latin typeface="Aptos"/>
+                <a:cs typeface="Aptos"/>
+              </a:rPr>
+              <a:t>Выкладка проверенного изменения</a:t>
+            </a:r>
+          </a:p>
+        </p:txBody>
+      </p:sp>
+      <p:cxnSp>
+        <p:nvCxnSpPr>
+          <p:cNvPr id="40" name="Connector 40"/>
+          <p:cNvCxnSpPr/>
+          <p:nvPr/>
+        </p:nvCxnSpPr>
+        <p:spPr>
+          <a:xfrm flipH="0" flipV="0">
+            <a:off x="2971800" y="2194560"/>
+            <a:ext cx="274320" cy="9144"/>
+          </a:xfrm>
+          <a:prstGeom prst="straightConnector1">
+            <a:avLst/>
+          </a:prstGeom>
+          <a:ln w="15875" cap="flat">
+            <a:solidFill>
+              <a:srgbClr val="5E6A75"/>
+            </a:solidFill>
+            <a:tailEnd type="triangle"/>
+          </a:ln>
+        </p:spPr>
+      </p:cxnSp>
+      <p:cxnSp>
+        <p:nvCxnSpPr>
+          <p:cNvPr id="41" name="Connector 41"/>
+          <p:cNvCxnSpPr/>
+          <p:nvPr/>
+        </p:nvCxnSpPr>
+        <p:spPr>
+          <a:xfrm flipH="0" flipV="0">
+            <a:off x="5532120" y="2194560"/>
+            <a:ext cx="274320" cy="9144"/>
+          </a:xfrm>
+          <a:prstGeom prst="straightConnector1">
+            <a:avLst/>
+          </a:prstGeom>
+          <a:ln w="15875" cap="flat">
+            <a:solidFill>
+              <a:srgbClr val="5E6A75"/>
+            </a:solidFill>
+            <a:tailEnd type="triangle"/>
+          </a:ln>
+        </p:spPr>
+      </p:cxnSp>
+      <p:cxnSp>
+        <p:nvCxnSpPr>
+          <p:cNvPr id="42" name="Connector 42"/>
+          <p:cNvCxnSpPr/>
+          <p:nvPr/>
+        </p:nvCxnSpPr>
+        <p:spPr>
+          <a:xfrm flipH="0" flipV="0">
+            <a:off x="8275320" y="2194560"/>
+            <a:ext cx="365760" cy="9144"/>
+          </a:xfrm>
+          <a:prstGeom prst="straightConnector1">
+            <a:avLst/>
+          </a:prstGeom>
+          <a:ln w="15875" cap="flat">
+            <a:solidFill>
+              <a:srgbClr val="5E6A75"/>
+            </a:solidFill>
+            <a:tailEnd type="triangle"/>
+          </a:ln>
+        </p:spPr>
+      </p:cxnSp>
+      <p:sp>
+        <p:nvSpPr>
+          <p:cNvPr id="30" name="Shape 30"/>
+          <p:cNvSpPr txBox="1"/>
+          <p:nvPr/>
+        </p:nvSpPr>
+        <p:spPr>
+          <a:xfrm>
+            <a:off x="685800" y="3703320"/>
+            <a:ext cx="5257800" cy="1463040"/>
+          </a:xfrm>
+          <a:prstGeom prst="roundRect">
+            <a:avLst/>
+          </a:prstGeom>
+          <a:solidFill>
+            <a:srgbClr val="FFFFFF"/>
+          </a:solidFill>
+          <a:ln w="12700">
+            <a:solidFill>
+              <a:srgbClr val="D7D2C7"/>
+            </a:solidFill>
+          </a:ln>
+        </p:spPr>
+        <p:txBody>
+          <a:bodyPr wrap="square" lIns="177800" tIns="177800" rIns="177800" bIns="177800"/>
+          <a:lstStyle/>
+          <a:p>
+            <a:pPr algn="l"/>
+            <a:r>
+              <a:rPr lang="ru-RU" sz="1500" b="0">
+                <a:solidFill>
+                  <a:srgbClr val="18212B"/>
+                </a:solidFill>
+                <a:latin typeface="Aptos"/>
+                <a:cs typeface="Aptos"/>
+              </a:rPr>
+              <a:t>Что оптимизирует продукт</a:t>
+            </a:r>
+          </a:p>
+          <a:p>
+            <a:pPr algn="l"/>
+            <a:r>
+              <a:rPr lang="ru-RU" sz="1500" b="0">
+                <a:solidFill>
+                  <a:srgbClr val="18212B"/>
+                </a:solidFill>
+                <a:latin typeface="Aptos"/>
+                <a:cs typeface="Aptos"/>
+              </a:rPr>
+              <a:t/>
+            </a:r>
+          </a:p>
+          <a:p>
+            <a:pPr algn="l"/>
+            <a:r>
+              <a:rPr lang="ru-RU" sz="1500" b="0">
+                <a:solidFill>
+                  <a:srgbClr val="18212B"/>
+                </a:solidFill>
+                <a:latin typeface="Aptos"/>
+                <a:cs typeface="Aptos"/>
+              </a:rPr>
+              <a:t>Фиксирует дефект в рабочем контексте: отчет, баг, участники, статус, шаги воспроизведения, фактический и ожидаемый результат.</a:t>
+            </a:r>
+          </a:p>
+        </p:txBody>
+      </p:sp>
+      <p:sp>
+        <p:nvSpPr>
+          <p:cNvPr id="31" name="Shape 31"/>
+          <p:cNvSpPr txBox="1"/>
+          <p:nvPr/>
+        </p:nvSpPr>
+        <p:spPr>
+          <a:xfrm>
+            <a:off x="6172200" y="3703320"/>
+            <a:ext cx="5349240" cy="1463040"/>
+          </a:xfrm>
+          <a:prstGeom prst="roundRect">
+            <a:avLst/>
+          </a:prstGeom>
+          <a:solidFill>
+            <a:srgbClr val="E8F3F1"/>
+          </a:solidFill>
+          <a:ln w="12700">
+            <a:solidFill>
+              <a:srgbClr val="0B6E69"/>
+            </a:solidFill>
+          </a:ln>
+        </p:spPr>
+        <p:txBody>
+          <a:bodyPr wrap="square" lIns="177800" tIns="177800" rIns="177800" bIns="177800"/>
+          <a:lstStyle/>
+          <a:p>
+            <a:pPr algn="l"/>
+            <a:r>
+              <a:rPr lang="ru-RU" sz="1500" b="1">
+                <a:solidFill>
+                  <a:srgbClr val="18212B"/>
+                </a:solidFill>
+                <a:latin typeface="Aptos"/>
+                <a:cs typeface="Aptos"/>
+              </a:rPr>
+              <a:t>Почему нужен real-time</a:t>
+            </a:r>
+          </a:p>
+          <a:p>
+            <a:pPr algn="l"/>
+            <a:r>
+              <a:rPr lang="ru-RU" sz="1500" b="1">
+                <a:solidFill>
+                  <a:srgbClr val="18212B"/>
+                </a:solidFill>
+                <a:latin typeface="Aptos"/>
+                <a:cs typeface="Aptos"/>
+              </a:rPr>
+              <a:t/>
+            </a:r>
+          </a:p>
+          <a:p>
+            <a:pPr algn="l"/>
+            <a:r>
+              <a:rPr lang="ru-RU" sz="1500" b="1">
+                <a:solidFill>
+                  <a:srgbClr val="18212B"/>
+                </a:solidFill>
+                <a:latin typeface="Aptos"/>
+                <a:cs typeface="Aptos"/>
+              </a:rPr>
+              <a:t>Тестировщик и разработчик работают с одной страницей отчета. Изменения должны появляться у участников без ручного обновления.</a:t>
+            </a:r>
+          </a:p>
+        </p:txBody>
+      </p:sp>
+      <p:sp>
+        <p:nvSpPr>
+          <p:cNvPr id="32" name="Shape 32"/>
+          <p:cNvSpPr txBox="1"/>
+          <p:nvPr/>
+        </p:nvSpPr>
+        <p:spPr>
+          <a:xfrm>
+            <a:off x="685800" y="5413248"/>
+            <a:ext cx="10835640" cy="502920"/>
+          </a:xfrm>
+          <a:prstGeom prst="roundRect">
+            <a:avLst/>
+          </a:prstGeom>
+          <a:noFill/>
+          <a:ln>
+            <a:noFill/>
+          </a:ln>
+        </p:spPr>
+        <p:txBody>
+          <a:bodyPr wrap="square" lIns="177800" tIns="177800" rIns="177800" bIns="177800"/>
+          <a:lstStyle/>
+          <a:p>
+            <a:pPr algn="ctr"/>
+            <a:r>
+              <a:rPr lang="ru-RU" sz="1300" b="0">
+                <a:solidFill>
+                  <a:srgbClr val="5E6A75"/>
+                </a:solidFill>
+                <a:latin typeface="Aptos"/>
+                <a:cs typeface="Aptos"/>
+              </a:rPr>
+              <a:t>Дальше: как выглядит этот продукт и почему single-node real-time становится ограничением при масштабировании backend.</a:t>
+            </a:r>
+          </a:p>
+        </p:txBody>
+      </p:sp>
       <p:sp>
         <p:nvSpPr>
           <p:cNvPr id="900" name="Shape 900"/>
@@ -2798,7 +3723,7 @@
                 <a:latin typeface="Aptos"/>
                 <a:cs typeface="Aptos"/>
               </a:rPr>
-              <a:t>Целевой продукт: страница отчёта</a:t>
+              <a:t>Целевой продукт: дашборд</a:t>
             </a:r>
           </a:p>
         </p:txBody>
@@ -2835,7 +3760,7 @@
                 <a:latin typeface="Aptos"/>
                 <a:cs typeface="Aptos"/>
               </a:rPr>
-              <a:t>Основной рабочий экран: отчёт, баги, шаги воспроизведения, комментарии и участники</a:t>
+              <a:t>Пользователь видит отчёты команды, статусы, ответственных и активность по задачам</a:t>
             </a:r>
           </a:p>
         </p:txBody>
@@ -2871,7 +3796,7 @@
       </p:sp>
       <p:pic>
         <p:nvPicPr>
-          <p:cNvPr id="21" name="interface-report-page.png"/>
+          <p:cNvPr id="21" name="interface-dashboard.png"/>
           <p:cNvPicPr>
             <a:picLocks noChangeAspect="1"/>
           </p:cNvPicPr>
@@ -3000,7 +3925,7 @@
                 <a:latin typeface="Aptos"/>
                 <a:cs typeface="Aptos"/>
               </a:rPr>
-              <a:t>Проблема и цель</a:t>
+              <a:t>Целевой продукт: страница отчёта</a:t>
             </a:r>
           </a:p>
         </p:txBody>
@@ -3037,7 +3962,7 @@
                 <a:latin typeface="Aptos"/>
                 <a:cs typeface="Aptos"/>
               </a:rPr>
-              <a:t>Single-node SignalR ограничивает горизонтальное масштабирование</a:t>
+              <a:t>Основной рабочий экран: отчёт, баги, шаги воспроизведения, комментарии и участники</a:t>
             </a:r>
           </a:p>
         </p:txBody>
@@ -3050,10 +3975,10 @@
         </p:nvSpPr>
         <p:spPr>
           <a:xfrm>
-            <a:off x="685800" y="1508760"/>
-            <a:ext cx="5349240" cy="4206240"/>
-          </a:xfrm>
-          <a:prstGeom prst="roundRect">
+            <a:off x="1078992" y="1353312"/>
+            <a:ext cx="10003536" cy="5047488"/>
+          </a:xfrm>
+          <a:prstGeom prst="rect">
             <a:avLst/>
           </a:prstGeom>
           <a:solidFill>
@@ -3068,166 +3993,38 @@
         <p:txBody>
           <a:bodyPr wrap="square" lIns="177800" tIns="177800" rIns="177800" bIns="177800"/>
           <a:lstStyle/>
-          <a:p>
-            <a:pPr algn="l"/>
-            <a:r>
-              <a:rPr lang="ru-RU" sz="1600" b="0">
-                <a:solidFill>
-                  <a:srgbClr val="18212B"/>
-                </a:solidFill>
-                <a:latin typeface="Aptos"/>
-                <a:cs typeface="Aptos"/>
-              </a:rPr>
-              <a:t>Проблема</a:t>
-            </a:r>
-          </a:p>
-          <a:p>
-            <a:pPr algn="l"/>
-            <a:r>
-              <a:rPr lang="ru-RU" sz="1600" b="0">
-                <a:solidFill>
-                  <a:srgbClr val="18212B"/>
-                </a:solidFill>
-                <a:latin typeface="Aptos"/>
-                <a:cs typeface="Aptos"/>
-              </a:rPr>
-              <a:t/>
-            </a:r>
-          </a:p>
-          <a:p>
-            <a:pPr algn="l"/>
-            <a:r>
-              <a:rPr lang="ru-RU" sz="1600" b="0">
-                <a:solidFill>
-                  <a:srgbClr val="18212B"/>
-                </a:solidFill>
-                <a:latin typeface="Aptos"/>
-                <a:cs typeface="Aptos"/>
-              </a:rPr>
-              <a:t>Сведения о подключениях и группах SignalR хранятся в памяти процесса.</a:t>
-            </a:r>
-          </a:p>
-          <a:p>
-            <a:pPr algn="l"/>
-            <a:r>
-              <a:rPr lang="ru-RU" sz="1600" b="0">
-                <a:solidFill>
-                  <a:srgbClr val="18212B"/>
-                </a:solidFill>
-                <a:latin typeface="Aptos"/>
-                <a:cs typeface="Aptos"/>
-              </a:rPr>
-              <a:t/>
-            </a:r>
-          </a:p>
-          <a:p>
-            <a:pPr algn="l"/>
-            <a:r>
-              <a:rPr lang="ru-RU" sz="1600" b="0">
-                <a:solidFill>
-                  <a:srgbClr val="18212B"/>
-                </a:solidFill>
-                <a:latin typeface="Aptos"/>
-                <a:cs typeface="Aptos"/>
-              </a:rPr>
-              <a:t>При нескольких экземплярах backend событие, созданное на одном узле, не доходит до клиента, подключенного к другому узлу.</a:t>
-            </a:r>
-          </a:p>
-          <a:p>
-            <a:pPr algn="l"/>
-            <a:r>
-              <a:rPr lang="ru-RU" sz="1600" b="0">
-                <a:solidFill>
-                  <a:srgbClr val="18212B"/>
-                </a:solidFill>
-                <a:latin typeface="Aptos"/>
-                <a:cs typeface="Aptos"/>
-              </a:rPr>
-              <a:t/>
-            </a:r>
-          </a:p>
-          <a:p>
-            <a:pPr algn="l"/>
-            <a:r>
-              <a:rPr lang="ru-RU" sz="1600" b="0">
-                <a:solidFill>
-                  <a:srgbClr val="18212B"/>
-                </a:solidFill>
-                <a:latin typeface="Aptos"/>
-                <a:cs typeface="Aptos"/>
-              </a:rPr>
-              <a:t>Real-time пространство фрагментируется на независимые острова.</a:t>
-            </a:r>
-          </a:p>
-        </p:txBody>
-      </p:sp>
-      <p:sp>
-        <p:nvSpPr>
-          <p:cNvPr id="21" name="Shape 21"/>
-          <p:cNvSpPr txBox="1"/>
-          <p:nvPr/>
-        </p:nvSpPr>
-        <p:spPr>
-          <a:xfrm>
-            <a:off x="6172200" y="1508760"/>
-            <a:ext cx="5349240" cy="4206240"/>
-          </a:xfrm>
-          <a:prstGeom prst="roundRect">
-            <a:avLst/>
-          </a:prstGeom>
-          <a:solidFill>
-            <a:srgbClr val="E8F3F1"/>
-          </a:solidFill>
+          <a:p/>
+        </p:txBody>
+      </p:sp>
+      <p:pic>
+        <p:nvPicPr>
+          <p:cNvPr id="21" name="interface-report-page.png"/>
+          <p:cNvPicPr>
+            <a:picLocks noChangeAspect="1"/>
+          </p:cNvPicPr>
+          <p:nvPr/>
+        </p:nvPicPr>
+        <p:blipFill>
+          <a:blip r:embed="rId2"/>
+          <a:stretch>
+            <a:fillRect/>
+          </a:stretch>
+        </p:blipFill>
+        <p:spPr>
+          <a:xfrm>
+            <a:off x="1143000" y="1417320"/>
+            <a:ext cx="9875520" cy="4992624"/>
+          </a:xfrm>
+          <a:prstGeom prst="rect">
+            <a:avLst/>
+          </a:prstGeom>
           <a:ln w="12700">
             <a:solidFill>
-              <a:srgbClr val="0B6E69"/>
+              <a:srgbClr val="D7D2C7"/>
             </a:solidFill>
           </a:ln>
         </p:spPr>
-        <p:txBody>
-          <a:bodyPr wrap="square" lIns="177800" tIns="177800" rIns="177800" bIns="177800"/>
-          <a:lstStyle/>
-          <a:p>
-            <a:pPr algn="l"/>
-            <a:r>
-              <a:rPr lang="ru-RU" sz="1600" b="1">
-                <a:solidFill>
-                  <a:srgbClr val="18212B"/>
-                </a:solidFill>
-                <a:latin typeface="Aptos"/>
-                <a:cs typeface="Aptos"/>
-              </a:rPr>
-              <a:t>Цель работы</a:t>
-            </a:r>
-          </a:p>
-          <a:p>
-            <a:pPr algn="l"/>
-            <a:r>
-              <a:rPr lang="ru-RU" sz="1600" b="1">
-                <a:solidFill>
-                  <a:srgbClr val="18212B"/>
-                </a:solidFill>
-                <a:latin typeface="Aptos"/>
-                <a:cs typeface="Aptos"/>
-              </a:rPr>
-              <a:t/>
-            </a:r>
-          </a:p>
-          <a:p>
-            <a:pPr algn="l"/>
-            <a:r>
-              <a:rPr lang="ru-RU" sz="1600" b="1">
-                <a:solidFill>
-                  <a:srgbClr val="18212B"/>
-                </a:solidFill>
-                <a:latin typeface="Aptos"/>
-                <a:cs typeface="Aptos"/>
-              </a:rPr>
-              <a:t>Real-time интерфейс системы отслеживания задач, в котором WebSocket-соединения обслуживаются несколькими экземплярами app-api, а события об изменении сущностей доставляются клиентам независимо от узла подключения.</a:t>
-            </a:r>
-          </a:p>
-        </p:txBody>
-      </p:sp>
+      </p:pic>
       <p:sp>
         <p:nvSpPr>
           <p:cNvPr id="900" name="Shape 900"/>
@@ -3330,7 +4127,7 @@
                 <a:latin typeface="Aptos"/>
                 <a:cs typeface="Aptos"/>
               </a:rPr>
-              <a:t>Современный контекст</a:t>
+              <a:t>Проблема и цель</a:t>
             </a:r>
           </a:p>
         </p:txBody>
@@ -3367,7 +4164,7 @@
                 <a:latin typeface="Aptos"/>
                 <a:cs typeface="Aptos"/>
               </a:rPr>
-              <a:t>Интерфейсы становятся событийными; AI-инструменты усиливают ожидание живой синхронизации</a:t>
+              <a:t>Single-node SignalR ограничивает горизонтальное масштабирование</a:t>
             </a:r>
           </a:p>
         </p:txBody>
@@ -3381,7 +4178,7 @@
         <p:spPr>
           <a:xfrm>
             <a:off x="685800" y="1508760"/>
-            <a:ext cx="3520440" cy="4343400"/>
+            <a:ext cx="5349240" cy="4206240"/>
           </a:xfrm>
           <a:prstGeom prst="roundRect">
             <a:avLst/>
@@ -3401,20 +4198,20 @@
           <a:p>
             <a:pPr algn="l"/>
             <a:r>
-              <a:rPr lang="ru-RU" sz="1400" b="0">
-                <a:solidFill>
-                  <a:srgbClr val="18212B"/>
-                </a:solidFill>
-                <a:latin typeface="Aptos"/>
-                <a:cs typeface="Aptos"/>
-              </a:rPr>
-              <a:t>Рост сложности продуктов</a:t>
-            </a:r>
-          </a:p>
-          <a:p>
-            <a:pPr algn="l"/>
-            <a:r>
-              <a:rPr lang="ru-RU" sz="1400" b="0">
+              <a:rPr lang="ru-RU" sz="1600" b="0">
+                <a:solidFill>
+                  <a:srgbClr val="18212B"/>
+                </a:solidFill>
+                <a:latin typeface="Aptos"/>
+                <a:cs typeface="Aptos"/>
+              </a:rPr>
+              <a:t>Проблема</a:t>
+            </a:r>
+          </a:p>
+          <a:p>
+            <a:pPr algn="l"/>
+            <a:r>
+              <a:rPr lang="ru-RU" sz="1600" b="0">
                 <a:solidFill>
                   <a:srgbClr val="18212B"/>
                 </a:solidFill>
@@ -3427,20 +4224,20 @@
           <a:p>
             <a:pPr algn="l"/>
             <a:r>
-              <a:rPr lang="ru-RU" sz="1400" b="0">
-                <a:solidFill>
-                  <a:srgbClr val="18212B"/>
-                </a:solidFill>
-                <a:latin typeface="Aptos"/>
-                <a:cs typeface="Aptos"/>
-              </a:rPr>
-              <a:t>Пользователь работает не с одной формой, а с отчётом, багами, комментариями, вложениями, статусами и участниками.</a:t>
-            </a:r>
-          </a:p>
-          <a:p>
-            <a:pPr algn="l"/>
-            <a:r>
-              <a:rPr lang="ru-RU" sz="1400" b="0">
+              <a:rPr lang="ru-RU" sz="1600" b="0">
+                <a:solidFill>
+                  <a:srgbClr val="18212B"/>
+                </a:solidFill>
+                <a:latin typeface="Aptos"/>
+                <a:cs typeface="Aptos"/>
+              </a:rPr>
+              <a:t>Сведения о подключениях и группах SignalR хранятся в памяти процесса.</a:t>
+            </a:r>
+          </a:p>
+          <a:p>
+            <a:pPr algn="l"/>
+            <a:r>
+              <a:rPr lang="ru-RU" sz="1600" b="0">
                 <a:solidFill>
                   <a:srgbClr val="18212B"/>
                 </a:solidFill>
@@ -3453,14 +4250,40 @@
           <a:p>
             <a:pPr algn="l"/>
             <a:r>
-              <a:rPr lang="ru-RU" sz="1400" b="0">
-                <a:solidFill>
-                  <a:srgbClr val="18212B"/>
-                </a:solidFill>
-                <a:latin typeface="Aptos"/>
-                <a:cs typeface="Aptos"/>
-              </a:rPr>
-              <a:t>Изменения должны становиться видимыми без ручного обновления страницы.</a:t>
+              <a:rPr lang="ru-RU" sz="1600" b="0">
+                <a:solidFill>
+                  <a:srgbClr val="18212B"/>
+                </a:solidFill>
+                <a:latin typeface="Aptos"/>
+                <a:cs typeface="Aptos"/>
+              </a:rPr>
+              <a:t>При нескольких экземплярах backend событие, созданное на одном узле, не доходит до клиента, подключенного к другому узлу.</a:t>
+            </a:r>
+          </a:p>
+          <a:p>
+            <a:pPr algn="l"/>
+            <a:r>
+              <a:rPr lang="ru-RU" sz="1600" b="0">
+                <a:solidFill>
+                  <a:srgbClr val="18212B"/>
+                </a:solidFill>
+                <a:latin typeface="Aptos"/>
+                <a:cs typeface="Aptos"/>
+              </a:rPr>
+              <a:t/>
+            </a:r>
+          </a:p>
+          <a:p>
+            <a:pPr algn="l"/>
+            <a:r>
+              <a:rPr lang="ru-RU" sz="1600" b="0">
+                <a:solidFill>
+                  <a:srgbClr val="18212B"/>
+                </a:solidFill>
+                <a:latin typeface="Aptos"/>
+                <a:cs typeface="Aptos"/>
+              </a:rPr>
+              <a:t>Real-time пространство фрагментируется на независимые острова.</a:t>
             </a:r>
           </a:p>
         </p:txBody>
@@ -3473,101 +4296,8 @@
         </p:nvSpPr>
         <p:spPr>
           <a:xfrm>
-            <a:off x="4389120" y="1508760"/>
-            <a:ext cx="3520440" cy="4343400"/>
-          </a:xfrm>
-          <a:prstGeom prst="roundRect">
-            <a:avLst/>
-          </a:prstGeom>
-          <a:solidFill>
-            <a:srgbClr val="FFF3D8"/>
-          </a:solidFill>
-          <a:ln w="12700">
-            <a:solidFill>
-              <a:srgbClr val="C76F2E"/>
-            </a:solidFill>
-          </a:ln>
-        </p:spPr>
-        <p:txBody>
-          <a:bodyPr wrap="square" lIns="177800" tIns="177800" rIns="177800" bIns="177800"/>
-          <a:lstStyle/>
-          <a:p>
-            <a:pPr algn="l"/>
-            <a:r>
-              <a:rPr lang="ru-RU" sz="1400" b="0">
-                <a:solidFill>
-                  <a:srgbClr val="18212B"/>
-                </a:solidFill>
-                <a:latin typeface="Aptos"/>
-                <a:cs typeface="Aptos"/>
-              </a:rPr>
-              <a:t>AI-ready сценарии</a:t>
-            </a:r>
-          </a:p>
-          <a:p>
-            <a:pPr algn="l"/>
-            <a:r>
-              <a:rPr lang="ru-RU" sz="1400" b="0">
-                <a:solidFill>
-                  <a:srgbClr val="18212B"/>
-                </a:solidFill>
-                <a:latin typeface="Aptos"/>
-                <a:cs typeface="Aptos"/>
-              </a:rPr>
-              <a:t/>
-            </a:r>
-          </a:p>
-          <a:p>
-            <a:pPr algn="l"/>
-            <a:r>
-              <a:rPr lang="ru-RU" sz="1400" b="0">
-                <a:solidFill>
-                  <a:srgbClr val="18212B"/>
-                </a:solidFill>
-                <a:latin typeface="Aptos"/>
-                <a:cs typeface="Aptos"/>
-              </a:rPr>
-              <a:t>Фоновый сервис или ассистент может предложить исполнителя, дополнить описание, создать комментарий или изменить статус.</a:t>
-            </a:r>
-          </a:p>
-          <a:p>
-            <a:pPr algn="l"/>
-            <a:r>
-              <a:rPr lang="ru-RU" sz="1400" b="0">
-                <a:solidFill>
-                  <a:srgbClr val="18212B"/>
-                </a:solidFill>
-                <a:latin typeface="Aptos"/>
-                <a:cs typeface="Aptos"/>
-              </a:rPr>
-              <a:t/>
-            </a:r>
-          </a:p>
-          <a:p>
-            <a:pPr algn="l"/>
-            <a:r>
-              <a:rPr lang="ru-RU" sz="1400" b="0">
-                <a:solidFill>
-                  <a:srgbClr val="18212B"/>
-                </a:solidFill>
-                <a:latin typeface="Aptos"/>
-                <a:cs typeface="Aptos"/>
-              </a:rPr>
-              <a:t>В ВКР это контекст актуальности, а не заявление о готовой AI-функции.</a:t>
-            </a:r>
-          </a:p>
-        </p:txBody>
-      </p:sp>
-      <p:sp>
-        <p:nvSpPr>
-          <p:cNvPr id="22" name="Shape 22"/>
-          <p:cNvSpPr txBox="1"/>
-          <p:nvPr/>
-        </p:nvSpPr>
-        <p:spPr>
-          <a:xfrm>
-            <a:off x="8092440" y="1508760"/>
-            <a:ext cx="3520440" cy="4343400"/>
+            <a:off x="6172200" y="1508760"/>
+            <a:ext cx="5349240" cy="4206240"/>
           </a:xfrm>
           <a:prstGeom prst="roundRect">
             <a:avLst/>
@@ -3587,20 +4317,20 @@
           <a:p>
             <a:pPr algn="l"/>
             <a:r>
-              <a:rPr lang="ru-RU" sz="1400" b="1">
-                <a:solidFill>
-                  <a:srgbClr val="18212B"/>
-                </a:solidFill>
-                <a:latin typeface="Aptos"/>
-                <a:cs typeface="Aptos"/>
-              </a:rPr>
-              <a:t>REST + real-time</a:t>
-            </a:r>
-          </a:p>
-          <a:p>
-            <a:pPr algn="l"/>
-            <a:r>
-              <a:rPr lang="ru-RU" sz="1400" b="1">
+              <a:rPr lang="ru-RU" sz="1600" b="1">
+                <a:solidFill>
+                  <a:srgbClr val="18212B"/>
+                </a:solidFill>
+                <a:latin typeface="Aptos"/>
+                <a:cs typeface="Aptos"/>
+              </a:rPr>
+              <a:t>Цель работы</a:t>
+            </a:r>
+          </a:p>
+          <a:p>
+            <a:pPr algn="l"/>
+            <a:r>
+              <a:rPr lang="ru-RU" sz="1600" b="1">
                 <a:solidFill>
                   <a:srgbClr val="18212B"/>
                 </a:solidFill>
@@ -3613,40 +4343,14 @@
           <a:p>
             <a:pPr algn="l"/>
             <a:r>
-              <a:rPr lang="ru-RU" sz="1400" b="1">
-                <a:solidFill>
-                  <a:srgbClr val="18212B"/>
-                </a:solidFill>
-                <a:latin typeface="Aptos"/>
-                <a:cs typeface="Aptos"/>
-              </a:rPr>
-              <a:t>HTTP-запрос фиксирует изменение состояния.</a:t>
-            </a:r>
-          </a:p>
-          <a:p>
-            <a:pPr algn="l"/>
-            <a:r>
-              <a:rPr lang="ru-RU" sz="1400" b="1">
-                <a:solidFill>
-                  <a:srgbClr val="18212B"/>
-                </a:solidFill>
-                <a:latin typeface="Aptos"/>
-                <a:cs typeface="Aptos"/>
-              </a:rPr>
-              <a:t/>
-            </a:r>
-          </a:p>
-          <a:p>
-            <a:pPr algn="l"/>
-            <a:r>
-              <a:rPr lang="ru-RU" sz="1400" b="1">
-                <a:solidFill>
-                  <a:srgbClr val="18212B"/>
-                </a:solidFill>
-                <a:latin typeface="Aptos"/>
-                <a:cs typeface="Aptos"/>
-              </a:rPr>
-              <a:t>SignalR-событие распространяет изменение активным участникам, включая клиентов на других backend-узлах.</a:t>
+              <a:rPr lang="ru-RU" sz="1600" b="1">
+                <a:solidFill>
+                  <a:srgbClr val="18212B"/>
+                </a:solidFill>
+                <a:latin typeface="Aptos"/>
+                <a:cs typeface="Aptos"/>
+              </a:rPr>
+              <a:t>Real-time интерфейс системы отслеживания задач, в котором WebSocket-соединения обслуживаются несколькими экземплярами app-api, а события об изменении сущностей доставляются клиентам независимо от узла подключения.</a:t>
             </a:r>
           </a:p>
         </p:txBody>
@@ -3753,7 +4457,7 @@
                 <a:latin typeface="Aptos"/>
                 <a:cs typeface="Aptos"/>
               </a:rPr>
-              <a:t>Предметная область</a:t>
+              <a:t>Современный контекст</a:t>
             </a:r>
           </a:p>
         </p:txBody>
@@ -3790,7 +4494,7 @@
                 <a:latin typeface="Aptos"/>
                 <a:cs typeface="Aptos"/>
               </a:rPr>
-              <a:t>Real-time связан с сущностями продукта, а не с абстрактным WebSocket-демо</a:t>
+              <a:t>Интерфейсы становятся событийными; AI-инструменты усиливают ожидание живой синхронизации</a:t>
             </a:r>
           </a:p>
         </p:txBody>
@@ -3804,7 +4508,193 @@
         <p:spPr>
           <a:xfrm>
             <a:off x="685800" y="1508760"/>
-            <a:ext cx="10972800" cy="685800"/>
+            <a:ext cx="3520440" cy="4343400"/>
+          </a:xfrm>
+          <a:prstGeom prst="roundRect">
+            <a:avLst/>
+          </a:prstGeom>
+          <a:solidFill>
+            <a:srgbClr val="FFFFFF"/>
+          </a:solidFill>
+          <a:ln w="12700">
+            <a:solidFill>
+              <a:srgbClr val="D7D2C7"/>
+            </a:solidFill>
+          </a:ln>
+        </p:spPr>
+        <p:txBody>
+          <a:bodyPr wrap="square" lIns="177800" tIns="177800" rIns="177800" bIns="177800"/>
+          <a:lstStyle/>
+          <a:p>
+            <a:pPr algn="l"/>
+            <a:r>
+              <a:rPr lang="ru-RU" sz="1400" b="0">
+                <a:solidFill>
+                  <a:srgbClr val="18212B"/>
+                </a:solidFill>
+                <a:latin typeface="Aptos"/>
+                <a:cs typeface="Aptos"/>
+              </a:rPr>
+              <a:t>Рост сложности продуктов</a:t>
+            </a:r>
+          </a:p>
+          <a:p>
+            <a:pPr algn="l"/>
+            <a:r>
+              <a:rPr lang="ru-RU" sz="1400" b="0">
+                <a:solidFill>
+                  <a:srgbClr val="18212B"/>
+                </a:solidFill>
+                <a:latin typeface="Aptos"/>
+                <a:cs typeface="Aptos"/>
+              </a:rPr>
+              <a:t/>
+            </a:r>
+          </a:p>
+          <a:p>
+            <a:pPr algn="l"/>
+            <a:r>
+              <a:rPr lang="ru-RU" sz="1400" b="0">
+                <a:solidFill>
+                  <a:srgbClr val="18212B"/>
+                </a:solidFill>
+                <a:latin typeface="Aptos"/>
+                <a:cs typeface="Aptos"/>
+              </a:rPr>
+              <a:t>Пользователь работает не с одной формой, а с отчётом, багами, комментариями, вложениями, статусами и участниками.</a:t>
+            </a:r>
+          </a:p>
+          <a:p>
+            <a:pPr algn="l"/>
+            <a:r>
+              <a:rPr lang="ru-RU" sz="1400" b="0">
+                <a:solidFill>
+                  <a:srgbClr val="18212B"/>
+                </a:solidFill>
+                <a:latin typeface="Aptos"/>
+                <a:cs typeface="Aptos"/>
+              </a:rPr>
+              <a:t/>
+            </a:r>
+          </a:p>
+          <a:p>
+            <a:pPr algn="l"/>
+            <a:r>
+              <a:rPr lang="ru-RU" sz="1400" b="0">
+                <a:solidFill>
+                  <a:srgbClr val="18212B"/>
+                </a:solidFill>
+                <a:latin typeface="Aptos"/>
+                <a:cs typeface="Aptos"/>
+              </a:rPr>
+              <a:t>Изменения должны становиться видимыми без ручного обновления страницы.</a:t>
+            </a:r>
+          </a:p>
+        </p:txBody>
+      </p:sp>
+      <p:sp>
+        <p:nvSpPr>
+          <p:cNvPr id="21" name="Shape 21"/>
+          <p:cNvSpPr txBox="1"/>
+          <p:nvPr/>
+        </p:nvSpPr>
+        <p:spPr>
+          <a:xfrm>
+            <a:off x="4389120" y="1508760"/>
+            <a:ext cx="3520440" cy="4343400"/>
+          </a:xfrm>
+          <a:prstGeom prst="roundRect">
+            <a:avLst/>
+          </a:prstGeom>
+          <a:solidFill>
+            <a:srgbClr val="FFF3D8"/>
+          </a:solidFill>
+          <a:ln w="12700">
+            <a:solidFill>
+              <a:srgbClr val="C76F2E"/>
+            </a:solidFill>
+          </a:ln>
+        </p:spPr>
+        <p:txBody>
+          <a:bodyPr wrap="square" lIns="177800" tIns="177800" rIns="177800" bIns="177800"/>
+          <a:lstStyle/>
+          <a:p>
+            <a:pPr algn="l"/>
+            <a:r>
+              <a:rPr lang="ru-RU" sz="1400" b="0">
+                <a:solidFill>
+                  <a:srgbClr val="18212B"/>
+                </a:solidFill>
+                <a:latin typeface="Aptos"/>
+                <a:cs typeface="Aptos"/>
+              </a:rPr>
+              <a:t>AI-ready сценарии</a:t>
+            </a:r>
+          </a:p>
+          <a:p>
+            <a:pPr algn="l"/>
+            <a:r>
+              <a:rPr lang="ru-RU" sz="1400" b="0">
+                <a:solidFill>
+                  <a:srgbClr val="18212B"/>
+                </a:solidFill>
+                <a:latin typeface="Aptos"/>
+                <a:cs typeface="Aptos"/>
+              </a:rPr>
+              <a:t/>
+            </a:r>
+          </a:p>
+          <a:p>
+            <a:pPr algn="l"/>
+            <a:r>
+              <a:rPr lang="ru-RU" sz="1400" b="0">
+                <a:solidFill>
+                  <a:srgbClr val="18212B"/>
+                </a:solidFill>
+                <a:latin typeface="Aptos"/>
+                <a:cs typeface="Aptos"/>
+              </a:rPr>
+              <a:t>Фоновый сервис или ассистент может предложить исполнителя, дополнить описание, создать комментарий или изменить статус.</a:t>
+            </a:r>
+          </a:p>
+          <a:p>
+            <a:pPr algn="l"/>
+            <a:r>
+              <a:rPr lang="ru-RU" sz="1400" b="0">
+                <a:solidFill>
+                  <a:srgbClr val="18212B"/>
+                </a:solidFill>
+                <a:latin typeface="Aptos"/>
+                <a:cs typeface="Aptos"/>
+              </a:rPr>
+              <a:t/>
+            </a:r>
+          </a:p>
+          <a:p>
+            <a:pPr algn="l"/>
+            <a:r>
+              <a:rPr lang="ru-RU" sz="1400" b="0">
+                <a:solidFill>
+                  <a:srgbClr val="18212B"/>
+                </a:solidFill>
+                <a:latin typeface="Aptos"/>
+                <a:cs typeface="Aptos"/>
+              </a:rPr>
+              <a:t>В ВКР это контекст актуальности, а не заявление о готовой AI-функции.</a:t>
+            </a:r>
+          </a:p>
+        </p:txBody>
+      </p:sp>
+      <p:sp>
+        <p:nvSpPr>
+          <p:cNvPr id="22" name="Shape 22"/>
+          <p:cNvSpPr txBox="1"/>
+          <p:nvPr/>
+        </p:nvSpPr>
+        <p:spPr>
+          <a:xfrm>
+            <a:off x="8092440" y="1508760"/>
+            <a:ext cx="3520440" cy="4343400"/>
           </a:xfrm>
           <a:prstGeom prst="roundRect">
             <a:avLst/>
@@ -3822,47 +4712,6 @@
           <a:bodyPr wrap="square" lIns="177800" tIns="177800" rIns="177800" bIns="177800"/>
           <a:lstStyle/>
           <a:p>
-            <a:pPr algn="ctr"/>
-            <a:r>
-              <a:rPr lang="ru-RU" sz="1600" b="1">
-                <a:solidFill>
-                  <a:srgbClr val="18212B"/>
-                </a:solidFill>
-                <a:latin typeface="Aptos"/>
-                <a:cs typeface="Aptos"/>
-              </a:rPr>
-              <a:t>Система отслеживания задач: отчёты · баги · комментарии · вложения · ссылки · шаги воспроизведения · статусы</a:t>
-            </a:r>
-          </a:p>
-        </p:txBody>
-      </p:sp>
-      <p:sp>
-        <p:nvSpPr>
-          <p:cNvPr id="21" name="Shape 21"/>
-          <p:cNvSpPr txBox="1"/>
-          <p:nvPr/>
-        </p:nvSpPr>
-        <p:spPr>
-          <a:xfrm>
-            <a:off x="685800" y="2468880"/>
-            <a:ext cx="3520440" cy="2926080"/>
-          </a:xfrm>
-          <a:prstGeom prst="roundRect">
-            <a:avLst/>
-          </a:prstGeom>
-          <a:solidFill>
-            <a:srgbClr val="FFFFFF"/>
-          </a:solidFill>
-          <a:ln w="12700">
-            <a:solidFill>
-              <a:srgbClr val="D7D2C7"/>
-            </a:solidFill>
-          </a:ln>
-        </p:spPr>
-        <p:txBody>
-          <a:bodyPr wrap="square" lIns="177800" tIns="177800" rIns="177800" bIns="177800"/>
-          <a:lstStyle/>
-          <a:p>
             <a:pPr algn="l"/>
             <a:r>
               <a:rPr lang="ru-RU" sz="1400" b="1">
@@ -3872,7 +4721,7 @@
                 <a:latin typeface="Aptos"/>
                 <a:cs typeface="Aptos"/>
               </a:rPr>
-              <a:t>Открытие отчёта</a:t>
+              <a:t>REST + real-time</a:t>
             </a:r>
           </a:p>
           <a:p>
@@ -3898,7 +4747,7 @@
                 <a:latin typeface="Aptos"/>
                 <a:cs typeface="Aptos"/>
               </a:rPr>
-              <a:t>JoinReportGroupAsync</a:t>
+              <a:t>HTTP-запрос фиксирует изменение состояния.</a:t>
             </a:r>
           </a:p>
           <a:p>
@@ -3924,232 +4773,7 @@
                 <a:latin typeface="Aptos"/>
                 <a:cs typeface="Aptos"/>
               </a:rPr>
-              <a:t>Клиент вступает в группу отчёта и получает только релевантные события.</a:t>
-            </a:r>
-          </a:p>
-        </p:txBody>
-      </p:sp>
-      <p:sp>
-        <p:nvSpPr>
-          <p:cNvPr id="22" name="Shape 22"/>
-          <p:cNvSpPr txBox="1"/>
-          <p:nvPr/>
-        </p:nvSpPr>
-        <p:spPr>
-          <a:xfrm>
-            <a:off x="4389120" y="2468880"/>
-            <a:ext cx="3520440" cy="2926080"/>
-          </a:xfrm>
-          <a:prstGeom prst="roundRect">
-            <a:avLst/>
-          </a:prstGeom>
-          <a:solidFill>
-            <a:srgbClr val="FFFFFF"/>
-          </a:solidFill>
-          <a:ln w="12700">
-            <a:solidFill>
-              <a:srgbClr val="D7D2C7"/>
-            </a:solidFill>
-          </a:ln>
-        </p:spPr>
-        <p:txBody>
-          <a:bodyPr wrap="square" lIns="177800" tIns="177800" rIns="177800" bIns="177800"/>
-          <a:lstStyle/>
-          <a:p>
-            <a:pPr algn="l"/>
-            <a:r>
-              <a:rPr lang="ru-RU" sz="1400" b="1">
-                <a:solidFill>
-                  <a:srgbClr val="18212B"/>
-                </a:solidFill>
-                <a:latin typeface="Aptos"/>
-                <a:cs typeface="Aptos"/>
-              </a:rPr>
-              <a:t>Изменение сущностей</a:t>
-            </a:r>
-          </a:p>
-          <a:p>
-            <a:pPr algn="l"/>
-            <a:r>
-              <a:rPr lang="ru-RU" sz="1400" b="1">
-                <a:solidFill>
-                  <a:srgbClr val="18212B"/>
-                </a:solidFill>
-                <a:latin typeface="Aptos"/>
-                <a:cs typeface="Aptos"/>
-              </a:rPr>
-              <a:t/>
-            </a:r>
-          </a:p>
-          <a:p>
-            <a:pPr algn="l"/>
-            <a:r>
-              <a:rPr lang="ru-RU" sz="1400" b="1">
-                <a:solidFill>
-                  <a:srgbClr val="18212B"/>
-                </a:solidFill>
-                <a:latin typeface="Aptos"/>
-                <a:cs typeface="Aptos"/>
-              </a:rPr>
-              <a:t>ReceiveReportPatch</a:t>
-            </a:r>
-          </a:p>
-          <a:p>
-            <a:pPr algn="l"/>
-            <a:r>
-              <a:rPr lang="ru-RU" sz="1400" b="1">
-                <a:solidFill>
-                  <a:srgbClr val="18212B"/>
-                </a:solidFill>
-                <a:latin typeface="Aptos"/>
-                <a:cs typeface="Aptos"/>
-              </a:rPr>
-              <a:t>ReceiveBugCreate</a:t>
-            </a:r>
-          </a:p>
-          <a:p>
-            <a:pPr algn="l"/>
-            <a:r>
-              <a:rPr lang="ru-RU" sz="1400" b="1">
-                <a:solidFill>
-                  <a:srgbClr val="18212B"/>
-                </a:solidFill>
-                <a:latin typeface="Aptos"/>
-                <a:cs typeface="Aptos"/>
-              </a:rPr>
-              <a:t>ReceiveCommentUpdate</a:t>
-            </a:r>
-          </a:p>
-          <a:p>
-            <a:pPr algn="l"/>
-            <a:r>
-              <a:rPr lang="ru-RU" sz="1400" b="1">
-                <a:solidFill>
-                  <a:srgbClr val="18212B"/>
-                </a:solidFill>
-                <a:latin typeface="Aptos"/>
-                <a:cs typeface="Aptos"/>
-              </a:rPr>
-              <a:t/>
-            </a:r>
-          </a:p>
-          <a:p>
-            <a:pPr algn="l"/>
-            <a:r>
-              <a:rPr lang="ru-RU" sz="1400" b="1">
-                <a:solidFill>
-                  <a:srgbClr val="18212B"/>
-                </a:solidFill>
-                <a:latin typeface="Aptos"/>
-                <a:cs typeface="Aptos"/>
-              </a:rPr>
-              <a:t>События применяются к состоянию интерфейса.</a:t>
-            </a:r>
-          </a:p>
-        </p:txBody>
-      </p:sp>
-      <p:sp>
-        <p:nvSpPr>
-          <p:cNvPr id="23" name="Shape 23"/>
-          <p:cNvSpPr txBox="1"/>
-          <p:nvPr/>
-        </p:nvSpPr>
-        <p:spPr>
-          <a:xfrm>
-            <a:off x="8092440" y="2468880"/>
-            <a:ext cx="3520440" cy="2926080"/>
-          </a:xfrm>
-          <a:prstGeom prst="roundRect">
-            <a:avLst/>
-          </a:prstGeom>
-          <a:solidFill>
-            <a:srgbClr val="FFFFFF"/>
-          </a:solidFill>
-          <a:ln w="12700">
-            <a:solidFill>
-              <a:srgbClr val="D7D2C7"/>
-            </a:solidFill>
-          </a:ln>
-        </p:spPr>
-        <p:txBody>
-          <a:bodyPr wrap="square" lIns="177800" tIns="177800" rIns="177800" bIns="177800"/>
-          <a:lstStyle/>
-          <a:p>
-            <a:pPr algn="l"/>
-            <a:r>
-              <a:rPr lang="ru-RU" sz="1400" b="1">
-                <a:solidFill>
-                  <a:srgbClr val="18212B"/>
-                </a:solidFill>
-                <a:latin typeface="Aptos"/>
-                <a:cs typeface="Aptos"/>
-              </a:rPr>
-              <a:t>Восстановление</a:t>
-            </a:r>
-          </a:p>
-          <a:p>
-            <a:pPr algn="l"/>
-            <a:r>
-              <a:rPr lang="ru-RU" sz="1400" b="1">
-                <a:solidFill>
-                  <a:srgbClr val="18212B"/>
-                </a:solidFill>
-                <a:latin typeface="Aptos"/>
-                <a:cs typeface="Aptos"/>
-              </a:rPr>
-              <a:t/>
-            </a:r>
-          </a:p>
-          <a:p>
-            <a:pPr algn="l"/>
-            <a:r>
-              <a:rPr lang="ru-RU" sz="1400" b="1">
-                <a:solidFill>
-                  <a:srgbClr val="18212B"/>
-                </a:solidFill>
-                <a:latin typeface="Aptos"/>
-                <a:cs typeface="Aptos"/>
-              </a:rPr>
-              <a:t>onreconnected</a:t>
-            </a:r>
-          </a:p>
-          <a:p>
-            <a:pPr algn="l"/>
-            <a:r>
-              <a:rPr lang="ru-RU" sz="1400" b="1">
-                <a:solidFill>
-                  <a:srgbClr val="18212B"/>
-                </a:solidFill>
-                <a:latin typeface="Aptos"/>
-                <a:cs typeface="Aptos"/>
-              </a:rPr>
-              <a:t>JoinReportGroupAsync</a:t>
-            </a:r>
-          </a:p>
-          <a:p>
-            <a:pPr algn="l"/>
-            <a:r>
-              <a:rPr lang="ru-RU" sz="1400" b="1">
-                <a:solidFill>
-                  <a:srgbClr val="18212B"/>
-                </a:solidFill>
-                <a:latin typeface="Aptos"/>
-                <a:cs typeface="Aptos"/>
-              </a:rPr>
-              <a:t/>
-            </a:r>
-          </a:p>
-          <a:p>
-            <a:pPr algn="l"/>
-            <a:r>
-              <a:rPr lang="ru-RU" sz="1400" b="1">
-                <a:solidFill>
-                  <a:srgbClr val="18212B"/>
-                </a:solidFill>
-                <a:latin typeface="Aptos"/>
-                <a:cs typeface="Aptos"/>
-              </a:rPr>
-              <a:t>После reconnect клиент повторно восстанавливает подписку на текущий отчёт.</a:t>
+              <a:t>SignalR-событие распространяет изменение активным участникам, включая клиентов на других backend-узлах.</a:t>
             </a:r>
           </a:p>
         </p:txBody>
@@ -4256,7 +4880,7 @@
                 <a:latin typeface="Aptos"/>
                 <a:cs typeface="Aptos"/>
               </a:rPr>
-              <a:t>Анализ подходов к масштабированию</a:t>
+              <a:t>Предметная область</a:t>
             </a:r>
           </a:p>
         </p:txBody>
@@ -4293,7 +4917,7 @@
                 <a:latin typeface="Aptos"/>
                 <a:cs typeface="Aptos"/>
               </a:rPr>
-              <a:t>Шесть рассмотренных вариантов; для реализации выбран подход 4</a:t>
+              <a:t>Real-time связан с сущностями продукта, а не с абстрактным WebSocket-демо</a:t>
             </a:r>
           </a:p>
         </p:txBody>
@@ -4306,8 +4930,49 @@
         </p:nvSpPr>
         <p:spPr>
           <a:xfrm>
-            <a:off x="685800" y="1554480"/>
-            <a:ext cx="3657600" cy="1325880"/>
+            <a:off x="685800" y="1508760"/>
+            <a:ext cx="10972800" cy="685800"/>
+          </a:xfrm>
+          <a:prstGeom prst="roundRect">
+            <a:avLst/>
+          </a:prstGeom>
+          <a:solidFill>
+            <a:srgbClr val="E8F3F1"/>
+          </a:solidFill>
+          <a:ln w="12700">
+            <a:solidFill>
+              <a:srgbClr val="0B6E69"/>
+            </a:solidFill>
+          </a:ln>
+        </p:spPr>
+        <p:txBody>
+          <a:bodyPr wrap="square" lIns="177800" tIns="177800" rIns="177800" bIns="177800"/>
+          <a:lstStyle/>
+          <a:p>
+            <a:pPr algn="ctr"/>
+            <a:r>
+              <a:rPr lang="ru-RU" sz="1600" b="1">
+                <a:solidFill>
+                  <a:srgbClr val="18212B"/>
+                </a:solidFill>
+                <a:latin typeface="Aptos"/>
+                <a:cs typeface="Aptos"/>
+              </a:rPr>
+              <a:t>Система отслеживания задач: отчёты · баги · комментарии · вложения · ссылки · шаги воспроизведения · статусы</a:t>
+            </a:r>
+          </a:p>
+        </p:txBody>
+      </p:sp>
+      <p:sp>
+        <p:nvSpPr>
+          <p:cNvPr id="21" name="Shape 21"/>
+          <p:cNvSpPr txBox="1"/>
+          <p:nvPr/>
+        </p:nvSpPr>
+        <p:spPr>
+          <a:xfrm>
+            <a:off x="685800" y="2468880"/>
+            <a:ext cx="3520440" cy="2926080"/>
           </a:xfrm>
           <a:prstGeom prst="roundRect">
             <a:avLst/>
@@ -4327,41 +4992,80 @@
           <a:p>
             <a:pPr algn="l"/>
             <a:r>
-              <a:rPr lang="ru-RU" sz="1300" b="0">
-                <a:solidFill>
-                  <a:srgbClr val="18212B"/>
-                </a:solidFill>
-                <a:latin typeface="Aptos"/>
-                <a:cs typeface="Aptos"/>
-              </a:rPr>
-              <a:t>Один экземпляр backend</a:t>
-            </a:r>
-          </a:p>
-          <a:p>
-            <a:pPr algn="l"/>
-            <a:r>
-              <a:rPr lang="ru-RU" sz="1300" b="0">
-                <a:solidFill>
-                  <a:srgbClr val="18212B"/>
-                </a:solidFill>
-                <a:latin typeface="Aptos"/>
-                <a:cs typeface="Aptos"/>
-              </a:rPr>
-              <a:t>Нет масштабирования; один узел — единственная точка отказа</a:t>
-            </a:r>
-          </a:p>
-        </p:txBody>
-      </p:sp>
-      <p:sp>
-        <p:nvSpPr>
-          <p:cNvPr id="21" name="Shape 21"/>
-          <p:cNvSpPr txBox="1"/>
-          <p:nvPr/>
-        </p:nvSpPr>
-        <p:spPr>
-          <a:xfrm>
-            <a:off x="4434840" y="1554480"/>
-            <a:ext cx="3657600" cy="1325880"/>
+              <a:rPr lang="ru-RU" sz="1400" b="1">
+                <a:solidFill>
+                  <a:srgbClr val="18212B"/>
+                </a:solidFill>
+                <a:latin typeface="Aptos"/>
+                <a:cs typeface="Aptos"/>
+              </a:rPr>
+              <a:t>Открытие отчёта</a:t>
+            </a:r>
+          </a:p>
+          <a:p>
+            <a:pPr algn="l"/>
+            <a:r>
+              <a:rPr lang="ru-RU" sz="1400" b="1">
+                <a:solidFill>
+                  <a:srgbClr val="18212B"/>
+                </a:solidFill>
+                <a:latin typeface="Aptos"/>
+                <a:cs typeface="Aptos"/>
+              </a:rPr>
+              <a:t/>
+            </a:r>
+          </a:p>
+          <a:p>
+            <a:pPr algn="l"/>
+            <a:r>
+              <a:rPr lang="ru-RU" sz="1400" b="1">
+                <a:solidFill>
+                  <a:srgbClr val="18212B"/>
+                </a:solidFill>
+                <a:latin typeface="Aptos"/>
+                <a:cs typeface="Aptos"/>
+              </a:rPr>
+              <a:t>JoinReportGroupAsync</a:t>
+            </a:r>
+          </a:p>
+          <a:p>
+            <a:pPr algn="l"/>
+            <a:r>
+              <a:rPr lang="ru-RU" sz="1400" b="1">
+                <a:solidFill>
+                  <a:srgbClr val="18212B"/>
+                </a:solidFill>
+                <a:latin typeface="Aptos"/>
+                <a:cs typeface="Aptos"/>
+              </a:rPr>
+              <a:t/>
+            </a:r>
+          </a:p>
+          <a:p>
+            <a:pPr algn="l"/>
+            <a:r>
+              <a:rPr lang="ru-RU" sz="1400" b="1">
+                <a:solidFill>
+                  <a:srgbClr val="18212B"/>
+                </a:solidFill>
+                <a:latin typeface="Aptos"/>
+                <a:cs typeface="Aptos"/>
+              </a:rPr>
+              <a:t>Клиент вступает в группу отчёта и получает только релевантные события.</a:t>
+            </a:r>
+          </a:p>
+        </p:txBody>
+      </p:sp>
+      <p:sp>
+        <p:nvSpPr>
+          <p:cNvPr id="22" name="Shape 22"/>
+          <p:cNvSpPr txBox="1"/>
+          <p:nvPr/>
+        </p:nvSpPr>
+        <p:spPr>
+          <a:xfrm>
+            <a:off x="4389120" y="2468880"/>
+            <a:ext cx="3520440" cy="2926080"/>
           </a:xfrm>
           <a:prstGeom prst="roundRect">
             <a:avLst/>
@@ -4381,41 +5085,106 @@
           <a:p>
             <a:pPr algn="l"/>
             <a:r>
-              <a:rPr lang="ru-RU" sz="1300" b="0">
-                <a:solidFill>
-                  <a:srgbClr val="18212B"/>
-                </a:solidFill>
-                <a:latin typeface="Aptos"/>
-                <a:cs typeface="Aptos"/>
-              </a:rPr>
-              <a:t>Несколько экземпляров без общего канала</a:t>
-            </a:r>
-          </a:p>
-          <a:p>
-            <a:pPr algn="l"/>
-            <a:r>
-              <a:rPr lang="ru-RU" sz="1300" b="0">
-                <a:solidFill>
-                  <a:srgbClr val="18212B"/>
-                </a:solidFill>
-                <a:latin typeface="Aptos"/>
-                <a:cs typeface="Aptos"/>
-              </a:rPr>
-              <a:t>События не доходят до клиентов, подключённых к другим узлам</a:t>
-            </a:r>
-          </a:p>
-        </p:txBody>
-      </p:sp>
-      <p:sp>
-        <p:nvSpPr>
-          <p:cNvPr id="22" name="Shape 22"/>
-          <p:cNvSpPr txBox="1"/>
-          <p:nvPr/>
-        </p:nvSpPr>
-        <p:spPr>
-          <a:xfrm>
-            <a:off x="8183880" y="1554480"/>
-            <a:ext cx="3657600" cy="1325880"/>
+              <a:rPr lang="ru-RU" sz="1400" b="1">
+                <a:solidFill>
+                  <a:srgbClr val="18212B"/>
+                </a:solidFill>
+                <a:latin typeface="Aptos"/>
+                <a:cs typeface="Aptos"/>
+              </a:rPr>
+              <a:t>Изменение сущностей</a:t>
+            </a:r>
+          </a:p>
+          <a:p>
+            <a:pPr algn="l"/>
+            <a:r>
+              <a:rPr lang="ru-RU" sz="1400" b="1">
+                <a:solidFill>
+                  <a:srgbClr val="18212B"/>
+                </a:solidFill>
+                <a:latin typeface="Aptos"/>
+                <a:cs typeface="Aptos"/>
+              </a:rPr>
+              <a:t/>
+            </a:r>
+          </a:p>
+          <a:p>
+            <a:pPr algn="l"/>
+            <a:r>
+              <a:rPr lang="ru-RU" sz="1400" b="1">
+                <a:solidFill>
+                  <a:srgbClr val="18212B"/>
+                </a:solidFill>
+                <a:latin typeface="Aptos"/>
+                <a:cs typeface="Aptos"/>
+              </a:rPr>
+              <a:t>ReceiveReportPatch</a:t>
+            </a:r>
+          </a:p>
+          <a:p>
+            <a:pPr algn="l"/>
+            <a:r>
+              <a:rPr lang="ru-RU" sz="1400" b="1">
+                <a:solidFill>
+                  <a:srgbClr val="18212B"/>
+                </a:solidFill>
+                <a:latin typeface="Aptos"/>
+                <a:cs typeface="Aptos"/>
+              </a:rPr>
+              <a:t>ReceiveBugCreate</a:t>
+            </a:r>
+          </a:p>
+          <a:p>
+            <a:pPr algn="l"/>
+            <a:r>
+              <a:rPr lang="ru-RU" sz="1400" b="1">
+                <a:solidFill>
+                  <a:srgbClr val="18212B"/>
+                </a:solidFill>
+                <a:latin typeface="Aptos"/>
+                <a:cs typeface="Aptos"/>
+              </a:rPr>
+              <a:t>ReceiveCommentUpdate</a:t>
+            </a:r>
+          </a:p>
+          <a:p>
+            <a:pPr algn="l"/>
+            <a:r>
+              <a:rPr lang="ru-RU" sz="1400" b="1">
+                <a:solidFill>
+                  <a:srgbClr val="18212B"/>
+                </a:solidFill>
+                <a:latin typeface="Aptos"/>
+                <a:cs typeface="Aptos"/>
+              </a:rPr>
+              <a:t/>
+            </a:r>
+          </a:p>
+          <a:p>
+            <a:pPr algn="l"/>
+            <a:r>
+              <a:rPr lang="ru-RU" sz="1400" b="1">
+                <a:solidFill>
+                  <a:srgbClr val="18212B"/>
+                </a:solidFill>
+                <a:latin typeface="Aptos"/>
+                <a:cs typeface="Aptos"/>
+              </a:rPr>
+              <a:t>События применяются к состоянию интерфейса.</a:t>
+            </a:r>
+          </a:p>
+        </p:txBody>
+      </p:sp>
+      <p:sp>
+        <p:nvSpPr>
+          <p:cNvPr id="23" name="Shape 23"/>
+          <p:cNvSpPr txBox="1"/>
+          <p:nvPr/>
+        </p:nvSpPr>
+        <p:spPr>
+          <a:xfrm>
+            <a:off x="8092440" y="2468880"/>
+            <a:ext cx="3520440" cy="2926080"/>
           </a:xfrm>
           <a:prstGeom prst="roundRect">
             <a:avLst/>
@@ -4435,226 +5204,79 @@
           <a:p>
             <a:pPr algn="l"/>
             <a:r>
-              <a:rPr lang="ru-RU" sz="1300" b="0">
-                <a:solidFill>
-                  <a:srgbClr val="18212B"/>
-                </a:solidFill>
-                <a:latin typeface="Aptos"/>
-                <a:cs typeface="Aptos"/>
-              </a:rPr>
-              <a:t>Привязка клиента к узлу (sticky)</a:t>
-            </a:r>
-          </a:p>
-          <a:p>
-            <a:pPr algn="l"/>
-            <a:r>
-              <a:rPr lang="ru-RU" sz="1300" b="0">
-                <a:solidFill>
-                  <a:srgbClr val="18212B"/>
-                </a:solidFill>
-                <a:latin typeface="Aptos"/>
-                <a:cs typeface="Aptos"/>
-              </a:rPr>
-              <a:t>Клиент остаётся на одном узле, но события на другие не приходят</a:t>
-            </a:r>
-          </a:p>
-        </p:txBody>
-      </p:sp>
-      <p:sp>
-        <p:nvSpPr>
-          <p:cNvPr id="23" name="Shape 23"/>
-          <p:cNvSpPr txBox="1"/>
-          <p:nvPr/>
-        </p:nvSpPr>
-        <p:spPr>
-          <a:xfrm>
-            <a:off x="685800" y="3017520"/>
-            <a:ext cx="3657600" cy="1325880"/>
-          </a:xfrm>
-          <a:prstGeom prst="roundRect">
-            <a:avLst/>
-          </a:prstGeom>
-          <a:solidFill>
-            <a:srgbClr val="FFFFFF"/>
-          </a:solidFill>
-          <a:ln w="12700">
-            <a:solidFill>
-              <a:srgbClr val="D7D2C7"/>
-            </a:solidFill>
-          </a:ln>
-        </p:spPr>
-        <p:txBody>
-          <a:bodyPr wrap="square" lIns="177800" tIns="177800" rIns="177800" bIns="177800"/>
-          <a:lstStyle/>
-          <a:p>
-            <a:pPr algn="l"/>
-            <a:r>
-              <a:rPr lang="ru-RU" sz="1300" b="0">
-                <a:solidFill>
-                  <a:srgbClr val="18212B"/>
-                </a:solidFill>
-                <a:latin typeface="Aptos"/>
-                <a:cs typeface="Aptos"/>
-              </a:rPr>
-              <a:t>Внешняя шина событий</a:t>
-            </a:r>
-          </a:p>
-          <a:p>
-            <a:pPr algn="l"/>
-            <a:r>
-              <a:rPr lang="ru-RU" sz="1300" b="0">
-                <a:solidFill>
-                  <a:srgbClr val="18212B"/>
-                </a:solidFill>
-                <a:latin typeface="Aptos"/>
-                <a:cs typeface="Aptos"/>
-              </a:rPr>
-              <a:t>Доставка между узлами есть, но требуется отдельная схема событий</a:t>
-            </a:r>
-          </a:p>
-        </p:txBody>
-      </p:sp>
-      <p:sp>
-        <p:nvSpPr>
-          <p:cNvPr id="24" name="Shape 24"/>
-          <p:cNvSpPr txBox="1"/>
-          <p:nvPr/>
-        </p:nvSpPr>
-        <p:spPr>
-          <a:xfrm>
-            <a:off x="4434840" y="3017520"/>
-            <a:ext cx="3657600" cy="1325880"/>
-          </a:xfrm>
-          <a:prstGeom prst="roundRect">
-            <a:avLst/>
-          </a:prstGeom>
-          <a:solidFill>
-            <a:srgbClr val="FFFFFF"/>
-          </a:solidFill>
-          <a:ln w="12700">
-            <a:solidFill>
-              <a:srgbClr val="D7D2C7"/>
-            </a:solidFill>
-          </a:ln>
-        </p:spPr>
-        <p:txBody>
-          <a:bodyPr wrap="square" lIns="177800" tIns="177800" rIns="177800" bIns="177800"/>
-          <a:lstStyle/>
-          <a:p>
-            <a:pPr algn="l"/>
-            <a:r>
-              <a:rPr lang="ru-RU" sz="1300" b="0">
-                <a:solidFill>
-                  <a:srgbClr val="18212B"/>
-                </a:solidFill>
-                <a:latin typeface="Aptos"/>
-                <a:cs typeface="Aptos"/>
-              </a:rPr>
-              <a:t>Облачный real-time сервис</a:t>
-            </a:r>
-          </a:p>
-          <a:p>
-            <a:pPr algn="l"/>
-            <a:r>
-              <a:rPr lang="ru-RU" sz="1300" b="0">
-                <a:solidFill>
-                  <a:srgbClr val="18212B"/>
-                </a:solidFill>
-                <a:latin typeface="Aptos"/>
-                <a:cs typeface="Aptos"/>
-              </a:rPr>
-              <a:t>Готовое решение, но снижает контроль над собственным контуром</a:t>
-            </a:r>
-          </a:p>
-        </p:txBody>
-      </p:sp>
-      <p:sp>
-        <p:nvSpPr>
-          <p:cNvPr id="25" name="Shape 25"/>
-          <p:cNvSpPr txBox="1"/>
-          <p:nvPr/>
-        </p:nvSpPr>
-        <p:spPr>
-          <a:xfrm>
-            <a:off x="8183880" y="3017520"/>
-            <a:ext cx="3657600" cy="1325880"/>
-          </a:xfrm>
-          <a:prstGeom prst="roundRect">
-            <a:avLst/>
-          </a:prstGeom>
-          <a:solidFill>
-            <a:srgbClr val="E8F3F1"/>
-          </a:solidFill>
-          <a:ln w="12700">
-            <a:solidFill>
-              <a:srgbClr val="0B6E69"/>
-            </a:solidFill>
-          </a:ln>
-        </p:spPr>
-        <p:txBody>
-          <a:bodyPr wrap="square" lIns="177800" tIns="177800" rIns="177800" bIns="177800"/>
-          <a:lstStyle/>
-          <a:p>
-            <a:pPr algn="l"/>
-            <a:r>
-              <a:rPr lang="ru-RU" sz="1300" b="1">
-                <a:solidFill>
-                  <a:srgbClr val="18212B"/>
-                </a:solidFill>
-                <a:latin typeface="Aptos"/>
-                <a:cs typeface="Aptos"/>
-              </a:rPr>
-              <a:t>Redis backplane для SignalR — выбрано</a:t>
-            </a:r>
-          </a:p>
-          <a:p>
-            <a:pPr algn="l"/>
-            <a:r>
-              <a:rPr lang="ru-RU" sz="1300" b="1">
-                <a:solidFill>
-                  <a:srgbClr val="18212B"/>
-                </a:solidFill>
-                <a:latin typeface="Aptos"/>
-                <a:cs typeface="Aptos"/>
-              </a:rPr>
-              <a:t>Штатный механизм, без перестройки кода, подходит для событий интерфейса</a:t>
-            </a:r>
-          </a:p>
-        </p:txBody>
-      </p:sp>
-      <p:sp>
-        <p:nvSpPr>
-          <p:cNvPr id="26" name="Shape 26"/>
-          <p:cNvSpPr txBox="1"/>
-          <p:nvPr/>
-        </p:nvSpPr>
-        <p:spPr>
-          <a:xfrm>
-            <a:off x="685800" y="4617720"/>
-            <a:ext cx="11155680" cy="1280160"/>
-          </a:xfrm>
-          <a:prstGeom prst="roundRect">
-            <a:avLst/>
-          </a:prstGeom>
-          <a:noFill/>
-          <a:ln>
-            <a:noFill/>
-          </a:ln>
-        </p:spPr>
-        <p:txBody>
-          <a:bodyPr wrap="square" lIns="177800" tIns="177800" rIns="177800" bIns="177800"/>
-          <a:lstStyle/>
-          <a:p>
-            <a:pPr algn="l"/>
-            <a:r>
-              <a:rPr lang="ru-RU" sz="1200" b="0">
-                <a:solidFill>
-                  <a:srgbClr val="5E6A75"/>
-                </a:solidFill>
-                <a:latin typeface="Aptos"/>
-                <a:cs typeface="Aptos"/>
-              </a:rPr>
-              <a:t>Критерии выбора: запускается на локальном стенде, сохраняет существующий код доставки событий, штатно поддерживается в ASP.NET Core SignalR, подходит для коротких событий интерфейса и легко воспроизводится.</a:t>
+              <a:rPr lang="ru-RU" sz="1400" b="1">
+                <a:solidFill>
+                  <a:srgbClr val="18212B"/>
+                </a:solidFill>
+                <a:latin typeface="Aptos"/>
+                <a:cs typeface="Aptos"/>
+              </a:rPr>
+              <a:t>Восстановление</a:t>
+            </a:r>
+          </a:p>
+          <a:p>
+            <a:pPr algn="l"/>
+            <a:r>
+              <a:rPr lang="ru-RU" sz="1400" b="1">
+                <a:solidFill>
+                  <a:srgbClr val="18212B"/>
+                </a:solidFill>
+                <a:latin typeface="Aptos"/>
+                <a:cs typeface="Aptos"/>
+              </a:rPr>
+              <a:t/>
+            </a:r>
+          </a:p>
+          <a:p>
+            <a:pPr algn="l"/>
+            <a:r>
+              <a:rPr lang="ru-RU" sz="1400" b="1">
+                <a:solidFill>
+                  <a:srgbClr val="18212B"/>
+                </a:solidFill>
+                <a:latin typeface="Aptos"/>
+                <a:cs typeface="Aptos"/>
+              </a:rPr>
+              <a:t>onreconnected</a:t>
+            </a:r>
+          </a:p>
+          <a:p>
+            <a:pPr algn="l"/>
+            <a:r>
+              <a:rPr lang="ru-RU" sz="1400" b="1">
+                <a:solidFill>
+                  <a:srgbClr val="18212B"/>
+                </a:solidFill>
+                <a:latin typeface="Aptos"/>
+                <a:cs typeface="Aptos"/>
+              </a:rPr>
+              <a:t>JoinReportGroupAsync</a:t>
+            </a:r>
+          </a:p>
+          <a:p>
+            <a:pPr algn="l"/>
+            <a:r>
+              <a:rPr lang="ru-RU" sz="1400" b="1">
+                <a:solidFill>
+                  <a:srgbClr val="18212B"/>
+                </a:solidFill>
+                <a:latin typeface="Aptos"/>
+                <a:cs typeface="Aptos"/>
+              </a:rPr>
+              <a:t/>
+            </a:r>
+          </a:p>
+          <a:p>
+            <a:pPr algn="l"/>
+            <a:r>
+              <a:rPr lang="ru-RU" sz="1400" b="1">
+                <a:solidFill>
+                  <a:srgbClr val="18212B"/>
+                </a:solidFill>
+                <a:latin typeface="Aptos"/>
+                <a:cs typeface="Aptos"/>
+              </a:rPr>
+              <a:t>После reconnect клиент повторно восстанавливает подписку на текущий отчёт.</a:t>
             </a:r>
           </a:p>
         </p:txBody>
@@ -4761,7 +5383,7 @@
                 <a:latin typeface="Aptos"/>
                 <a:cs typeface="Aptos"/>
               </a:rPr>
-              <a:t>Целевая архитектура</a:t>
+              <a:t>Анализ подходов к масштабированию</a:t>
             </a:r>
           </a:p>
         </p:txBody>
@@ -4798,7 +5420,7 @@
                 <a:latin typeface="Aptos"/>
                 <a:cs typeface="Aptos"/>
               </a:rPr>
-              <a:t>Два экземпляра app-api за nginx, общий Redis backplane для межузловой доставки</a:t>
+              <a:t>Шесть рассмотренных вариантов; для реализации выбран подход 4</a:t>
             </a:r>
           </a:p>
         </p:txBody>
@@ -4811,8 +5433,8 @@
         </p:nvSpPr>
         <p:spPr>
           <a:xfrm>
-            <a:off x="914400" y="1874520"/>
-            <a:ext cx="1645920" cy="640080"/>
+            <a:off x="685800" y="1554480"/>
+            <a:ext cx="3657600" cy="1325880"/>
           </a:xfrm>
           <a:prstGeom prst="roundRect">
             <a:avLst/>
@@ -4830,16 +5452,29 @@
           <a:bodyPr wrap="square" lIns="177800" tIns="177800" rIns="177800" bIns="177800"/>
           <a:lstStyle/>
           <a:p>
-            <a:pPr algn="ctr"/>
-            <a:r>
-              <a:rPr lang="ru-RU" sz="1400" b="1">
-                <a:solidFill>
-                  <a:srgbClr val="18212B"/>
-                </a:solidFill>
-                <a:latin typeface="Aptos"/>
-                <a:cs typeface="Aptos"/>
-              </a:rPr>
-              <a:t>Клиент A</a:t>
+            <a:pPr algn="l"/>
+            <a:r>
+              <a:rPr lang="ru-RU" sz="1300" b="0">
+                <a:solidFill>
+                  <a:srgbClr val="18212B"/>
+                </a:solidFill>
+                <a:latin typeface="Aptos"/>
+                <a:cs typeface="Aptos"/>
+              </a:rPr>
+              <a:t>Один экземпляр backend</a:t>
+            </a:r>
+          </a:p>
+          <a:p>
+            <a:pPr algn="l"/>
+            <a:r>
+              <a:rPr lang="ru-RU" sz="1300" b="0">
+                <a:solidFill>
+                  <a:srgbClr val="18212B"/>
+                </a:solidFill>
+                <a:latin typeface="Aptos"/>
+                <a:cs typeface="Aptos"/>
+              </a:rPr>
+              <a:t>Нет масштабирования; один узел — единственная точка отказа</a:t>
             </a:r>
           </a:p>
         </p:txBody>
@@ -4852,8 +5487,8 @@
         </p:nvSpPr>
         <p:spPr>
           <a:xfrm>
-            <a:off x="914400" y="3749040"/>
-            <a:ext cx="1645920" cy="640080"/>
+            <a:off x="4434840" y="1554480"/>
+            <a:ext cx="3657600" cy="1325880"/>
           </a:xfrm>
           <a:prstGeom prst="roundRect">
             <a:avLst/>
@@ -4871,16 +5506,29 @@
           <a:bodyPr wrap="square" lIns="177800" tIns="177800" rIns="177800" bIns="177800"/>
           <a:lstStyle/>
           <a:p>
-            <a:pPr algn="ctr"/>
-            <a:r>
-              <a:rPr lang="ru-RU" sz="1400" b="1">
-                <a:solidFill>
-                  <a:srgbClr val="18212B"/>
-                </a:solidFill>
-                <a:latin typeface="Aptos"/>
-                <a:cs typeface="Aptos"/>
-              </a:rPr>
-              <a:t>Клиент B</a:t>
+            <a:pPr algn="l"/>
+            <a:r>
+              <a:rPr lang="ru-RU" sz="1300" b="0">
+                <a:solidFill>
+                  <a:srgbClr val="18212B"/>
+                </a:solidFill>
+                <a:latin typeface="Aptos"/>
+                <a:cs typeface="Aptos"/>
+              </a:rPr>
+              <a:t>Несколько экземпляров без общего канала</a:t>
+            </a:r>
+          </a:p>
+          <a:p>
+            <a:pPr algn="l"/>
+            <a:r>
+              <a:rPr lang="ru-RU" sz="1300" b="0">
+                <a:solidFill>
+                  <a:srgbClr val="18212B"/>
+                </a:solidFill>
+                <a:latin typeface="Aptos"/>
+                <a:cs typeface="Aptos"/>
+              </a:rPr>
+              <a:t>События не доходят до клиентов, подключённых к другим узлам</a:t>
             </a:r>
           </a:p>
         </p:txBody>
@@ -4893,8 +5541,170 @@
         </p:nvSpPr>
         <p:spPr>
           <a:xfrm>
-            <a:off x="3291840" y="2788920"/>
-            <a:ext cx="1371600" cy="731520"/>
+            <a:off x="8183880" y="1554480"/>
+            <a:ext cx="3657600" cy="1325880"/>
+          </a:xfrm>
+          <a:prstGeom prst="roundRect">
+            <a:avLst/>
+          </a:prstGeom>
+          <a:solidFill>
+            <a:srgbClr val="FFFFFF"/>
+          </a:solidFill>
+          <a:ln w="12700">
+            <a:solidFill>
+              <a:srgbClr val="D7D2C7"/>
+            </a:solidFill>
+          </a:ln>
+        </p:spPr>
+        <p:txBody>
+          <a:bodyPr wrap="square" lIns="177800" tIns="177800" rIns="177800" bIns="177800"/>
+          <a:lstStyle/>
+          <a:p>
+            <a:pPr algn="l"/>
+            <a:r>
+              <a:rPr lang="ru-RU" sz="1300" b="0">
+                <a:solidFill>
+                  <a:srgbClr val="18212B"/>
+                </a:solidFill>
+                <a:latin typeface="Aptos"/>
+                <a:cs typeface="Aptos"/>
+              </a:rPr>
+              <a:t>Привязка клиента к узлу (sticky)</a:t>
+            </a:r>
+          </a:p>
+          <a:p>
+            <a:pPr algn="l"/>
+            <a:r>
+              <a:rPr lang="ru-RU" sz="1300" b="0">
+                <a:solidFill>
+                  <a:srgbClr val="18212B"/>
+                </a:solidFill>
+                <a:latin typeface="Aptos"/>
+                <a:cs typeface="Aptos"/>
+              </a:rPr>
+              <a:t>Клиент остаётся на одном узле, но события на другие не приходят</a:t>
+            </a:r>
+          </a:p>
+        </p:txBody>
+      </p:sp>
+      <p:sp>
+        <p:nvSpPr>
+          <p:cNvPr id="23" name="Shape 23"/>
+          <p:cNvSpPr txBox="1"/>
+          <p:nvPr/>
+        </p:nvSpPr>
+        <p:spPr>
+          <a:xfrm>
+            <a:off x="685800" y="3017520"/>
+            <a:ext cx="3657600" cy="1325880"/>
+          </a:xfrm>
+          <a:prstGeom prst="roundRect">
+            <a:avLst/>
+          </a:prstGeom>
+          <a:solidFill>
+            <a:srgbClr val="FFFFFF"/>
+          </a:solidFill>
+          <a:ln w="12700">
+            <a:solidFill>
+              <a:srgbClr val="D7D2C7"/>
+            </a:solidFill>
+          </a:ln>
+        </p:spPr>
+        <p:txBody>
+          <a:bodyPr wrap="square" lIns="177800" tIns="177800" rIns="177800" bIns="177800"/>
+          <a:lstStyle/>
+          <a:p>
+            <a:pPr algn="l"/>
+            <a:r>
+              <a:rPr lang="ru-RU" sz="1300" b="0">
+                <a:solidFill>
+                  <a:srgbClr val="18212B"/>
+                </a:solidFill>
+                <a:latin typeface="Aptos"/>
+                <a:cs typeface="Aptos"/>
+              </a:rPr>
+              <a:t>Внешняя шина событий</a:t>
+            </a:r>
+          </a:p>
+          <a:p>
+            <a:pPr algn="l"/>
+            <a:r>
+              <a:rPr lang="ru-RU" sz="1300" b="0">
+                <a:solidFill>
+                  <a:srgbClr val="18212B"/>
+                </a:solidFill>
+                <a:latin typeface="Aptos"/>
+                <a:cs typeface="Aptos"/>
+              </a:rPr>
+              <a:t>Доставка между узлами есть, но требуется отдельная схема событий</a:t>
+            </a:r>
+          </a:p>
+        </p:txBody>
+      </p:sp>
+      <p:sp>
+        <p:nvSpPr>
+          <p:cNvPr id="24" name="Shape 24"/>
+          <p:cNvSpPr txBox="1"/>
+          <p:nvPr/>
+        </p:nvSpPr>
+        <p:spPr>
+          <a:xfrm>
+            <a:off x="4434840" y="3017520"/>
+            <a:ext cx="3657600" cy="1325880"/>
+          </a:xfrm>
+          <a:prstGeom prst="roundRect">
+            <a:avLst/>
+          </a:prstGeom>
+          <a:solidFill>
+            <a:srgbClr val="FFFFFF"/>
+          </a:solidFill>
+          <a:ln w="12700">
+            <a:solidFill>
+              <a:srgbClr val="D7D2C7"/>
+            </a:solidFill>
+          </a:ln>
+        </p:spPr>
+        <p:txBody>
+          <a:bodyPr wrap="square" lIns="177800" tIns="177800" rIns="177800" bIns="177800"/>
+          <a:lstStyle/>
+          <a:p>
+            <a:pPr algn="l"/>
+            <a:r>
+              <a:rPr lang="ru-RU" sz="1300" b="0">
+                <a:solidFill>
+                  <a:srgbClr val="18212B"/>
+                </a:solidFill>
+                <a:latin typeface="Aptos"/>
+                <a:cs typeface="Aptos"/>
+              </a:rPr>
+              <a:t>Облачный real-time сервис</a:t>
+            </a:r>
+          </a:p>
+          <a:p>
+            <a:pPr algn="l"/>
+            <a:r>
+              <a:rPr lang="ru-RU" sz="1300" b="0">
+                <a:solidFill>
+                  <a:srgbClr val="18212B"/>
+                </a:solidFill>
+                <a:latin typeface="Aptos"/>
+                <a:cs typeface="Aptos"/>
+              </a:rPr>
+              <a:t>Готовое решение, но снижает контроль над собственным контуром</a:t>
+            </a:r>
+          </a:p>
+        </p:txBody>
+      </p:sp>
+      <p:sp>
+        <p:nvSpPr>
+          <p:cNvPr id="25" name="Shape 25"/>
+          <p:cNvSpPr txBox="1"/>
+          <p:nvPr/>
+        </p:nvSpPr>
+        <p:spPr>
+          <a:xfrm>
+            <a:off x="8183880" y="3017520"/>
+            <a:ext cx="3657600" cy="1325880"/>
           </a:xfrm>
           <a:prstGeom prst="roundRect">
             <a:avLst/>
@@ -4912,277 +5722,33 @@
           <a:bodyPr wrap="square" lIns="177800" tIns="177800" rIns="177800" bIns="177800"/>
           <a:lstStyle/>
           <a:p>
-            <a:pPr algn="ctr"/>
-            <a:r>
-              <a:rPr lang="ru-RU" sz="1400" b="1">
-                <a:solidFill>
-                  <a:srgbClr val="18212B"/>
-                </a:solidFill>
-                <a:latin typeface="Aptos"/>
-                <a:cs typeface="Aptos"/>
-              </a:rPr>
-              <a:t>nginx</a:t>
-            </a:r>
-          </a:p>
-        </p:txBody>
-      </p:sp>
-      <p:sp>
-        <p:nvSpPr>
-          <p:cNvPr id="23" name="Shape 23"/>
-          <p:cNvSpPr txBox="1"/>
-          <p:nvPr/>
-        </p:nvSpPr>
-        <p:spPr>
-          <a:xfrm>
-            <a:off x="5577840" y="1874520"/>
-            <a:ext cx="1828800" cy="640080"/>
-          </a:xfrm>
-          <a:prstGeom prst="roundRect">
-            <a:avLst/>
-          </a:prstGeom>
-          <a:solidFill>
-            <a:srgbClr val="FFFFFF"/>
-          </a:solidFill>
-          <a:ln w="12700">
-            <a:solidFill>
-              <a:srgbClr val="0B6E69"/>
-            </a:solidFill>
-          </a:ln>
-        </p:spPr>
-        <p:txBody>
-          <a:bodyPr wrap="square" lIns="177800" tIns="177800" rIns="177800" bIns="177800"/>
-          <a:lstStyle/>
-          <a:p>
-            <a:pPr algn="ctr"/>
-            <a:r>
-              <a:rPr lang="ru-RU" sz="1400" b="1">
-                <a:solidFill>
-                  <a:srgbClr val="18212B"/>
-                </a:solidFill>
-                <a:latin typeface="Aptos"/>
-                <a:cs typeface="Aptos"/>
-              </a:rPr>
-              <a:t>app-api-1</a:t>
-            </a:r>
-          </a:p>
-        </p:txBody>
-      </p:sp>
-      <p:sp>
-        <p:nvSpPr>
-          <p:cNvPr id="24" name="Shape 24"/>
-          <p:cNvSpPr txBox="1"/>
-          <p:nvPr/>
-        </p:nvSpPr>
-        <p:spPr>
-          <a:xfrm>
-            <a:off x="5577840" y="3749040"/>
-            <a:ext cx="1828800" cy="640080"/>
-          </a:xfrm>
-          <a:prstGeom prst="roundRect">
-            <a:avLst/>
-          </a:prstGeom>
-          <a:solidFill>
-            <a:srgbClr val="FFFFFF"/>
-          </a:solidFill>
-          <a:ln w="12700">
-            <a:solidFill>
-              <a:srgbClr val="0B6E69"/>
-            </a:solidFill>
-          </a:ln>
-        </p:spPr>
-        <p:txBody>
-          <a:bodyPr wrap="square" lIns="177800" tIns="177800" rIns="177800" bIns="177800"/>
-          <a:lstStyle/>
-          <a:p>
-            <a:pPr algn="ctr"/>
-            <a:r>
-              <a:rPr lang="ru-RU" sz="1400" b="1">
-                <a:solidFill>
-                  <a:srgbClr val="18212B"/>
-                </a:solidFill>
-                <a:latin typeface="Aptos"/>
-                <a:cs typeface="Aptos"/>
-              </a:rPr>
-              <a:t>app-api-2</a:t>
-            </a:r>
-          </a:p>
-        </p:txBody>
-      </p:sp>
-      <p:sp>
-        <p:nvSpPr>
-          <p:cNvPr id="25" name="Shape 25"/>
-          <p:cNvSpPr txBox="1"/>
-          <p:nvPr/>
-        </p:nvSpPr>
-        <p:spPr>
-          <a:xfrm>
-            <a:off x="8321040" y="2788920"/>
-            <a:ext cx="2194560" cy="731520"/>
-          </a:xfrm>
-          <a:prstGeom prst="roundRect">
-            <a:avLst/>
-          </a:prstGeom>
-          <a:solidFill>
-            <a:srgbClr val="E8F3F1"/>
-          </a:solidFill>
-          <a:ln w="12700">
-            <a:solidFill>
-              <a:srgbClr val="0B6E69"/>
-            </a:solidFill>
-          </a:ln>
-        </p:spPr>
-        <p:txBody>
-          <a:bodyPr wrap="square" lIns="177800" tIns="177800" rIns="177800" bIns="177800"/>
-          <a:lstStyle/>
-          <a:p>
-            <a:pPr algn="ctr"/>
-            <a:r>
-              <a:rPr lang="ru-RU" sz="1400" b="1">
-                <a:solidFill>
-                  <a:srgbClr val="18212B"/>
-                </a:solidFill>
-                <a:latin typeface="Aptos"/>
-                <a:cs typeface="Aptos"/>
-              </a:rPr>
-              <a:t>Redis backplane</a:t>
-            </a:r>
-          </a:p>
-        </p:txBody>
-      </p:sp>
-      <p:cxnSp>
-        <p:nvCxnSpPr>
-          <p:cNvPr id="50" name="Connector 50"/>
-          <p:cNvCxnSpPr/>
-          <p:nvPr/>
-        </p:nvCxnSpPr>
-        <p:spPr>
-          <a:xfrm flipH="0" flipV="0">
-            <a:off x="2560320" y="2194560"/>
-            <a:ext cx="731520" cy="795528"/>
-          </a:xfrm>
-          <a:prstGeom prst="straightConnector1">
-            <a:avLst/>
-          </a:prstGeom>
-          <a:ln w="15875" cap="flat">
-            <a:solidFill>
-              <a:srgbClr val="0B6E69"/>
-            </a:solidFill>
-            <a:tailEnd type="triangle"/>
-          </a:ln>
-        </p:spPr>
-      </p:cxnSp>
-      <p:cxnSp>
-        <p:nvCxnSpPr>
-          <p:cNvPr id="51" name="Connector 51"/>
-          <p:cNvCxnSpPr/>
-          <p:nvPr/>
-        </p:nvCxnSpPr>
-        <p:spPr>
-          <a:xfrm flipH="0" flipV="1">
-            <a:off x="2560320" y="3319272"/>
-            <a:ext cx="731520" cy="749808"/>
-          </a:xfrm>
-          <a:prstGeom prst="straightConnector1">
-            <a:avLst/>
-          </a:prstGeom>
-          <a:ln w="15875" cap="flat">
-            <a:solidFill>
-              <a:srgbClr val="0B6E69"/>
-            </a:solidFill>
-            <a:tailEnd type="triangle"/>
-          </a:ln>
-        </p:spPr>
-      </p:cxnSp>
-      <p:cxnSp>
-        <p:nvCxnSpPr>
-          <p:cNvPr id="52" name="Connector 52"/>
-          <p:cNvCxnSpPr/>
-          <p:nvPr/>
-        </p:nvCxnSpPr>
-        <p:spPr>
-          <a:xfrm flipH="0" flipV="1">
-            <a:off x="4663440" y="2194560"/>
-            <a:ext cx="914400" cy="795528"/>
-          </a:xfrm>
-          <a:prstGeom prst="straightConnector1">
-            <a:avLst/>
-          </a:prstGeom>
-          <a:ln w="15875" cap="flat">
-            <a:solidFill>
-              <a:srgbClr val="0B6E69"/>
-            </a:solidFill>
-            <a:tailEnd type="triangle"/>
-          </a:ln>
-        </p:spPr>
-      </p:cxnSp>
-      <p:cxnSp>
-        <p:nvCxnSpPr>
-          <p:cNvPr id="53" name="Connector 53"/>
-          <p:cNvCxnSpPr/>
-          <p:nvPr/>
-        </p:nvCxnSpPr>
-        <p:spPr>
-          <a:xfrm flipH="0" flipV="0">
-            <a:off x="4663440" y="3319272"/>
-            <a:ext cx="914400" cy="749808"/>
-          </a:xfrm>
-          <a:prstGeom prst="straightConnector1">
-            <a:avLst/>
-          </a:prstGeom>
-          <a:ln w="15875" cap="flat">
-            <a:solidFill>
-              <a:srgbClr val="0B6E69"/>
-            </a:solidFill>
-            <a:tailEnd type="triangle"/>
-          </a:ln>
-        </p:spPr>
-      </p:cxnSp>
-      <p:cxnSp>
-        <p:nvCxnSpPr>
-          <p:cNvPr id="54" name="Connector 54"/>
-          <p:cNvCxnSpPr/>
-          <p:nvPr/>
-        </p:nvCxnSpPr>
-        <p:spPr>
-          <a:xfrm flipH="0" flipV="0">
-            <a:off x="7406640" y="2194560"/>
-            <a:ext cx="914400" cy="795528"/>
-          </a:xfrm>
-          <a:prstGeom prst="straightConnector1">
-            <a:avLst/>
-          </a:prstGeom>
-          <a:ln w="15875" cap="flat">
-            <a:solidFill>
-              <a:srgbClr val="0B6E69"/>
-            </a:solidFill>
-            <a:headEnd type="triangle"/>
-            <a:tailEnd type="triangle"/>
-          </a:ln>
-        </p:spPr>
-      </p:cxnSp>
-      <p:cxnSp>
-        <p:nvCxnSpPr>
-          <p:cNvPr id="55" name="Connector 55"/>
-          <p:cNvCxnSpPr/>
-          <p:nvPr/>
-        </p:nvCxnSpPr>
-        <p:spPr>
-          <a:xfrm flipH="0" flipV="1">
-            <a:off x="7406640" y="3319272"/>
-            <a:ext cx="914400" cy="749808"/>
-          </a:xfrm>
-          <a:prstGeom prst="straightConnector1">
-            <a:avLst/>
-          </a:prstGeom>
-          <a:ln w="15875" cap="flat">
-            <a:solidFill>
-              <a:srgbClr val="0B6E69"/>
-            </a:solidFill>
-            <a:headEnd type="triangle"/>
-            <a:tailEnd type="triangle"/>
-          </a:ln>
-        </p:spPr>
-      </p:cxnSp>
+            <a:pPr algn="l"/>
+            <a:r>
+              <a:rPr lang="ru-RU" sz="1300" b="1">
+                <a:solidFill>
+                  <a:srgbClr val="18212B"/>
+                </a:solidFill>
+                <a:latin typeface="Aptos"/>
+                <a:cs typeface="Aptos"/>
+              </a:rPr>
+              <a:t>Redis backplane для SignalR — выбрано</a:t>
+            </a:r>
+          </a:p>
+          <a:p>
+            <a:pPr algn="l"/>
+            <a:r>
+              <a:rPr lang="ru-RU" sz="1300" b="1">
+                <a:solidFill>
+                  <a:srgbClr val="18212B"/>
+                </a:solidFill>
+                <a:latin typeface="Aptos"/>
+                <a:cs typeface="Aptos"/>
+              </a:rPr>
+              <a:t>Штатный механизм, без перестройки кода, подходит для событий интерфейса</a:t>
+            </a:r>
+          </a:p>
+        </p:txBody>
+      </p:sp>
       <p:sp>
         <p:nvSpPr>
           <p:cNvPr id="26" name="Shape 26"/>
@@ -5191,8 +5757,8 @@
         </p:nvSpPr>
         <p:spPr>
           <a:xfrm>
-            <a:off x="640080" y="4937760"/>
-            <a:ext cx="10972800" cy="457200"/>
+            <a:off x="685800" y="4617720"/>
+            <a:ext cx="11155680" cy="1280160"/>
           </a:xfrm>
           <a:prstGeom prst="roundRect">
             <a:avLst/>
@@ -5206,53 +5772,16 @@
           <a:bodyPr wrap="square" lIns="177800" tIns="177800" rIns="177800" bIns="177800"/>
           <a:lstStyle/>
           <a:p>
-            <a:pPr algn="ctr"/>
-            <a:r>
-              <a:rPr lang="ru-RU" sz="1300" b="0">
+            <a:pPr algn="l"/>
+            <a:r>
+              <a:rPr lang="ru-RU" sz="1200" b="0">
                 <a:solidFill>
                   <a:srgbClr val="5E6A75"/>
                 </a:solidFill>
                 <a:latin typeface="Aptos"/>
                 <a:cs typeface="Aptos"/>
               </a:rPr>
-              <a:t>Событие публикуется в Redis · доставляется обоим узлам · группы SignalR остаются локальным runtime-состоянием</a:t>
-            </a:r>
-          </a:p>
-        </p:txBody>
-      </p:sp>
-      <p:sp>
-        <p:nvSpPr>
-          <p:cNvPr id="27" name="Shape 27"/>
-          <p:cNvSpPr txBox="1"/>
-          <p:nvPr/>
-        </p:nvSpPr>
-        <p:spPr>
-          <a:xfrm>
-            <a:off x="640080" y="5440680"/>
-            <a:ext cx="10972800" cy="365760"/>
-          </a:xfrm>
-          <a:prstGeom prst="roundRect">
-            <a:avLst/>
-          </a:prstGeom>
-          <a:noFill/>
-          <a:ln>
-            <a:noFill/>
-          </a:ln>
-        </p:spPr>
-        <p:txBody>
-          <a:bodyPr wrap="square" lIns="177800" tIns="177800" rIns="177800" bIns="177800"/>
-          <a:lstStyle/>
-          <a:p>
-            <a:pPr algn="ctr"/>
-            <a:r>
-              <a:rPr lang="ru-RU" sz="1100" b="0">
-                <a:solidFill>
-                  <a:srgbClr val="5E6A75"/>
-                </a:solidFill>
-                <a:latin typeface="Aptos"/>
-                <a:cs typeface="Aptos"/>
-              </a:rPr>
-              <a:t>Оба экземпляра подключены к общей PostgreSQL; на схеме показан только канал real-time-доставки.</a:t>
+              <a:t>Критерии выбора: запускается на локальном стенде, сохраняет существующий код доставки событий, штатно поддерживается в ASP.NET Core SignalR, подходит для коротких событий интерфейса и легко воспроизводится.</a:t>
             </a:r>
           </a:p>
         </p:txBody>
@@ -5359,7 +5888,7 @@
                 <a:latin typeface="Aptos"/>
                 <a:cs typeface="Aptos"/>
               </a:rPr>
-              <a:t>Программная реализация</a:t>
+              <a:t>Целевая архитектура</a:t>
             </a:r>
           </a:p>
         </p:txBody>
@@ -5396,7 +5925,7 @@
                 <a:latin typeface="Aptos"/>
                 <a:cs typeface="Aptos"/>
               </a:rPr>
-              <a:t>Backend, frontend, тесты и проверочный клиент закрывают задачу как разработку ПО</a:t>
+              <a:t>Два экземпляра app-api за nginx, общий Redis backplane для межузловой доставки</a:t>
             </a:r>
           </a:p>
         </p:txBody>
@@ -5409,8 +5938,8 @@
         </p:nvSpPr>
         <p:spPr>
           <a:xfrm>
-            <a:off x="685800" y="1508760"/>
-            <a:ext cx="5349240" cy="1828800"/>
+            <a:off x="914400" y="1874520"/>
+            <a:ext cx="1645920" cy="640080"/>
           </a:xfrm>
           <a:prstGeom prst="roundRect">
             <a:avLst/>
@@ -5428,68 +5957,16 @@
           <a:bodyPr wrap="square" lIns="177800" tIns="177800" rIns="177800" bIns="177800"/>
           <a:lstStyle/>
           <a:p>
-            <a:pPr algn="l"/>
-            <a:r>
-              <a:rPr lang="ru-RU" sz="1400" b="0">
-                <a:solidFill>
-                  <a:srgbClr val="18212B"/>
-                </a:solidFill>
-                <a:latin typeface="Aptos"/>
-                <a:cs typeface="Aptos"/>
-              </a:rPr>
-              <a:t>Backend</a:t>
-            </a:r>
-          </a:p>
-          <a:p>
-            <a:pPr algn="l"/>
-            <a:r>
-              <a:rPr lang="ru-RU" sz="1400" b="0">
-                <a:solidFill>
-                  <a:srgbClr val="18212B"/>
-                </a:solidFill>
-                <a:latin typeface="Aptos"/>
-                <a:cs typeface="Aptos"/>
-              </a:rPr>
-              <a:t/>
-            </a:r>
-          </a:p>
-          <a:p>
-            <a:pPr algn="l"/>
-            <a:r>
-              <a:rPr lang="ru-RU" sz="1400" b="0">
-                <a:solidFill>
-                  <a:srgbClr val="18212B"/>
-                </a:solidFill>
-                <a:latin typeface="Aptos"/>
-                <a:cs typeface="Aptos"/>
-              </a:rPr>
-              <a:t>AddStackExchangeRedis через REDIS_CONNECTION_STRING</a:t>
-            </a:r>
-          </a:p>
-          <a:p>
-            <a:pPr algn="l"/>
-            <a:r>
-              <a:rPr lang="ru-RU" sz="1400" b="0">
-                <a:solidFill>
-                  <a:srgbClr val="18212B"/>
-                </a:solidFill>
-                <a:latin typeface="Aptos"/>
-                <a:cs typeface="Aptos"/>
-              </a:rPr>
-              <a:t>GetConnectionDiagnosticsAsync</a:t>
-            </a:r>
-          </a:p>
-          <a:p>
-            <a:pPr algn="l"/>
-            <a:r>
-              <a:rPr lang="ru-RU" sz="1400" b="0">
-                <a:solidFill>
-                  <a:srgbClr val="18212B"/>
-                </a:solidFill>
-                <a:latin typeface="Aptos"/>
-                <a:cs typeface="Aptos"/>
-              </a:rPr>
-              <a:t>SendToGroupAsync с eventId и GroupExcept</a:t>
+            <a:pPr algn="ctr"/>
+            <a:r>
+              <a:rPr lang="ru-RU" sz="1400" b="1">
+                <a:solidFill>
+                  <a:srgbClr val="18212B"/>
+                </a:solidFill>
+                <a:latin typeface="Aptos"/>
+                <a:cs typeface="Aptos"/>
+              </a:rPr>
+              <a:t>Клиент A</a:t>
             </a:r>
           </a:p>
         </p:txBody>
@@ -5502,8 +5979,8 @@
         </p:nvSpPr>
         <p:spPr>
           <a:xfrm>
-            <a:off x="6172200" y="1508760"/>
-            <a:ext cx="5349240" cy="1828800"/>
+            <a:off x="914400" y="3749040"/>
+            <a:ext cx="1645920" cy="640080"/>
           </a:xfrm>
           <a:prstGeom prst="roundRect">
             <a:avLst/>
@@ -5521,68 +5998,16 @@
           <a:bodyPr wrap="square" lIns="177800" tIns="177800" rIns="177800" bIns="177800"/>
           <a:lstStyle/>
           <a:p>
-            <a:pPr algn="l"/>
-            <a:r>
-              <a:rPr lang="ru-RU" sz="1400" b="0">
-                <a:solidFill>
-                  <a:srgbClr val="18212B"/>
-                </a:solidFill>
-                <a:latin typeface="Aptos"/>
-                <a:cs typeface="Aptos"/>
-              </a:rPr>
-              <a:t>Frontend</a:t>
-            </a:r>
-          </a:p>
-          <a:p>
-            <a:pPr algn="l"/>
-            <a:r>
-              <a:rPr lang="ru-RU" sz="1400" b="0">
-                <a:solidFill>
-                  <a:srgbClr val="18212B"/>
-                </a:solidFill>
-                <a:latin typeface="Aptos"/>
-                <a:cs typeface="Aptos"/>
-              </a:rPr>
-              <a:t/>
-            </a:r>
-          </a:p>
-          <a:p>
-            <a:pPr algn="l"/>
-            <a:r>
-              <a:rPr lang="ru-RU" sz="1400" b="0">
-                <a:solidFill>
-                  <a:srgbClr val="18212B"/>
-                </a:solidFill>
-                <a:latin typeface="Aptos"/>
-                <a:cs typeface="Aptos"/>
-              </a:rPr>
-              <a:t>WebSocket transport</a:t>
-            </a:r>
-          </a:p>
-          <a:p>
-            <a:pPr algn="l"/>
-            <a:r>
-              <a:rPr lang="ru-RU" sz="1400" b="0">
-                <a:solidFill>
-                  <a:srgbClr val="18212B"/>
-                </a:solidFill>
-                <a:latin typeface="Aptos"/>
-                <a:cs typeface="Aptos"/>
-              </a:rPr>
-              <a:t>automatic reconnect</a:t>
-            </a:r>
-          </a:p>
-          <a:p>
-            <a:pPr algn="l"/>
-            <a:r>
-              <a:rPr lang="ru-RU" sz="1400" b="0">
-                <a:solidFill>
-                  <a:srgbClr val="18212B"/>
-                </a:solidFill>
-                <a:latin typeface="Aptos"/>
-                <a:cs typeface="Aptos"/>
-              </a:rPr>
-              <a:t>повторный JoinReportGroupAsync после reconnect</a:t>
+            <a:pPr algn="ctr"/>
+            <a:r>
+              <a:rPr lang="ru-RU" sz="1400" b="1">
+                <a:solidFill>
+                  <a:srgbClr val="18212B"/>
+                </a:solidFill>
+                <a:latin typeface="Aptos"/>
+                <a:cs typeface="Aptos"/>
+              </a:rPr>
+              <a:t>Клиент B</a:t>
             </a:r>
           </a:p>
         </p:txBody>
@@ -5595,8 +6020,8 @@
         </p:nvSpPr>
         <p:spPr>
           <a:xfrm>
-            <a:off x="685800" y="3703320"/>
-            <a:ext cx="5349240" cy="1920240"/>
+            <a:off x="3291840" y="2788920"/>
+            <a:ext cx="1371600" cy="731520"/>
           </a:xfrm>
           <a:prstGeom prst="roundRect">
             <a:avLst/>
@@ -5614,7 +6039,7 @@
           <a:bodyPr wrap="square" lIns="177800" tIns="177800" rIns="177800" bIns="177800"/>
           <a:lstStyle/>
           <a:p>
-            <a:pPr algn="l"/>
+            <a:pPr algn="ctr"/>
             <a:r>
               <a:rPr lang="ru-RU" sz="1400" b="1">
                 <a:solidFill>
@@ -5623,11 +6048,39 @@
                 <a:latin typeface="Aptos"/>
                 <a:cs typeface="Aptos"/>
               </a:rPr>
-              <a:t>Тесты</a:t>
-            </a:r>
-          </a:p>
-          <a:p>
-            <a:pPr algn="l"/>
+              <a:t>nginx</a:t>
+            </a:r>
+          </a:p>
+        </p:txBody>
+      </p:sp>
+      <p:sp>
+        <p:nvSpPr>
+          <p:cNvPr id="23" name="Shape 23"/>
+          <p:cNvSpPr txBox="1"/>
+          <p:nvPr/>
+        </p:nvSpPr>
+        <p:spPr>
+          <a:xfrm>
+            <a:off x="5577840" y="1874520"/>
+            <a:ext cx="1828800" cy="640080"/>
+          </a:xfrm>
+          <a:prstGeom prst="roundRect">
+            <a:avLst/>
+          </a:prstGeom>
+          <a:solidFill>
+            <a:srgbClr val="FFFFFF"/>
+          </a:solidFill>
+          <a:ln w="12700">
+            <a:solidFill>
+              <a:srgbClr val="0B6E69"/>
+            </a:solidFill>
+          </a:ln>
+        </p:spPr>
+        <p:txBody>
+          <a:bodyPr wrap="square" lIns="177800" tIns="177800" rIns="177800" bIns="177800"/>
+          <a:lstStyle/>
+          <a:p>
+            <a:pPr algn="ctr"/>
             <a:r>
               <a:rPr lang="ru-RU" sz="1400" b="1">
                 <a:solidFill>
@@ -5636,11 +6089,39 @@
                 <a:latin typeface="Aptos"/>
                 <a:cs typeface="Aptos"/>
               </a:rPr>
-              <a:t/>
-            </a:r>
-          </a:p>
-          <a:p>
-            <a:pPr algn="l"/>
+              <a:t>app-api-1</a:t>
+            </a:r>
+          </a:p>
+        </p:txBody>
+      </p:sp>
+      <p:sp>
+        <p:nvSpPr>
+          <p:cNvPr id="24" name="Shape 24"/>
+          <p:cNvSpPr txBox="1"/>
+          <p:nvPr/>
+        </p:nvSpPr>
+        <p:spPr>
+          <a:xfrm>
+            <a:off x="5577840" y="3749040"/>
+            <a:ext cx="1828800" cy="640080"/>
+          </a:xfrm>
+          <a:prstGeom prst="roundRect">
+            <a:avLst/>
+          </a:prstGeom>
+          <a:solidFill>
+            <a:srgbClr val="FFFFFF"/>
+          </a:solidFill>
+          <a:ln w="12700">
+            <a:solidFill>
+              <a:srgbClr val="0B6E69"/>
+            </a:solidFill>
+          </a:ln>
+        </p:spPr>
+        <p:txBody>
+          <a:bodyPr wrap="square" lIns="177800" tIns="177800" rIns="177800" bIns="177800"/>
+          <a:lstStyle/>
+          <a:p>
+            <a:pPr algn="ctr"/>
             <a:r>
               <a:rPr lang="ru-RU" sz="1400" b="1">
                 <a:solidFill>
@@ -5649,21 +6130,21 @@
                 <a:latin typeface="Aptos"/>
                 <a:cs typeface="Aptos"/>
               </a:rPr>
-              <a:t>reconnectJoinHandler проверяет отсутствие лишнего join, повторное вступление и использование актуального reportId.</a:t>
-            </a:r>
-          </a:p>
-        </p:txBody>
-      </p:sp>
-      <p:sp>
-        <p:nvSpPr>
-          <p:cNvPr id="23" name="Shape 23"/>
-          <p:cNvSpPr txBox="1"/>
-          <p:nvPr/>
-        </p:nvSpPr>
-        <p:spPr>
-          <a:xfrm>
-            <a:off x="6172200" y="3703320"/>
-            <a:ext cx="5349240" cy="1920240"/>
+              <a:t>app-api-2</a:t>
+            </a:r>
+          </a:p>
+        </p:txBody>
+      </p:sp>
+      <p:sp>
+        <p:nvSpPr>
+          <p:cNvPr id="25" name="Shape 25"/>
+          <p:cNvSpPr txBox="1"/>
+          <p:nvPr/>
+        </p:nvSpPr>
+        <p:spPr>
+          <a:xfrm>
+            <a:off x="8321040" y="2788920"/>
+            <a:ext cx="2194560" cy="731520"/>
           </a:xfrm>
           <a:prstGeom prst="roundRect">
             <a:avLst/>
@@ -5681,7 +6162,7 @@
           <a:bodyPr wrap="square" lIns="177800" tIns="177800" rIns="177800" bIns="177800"/>
           <a:lstStyle/>
           <a:p>
-            <a:pPr algn="l"/>
+            <a:pPr algn="ctr"/>
             <a:r>
               <a:rPr lang="ru-RU" sz="1400" b="1">
                 <a:solidFill>
@@ -5690,46 +6171,215 @@
                 <a:latin typeface="Aptos"/>
                 <a:cs typeface="Aptos"/>
               </a:rPr>
-              <a:t>Проверочный клиент</a:t>
-            </a:r>
-          </a:p>
-          <a:p>
-            <a:pPr algn="l"/>
-            <a:r>
-              <a:rPr lang="ru-RU" sz="1400" b="1">
-                <a:solidFill>
-                  <a:srgbClr val="18212B"/>
-                </a:solidFill>
-                <a:latin typeface="Aptos"/>
-                <a:cs typeface="Aptos"/>
-              </a:rPr>
-              <a:t/>
-            </a:r>
-          </a:p>
-          <a:p>
-            <a:pPr algn="l"/>
-            <a:r>
-              <a:rPr lang="ru-RU" sz="1400" b="1">
-                <a:solidFill>
-                  <a:srgbClr val="18212B"/>
-                </a:solidFill>
-                <a:latin typeface="Aptos"/>
-                <a:cs typeface="Aptos"/>
-              </a:rPr>
-              <a:t>delivery · rejoin · failover · series</a:t>
-            </a:r>
-          </a:p>
-          <a:p>
-            <a:pPr algn="l"/>
-            <a:r>
-              <a:rPr lang="ru-RU" sz="1400" b="1">
-                <a:solidFill>
-                  <a:srgbClr val="18212B"/>
-                </a:solidFill>
-                <a:latin typeface="Aptos"/>
-                <a:cs typeface="Aptos"/>
-              </a:rPr>
-              <a:t>Фиксирует serverInstanceId, connectionId, событие и задержку.</a:t>
+              <a:t>Redis backplane</a:t>
+            </a:r>
+          </a:p>
+        </p:txBody>
+      </p:sp>
+      <p:cxnSp>
+        <p:nvCxnSpPr>
+          <p:cNvPr id="50" name="Connector 50"/>
+          <p:cNvCxnSpPr/>
+          <p:nvPr/>
+        </p:nvCxnSpPr>
+        <p:spPr>
+          <a:xfrm flipH="0" flipV="0">
+            <a:off x="2560320" y="2194560"/>
+            <a:ext cx="731520" cy="795528"/>
+          </a:xfrm>
+          <a:prstGeom prst="straightConnector1">
+            <a:avLst/>
+          </a:prstGeom>
+          <a:ln w="15875" cap="flat">
+            <a:solidFill>
+              <a:srgbClr val="0B6E69"/>
+            </a:solidFill>
+            <a:tailEnd type="triangle"/>
+          </a:ln>
+        </p:spPr>
+      </p:cxnSp>
+      <p:cxnSp>
+        <p:nvCxnSpPr>
+          <p:cNvPr id="51" name="Connector 51"/>
+          <p:cNvCxnSpPr/>
+          <p:nvPr/>
+        </p:nvCxnSpPr>
+        <p:spPr>
+          <a:xfrm flipH="0" flipV="1">
+            <a:off x="2560320" y="3319272"/>
+            <a:ext cx="731520" cy="749808"/>
+          </a:xfrm>
+          <a:prstGeom prst="straightConnector1">
+            <a:avLst/>
+          </a:prstGeom>
+          <a:ln w="15875" cap="flat">
+            <a:solidFill>
+              <a:srgbClr val="0B6E69"/>
+            </a:solidFill>
+            <a:tailEnd type="triangle"/>
+          </a:ln>
+        </p:spPr>
+      </p:cxnSp>
+      <p:cxnSp>
+        <p:nvCxnSpPr>
+          <p:cNvPr id="52" name="Connector 52"/>
+          <p:cNvCxnSpPr/>
+          <p:nvPr/>
+        </p:nvCxnSpPr>
+        <p:spPr>
+          <a:xfrm flipH="0" flipV="1">
+            <a:off x="4663440" y="2194560"/>
+            <a:ext cx="914400" cy="795528"/>
+          </a:xfrm>
+          <a:prstGeom prst="straightConnector1">
+            <a:avLst/>
+          </a:prstGeom>
+          <a:ln w="15875" cap="flat">
+            <a:solidFill>
+              <a:srgbClr val="0B6E69"/>
+            </a:solidFill>
+            <a:tailEnd type="triangle"/>
+          </a:ln>
+        </p:spPr>
+      </p:cxnSp>
+      <p:cxnSp>
+        <p:nvCxnSpPr>
+          <p:cNvPr id="53" name="Connector 53"/>
+          <p:cNvCxnSpPr/>
+          <p:nvPr/>
+        </p:nvCxnSpPr>
+        <p:spPr>
+          <a:xfrm flipH="0" flipV="0">
+            <a:off x="4663440" y="3319272"/>
+            <a:ext cx="914400" cy="749808"/>
+          </a:xfrm>
+          <a:prstGeom prst="straightConnector1">
+            <a:avLst/>
+          </a:prstGeom>
+          <a:ln w="15875" cap="flat">
+            <a:solidFill>
+              <a:srgbClr val="0B6E69"/>
+            </a:solidFill>
+            <a:tailEnd type="triangle"/>
+          </a:ln>
+        </p:spPr>
+      </p:cxnSp>
+      <p:cxnSp>
+        <p:nvCxnSpPr>
+          <p:cNvPr id="54" name="Connector 54"/>
+          <p:cNvCxnSpPr/>
+          <p:nvPr/>
+        </p:nvCxnSpPr>
+        <p:spPr>
+          <a:xfrm flipH="0" flipV="0">
+            <a:off x="7406640" y="2194560"/>
+            <a:ext cx="914400" cy="795528"/>
+          </a:xfrm>
+          <a:prstGeom prst="straightConnector1">
+            <a:avLst/>
+          </a:prstGeom>
+          <a:ln w="15875" cap="flat">
+            <a:solidFill>
+              <a:srgbClr val="0B6E69"/>
+            </a:solidFill>
+            <a:headEnd type="triangle"/>
+            <a:tailEnd type="triangle"/>
+          </a:ln>
+        </p:spPr>
+      </p:cxnSp>
+      <p:cxnSp>
+        <p:nvCxnSpPr>
+          <p:cNvPr id="55" name="Connector 55"/>
+          <p:cNvCxnSpPr/>
+          <p:nvPr/>
+        </p:nvCxnSpPr>
+        <p:spPr>
+          <a:xfrm flipH="0" flipV="1">
+            <a:off x="7406640" y="3319272"/>
+            <a:ext cx="914400" cy="749808"/>
+          </a:xfrm>
+          <a:prstGeom prst="straightConnector1">
+            <a:avLst/>
+          </a:prstGeom>
+          <a:ln w="15875" cap="flat">
+            <a:solidFill>
+              <a:srgbClr val="0B6E69"/>
+            </a:solidFill>
+            <a:headEnd type="triangle"/>
+            <a:tailEnd type="triangle"/>
+          </a:ln>
+        </p:spPr>
+      </p:cxnSp>
+      <p:sp>
+        <p:nvSpPr>
+          <p:cNvPr id="26" name="Shape 26"/>
+          <p:cNvSpPr txBox="1"/>
+          <p:nvPr/>
+        </p:nvSpPr>
+        <p:spPr>
+          <a:xfrm>
+            <a:off x="640080" y="4937760"/>
+            <a:ext cx="10972800" cy="457200"/>
+          </a:xfrm>
+          <a:prstGeom prst="roundRect">
+            <a:avLst/>
+          </a:prstGeom>
+          <a:noFill/>
+          <a:ln>
+            <a:noFill/>
+          </a:ln>
+        </p:spPr>
+        <p:txBody>
+          <a:bodyPr wrap="square" lIns="177800" tIns="177800" rIns="177800" bIns="177800"/>
+          <a:lstStyle/>
+          <a:p>
+            <a:pPr algn="ctr"/>
+            <a:r>
+              <a:rPr lang="ru-RU" sz="1300" b="0">
+                <a:solidFill>
+                  <a:srgbClr val="5E6A75"/>
+                </a:solidFill>
+                <a:latin typeface="Aptos"/>
+                <a:cs typeface="Aptos"/>
+              </a:rPr>
+              <a:t>Событие публикуется в Redis · доставляется обоим узлам · группы SignalR остаются локальным runtime-состоянием</a:t>
+            </a:r>
+          </a:p>
+        </p:txBody>
+      </p:sp>
+      <p:sp>
+        <p:nvSpPr>
+          <p:cNvPr id="27" name="Shape 27"/>
+          <p:cNvSpPr txBox="1"/>
+          <p:nvPr/>
+        </p:nvSpPr>
+        <p:spPr>
+          <a:xfrm>
+            <a:off x="640080" y="5440680"/>
+            <a:ext cx="10972800" cy="365760"/>
+          </a:xfrm>
+          <a:prstGeom prst="roundRect">
+            <a:avLst/>
+          </a:prstGeom>
+          <a:noFill/>
+          <a:ln>
+            <a:noFill/>
+          </a:ln>
+        </p:spPr>
+        <p:txBody>
+          <a:bodyPr wrap="square" lIns="177800" tIns="177800" rIns="177800" bIns="177800"/>
+          <a:lstStyle/>
+          <a:p>
+            <a:pPr algn="ctr"/>
+            <a:r>
+              <a:rPr lang="ru-RU" sz="1100" b="0">
+                <a:solidFill>
+                  <a:srgbClr val="5E6A75"/>
+                </a:solidFill>
+                <a:latin typeface="Aptos"/>
+                <a:cs typeface="Aptos"/>
+              </a:rPr>
+              <a:t>Оба экземпляра подключены к общей PostgreSQL; на схеме показан только канал real-time-доставки.</a:t>
             </a:r>
           </a:p>
         </p:txBody>

--- a/build/pptx/vkr-defense-draft.pptx
+++ b/build/pptx/vkr-defense-draft.pptx
@@ -324,7 +324,7 @@
                 <a:latin typeface="Verdana"/>
                 <a:cs typeface="Verdana"/>
               </a:rPr>
-              <a:t>Real-time scale-out · 01</a:t>
+              <a:t>В реальном времени · 01</a:t>
             </a:r>
           </a:p>
         </p:txBody>
@@ -431,7 +431,7 @@
                 <a:latin typeface="Verdana"/>
                 <a:cs typeface="Verdana"/>
               </a:rPr>
-              <a:t>Шесть шагов от действия пользователя до клиента на другом экземпляре (§3.3, рис. 6 ВКР)</a:t>
+              <a:t>Шесть шагов от действия пользователя до клиента на другом узле (§3.3, рис. 6 ВКР)</a:t>
             </a:r>
           </a:p>
         </p:txBody>
@@ -565,7 +565,7 @@
                 <a:latin typeface="Verdana"/>
                 <a:cs typeface="Verdana"/>
               </a:rPr>
-              <a:t>Через nginx запрос попадает на один из экземпляров — app-api-1.</a:t>
+              <a:t>Через общую точку входа запрос попадает на один из узлов — узел 1.</a:t>
             </a:r>
           </a:p>
         </p:txBody>
@@ -606,7 +606,7 @@
                 <a:latin typeface="Verdana"/>
                 <a:cs typeface="Verdana"/>
               </a:rPr>
-              <a:t>3. Сохранение в БД</a:t>
+              <a:t>3. Сохранение в базе</a:t>
             </a:r>
           </a:p>
           <a:p>
@@ -699,7 +699,7 @@
                 <a:latin typeface="Verdana"/>
                 <a:cs typeface="Verdana"/>
               </a:rPr>
-              <a:t>Backend формирует ReceiveReportPatch и отправляет в группу отчёта.</a:t>
+              <a:t>Сервис формирует событие изменения отчёта и отправляет его в группу.</a:t>
             </a:r>
           </a:p>
         </p:txBody>
@@ -766,7 +766,7 @@
                 <a:latin typeface="Verdana"/>
                 <a:cs typeface="Verdana"/>
               </a:rPr>
-              <a:t>Через Redis событие становится доступным app-api-2.</a:t>
+              <a:t>Через общий канал событие становится доступным узлу 2.</a:t>
             </a:r>
           </a:p>
         </p:txBody>
@@ -833,7 +833,7 @@
                 <a:latin typeface="Verdana"/>
                 <a:cs typeface="Verdana"/>
               </a:rPr>
-              <a:t>Клиент на втором экземпляре получает событие.</a:t>
+              <a:t>Клиент на другом узле получает то же событие.</a:t>
             </a:r>
           </a:p>
         </p:txBody>
@@ -907,7 +907,7 @@
                 <a:latin typeface="Verdana"/>
                 <a:cs typeface="Verdana"/>
               </a:rPr>
-              <a:t>Real-time scale-out · 10</a:t>
+              <a:t>В реальном времени · 10</a:t>
             </a:r>
           </a:p>
         </p:txBody>
@@ -1027,8 +1027,8 @@
         </p:nvSpPr>
         <p:spPr>
           <a:xfrm>
-            <a:off x="502920" y="1554480"/>
-            <a:ext cx="2194560" cy="4389120"/>
+            <a:off x="502920" y="1645920"/>
+            <a:ext cx="2194560" cy="4114800"/>
           </a:xfrm>
           <a:prstGeom prst="roundRect">
             <a:avLst/>
@@ -1048,7 +1048,7 @@
           <a:p>
             <a:pPr algn="l"/>
             <a:r>
-              <a:rPr lang="ru-RU" sz="1200" b="0">
+              <a:rPr lang="ru-RU" sz="1300" b="0">
                 <a:solidFill>
                   <a:srgbClr val="1A2730"/>
                 </a:solidFill>
@@ -1061,7 +1061,7 @@
           <a:p>
             <a:pPr algn="l"/>
             <a:r>
-              <a:rPr lang="ru-RU" sz="1200" b="0">
+              <a:rPr lang="ru-RU" sz="1300" b="0">
                 <a:solidFill>
                   <a:srgbClr val="1A2730"/>
                 </a:solidFill>
@@ -1074,14 +1074,14 @@
           <a:p>
             <a:pPr algn="l"/>
             <a:r>
-              <a:rPr lang="ru-RU" sz="1200" b="0">
-                <a:solidFill>
-                  <a:srgbClr val="1A2730"/>
-                </a:solidFill>
-                <a:latin typeface="Verdana"/>
-                <a:cs typeface="Verdana"/>
-              </a:rPr>
-              <a:t>Подключение Redis backplane через переменную окружения. Один и тот же код запускается с межузловым каналом и без него.</a:t>
+              <a:rPr lang="ru-RU" sz="1300" b="0">
+                <a:solidFill>
+                  <a:srgbClr val="1A2730"/>
+                </a:solidFill>
+                <a:latin typeface="Verdana"/>
+                <a:cs typeface="Verdana"/>
+              </a:rPr>
+              <a:t>Включаемое через переменную окружения подключение общего канала событий.</a:t>
             </a:r>
           </a:p>
         </p:txBody>
@@ -1094,8 +1094,8 @@
         </p:nvSpPr>
         <p:spPr>
           <a:xfrm>
-            <a:off x="2743200" y="1554480"/>
-            <a:ext cx="2194560" cy="4389120"/>
+            <a:off x="2743200" y="1645920"/>
+            <a:ext cx="2194560" cy="4114800"/>
           </a:xfrm>
           <a:prstGeom prst="roundRect">
             <a:avLst/>
@@ -1115,7 +1115,7 @@
           <a:p>
             <a:pPr algn="l"/>
             <a:r>
-              <a:rPr lang="ru-RU" sz="1200" b="0">
+              <a:rPr lang="ru-RU" sz="1300" b="0">
                 <a:solidFill>
                   <a:srgbClr val="1A2730"/>
                 </a:solidFill>
@@ -1128,7 +1128,7 @@
           <a:p>
             <a:pPr algn="l"/>
             <a:r>
-              <a:rPr lang="ru-RU" sz="1200" b="0">
+              <a:rPr lang="ru-RU" sz="1300" b="0">
                 <a:solidFill>
                   <a:srgbClr val="1A2730"/>
                 </a:solidFill>
@@ -1141,14 +1141,14 @@
           <a:p>
             <a:pPr algn="l"/>
             <a:r>
-              <a:rPr lang="ru-RU" sz="1200" b="0">
-                <a:solidFill>
-                  <a:srgbClr val="1A2730"/>
-                </a:solidFill>
-                <a:latin typeface="Verdana"/>
-                <a:cs typeface="Verdana"/>
-              </a:rPr>
-              <a:t>Диагностический метод, идентификатор экземпляра, eventId, централизованная отправка через единый клиент хаба.</a:t>
+              <a:rPr lang="ru-RU" sz="1300" b="0">
+                <a:solidFill>
+                  <a:srgbClr val="1A2730"/>
+                </a:solidFill>
+                <a:latin typeface="Verdana"/>
+                <a:cs typeface="Verdana"/>
+              </a:rPr>
+              <a:t>Идентификатор узла, единая точка отправки, диагностика подключения.</a:t>
             </a:r>
           </a:p>
         </p:txBody>
@@ -1161,8 +1161,8 @@
         </p:nvSpPr>
         <p:spPr>
           <a:xfrm>
-            <a:off x="4983480" y="1554480"/>
-            <a:ext cx="2194560" cy="4389120"/>
+            <a:off x="4983480" y="1645920"/>
+            <a:ext cx="2194560" cy="4114800"/>
           </a:xfrm>
           <a:prstGeom prst="roundRect">
             <a:avLst/>
@@ -1182,20 +1182,20 @@
           <a:p>
             <a:pPr algn="l"/>
             <a:r>
-              <a:rPr lang="ru-RU" sz="1200" b="0">
-                <a:solidFill>
-                  <a:srgbClr val="1A2730"/>
-                </a:solidFill>
-                <a:latin typeface="Verdana"/>
-                <a:cs typeface="Verdana"/>
-              </a:rPr>
-              <a:t>3. Клиентский real-time слой</a:t>
-            </a:r>
-          </a:p>
-          <a:p>
-            <a:pPr algn="l"/>
-            <a:r>
-              <a:rPr lang="ru-RU" sz="1200" b="0">
+              <a:rPr lang="ru-RU" sz="1300" b="0">
+                <a:solidFill>
+                  <a:srgbClr val="1A2730"/>
+                </a:solidFill>
+                <a:latin typeface="Verdana"/>
+                <a:cs typeface="Verdana"/>
+              </a:rPr>
+              <a:t>3. Клиентская часть</a:t>
+            </a:r>
+          </a:p>
+          <a:p>
+            <a:pPr algn="l"/>
+            <a:r>
+              <a:rPr lang="ru-RU" sz="1300" b="0">
                 <a:solidFill>
                   <a:srgbClr val="1A2730"/>
                 </a:solidFill>
@@ -1208,14 +1208,14 @@
           <a:p>
             <a:pPr algn="l"/>
             <a:r>
-              <a:rPr lang="ru-RU" sz="1200" b="0">
-                <a:solidFill>
-                  <a:srgbClr val="1A2730"/>
-                </a:solidFill>
-                <a:latin typeface="Verdana"/>
-                <a:cs typeface="Verdana"/>
-              </a:rPr>
-              <a:t>WebSocket-транспорт, автоматическое переподключение и повторное вступление в группу текущего отчёта.</a:t>
+              <a:rPr lang="ru-RU" sz="1300" b="0">
+                <a:solidFill>
+                  <a:srgbClr val="1A2730"/>
+                </a:solidFill>
+                <a:latin typeface="Verdana"/>
+                <a:cs typeface="Verdana"/>
+              </a:rPr>
+              <a:t>Автоматическое переподключение и повторная подписка на текущий отчёт.</a:t>
             </a:r>
           </a:p>
         </p:txBody>
@@ -1228,8 +1228,8 @@
         </p:nvSpPr>
         <p:spPr>
           <a:xfrm>
-            <a:off x="7223760" y="1554480"/>
-            <a:ext cx="2194560" cy="4389120"/>
+            <a:off x="7223760" y="1645920"/>
+            <a:ext cx="2194560" cy="4114800"/>
           </a:xfrm>
           <a:prstGeom prst="roundRect">
             <a:avLst/>
@@ -1249,7 +1249,7 @@
           <a:p>
             <a:pPr algn="l"/>
             <a:r>
-              <a:rPr lang="ru-RU" sz="1200" b="1">
+              <a:rPr lang="ru-RU" sz="1300" b="1">
                 <a:solidFill>
                   <a:srgbClr val="1A2730"/>
                 </a:solidFill>
@@ -1262,7 +1262,7 @@
           <a:p>
             <a:pPr algn="l"/>
             <a:r>
-              <a:rPr lang="ru-RU" sz="1200" b="1">
+              <a:rPr lang="ru-RU" sz="1300" b="1">
                 <a:solidFill>
                   <a:srgbClr val="1A2730"/>
                 </a:solidFill>
@@ -1275,14 +1275,14 @@
           <a:p>
             <a:pPr algn="l"/>
             <a:r>
-              <a:rPr lang="ru-RU" sz="1200" b="1">
-                <a:solidFill>
-                  <a:srgbClr val="1A2730"/>
-                </a:solidFill>
-                <a:latin typeface="Verdana"/>
-                <a:cs typeface="Verdana"/>
-              </a:rPr>
-              <a:t>Docker Compose, два экземпляра app-api, общий nginx, Redis и PostgreSQL. Отдельный override для режима без backplane.</a:t>
+              <a:rPr lang="ru-RU" sz="1300" b="1">
+                <a:solidFill>
+                  <a:srgbClr val="1A2730"/>
+                </a:solidFill>
+                <a:latin typeface="Verdana"/>
+                <a:cs typeface="Verdana"/>
+              </a:rPr>
+              <a:t>Два экземпляра серверного сервиса, общая точка входа, общая база и общий канал.</a:t>
             </a:r>
           </a:p>
         </p:txBody>
@@ -1295,8 +1295,8 @@
         </p:nvSpPr>
         <p:spPr>
           <a:xfrm>
-            <a:off x="9464040" y="1554480"/>
-            <a:ext cx="2194560" cy="4389120"/>
+            <a:off x="9464040" y="1645920"/>
+            <a:ext cx="2194560" cy="4114800"/>
           </a:xfrm>
           <a:prstGeom prst="roundRect">
             <a:avLst/>
@@ -1316,7 +1316,7 @@
           <a:p>
             <a:pPr algn="l"/>
             <a:r>
-              <a:rPr lang="ru-RU" sz="1200" b="1">
+              <a:rPr lang="ru-RU" sz="1300" b="1">
                 <a:solidFill>
                   <a:srgbClr val="1A2730"/>
                 </a:solidFill>
@@ -1329,7 +1329,7 @@
           <a:p>
             <a:pPr algn="l"/>
             <a:r>
-              <a:rPr lang="ru-RU" sz="1200" b="1">
+              <a:rPr lang="ru-RU" sz="1300" b="1">
                 <a:solidFill>
                   <a:srgbClr val="1A2730"/>
                 </a:solidFill>
@@ -1342,14 +1342,14 @@
           <a:p>
             <a:pPr algn="l"/>
             <a:r>
-              <a:rPr lang="ru-RU" sz="1200" b="1">
-                <a:solidFill>
-                  <a:srgbClr val="1A2730"/>
-                </a:solidFill>
-                <a:latin typeface="Verdana"/>
-                <a:cs typeface="Verdana"/>
-              </a:rPr>
-              <a:t>Node.js-скрипт, который подключается к двум узлам, ждёт событие и измеряет задержку доставки.</a:t>
+              <a:rPr lang="ru-RU" sz="1300" b="1">
+                <a:solidFill>
+                  <a:srgbClr val="1A2730"/>
+                </a:solidFill>
+                <a:latin typeface="Verdana"/>
+                <a:cs typeface="Verdana"/>
+              </a:rPr>
+              <a:t>Отдельный скрипт, который подключается к двум узлам и измеряет задержку доставки.</a:t>
             </a:r>
           </a:p>
         </p:txBody>
@@ -1362,7 +1362,7 @@
         </p:nvSpPr>
         <p:spPr>
           <a:xfrm>
-            <a:off x="502920" y="6126480"/>
+            <a:off x="502920" y="5989320"/>
             <a:ext cx="11247120" cy="320040"/>
           </a:xfrm>
           <a:prstGeom prst="roundRect">
@@ -1379,14 +1379,14 @@
           <a:p>
             <a:pPr algn="ctr"/>
             <a:r>
-              <a:rPr lang="ru-RU" sz="1000" b="0">
+              <a:rPr lang="ru-RU" sz="1100" b="0">
                 <a:solidFill>
                   <a:srgbClr val="5E6A75"/>
                 </a:solidFill>
                 <a:latin typeface="Verdana"/>
                 <a:cs typeface="Verdana"/>
               </a:rPr>
-              <a:t>.NET / ASP.NET Core · SignalR · StackExchange.Redis · React · TypeScript · Node.js · nginx · Docker Compose</a:t>
+              <a:t>Стек: ASP.NET Core, SignalR, Redis, React, TypeScript, Node.js, nginx, Docker Compose</a:t>
             </a:r>
           </a:p>
         </p:txBody>
@@ -1423,7 +1423,7 @@
                 <a:latin typeface="Verdana"/>
                 <a:cs typeface="Verdana"/>
               </a:rPr>
-              <a:t>Real-time scale-out · 11</a:t>
+              <a:t>В реальном времени · 11</a:t>
             </a:r>
           </a:p>
         </p:txBody>
@@ -1530,7 +1530,7 @@
                 <a:latin typeface="Verdana"/>
                 <a:cs typeface="Verdana"/>
               </a:rPr>
-              <a:t>Минимальный воспроизводимый Docker Compose-стенд (§4.5, §5.2 ВКР)</a:t>
+              <a:t>Воспроизводимое локальное окружение из шести компонентов (§4.5 ВКР)</a:t>
             </a:r>
           </a:p>
         </p:txBody>
@@ -1543,8 +1543,90 @@
         </p:nvSpPr>
         <p:spPr>
           <a:xfrm>
-            <a:off x="685800" y="1508760"/>
-            <a:ext cx="5349240" cy="4434840"/>
+            <a:off x="3749040" y="1508760"/>
+            <a:ext cx="4663440" cy="1005840"/>
+          </a:xfrm>
+          <a:prstGeom prst="roundRect">
+            <a:avLst/>
+          </a:prstGeom>
+          <a:solidFill>
+            <a:srgbClr val="EEF0FE"/>
+          </a:solidFill>
+          <a:ln w="12700">
+            <a:solidFill>
+              <a:srgbClr val="6366F1"/>
+            </a:solidFill>
+          </a:ln>
+        </p:spPr>
+        <p:txBody>
+          <a:bodyPr wrap="square" lIns="177800" tIns="177800" rIns="177800" bIns="177800"/>
+          <a:lstStyle/>
+          <a:p>
+            <a:pPr algn="ctr"/>
+            <a:r>
+              <a:rPr lang="ru-RU" sz="1400" b="1">
+                <a:solidFill>
+                  <a:srgbClr val="1A2730"/>
+                </a:solidFill>
+                <a:latin typeface="Verdana"/>
+                <a:cs typeface="Verdana"/>
+              </a:rPr>
+              <a:t>Проверочный клиент</a:t>
+            </a:r>
+          </a:p>
+        </p:txBody>
+      </p:sp>
+      <p:sp>
+        <p:nvSpPr>
+          <p:cNvPr id="21" name="Shape 21"/>
+          <p:cNvSpPr txBox="1"/>
+          <p:nvPr/>
+        </p:nvSpPr>
+        <p:spPr>
+          <a:xfrm>
+            <a:off x="3749040" y="2697480"/>
+            <a:ext cx="4663440" cy="1005840"/>
+          </a:xfrm>
+          <a:prstGeom prst="roundRect">
+            <a:avLst/>
+          </a:prstGeom>
+          <a:solidFill>
+            <a:srgbClr val="E6F4F1"/>
+          </a:solidFill>
+          <a:ln w="12700">
+            <a:solidFill>
+              <a:srgbClr val="14A085"/>
+            </a:solidFill>
+          </a:ln>
+        </p:spPr>
+        <p:txBody>
+          <a:bodyPr wrap="square" lIns="177800" tIns="177800" rIns="177800" bIns="177800"/>
+          <a:lstStyle/>
+          <a:p>
+            <a:pPr algn="ctr"/>
+            <a:r>
+              <a:rPr lang="ru-RU" sz="1400" b="1">
+                <a:solidFill>
+                  <a:srgbClr val="1A2730"/>
+                </a:solidFill>
+                <a:latin typeface="Verdana"/>
+                <a:cs typeface="Verdana"/>
+              </a:rPr>
+              <a:t>Общая точка входа (nginx)</a:t>
+            </a:r>
+          </a:p>
+        </p:txBody>
+      </p:sp>
+      <p:sp>
+        <p:nvSpPr>
+          <p:cNvPr id="22" name="Shape 22"/>
+          <p:cNvSpPr txBox="1"/>
+          <p:nvPr/>
+        </p:nvSpPr>
+        <p:spPr>
+          <a:xfrm>
+            <a:off x="868680" y="3886200"/>
+            <a:ext cx="3840480" cy="1005840"/>
           </a:xfrm>
           <a:prstGeom prst="roundRect">
             <a:avLst/>
@@ -1554,6 +1636,88 @@
           </a:solidFill>
           <a:ln w="12700">
             <a:solidFill>
+              <a:srgbClr val="14A085"/>
+            </a:solidFill>
+          </a:ln>
+        </p:spPr>
+        <p:txBody>
+          <a:bodyPr wrap="square" lIns="177800" tIns="177800" rIns="177800" bIns="177800"/>
+          <a:lstStyle/>
+          <a:p>
+            <a:pPr algn="ctr"/>
+            <a:r>
+              <a:rPr lang="ru-RU" sz="1400" b="1">
+                <a:solidFill>
+                  <a:srgbClr val="1A2730"/>
+                </a:solidFill>
+                <a:latin typeface="Verdana"/>
+                <a:cs typeface="Verdana"/>
+              </a:rPr>
+              <a:t>Серверный сервис №1</a:t>
+            </a:r>
+          </a:p>
+        </p:txBody>
+      </p:sp>
+      <p:sp>
+        <p:nvSpPr>
+          <p:cNvPr id="23" name="Shape 23"/>
+          <p:cNvSpPr txBox="1"/>
+          <p:nvPr/>
+        </p:nvSpPr>
+        <p:spPr>
+          <a:xfrm>
+            <a:off x="7452360" y="3886200"/>
+            <a:ext cx="3840480" cy="1005840"/>
+          </a:xfrm>
+          <a:prstGeom prst="roundRect">
+            <a:avLst/>
+          </a:prstGeom>
+          <a:solidFill>
+            <a:srgbClr val="FFFFFF"/>
+          </a:solidFill>
+          <a:ln w="12700">
+            <a:solidFill>
+              <a:srgbClr val="14A085"/>
+            </a:solidFill>
+          </a:ln>
+        </p:spPr>
+        <p:txBody>
+          <a:bodyPr wrap="square" lIns="177800" tIns="177800" rIns="177800" bIns="177800"/>
+          <a:lstStyle/>
+          <a:p>
+            <a:pPr algn="ctr"/>
+            <a:r>
+              <a:rPr lang="ru-RU" sz="1400" b="1">
+                <a:solidFill>
+                  <a:srgbClr val="1A2730"/>
+                </a:solidFill>
+                <a:latin typeface="Verdana"/>
+                <a:cs typeface="Verdana"/>
+              </a:rPr>
+              <a:t>Серверный сервис №2</a:t>
+            </a:r>
+          </a:p>
+        </p:txBody>
+      </p:sp>
+      <p:sp>
+        <p:nvSpPr>
+          <p:cNvPr id="24" name="Shape 24"/>
+          <p:cNvSpPr txBox="1"/>
+          <p:nvPr/>
+        </p:nvSpPr>
+        <p:spPr>
+          <a:xfrm>
+            <a:off x="868680" y="5074920"/>
+            <a:ext cx="3840480" cy="1005840"/>
+          </a:xfrm>
+          <a:prstGeom prst="roundRect">
+            <a:avLst/>
+          </a:prstGeom>
+          <a:solidFill>
+            <a:srgbClr val="FFFFFF"/>
+          </a:solidFill>
+          <a:ln w="12700">
+            <a:solidFill>
               <a:srgbClr val="E3E7EB"/>
             </a:solidFill>
           </a:ln>
@@ -1562,7 +1726,7 @@
           <a:bodyPr wrap="square" lIns="177800" tIns="177800" rIns="177800" bIns="177800"/>
           <a:lstStyle/>
           <a:p>
-            <a:pPr algn="l"/>
+            <a:pPr algn="ctr"/>
             <a:r>
               <a:rPr lang="ru-RU" sz="1300" b="0">
                 <a:solidFill>
@@ -1571,335 +1735,216 @@
                 <a:latin typeface="Verdana"/>
                 <a:cs typeface="Verdana"/>
               </a:rPr>
-              <a:t>Состав стенда</a:t>
-            </a:r>
-          </a:p>
-          <a:p>
-            <a:pPr algn="l"/>
-            <a:r>
-              <a:rPr lang="ru-RU" sz="1300" b="0">
-                <a:solidFill>
-                  <a:srgbClr val="1A2730"/>
-                </a:solidFill>
-                <a:latin typeface="Verdana"/>
-                <a:cs typeface="Verdana"/>
-              </a:rPr>
-              <a:t/>
-            </a:r>
-          </a:p>
-          <a:p>
-            <a:pPr algn="l"/>
-            <a:r>
-              <a:rPr lang="ru-RU" sz="1300" b="0">
-                <a:solidFill>
-                  <a:srgbClr val="1A2730"/>
-                </a:solidFill>
-                <a:latin typeface="Verdana"/>
-                <a:cs typeface="Verdana"/>
-              </a:rPr>
-              <a:t>•  postgres_app_thesis — общая база</a:t>
-            </a:r>
-          </a:p>
-          <a:p>
-            <a:pPr algn="l"/>
-            <a:r>
-              <a:rPr lang="ru-RU" sz="1300" b="0">
-                <a:solidFill>
-                  <a:srgbClr val="1A2730"/>
-                </a:solidFill>
-                <a:latin typeface="Verdana"/>
-                <a:cs typeface="Verdana"/>
-              </a:rPr>
-              <a:t>•  redis_app_thesis — общий канал событий</a:t>
-            </a:r>
-          </a:p>
-          <a:p>
-            <a:pPr algn="l"/>
-            <a:r>
-              <a:rPr lang="ru-RU" sz="1300" b="0">
-                <a:solidFill>
-                  <a:srgbClr val="1A2730"/>
-                </a:solidFill>
-                <a:latin typeface="Verdana"/>
-                <a:cs typeface="Verdana"/>
-              </a:rPr>
-              <a:t>•  app-api-1 — серверный экземпляр №1</a:t>
-            </a:r>
-          </a:p>
-          <a:p>
-            <a:pPr algn="l"/>
-            <a:r>
-              <a:rPr lang="ru-RU" sz="1300" b="0">
-                <a:solidFill>
-                  <a:srgbClr val="1A2730"/>
-                </a:solidFill>
-                <a:latin typeface="Verdana"/>
-                <a:cs typeface="Verdana"/>
-              </a:rPr>
-              <a:t>•  app-api-2 — серверный экземпляр №2</a:t>
-            </a:r>
-          </a:p>
-          <a:p>
-            <a:pPr algn="l"/>
-            <a:r>
-              <a:rPr lang="ru-RU" sz="1300" b="0">
-                <a:solidFill>
-                  <a:srgbClr val="1A2730"/>
-                </a:solidFill>
-                <a:latin typeface="Verdana"/>
-                <a:cs typeface="Verdana"/>
-              </a:rPr>
-              <a:t>•  nginx_app_thesis — общая точка входа</a:t>
-            </a:r>
-          </a:p>
-          <a:p>
-            <a:pPr algn="l"/>
-            <a:r>
-              <a:rPr lang="ru-RU" sz="1300" b="0">
-                <a:solidFill>
-                  <a:srgbClr val="1A2730"/>
-                </a:solidFill>
-                <a:latin typeface="Verdana"/>
-                <a:cs typeface="Verdana"/>
-              </a:rPr>
-              <a:t>•  Node.js-скрипт проверки — вне продукта</a:t>
-            </a:r>
-          </a:p>
-          <a:p>
-            <a:pPr algn="l"/>
-            <a:r>
-              <a:rPr lang="ru-RU" sz="1300" b="0">
-                <a:solidFill>
-                  <a:srgbClr val="1A2730"/>
-                </a:solidFill>
-                <a:latin typeface="Verdana"/>
-                <a:cs typeface="Verdana"/>
-              </a:rPr>
-              <a:t/>
-            </a:r>
-          </a:p>
-          <a:p>
-            <a:pPr algn="l"/>
-            <a:r>
-              <a:rPr lang="ru-RU" sz="1300" b="0">
-                <a:solidFill>
-                  <a:srgbClr val="1A2730"/>
-                </a:solidFill>
-                <a:latin typeface="Verdana"/>
-                <a:cs typeface="Verdana"/>
-              </a:rPr>
-              <a:t>Оба экземпляра app-api собраны из одного Dockerfile и отличаются только значением SERVER_INSTANCE_ID.</a:t>
-            </a:r>
-          </a:p>
-        </p:txBody>
-      </p:sp>
-      <p:sp>
-        <p:nvSpPr>
-          <p:cNvPr id="21" name="Shape 21"/>
-          <p:cNvSpPr txBox="1"/>
-          <p:nvPr/>
-        </p:nvSpPr>
-        <p:spPr>
-          <a:xfrm>
-            <a:off x="6172200" y="1508760"/>
-            <a:ext cx="5349240" cy="4434840"/>
-          </a:xfrm>
-          <a:prstGeom prst="roundRect">
-            <a:avLst/>
-          </a:prstGeom>
-          <a:solidFill>
-            <a:srgbClr val="E6F4F1"/>
-          </a:solidFill>
-          <a:ln w="12700">
-            <a:solidFill>
-              <a:srgbClr val="14A085"/>
-            </a:solidFill>
-          </a:ln>
-        </p:spPr>
-        <p:txBody>
-          <a:bodyPr wrap="square" lIns="177800" tIns="177800" rIns="177800" bIns="177800"/>
-          <a:lstStyle/>
-          <a:p>
-            <a:pPr algn="l"/>
-            <a:r>
-              <a:rPr lang="ru-RU" sz="1200" b="0">
-                <a:solidFill>
-                  <a:srgbClr val="1A2730"/>
-                </a:solidFill>
-                <a:latin typeface="Verdana"/>
-                <a:cs typeface="Verdana"/>
-              </a:rPr>
-              <a:t>Как запускают</a:t>
-            </a:r>
-          </a:p>
-          <a:p>
-            <a:pPr algn="l"/>
-            <a:r>
-              <a:rPr lang="ru-RU" sz="1200" b="0">
-                <a:solidFill>
-                  <a:srgbClr val="1A2730"/>
-                </a:solidFill>
-                <a:latin typeface="Verdana"/>
-                <a:cs typeface="Verdana"/>
-              </a:rPr>
-              <a:t/>
-            </a:r>
-          </a:p>
-          <a:p>
-            <a:pPr algn="l"/>
-            <a:r>
-              <a:rPr lang="ru-RU" sz="1200" b="0">
-                <a:solidFill>
-                  <a:srgbClr val="1A2730"/>
-                </a:solidFill>
-                <a:latin typeface="Verdana"/>
-                <a:cs typeface="Verdana"/>
-              </a:rPr>
-              <a:t>С общим каналом (целевой режим):</a:t>
-            </a:r>
-          </a:p>
-          <a:p>
-            <a:pPr algn="l"/>
-            <a:r>
-              <a:rPr lang="ru-RU" sz="1200" b="0">
-                <a:solidFill>
-                  <a:srgbClr val="1A2730"/>
-                </a:solidFill>
-                <a:latin typeface="Verdana"/>
-                <a:cs typeface="Verdana"/>
-              </a:rPr>
-              <a:t>docker compose -f docker-compose.thesis.yml up</a:t>
-            </a:r>
-          </a:p>
-          <a:p>
-            <a:pPr algn="l"/>
-            <a:r>
-              <a:rPr lang="ru-RU" sz="1200" b="0">
-                <a:solidFill>
-                  <a:srgbClr val="1A2730"/>
-                </a:solidFill>
-                <a:latin typeface="Verdana"/>
-                <a:cs typeface="Verdana"/>
-              </a:rPr>
-              <a:t/>
-            </a:r>
-          </a:p>
-          <a:p>
-            <a:pPr algn="l"/>
-            <a:r>
-              <a:rPr lang="ru-RU" sz="1200" b="0">
-                <a:solidFill>
-                  <a:srgbClr val="1A2730"/>
-                </a:solidFill>
-                <a:latin typeface="Verdana"/>
-                <a:cs typeface="Verdana"/>
-              </a:rPr>
-              <a:t>Без общего канала (контрольный режим):</a:t>
-            </a:r>
-          </a:p>
-          <a:p>
-            <a:pPr algn="l"/>
-            <a:r>
-              <a:rPr lang="ru-RU" sz="1200" b="0">
-                <a:solidFill>
-                  <a:srgbClr val="1A2730"/>
-                </a:solidFill>
-                <a:latin typeface="Verdana"/>
-                <a:cs typeface="Verdana"/>
-              </a:rPr>
-              <a:t>docker compose -f thesis.yml -f thesis.no-backplane.yml up</a:t>
-            </a:r>
-          </a:p>
-          <a:p>
-            <a:pPr algn="l"/>
-            <a:r>
-              <a:rPr lang="ru-RU" sz="1200" b="0">
-                <a:solidFill>
-                  <a:srgbClr val="1A2730"/>
-                </a:solidFill>
-                <a:latin typeface="Verdana"/>
-                <a:cs typeface="Verdana"/>
-              </a:rPr>
-              <a:t/>
-            </a:r>
-          </a:p>
-          <a:p>
-            <a:pPr algn="l"/>
-            <a:r>
-              <a:rPr lang="ru-RU" sz="1200" b="0">
-                <a:solidFill>
-                  <a:srgbClr val="1A2730"/>
-                </a:solidFill>
-                <a:latin typeface="Verdana"/>
-                <a:cs typeface="Verdana"/>
-              </a:rPr>
-              <a:t>Проверочный клиент:</a:t>
-            </a:r>
-          </a:p>
-          <a:p>
-            <a:pPr algn="l"/>
-            <a:r>
-              <a:rPr lang="ru-RU" sz="1200" b="0">
-                <a:solidFill>
-                  <a:srgbClr val="1A2730"/>
-                </a:solidFill>
-                <a:latin typeface="Verdana"/>
-                <a:cs typeface="Verdana"/>
-              </a:rPr>
-              <a:t>node scripts/realtime-scaleout-check.mjs</a:t>
-            </a:r>
-          </a:p>
-          <a:p>
-            <a:pPr algn="l"/>
-            <a:r>
-              <a:rPr lang="ru-RU" sz="1200" b="0">
-                <a:solidFill>
-                  <a:srgbClr val="1A2730"/>
-                </a:solidFill>
-                <a:latin typeface="Verdana"/>
-                <a:cs typeface="Verdana"/>
-              </a:rPr>
-              <a:t/>
-            </a:r>
-          </a:p>
-          <a:p>
-            <a:pPr algn="l"/>
-            <a:r>
-              <a:rPr lang="ru-RU" sz="1200" b="0">
-                <a:solidFill>
-                  <a:srgbClr val="1A2730"/>
-                </a:solidFill>
-                <a:latin typeface="Verdana"/>
-                <a:cs typeface="Verdana"/>
-              </a:rPr>
-              <a:t>Серия и сценарии:</a:t>
-            </a:r>
-          </a:p>
-          <a:p>
-            <a:pPr algn="l"/>
-            <a:r>
-              <a:rPr lang="ru-RU" sz="1200" b="0">
-                <a:solidFill>
-                  <a:srgbClr val="1A2730"/>
-                </a:solidFill>
-                <a:latin typeface="Verdana"/>
-                <a:cs typeface="Verdana"/>
-              </a:rPr>
-              <a:t>THESIS_ITERATIONS=30  ·  THESIS_SCENARIO=rejoin  ·  failover</a:t>
-            </a:r>
-          </a:p>
-        </p:txBody>
-      </p:sp>
-      <p:sp>
-        <p:nvSpPr>
-          <p:cNvPr id="22" name="Shape 22"/>
-          <p:cNvSpPr txBox="1"/>
-          <p:nvPr/>
-        </p:nvSpPr>
-        <p:spPr>
-          <a:xfrm>
-            <a:off x="685800" y="6080760"/>
-            <a:ext cx="10835640" cy="320040"/>
+              <a:t>Общая база (PostgreSQL)</a:t>
+            </a:r>
+          </a:p>
+        </p:txBody>
+      </p:sp>
+      <p:sp>
+        <p:nvSpPr>
+          <p:cNvPr id="25" name="Shape 25"/>
+          <p:cNvSpPr txBox="1"/>
+          <p:nvPr/>
+        </p:nvSpPr>
+        <p:spPr>
+          <a:xfrm>
+            <a:off x="7452360" y="5074920"/>
+            <a:ext cx="3840480" cy="1005840"/>
+          </a:xfrm>
+          <a:prstGeom prst="roundRect">
+            <a:avLst/>
+          </a:prstGeom>
+          <a:solidFill>
+            <a:srgbClr val="EEF0FE"/>
+          </a:solidFill>
+          <a:ln w="12700">
+            <a:solidFill>
+              <a:srgbClr val="6366F1"/>
+            </a:solidFill>
+          </a:ln>
+        </p:spPr>
+        <p:txBody>
+          <a:bodyPr wrap="square" lIns="177800" tIns="177800" rIns="177800" bIns="177800"/>
+          <a:lstStyle/>
+          <a:p>
+            <a:pPr algn="ctr"/>
+            <a:r>
+              <a:rPr lang="ru-RU" sz="1300" b="1">
+                <a:solidFill>
+                  <a:srgbClr val="1A2730"/>
+                </a:solidFill>
+                <a:latin typeface="Verdana"/>
+                <a:cs typeface="Verdana"/>
+              </a:rPr>
+              <a:t>Общий канал событий (Redis)</a:t>
+            </a:r>
+          </a:p>
+        </p:txBody>
+      </p:sp>
+      <p:cxnSp>
+        <p:nvCxnSpPr>
+          <p:cNvPr id="70" name="Connector 70"/>
+          <p:cNvCxnSpPr/>
+          <p:nvPr/>
+        </p:nvCxnSpPr>
+        <p:spPr>
+          <a:xfrm flipH="0" flipV="0">
+            <a:off x="6080760" y="2514600"/>
+            <a:ext cx="9144" cy="182880"/>
+          </a:xfrm>
+          <a:prstGeom prst="straightConnector1">
+            <a:avLst/>
+          </a:prstGeom>
+          <a:ln w="15875" cap="flat">
+            <a:solidFill>
+              <a:srgbClr val="5E6A75"/>
+            </a:solidFill>
+            <a:tailEnd type="triangle"/>
+          </a:ln>
+        </p:spPr>
+      </p:cxnSp>
+      <p:cxnSp>
+        <p:nvCxnSpPr>
+          <p:cNvPr id="71" name="Connector 71"/>
+          <p:cNvCxnSpPr/>
+          <p:nvPr/>
+        </p:nvCxnSpPr>
+        <p:spPr>
+          <a:xfrm flipH="1" flipV="0">
+            <a:off x="2788920" y="3703320"/>
+            <a:ext cx="2240280" cy="182880"/>
+          </a:xfrm>
+          <a:prstGeom prst="straightConnector1">
+            <a:avLst/>
+          </a:prstGeom>
+          <a:ln w="15875" cap="flat">
+            <a:solidFill>
+              <a:srgbClr val="5E6A75"/>
+            </a:solidFill>
+            <a:tailEnd type="triangle"/>
+          </a:ln>
+        </p:spPr>
+      </p:cxnSp>
+      <p:cxnSp>
+        <p:nvCxnSpPr>
+          <p:cNvPr id="72" name="Connector 72"/>
+          <p:cNvCxnSpPr/>
+          <p:nvPr/>
+        </p:nvCxnSpPr>
+        <p:spPr>
+          <a:xfrm flipH="0" flipV="0">
+            <a:off x="7178040" y="3703320"/>
+            <a:ext cx="2194560" cy="182880"/>
+          </a:xfrm>
+          <a:prstGeom prst="straightConnector1">
+            <a:avLst/>
+          </a:prstGeom>
+          <a:ln w="15875" cap="flat">
+            <a:solidFill>
+              <a:srgbClr val="5E6A75"/>
+            </a:solidFill>
+            <a:tailEnd type="triangle"/>
+          </a:ln>
+        </p:spPr>
+      </p:cxnSp>
+      <p:cxnSp>
+        <p:nvCxnSpPr>
+          <p:cNvPr id="73" name="Connector 73"/>
+          <p:cNvCxnSpPr/>
+          <p:nvPr/>
+        </p:nvCxnSpPr>
+        <p:spPr>
+          <a:xfrm flipH="0" flipV="0">
+            <a:off x="2788920" y="4892040"/>
+            <a:ext cx="9144" cy="182880"/>
+          </a:xfrm>
+          <a:prstGeom prst="straightConnector1">
+            <a:avLst/>
+          </a:prstGeom>
+          <a:ln w="15875" cap="flat">
+            <a:solidFill>
+              <a:srgbClr val="5E6A75"/>
+            </a:solidFill>
+            <a:tailEnd type="triangle"/>
+          </a:ln>
+        </p:spPr>
+      </p:cxnSp>
+      <p:cxnSp>
+        <p:nvCxnSpPr>
+          <p:cNvPr id="74" name="Connector 74"/>
+          <p:cNvCxnSpPr/>
+          <p:nvPr/>
+        </p:nvCxnSpPr>
+        <p:spPr>
+          <a:xfrm flipH="0" flipV="0">
+            <a:off x="9372600" y="4892040"/>
+            <a:ext cx="9144" cy="182880"/>
+          </a:xfrm>
+          <a:prstGeom prst="straightConnector1">
+            <a:avLst/>
+          </a:prstGeom>
+          <a:ln w="15875" cap="flat">
+            <a:solidFill>
+              <a:srgbClr val="6366F1"/>
+            </a:solidFill>
+            <a:tailEnd type="triangle"/>
+          </a:ln>
+        </p:spPr>
+      </p:cxnSp>
+      <p:cxnSp>
+        <p:nvCxnSpPr>
+          <p:cNvPr id="76" name="Connector 76"/>
+          <p:cNvCxnSpPr/>
+          <p:nvPr/>
+        </p:nvCxnSpPr>
+        <p:spPr>
+          <a:xfrm flipH="0" flipV="0">
+            <a:off x="4160520" y="4892040"/>
+            <a:ext cx="3657600" cy="182880"/>
+          </a:xfrm>
+          <a:prstGeom prst="straightConnector1">
+            <a:avLst/>
+          </a:prstGeom>
+          <a:ln w="15875" cap="flat">
+            <a:solidFill>
+              <a:srgbClr val="6366F1"/>
+            </a:solidFill>
+            <a:tailEnd type="triangle"/>
+          </a:ln>
+        </p:spPr>
+      </p:cxnSp>
+      <p:cxnSp>
+        <p:nvCxnSpPr>
+          <p:cNvPr id="77" name="Connector 77"/>
+          <p:cNvCxnSpPr/>
+          <p:nvPr/>
+        </p:nvCxnSpPr>
+        <p:spPr>
+          <a:xfrm flipH="1" flipV="0">
+            <a:off x="4160520" y="4892040"/>
+            <a:ext cx="3840480" cy="182880"/>
+          </a:xfrm>
+          <a:prstGeom prst="straightConnector1">
+            <a:avLst/>
+          </a:prstGeom>
+          <a:ln w="15875" cap="flat">
+            <a:solidFill>
+              <a:srgbClr val="5E6A75"/>
+            </a:solidFill>
+            <a:tailEnd type="triangle"/>
+          </a:ln>
+        </p:spPr>
+      </p:cxnSp>
+      <p:sp>
+        <p:nvSpPr>
+          <p:cNvPr id="26" name="Shape 26"/>
+          <p:cNvSpPr txBox="1"/>
+          <p:nvPr/>
+        </p:nvSpPr>
+        <p:spPr>
+          <a:xfrm>
+            <a:off x="502920" y="6263640"/>
+            <a:ext cx="11247120" cy="274320"/>
           </a:xfrm>
           <a:prstGeom prst="roundRect">
             <a:avLst/>
@@ -1922,7 +1967,7 @@
                 <a:latin typeface="Verdana"/>
                 <a:cs typeface="Verdana"/>
               </a:rPr>
-              <a:t>Эксперимент проверяет именно серверный real-time контур и межузловую доставку — независимо от полноценного UI продукта.</a:t>
+              <a:t>Оба сервиса собраны из одного образа и отличаются только идентификатором экземпляра.</a:t>
             </a:r>
           </a:p>
         </p:txBody>
@@ -1959,7 +2004,7 @@
                 <a:latin typeface="Verdana"/>
                 <a:cs typeface="Verdana"/>
               </a:rPr>
-              <a:t>Real-time scale-out · 12</a:t>
+              <a:t>В реальном времени · 12</a:t>
             </a:r>
           </a:p>
         </p:txBody>
@@ -2066,7 +2111,7 @@
                 <a:latin typeface="Verdana"/>
                 <a:cs typeface="Verdana"/>
               </a:rPr>
-              <a:t>Один код в двух режимах, пять контрольных проверок (§5.1 ВКР)</a:t>
+              <a:t>Один и тот же стенд, два режима, пять проверок (§5.1 ВКР)</a:t>
             </a:r>
           </a:p>
         </p:txBody>
@@ -2107,7 +2152,7 @@
                 <a:latin typeface="Verdana"/>
                 <a:cs typeface="Verdana"/>
               </a:rPr>
-              <a:t>Два режима</a:t>
+              <a:t>Два режима одного стенда</a:t>
             </a:r>
           </a:p>
           <a:p>
@@ -2133,7 +2178,7 @@
                 <a:latin typeface="Verdana"/>
                 <a:cs typeface="Verdana"/>
               </a:rPr>
-              <a:t>•  Без Redis backplane — контрольный режим, воспроизводит исходное ограничение.</a:t>
+              <a:t>•  Без общего канала событий — контрольный режим, воспроизводит исходное ограничение.</a:t>
             </a:r>
           </a:p>
           <a:p>
@@ -2159,7 +2204,7 @@
                 <a:latin typeface="Verdana"/>
                 <a:cs typeface="Verdana"/>
               </a:rPr>
-              <a:t>•  С Redis backplane — целевой режим, проверяет решение.</a:t>
+              <a:t>•  С общим каналом событий — целевой режим, проверяет решение.</a:t>
             </a:r>
           </a:p>
           <a:p>
@@ -2185,7 +2230,7 @@
                 <a:latin typeface="Verdana"/>
                 <a:cs typeface="Verdana"/>
               </a:rPr>
-              <a:t>Код приложения и сценарий идентичны. Различие — только в значении REDIS_CONNECTION_STRING; это даёт причинную связь, а не корреляцию.</a:t>
+              <a:t>Код и сценарий — одни и те же. Меняется только одна настройка: включён общий канал или нет.</a:t>
             </a:r>
           </a:p>
         </p:txBody>
@@ -2252,7 +2297,7 @@
                 <a:latin typeface="Verdana"/>
                 <a:cs typeface="Verdana"/>
               </a:rPr>
-              <a:t>1.  Одиночная доставка без backplane — ожидание тайм-аута.</a:t>
+              <a:t>1.  Одиночная доставка без общего канала.</a:t>
             </a:r>
           </a:p>
           <a:p>
@@ -2278,7 +2323,7 @@
                 <a:latin typeface="Verdana"/>
                 <a:cs typeface="Verdana"/>
               </a:rPr>
-              <a:t>2.  Одиночная доставка с backplane — подтверждение решения.</a:t>
+              <a:t>2.  Одиночная доставка с общим каналом.</a:t>
             </a:r>
           </a:p>
           <a:p>
@@ -2304,7 +2349,7 @@
                 <a:latin typeface="Verdana"/>
                 <a:cs typeface="Verdana"/>
               </a:rPr>
-              <a:t>3.  Серия из 30 итераций — повторяемость и задержка.</a:t>
+              <a:t>3.  Серия из 30 повторов — повторяемость и задержка.</a:t>
             </a:r>
           </a:p>
           <a:p>
@@ -2330,7 +2375,7 @@
                 <a:latin typeface="Verdana"/>
                 <a:cs typeface="Verdana"/>
               </a:rPr>
-              <a:t>4.  Повторная подписка после разрыва соединения.</a:t>
+              <a:t>4.  Восстановление подписки после разрыва соединения.</a:t>
             </a:r>
           </a:p>
           <a:p>
@@ -2356,7 +2401,7 @@
                 <a:latin typeface="Verdana"/>
                 <a:cs typeface="Verdana"/>
               </a:rPr>
-              <a:t>5.  Переключение на другой экземпляр после отказа узла.</a:t>
+              <a:t>5.  Переключение на другой узел после отказа.</a:t>
             </a:r>
           </a:p>
         </p:txBody>
@@ -2393,7 +2438,7 @@
                 <a:latin typeface="Verdana"/>
                 <a:cs typeface="Verdana"/>
               </a:rPr>
-              <a:t>Real-time scale-out · 13</a:t>
+              <a:t>В реальном времени · 13</a:t>
             </a:r>
           </a:p>
         </p:txBody>
@@ -2760,7 +2805,7 @@
                 <a:latin typeface="Verdana"/>
                 <a:cs typeface="Verdana"/>
               </a:rPr>
-              <a:t>Real-time scale-out · 14</a:t>
+              <a:t>В реальном времени · 14</a:t>
             </a:r>
           </a:p>
         </p:txBody>
@@ -2867,7 +2912,7 @@
                 <a:latin typeface="Verdana"/>
                 <a:cs typeface="Verdana"/>
               </a:rPr>
-              <a:t>Серийная проверка задержки и устойчивость к разрывам/отказам (§5.5–5.6 ВКР)</a:t>
+              <a:t>Повторяемость задержки и устойчивость к разрывам и отказам (§5.5–5.6 ВКР)</a:t>
             </a:r>
           </a:p>
         </p:txBody>
@@ -2908,7 +2953,7 @@
                 <a:latin typeface="Verdana"/>
                 <a:cs typeface="Verdana"/>
               </a:rPr>
-              <a:t>§5.5 Серийная проверка</a:t>
+              <a:t>Серийная проверка (§5.5)</a:t>
             </a:r>
           </a:p>
           <a:p>
@@ -2934,7 +2979,7 @@
                 <a:latin typeface="Verdana"/>
                 <a:cs typeface="Verdana"/>
               </a:rPr>
-              <a:t>30 итераций, режим с backplane.</a:t>
+              <a:t>30 повторов подряд в целевом режиме.</a:t>
             </a:r>
           </a:p>
           <a:p>
@@ -2973,7 +3018,7 @@
                 <a:latin typeface="Verdana"/>
                 <a:cs typeface="Verdana"/>
               </a:rPr>
-              <a:t>avg 7,2 мс  ·  p50 6,1 мс</a:t>
+              <a:t>среднее 7,2 мс  ·  медиана 6,1 мс</a:t>
             </a:r>
           </a:p>
           <a:p>
@@ -2986,7 +3031,7 @@
                 <a:latin typeface="Verdana"/>
                 <a:cs typeface="Verdana"/>
               </a:rPr>
-              <a:t>min 3,8 мс  ·  p95 13,8 мс</a:t>
+              <a:t>минимум 3,8 мс  ·  95 % быстрее 13,8 мс</a:t>
             </a:r>
           </a:p>
           <a:p>
@@ -3012,7 +3057,7 @@
                 <a:latin typeface="Verdana"/>
                 <a:cs typeface="Verdana"/>
               </a:rPr>
-              <a:t>Повторяемость доставки и порядок задержки в локальном стенде.</a:t>
+              <a:t>Повторяемость доставки и порядок задержки на локальном стенде.</a:t>
             </a:r>
           </a:p>
         </p:txBody>
@@ -3053,7 +3098,7 @@
                 <a:latin typeface="Verdana"/>
                 <a:cs typeface="Verdana"/>
               </a:rPr>
-              <a:t>§5.6 Повторная подписка</a:t>
+              <a:t>Повторная подписка (§5.6)</a:t>
             </a:r>
           </a:p>
           <a:p>
@@ -3079,7 +3124,7 @@
                 <a:latin typeface="Verdana"/>
                 <a:cs typeface="Verdana"/>
               </a:rPr>
-              <a:t>Сценарий rejoin: разрыв соединения, новое подключение, повторное вступление в группу отчёта.</a:t>
+              <a:t>Разрыв соединения, новое подключение, повторное вступление в группу отчёта.</a:t>
             </a:r>
           </a:p>
           <a:p>
@@ -3118,7 +3163,7 @@
                 <a:latin typeface="Verdana"/>
                 <a:cs typeface="Verdana"/>
               </a:rPr>
-              <a:t>доставка после rejoin 15,2 мс</a:t>
+              <a:t>доставка после восстановления 15,2 мс</a:t>
             </a:r>
           </a:p>
           <a:p>
@@ -3144,7 +3189,7 @@
                 <a:latin typeface="Verdana"/>
                 <a:cs typeface="Verdana"/>
               </a:rPr>
-              <a:t>Контур устойчив к разрывам клиентского соединения.</a:t>
+              <a:t>Контур устойчив к разрыву клиентского соединения.</a:t>
             </a:r>
           </a:p>
         </p:txBody>
@@ -3185,7 +3230,7 @@
                 <a:latin typeface="Verdana"/>
                 <a:cs typeface="Verdana"/>
               </a:rPr>
-              <a:t>§5.6 Переключение после отказа</a:t>
+              <a:t>Переключение после отказа (§5.6)</a:t>
             </a:r>
           </a:p>
           <a:p>
@@ -3211,7 +3256,7 @@
                 <a:latin typeface="Verdana"/>
                 <a:cs typeface="Verdana"/>
               </a:rPr>
-              <a:t>Сценарий failover: остановка одного экземпляра, переключение через nginx на оставшийся.</a:t>
+              <a:t>Остановка одного из узлов, переключение через общую точку входа на оставшийся.</a:t>
             </a:r>
           </a:p>
           <a:p>
@@ -3237,7 +3282,7 @@
                 <a:latin typeface="Verdana"/>
                 <a:cs typeface="Verdana"/>
               </a:rPr>
-              <a:t>переключение 352,0 мс</a:t>
+              <a:t>переключение 352 мс</a:t>
             </a:r>
           </a:p>
           <a:p>
@@ -3250,7 +3295,7 @@
                 <a:latin typeface="Verdana"/>
                 <a:cs typeface="Verdana"/>
               </a:rPr>
-              <a:t>доставка после failover 5,4 мс</a:t>
+              <a:t>доставка после переключения 5,4 мс</a:t>
             </a:r>
           </a:p>
           <a:p>
@@ -3313,7 +3358,7 @@
                 <a:latin typeface="Verdana"/>
                 <a:cs typeface="Verdana"/>
               </a:rPr>
-              <a:t>Real-time scale-out · 15</a:t>
+              <a:t>В реальном времени · 15</a:t>
             </a:r>
           </a:p>
         </p:txBody>
@@ -3494,7 +3539,7 @@
                 <a:latin typeface="Verdana"/>
                 <a:cs typeface="Verdana"/>
               </a:rPr>
-              <a:t>Backplane</a:t>
+              <a:t>Общий канал</a:t>
             </a:r>
           </a:p>
         </p:txBody>
@@ -3609,7 +3654,7 @@
                 <a:latin typeface="Verdana"/>
                 <a:cs typeface="Verdana"/>
               </a:rPr>
-              <a:t>Доставка без Redis backplane</a:t>
+              <a:t>Доставка без общего канала</a:t>
             </a:r>
           </a:p>
         </p:txBody>
@@ -3773,7 +3818,7 @@
                 <a:latin typeface="Verdana"/>
                 <a:cs typeface="Verdana"/>
               </a:rPr>
-              <a:t>Доставка с Redis backplane</a:t>
+              <a:t>Доставка с общим каналом</a:t>
             </a:r>
           </a:p>
         </p:txBody>
@@ -3855,7 +3900,7 @@
                 <a:latin typeface="Verdana"/>
                 <a:cs typeface="Verdana"/>
               </a:rPr>
-              <a:t>ok: true · задержка ≈ 9,5 мс</a:t>
+              <a:t>Событие доставлено · задержка ≈ 9,5 мс</a:t>
             </a:r>
           </a:p>
         </p:txBody>
@@ -4019,7 +4064,7 @@
                 <a:latin typeface="Verdana"/>
                 <a:cs typeface="Verdana"/>
               </a:rPr>
-              <a:t>30 из 30 · p95 = 13,8 мс</a:t>
+              <a:t>30 из 30 · 95 % быстрее 13,8 мс</a:t>
             </a:r>
           </a:p>
         </p:txBody>
@@ -4183,7 +4228,7 @@
                 <a:latin typeface="Verdana"/>
                 <a:cs typeface="Verdana"/>
               </a:rPr>
-              <a:t>Событие после rejoin · 15,2 мс</a:t>
+              <a:t>Событие после восстановления · 15,2 мс</a:t>
             </a:r>
           </a:p>
         </p:txBody>
@@ -4347,7 +4392,7 @@
                 <a:latin typeface="Verdana"/>
                 <a:cs typeface="Verdana"/>
               </a:rPr>
-              <a:t>app-api-2 → app-api-1, событие получено</a:t>
+              <a:t>Узел 2 → узел 1, событие получено</a:t>
             </a:r>
           </a:p>
         </p:txBody>
@@ -4462,7 +4507,7 @@
                 <a:latin typeface="Verdana"/>
                 <a:cs typeface="Verdana"/>
               </a:rPr>
-              <a:t>Real-time scale-out · 16</a:t>
+              <a:t>В реальном времени · 16</a:t>
             </a:r>
           </a:p>
         </p:txBody>
@@ -4569,7 +4614,7 @@
                 <a:latin typeface="Verdana"/>
                 <a:cs typeface="Verdana"/>
               </a:rPr>
-              <a:t>Это интерфейсная синхронизация, а не строгий промышленный real-time</a:t>
+              <a:t>Это интерфейсная синхронизация, а не строгий промышленный режим реального времени</a:t>
             </a:r>
           </a:p>
         </p:txBody>
@@ -4833,7 +4878,7 @@
                 <a:latin typeface="Verdana"/>
                 <a:cs typeface="Verdana"/>
               </a:rPr>
-              <a:t>Real-time scale-out · 17</a:t>
+              <a:t>В реальном времени · 17</a:t>
             </a:r>
           </a:p>
         </p:txBody>
@@ -5223,7 +5268,7 @@
                 <a:latin typeface="Verdana"/>
                 <a:cs typeface="Verdana"/>
               </a:rPr>
-              <a:t>Real-time scale-out · 18</a:t>
+              <a:t>В реальном времени · 18</a:t>
             </a:r>
           </a:p>
         </p:txBody>
@@ -5675,7 +5720,7 @@
                 <a:latin typeface="Verdana"/>
                 <a:cs typeface="Verdana"/>
               </a:rPr>
-              <a:t>Они работают с одним отчётом одновременно — значит, изменения должны быть видны сразу, без F5.</a:t>
+              <a:t>Они работают с одним отчётом одновременно — значит, изменения должны быть видны сразу, без перезагрузки страницы.</a:t>
             </a:r>
           </a:p>
         </p:txBody>
@@ -5712,7 +5757,7 @@
                 <a:latin typeface="Verdana"/>
                 <a:cs typeface="Verdana"/>
               </a:rPr>
-              <a:t>Real-time scale-out · 02</a:t>
+              <a:t>В реальном времени · 02</a:t>
             </a:r>
           </a:p>
         </p:txBody>
@@ -5914,7 +5959,7 @@
                 <a:latin typeface="Verdana"/>
                 <a:cs typeface="Verdana"/>
               </a:rPr>
-              <a:t>Real-time scale-out · 03</a:t>
+              <a:t>В реальном времени · 03</a:t>
             </a:r>
           </a:p>
         </p:txBody>
@@ -6116,7 +6161,7 @@
                 <a:latin typeface="Verdana"/>
                 <a:cs typeface="Verdana"/>
               </a:rPr>
-              <a:t>Real-time scale-out · 04</a:t>
+              <a:t>В реальном времени · 04</a:t>
             </a:r>
           </a:p>
         </p:txBody>
@@ -6236,8 +6281,8 @@
         </p:nvSpPr>
         <p:spPr>
           <a:xfrm>
-            <a:off x="685800" y="1508760"/>
-            <a:ext cx="3520440" cy="4343400"/>
+            <a:off x="685800" y="1600200"/>
+            <a:ext cx="10835640" cy="1234440"/>
           </a:xfrm>
           <a:prstGeom prst="roundRect">
             <a:avLst/>
@@ -6257,20 +6302,20 @@
           <a:p>
             <a:pPr algn="l"/>
             <a:r>
-              <a:rPr lang="ru-RU" sz="1300" b="0">
-                <a:solidFill>
-                  <a:srgbClr val="1A2730"/>
-                </a:solidFill>
-                <a:latin typeface="Verdana"/>
-                <a:cs typeface="Verdana"/>
-              </a:rPr>
-              <a:t>Рост сложности продуктов</a:t>
-            </a:r>
-          </a:p>
-          <a:p>
-            <a:pPr algn="l"/>
-            <a:r>
-              <a:rPr lang="ru-RU" sz="1300" b="0">
+              <a:rPr lang="ru-RU" sz="1400" b="0">
+                <a:solidFill>
+                  <a:srgbClr val="1A2730"/>
+                </a:solidFill>
+                <a:latin typeface="Verdana"/>
+                <a:cs typeface="Verdana"/>
+              </a:rPr>
+              <a:t>Продукты усложняются</a:t>
+            </a:r>
+          </a:p>
+          <a:p>
+            <a:pPr algn="l"/>
+            <a:r>
+              <a:rPr lang="ru-RU" sz="1400" b="0">
                 <a:solidFill>
                   <a:srgbClr val="1A2730"/>
                 </a:solidFill>
@@ -6283,20 +6328,61 @@
           <a:p>
             <a:pPr algn="l"/>
             <a:r>
-              <a:rPr lang="ru-RU" sz="1300" b="0">
-                <a:solidFill>
-                  <a:srgbClr val="1A2730"/>
-                </a:solidFill>
-                <a:latin typeface="Verdana"/>
-                <a:cs typeface="Verdana"/>
-              </a:rPr>
-              <a:t>Современные веб-системы объединяют связанные сущности, фоновые операции, уведомления и совместное редактирование.</a:t>
-            </a:r>
-          </a:p>
-          <a:p>
-            <a:pPr algn="l"/>
-            <a:r>
-              <a:rPr lang="ru-RU" sz="1300" b="0">
+              <a:rPr lang="ru-RU" sz="1400" b="0">
+                <a:solidFill>
+                  <a:srgbClr val="1A2730"/>
+                </a:solidFill>
+                <a:latin typeface="Verdana"/>
+                <a:cs typeface="Verdana"/>
+              </a:rPr>
+              <a:t>Пользователь работает не с одной формой, а с отчётом, багами, статусами и участниками одновременно.</a:t>
+            </a:r>
+          </a:p>
+        </p:txBody>
+      </p:sp>
+      <p:sp>
+        <p:nvSpPr>
+          <p:cNvPr id="21" name="Shape 21"/>
+          <p:cNvSpPr txBox="1"/>
+          <p:nvPr/>
+        </p:nvSpPr>
+        <p:spPr>
+          <a:xfrm>
+            <a:off x="685800" y="3017520"/>
+            <a:ext cx="10835640" cy="1234440"/>
+          </a:xfrm>
+          <a:prstGeom prst="roundRect">
+            <a:avLst/>
+          </a:prstGeom>
+          <a:solidFill>
+            <a:srgbClr val="EEF0FE"/>
+          </a:solidFill>
+          <a:ln w="12700">
+            <a:solidFill>
+              <a:srgbClr val="6366F1"/>
+            </a:solidFill>
+          </a:ln>
+        </p:spPr>
+        <p:txBody>
+          <a:bodyPr wrap="square" lIns="177800" tIns="177800" rIns="177800" bIns="177800"/>
+          <a:lstStyle/>
+          <a:p>
+            <a:pPr algn="l"/>
+            <a:r>
+              <a:rPr lang="ru-RU" sz="1400" b="0">
+                <a:solidFill>
+                  <a:srgbClr val="1A2730"/>
+                </a:solidFill>
+                <a:latin typeface="Verdana"/>
+                <a:cs typeface="Verdana"/>
+              </a:rPr>
+              <a:t>AI-инструменты усиливают ожидание обновлений в реальном времени</a:t>
+            </a:r>
+          </a:p>
+          <a:p>
+            <a:pPr algn="l"/>
+            <a:r>
+              <a:rPr lang="ru-RU" sz="1400" b="0">
                 <a:solidFill>
                   <a:srgbClr val="1A2730"/>
                 </a:solidFill>
@@ -6309,61 +6395,61 @@
           <a:p>
             <a:pPr algn="l"/>
             <a:r>
-              <a:rPr lang="ru-RU" sz="1300" b="0">
-                <a:solidFill>
-                  <a:srgbClr val="1A2730"/>
-                </a:solidFill>
-                <a:latin typeface="Verdana"/>
-                <a:cs typeface="Verdana"/>
-              </a:rPr>
-              <a:t>Изменения должны быть видны участникам без ручного обновления страницы.</a:t>
-            </a:r>
-          </a:p>
-        </p:txBody>
-      </p:sp>
-      <p:sp>
-        <p:nvSpPr>
-          <p:cNvPr id="21" name="Shape 21"/>
-          <p:cNvSpPr txBox="1"/>
-          <p:nvPr/>
-        </p:nvSpPr>
-        <p:spPr>
-          <a:xfrm>
-            <a:off x="4389120" y="1508760"/>
-            <a:ext cx="3520440" cy="4343400"/>
-          </a:xfrm>
-          <a:prstGeom prst="roundRect">
-            <a:avLst/>
-          </a:prstGeom>
-          <a:solidFill>
-            <a:srgbClr val="EEF0FE"/>
-          </a:solidFill>
-          <a:ln w="12700">
-            <a:solidFill>
-              <a:srgbClr val="6366F1"/>
-            </a:solidFill>
-          </a:ln>
-        </p:spPr>
-        <p:txBody>
-          <a:bodyPr wrap="square" lIns="177800" tIns="177800" rIns="177800" bIns="177800"/>
-          <a:lstStyle/>
-          <a:p>
-            <a:pPr algn="l"/>
-            <a:r>
-              <a:rPr lang="ru-RU" sz="1300" b="0">
-                <a:solidFill>
-                  <a:srgbClr val="1A2730"/>
-                </a:solidFill>
-                <a:latin typeface="Verdana"/>
-                <a:cs typeface="Verdana"/>
-              </a:rPr>
-              <a:t>AI-инструменты как отраслевой контекст</a:t>
-            </a:r>
-          </a:p>
-          <a:p>
-            <a:pPr algn="l"/>
-            <a:r>
-              <a:rPr lang="ru-RU" sz="1300" b="0">
+              <a:rPr lang="ru-RU" sz="1400" b="0">
+                <a:solidFill>
+                  <a:srgbClr val="1A2730"/>
+                </a:solidFill>
+                <a:latin typeface="Verdana"/>
+                <a:cs typeface="Verdana"/>
+              </a:rPr>
+              <a:t>Ассистент может сам создать комментарий, изменить статус, предложить исполнителя.</a:t>
+            </a:r>
+          </a:p>
+        </p:txBody>
+      </p:sp>
+      <p:sp>
+        <p:nvSpPr>
+          <p:cNvPr id="22" name="Shape 22"/>
+          <p:cNvSpPr txBox="1"/>
+          <p:nvPr/>
+        </p:nvSpPr>
+        <p:spPr>
+          <a:xfrm>
+            <a:off x="685800" y="4434840"/>
+            <a:ext cx="10835640" cy="1325880"/>
+          </a:xfrm>
+          <a:prstGeom prst="roundRect">
+            <a:avLst/>
+          </a:prstGeom>
+          <a:solidFill>
+            <a:srgbClr val="E6F4F1"/>
+          </a:solidFill>
+          <a:ln w="12700">
+            <a:solidFill>
+              <a:srgbClr val="14A085"/>
+            </a:solidFill>
+          </a:ln>
+        </p:spPr>
+        <p:txBody>
+          <a:bodyPr wrap="square" lIns="177800" tIns="177800" rIns="177800" bIns="177800"/>
+          <a:lstStyle/>
+          <a:p>
+            <a:pPr algn="l"/>
+            <a:r>
+              <a:rPr lang="ru-RU" sz="1400" b="1">
+                <a:solidFill>
+                  <a:srgbClr val="1A2730"/>
+                </a:solidFill>
+                <a:latin typeface="Verdana"/>
+                <a:cs typeface="Verdana"/>
+              </a:rPr>
+              <a:t>Real-time — это инженерная характеристика, а не «фича»</a:t>
+            </a:r>
+          </a:p>
+          <a:p>
+            <a:pPr algn="l"/>
+            <a:r>
+              <a:rPr lang="ru-RU" sz="1400" b="1">
                 <a:solidFill>
                   <a:srgbClr val="1A2730"/>
                 </a:solidFill>
@@ -6376,133 +6462,14 @@
           <a:p>
             <a:pPr algn="l"/>
             <a:r>
-              <a:rPr lang="ru-RU" sz="1300" b="0">
-                <a:solidFill>
-                  <a:srgbClr val="1A2730"/>
-                </a:solidFill>
-                <a:latin typeface="Verdana"/>
-                <a:cs typeface="Verdana"/>
-              </a:rPr>
-              <a:t>Интеллектуальные ассистенты могут сами создавать комментарии, обновлять статус, предлагать исполнителя, дополнять описание задачи.</a:t>
-            </a:r>
-          </a:p>
-          <a:p>
-            <a:pPr algn="l"/>
-            <a:r>
-              <a:rPr lang="ru-RU" sz="1300" b="0">
-                <a:solidFill>
-                  <a:srgbClr val="1A2730"/>
-                </a:solidFill>
-                <a:latin typeface="Verdana"/>
-                <a:cs typeface="Verdana"/>
-              </a:rPr>
-              <a:t/>
-            </a:r>
-          </a:p>
-          <a:p>
-            <a:pPr algn="l"/>
-            <a:r>
-              <a:rPr lang="ru-RU" sz="1300" b="0">
-                <a:solidFill>
-                  <a:srgbClr val="1A2730"/>
-                </a:solidFill>
-                <a:latin typeface="Verdana"/>
-                <a:cs typeface="Verdana"/>
-              </a:rPr>
-              <a:t>Ожидание живой синхронизации усиливается даже у ручных сценариев.</a:t>
-            </a:r>
-          </a:p>
-        </p:txBody>
-      </p:sp>
-      <p:sp>
-        <p:nvSpPr>
-          <p:cNvPr id="22" name="Shape 22"/>
-          <p:cNvSpPr txBox="1"/>
-          <p:nvPr/>
-        </p:nvSpPr>
-        <p:spPr>
-          <a:xfrm>
-            <a:off x="8092440" y="1508760"/>
-            <a:ext cx="3520440" cy="4343400"/>
-          </a:xfrm>
-          <a:prstGeom prst="roundRect">
-            <a:avLst/>
-          </a:prstGeom>
-          <a:solidFill>
-            <a:srgbClr val="E6F4F1"/>
-          </a:solidFill>
-          <a:ln w="12700">
-            <a:solidFill>
-              <a:srgbClr val="14A085"/>
-            </a:solidFill>
-          </a:ln>
-        </p:spPr>
-        <p:txBody>
-          <a:bodyPr wrap="square" lIns="177800" tIns="177800" rIns="177800" bIns="177800"/>
-          <a:lstStyle/>
-          <a:p>
-            <a:pPr algn="l"/>
-            <a:r>
-              <a:rPr lang="ru-RU" sz="1300" b="1">
-                <a:solidFill>
-                  <a:srgbClr val="1A2730"/>
-                </a:solidFill>
-                <a:latin typeface="Verdana"/>
-                <a:cs typeface="Verdana"/>
-              </a:rPr>
-              <a:t>Что это значит для инженера</a:t>
-            </a:r>
-          </a:p>
-          <a:p>
-            <a:pPr algn="l"/>
-            <a:r>
-              <a:rPr lang="ru-RU" sz="1300" b="1">
-                <a:solidFill>
-                  <a:srgbClr val="1A2730"/>
-                </a:solidFill>
-                <a:latin typeface="Verdana"/>
-                <a:cs typeface="Verdana"/>
-              </a:rPr>
-              <a:t/>
-            </a:r>
-          </a:p>
-          <a:p>
-            <a:pPr algn="l"/>
-            <a:r>
-              <a:rPr lang="ru-RU" sz="1300" b="1">
-                <a:solidFill>
-                  <a:srgbClr val="1A2730"/>
-                </a:solidFill>
-                <a:latin typeface="Verdana"/>
-                <a:cs typeface="Verdana"/>
-              </a:rPr>
-              <a:t>Real-time перестаёт быть «фичей» и становится инженерной характеристикой: способность интерфейса быстро и согласованно распространять изменения.</a:t>
-            </a:r>
-          </a:p>
-          <a:p>
-            <a:pPr algn="l"/>
-            <a:r>
-              <a:rPr lang="ru-RU" sz="1300" b="1">
-                <a:solidFill>
-                  <a:srgbClr val="1A2730"/>
-                </a:solidFill>
-                <a:latin typeface="Verdana"/>
-                <a:cs typeface="Verdana"/>
-              </a:rPr>
-              <a:t/>
-            </a:r>
-          </a:p>
-          <a:p>
-            <a:pPr algn="l"/>
-            <a:r>
-              <a:rPr lang="ru-RU" sz="1300" b="1">
-                <a:solidFill>
-                  <a:srgbClr val="1A2730"/>
-                </a:solidFill>
-                <a:latin typeface="Verdana"/>
-                <a:cs typeface="Verdana"/>
-              </a:rPr>
-              <a:t>Поэтому строить его нужно для нескольких экземпляров backend, а не только single-node.</a:t>
+              <a:rPr lang="ru-RU" sz="1400" b="1">
+                <a:solidFill>
+                  <a:srgbClr val="1A2730"/>
+                </a:solidFill>
+                <a:latin typeface="Verdana"/>
+                <a:cs typeface="Verdana"/>
+              </a:rPr>
+              <a:t>Строить его нужно для нескольких экземпляров серверного сервиса, а не только для одного.</a:t>
             </a:r>
           </a:p>
         </p:txBody>
@@ -6515,7 +6482,7 @@
         </p:nvSpPr>
         <p:spPr>
           <a:xfrm>
-            <a:off x="685800" y="5989320"/>
+            <a:off x="685800" y="5897880"/>
             <a:ext cx="10835640" cy="365760"/>
           </a:xfrm>
           <a:prstGeom prst="roundRect">
@@ -6539,7 +6506,7 @@
                 <a:latin typeface="Verdana"/>
                 <a:cs typeface="Verdana"/>
               </a:rPr>
-              <a:t>В работе AI-функциональность не утверждается как реализованная; это контекст актуальности.</a:t>
+              <a:t>AI-функциональность не утверждается как реализованная — это контекст актуальности.</a:t>
             </a:r>
           </a:p>
         </p:txBody>
@@ -6576,7 +6543,7 @@
                 <a:latin typeface="Verdana"/>
                 <a:cs typeface="Verdana"/>
               </a:rPr>
-              <a:t>Real-time scale-out · 05</a:t>
+              <a:t>В реальном времени · 05</a:t>
             </a:r>
           </a:p>
         </p:txBody>
@@ -6683,7 +6650,7 @@
                 <a:latin typeface="Verdana"/>
                 <a:cs typeface="Verdana"/>
               </a:rPr>
-              <a:t>Когда backend один — всё работает. Когда их несколько — изменения теряются.</a:t>
+              <a:t>Исходный контур реального времени не масштабируется и не отказоустойчив</a:t>
             </a:r>
           </a:p>
         </p:txBody>
@@ -6697,7 +6664,141 @@
         <p:spPr>
           <a:xfrm>
             <a:off x="685800" y="1417320"/>
-            <a:ext cx="10835640" cy="960120"/>
+            <a:ext cx="5349240" cy="2286000"/>
+          </a:xfrm>
+          <a:prstGeom prst="roundRect">
+            <a:avLst/>
+          </a:prstGeom>
+          <a:solidFill>
+            <a:srgbClr val="FFFFFF"/>
+          </a:solidFill>
+          <a:ln w="12700">
+            <a:solidFill>
+              <a:srgbClr val="E3E7EB"/>
+            </a:solidFill>
+          </a:ln>
+        </p:spPr>
+        <p:txBody>
+          <a:bodyPr wrap="square" lIns="177800" tIns="177800" rIns="177800" bIns="177800"/>
+          <a:lstStyle/>
+          <a:p>
+            <a:pPr algn="l"/>
+            <a:r>
+              <a:rPr lang="ru-RU" sz="1400" b="0">
+                <a:solidFill>
+                  <a:srgbClr val="1A2730"/>
+                </a:solidFill>
+                <a:latin typeface="Verdana"/>
+                <a:cs typeface="Verdana"/>
+              </a:rPr>
+              <a:t>Не масштабируется</a:t>
+            </a:r>
+          </a:p>
+          <a:p>
+            <a:pPr algn="l"/>
+            <a:r>
+              <a:rPr lang="ru-RU" sz="1400" b="0">
+                <a:solidFill>
+                  <a:srgbClr val="1A2730"/>
+                </a:solidFill>
+                <a:latin typeface="Verdana"/>
+                <a:cs typeface="Verdana"/>
+              </a:rPr>
+              <a:t/>
+            </a:r>
+          </a:p>
+          <a:p>
+            <a:pPr algn="l"/>
+            <a:r>
+              <a:rPr lang="ru-RU" sz="1400" b="0">
+                <a:solidFill>
+                  <a:srgbClr val="1A2730"/>
+                </a:solidFill>
+                <a:latin typeface="Verdana"/>
+                <a:cs typeface="Verdana"/>
+              </a:rPr>
+              <a:t>Все клиенты обслуживаются одним серверным процессом. Рост числа пользователей и долгих соединений упирается в один экземпляр; разгрузить второй сервер нельзя.</a:t>
+            </a:r>
+          </a:p>
+        </p:txBody>
+      </p:sp>
+      <p:sp>
+        <p:nvSpPr>
+          <p:cNvPr id="21" name="Shape 21"/>
+          <p:cNvSpPr txBox="1"/>
+          <p:nvPr/>
+        </p:nvSpPr>
+        <p:spPr>
+          <a:xfrm>
+            <a:off x="6172200" y="1417320"/>
+            <a:ext cx="5349240" cy="2286000"/>
+          </a:xfrm>
+          <a:prstGeom prst="roundRect">
+            <a:avLst/>
+          </a:prstGeom>
+          <a:solidFill>
+            <a:srgbClr val="FFFFFF"/>
+          </a:solidFill>
+          <a:ln w="12700">
+            <a:solidFill>
+              <a:srgbClr val="E3E7EB"/>
+            </a:solidFill>
+          </a:ln>
+        </p:spPr>
+        <p:txBody>
+          <a:bodyPr wrap="square" lIns="177800" tIns="177800" rIns="177800" bIns="177800"/>
+          <a:lstStyle/>
+          <a:p>
+            <a:pPr algn="l"/>
+            <a:r>
+              <a:rPr lang="ru-RU" sz="1400" b="0">
+                <a:solidFill>
+                  <a:srgbClr val="1A2730"/>
+                </a:solidFill>
+                <a:latin typeface="Verdana"/>
+                <a:cs typeface="Verdana"/>
+              </a:rPr>
+              <a:t>Не отказоустойчив</a:t>
+            </a:r>
+          </a:p>
+          <a:p>
+            <a:pPr algn="l"/>
+            <a:r>
+              <a:rPr lang="ru-RU" sz="1400" b="0">
+                <a:solidFill>
+                  <a:srgbClr val="1A2730"/>
+                </a:solidFill>
+                <a:latin typeface="Verdana"/>
+                <a:cs typeface="Verdana"/>
+              </a:rPr>
+              <a:t/>
+            </a:r>
+          </a:p>
+          <a:p>
+            <a:pPr algn="l"/>
+            <a:r>
+              <a:rPr lang="ru-RU" sz="1400" b="0">
+                <a:solidFill>
+                  <a:srgbClr val="1A2730"/>
+                </a:solidFill>
+                <a:latin typeface="Verdana"/>
+                <a:cs typeface="Verdana"/>
+              </a:rPr>
+              <a:t>Этот единственный процесс — единая точка отказа. При его остановке обновления в реальном времени у всех участников прекращаются, перезапуск приводит к перерыву в работе.</a:t>
+            </a:r>
+          </a:p>
+        </p:txBody>
+      </p:sp>
+      <p:sp>
+        <p:nvSpPr>
+          <p:cNvPr id="22" name="Shape 22"/>
+          <p:cNvSpPr txBox="1"/>
+          <p:nvPr/>
+        </p:nvSpPr>
+        <p:spPr>
+          <a:xfrm>
+            <a:off x="685800" y="3886200"/>
+            <a:ext cx="10835640" cy="1417320"/>
           </a:xfrm>
           <a:prstGeom prst="roundRect">
             <a:avLst/>
@@ -6717,174 +6818,14 @@
           <a:p>
             <a:pPr algn="ctr"/>
             <a:r>
-              <a:rPr lang="ru-RU" sz="1700" b="1">
-                <a:solidFill>
-                  <a:srgbClr val="1A2730"/>
-                </a:solidFill>
-                <a:latin typeface="Verdana"/>
-                <a:cs typeface="Verdana"/>
-              </a:rPr>
-              <a:t>Тестировщик и разработчик открыли один и тот же отчёт. Тестировщик меняет статус — у разработчика в браузере ничего не происходит.</a:t>
-            </a:r>
-          </a:p>
-        </p:txBody>
-      </p:sp>
-      <p:sp>
-        <p:nvSpPr>
-          <p:cNvPr id="21" name="Shape 21"/>
-          <p:cNvSpPr txBox="1"/>
-          <p:nvPr/>
-        </p:nvSpPr>
-        <p:spPr>
-          <a:xfrm>
-            <a:off x="685800" y="2606040"/>
-            <a:ext cx="5349240" cy="3291840"/>
-          </a:xfrm>
-          <a:prstGeom prst="roundRect">
-            <a:avLst/>
-          </a:prstGeom>
-          <a:solidFill>
-            <a:srgbClr val="FFFFFF"/>
-          </a:solidFill>
-          <a:ln w="12700">
-            <a:solidFill>
-              <a:srgbClr val="E3E7EB"/>
-            </a:solidFill>
-          </a:ln>
-        </p:spPr>
-        <p:txBody>
-          <a:bodyPr wrap="square" lIns="177800" tIns="177800" rIns="177800" bIns="177800"/>
-          <a:lstStyle/>
-          <a:p>
-            <a:pPr algn="l"/>
-            <a:r>
-              <a:rPr lang="ru-RU" sz="1400" b="0">
-                <a:solidFill>
-                  <a:srgbClr val="1A2730"/>
-                </a:solidFill>
-                <a:latin typeface="Verdana"/>
-                <a:cs typeface="Verdana"/>
-              </a:rPr>
-              <a:t>Почему так</a:t>
-            </a:r>
-          </a:p>
-          <a:p>
-            <a:pPr algn="l"/>
-            <a:r>
-              <a:rPr lang="ru-RU" sz="1400" b="0">
-                <a:solidFill>
-                  <a:srgbClr val="1A2730"/>
-                </a:solidFill>
-                <a:latin typeface="Verdana"/>
-                <a:cs typeface="Verdana"/>
-              </a:rPr>
-              <a:t/>
-            </a:r>
-          </a:p>
-          <a:p>
-            <a:pPr algn="l"/>
-            <a:r>
-              <a:rPr lang="ru-RU" sz="1400" b="0">
-                <a:solidFill>
-                  <a:srgbClr val="1A2730"/>
-                </a:solidFill>
-                <a:latin typeface="Verdana"/>
-                <a:cs typeface="Verdana"/>
-              </a:rPr>
-              <a:t>Каждый экземпляр backend помнит только своих клиентов. Если тестировщик и разработчик подключены к разным экземплярам, событие об изменении до второго просто не доходит.</a:t>
-            </a:r>
-          </a:p>
-        </p:txBody>
-      </p:sp>
-      <p:sp>
-        <p:nvSpPr>
-          <p:cNvPr id="22" name="Shape 22"/>
-          <p:cNvSpPr txBox="1"/>
-          <p:nvPr/>
-        </p:nvSpPr>
-        <p:spPr>
-          <a:xfrm>
-            <a:off x="6172200" y="2606040"/>
-            <a:ext cx="5349240" cy="3291840"/>
-          </a:xfrm>
-          <a:prstGeom prst="roundRect">
-            <a:avLst/>
-          </a:prstGeom>
-          <a:solidFill>
-            <a:srgbClr val="FFFFFF"/>
-          </a:solidFill>
-          <a:ln w="12700">
-            <a:solidFill>
-              <a:srgbClr val="E3E7EB"/>
-            </a:solidFill>
-          </a:ln>
-        </p:spPr>
-        <p:txBody>
-          <a:bodyPr wrap="square" lIns="177800" tIns="177800" rIns="177800" bIns="177800"/>
-          <a:lstStyle/>
-          <a:p>
-            <a:pPr algn="l"/>
-            <a:r>
-              <a:rPr lang="ru-RU" sz="1400" b="0">
-                <a:solidFill>
-                  <a:srgbClr val="1A2730"/>
-                </a:solidFill>
-                <a:latin typeface="Verdana"/>
-                <a:cs typeface="Verdana"/>
-              </a:rPr>
-              <a:t>Что это значит на практике</a:t>
-            </a:r>
-          </a:p>
-          <a:p>
-            <a:pPr algn="l"/>
-            <a:r>
-              <a:rPr lang="ru-RU" sz="1400" b="0">
-                <a:solidFill>
-                  <a:srgbClr val="1A2730"/>
-                </a:solidFill>
-                <a:latin typeface="Verdana"/>
-                <a:cs typeface="Verdana"/>
-              </a:rPr>
-              <a:t/>
-            </a:r>
-          </a:p>
-          <a:p>
-            <a:pPr algn="l"/>
-            <a:r>
-              <a:rPr lang="ru-RU" sz="1400" b="0">
-                <a:solidFill>
-                  <a:srgbClr val="1A2730"/>
-                </a:solidFill>
-                <a:latin typeface="Verdana"/>
-                <a:cs typeface="Verdana"/>
-              </a:rPr>
-              <a:t>Совместная работа над отчётом ломается: часть участников видит новый статус, часть — старый.</a:t>
-            </a:r>
-          </a:p>
-          <a:p>
-            <a:pPr algn="l"/>
-            <a:r>
-              <a:rPr lang="ru-RU" sz="1400" b="0">
-                <a:solidFill>
-                  <a:srgbClr val="1A2730"/>
-                </a:solidFill>
-                <a:latin typeface="Verdana"/>
-                <a:cs typeface="Verdana"/>
-              </a:rPr>
-              <a:t/>
-            </a:r>
-          </a:p>
-          <a:p>
-            <a:pPr algn="l"/>
-            <a:r>
-              <a:rPr lang="ru-RU" sz="1400" b="0">
-                <a:solidFill>
-                  <a:srgbClr val="1A2730"/>
-                </a:solidFill>
-                <a:latin typeface="Verdana"/>
-                <a:cs typeface="Verdana"/>
-              </a:rPr>
-              <a:t>Backend нельзя масштабировать горизонтально, не перестроив доставку событий.</a:t>
+              <a:rPr lang="ru-RU" sz="1500" b="1">
+                <a:solidFill>
+                  <a:srgbClr val="1A2730"/>
+                </a:solidFill>
+                <a:latin typeface="Verdana"/>
+                <a:cs typeface="Verdana"/>
+              </a:rPr>
+              <a:t>Если просто запустить второй экземпляр, проблема не решается, а смещается: событие, созданное на одном узле, не доходит до клиентов, подключённых ко второму. Совместная работа над отчётом ломается.</a:t>
             </a:r>
           </a:p>
         </p:txBody>
@@ -6897,8 +6838,8 @@
         </p:nvSpPr>
         <p:spPr>
           <a:xfrm>
-            <a:off x="685800" y="6035040"/>
-            <a:ext cx="10835640" cy="320040"/>
+            <a:off x="685800" y="5486400"/>
+            <a:ext cx="10835640" cy="868680"/>
           </a:xfrm>
           <a:prstGeom prst="roundRect">
             <a:avLst/>
@@ -6914,14 +6855,14 @@
           <a:p>
             <a:pPr algn="ctr"/>
             <a:r>
-              <a:rPr lang="ru-RU" sz="1100" b="0">
+              <a:rPr lang="ru-RU" sz="1200" b="0">
                 <a:solidFill>
                   <a:srgbClr val="5E6A75"/>
                 </a:solidFill>
                 <a:latin typeface="Verdana"/>
                 <a:cs typeface="Verdana"/>
               </a:rPr>
-              <a:t>Технически: подключения и группы SignalR хранятся в памяти процесса.</a:t>
+              <a:t>Технически: сведения о подключениях и группах SignalR хранятся в памяти конкретного серверного процесса, поэтому без межузлового канала общее пространство синхронизации фрагментируется.</a:t>
             </a:r>
           </a:p>
         </p:txBody>
@@ -6958,7 +6899,7 @@
                 <a:latin typeface="Verdana"/>
                 <a:cs typeface="Verdana"/>
               </a:rPr>
-              <a:t>Real-time scale-out · 06</a:t>
+              <a:t>В реальном времени · 06</a:t>
             </a:r>
           </a:p>
         </p:txBody>
@@ -7065,7 +7006,7 @@
                 <a:latin typeface="Verdana"/>
                 <a:cs typeface="Verdana"/>
               </a:rPr>
-              <a:t>Сделать так, чтобы изменения доходили до всех — независимо от того, к какому экземпляру подключён пользователь</a:t>
+              <a:t>Сделать real-time масштабируемым и отказоустойчивым — с доработкой на всех слоях</a:t>
             </a:r>
           </a:p>
         </p:txBody>
@@ -7078,8 +7019,8 @@
         </p:nvSpPr>
         <p:spPr>
           <a:xfrm>
-            <a:off x="685800" y="1600200"/>
-            <a:ext cx="10835640" cy="1234440"/>
+            <a:off x="685800" y="1508760"/>
+            <a:ext cx="10835640" cy="1325880"/>
           </a:xfrm>
           <a:prstGeom prst="roundRect">
             <a:avLst/>
@@ -7099,14 +7040,14 @@
           <a:p>
             <a:pPr algn="ctr"/>
             <a:r>
-              <a:rPr lang="ru-RU" sz="1600" b="1">
-                <a:solidFill>
-                  <a:srgbClr val="1A2730"/>
-                </a:solidFill>
-                <a:latin typeface="Verdana"/>
-                <a:cs typeface="Verdana"/>
-              </a:rPr>
-              <a:t>Real-time интерфейс, в котором при нескольких экземплярах backend изменения в отчёте доставляются всем участникам, открывшим этот отчёт.</a:t>
+              <a:rPr lang="ru-RU" sz="1500" b="1">
+                <a:solidFill>
+                  <a:srgbClr val="1A2730"/>
+                </a:solidFill>
+                <a:latin typeface="Verdana"/>
+                <a:cs typeface="Verdana"/>
+              </a:rPr>
+              <a:t>Перейти от одноузловой схемы реального времени к распределённому контуру: несколько экземпляров серверного сервиса обслуживают подключения, события об изменении сущностей доставляются всем участникам независимо от узла подключения.</a:t>
             </a:r>
           </a:p>
         </p:txBody>
@@ -7119,8 +7060,8 @@
         </p:nvSpPr>
         <p:spPr>
           <a:xfrm>
-            <a:off x="685800" y="3154680"/>
-            <a:ext cx="3520440" cy="2606040"/>
+            <a:off x="685800" y="3017520"/>
+            <a:ext cx="2606040" cy="3017520"/>
           </a:xfrm>
           <a:prstGeom prst="roundRect">
             <a:avLst/>
@@ -7140,20 +7081,20 @@
           <a:p>
             <a:pPr algn="l"/>
             <a:r>
-              <a:rPr lang="ru-RU" sz="1400" b="0">
-                <a:solidFill>
-                  <a:srgbClr val="1A2730"/>
-                </a:solidFill>
-                <a:latin typeface="Verdana"/>
-                <a:cs typeface="Verdana"/>
-              </a:rPr>
-              <a:t>1. Спроектировать</a:t>
-            </a:r>
-          </a:p>
-          <a:p>
-            <a:pPr algn="l"/>
-            <a:r>
-              <a:rPr lang="ru-RU" sz="1400" b="0">
+              <a:rPr lang="ru-RU" sz="1200" b="0">
+                <a:solidFill>
+                  <a:srgbClr val="1A2730"/>
+                </a:solidFill>
+                <a:latin typeface="Verdana"/>
+                <a:cs typeface="Verdana"/>
+              </a:rPr>
+              <a:t>1. Проектирование</a:t>
+            </a:r>
+          </a:p>
+          <a:p>
+            <a:pPr algn="l"/>
+            <a:r>
+              <a:rPr lang="ru-RU" sz="1200" b="0">
                 <a:solidFill>
                   <a:srgbClr val="1A2730"/>
                 </a:solidFill>
@@ -7166,14 +7107,14 @@
           <a:p>
             <a:pPr algn="l"/>
             <a:r>
-              <a:rPr lang="ru-RU" sz="1400" b="0">
-                <a:solidFill>
-                  <a:srgbClr val="1A2730"/>
-                </a:solidFill>
-                <a:latin typeface="Verdana"/>
-                <a:cs typeface="Verdana"/>
-              </a:rPr>
-              <a:t>Архитектуру распределённой доставки событий и её границы.</a:t>
+              <a:rPr lang="ru-RU" sz="1200" b="0">
+                <a:solidFill>
+                  <a:srgbClr val="1A2730"/>
+                </a:solidFill>
+                <a:latin typeface="Verdana"/>
+                <a:cs typeface="Verdana"/>
+              </a:rPr>
+              <a:t>Архитектура распределённой доставки, поток события и границы решения.</a:t>
             </a:r>
           </a:p>
         </p:txBody>
@@ -7186,8 +7127,8 @@
         </p:nvSpPr>
         <p:spPr>
           <a:xfrm>
-            <a:off x="4389120" y="3154680"/>
-            <a:ext cx="3520440" cy="2606040"/>
+            <a:off x="3456432" y="3017520"/>
+            <a:ext cx="2606040" cy="3017520"/>
           </a:xfrm>
           <a:prstGeom prst="roundRect">
             <a:avLst/>
@@ -7207,20 +7148,20 @@
           <a:p>
             <a:pPr algn="l"/>
             <a:r>
-              <a:rPr lang="ru-RU" sz="1400" b="0">
-                <a:solidFill>
-                  <a:srgbClr val="1A2730"/>
-                </a:solidFill>
-                <a:latin typeface="Verdana"/>
-                <a:cs typeface="Verdana"/>
-              </a:rPr>
-              <a:t>2. Реализовать</a:t>
-            </a:r>
-          </a:p>
-          <a:p>
-            <a:pPr algn="l"/>
-            <a:r>
-              <a:rPr lang="ru-RU" sz="1400" b="0">
+              <a:rPr lang="ru-RU" sz="1200" b="0">
+                <a:solidFill>
+                  <a:srgbClr val="1A2730"/>
+                </a:solidFill>
+                <a:latin typeface="Verdana"/>
+                <a:cs typeface="Verdana"/>
+              </a:rPr>
+              <a:t>2. Серверная часть</a:t>
+            </a:r>
+          </a:p>
+          <a:p>
+            <a:pPr algn="l"/>
+            <a:r>
+              <a:rPr lang="ru-RU" sz="1200" b="0">
                 <a:solidFill>
                   <a:srgbClr val="1A2730"/>
                 </a:solidFill>
@@ -7233,14 +7174,14 @@
           <a:p>
             <a:pPr algn="l"/>
             <a:r>
-              <a:rPr lang="ru-RU" sz="1400" b="0">
-                <a:solidFill>
-                  <a:srgbClr val="1A2730"/>
-                </a:solidFill>
-                <a:latin typeface="Verdana"/>
-                <a:cs typeface="Verdana"/>
-              </a:rPr>
-              <a:t>Backend, фронтенд и стенд из двух экземпляров за общей точкой входа.</a:t>
+              <a:rPr lang="ru-RU" sz="1200" b="0">
+                <a:solidFill>
+                  <a:srgbClr val="1A2730"/>
+                </a:solidFill>
+                <a:latin typeface="Verdana"/>
+                <a:cs typeface="Verdana"/>
+              </a:rPr>
+              <a:t>Диагностика узла, единая точка отправки событий, конфигурируемое подключение общего канала.</a:t>
             </a:r>
           </a:p>
         </p:txBody>
@@ -7253,8 +7194,8 @@
         </p:nvSpPr>
         <p:spPr>
           <a:xfrm>
-            <a:off x="8092440" y="3154680"/>
-            <a:ext cx="3520440" cy="2606040"/>
+            <a:off x="6217920" y="3017520"/>
+            <a:ext cx="2606040" cy="3017520"/>
           </a:xfrm>
           <a:prstGeom prst="roundRect">
             <a:avLst/>
@@ -7274,20 +7215,20 @@
           <a:p>
             <a:pPr algn="l"/>
             <a:r>
-              <a:rPr lang="ru-RU" sz="1400" b="0">
-                <a:solidFill>
-                  <a:srgbClr val="1A2730"/>
-                </a:solidFill>
-                <a:latin typeface="Verdana"/>
-                <a:cs typeface="Verdana"/>
-              </a:rPr>
-              <a:t>3. Проверить</a:t>
-            </a:r>
-          </a:p>
-          <a:p>
-            <a:pPr algn="l"/>
-            <a:r>
-              <a:rPr lang="ru-RU" sz="1400" b="0">
+              <a:rPr lang="ru-RU" sz="1200" b="0">
+                <a:solidFill>
+                  <a:srgbClr val="1A2730"/>
+                </a:solidFill>
+                <a:latin typeface="Verdana"/>
+                <a:cs typeface="Verdana"/>
+              </a:rPr>
+              <a:t>3. Клиентская часть</a:t>
+            </a:r>
+          </a:p>
+          <a:p>
+            <a:pPr algn="l"/>
+            <a:r>
+              <a:rPr lang="ru-RU" sz="1200" b="0">
                 <a:solidFill>
                   <a:srgbClr val="1A2730"/>
                 </a:solidFill>
@@ -7300,14 +7241,81 @@
           <a:p>
             <a:pPr algn="l"/>
             <a:r>
-              <a:rPr lang="ru-RU" sz="1400" b="0">
-                <a:solidFill>
-                  <a:srgbClr val="1A2730"/>
-                </a:solidFill>
-                <a:latin typeface="Verdana"/>
-                <a:cs typeface="Verdana"/>
-              </a:rPr>
-              <a:t>Воспроизвести проблему, подтвердить решение, измерить задержку и устойчивость.</a:t>
+              <a:rPr lang="ru-RU" sz="1200" b="0">
+                <a:solidFill>
+                  <a:srgbClr val="1A2730"/>
+                </a:solidFill>
+                <a:latin typeface="Verdana"/>
+                <a:cs typeface="Verdana"/>
+              </a:rPr>
+              <a:t>Восстановление соединения, повторная подписка на отчёт после обрыва, диагностические данные.</a:t>
+            </a:r>
+          </a:p>
+        </p:txBody>
+      </p:sp>
+      <p:sp>
+        <p:nvSpPr>
+          <p:cNvPr id="24" name="Shape 24"/>
+          <p:cNvSpPr txBox="1"/>
+          <p:nvPr/>
+        </p:nvSpPr>
+        <p:spPr>
+          <a:xfrm>
+            <a:off x="8979408" y="3017520"/>
+            <a:ext cx="2606040" cy="3017520"/>
+          </a:xfrm>
+          <a:prstGeom prst="roundRect">
+            <a:avLst/>
+          </a:prstGeom>
+          <a:solidFill>
+            <a:srgbClr val="E6F4F1"/>
+          </a:solidFill>
+          <a:ln w="12700">
+            <a:solidFill>
+              <a:srgbClr val="14A085"/>
+            </a:solidFill>
+          </a:ln>
+        </p:spPr>
+        <p:txBody>
+          <a:bodyPr wrap="square" lIns="177800" tIns="177800" rIns="177800" bIns="177800"/>
+          <a:lstStyle/>
+          <a:p>
+            <a:pPr algn="l"/>
+            <a:r>
+              <a:rPr lang="ru-RU" sz="1200" b="1">
+                <a:solidFill>
+                  <a:srgbClr val="1A2730"/>
+                </a:solidFill>
+                <a:latin typeface="Verdana"/>
+                <a:cs typeface="Verdana"/>
+              </a:rPr>
+              <a:t>4. Инфраструктура и испытания</a:t>
+            </a:r>
+          </a:p>
+          <a:p>
+            <a:pPr algn="l"/>
+            <a:r>
+              <a:rPr lang="ru-RU" sz="1200" b="1">
+                <a:solidFill>
+                  <a:srgbClr val="1A2730"/>
+                </a:solidFill>
+                <a:latin typeface="Verdana"/>
+                <a:cs typeface="Verdana"/>
+              </a:rPr>
+              <a:t/>
+            </a:r>
+          </a:p>
+          <a:p>
+            <a:pPr algn="l"/>
+            <a:r>
+              <a:rPr lang="ru-RU" sz="1200" b="1">
+                <a:solidFill>
+                  <a:srgbClr val="1A2730"/>
+                </a:solidFill>
+                <a:latin typeface="Verdana"/>
+                <a:cs typeface="Verdana"/>
+              </a:rPr>
+              <a:t>Воспроизводимый стенд из двух экземпляров и общей точки входа; программа испытаний и оценка.</a:t>
             </a:r>
           </a:p>
         </p:txBody>
@@ -7344,7 +7352,7 @@
                 <a:latin typeface="Verdana"/>
                 <a:cs typeface="Verdana"/>
               </a:rPr>
-              <a:t>Real-time scale-out · 07</a:t>
+              <a:t>В реальном времени · 07</a:t>
             </a:r>
           </a:p>
         </p:txBody>
@@ -8218,7 +8226,7 @@
                 <a:latin typeface="Verdana"/>
                 <a:cs typeface="Verdana"/>
               </a:rPr>
-              <a:t>6.  Управляемый real-time сервис</a:t>
+              <a:t>6.  Управляемый облачный сервис реального времени</a:t>
             </a:r>
           </a:p>
         </p:txBody>
@@ -8374,7 +8382,7 @@
                 <a:latin typeface="Verdana"/>
                 <a:cs typeface="Verdana"/>
               </a:rPr>
-              <a:t>Real-time scale-out · 08</a:t>
+              <a:t>В реальном времени · 08</a:t>
             </a:r>
           </a:p>
         </p:txBody>
@@ -8727,7 +8735,7 @@
                 <a:latin typeface="Verdana"/>
                 <a:cs typeface="Verdana"/>
               </a:rPr>
-              <a:t>Redis backplane</a:t>
+              <a:t>Общий канал (Redis)</a:t>
             </a:r>
           </a:p>
         </p:txBody>
@@ -8972,7 +8980,7 @@
                 <a:latin typeface="Verdana"/>
                 <a:cs typeface="Verdana"/>
               </a:rPr>
-              <a:t>Real-time scale-out · 09</a:t>
+              <a:t>В реальном времени · 09</a:t>
             </a:r>
           </a:p>
         </p:txBody>

--- a/build/pptx/vkr-defense-draft.pptx
+++ b/build/pptx/vkr-defense-draft.pptx
@@ -20,9 +20,6 @@
     <p:sldId id="268" r:id="rId14"/>
     <p:sldId id="269" r:id="rId15"/>
     <p:sldId id="270" r:id="rId16"/>
-    <p:sldId id="271" r:id="rId17"/>
-    <p:sldId id="272" r:id="rId18"/>
-    <p:sldId id="273" r:id="rId19"/>
   </p:sldIdLst>
   <p:sldSz cx="12192000" cy="6858000" type="wide"/>
   <p:notesSz cx="6858000" cy="9144000"/>
@@ -301,7 +298,7 @@
         <p:spPr>
           <a:xfrm>
             <a:off x="594360" y="6510528"/>
-            <a:ext cx="10972800" cy="201168"/>
+            <a:ext cx="7315200" cy="201168"/>
           </a:xfrm>
           <a:prstGeom prst="roundRect">
             <a:avLst/>
@@ -324,7 +321,44 @@
                 <a:latin typeface="Verdana"/>
                 <a:cs typeface="Verdana"/>
               </a:rPr>
-              <a:t>В реальном времени · 01</a:t>
+              <a:t>В реальном времени</a:t>
+            </a:r>
+          </a:p>
+        </p:txBody>
+      </p:sp>
+      <p:sp>
+        <p:nvSpPr>
+          <p:cNvPr id="901" name="Shape 901"/>
+          <p:cNvSpPr txBox="1"/>
+          <p:nvPr/>
+        </p:nvSpPr>
+        <p:spPr>
+          <a:xfrm>
+            <a:off x="4251960" y="6419088"/>
+            <a:ext cx="7315200" cy="292608"/>
+          </a:xfrm>
+          <a:prstGeom prst="roundRect">
+            <a:avLst/>
+          </a:prstGeom>
+          <a:noFill/>
+          <a:ln>
+            <a:noFill/>
+          </a:ln>
+        </p:spPr>
+        <p:txBody>
+          <a:bodyPr wrap="square" lIns="177800" tIns="177800" rIns="177800" bIns="177800"/>
+          <a:lstStyle/>
+          <a:p>
+            <a:pPr algn="r"/>
+            <a:r>
+              <a:rPr lang="ru-RU" sz="1200" b="1">
+                <a:solidFill>
+                  <a:srgbClr val="5E6A75"/>
+                </a:solidFill>
+                <a:latin typeface="Verdana"/>
+                <a:cs typeface="Verdana"/>
+              </a:rPr>
+              <a:t>1/15</a:t>
             </a:r>
           </a:p>
         </p:txBody>
@@ -394,7 +428,7 @@
                 <a:latin typeface="Verdana"/>
                 <a:cs typeface="Verdana"/>
               </a:rPr>
-              <a:t>Что происходит при изменении отчёта</a:t>
+              <a:t>Программная реализация</a:t>
             </a:r>
           </a:p>
         </p:txBody>
@@ -431,7 +465,7 @@
                 <a:latin typeface="Verdana"/>
                 <a:cs typeface="Verdana"/>
               </a:rPr>
-              <a:t>Шесть шагов от действия пользователя до клиента на другом узле (§3.3, рис. 6 ВКР)</a:t>
+              <a:t>Пять направлений работ (§4.1 ВКР)</a:t>
             </a:r>
           </a:p>
         </p:txBody>
@@ -444,8 +478,8 @@
         </p:nvSpPr>
         <p:spPr>
           <a:xfrm>
-            <a:off x="502920" y="1783080"/>
-            <a:ext cx="1783080" cy="3840480"/>
+            <a:off x="502920" y="1645920"/>
+            <a:ext cx="2194560" cy="4114800"/>
           </a:xfrm>
           <a:prstGeom prst="roundRect">
             <a:avLst/>
@@ -465,20 +499,20 @@
           <a:p>
             <a:pPr algn="l"/>
             <a:r>
-              <a:rPr lang="ru-RU" sz="1200" b="0">
-                <a:solidFill>
-                  <a:srgbClr val="1A2730"/>
-                </a:solidFill>
-                <a:latin typeface="Verdana"/>
-                <a:cs typeface="Verdana"/>
-              </a:rPr>
-              <a:t>1. Действие пользователя</a:t>
-            </a:r>
-          </a:p>
-          <a:p>
-            <a:pPr algn="l"/>
-            <a:r>
-              <a:rPr lang="ru-RU" sz="1200" b="0">
+              <a:rPr lang="ru-RU" sz="1300" b="0">
+                <a:solidFill>
+                  <a:srgbClr val="1A2730"/>
+                </a:solidFill>
+                <a:latin typeface="Verdana"/>
+                <a:cs typeface="Verdana"/>
+              </a:rPr>
+              <a:t>1. Серверная конфигурация</a:t>
+            </a:r>
+          </a:p>
+          <a:p>
+            <a:pPr algn="l"/>
+            <a:r>
+              <a:rPr lang="ru-RU" sz="1300" b="0">
                 <a:solidFill>
                   <a:srgbClr val="1A2730"/>
                 </a:solidFill>
@@ -491,14 +525,14 @@
           <a:p>
             <a:pPr algn="l"/>
             <a:r>
-              <a:rPr lang="ru-RU" sz="1200" b="0">
-                <a:solidFill>
-                  <a:srgbClr val="1A2730"/>
-                </a:solidFill>
-                <a:latin typeface="Verdana"/>
-                <a:cs typeface="Verdana"/>
-              </a:rPr>
-              <a:t>Клиент A меняет заголовок отчёта.</a:t>
+              <a:rPr lang="ru-RU" sz="1300" b="0">
+                <a:solidFill>
+                  <a:srgbClr val="1A2730"/>
+                </a:solidFill>
+                <a:latin typeface="Verdana"/>
+                <a:cs typeface="Verdana"/>
+              </a:rPr>
+              <a:t>Включаемое через переменную окружения подключение общего канала событий.</a:t>
             </a:r>
           </a:p>
         </p:txBody>
@@ -511,8 +545,8 @@
         </p:nvSpPr>
         <p:spPr>
           <a:xfrm>
-            <a:off x="2423160" y="1783080"/>
-            <a:ext cx="1783080" cy="3840480"/>
+            <a:off x="2743200" y="1645920"/>
+            <a:ext cx="2194560" cy="4114800"/>
           </a:xfrm>
           <a:prstGeom prst="roundRect">
             <a:avLst/>
@@ -532,20 +566,20 @@
           <a:p>
             <a:pPr algn="l"/>
             <a:r>
-              <a:rPr lang="ru-RU" sz="1200" b="0">
-                <a:solidFill>
-                  <a:srgbClr val="1A2730"/>
-                </a:solidFill>
-                <a:latin typeface="Verdana"/>
-                <a:cs typeface="Verdana"/>
-              </a:rPr>
-              <a:t>2. HTTP-запрос</a:t>
-            </a:r>
-          </a:p>
-          <a:p>
-            <a:pPr algn="l"/>
-            <a:r>
-              <a:rPr lang="ru-RU" sz="1200" b="0">
+              <a:rPr lang="ru-RU" sz="1300" b="0">
+                <a:solidFill>
+                  <a:srgbClr val="1A2730"/>
+                </a:solidFill>
+                <a:latin typeface="Verdana"/>
+                <a:cs typeface="Verdana"/>
+              </a:rPr>
+              <a:t>2. Хаб и отправка событий</a:t>
+            </a:r>
+          </a:p>
+          <a:p>
+            <a:pPr algn="l"/>
+            <a:r>
+              <a:rPr lang="ru-RU" sz="1300" b="0">
                 <a:solidFill>
                   <a:srgbClr val="1A2730"/>
                 </a:solidFill>
@@ -558,14 +592,14 @@
           <a:p>
             <a:pPr algn="l"/>
             <a:r>
-              <a:rPr lang="ru-RU" sz="1200" b="0">
-                <a:solidFill>
-                  <a:srgbClr val="1A2730"/>
-                </a:solidFill>
-                <a:latin typeface="Verdana"/>
-                <a:cs typeface="Verdana"/>
-              </a:rPr>
-              <a:t>Через общую точку входа запрос попадает на один из узлов — узел 1.</a:t>
+              <a:rPr lang="ru-RU" sz="1300" b="0">
+                <a:solidFill>
+                  <a:srgbClr val="1A2730"/>
+                </a:solidFill>
+                <a:latin typeface="Verdana"/>
+                <a:cs typeface="Verdana"/>
+              </a:rPr>
+              <a:t>Идентификатор узла, единая точка отправки, диагностика подключения.</a:t>
             </a:r>
           </a:p>
         </p:txBody>
@@ -578,8 +612,8 @@
         </p:nvSpPr>
         <p:spPr>
           <a:xfrm>
-            <a:off x="4343400" y="1783080"/>
-            <a:ext cx="1783080" cy="3840480"/>
+            <a:off x="4983480" y="1645920"/>
+            <a:ext cx="2194560" cy="4114800"/>
           </a:xfrm>
           <a:prstGeom prst="roundRect">
             <a:avLst/>
@@ -599,20 +633,20 @@
           <a:p>
             <a:pPr algn="l"/>
             <a:r>
-              <a:rPr lang="ru-RU" sz="1200" b="0">
-                <a:solidFill>
-                  <a:srgbClr val="1A2730"/>
-                </a:solidFill>
-                <a:latin typeface="Verdana"/>
-                <a:cs typeface="Verdana"/>
-              </a:rPr>
-              <a:t>3. Сохранение в базе</a:t>
-            </a:r>
-          </a:p>
-          <a:p>
-            <a:pPr algn="l"/>
-            <a:r>
-              <a:rPr lang="ru-RU" sz="1200" b="0">
+              <a:rPr lang="ru-RU" sz="1300" b="0">
+                <a:solidFill>
+                  <a:srgbClr val="1A2730"/>
+                </a:solidFill>
+                <a:latin typeface="Verdana"/>
+                <a:cs typeface="Verdana"/>
+              </a:rPr>
+              <a:t>3. Клиентская часть</a:t>
+            </a:r>
+          </a:p>
+          <a:p>
+            <a:pPr algn="l"/>
+            <a:r>
+              <a:rPr lang="ru-RU" sz="1300" b="0">
                 <a:solidFill>
                   <a:srgbClr val="1A2730"/>
                 </a:solidFill>
@@ -625,14 +659,14 @@
           <a:p>
             <a:pPr algn="l"/>
             <a:r>
-              <a:rPr lang="ru-RU" sz="1200" b="0">
-                <a:solidFill>
-                  <a:srgbClr val="1A2730"/>
-                </a:solidFill>
-                <a:latin typeface="Verdana"/>
-                <a:cs typeface="Verdana"/>
-              </a:rPr>
-              <a:t>Изменение фиксируется в PostgreSQL — это источник истины.</a:t>
+              <a:rPr lang="ru-RU" sz="1300" b="0">
+                <a:solidFill>
+                  <a:srgbClr val="1A2730"/>
+                </a:solidFill>
+                <a:latin typeface="Verdana"/>
+                <a:cs typeface="Verdana"/>
+              </a:rPr>
+              <a:t>Автоматическое переподключение и повторная подписка на текущий отчёт.</a:t>
             </a:r>
           </a:p>
         </p:txBody>
@@ -645,8 +679,8 @@
         </p:nvSpPr>
         <p:spPr>
           <a:xfrm>
-            <a:off x="6263640" y="1783080"/>
-            <a:ext cx="1783080" cy="3840480"/>
+            <a:off x="7223760" y="1645920"/>
+            <a:ext cx="2194560" cy="4114800"/>
           </a:xfrm>
           <a:prstGeom prst="roundRect">
             <a:avLst/>
@@ -666,20 +700,20 @@
           <a:p>
             <a:pPr algn="l"/>
             <a:r>
-              <a:rPr lang="ru-RU" sz="1200" b="1">
-                <a:solidFill>
-                  <a:srgbClr val="1A2730"/>
-                </a:solidFill>
-                <a:latin typeface="Verdana"/>
-                <a:cs typeface="Verdana"/>
-              </a:rPr>
-              <a:t>4. Публикация события</a:t>
-            </a:r>
-          </a:p>
-          <a:p>
-            <a:pPr algn="l"/>
-            <a:r>
-              <a:rPr lang="ru-RU" sz="1200" b="1">
+              <a:rPr lang="ru-RU" sz="1300" b="1">
+                <a:solidFill>
+                  <a:srgbClr val="1A2730"/>
+                </a:solidFill>
+                <a:latin typeface="Verdana"/>
+                <a:cs typeface="Verdana"/>
+              </a:rPr>
+              <a:t>4. Инфраструктура стенда</a:t>
+            </a:r>
+          </a:p>
+          <a:p>
+            <a:pPr algn="l"/>
+            <a:r>
+              <a:rPr lang="ru-RU" sz="1300" b="1">
                 <a:solidFill>
                   <a:srgbClr val="1A2730"/>
                 </a:solidFill>
@@ -692,14 +726,14 @@
           <a:p>
             <a:pPr algn="l"/>
             <a:r>
-              <a:rPr lang="ru-RU" sz="1200" b="1">
-                <a:solidFill>
-                  <a:srgbClr val="1A2730"/>
-                </a:solidFill>
-                <a:latin typeface="Verdana"/>
-                <a:cs typeface="Verdana"/>
-              </a:rPr>
-              <a:t>Сервис формирует событие изменения отчёта и отправляет его в группу.</a:t>
+              <a:rPr lang="ru-RU" sz="1300" b="1">
+                <a:solidFill>
+                  <a:srgbClr val="1A2730"/>
+                </a:solidFill>
+                <a:latin typeface="Verdana"/>
+                <a:cs typeface="Verdana"/>
+              </a:rPr>
+              <a:t>Два экземпляра серверного сервиса, общая точка входа, общая база и общий канал.</a:t>
             </a:r>
           </a:p>
         </p:txBody>
@@ -712,8 +746,8 @@
         </p:nvSpPr>
         <p:spPr>
           <a:xfrm>
-            <a:off x="8183880" y="1783080"/>
-            <a:ext cx="1783080" cy="3840480"/>
+            <a:off x="9464040" y="1645920"/>
+            <a:ext cx="2194560" cy="4114800"/>
           </a:xfrm>
           <a:prstGeom prst="roundRect">
             <a:avLst/>
@@ -733,20 +767,20 @@
           <a:p>
             <a:pPr algn="l"/>
             <a:r>
-              <a:rPr lang="ru-RU" sz="1200" b="1">
-                <a:solidFill>
-                  <a:srgbClr val="1A2730"/>
-                </a:solidFill>
-                <a:latin typeface="Verdana"/>
-                <a:cs typeface="Verdana"/>
-              </a:rPr>
-              <a:t>5. Межузловая доставка</a:t>
-            </a:r>
-          </a:p>
-          <a:p>
-            <a:pPr algn="l"/>
-            <a:r>
-              <a:rPr lang="ru-RU" sz="1200" b="1">
+              <a:rPr lang="ru-RU" sz="1300" b="1">
+                <a:solidFill>
+                  <a:srgbClr val="1A2730"/>
+                </a:solidFill>
+                <a:latin typeface="Verdana"/>
+                <a:cs typeface="Verdana"/>
+              </a:rPr>
+              <a:t>5. Проверочный клиент</a:t>
+            </a:r>
+          </a:p>
+          <a:p>
+            <a:pPr algn="l"/>
+            <a:r>
+              <a:rPr lang="ru-RU" sz="1300" b="1">
                 <a:solidFill>
                   <a:srgbClr val="1A2730"/>
                 </a:solidFill>
@@ -759,14 +793,14 @@
           <a:p>
             <a:pPr algn="l"/>
             <a:r>
-              <a:rPr lang="ru-RU" sz="1200" b="1">
-                <a:solidFill>
-                  <a:srgbClr val="1A2730"/>
-                </a:solidFill>
-                <a:latin typeface="Verdana"/>
-                <a:cs typeface="Verdana"/>
-              </a:rPr>
-              <a:t>Через общий канал событие становится доступным узлу 2.</a:t>
+              <a:rPr lang="ru-RU" sz="1300" b="1">
+                <a:solidFill>
+                  <a:srgbClr val="1A2730"/>
+                </a:solidFill>
+                <a:latin typeface="Verdana"/>
+                <a:cs typeface="Verdana"/>
+              </a:rPr>
+              <a:t>Отдельный скрипт, который подключается к двум узлам и измеряет задержку доставки.</a:t>
             </a:r>
           </a:p>
         </p:txBody>
@@ -779,75 +813,8 @@
         </p:nvSpPr>
         <p:spPr>
           <a:xfrm>
-            <a:off x="10104120" y="1783080"/>
-            <a:ext cx="1783080" cy="3840480"/>
-          </a:xfrm>
-          <a:prstGeom prst="roundRect">
-            <a:avLst/>
-          </a:prstGeom>
-          <a:solidFill>
-            <a:srgbClr val="E6F4F1"/>
-          </a:solidFill>
-          <a:ln w="12700">
-            <a:solidFill>
-              <a:srgbClr val="14A085"/>
-            </a:solidFill>
-          </a:ln>
-        </p:spPr>
-        <p:txBody>
-          <a:bodyPr wrap="square" lIns="177800" tIns="177800" rIns="177800" bIns="177800"/>
-          <a:lstStyle/>
-          <a:p>
-            <a:pPr algn="l"/>
-            <a:r>
-              <a:rPr lang="ru-RU" sz="1200" b="1">
-                <a:solidFill>
-                  <a:srgbClr val="1A2730"/>
-                </a:solidFill>
-                <a:latin typeface="Verdana"/>
-                <a:cs typeface="Verdana"/>
-              </a:rPr>
-              <a:t>6. Клиент B получает</a:t>
-            </a:r>
-          </a:p>
-          <a:p>
-            <a:pPr algn="l"/>
-            <a:r>
-              <a:rPr lang="ru-RU" sz="1200" b="1">
-                <a:solidFill>
-                  <a:srgbClr val="1A2730"/>
-                </a:solidFill>
-                <a:latin typeface="Verdana"/>
-                <a:cs typeface="Verdana"/>
-              </a:rPr>
-              <a:t/>
-            </a:r>
-          </a:p>
-          <a:p>
-            <a:pPr algn="l"/>
-            <a:r>
-              <a:rPr lang="ru-RU" sz="1200" b="1">
-                <a:solidFill>
-                  <a:srgbClr val="1A2730"/>
-                </a:solidFill>
-                <a:latin typeface="Verdana"/>
-                <a:cs typeface="Verdana"/>
-              </a:rPr>
-              <a:t>Клиент на другом узле получает то же событие.</a:t>
-            </a:r>
-          </a:p>
-        </p:txBody>
-      </p:sp>
-      <p:sp>
-        <p:nvSpPr>
-          <p:cNvPr id="26" name="Shape 26"/>
-          <p:cNvSpPr txBox="1"/>
-          <p:nvPr/>
-        </p:nvSpPr>
-        <p:spPr>
-          <a:xfrm>
-            <a:off x="502920" y="5852160"/>
-            <a:ext cx="11384280" cy="411480"/>
+            <a:off x="502920" y="5989320"/>
+            <a:ext cx="11247120" cy="320040"/>
           </a:xfrm>
           <a:prstGeom prst="roundRect">
             <a:avLst/>
@@ -863,14 +830,14 @@
           <a:p>
             <a:pPr algn="ctr"/>
             <a:r>
-              <a:rPr lang="ru-RU" sz="1200" b="0">
+              <a:rPr lang="ru-RU" sz="1100" b="0">
                 <a:solidFill>
                   <a:srgbClr val="5E6A75"/>
                 </a:solidFill>
                 <a:latin typeface="Verdana"/>
                 <a:cs typeface="Verdana"/>
               </a:rPr>
-              <a:t>REST остаётся источником команд и состояния, real-time — каналом распространения изменений.</a:t>
+              <a:t>Стек: ASP.NET Core, SignalR, Redis, React, TypeScript, Node.js, nginx, Docker Compose</a:t>
             </a:r>
           </a:p>
         </p:txBody>
@@ -884,7 +851,7 @@
         <p:spPr>
           <a:xfrm>
             <a:off x="594360" y="6510528"/>
-            <a:ext cx="10972800" cy="201168"/>
+            <a:ext cx="7315200" cy="201168"/>
           </a:xfrm>
           <a:prstGeom prst="roundRect">
             <a:avLst/>
@@ -907,7 +874,44 @@
                 <a:latin typeface="Verdana"/>
                 <a:cs typeface="Verdana"/>
               </a:rPr>
-              <a:t>В реальном времени · 10</a:t>
+              <a:t>В реальном времени</a:t>
+            </a:r>
+          </a:p>
+        </p:txBody>
+      </p:sp>
+      <p:sp>
+        <p:nvSpPr>
+          <p:cNvPr id="901" name="Shape 901"/>
+          <p:cNvSpPr txBox="1"/>
+          <p:nvPr/>
+        </p:nvSpPr>
+        <p:spPr>
+          <a:xfrm>
+            <a:off x="4251960" y="6419088"/>
+            <a:ext cx="7315200" cy="292608"/>
+          </a:xfrm>
+          <a:prstGeom prst="roundRect">
+            <a:avLst/>
+          </a:prstGeom>
+          <a:noFill/>
+          <a:ln>
+            <a:noFill/>
+          </a:ln>
+        </p:spPr>
+        <p:txBody>
+          <a:bodyPr wrap="square" lIns="177800" tIns="177800" rIns="177800" bIns="177800"/>
+          <a:lstStyle/>
+          <a:p>
+            <a:pPr algn="r"/>
+            <a:r>
+              <a:rPr lang="ru-RU" sz="1200" b="1">
+                <a:solidFill>
+                  <a:srgbClr val="5E6A75"/>
+                </a:solidFill>
+                <a:latin typeface="Verdana"/>
+                <a:cs typeface="Verdana"/>
+              </a:rPr>
+              <a:t>10/15</a:t>
             </a:r>
           </a:p>
         </p:txBody>
@@ -977,7 +981,7 @@
                 <a:latin typeface="Verdana"/>
                 <a:cs typeface="Verdana"/>
               </a:rPr>
-              <a:t>Программная реализация</a:t>
+              <a:t>Стенд испытаний</a:t>
             </a:r>
           </a:p>
         </p:txBody>
@@ -1014,7 +1018,7 @@
                 <a:latin typeface="Verdana"/>
                 <a:cs typeface="Verdana"/>
               </a:rPr>
-              <a:t>Пять направлений работ (§4.1 ВКР)</a:t>
+              <a:t>Воспроизводимое локальное окружение из шести компонентов (§4.5 ВКР)</a:t>
             </a:r>
           </a:p>
         </p:txBody>
@@ -1027,8 +1031,90 @@
         </p:nvSpPr>
         <p:spPr>
           <a:xfrm>
-            <a:off x="502920" y="1645920"/>
-            <a:ext cx="2194560" cy="4114800"/>
+            <a:off x="3749040" y="1508760"/>
+            <a:ext cx="4663440" cy="1005840"/>
+          </a:xfrm>
+          <a:prstGeom prst="roundRect">
+            <a:avLst/>
+          </a:prstGeom>
+          <a:solidFill>
+            <a:srgbClr val="EEF0FE"/>
+          </a:solidFill>
+          <a:ln w="12700">
+            <a:solidFill>
+              <a:srgbClr val="6366F1"/>
+            </a:solidFill>
+          </a:ln>
+        </p:spPr>
+        <p:txBody>
+          <a:bodyPr wrap="square" lIns="177800" tIns="177800" rIns="177800" bIns="177800"/>
+          <a:lstStyle/>
+          <a:p>
+            <a:pPr algn="ctr"/>
+            <a:r>
+              <a:rPr lang="ru-RU" sz="1400" b="1">
+                <a:solidFill>
+                  <a:srgbClr val="1A2730"/>
+                </a:solidFill>
+                <a:latin typeface="Verdana"/>
+                <a:cs typeface="Verdana"/>
+              </a:rPr>
+              <a:t>Проверочный клиент</a:t>
+            </a:r>
+          </a:p>
+        </p:txBody>
+      </p:sp>
+      <p:sp>
+        <p:nvSpPr>
+          <p:cNvPr id="21" name="Shape 21"/>
+          <p:cNvSpPr txBox="1"/>
+          <p:nvPr/>
+        </p:nvSpPr>
+        <p:spPr>
+          <a:xfrm>
+            <a:off x="3749040" y="2697480"/>
+            <a:ext cx="4663440" cy="1005840"/>
+          </a:xfrm>
+          <a:prstGeom prst="roundRect">
+            <a:avLst/>
+          </a:prstGeom>
+          <a:solidFill>
+            <a:srgbClr val="E6F4F1"/>
+          </a:solidFill>
+          <a:ln w="12700">
+            <a:solidFill>
+              <a:srgbClr val="14A085"/>
+            </a:solidFill>
+          </a:ln>
+        </p:spPr>
+        <p:txBody>
+          <a:bodyPr wrap="square" lIns="177800" tIns="177800" rIns="177800" bIns="177800"/>
+          <a:lstStyle/>
+          <a:p>
+            <a:pPr algn="ctr"/>
+            <a:r>
+              <a:rPr lang="ru-RU" sz="1400" b="1">
+                <a:solidFill>
+                  <a:srgbClr val="1A2730"/>
+                </a:solidFill>
+                <a:latin typeface="Verdana"/>
+                <a:cs typeface="Verdana"/>
+              </a:rPr>
+              <a:t>Общая точка входа (nginx)</a:t>
+            </a:r>
+          </a:p>
+        </p:txBody>
+      </p:sp>
+      <p:sp>
+        <p:nvSpPr>
+          <p:cNvPr id="22" name="Shape 22"/>
+          <p:cNvSpPr txBox="1"/>
+          <p:nvPr/>
+        </p:nvSpPr>
+        <p:spPr>
+          <a:xfrm>
+            <a:off x="868680" y="3886200"/>
+            <a:ext cx="3840480" cy="1005840"/>
           </a:xfrm>
           <a:prstGeom prst="roundRect">
             <a:avLst/>
@@ -1038,6 +1124,88 @@
           </a:solidFill>
           <a:ln w="12700">
             <a:solidFill>
+              <a:srgbClr val="14A085"/>
+            </a:solidFill>
+          </a:ln>
+        </p:spPr>
+        <p:txBody>
+          <a:bodyPr wrap="square" lIns="177800" tIns="177800" rIns="177800" bIns="177800"/>
+          <a:lstStyle/>
+          <a:p>
+            <a:pPr algn="ctr"/>
+            <a:r>
+              <a:rPr lang="ru-RU" sz="1400" b="1">
+                <a:solidFill>
+                  <a:srgbClr val="1A2730"/>
+                </a:solidFill>
+                <a:latin typeface="Verdana"/>
+                <a:cs typeface="Verdana"/>
+              </a:rPr>
+              <a:t>Серверный сервис №1</a:t>
+            </a:r>
+          </a:p>
+        </p:txBody>
+      </p:sp>
+      <p:sp>
+        <p:nvSpPr>
+          <p:cNvPr id="23" name="Shape 23"/>
+          <p:cNvSpPr txBox="1"/>
+          <p:nvPr/>
+        </p:nvSpPr>
+        <p:spPr>
+          <a:xfrm>
+            <a:off x="7452360" y="3886200"/>
+            <a:ext cx="3840480" cy="1005840"/>
+          </a:xfrm>
+          <a:prstGeom prst="roundRect">
+            <a:avLst/>
+          </a:prstGeom>
+          <a:solidFill>
+            <a:srgbClr val="FFFFFF"/>
+          </a:solidFill>
+          <a:ln w="12700">
+            <a:solidFill>
+              <a:srgbClr val="14A085"/>
+            </a:solidFill>
+          </a:ln>
+        </p:spPr>
+        <p:txBody>
+          <a:bodyPr wrap="square" lIns="177800" tIns="177800" rIns="177800" bIns="177800"/>
+          <a:lstStyle/>
+          <a:p>
+            <a:pPr algn="ctr"/>
+            <a:r>
+              <a:rPr lang="ru-RU" sz="1400" b="1">
+                <a:solidFill>
+                  <a:srgbClr val="1A2730"/>
+                </a:solidFill>
+                <a:latin typeface="Verdana"/>
+                <a:cs typeface="Verdana"/>
+              </a:rPr>
+              <a:t>Серверный сервис №2</a:t>
+            </a:r>
+          </a:p>
+        </p:txBody>
+      </p:sp>
+      <p:sp>
+        <p:nvSpPr>
+          <p:cNvPr id="24" name="Shape 24"/>
+          <p:cNvSpPr txBox="1"/>
+          <p:nvPr/>
+        </p:nvSpPr>
+        <p:spPr>
+          <a:xfrm>
+            <a:off x="868680" y="5074920"/>
+            <a:ext cx="3840480" cy="1005840"/>
+          </a:xfrm>
+          <a:prstGeom prst="roundRect">
+            <a:avLst/>
+          </a:prstGeom>
+          <a:solidFill>
+            <a:srgbClr val="FFFFFF"/>
+          </a:solidFill>
+          <a:ln w="12700">
+            <a:solidFill>
               <a:srgbClr val="E3E7EB"/>
             </a:solidFill>
           </a:ln>
@@ -1046,7 +1214,7 @@
           <a:bodyPr wrap="square" lIns="177800" tIns="177800" rIns="177800" bIns="177800"/>
           <a:lstStyle/>
           <a:p>
-            <a:pPr algn="l"/>
+            <a:pPr algn="ctr"/>
             <a:r>
               <a:rPr lang="ru-RU" sz="1300" b="0">
                 <a:solidFill>
@@ -1055,199 +1223,39 @@
                 <a:latin typeface="Verdana"/>
                 <a:cs typeface="Verdana"/>
               </a:rPr>
-              <a:t>1. Серверная конфигурация</a:t>
-            </a:r>
-          </a:p>
-          <a:p>
-            <a:pPr algn="l"/>
-            <a:r>
-              <a:rPr lang="ru-RU" sz="1300" b="0">
-                <a:solidFill>
-                  <a:srgbClr val="1A2730"/>
-                </a:solidFill>
-                <a:latin typeface="Verdana"/>
-                <a:cs typeface="Verdana"/>
-              </a:rPr>
-              <a:t/>
-            </a:r>
-          </a:p>
-          <a:p>
-            <a:pPr algn="l"/>
-            <a:r>
-              <a:rPr lang="ru-RU" sz="1300" b="0">
-                <a:solidFill>
-                  <a:srgbClr val="1A2730"/>
-                </a:solidFill>
-                <a:latin typeface="Verdana"/>
-                <a:cs typeface="Verdana"/>
-              </a:rPr>
-              <a:t>Включаемое через переменную окружения подключение общего канала событий.</a:t>
-            </a:r>
-          </a:p>
-        </p:txBody>
-      </p:sp>
-      <p:sp>
-        <p:nvSpPr>
-          <p:cNvPr id="21" name="Shape 21"/>
-          <p:cNvSpPr txBox="1"/>
-          <p:nvPr/>
-        </p:nvSpPr>
-        <p:spPr>
-          <a:xfrm>
-            <a:off x="2743200" y="1645920"/>
-            <a:ext cx="2194560" cy="4114800"/>
-          </a:xfrm>
-          <a:prstGeom prst="roundRect">
-            <a:avLst/>
-          </a:prstGeom>
-          <a:solidFill>
-            <a:srgbClr val="FFFFFF"/>
-          </a:solidFill>
-          <a:ln w="12700">
-            <a:solidFill>
-              <a:srgbClr val="E3E7EB"/>
-            </a:solidFill>
-          </a:ln>
-        </p:spPr>
-        <p:txBody>
-          <a:bodyPr wrap="square" lIns="177800" tIns="177800" rIns="177800" bIns="177800"/>
-          <a:lstStyle/>
-          <a:p>
-            <a:pPr algn="l"/>
-            <a:r>
-              <a:rPr lang="ru-RU" sz="1300" b="0">
-                <a:solidFill>
-                  <a:srgbClr val="1A2730"/>
-                </a:solidFill>
-                <a:latin typeface="Verdana"/>
-                <a:cs typeface="Verdana"/>
-              </a:rPr>
-              <a:t>2. Хаб и отправка событий</a:t>
-            </a:r>
-          </a:p>
-          <a:p>
-            <a:pPr algn="l"/>
-            <a:r>
-              <a:rPr lang="ru-RU" sz="1300" b="0">
-                <a:solidFill>
-                  <a:srgbClr val="1A2730"/>
-                </a:solidFill>
-                <a:latin typeface="Verdana"/>
-                <a:cs typeface="Verdana"/>
-              </a:rPr>
-              <a:t/>
-            </a:r>
-          </a:p>
-          <a:p>
-            <a:pPr algn="l"/>
-            <a:r>
-              <a:rPr lang="ru-RU" sz="1300" b="0">
-                <a:solidFill>
-                  <a:srgbClr val="1A2730"/>
-                </a:solidFill>
-                <a:latin typeface="Verdana"/>
-                <a:cs typeface="Verdana"/>
-              </a:rPr>
-              <a:t>Идентификатор узла, единая точка отправки, диагностика подключения.</a:t>
-            </a:r>
-          </a:p>
-        </p:txBody>
-      </p:sp>
-      <p:sp>
-        <p:nvSpPr>
-          <p:cNvPr id="22" name="Shape 22"/>
-          <p:cNvSpPr txBox="1"/>
-          <p:nvPr/>
-        </p:nvSpPr>
-        <p:spPr>
-          <a:xfrm>
-            <a:off x="4983480" y="1645920"/>
-            <a:ext cx="2194560" cy="4114800"/>
-          </a:xfrm>
-          <a:prstGeom prst="roundRect">
-            <a:avLst/>
-          </a:prstGeom>
-          <a:solidFill>
-            <a:srgbClr val="FFFFFF"/>
-          </a:solidFill>
-          <a:ln w="12700">
-            <a:solidFill>
-              <a:srgbClr val="E3E7EB"/>
-            </a:solidFill>
-          </a:ln>
-        </p:spPr>
-        <p:txBody>
-          <a:bodyPr wrap="square" lIns="177800" tIns="177800" rIns="177800" bIns="177800"/>
-          <a:lstStyle/>
-          <a:p>
-            <a:pPr algn="l"/>
-            <a:r>
-              <a:rPr lang="ru-RU" sz="1300" b="0">
-                <a:solidFill>
-                  <a:srgbClr val="1A2730"/>
-                </a:solidFill>
-                <a:latin typeface="Verdana"/>
-                <a:cs typeface="Verdana"/>
-              </a:rPr>
-              <a:t>3. Клиентская часть</a:t>
-            </a:r>
-          </a:p>
-          <a:p>
-            <a:pPr algn="l"/>
-            <a:r>
-              <a:rPr lang="ru-RU" sz="1300" b="0">
-                <a:solidFill>
-                  <a:srgbClr val="1A2730"/>
-                </a:solidFill>
-                <a:latin typeface="Verdana"/>
-                <a:cs typeface="Verdana"/>
-              </a:rPr>
-              <a:t/>
-            </a:r>
-          </a:p>
-          <a:p>
-            <a:pPr algn="l"/>
-            <a:r>
-              <a:rPr lang="ru-RU" sz="1300" b="0">
-                <a:solidFill>
-                  <a:srgbClr val="1A2730"/>
-                </a:solidFill>
-                <a:latin typeface="Verdana"/>
-                <a:cs typeface="Verdana"/>
-              </a:rPr>
-              <a:t>Автоматическое переподключение и повторная подписка на текущий отчёт.</a:t>
-            </a:r>
-          </a:p>
-        </p:txBody>
-      </p:sp>
-      <p:sp>
-        <p:nvSpPr>
-          <p:cNvPr id="23" name="Shape 23"/>
-          <p:cNvSpPr txBox="1"/>
-          <p:nvPr/>
-        </p:nvSpPr>
-        <p:spPr>
-          <a:xfrm>
-            <a:off x="7223760" y="1645920"/>
-            <a:ext cx="2194560" cy="4114800"/>
-          </a:xfrm>
-          <a:prstGeom prst="roundRect">
-            <a:avLst/>
-          </a:prstGeom>
-          <a:solidFill>
-            <a:srgbClr val="E6F4F1"/>
-          </a:solidFill>
-          <a:ln w="12700">
-            <a:solidFill>
-              <a:srgbClr val="14A085"/>
-            </a:solidFill>
-          </a:ln>
-        </p:spPr>
-        <p:txBody>
-          <a:bodyPr wrap="square" lIns="177800" tIns="177800" rIns="177800" bIns="177800"/>
-          <a:lstStyle/>
-          <a:p>
-            <a:pPr algn="l"/>
+              <a:t>Общая база (PostgreSQL)</a:t>
+            </a:r>
+          </a:p>
+        </p:txBody>
+      </p:sp>
+      <p:sp>
+        <p:nvSpPr>
+          <p:cNvPr id="25" name="Shape 25"/>
+          <p:cNvSpPr txBox="1"/>
+          <p:nvPr/>
+        </p:nvSpPr>
+        <p:spPr>
+          <a:xfrm>
+            <a:off x="7452360" y="5074920"/>
+            <a:ext cx="3840480" cy="1005840"/>
+          </a:xfrm>
+          <a:prstGeom prst="roundRect">
+            <a:avLst/>
+          </a:prstGeom>
+          <a:solidFill>
+            <a:srgbClr val="EEF0FE"/>
+          </a:solidFill>
+          <a:ln w="12700">
+            <a:solidFill>
+              <a:srgbClr val="6366F1"/>
+            </a:solidFill>
+          </a:ln>
+        </p:spPr>
+        <p:txBody>
+          <a:bodyPr wrap="square" lIns="177800" tIns="177800" rIns="177800" bIns="177800"/>
+          <a:lstStyle/>
+          <a:p>
+            <a:pPr algn="ctr"/>
             <a:r>
               <a:rPr lang="ru-RU" sz="1300" b="1">
                 <a:solidFill>
@@ -1256,114 +1264,175 @@
                 <a:latin typeface="Verdana"/>
                 <a:cs typeface="Verdana"/>
               </a:rPr>
-              <a:t>4. Инфраструктура стенда</a:t>
-            </a:r>
-          </a:p>
-          <a:p>
-            <a:pPr algn="l"/>
-            <a:r>
-              <a:rPr lang="ru-RU" sz="1300" b="1">
-                <a:solidFill>
-                  <a:srgbClr val="1A2730"/>
-                </a:solidFill>
-                <a:latin typeface="Verdana"/>
-                <a:cs typeface="Verdana"/>
-              </a:rPr>
-              <a:t/>
-            </a:r>
-          </a:p>
-          <a:p>
-            <a:pPr algn="l"/>
-            <a:r>
-              <a:rPr lang="ru-RU" sz="1300" b="1">
-                <a:solidFill>
-                  <a:srgbClr val="1A2730"/>
-                </a:solidFill>
-                <a:latin typeface="Verdana"/>
-                <a:cs typeface="Verdana"/>
-              </a:rPr>
-              <a:t>Два экземпляра серверного сервиса, общая точка входа, общая база и общий канал.</a:t>
-            </a:r>
-          </a:p>
-        </p:txBody>
-      </p:sp>
-      <p:sp>
-        <p:nvSpPr>
-          <p:cNvPr id="24" name="Shape 24"/>
-          <p:cNvSpPr txBox="1"/>
-          <p:nvPr/>
-        </p:nvSpPr>
-        <p:spPr>
-          <a:xfrm>
-            <a:off x="9464040" y="1645920"/>
-            <a:ext cx="2194560" cy="4114800"/>
-          </a:xfrm>
-          <a:prstGeom prst="roundRect">
-            <a:avLst/>
-          </a:prstGeom>
-          <a:solidFill>
-            <a:srgbClr val="EEF0FE"/>
-          </a:solidFill>
-          <a:ln w="12700">
+              <a:t>Общий канал событий (Redis)</a:t>
+            </a:r>
+          </a:p>
+        </p:txBody>
+      </p:sp>
+      <p:cxnSp>
+        <p:nvCxnSpPr>
+          <p:cNvPr id="70" name="Connector 70"/>
+          <p:cNvCxnSpPr/>
+          <p:nvPr/>
+        </p:nvCxnSpPr>
+        <p:spPr>
+          <a:xfrm flipH="0" flipV="0">
+            <a:off x="6080760" y="2514600"/>
+            <a:ext cx="9144" cy="182880"/>
+          </a:xfrm>
+          <a:prstGeom prst="straightConnector1">
+            <a:avLst/>
+          </a:prstGeom>
+          <a:ln w="15875" cap="flat">
+            <a:solidFill>
+              <a:srgbClr val="5E6A75"/>
+            </a:solidFill>
+            <a:tailEnd type="triangle"/>
+          </a:ln>
+        </p:spPr>
+      </p:cxnSp>
+      <p:cxnSp>
+        <p:nvCxnSpPr>
+          <p:cNvPr id="71" name="Connector 71"/>
+          <p:cNvCxnSpPr/>
+          <p:nvPr/>
+        </p:nvCxnSpPr>
+        <p:spPr>
+          <a:xfrm flipH="1" flipV="0">
+            <a:off x="2788920" y="3703320"/>
+            <a:ext cx="2240280" cy="182880"/>
+          </a:xfrm>
+          <a:prstGeom prst="straightConnector1">
+            <a:avLst/>
+          </a:prstGeom>
+          <a:ln w="15875" cap="flat">
+            <a:solidFill>
+              <a:srgbClr val="5E6A75"/>
+            </a:solidFill>
+            <a:tailEnd type="triangle"/>
+          </a:ln>
+        </p:spPr>
+      </p:cxnSp>
+      <p:cxnSp>
+        <p:nvCxnSpPr>
+          <p:cNvPr id="72" name="Connector 72"/>
+          <p:cNvCxnSpPr/>
+          <p:nvPr/>
+        </p:nvCxnSpPr>
+        <p:spPr>
+          <a:xfrm flipH="0" flipV="0">
+            <a:off x="7178040" y="3703320"/>
+            <a:ext cx="2194560" cy="182880"/>
+          </a:xfrm>
+          <a:prstGeom prst="straightConnector1">
+            <a:avLst/>
+          </a:prstGeom>
+          <a:ln w="15875" cap="flat">
+            <a:solidFill>
+              <a:srgbClr val="5E6A75"/>
+            </a:solidFill>
+            <a:tailEnd type="triangle"/>
+          </a:ln>
+        </p:spPr>
+      </p:cxnSp>
+      <p:cxnSp>
+        <p:nvCxnSpPr>
+          <p:cNvPr id="73" name="Connector 73"/>
+          <p:cNvCxnSpPr/>
+          <p:nvPr/>
+        </p:nvCxnSpPr>
+        <p:spPr>
+          <a:xfrm flipH="0" flipV="0">
+            <a:off x="2788920" y="4892040"/>
+            <a:ext cx="9144" cy="182880"/>
+          </a:xfrm>
+          <a:prstGeom prst="straightConnector1">
+            <a:avLst/>
+          </a:prstGeom>
+          <a:ln w="15875" cap="flat">
+            <a:solidFill>
+              <a:srgbClr val="5E6A75"/>
+            </a:solidFill>
+            <a:tailEnd type="triangle"/>
+          </a:ln>
+        </p:spPr>
+      </p:cxnSp>
+      <p:cxnSp>
+        <p:nvCxnSpPr>
+          <p:cNvPr id="74" name="Connector 74"/>
+          <p:cNvCxnSpPr/>
+          <p:nvPr/>
+        </p:nvCxnSpPr>
+        <p:spPr>
+          <a:xfrm flipH="0" flipV="0">
+            <a:off x="9372600" y="4892040"/>
+            <a:ext cx="9144" cy="182880"/>
+          </a:xfrm>
+          <a:prstGeom prst="straightConnector1">
+            <a:avLst/>
+          </a:prstGeom>
+          <a:ln w="15875" cap="flat">
             <a:solidFill>
               <a:srgbClr val="6366F1"/>
             </a:solidFill>
-          </a:ln>
-        </p:spPr>
-        <p:txBody>
-          <a:bodyPr wrap="square" lIns="177800" tIns="177800" rIns="177800" bIns="177800"/>
-          <a:lstStyle/>
-          <a:p>
-            <a:pPr algn="l"/>
-            <a:r>
-              <a:rPr lang="ru-RU" sz="1300" b="1">
-                <a:solidFill>
-                  <a:srgbClr val="1A2730"/>
-                </a:solidFill>
-                <a:latin typeface="Verdana"/>
-                <a:cs typeface="Verdana"/>
-              </a:rPr>
-              <a:t>5. Проверочный клиент</a:t>
-            </a:r>
-          </a:p>
-          <a:p>
-            <a:pPr algn="l"/>
-            <a:r>
-              <a:rPr lang="ru-RU" sz="1300" b="1">
-                <a:solidFill>
-                  <a:srgbClr val="1A2730"/>
-                </a:solidFill>
-                <a:latin typeface="Verdana"/>
-                <a:cs typeface="Verdana"/>
-              </a:rPr>
-              <a:t/>
-            </a:r>
-          </a:p>
-          <a:p>
-            <a:pPr algn="l"/>
-            <a:r>
-              <a:rPr lang="ru-RU" sz="1300" b="1">
-                <a:solidFill>
-                  <a:srgbClr val="1A2730"/>
-                </a:solidFill>
-                <a:latin typeface="Verdana"/>
-                <a:cs typeface="Verdana"/>
-              </a:rPr>
-              <a:t>Отдельный скрипт, который подключается к двум узлам и измеряет задержку доставки.</a:t>
-            </a:r>
-          </a:p>
-        </p:txBody>
-      </p:sp>
-      <p:sp>
-        <p:nvSpPr>
-          <p:cNvPr id="25" name="Shape 25"/>
-          <p:cNvSpPr txBox="1"/>
-          <p:nvPr/>
-        </p:nvSpPr>
-        <p:spPr>
-          <a:xfrm>
-            <a:off x="502920" y="5989320"/>
-            <a:ext cx="11247120" cy="320040"/>
+            <a:tailEnd type="triangle"/>
+          </a:ln>
+        </p:spPr>
+      </p:cxnSp>
+      <p:cxnSp>
+        <p:nvCxnSpPr>
+          <p:cNvPr id="76" name="Connector 76"/>
+          <p:cNvCxnSpPr/>
+          <p:nvPr/>
+        </p:nvCxnSpPr>
+        <p:spPr>
+          <a:xfrm flipH="0" flipV="0">
+            <a:off x="4160520" y="4892040"/>
+            <a:ext cx="3657600" cy="182880"/>
+          </a:xfrm>
+          <a:prstGeom prst="straightConnector1">
+            <a:avLst/>
+          </a:prstGeom>
+          <a:ln w="15875" cap="flat">
+            <a:solidFill>
+              <a:srgbClr val="6366F1"/>
+            </a:solidFill>
+            <a:tailEnd type="triangle"/>
+          </a:ln>
+        </p:spPr>
+      </p:cxnSp>
+      <p:cxnSp>
+        <p:nvCxnSpPr>
+          <p:cNvPr id="77" name="Connector 77"/>
+          <p:cNvCxnSpPr/>
+          <p:nvPr/>
+        </p:nvCxnSpPr>
+        <p:spPr>
+          <a:xfrm flipH="1" flipV="0">
+            <a:off x="4160520" y="4892040"/>
+            <a:ext cx="3840480" cy="182880"/>
+          </a:xfrm>
+          <a:prstGeom prst="straightConnector1">
+            <a:avLst/>
+          </a:prstGeom>
+          <a:ln w="15875" cap="flat">
+            <a:solidFill>
+              <a:srgbClr val="5E6A75"/>
+            </a:solidFill>
+            <a:tailEnd type="triangle"/>
+          </a:ln>
+        </p:spPr>
+      </p:cxnSp>
+      <p:sp>
+        <p:nvSpPr>
+          <p:cNvPr id="26" name="Shape 26"/>
+          <p:cNvSpPr txBox="1"/>
+          <p:nvPr/>
+        </p:nvSpPr>
+        <p:spPr>
+          <a:xfrm>
+            <a:off x="502920" y="6263640"/>
+            <a:ext cx="11247120" cy="274320"/>
           </a:xfrm>
           <a:prstGeom prst="roundRect">
             <a:avLst/>
@@ -1386,7 +1455,7 @@
                 <a:latin typeface="Verdana"/>
                 <a:cs typeface="Verdana"/>
               </a:rPr>
-              <a:t>Стек: ASP.NET Core, SignalR, Redis, React, TypeScript, Node.js, nginx, Docker Compose</a:t>
+              <a:t>Оба сервиса собраны из одного образа и отличаются только идентификатором экземпляра.</a:t>
             </a:r>
           </a:p>
         </p:txBody>
@@ -1400,7 +1469,7 @@
         <p:spPr>
           <a:xfrm>
             <a:off x="594360" y="6510528"/>
-            <a:ext cx="10972800" cy="201168"/>
+            <a:ext cx="7315200" cy="201168"/>
           </a:xfrm>
           <a:prstGeom prst="roundRect">
             <a:avLst/>
@@ -1423,7 +1492,44 @@
                 <a:latin typeface="Verdana"/>
                 <a:cs typeface="Verdana"/>
               </a:rPr>
-              <a:t>В реальном времени · 11</a:t>
+              <a:t>В реальном времени</a:t>
+            </a:r>
+          </a:p>
+        </p:txBody>
+      </p:sp>
+      <p:sp>
+        <p:nvSpPr>
+          <p:cNvPr id="901" name="Shape 901"/>
+          <p:cNvSpPr txBox="1"/>
+          <p:nvPr/>
+        </p:nvSpPr>
+        <p:spPr>
+          <a:xfrm>
+            <a:off x="4251960" y="6419088"/>
+            <a:ext cx="7315200" cy="292608"/>
+          </a:xfrm>
+          <a:prstGeom prst="roundRect">
+            <a:avLst/>
+          </a:prstGeom>
+          <a:noFill/>
+          <a:ln>
+            <a:noFill/>
+          </a:ln>
+        </p:spPr>
+        <p:txBody>
+          <a:bodyPr wrap="square" lIns="177800" tIns="177800" rIns="177800" bIns="177800"/>
+          <a:lstStyle/>
+          <a:p>
+            <a:pPr algn="r"/>
+            <a:r>
+              <a:rPr lang="ru-RU" sz="1200" b="1">
+                <a:solidFill>
+                  <a:srgbClr val="5E6A75"/>
+                </a:solidFill>
+                <a:latin typeface="Verdana"/>
+                <a:cs typeface="Verdana"/>
+              </a:rPr>
+              <a:t>11/15</a:t>
             </a:r>
           </a:p>
         </p:txBody>
@@ -1493,7 +1599,7 @@
                 <a:latin typeface="Verdana"/>
                 <a:cs typeface="Verdana"/>
               </a:rPr>
-              <a:t>Стенд испытаний</a:t>
+              <a:t>Программа испытаний</a:t>
             </a:r>
           </a:p>
         </p:txBody>
@@ -1530,7 +1636,7 @@
                 <a:latin typeface="Verdana"/>
                 <a:cs typeface="Verdana"/>
               </a:rPr>
-              <a:t>Воспроизводимое локальное окружение из шести компонентов (§4.5 ВКР)</a:t>
+              <a:t>Один и тот же стенд, два режима, пять проверок (§5.1 ВКР)</a:t>
             </a:r>
           </a:p>
         </p:txBody>
@@ -1543,26 +1649,145 @@
         </p:nvSpPr>
         <p:spPr>
           <a:xfrm>
-            <a:off x="3749040" y="1508760"/>
-            <a:ext cx="4663440" cy="1005840"/>
-          </a:xfrm>
-          <a:prstGeom prst="roundRect">
-            <a:avLst/>
-          </a:prstGeom>
-          <a:solidFill>
-            <a:srgbClr val="EEF0FE"/>
-          </a:solidFill>
-          <a:ln w="12700">
-            <a:solidFill>
-              <a:srgbClr val="6366F1"/>
-            </a:solidFill>
-          </a:ln>
-        </p:spPr>
-        <p:txBody>
-          <a:bodyPr wrap="square" lIns="177800" tIns="177800" rIns="177800" bIns="177800"/>
-          <a:lstStyle/>
-          <a:p>
-            <a:pPr algn="ctr"/>
+            <a:off x="685800" y="1508760"/>
+            <a:ext cx="5349240" cy="4526280"/>
+          </a:xfrm>
+          <a:prstGeom prst="roundRect">
+            <a:avLst/>
+          </a:prstGeom>
+          <a:solidFill>
+            <a:srgbClr val="FFFFFF"/>
+          </a:solidFill>
+          <a:ln w="12700">
+            <a:solidFill>
+              <a:srgbClr val="E3E7EB"/>
+            </a:solidFill>
+          </a:ln>
+        </p:spPr>
+        <p:txBody>
+          <a:bodyPr wrap="square" lIns="177800" tIns="177800" rIns="177800" bIns="177800"/>
+          <a:lstStyle/>
+          <a:p>
+            <a:pPr algn="l"/>
+            <a:r>
+              <a:rPr lang="ru-RU" sz="1400" b="0">
+                <a:solidFill>
+                  <a:srgbClr val="1A2730"/>
+                </a:solidFill>
+                <a:latin typeface="Verdana"/>
+                <a:cs typeface="Verdana"/>
+              </a:rPr>
+              <a:t>Два режима одного стенда</a:t>
+            </a:r>
+          </a:p>
+          <a:p>
+            <a:pPr algn="l"/>
+            <a:r>
+              <a:rPr lang="ru-RU" sz="1400" b="0">
+                <a:solidFill>
+                  <a:srgbClr val="1A2730"/>
+                </a:solidFill>
+                <a:latin typeface="Verdana"/>
+                <a:cs typeface="Verdana"/>
+              </a:rPr>
+              <a:t/>
+            </a:r>
+          </a:p>
+          <a:p>
+            <a:pPr algn="l"/>
+            <a:r>
+              <a:rPr lang="ru-RU" sz="1400" b="0">
+                <a:solidFill>
+                  <a:srgbClr val="1A2730"/>
+                </a:solidFill>
+                <a:latin typeface="Verdana"/>
+                <a:cs typeface="Verdana"/>
+              </a:rPr>
+              <a:t>•  Без общего канала событий — контрольный режим, воспроизводит исходное ограничение.</a:t>
+            </a:r>
+          </a:p>
+          <a:p>
+            <a:pPr algn="l"/>
+            <a:r>
+              <a:rPr lang="ru-RU" sz="1400" b="0">
+                <a:solidFill>
+                  <a:srgbClr val="1A2730"/>
+                </a:solidFill>
+                <a:latin typeface="Verdana"/>
+                <a:cs typeface="Verdana"/>
+              </a:rPr>
+              <a:t/>
+            </a:r>
+          </a:p>
+          <a:p>
+            <a:pPr algn="l"/>
+            <a:r>
+              <a:rPr lang="ru-RU" sz="1400" b="0">
+                <a:solidFill>
+                  <a:srgbClr val="1A2730"/>
+                </a:solidFill>
+                <a:latin typeface="Verdana"/>
+                <a:cs typeface="Verdana"/>
+              </a:rPr>
+              <a:t>•  С общим каналом событий — целевой режим, проверяет решение.</a:t>
+            </a:r>
+          </a:p>
+          <a:p>
+            <a:pPr algn="l"/>
+            <a:r>
+              <a:rPr lang="ru-RU" sz="1400" b="0">
+                <a:solidFill>
+                  <a:srgbClr val="1A2730"/>
+                </a:solidFill>
+                <a:latin typeface="Verdana"/>
+                <a:cs typeface="Verdana"/>
+              </a:rPr>
+              <a:t/>
+            </a:r>
+          </a:p>
+          <a:p>
+            <a:pPr algn="l"/>
+            <a:r>
+              <a:rPr lang="ru-RU" sz="1400" b="0">
+                <a:solidFill>
+                  <a:srgbClr val="1A2730"/>
+                </a:solidFill>
+                <a:latin typeface="Verdana"/>
+                <a:cs typeface="Verdana"/>
+              </a:rPr>
+              <a:t>Код и сценарий — одни и те же. Меняется только одна настройка: включён общий канал или нет.</a:t>
+            </a:r>
+          </a:p>
+        </p:txBody>
+      </p:sp>
+      <p:sp>
+        <p:nvSpPr>
+          <p:cNvPr id="21" name="Shape 21"/>
+          <p:cNvSpPr txBox="1"/>
+          <p:nvPr/>
+        </p:nvSpPr>
+        <p:spPr>
+          <a:xfrm>
+            <a:off x="6172200" y="1508760"/>
+            <a:ext cx="5349240" cy="4526280"/>
+          </a:xfrm>
+          <a:prstGeom prst="roundRect">
+            <a:avLst/>
+          </a:prstGeom>
+          <a:solidFill>
+            <a:srgbClr val="E6F4F1"/>
+          </a:solidFill>
+          <a:ln w="12700">
+            <a:solidFill>
+              <a:srgbClr val="14A085"/>
+            </a:solidFill>
+          </a:ln>
+        </p:spPr>
+        <p:txBody>
+          <a:bodyPr wrap="square" lIns="177800" tIns="177800" rIns="177800" bIns="177800"/>
+          <a:lstStyle/>
+          <a:p>
+            <a:pPr algn="l"/>
             <a:r>
               <a:rPr lang="ru-RU" sz="1400" b="1">
                 <a:solidFill>
@@ -1571,39 +1796,11 @@
                 <a:latin typeface="Verdana"/>
                 <a:cs typeface="Verdana"/>
               </a:rPr>
-              <a:t>Проверочный клиент</a:t>
-            </a:r>
-          </a:p>
-        </p:txBody>
-      </p:sp>
-      <p:sp>
-        <p:nvSpPr>
-          <p:cNvPr id="21" name="Shape 21"/>
-          <p:cNvSpPr txBox="1"/>
-          <p:nvPr/>
-        </p:nvSpPr>
-        <p:spPr>
-          <a:xfrm>
-            <a:off x="3749040" y="2697480"/>
-            <a:ext cx="4663440" cy="1005840"/>
-          </a:xfrm>
-          <a:prstGeom prst="roundRect">
-            <a:avLst/>
-          </a:prstGeom>
-          <a:solidFill>
-            <a:srgbClr val="E6F4F1"/>
-          </a:solidFill>
-          <a:ln w="12700">
-            <a:solidFill>
-              <a:srgbClr val="14A085"/>
-            </a:solidFill>
-          </a:ln>
-        </p:spPr>
-        <p:txBody>
-          <a:bodyPr wrap="square" lIns="177800" tIns="177800" rIns="177800" bIns="177800"/>
-          <a:lstStyle/>
-          <a:p>
-            <a:pPr algn="ctr"/>
+              <a:t>Пять проверок</a:t>
+            </a:r>
+          </a:p>
+          <a:p>
+            <a:pPr algn="l"/>
             <a:r>
               <a:rPr lang="ru-RU" sz="1400" b="1">
                 <a:solidFill>
@@ -1612,39 +1809,11 @@
                 <a:latin typeface="Verdana"/>
                 <a:cs typeface="Verdana"/>
               </a:rPr>
-              <a:t>Общая точка входа (nginx)</a:t>
-            </a:r>
-          </a:p>
-        </p:txBody>
-      </p:sp>
-      <p:sp>
-        <p:nvSpPr>
-          <p:cNvPr id="22" name="Shape 22"/>
-          <p:cNvSpPr txBox="1"/>
-          <p:nvPr/>
-        </p:nvSpPr>
-        <p:spPr>
-          <a:xfrm>
-            <a:off x="868680" y="3886200"/>
-            <a:ext cx="3840480" cy="1005840"/>
-          </a:xfrm>
-          <a:prstGeom prst="roundRect">
-            <a:avLst/>
-          </a:prstGeom>
-          <a:solidFill>
-            <a:srgbClr val="FFFFFF"/>
-          </a:solidFill>
-          <a:ln w="12700">
-            <a:solidFill>
-              <a:srgbClr val="14A085"/>
-            </a:solidFill>
-          </a:ln>
-        </p:spPr>
-        <p:txBody>
-          <a:bodyPr wrap="square" lIns="177800" tIns="177800" rIns="177800" bIns="177800"/>
-          <a:lstStyle/>
-          <a:p>
-            <a:pPr algn="ctr"/>
+              <a:t/>
+            </a:r>
+          </a:p>
+          <a:p>
+            <a:pPr algn="l"/>
             <a:r>
               <a:rPr lang="ru-RU" sz="1400" b="1">
                 <a:solidFill>
@@ -1653,39 +1822,11 @@
                 <a:latin typeface="Verdana"/>
                 <a:cs typeface="Verdana"/>
               </a:rPr>
-              <a:t>Серверный сервис №1</a:t>
-            </a:r>
-          </a:p>
-        </p:txBody>
-      </p:sp>
-      <p:sp>
-        <p:nvSpPr>
-          <p:cNvPr id="23" name="Shape 23"/>
-          <p:cNvSpPr txBox="1"/>
-          <p:nvPr/>
-        </p:nvSpPr>
-        <p:spPr>
-          <a:xfrm>
-            <a:off x="7452360" y="3886200"/>
-            <a:ext cx="3840480" cy="1005840"/>
-          </a:xfrm>
-          <a:prstGeom prst="roundRect">
-            <a:avLst/>
-          </a:prstGeom>
-          <a:solidFill>
-            <a:srgbClr val="FFFFFF"/>
-          </a:solidFill>
-          <a:ln w="12700">
-            <a:solidFill>
-              <a:srgbClr val="14A085"/>
-            </a:solidFill>
-          </a:ln>
-        </p:spPr>
-        <p:txBody>
-          <a:bodyPr wrap="square" lIns="177800" tIns="177800" rIns="177800" bIns="177800"/>
-          <a:lstStyle/>
-          <a:p>
-            <a:pPr algn="ctr"/>
+              <a:t>1.  Одиночная доставка без общего канала.</a:t>
+            </a:r>
+          </a:p>
+          <a:p>
+            <a:pPr algn="l"/>
             <a:r>
               <a:rPr lang="ru-RU" sz="1400" b="1">
                 <a:solidFill>
@@ -1694,257 +1835,112 @@
                 <a:latin typeface="Verdana"/>
                 <a:cs typeface="Verdana"/>
               </a:rPr>
-              <a:t>Серверный сервис №2</a:t>
-            </a:r>
-          </a:p>
-        </p:txBody>
-      </p:sp>
-      <p:sp>
-        <p:nvSpPr>
-          <p:cNvPr id="24" name="Shape 24"/>
-          <p:cNvSpPr txBox="1"/>
-          <p:nvPr/>
-        </p:nvSpPr>
-        <p:spPr>
-          <a:xfrm>
-            <a:off x="868680" y="5074920"/>
-            <a:ext cx="3840480" cy="1005840"/>
-          </a:xfrm>
-          <a:prstGeom prst="roundRect">
-            <a:avLst/>
-          </a:prstGeom>
-          <a:solidFill>
-            <a:srgbClr val="FFFFFF"/>
-          </a:solidFill>
-          <a:ln w="12700">
-            <a:solidFill>
-              <a:srgbClr val="E3E7EB"/>
-            </a:solidFill>
-          </a:ln>
-        </p:spPr>
-        <p:txBody>
-          <a:bodyPr wrap="square" lIns="177800" tIns="177800" rIns="177800" bIns="177800"/>
-          <a:lstStyle/>
-          <a:p>
-            <a:pPr algn="ctr"/>
-            <a:r>
-              <a:rPr lang="ru-RU" sz="1300" b="0">
-                <a:solidFill>
-                  <a:srgbClr val="1A2730"/>
-                </a:solidFill>
-                <a:latin typeface="Verdana"/>
-                <a:cs typeface="Verdana"/>
-              </a:rPr>
-              <a:t>Общая база (PostgreSQL)</a:t>
-            </a:r>
-          </a:p>
-        </p:txBody>
-      </p:sp>
-      <p:sp>
-        <p:nvSpPr>
-          <p:cNvPr id="25" name="Shape 25"/>
-          <p:cNvSpPr txBox="1"/>
-          <p:nvPr/>
-        </p:nvSpPr>
-        <p:spPr>
-          <a:xfrm>
-            <a:off x="7452360" y="5074920"/>
-            <a:ext cx="3840480" cy="1005840"/>
-          </a:xfrm>
-          <a:prstGeom prst="roundRect">
-            <a:avLst/>
-          </a:prstGeom>
-          <a:solidFill>
-            <a:srgbClr val="EEF0FE"/>
-          </a:solidFill>
-          <a:ln w="12700">
-            <a:solidFill>
-              <a:srgbClr val="6366F1"/>
-            </a:solidFill>
-          </a:ln>
-        </p:spPr>
-        <p:txBody>
-          <a:bodyPr wrap="square" lIns="177800" tIns="177800" rIns="177800" bIns="177800"/>
-          <a:lstStyle/>
-          <a:p>
-            <a:pPr algn="ctr"/>
-            <a:r>
-              <a:rPr lang="ru-RU" sz="1300" b="1">
-                <a:solidFill>
-                  <a:srgbClr val="1A2730"/>
-                </a:solidFill>
-                <a:latin typeface="Verdana"/>
-                <a:cs typeface="Verdana"/>
-              </a:rPr>
-              <a:t>Общий канал событий (Redis)</a:t>
-            </a:r>
-          </a:p>
-        </p:txBody>
-      </p:sp>
-      <p:cxnSp>
-        <p:nvCxnSpPr>
-          <p:cNvPr id="70" name="Connector 70"/>
-          <p:cNvCxnSpPr/>
-          <p:nvPr/>
-        </p:nvCxnSpPr>
-        <p:spPr>
-          <a:xfrm flipH="0" flipV="0">
-            <a:off x="6080760" y="2514600"/>
-            <a:ext cx="9144" cy="182880"/>
-          </a:xfrm>
-          <a:prstGeom prst="straightConnector1">
-            <a:avLst/>
-          </a:prstGeom>
-          <a:ln w="15875" cap="flat">
-            <a:solidFill>
-              <a:srgbClr val="5E6A75"/>
-            </a:solidFill>
-            <a:tailEnd type="triangle"/>
-          </a:ln>
-        </p:spPr>
-      </p:cxnSp>
-      <p:cxnSp>
-        <p:nvCxnSpPr>
-          <p:cNvPr id="71" name="Connector 71"/>
-          <p:cNvCxnSpPr/>
-          <p:nvPr/>
-        </p:nvCxnSpPr>
-        <p:spPr>
-          <a:xfrm flipH="1" flipV="0">
-            <a:off x="2788920" y="3703320"/>
-            <a:ext cx="2240280" cy="182880"/>
-          </a:xfrm>
-          <a:prstGeom prst="straightConnector1">
-            <a:avLst/>
-          </a:prstGeom>
-          <a:ln w="15875" cap="flat">
-            <a:solidFill>
-              <a:srgbClr val="5E6A75"/>
-            </a:solidFill>
-            <a:tailEnd type="triangle"/>
-          </a:ln>
-        </p:spPr>
-      </p:cxnSp>
-      <p:cxnSp>
-        <p:nvCxnSpPr>
-          <p:cNvPr id="72" name="Connector 72"/>
-          <p:cNvCxnSpPr/>
-          <p:nvPr/>
-        </p:nvCxnSpPr>
-        <p:spPr>
-          <a:xfrm flipH="0" flipV="0">
-            <a:off x="7178040" y="3703320"/>
-            <a:ext cx="2194560" cy="182880"/>
-          </a:xfrm>
-          <a:prstGeom prst="straightConnector1">
-            <a:avLst/>
-          </a:prstGeom>
-          <a:ln w="15875" cap="flat">
-            <a:solidFill>
-              <a:srgbClr val="5E6A75"/>
-            </a:solidFill>
-            <a:tailEnd type="triangle"/>
-          </a:ln>
-        </p:spPr>
-      </p:cxnSp>
-      <p:cxnSp>
-        <p:nvCxnSpPr>
-          <p:cNvPr id="73" name="Connector 73"/>
-          <p:cNvCxnSpPr/>
-          <p:nvPr/>
-        </p:nvCxnSpPr>
-        <p:spPr>
-          <a:xfrm flipH="0" flipV="0">
-            <a:off x="2788920" y="4892040"/>
-            <a:ext cx="9144" cy="182880"/>
-          </a:xfrm>
-          <a:prstGeom prst="straightConnector1">
-            <a:avLst/>
-          </a:prstGeom>
-          <a:ln w="15875" cap="flat">
-            <a:solidFill>
-              <a:srgbClr val="5E6A75"/>
-            </a:solidFill>
-            <a:tailEnd type="triangle"/>
-          </a:ln>
-        </p:spPr>
-      </p:cxnSp>
-      <p:cxnSp>
-        <p:nvCxnSpPr>
-          <p:cNvPr id="74" name="Connector 74"/>
-          <p:cNvCxnSpPr/>
-          <p:nvPr/>
-        </p:nvCxnSpPr>
-        <p:spPr>
-          <a:xfrm flipH="0" flipV="0">
-            <a:off x="9372600" y="4892040"/>
-            <a:ext cx="9144" cy="182880"/>
-          </a:xfrm>
-          <a:prstGeom prst="straightConnector1">
-            <a:avLst/>
-          </a:prstGeom>
-          <a:ln w="15875" cap="flat">
-            <a:solidFill>
-              <a:srgbClr val="6366F1"/>
-            </a:solidFill>
-            <a:tailEnd type="triangle"/>
-          </a:ln>
-        </p:spPr>
-      </p:cxnSp>
-      <p:cxnSp>
-        <p:nvCxnSpPr>
-          <p:cNvPr id="76" name="Connector 76"/>
-          <p:cNvCxnSpPr/>
-          <p:nvPr/>
-        </p:nvCxnSpPr>
-        <p:spPr>
-          <a:xfrm flipH="0" flipV="0">
-            <a:off x="4160520" y="4892040"/>
-            <a:ext cx="3657600" cy="182880"/>
-          </a:xfrm>
-          <a:prstGeom prst="straightConnector1">
-            <a:avLst/>
-          </a:prstGeom>
-          <a:ln w="15875" cap="flat">
-            <a:solidFill>
-              <a:srgbClr val="6366F1"/>
-            </a:solidFill>
-            <a:tailEnd type="triangle"/>
-          </a:ln>
-        </p:spPr>
-      </p:cxnSp>
-      <p:cxnSp>
-        <p:nvCxnSpPr>
-          <p:cNvPr id="77" name="Connector 77"/>
-          <p:cNvCxnSpPr/>
-          <p:nvPr/>
-        </p:nvCxnSpPr>
-        <p:spPr>
-          <a:xfrm flipH="1" flipV="0">
-            <a:off x="4160520" y="4892040"/>
-            <a:ext cx="3840480" cy="182880"/>
-          </a:xfrm>
-          <a:prstGeom prst="straightConnector1">
-            <a:avLst/>
-          </a:prstGeom>
-          <a:ln w="15875" cap="flat">
-            <a:solidFill>
-              <a:srgbClr val="5E6A75"/>
-            </a:solidFill>
-            <a:tailEnd type="triangle"/>
-          </a:ln>
-        </p:spPr>
-      </p:cxnSp>
-      <p:sp>
-        <p:nvSpPr>
-          <p:cNvPr id="26" name="Shape 26"/>
-          <p:cNvSpPr txBox="1"/>
-          <p:nvPr/>
-        </p:nvSpPr>
-        <p:spPr>
-          <a:xfrm>
-            <a:off x="502920" y="6263640"/>
-            <a:ext cx="11247120" cy="274320"/>
+              <a:t/>
+            </a:r>
+          </a:p>
+          <a:p>
+            <a:pPr algn="l"/>
+            <a:r>
+              <a:rPr lang="ru-RU" sz="1400" b="1">
+                <a:solidFill>
+                  <a:srgbClr val="1A2730"/>
+                </a:solidFill>
+                <a:latin typeface="Verdana"/>
+                <a:cs typeface="Verdana"/>
+              </a:rPr>
+              <a:t>2.  Одиночная доставка с общим каналом.</a:t>
+            </a:r>
+          </a:p>
+          <a:p>
+            <a:pPr algn="l"/>
+            <a:r>
+              <a:rPr lang="ru-RU" sz="1400" b="1">
+                <a:solidFill>
+                  <a:srgbClr val="1A2730"/>
+                </a:solidFill>
+                <a:latin typeface="Verdana"/>
+                <a:cs typeface="Verdana"/>
+              </a:rPr>
+              <a:t/>
+            </a:r>
+          </a:p>
+          <a:p>
+            <a:pPr algn="l"/>
+            <a:r>
+              <a:rPr lang="ru-RU" sz="1400" b="1">
+                <a:solidFill>
+                  <a:srgbClr val="1A2730"/>
+                </a:solidFill>
+                <a:latin typeface="Verdana"/>
+                <a:cs typeface="Verdana"/>
+              </a:rPr>
+              <a:t>3.  Серия из 30 повторов — повторяемость и задержка.</a:t>
+            </a:r>
+          </a:p>
+          <a:p>
+            <a:pPr algn="l"/>
+            <a:r>
+              <a:rPr lang="ru-RU" sz="1400" b="1">
+                <a:solidFill>
+                  <a:srgbClr val="1A2730"/>
+                </a:solidFill>
+                <a:latin typeface="Verdana"/>
+                <a:cs typeface="Verdana"/>
+              </a:rPr>
+              <a:t/>
+            </a:r>
+          </a:p>
+          <a:p>
+            <a:pPr algn="l"/>
+            <a:r>
+              <a:rPr lang="ru-RU" sz="1400" b="1">
+                <a:solidFill>
+                  <a:srgbClr val="1A2730"/>
+                </a:solidFill>
+                <a:latin typeface="Verdana"/>
+                <a:cs typeface="Verdana"/>
+              </a:rPr>
+              <a:t>4.  Восстановление подписки после разрыва соединения.</a:t>
+            </a:r>
+          </a:p>
+          <a:p>
+            <a:pPr algn="l"/>
+            <a:r>
+              <a:rPr lang="ru-RU" sz="1400" b="1">
+                <a:solidFill>
+                  <a:srgbClr val="1A2730"/>
+                </a:solidFill>
+                <a:latin typeface="Verdana"/>
+                <a:cs typeface="Verdana"/>
+              </a:rPr>
+              <a:t/>
+            </a:r>
+          </a:p>
+          <a:p>
+            <a:pPr algn="l"/>
+            <a:r>
+              <a:rPr lang="ru-RU" sz="1400" b="1">
+                <a:solidFill>
+                  <a:srgbClr val="1A2730"/>
+                </a:solidFill>
+                <a:latin typeface="Verdana"/>
+                <a:cs typeface="Verdana"/>
+              </a:rPr>
+              <a:t>5.  Переключение на другой узел после отказа.</a:t>
+            </a:r>
+          </a:p>
+        </p:txBody>
+      </p:sp>
+      <p:sp>
+        <p:nvSpPr>
+          <p:cNvPr id="900" name="Shape 900"/>
+          <p:cNvSpPr txBox="1"/>
+          <p:nvPr/>
+        </p:nvSpPr>
+        <p:spPr>
+          <a:xfrm>
+            <a:off x="594360" y="6510528"/>
+            <a:ext cx="7315200" cy="201168"/>
           </a:xfrm>
           <a:prstGeom prst="roundRect">
             <a:avLst/>
@@ -1958,30 +1954,30 @@
           <a:bodyPr wrap="square" lIns="177800" tIns="177800" rIns="177800" bIns="177800"/>
           <a:lstStyle/>
           <a:p>
-            <a:pPr algn="ctr"/>
-            <a:r>
-              <a:rPr lang="ru-RU" sz="1100" b="0">
+            <a:pPr algn="l"/>
+            <a:r>
+              <a:rPr lang="ru-RU" sz="800" b="0">
                 <a:solidFill>
                   <a:srgbClr val="5E6A75"/>
                 </a:solidFill>
                 <a:latin typeface="Verdana"/>
                 <a:cs typeface="Verdana"/>
               </a:rPr>
-              <a:t>Оба сервиса собраны из одного образа и отличаются только идентификатором экземпляра.</a:t>
-            </a:r>
-          </a:p>
-        </p:txBody>
-      </p:sp>
-      <p:sp>
-        <p:nvSpPr>
-          <p:cNvPr id="900" name="Shape 900"/>
-          <p:cNvSpPr txBox="1"/>
-          <p:nvPr/>
-        </p:nvSpPr>
-        <p:spPr>
-          <a:xfrm>
-            <a:off x="594360" y="6510528"/>
-            <a:ext cx="10972800" cy="201168"/>
+              <a:t>В реальном времени</a:t>
+            </a:r>
+          </a:p>
+        </p:txBody>
+      </p:sp>
+      <p:sp>
+        <p:nvSpPr>
+          <p:cNvPr id="901" name="Shape 901"/>
+          <p:cNvSpPr txBox="1"/>
+          <p:nvPr/>
+        </p:nvSpPr>
+        <p:spPr>
+          <a:xfrm>
+            <a:off x="4251960" y="6419088"/>
+            <a:ext cx="7315200" cy="292608"/>
           </a:xfrm>
           <a:prstGeom prst="roundRect">
             <a:avLst/>
@@ -1995,16 +1991,16 @@
           <a:bodyPr wrap="square" lIns="177800" tIns="177800" rIns="177800" bIns="177800"/>
           <a:lstStyle/>
           <a:p>
-            <a:pPr algn="l"/>
-            <a:r>
-              <a:rPr lang="ru-RU" sz="800" b="0">
+            <a:pPr algn="r"/>
+            <a:r>
+              <a:rPr lang="ru-RU" sz="1200" b="1">
                 <a:solidFill>
                   <a:srgbClr val="5E6A75"/>
                 </a:solidFill>
                 <a:latin typeface="Verdana"/>
                 <a:cs typeface="Verdana"/>
               </a:rPr>
-              <a:t>В реальном времени · 12</a:t>
+              <a:t>12/15</a:t>
             </a:r>
           </a:p>
         </p:txBody>
@@ -2074,7 +2070,7 @@
                 <a:latin typeface="Verdana"/>
                 <a:cs typeface="Verdana"/>
               </a:rPr>
-              <a:t>Программа испытаний</a:t>
+              <a:t>Сводка результатов</a:t>
             </a:r>
           </a:p>
         </p:txBody>
@@ -2111,311 +2107,21 @@
                 <a:latin typeface="Verdana"/>
                 <a:cs typeface="Verdana"/>
               </a:rPr>
-              <a:t>Один и тот же стенд, два режима, пять проверок (§5.1 ВКР)</a:t>
-            </a:r>
-          </a:p>
-        </p:txBody>
-      </p:sp>
-      <p:sp>
-        <p:nvSpPr>
-          <p:cNvPr id="20" name="Shape 20"/>
-          <p:cNvSpPr txBox="1"/>
-          <p:nvPr/>
-        </p:nvSpPr>
-        <p:spPr>
-          <a:xfrm>
-            <a:off x="685800" y="1508760"/>
-            <a:ext cx="5349240" cy="4526280"/>
-          </a:xfrm>
-          <a:prstGeom prst="roundRect">
-            <a:avLst/>
-          </a:prstGeom>
-          <a:solidFill>
-            <a:srgbClr val="FFFFFF"/>
-          </a:solidFill>
-          <a:ln w="12700">
-            <a:solidFill>
-              <a:srgbClr val="E3E7EB"/>
-            </a:solidFill>
-          </a:ln>
-        </p:spPr>
-        <p:txBody>
-          <a:bodyPr wrap="square" lIns="177800" tIns="177800" rIns="177800" bIns="177800"/>
-          <a:lstStyle/>
-          <a:p>
-            <a:pPr algn="l"/>
-            <a:r>
-              <a:rPr lang="ru-RU" sz="1400" b="0">
-                <a:solidFill>
-                  <a:srgbClr val="1A2730"/>
-                </a:solidFill>
-                <a:latin typeface="Verdana"/>
-                <a:cs typeface="Verdana"/>
-              </a:rPr>
-              <a:t>Два режима одного стенда</a:t>
-            </a:r>
-          </a:p>
-          <a:p>
-            <a:pPr algn="l"/>
-            <a:r>
-              <a:rPr lang="ru-RU" sz="1400" b="0">
-                <a:solidFill>
-                  <a:srgbClr val="1A2730"/>
-                </a:solidFill>
-                <a:latin typeface="Verdana"/>
-                <a:cs typeface="Verdana"/>
-              </a:rPr>
-              <a:t/>
-            </a:r>
-          </a:p>
-          <a:p>
-            <a:pPr algn="l"/>
-            <a:r>
-              <a:rPr lang="ru-RU" sz="1400" b="0">
-                <a:solidFill>
-                  <a:srgbClr val="1A2730"/>
-                </a:solidFill>
-                <a:latin typeface="Verdana"/>
-                <a:cs typeface="Verdana"/>
-              </a:rPr>
-              <a:t>•  Без общего канала событий — контрольный режим, воспроизводит исходное ограничение.</a:t>
-            </a:r>
-          </a:p>
-          <a:p>
-            <a:pPr algn="l"/>
-            <a:r>
-              <a:rPr lang="ru-RU" sz="1400" b="0">
-                <a:solidFill>
-                  <a:srgbClr val="1A2730"/>
-                </a:solidFill>
-                <a:latin typeface="Verdana"/>
-                <a:cs typeface="Verdana"/>
-              </a:rPr>
-              <a:t/>
-            </a:r>
-          </a:p>
-          <a:p>
-            <a:pPr algn="l"/>
-            <a:r>
-              <a:rPr lang="ru-RU" sz="1400" b="0">
-                <a:solidFill>
-                  <a:srgbClr val="1A2730"/>
-                </a:solidFill>
-                <a:latin typeface="Verdana"/>
-                <a:cs typeface="Verdana"/>
-              </a:rPr>
-              <a:t>•  С общим каналом событий — целевой режим, проверяет решение.</a:t>
-            </a:r>
-          </a:p>
-          <a:p>
-            <a:pPr algn="l"/>
-            <a:r>
-              <a:rPr lang="ru-RU" sz="1400" b="0">
-                <a:solidFill>
-                  <a:srgbClr val="1A2730"/>
-                </a:solidFill>
-                <a:latin typeface="Verdana"/>
-                <a:cs typeface="Verdana"/>
-              </a:rPr>
-              <a:t/>
-            </a:r>
-          </a:p>
-          <a:p>
-            <a:pPr algn="l"/>
-            <a:r>
-              <a:rPr lang="ru-RU" sz="1400" b="0">
-                <a:solidFill>
-                  <a:srgbClr val="1A2730"/>
-                </a:solidFill>
-                <a:latin typeface="Verdana"/>
-                <a:cs typeface="Verdana"/>
-              </a:rPr>
-              <a:t>Код и сценарий — одни и те же. Меняется только одна настройка: включён общий канал или нет.</a:t>
-            </a:r>
-          </a:p>
-        </p:txBody>
-      </p:sp>
-      <p:sp>
-        <p:nvSpPr>
-          <p:cNvPr id="21" name="Shape 21"/>
-          <p:cNvSpPr txBox="1"/>
-          <p:nvPr/>
-        </p:nvSpPr>
-        <p:spPr>
-          <a:xfrm>
-            <a:off x="6172200" y="1508760"/>
-            <a:ext cx="5349240" cy="4526280"/>
-          </a:xfrm>
-          <a:prstGeom prst="roundRect">
-            <a:avLst/>
-          </a:prstGeom>
-          <a:solidFill>
-            <a:srgbClr val="E6F4F1"/>
-          </a:solidFill>
-          <a:ln w="12700">
-            <a:solidFill>
-              <a:srgbClr val="14A085"/>
-            </a:solidFill>
-          </a:ln>
-        </p:spPr>
-        <p:txBody>
-          <a:bodyPr wrap="square" lIns="177800" tIns="177800" rIns="177800" bIns="177800"/>
-          <a:lstStyle/>
-          <a:p>
-            <a:pPr algn="l"/>
-            <a:r>
-              <a:rPr lang="ru-RU" sz="1400" b="1">
-                <a:solidFill>
-                  <a:srgbClr val="1A2730"/>
-                </a:solidFill>
-                <a:latin typeface="Verdana"/>
-                <a:cs typeface="Verdana"/>
-              </a:rPr>
-              <a:t>Пять проверок</a:t>
-            </a:r>
-          </a:p>
-          <a:p>
-            <a:pPr algn="l"/>
-            <a:r>
-              <a:rPr lang="ru-RU" sz="1400" b="1">
-                <a:solidFill>
-                  <a:srgbClr val="1A2730"/>
-                </a:solidFill>
-                <a:latin typeface="Verdana"/>
-                <a:cs typeface="Verdana"/>
-              </a:rPr>
-              <a:t/>
-            </a:r>
-          </a:p>
-          <a:p>
-            <a:pPr algn="l"/>
-            <a:r>
-              <a:rPr lang="ru-RU" sz="1400" b="1">
-                <a:solidFill>
-                  <a:srgbClr val="1A2730"/>
-                </a:solidFill>
-                <a:latin typeface="Verdana"/>
-                <a:cs typeface="Verdana"/>
-              </a:rPr>
-              <a:t>1.  Одиночная доставка без общего канала.</a:t>
-            </a:r>
-          </a:p>
-          <a:p>
-            <a:pPr algn="l"/>
-            <a:r>
-              <a:rPr lang="ru-RU" sz="1400" b="1">
-                <a:solidFill>
-                  <a:srgbClr val="1A2730"/>
-                </a:solidFill>
-                <a:latin typeface="Verdana"/>
-                <a:cs typeface="Verdana"/>
-              </a:rPr>
-              <a:t/>
-            </a:r>
-          </a:p>
-          <a:p>
-            <a:pPr algn="l"/>
-            <a:r>
-              <a:rPr lang="ru-RU" sz="1400" b="1">
-                <a:solidFill>
-                  <a:srgbClr val="1A2730"/>
-                </a:solidFill>
-                <a:latin typeface="Verdana"/>
-                <a:cs typeface="Verdana"/>
-              </a:rPr>
-              <a:t>2.  Одиночная доставка с общим каналом.</a:t>
-            </a:r>
-          </a:p>
-          <a:p>
-            <a:pPr algn="l"/>
-            <a:r>
-              <a:rPr lang="ru-RU" sz="1400" b="1">
-                <a:solidFill>
-                  <a:srgbClr val="1A2730"/>
-                </a:solidFill>
-                <a:latin typeface="Verdana"/>
-                <a:cs typeface="Verdana"/>
-              </a:rPr>
-              <a:t/>
-            </a:r>
-          </a:p>
-          <a:p>
-            <a:pPr algn="l"/>
-            <a:r>
-              <a:rPr lang="ru-RU" sz="1400" b="1">
-                <a:solidFill>
-                  <a:srgbClr val="1A2730"/>
-                </a:solidFill>
-                <a:latin typeface="Verdana"/>
-                <a:cs typeface="Verdana"/>
-              </a:rPr>
-              <a:t>3.  Серия из 30 повторов — повторяемость и задержка.</a:t>
-            </a:r>
-          </a:p>
-          <a:p>
-            <a:pPr algn="l"/>
-            <a:r>
-              <a:rPr lang="ru-RU" sz="1400" b="1">
-                <a:solidFill>
-                  <a:srgbClr val="1A2730"/>
-                </a:solidFill>
-                <a:latin typeface="Verdana"/>
-                <a:cs typeface="Verdana"/>
-              </a:rPr>
-              <a:t/>
-            </a:r>
-          </a:p>
-          <a:p>
-            <a:pPr algn="l"/>
-            <a:r>
-              <a:rPr lang="ru-RU" sz="1400" b="1">
-                <a:solidFill>
-                  <a:srgbClr val="1A2730"/>
-                </a:solidFill>
-                <a:latin typeface="Verdana"/>
-                <a:cs typeface="Verdana"/>
-              </a:rPr>
-              <a:t>4.  Восстановление подписки после разрыва соединения.</a:t>
-            </a:r>
-          </a:p>
-          <a:p>
-            <a:pPr algn="l"/>
-            <a:r>
-              <a:rPr lang="ru-RU" sz="1400" b="1">
-                <a:solidFill>
-                  <a:srgbClr val="1A2730"/>
-                </a:solidFill>
-                <a:latin typeface="Verdana"/>
-                <a:cs typeface="Verdana"/>
-              </a:rPr>
-              <a:t/>
-            </a:r>
-          </a:p>
-          <a:p>
-            <a:pPr algn="l"/>
-            <a:r>
-              <a:rPr lang="ru-RU" sz="1400" b="1">
-                <a:solidFill>
-                  <a:srgbClr val="1A2730"/>
-                </a:solidFill>
-                <a:latin typeface="Verdana"/>
-                <a:cs typeface="Verdana"/>
-              </a:rPr>
-              <a:t>5.  Переключение на другой узел после отказа.</a:t>
-            </a:r>
-          </a:p>
-        </p:txBody>
-      </p:sp>
-      <p:sp>
-        <p:nvSpPr>
-          <p:cNvPr id="900" name="Shape 900"/>
-          <p:cNvSpPr txBox="1"/>
-          <p:nvPr/>
-        </p:nvSpPr>
-        <p:spPr>
-          <a:xfrm>
-            <a:off x="594360" y="6510528"/>
-            <a:ext cx="10972800" cy="201168"/>
+              <a:t>Сопоставление режимов и сценариев (таблица 5.7 ВКР)</a:t>
+            </a:r>
+          </a:p>
+        </p:txBody>
+      </p:sp>
+      <p:sp>
+        <p:nvSpPr>
+          <p:cNvPr id="80" name="Shape 80"/>
+          <p:cNvSpPr txBox="1"/>
+          <p:nvPr/>
+        </p:nvSpPr>
+        <p:spPr>
+          <a:xfrm>
+            <a:off x="502920" y="1417320"/>
+            <a:ext cx="4434840" cy="365760"/>
           </a:xfrm>
           <a:prstGeom prst="roundRect">
             <a:avLst/>
@@ -2426,6 +2132,1011 @@
           </a:ln>
         </p:spPr>
         <p:txBody>
+          <a:bodyPr wrap="square" lIns="101600" tIns="101600" rIns="101600" bIns="101600"/>
+          <a:lstStyle/>
+          <a:p>
+            <a:pPr algn="l"/>
+            <a:r>
+              <a:rPr lang="ru-RU" sz="1100" b="1">
+                <a:solidFill>
+                  <a:srgbClr val="5E6A75"/>
+                </a:solidFill>
+                <a:latin typeface="Verdana"/>
+                <a:cs typeface="Verdana"/>
+              </a:rPr>
+              <a:t>Сценарий</a:t>
+            </a:r>
+          </a:p>
+        </p:txBody>
+      </p:sp>
+      <p:sp>
+        <p:nvSpPr>
+          <p:cNvPr id="81" name="Shape 81"/>
+          <p:cNvSpPr txBox="1"/>
+          <p:nvPr/>
+        </p:nvSpPr>
+        <p:spPr>
+          <a:xfrm>
+            <a:off x="5029200" y="1417320"/>
+            <a:ext cx="1005840" cy="365760"/>
+          </a:xfrm>
+          <a:prstGeom prst="roundRect">
+            <a:avLst/>
+          </a:prstGeom>
+          <a:noFill/>
+          <a:ln>
+            <a:noFill/>
+          </a:ln>
+        </p:spPr>
+        <p:txBody>
+          <a:bodyPr wrap="square" lIns="50800" tIns="50800" rIns="50800" bIns="50800"/>
+          <a:lstStyle/>
+          <a:p>
+            <a:pPr algn="ctr"/>
+            <a:r>
+              <a:rPr lang="ru-RU" sz="1100" b="1">
+                <a:solidFill>
+                  <a:srgbClr val="5E6A75"/>
+                </a:solidFill>
+                <a:latin typeface="Verdana"/>
+                <a:cs typeface="Verdana"/>
+              </a:rPr>
+              <a:t>Общий канал</a:t>
+            </a:r>
+          </a:p>
+        </p:txBody>
+      </p:sp>
+      <p:sp>
+        <p:nvSpPr>
+          <p:cNvPr id="82" name="Shape 82"/>
+          <p:cNvSpPr txBox="1"/>
+          <p:nvPr/>
+        </p:nvSpPr>
+        <p:spPr>
+          <a:xfrm>
+            <a:off x="6126480" y="1417320"/>
+            <a:ext cx="3429000" cy="365760"/>
+          </a:xfrm>
+          <a:prstGeom prst="roundRect">
+            <a:avLst/>
+          </a:prstGeom>
+          <a:noFill/>
+          <a:ln>
+            <a:noFill/>
+          </a:ln>
+        </p:spPr>
+        <p:txBody>
+          <a:bodyPr wrap="square" lIns="101600" tIns="101600" rIns="101600" bIns="101600"/>
+          <a:lstStyle/>
+          <a:p>
+            <a:pPr algn="l"/>
+            <a:r>
+              <a:rPr lang="ru-RU" sz="1100" b="1">
+                <a:solidFill>
+                  <a:srgbClr val="5E6A75"/>
+                </a:solidFill>
+                <a:latin typeface="Verdana"/>
+                <a:cs typeface="Verdana"/>
+              </a:rPr>
+              <a:t>Фактический результат</a:t>
+            </a:r>
+          </a:p>
+        </p:txBody>
+      </p:sp>
+      <p:sp>
+        <p:nvSpPr>
+          <p:cNvPr id="83" name="Shape 83"/>
+          <p:cNvSpPr txBox="1"/>
+          <p:nvPr/>
+        </p:nvSpPr>
+        <p:spPr>
+          <a:xfrm>
+            <a:off x="9646920" y="1417320"/>
+            <a:ext cx="2103120" cy="365760"/>
+          </a:xfrm>
+          <a:prstGeom prst="roundRect">
+            <a:avLst/>
+          </a:prstGeom>
+          <a:noFill/>
+          <a:ln>
+            <a:noFill/>
+          </a:ln>
+        </p:spPr>
+        <p:txBody>
+          <a:bodyPr wrap="square" lIns="101600" tIns="101600" rIns="101600" bIns="101600"/>
+          <a:lstStyle/>
+          <a:p>
+            <a:pPr algn="l"/>
+            <a:r>
+              <a:rPr lang="ru-RU" sz="1100" b="1">
+                <a:solidFill>
+                  <a:srgbClr val="5E6A75"/>
+                </a:solidFill>
+                <a:latin typeface="Verdana"/>
+                <a:cs typeface="Verdana"/>
+              </a:rPr>
+              <a:t>Вывод</a:t>
+            </a:r>
+          </a:p>
+        </p:txBody>
+      </p:sp>
+      <p:sp>
+        <p:nvSpPr>
+          <p:cNvPr id="200" name="Shape 200"/>
+          <p:cNvSpPr txBox="1"/>
+          <p:nvPr/>
+        </p:nvSpPr>
+        <p:spPr>
+          <a:xfrm>
+            <a:off x="502920" y="1828800"/>
+            <a:ext cx="4434840" cy="685800"/>
+          </a:xfrm>
+          <a:prstGeom prst="roundRect">
+            <a:avLst/>
+          </a:prstGeom>
+          <a:solidFill>
+            <a:srgbClr val="FFFFFF"/>
+          </a:solidFill>
+          <a:ln w="12700">
+            <a:solidFill>
+              <a:srgbClr val="E3E7EB"/>
+            </a:solidFill>
+          </a:ln>
+        </p:spPr>
+        <p:txBody>
+          <a:bodyPr wrap="square" lIns="127000" tIns="127000" rIns="127000" bIns="127000"/>
+          <a:lstStyle/>
+          <a:p>
+            <a:pPr algn="l"/>
+            <a:r>
+              <a:rPr lang="ru-RU" sz="1200" b="0">
+                <a:solidFill>
+                  <a:srgbClr val="1A2730"/>
+                </a:solidFill>
+                <a:latin typeface="Verdana"/>
+                <a:cs typeface="Verdana"/>
+              </a:rPr>
+              <a:t>Доставка без общего канала</a:t>
+            </a:r>
+          </a:p>
+        </p:txBody>
+      </p:sp>
+      <p:sp>
+        <p:nvSpPr>
+          <p:cNvPr id="201" name="Shape 201"/>
+          <p:cNvSpPr txBox="1"/>
+          <p:nvPr/>
+        </p:nvSpPr>
+        <p:spPr>
+          <a:xfrm>
+            <a:off x="5029200" y="1828800"/>
+            <a:ext cx="1005840" cy="685800"/>
+          </a:xfrm>
+          <a:prstGeom prst="roundRect">
+            <a:avLst/>
+          </a:prstGeom>
+          <a:solidFill>
+            <a:srgbClr val="FEE2E2"/>
+          </a:solidFill>
+          <a:ln w="12700">
+            <a:solidFill>
+              <a:srgbClr val="E3E7EB"/>
+            </a:solidFill>
+          </a:ln>
+        </p:spPr>
+        <p:txBody>
+          <a:bodyPr wrap="square" lIns="76200" tIns="76200" rIns="76200" bIns="76200"/>
+          <a:lstStyle/>
+          <a:p>
+            <a:pPr algn="ctr"/>
+            <a:r>
+              <a:rPr lang="ru-RU" sz="1200" b="1">
+                <a:solidFill>
+                  <a:srgbClr val="B91C1C"/>
+                </a:solidFill>
+                <a:latin typeface="Verdana"/>
+                <a:cs typeface="Verdana"/>
+              </a:rPr>
+              <a:t>Нет</a:t>
+            </a:r>
+          </a:p>
+        </p:txBody>
+      </p:sp>
+      <p:sp>
+        <p:nvSpPr>
+          <p:cNvPr id="202" name="Shape 202"/>
+          <p:cNvSpPr txBox="1"/>
+          <p:nvPr/>
+        </p:nvSpPr>
+        <p:spPr>
+          <a:xfrm>
+            <a:off x="6126480" y="1828800"/>
+            <a:ext cx="3429000" cy="685800"/>
+          </a:xfrm>
+          <a:prstGeom prst="roundRect">
+            <a:avLst/>
+          </a:prstGeom>
+          <a:solidFill>
+            <a:srgbClr val="FFFFFF"/>
+          </a:solidFill>
+          <a:ln w="12700">
+            <a:solidFill>
+              <a:srgbClr val="E3E7EB"/>
+            </a:solidFill>
+          </a:ln>
+        </p:spPr>
+        <p:txBody>
+          <a:bodyPr wrap="square" lIns="127000" tIns="127000" rIns="127000" bIns="127000"/>
+          <a:lstStyle/>
+          <a:p>
+            <a:pPr algn="l"/>
+            <a:r>
+              <a:rPr lang="ru-RU" sz="1200" b="0">
+                <a:solidFill>
+                  <a:srgbClr val="1A2730"/>
+                </a:solidFill>
+                <a:latin typeface="Verdana"/>
+                <a:cs typeface="Verdana"/>
+              </a:rPr>
+              <a:t>Тайм-аут 10 000 мс</a:t>
+            </a:r>
+          </a:p>
+        </p:txBody>
+      </p:sp>
+      <p:sp>
+        <p:nvSpPr>
+          <p:cNvPr id="203" name="Shape 203"/>
+          <p:cNvSpPr txBox="1"/>
+          <p:nvPr/>
+        </p:nvSpPr>
+        <p:spPr>
+          <a:xfrm>
+            <a:off x="9646920" y="1828800"/>
+            <a:ext cx="2103120" cy="685800"/>
+          </a:xfrm>
+          <a:prstGeom prst="roundRect">
+            <a:avLst/>
+          </a:prstGeom>
+          <a:solidFill>
+            <a:srgbClr val="FEE2E2"/>
+          </a:solidFill>
+          <a:ln w="12700">
+            <a:solidFill>
+              <a:srgbClr val="E3E7EB"/>
+            </a:solidFill>
+          </a:ln>
+        </p:spPr>
+        <p:txBody>
+          <a:bodyPr wrap="square" lIns="101600" tIns="101600" rIns="101600" bIns="101600"/>
+          <a:lstStyle/>
+          <a:p>
+            <a:pPr algn="ctr"/>
+            <a:r>
+              <a:rPr lang="ru-RU" sz="1100" b="1">
+                <a:solidFill>
+                  <a:srgbClr val="B91C1C"/>
+                </a:solidFill>
+                <a:latin typeface="Verdana"/>
+                <a:cs typeface="Verdana"/>
+              </a:rPr>
+              <a:t>Ограничение воспроизведено</a:t>
+            </a:r>
+          </a:p>
+        </p:txBody>
+      </p:sp>
+      <p:sp>
+        <p:nvSpPr>
+          <p:cNvPr id="210" name="Shape 210"/>
+          <p:cNvSpPr txBox="1"/>
+          <p:nvPr/>
+        </p:nvSpPr>
+        <p:spPr>
+          <a:xfrm>
+            <a:off x="502920" y="2560320"/>
+            <a:ext cx="4434840" cy="685800"/>
+          </a:xfrm>
+          <a:prstGeom prst="roundRect">
+            <a:avLst/>
+          </a:prstGeom>
+          <a:solidFill>
+            <a:srgbClr val="FFFFFF"/>
+          </a:solidFill>
+          <a:ln w="12700">
+            <a:solidFill>
+              <a:srgbClr val="E3E7EB"/>
+            </a:solidFill>
+          </a:ln>
+        </p:spPr>
+        <p:txBody>
+          <a:bodyPr wrap="square" lIns="127000" tIns="127000" rIns="127000" bIns="127000"/>
+          <a:lstStyle/>
+          <a:p>
+            <a:pPr algn="l"/>
+            <a:r>
+              <a:rPr lang="ru-RU" sz="1200" b="0">
+                <a:solidFill>
+                  <a:srgbClr val="1A2730"/>
+                </a:solidFill>
+                <a:latin typeface="Verdana"/>
+                <a:cs typeface="Verdana"/>
+              </a:rPr>
+              <a:t>Доставка с общим каналом</a:t>
+            </a:r>
+          </a:p>
+        </p:txBody>
+      </p:sp>
+      <p:sp>
+        <p:nvSpPr>
+          <p:cNvPr id="211" name="Shape 211"/>
+          <p:cNvSpPr txBox="1"/>
+          <p:nvPr/>
+        </p:nvSpPr>
+        <p:spPr>
+          <a:xfrm>
+            <a:off x="5029200" y="2560320"/>
+            <a:ext cx="1005840" cy="685800"/>
+          </a:xfrm>
+          <a:prstGeom prst="roundRect">
+            <a:avLst/>
+          </a:prstGeom>
+          <a:solidFill>
+            <a:srgbClr val="E6F4F1"/>
+          </a:solidFill>
+          <a:ln w="12700">
+            <a:solidFill>
+              <a:srgbClr val="14A085"/>
+            </a:solidFill>
+          </a:ln>
+        </p:spPr>
+        <p:txBody>
+          <a:bodyPr wrap="square" lIns="76200" tIns="76200" rIns="76200" bIns="76200"/>
+          <a:lstStyle/>
+          <a:p>
+            <a:pPr algn="ctr"/>
+            <a:r>
+              <a:rPr lang="ru-RU" sz="1200" b="1">
+                <a:solidFill>
+                  <a:srgbClr val="14A085"/>
+                </a:solidFill>
+                <a:latin typeface="Verdana"/>
+                <a:cs typeface="Verdana"/>
+              </a:rPr>
+              <a:t>Да</a:t>
+            </a:r>
+          </a:p>
+        </p:txBody>
+      </p:sp>
+      <p:sp>
+        <p:nvSpPr>
+          <p:cNvPr id="212" name="Shape 212"/>
+          <p:cNvSpPr txBox="1"/>
+          <p:nvPr/>
+        </p:nvSpPr>
+        <p:spPr>
+          <a:xfrm>
+            <a:off x="6126480" y="2560320"/>
+            <a:ext cx="3429000" cy="685800"/>
+          </a:xfrm>
+          <a:prstGeom prst="roundRect">
+            <a:avLst/>
+          </a:prstGeom>
+          <a:solidFill>
+            <a:srgbClr val="FFFFFF"/>
+          </a:solidFill>
+          <a:ln w="12700">
+            <a:solidFill>
+              <a:srgbClr val="E3E7EB"/>
+            </a:solidFill>
+          </a:ln>
+        </p:spPr>
+        <p:txBody>
+          <a:bodyPr wrap="square" lIns="127000" tIns="127000" rIns="127000" bIns="127000"/>
+          <a:lstStyle/>
+          <a:p>
+            <a:pPr algn="l"/>
+            <a:r>
+              <a:rPr lang="ru-RU" sz="1200" b="0">
+                <a:solidFill>
+                  <a:srgbClr val="1A2730"/>
+                </a:solidFill>
+                <a:latin typeface="Verdana"/>
+                <a:cs typeface="Verdana"/>
+              </a:rPr>
+              <a:t>Событие доставлено · задержка ≈ 9,5 мс</a:t>
+            </a:r>
+          </a:p>
+        </p:txBody>
+      </p:sp>
+      <p:sp>
+        <p:nvSpPr>
+          <p:cNvPr id="213" name="Shape 213"/>
+          <p:cNvSpPr txBox="1"/>
+          <p:nvPr/>
+        </p:nvSpPr>
+        <p:spPr>
+          <a:xfrm>
+            <a:off x="9646920" y="2560320"/>
+            <a:ext cx="2103120" cy="685800"/>
+          </a:xfrm>
+          <a:prstGeom prst="roundRect">
+            <a:avLst/>
+          </a:prstGeom>
+          <a:solidFill>
+            <a:srgbClr val="E6F4F1"/>
+          </a:solidFill>
+          <a:ln w="12700">
+            <a:solidFill>
+              <a:srgbClr val="14A085"/>
+            </a:solidFill>
+          </a:ln>
+        </p:spPr>
+        <p:txBody>
+          <a:bodyPr wrap="square" lIns="101600" tIns="101600" rIns="101600" bIns="101600"/>
+          <a:lstStyle/>
+          <a:p>
+            <a:pPr algn="ctr"/>
+            <a:r>
+              <a:rPr lang="ru-RU" sz="1100" b="1">
+                <a:solidFill>
+                  <a:srgbClr val="14A085"/>
+                </a:solidFill>
+                <a:latin typeface="Verdana"/>
+                <a:cs typeface="Verdana"/>
+              </a:rPr>
+              <a:t>Ограничение устранено</a:t>
+            </a:r>
+          </a:p>
+        </p:txBody>
+      </p:sp>
+      <p:sp>
+        <p:nvSpPr>
+          <p:cNvPr id="220" name="Shape 220"/>
+          <p:cNvSpPr txBox="1"/>
+          <p:nvPr/>
+        </p:nvSpPr>
+        <p:spPr>
+          <a:xfrm>
+            <a:off x="502920" y="3291840"/>
+            <a:ext cx="4434840" cy="685800"/>
+          </a:xfrm>
+          <a:prstGeom prst="roundRect">
+            <a:avLst/>
+          </a:prstGeom>
+          <a:solidFill>
+            <a:srgbClr val="FFFFFF"/>
+          </a:solidFill>
+          <a:ln w="12700">
+            <a:solidFill>
+              <a:srgbClr val="E3E7EB"/>
+            </a:solidFill>
+          </a:ln>
+        </p:spPr>
+        <p:txBody>
+          <a:bodyPr wrap="square" lIns="127000" tIns="127000" rIns="127000" bIns="127000"/>
+          <a:lstStyle/>
+          <a:p>
+            <a:pPr algn="l"/>
+            <a:r>
+              <a:rPr lang="ru-RU" sz="1200" b="0">
+                <a:solidFill>
+                  <a:srgbClr val="1A2730"/>
+                </a:solidFill>
+                <a:latin typeface="Verdana"/>
+                <a:cs typeface="Verdana"/>
+              </a:rPr>
+              <a:t>Серия из 30 итераций</a:t>
+            </a:r>
+          </a:p>
+        </p:txBody>
+      </p:sp>
+      <p:sp>
+        <p:nvSpPr>
+          <p:cNvPr id="221" name="Shape 221"/>
+          <p:cNvSpPr txBox="1"/>
+          <p:nvPr/>
+        </p:nvSpPr>
+        <p:spPr>
+          <a:xfrm>
+            <a:off x="5029200" y="3291840"/>
+            <a:ext cx="1005840" cy="685800"/>
+          </a:xfrm>
+          <a:prstGeom prst="roundRect">
+            <a:avLst/>
+          </a:prstGeom>
+          <a:solidFill>
+            <a:srgbClr val="FFFFFF"/>
+          </a:solidFill>
+          <a:ln w="12700">
+            <a:solidFill>
+              <a:srgbClr val="E3E7EB"/>
+            </a:solidFill>
+          </a:ln>
+        </p:spPr>
+        <p:txBody>
+          <a:bodyPr wrap="square" lIns="76200" tIns="76200" rIns="76200" bIns="76200"/>
+          <a:lstStyle/>
+          <a:p>
+            <a:pPr algn="ctr"/>
+            <a:r>
+              <a:rPr lang="ru-RU" sz="1200" b="1">
+                <a:solidFill>
+                  <a:srgbClr val="14A085"/>
+                </a:solidFill>
+                <a:latin typeface="Verdana"/>
+                <a:cs typeface="Verdana"/>
+              </a:rPr>
+              <a:t>Да</a:t>
+            </a:r>
+          </a:p>
+        </p:txBody>
+      </p:sp>
+      <p:sp>
+        <p:nvSpPr>
+          <p:cNvPr id="222" name="Shape 222"/>
+          <p:cNvSpPr txBox="1"/>
+          <p:nvPr/>
+        </p:nvSpPr>
+        <p:spPr>
+          <a:xfrm>
+            <a:off x="6126480" y="3291840"/>
+            <a:ext cx="3429000" cy="685800"/>
+          </a:xfrm>
+          <a:prstGeom prst="roundRect">
+            <a:avLst/>
+          </a:prstGeom>
+          <a:solidFill>
+            <a:srgbClr val="FFFFFF"/>
+          </a:solidFill>
+          <a:ln w="12700">
+            <a:solidFill>
+              <a:srgbClr val="E3E7EB"/>
+            </a:solidFill>
+          </a:ln>
+        </p:spPr>
+        <p:txBody>
+          <a:bodyPr wrap="square" lIns="127000" tIns="127000" rIns="127000" bIns="127000"/>
+          <a:lstStyle/>
+          <a:p>
+            <a:pPr algn="l"/>
+            <a:r>
+              <a:rPr lang="ru-RU" sz="1200" b="0">
+                <a:solidFill>
+                  <a:srgbClr val="1A2730"/>
+                </a:solidFill>
+                <a:latin typeface="Verdana"/>
+                <a:cs typeface="Verdana"/>
+              </a:rPr>
+              <a:t>30 из 30 · 95 % быстрее 13,8 мс</a:t>
+            </a:r>
+          </a:p>
+        </p:txBody>
+      </p:sp>
+      <p:sp>
+        <p:nvSpPr>
+          <p:cNvPr id="223" name="Shape 223"/>
+          <p:cNvSpPr txBox="1"/>
+          <p:nvPr/>
+        </p:nvSpPr>
+        <p:spPr>
+          <a:xfrm>
+            <a:off x="9646920" y="3291840"/>
+            <a:ext cx="2103120" cy="685800"/>
+          </a:xfrm>
+          <a:prstGeom prst="roundRect">
+            <a:avLst/>
+          </a:prstGeom>
+          <a:solidFill>
+            <a:srgbClr val="FFFFFF"/>
+          </a:solidFill>
+          <a:ln w="12700">
+            <a:solidFill>
+              <a:srgbClr val="E3E7EB"/>
+            </a:solidFill>
+          </a:ln>
+        </p:spPr>
+        <p:txBody>
+          <a:bodyPr wrap="square" lIns="101600" tIns="101600" rIns="101600" bIns="101600"/>
+          <a:lstStyle/>
+          <a:p>
+            <a:pPr algn="ctr"/>
+            <a:r>
+              <a:rPr lang="ru-RU" sz="1100" b="1">
+                <a:solidFill>
+                  <a:srgbClr val="14A085"/>
+                </a:solidFill>
+                <a:latin typeface="Verdana"/>
+                <a:cs typeface="Verdana"/>
+              </a:rPr>
+              <a:t>Повторяемость подтверждена</a:t>
+            </a:r>
+          </a:p>
+        </p:txBody>
+      </p:sp>
+      <p:sp>
+        <p:nvSpPr>
+          <p:cNvPr id="230" name="Shape 230"/>
+          <p:cNvSpPr txBox="1"/>
+          <p:nvPr/>
+        </p:nvSpPr>
+        <p:spPr>
+          <a:xfrm>
+            <a:off x="502920" y="4023360"/>
+            <a:ext cx="4434840" cy="685800"/>
+          </a:xfrm>
+          <a:prstGeom prst="roundRect">
+            <a:avLst/>
+          </a:prstGeom>
+          <a:solidFill>
+            <a:srgbClr val="FFFFFF"/>
+          </a:solidFill>
+          <a:ln w="12700">
+            <a:solidFill>
+              <a:srgbClr val="E3E7EB"/>
+            </a:solidFill>
+          </a:ln>
+        </p:spPr>
+        <p:txBody>
+          <a:bodyPr wrap="square" lIns="127000" tIns="127000" rIns="127000" bIns="127000"/>
+          <a:lstStyle/>
+          <a:p>
+            <a:pPr algn="l"/>
+            <a:r>
+              <a:rPr lang="ru-RU" sz="1200" b="0">
+                <a:solidFill>
+                  <a:srgbClr val="1A2730"/>
+                </a:solidFill>
+                <a:latin typeface="Verdana"/>
+                <a:cs typeface="Verdana"/>
+              </a:rPr>
+              <a:t>Повторная подписка после разрыва</a:t>
+            </a:r>
+          </a:p>
+        </p:txBody>
+      </p:sp>
+      <p:sp>
+        <p:nvSpPr>
+          <p:cNvPr id="231" name="Shape 231"/>
+          <p:cNvSpPr txBox="1"/>
+          <p:nvPr/>
+        </p:nvSpPr>
+        <p:spPr>
+          <a:xfrm>
+            <a:off x="5029200" y="4023360"/>
+            <a:ext cx="1005840" cy="685800"/>
+          </a:xfrm>
+          <a:prstGeom prst="roundRect">
+            <a:avLst/>
+          </a:prstGeom>
+          <a:solidFill>
+            <a:srgbClr val="FFFFFF"/>
+          </a:solidFill>
+          <a:ln w="12700">
+            <a:solidFill>
+              <a:srgbClr val="E3E7EB"/>
+            </a:solidFill>
+          </a:ln>
+        </p:spPr>
+        <p:txBody>
+          <a:bodyPr wrap="square" lIns="76200" tIns="76200" rIns="76200" bIns="76200"/>
+          <a:lstStyle/>
+          <a:p>
+            <a:pPr algn="ctr"/>
+            <a:r>
+              <a:rPr lang="ru-RU" sz="1200" b="1">
+                <a:solidFill>
+                  <a:srgbClr val="14A085"/>
+                </a:solidFill>
+                <a:latin typeface="Verdana"/>
+                <a:cs typeface="Verdana"/>
+              </a:rPr>
+              <a:t>Да</a:t>
+            </a:r>
+          </a:p>
+        </p:txBody>
+      </p:sp>
+      <p:sp>
+        <p:nvSpPr>
+          <p:cNvPr id="232" name="Shape 232"/>
+          <p:cNvSpPr txBox="1"/>
+          <p:nvPr/>
+        </p:nvSpPr>
+        <p:spPr>
+          <a:xfrm>
+            <a:off x="6126480" y="4023360"/>
+            <a:ext cx="3429000" cy="685800"/>
+          </a:xfrm>
+          <a:prstGeom prst="roundRect">
+            <a:avLst/>
+          </a:prstGeom>
+          <a:solidFill>
+            <a:srgbClr val="FFFFFF"/>
+          </a:solidFill>
+          <a:ln w="12700">
+            <a:solidFill>
+              <a:srgbClr val="E3E7EB"/>
+            </a:solidFill>
+          </a:ln>
+        </p:spPr>
+        <p:txBody>
+          <a:bodyPr wrap="square" lIns="127000" tIns="127000" rIns="127000" bIns="127000"/>
+          <a:lstStyle/>
+          <a:p>
+            <a:pPr algn="l"/>
+            <a:r>
+              <a:rPr lang="ru-RU" sz="1200" b="0">
+                <a:solidFill>
+                  <a:srgbClr val="1A2730"/>
+                </a:solidFill>
+                <a:latin typeface="Verdana"/>
+                <a:cs typeface="Verdana"/>
+              </a:rPr>
+              <a:t>Событие после восстановления · 15,2 мс</a:t>
+            </a:r>
+          </a:p>
+        </p:txBody>
+      </p:sp>
+      <p:sp>
+        <p:nvSpPr>
+          <p:cNvPr id="233" name="Shape 233"/>
+          <p:cNvSpPr txBox="1"/>
+          <p:nvPr/>
+        </p:nvSpPr>
+        <p:spPr>
+          <a:xfrm>
+            <a:off x="9646920" y="4023360"/>
+            <a:ext cx="2103120" cy="685800"/>
+          </a:xfrm>
+          <a:prstGeom prst="roundRect">
+            <a:avLst/>
+          </a:prstGeom>
+          <a:solidFill>
+            <a:srgbClr val="FFFFFF"/>
+          </a:solidFill>
+          <a:ln w="12700">
+            <a:solidFill>
+              <a:srgbClr val="E3E7EB"/>
+            </a:solidFill>
+          </a:ln>
+        </p:spPr>
+        <p:txBody>
+          <a:bodyPr wrap="square" lIns="101600" tIns="101600" rIns="101600" bIns="101600"/>
+          <a:lstStyle/>
+          <a:p>
+            <a:pPr algn="ctr"/>
+            <a:r>
+              <a:rPr lang="ru-RU" sz="1100" b="1">
+                <a:solidFill>
+                  <a:srgbClr val="14A085"/>
+                </a:solidFill>
+                <a:latin typeface="Verdana"/>
+                <a:cs typeface="Verdana"/>
+              </a:rPr>
+              <a:t>Подписка восстановлена</a:t>
+            </a:r>
+          </a:p>
+        </p:txBody>
+      </p:sp>
+      <p:sp>
+        <p:nvSpPr>
+          <p:cNvPr id="240" name="Shape 240"/>
+          <p:cNvSpPr txBox="1"/>
+          <p:nvPr/>
+        </p:nvSpPr>
+        <p:spPr>
+          <a:xfrm>
+            <a:off x="502920" y="4754880"/>
+            <a:ext cx="4434840" cy="685800"/>
+          </a:xfrm>
+          <a:prstGeom prst="roundRect">
+            <a:avLst/>
+          </a:prstGeom>
+          <a:solidFill>
+            <a:srgbClr val="FFFFFF"/>
+          </a:solidFill>
+          <a:ln w="12700">
+            <a:solidFill>
+              <a:srgbClr val="E3E7EB"/>
+            </a:solidFill>
+          </a:ln>
+        </p:spPr>
+        <p:txBody>
+          <a:bodyPr wrap="square" lIns="127000" tIns="127000" rIns="127000" bIns="127000"/>
+          <a:lstStyle/>
+          <a:p>
+            <a:pPr algn="l"/>
+            <a:r>
+              <a:rPr lang="ru-RU" sz="1200" b="0">
+                <a:solidFill>
+                  <a:srgbClr val="1A2730"/>
+                </a:solidFill>
+                <a:latin typeface="Verdana"/>
+                <a:cs typeface="Verdana"/>
+              </a:rPr>
+              <a:t>Переключение после отказа узла</a:t>
+            </a:r>
+          </a:p>
+        </p:txBody>
+      </p:sp>
+      <p:sp>
+        <p:nvSpPr>
+          <p:cNvPr id="241" name="Shape 241"/>
+          <p:cNvSpPr txBox="1"/>
+          <p:nvPr/>
+        </p:nvSpPr>
+        <p:spPr>
+          <a:xfrm>
+            <a:off x="5029200" y="4754880"/>
+            <a:ext cx="1005840" cy="685800"/>
+          </a:xfrm>
+          <a:prstGeom prst="roundRect">
+            <a:avLst/>
+          </a:prstGeom>
+          <a:solidFill>
+            <a:srgbClr val="FFFFFF"/>
+          </a:solidFill>
+          <a:ln w="12700">
+            <a:solidFill>
+              <a:srgbClr val="E3E7EB"/>
+            </a:solidFill>
+          </a:ln>
+        </p:spPr>
+        <p:txBody>
+          <a:bodyPr wrap="square" lIns="76200" tIns="76200" rIns="76200" bIns="76200"/>
+          <a:lstStyle/>
+          <a:p>
+            <a:pPr algn="ctr"/>
+            <a:r>
+              <a:rPr lang="ru-RU" sz="1200" b="1">
+                <a:solidFill>
+                  <a:srgbClr val="14A085"/>
+                </a:solidFill>
+                <a:latin typeface="Verdana"/>
+                <a:cs typeface="Verdana"/>
+              </a:rPr>
+              <a:t>Да</a:t>
+            </a:r>
+          </a:p>
+        </p:txBody>
+      </p:sp>
+      <p:sp>
+        <p:nvSpPr>
+          <p:cNvPr id="242" name="Shape 242"/>
+          <p:cNvSpPr txBox="1"/>
+          <p:nvPr/>
+        </p:nvSpPr>
+        <p:spPr>
+          <a:xfrm>
+            <a:off x="6126480" y="4754880"/>
+            <a:ext cx="3429000" cy="685800"/>
+          </a:xfrm>
+          <a:prstGeom prst="roundRect">
+            <a:avLst/>
+          </a:prstGeom>
+          <a:solidFill>
+            <a:srgbClr val="FFFFFF"/>
+          </a:solidFill>
+          <a:ln w="12700">
+            <a:solidFill>
+              <a:srgbClr val="E3E7EB"/>
+            </a:solidFill>
+          </a:ln>
+        </p:spPr>
+        <p:txBody>
+          <a:bodyPr wrap="square" lIns="127000" tIns="127000" rIns="127000" bIns="127000"/>
+          <a:lstStyle/>
+          <a:p>
+            <a:pPr algn="l"/>
+            <a:r>
+              <a:rPr lang="ru-RU" sz="1200" b="0">
+                <a:solidFill>
+                  <a:srgbClr val="1A2730"/>
+                </a:solidFill>
+                <a:latin typeface="Verdana"/>
+                <a:cs typeface="Verdana"/>
+              </a:rPr>
+              <a:t>Узел 2 → узел 1, событие получено</a:t>
+            </a:r>
+          </a:p>
+        </p:txBody>
+      </p:sp>
+      <p:sp>
+        <p:nvSpPr>
+          <p:cNvPr id="243" name="Shape 243"/>
+          <p:cNvSpPr txBox="1"/>
+          <p:nvPr/>
+        </p:nvSpPr>
+        <p:spPr>
+          <a:xfrm>
+            <a:off x="9646920" y="4754880"/>
+            <a:ext cx="2103120" cy="685800"/>
+          </a:xfrm>
+          <a:prstGeom prst="roundRect">
+            <a:avLst/>
+          </a:prstGeom>
+          <a:solidFill>
+            <a:srgbClr val="FFFFFF"/>
+          </a:solidFill>
+          <a:ln w="12700">
+            <a:solidFill>
+              <a:srgbClr val="E3E7EB"/>
+            </a:solidFill>
+          </a:ln>
+        </p:spPr>
+        <p:txBody>
+          <a:bodyPr wrap="square" lIns="101600" tIns="101600" rIns="101600" bIns="101600"/>
+          <a:lstStyle/>
+          <a:p>
+            <a:pPr algn="ctr"/>
+            <a:r>
+              <a:rPr lang="ru-RU" sz="1100" b="1">
+                <a:solidFill>
+                  <a:srgbClr val="14A085"/>
+                </a:solidFill>
+                <a:latin typeface="Verdana"/>
+                <a:cs typeface="Verdana"/>
+              </a:rPr>
+              <a:t>Восстановление после отказа</a:t>
+            </a:r>
+          </a:p>
+        </p:txBody>
+      </p:sp>
+      <p:sp>
+        <p:nvSpPr>
+          <p:cNvPr id="250" name="Shape 250"/>
+          <p:cNvSpPr txBox="1"/>
+          <p:nvPr/>
+        </p:nvSpPr>
+        <p:spPr>
+          <a:xfrm>
+            <a:off x="502920" y="5669280"/>
+            <a:ext cx="11247120" cy="594360"/>
+          </a:xfrm>
+          <a:prstGeom prst="roundRect">
+            <a:avLst/>
+          </a:prstGeom>
+          <a:noFill/>
+          <a:ln>
+            <a:noFill/>
+          </a:ln>
+        </p:spPr>
+        <p:txBody>
+          <a:bodyPr wrap="square" lIns="177800" tIns="177800" rIns="177800" bIns="177800"/>
+          <a:lstStyle/>
+          <a:p>
+            <a:pPr algn="ctr"/>
+            <a:r>
+              <a:rPr lang="ru-RU" sz="1200" b="0">
+                <a:solidFill>
+                  <a:srgbClr val="5E6A75"/>
+                </a:solidFill>
+                <a:latin typeface="Verdana"/>
+                <a:cs typeface="Verdana"/>
+              </a:rPr>
+              <a:t>Сопоставление режимов на одном стенде с одним кодом показывает причинную связь между включением межузлового канала и доставкой события.</a:t>
+            </a:r>
+          </a:p>
+        </p:txBody>
+      </p:sp>
+      <p:sp>
+        <p:nvSpPr>
+          <p:cNvPr id="900" name="Shape 900"/>
+          <p:cNvSpPr txBox="1"/>
+          <p:nvPr/>
+        </p:nvSpPr>
+        <p:spPr>
+          <a:xfrm>
+            <a:off x="594360" y="6510528"/>
+            <a:ext cx="7315200" cy="201168"/>
+          </a:xfrm>
+          <a:prstGeom prst="roundRect">
+            <a:avLst/>
+          </a:prstGeom>
+          <a:noFill/>
+          <a:ln>
+            <a:noFill/>
+          </a:ln>
+        </p:spPr>
+        <p:txBody>
           <a:bodyPr wrap="square" lIns="177800" tIns="177800" rIns="177800" bIns="177800"/>
           <a:lstStyle/>
           <a:p>
@@ -2438,7 +3149,44 @@
                 <a:latin typeface="Verdana"/>
                 <a:cs typeface="Verdana"/>
               </a:rPr>
-              <a:t>В реальном времени · 13</a:t>
+              <a:t>В реальном времени</a:t>
+            </a:r>
+          </a:p>
+        </p:txBody>
+      </p:sp>
+      <p:sp>
+        <p:nvSpPr>
+          <p:cNvPr id="901" name="Shape 901"/>
+          <p:cNvSpPr txBox="1"/>
+          <p:nvPr/>
+        </p:nvSpPr>
+        <p:spPr>
+          <a:xfrm>
+            <a:off x="4251960" y="6419088"/>
+            <a:ext cx="7315200" cy="292608"/>
+          </a:xfrm>
+          <a:prstGeom prst="roundRect">
+            <a:avLst/>
+          </a:prstGeom>
+          <a:noFill/>
+          <a:ln>
+            <a:noFill/>
+          </a:ln>
+        </p:spPr>
+        <p:txBody>
+          <a:bodyPr wrap="square" lIns="177800" tIns="177800" rIns="177800" bIns="177800"/>
+          <a:lstStyle/>
+          <a:p>
+            <a:pPr algn="r"/>
+            <a:r>
+              <a:rPr lang="ru-RU" sz="1200" b="1">
+                <a:solidFill>
+                  <a:srgbClr val="5E6A75"/>
+                </a:solidFill>
+                <a:latin typeface="Verdana"/>
+                <a:cs typeface="Verdana"/>
+              </a:rPr>
+              <a:t>13/15</a:t>
             </a:r>
           </a:p>
         </p:txBody>
@@ -2508,7 +3256,7 @@
                 <a:latin typeface="Verdana"/>
                 <a:cs typeface="Verdana"/>
               </a:rPr>
-              <a:t>Главный результат</a:t>
+              <a:t>Чего решение не делает</a:t>
             </a:r>
           </a:p>
         </p:txBody>
@@ -2545,7 +3293,7 @@
                 <a:latin typeface="Verdana"/>
                 <a:cs typeface="Verdana"/>
               </a:rPr>
-              <a:t>Один и тот же сценарий, разница — только в общем канале</a:t>
+              <a:t>Это интерфейсная синхронизация, а не строгий промышленный режим реального времени</a:t>
             </a:r>
           </a:p>
         </p:txBody>
@@ -2558,43 +3306,43 @@
         </p:nvSpPr>
         <p:spPr>
           <a:xfrm>
-            <a:off x="685800" y="1554480"/>
-            <a:ext cx="5349240" cy="3291840"/>
-          </a:xfrm>
-          <a:prstGeom prst="roundRect">
-            <a:avLst/>
-          </a:prstGeom>
-          <a:solidFill>
-            <a:srgbClr val="FEE2E2"/>
-          </a:solidFill>
-          <a:ln w="12700">
-            <a:solidFill>
-              <a:srgbClr val="B91C1C"/>
-            </a:solidFill>
-          </a:ln>
-        </p:spPr>
-        <p:txBody>
-          <a:bodyPr wrap="square" lIns="177800" tIns="177800" rIns="177800" bIns="177800"/>
-          <a:lstStyle/>
-          <a:p>
-            <a:pPr algn="ctr"/>
-            <a:r>
-              <a:rPr lang="ru-RU" sz="2000" b="1">
-                <a:solidFill>
-                  <a:srgbClr val="B91C1C"/>
-                </a:solidFill>
-                <a:latin typeface="Verdana"/>
-                <a:cs typeface="Verdana"/>
-              </a:rPr>
-              <a:t>Без общего канала</a:t>
-            </a:r>
-          </a:p>
-          <a:p>
-            <a:pPr algn="ctr"/>
-            <a:r>
-              <a:rPr lang="ru-RU" sz="2000" b="1">
-                <a:solidFill>
-                  <a:srgbClr val="B91C1C"/>
+            <a:off x="685800" y="1508760"/>
+            <a:ext cx="3520440" cy="4343400"/>
+          </a:xfrm>
+          <a:prstGeom prst="roundRect">
+            <a:avLst/>
+          </a:prstGeom>
+          <a:solidFill>
+            <a:srgbClr val="FFFFFF"/>
+          </a:solidFill>
+          <a:ln w="12700">
+            <a:solidFill>
+              <a:srgbClr val="E3E7EB"/>
+            </a:solidFill>
+          </a:ln>
+        </p:spPr>
+        <p:txBody>
+          <a:bodyPr wrap="square" lIns="177800" tIns="177800" rIns="177800" bIns="177800"/>
+          <a:lstStyle/>
+          <a:p>
+            <a:pPr algn="l"/>
+            <a:r>
+              <a:rPr lang="ru-RU" sz="1400" b="0">
+                <a:solidFill>
+                  <a:srgbClr val="1A2730"/>
+                </a:solidFill>
+                <a:latin typeface="Verdana"/>
+                <a:cs typeface="Verdana"/>
+              </a:rPr>
+              <a:t>Задержка не нулевая</a:t>
+            </a:r>
+          </a:p>
+          <a:p>
+            <a:pPr algn="l"/>
+            <a:r>
+              <a:rPr lang="ru-RU" sz="1400" b="0">
+                <a:solidFill>
+                  <a:srgbClr val="1A2730"/>
                 </a:solidFill>
                 <a:latin typeface="Verdana"/>
                 <a:cs typeface="Verdana"/>
@@ -2603,24 +3351,24 @@
             </a:r>
           </a:p>
           <a:p>
-            <a:pPr algn="ctr"/>
-            <a:r>
-              <a:rPr lang="ru-RU" sz="2000" b="1">
-                <a:solidFill>
-                  <a:srgbClr val="B91C1C"/>
-                </a:solidFill>
-                <a:latin typeface="Verdana"/>
-                <a:cs typeface="Verdana"/>
-              </a:rPr>
-              <a:t>Событие так и не пришло.</a:t>
-            </a:r>
-          </a:p>
-          <a:p>
-            <a:pPr algn="ctr"/>
-            <a:r>
-              <a:rPr lang="ru-RU" sz="2000" b="1">
-                <a:solidFill>
-                  <a:srgbClr val="B91C1C"/>
+            <a:pPr algn="l"/>
+            <a:r>
+              <a:rPr lang="ru-RU" sz="1400" b="0">
+                <a:solidFill>
+                  <a:srgbClr val="1A2730"/>
+                </a:solidFill>
+                <a:latin typeface="Verdana"/>
+                <a:cs typeface="Verdana"/>
+              </a:rPr>
+              <a:t>Событие проходит через два экземпляра и общий канал.</a:t>
+            </a:r>
+          </a:p>
+          <a:p>
+            <a:pPr algn="l"/>
+            <a:r>
+              <a:rPr lang="ru-RU" sz="1400" b="0">
+                <a:solidFill>
+                  <a:srgbClr val="1A2730"/>
                 </a:solidFill>
                 <a:latin typeface="Verdana"/>
                 <a:cs typeface="Verdana"/>
@@ -2629,16 +3377,16 @@
             </a:r>
           </a:p>
           <a:p>
-            <a:pPr algn="ctr"/>
-            <a:r>
-              <a:rPr lang="ru-RU" sz="2000" b="1">
-                <a:solidFill>
-                  <a:srgbClr val="B91C1C"/>
-                </a:solidFill>
-                <a:latin typeface="Verdana"/>
-                <a:cs typeface="Verdana"/>
-              </a:rPr>
-              <a:t>Клиент ждал 10 секунд — ничего.</a:t>
+            <a:pPr algn="l"/>
+            <a:r>
+              <a:rPr lang="ru-RU" sz="1400" b="0">
+                <a:solidFill>
+                  <a:srgbClr val="1A2730"/>
+                </a:solidFill>
+                <a:latin typeface="Verdana"/>
+                <a:cs typeface="Verdana"/>
+              </a:rPr>
+              <a:t>На стенде получилось ~7 мс в среднем.</a:t>
             </a:r>
           </a:p>
         </p:txBody>
@@ -2651,41 +3399,41 @@
         </p:nvSpPr>
         <p:spPr>
           <a:xfrm>
-            <a:off x="6172200" y="1554480"/>
-            <a:ext cx="5349240" cy="3291840"/>
-          </a:xfrm>
-          <a:prstGeom prst="roundRect">
-            <a:avLst/>
-          </a:prstGeom>
-          <a:solidFill>
-            <a:srgbClr val="E6F4F1"/>
-          </a:solidFill>
-          <a:ln w="12700">
-            <a:solidFill>
-              <a:srgbClr val="14A085"/>
-            </a:solidFill>
-          </a:ln>
-        </p:spPr>
-        <p:txBody>
-          <a:bodyPr wrap="square" lIns="177800" tIns="177800" rIns="177800" bIns="177800"/>
-          <a:lstStyle/>
-          <a:p>
-            <a:pPr algn="ctr"/>
-            <a:r>
-              <a:rPr lang="ru-RU" sz="2000" b="1">
-                <a:solidFill>
-                  <a:srgbClr val="1A2730"/>
-                </a:solidFill>
-                <a:latin typeface="Verdana"/>
-                <a:cs typeface="Verdana"/>
-              </a:rPr>
-              <a:t>С общим каналом</a:t>
-            </a:r>
-          </a:p>
-          <a:p>
-            <a:pPr algn="ctr"/>
-            <a:r>
-              <a:rPr lang="ru-RU" sz="2000" b="1">
+            <a:off x="4389120" y="1508760"/>
+            <a:ext cx="3520440" cy="4343400"/>
+          </a:xfrm>
+          <a:prstGeom prst="roundRect">
+            <a:avLst/>
+          </a:prstGeom>
+          <a:solidFill>
+            <a:srgbClr val="FFFFFF"/>
+          </a:solidFill>
+          <a:ln w="12700">
+            <a:solidFill>
+              <a:srgbClr val="E3E7EB"/>
+            </a:solidFill>
+          </a:ln>
+        </p:spPr>
+        <p:txBody>
+          <a:bodyPr wrap="square" lIns="177800" tIns="177800" rIns="177800" bIns="177800"/>
+          <a:lstStyle/>
+          <a:p>
+            <a:pPr algn="l"/>
+            <a:r>
+              <a:rPr lang="ru-RU" sz="1400" b="0">
+                <a:solidFill>
+                  <a:srgbClr val="1A2730"/>
+                </a:solidFill>
+                <a:latin typeface="Verdana"/>
+                <a:cs typeface="Verdana"/>
+              </a:rPr>
+              <a:t>Источник истины — база</a:t>
+            </a:r>
+          </a:p>
+          <a:p>
+            <a:pPr algn="l"/>
+            <a:r>
+              <a:rPr lang="ru-RU" sz="1400" b="0">
                 <a:solidFill>
                   <a:srgbClr val="1A2730"/>
                 </a:solidFill>
@@ -2696,22 +3444,63 @@
             </a:r>
           </a:p>
           <a:p>
-            <a:pPr algn="ctr"/>
-            <a:r>
-              <a:rPr lang="ru-RU" sz="2000" b="1">
-                <a:solidFill>
-                  <a:srgbClr val="1A2730"/>
-                </a:solidFill>
-                <a:latin typeface="Verdana"/>
-                <a:cs typeface="Verdana"/>
-              </a:rPr>
-              <a:t>Событие пришло.</a:t>
-            </a:r>
-          </a:p>
-          <a:p>
-            <a:pPr algn="ctr"/>
-            <a:r>
-              <a:rPr lang="ru-RU" sz="2000" b="1">
+            <a:pPr algn="l"/>
+            <a:r>
+              <a:rPr lang="ru-RU" sz="1400" b="0">
+                <a:solidFill>
+                  <a:srgbClr val="1A2730"/>
+                </a:solidFill>
+                <a:latin typeface="Verdana"/>
+                <a:cs typeface="Verdana"/>
+              </a:rPr>
+              <a:t>Если возникает сомнение в состоянии, клиент всегда может перечитать его обычным HTTP-запросом.</a:t>
+            </a:r>
+          </a:p>
+        </p:txBody>
+      </p:sp>
+      <p:sp>
+        <p:nvSpPr>
+          <p:cNvPr id="22" name="Shape 22"/>
+          <p:cNvSpPr txBox="1"/>
+          <p:nvPr/>
+        </p:nvSpPr>
+        <p:spPr>
+          <a:xfrm>
+            <a:off x="8092440" y="1508760"/>
+            <a:ext cx="3520440" cy="4343400"/>
+          </a:xfrm>
+          <a:prstGeom prst="roundRect">
+            <a:avLst/>
+          </a:prstGeom>
+          <a:solidFill>
+            <a:srgbClr val="EEF0FE"/>
+          </a:solidFill>
+          <a:ln w="12700">
+            <a:solidFill>
+              <a:srgbClr val="6366F1"/>
+            </a:solidFill>
+          </a:ln>
+        </p:spPr>
+        <p:txBody>
+          <a:bodyPr wrap="square" lIns="177800" tIns="177800" rIns="177800" bIns="177800"/>
+          <a:lstStyle/>
+          <a:p>
+            <a:pPr algn="l"/>
+            <a:r>
+              <a:rPr lang="ru-RU" sz="1400" b="1">
+                <a:solidFill>
+                  <a:srgbClr val="1A2730"/>
+                </a:solidFill>
+                <a:latin typeface="Verdana"/>
+                <a:cs typeface="Verdana"/>
+              </a:rPr>
+              <a:t>Что было бы дальше</a:t>
+            </a:r>
+          </a:p>
+          <a:p>
+            <a:pPr algn="l"/>
+            <a:r>
+              <a:rPr lang="ru-RU" sz="1400" b="1">
                 <a:solidFill>
                   <a:srgbClr val="1A2730"/>
                 </a:solidFill>
@@ -2722,30 +3511,30 @@
             </a:r>
           </a:p>
           <a:p>
-            <a:pPr algn="ctr"/>
-            <a:r>
-              <a:rPr lang="ru-RU" sz="2000" b="1">
-                <a:solidFill>
-                  <a:srgbClr val="1A2730"/>
-                </a:solidFill>
-                <a:latin typeface="Verdana"/>
-                <a:cs typeface="Verdana"/>
-              </a:rPr>
-              <a:t>От момента отправки до клиента — около 9,5 мс.</a:t>
-            </a:r>
-          </a:p>
-        </p:txBody>
-      </p:sp>
-      <p:sp>
-        <p:nvSpPr>
-          <p:cNvPr id="22" name="Shape 22"/>
-          <p:cNvSpPr txBox="1"/>
-          <p:nvPr/>
-        </p:nvSpPr>
-        <p:spPr>
-          <a:xfrm>
-            <a:off x="685800" y="5074920"/>
-            <a:ext cx="10835640" cy="777240"/>
+            <a:pPr algn="l"/>
+            <a:r>
+              <a:rPr lang="ru-RU" sz="1400" b="1">
+                <a:solidFill>
+                  <a:srgbClr val="1A2730"/>
+                </a:solidFill>
+                <a:latin typeface="Verdana"/>
+                <a:cs typeface="Verdana"/>
+              </a:rPr>
+              <a:t>Прочный журнал событий, версии сущностей, гарантии доставки — если потребуется строгая согласованность между сервисами.</a:t>
+            </a:r>
+          </a:p>
+        </p:txBody>
+      </p:sp>
+      <p:sp>
+        <p:nvSpPr>
+          <p:cNvPr id="900" name="Shape 900"/>
+          <p:cNvSpPr txBox="1"/>
+          <p:nvPr/>
+        </p:nvSpPr>
+        <p:spPr>
+          <a:xfrm>
+            <a:off x="594360" y="6510528"/>
+            <a:ext cx="7315200" cy="201168"/>
           </a:xfrm>
           <a:prstGeom prst="roundRect">
             <a:avLst/>
@@ -2759,30 +3548,30 @@
           <a:bodyPr wrap="square" lIns="177800" tIns="177800" rIns="177800" bIns="177800"/>
           <a:lstStyle/>
           <a:p>
-            <a:pPr algn="ctr"/>
-            <a:r>
-              <a:rPr lang="ru-RU" sz="1300" b="0">
+            <a:pPr algn="l"/>
+            <a:r>
+              <a:rPr lang="ru-RU" sz="800" b="0">
                 <a:solidFill>
                   <a:srgbClr val="5E6A75"/>
                 </a:solidFill>
                 <a:latin typeface="Verdana"/>
                 <a:cs typeface="Verdana"/>
               </a:rPr>
-              <a:t>Изменился ровно один параметр — поведение изменилось ровно так, как ожидалось. Это и подтверждает, что причина именно в общем канале.</a:t>
-            </a:r>
-          </a:p>
-        </p:txBody>
-      </p:sp>
-      <p:sp>
-        <p:nvSpPr>
-          <p:cNvPr id="900" name="Shape 900"/>
-          <p:cNvSpPr txBox="1"/>
-          <p:nvPr/>
-        </p:nvSpPr>
-        <p:spPr>
-          <a:xfrm>
-            <a:off x="594360" y="6510528"/>
-            <a:ext cx="10972800" cy="201168"/>
+              <a:t>В реальном времени</a:t>
+            </a:r>
+          </a:p>
+        </p:txBody>
+      </p:sp>
+      <p:sp>
+        <p:nvSpPr>
+          <p:cNvPr id="901" name="Shape 901"/>
+          <p:cNvSpPr txBox="1"/>
+          <p:nvPr/>
+        </p:nvSpPr>
+        <p:spPr>
+          <a:xfrm>
+            <a:off x="4251960" y="6419088"/>
+            <a:ext cx="7315200" cy="292608"/>
           </a:xfrm>
           <a:prstGeom prst="roundRect">
             <a:avLst/>
@@ -2796,16 +3585,16 @@
           <a:bodyPr wrap="square" lIns="177800" tIns="177800" rIns="177800" bIns="177800"/>
           <a:lstStyle/>
           <a:p>
-            <a:pPr algn="l"/>
-            <a:r>
-              <a:rPr lang="ru-RU" sz="800" b="0">
+            <a:pPr algn="r"/>
+            <a:r>
+              <a:rPr lang="ru-RU" sz="1200" b="1">
                 <a:solidFill>
                   <a:srgbClr val="5E6A75"/>
                 </a:solidFill>
                 <a:latin typeface="Verdana"/>
                 <a:cs typeface="Verdana"/>
               </a:rPr>
-              <a:t>В реальном времени · 14</a:t>
+              <a:t>14/15</a:t>
             </a:r>
           </a:p>
         </p:txBody>
@@ -2875,21 +3664,304 @@
                 <a:latin typeface="Verdana"/>
                 <a:cs typeface="Verdana"/>
               </a:rPr>
-              <a:t>Расширенные сценарии испытаний</a:t>
-            </a:r>
-          </a:p>
-        </p:txBody>
-      </p:sp>
-      <p:sp>
-        <p:nvSpPr>
-          <p:cNvPr id="11" name="Shape 11"/>
-          <p:cNvSpPr txBox="1"/>
-          <p:nvPr/>
-        </p:nvSpPr>
-        <p:spPr>
-          <a:xfrm>
-            <a:off x="621792" y="987552"/>
-            <a:ext cx="9875520" cy="320040"/>
+              <a:t>Итог</a:t>
+            </a:r>
+          </a:p>
+        </p:txBody>
+      </p:sp>
+      <p:sp>
+        <p:nvSpPr>
+          <p:cNvPr id="20" name="Shape 20"/>
+          <p:cNvSpPr txBox="1"/>
+          <p:nvPr/>
+        </p:nvSpPr>
+        <p:spPr>
+          <a:xfrm>
+            <a:off x="685800" y="1600200"/>
+            <a:ext cx="10835640" cy="1234440"/>
+          </a:xfrm>
+          <a:prstGeom prst="roundRect">
+            <a:avLst/>
+          </a:prstGeom>
+          <a:solidFill>
+            <a:srgbClr val="E6F4F1"/>
+          </a:solidFill>
+          <a:ln w="12700">
+            <a:solidFill>
+              <a:srgbClr val="14A085"/>
+            </a:solidFill>
+          </a:ln>
+        </p:spPr>
+        <p:txBody>
+          <a:bodyPr wrap="square" lIns="177800" tIns="177800" rIns="177800" bIns="177800"/>
+          <a:lstStyle/>
+          <a:p>
+            <a:pPr algn="ctr"/>
+            <a:r>
+              <a:rPr lang="ru-RU" sz="1800" b="1">
+                <a:solidFill>
+                  <a:srgbClr val="1A2730"/>
+                </a:solidFill>
+                <a:latin typeface="Verdana"/>
+                <a:cs typeface="Verdana"/>
+              </a:rPr>
+              <a:t>Изменения в отчёте теперь доходят до всех участников — независимо от того, к какому экземпляру backend они подключены.</a:t>
+            </a:r>
+          </a:p>
+        </p:txBody>
+      </p:sp>
+      <p:sp>
+        <p:nvSpPr>
+          <p:cNvPr id="21" name="Shape 21"/>
+          <p:cNvSpPr txBox="1"/>
+          <p:nvPr/>
+        </p:nvSpPr>
+        <p:spPr>
+          <a:xfrm>
+            <a:off x="685800" y="3017520"/>
+            <a:ext cx="10835640" cy="1188720"/>
+          </a:xfrm>
+          <a:prstGeom prst="roundRect">
+            <a:avLst/>
+          </a:prstGeom>
+          <a:solidFill>
+            <a:srgbClr val="EEF0FE"/>
+          </a:solidFill>
+          <a:ln w="12700">
+            <a:solidFill>
+              <a:srgbClr val="6366F1"/>
+            </a:solidFill>
+          </a:ln>
+        </p:spPr>
+        <p:txBody>
+          <a:bodyPr wrap="square" lIns="177800" tIns="177800" rIns="177800" bIns="177800"/>
+          <a:lstStyle/>
+          <a:p>
+            <a:pPr algn="ctr"/>
+            <a:r>
+              <a:rPr lang="ru-RU" sz="1400" b="0">
+                <a:solidFill>
+                  <a:srgbClr val="1A2730"/>
+                </a:solidFill>
+                <a:latin typeface="Verdana"/>
+                <a:cs typeface="Verdana"/>
+              </a:rPr>
+              <a:t>Дополнительный эффект — при падении одного экземпляра пользователи продолжают работать через другой.</a:t>
+            </a:r>
+          </a:p>
+        </p:txBody>
+      </p:sp>
+      <p:sp>
+        <p:nvSpPr>
+          <p:cNvPr id="22" name="Shape 22"/>
+          <p:cNvSpPr txBox="1"/>
+          <p:nvPr/>
+        </p:nvSpPr>
+        <p:spPr>
+          <a:xfrm>
+            <a:off x="685800" y="4526280"/>
+            <a:ext cx="3520440" cy="1691640"/>
+          </a:xfrm>
+          <a:prstGeom prst="roundRect">
+            <a:avLst/>
+          </a:prstGeom>
+          <a:solidFill>
+            <a:srgbClr val="FFFFFF"/>
+          </a:solidFill>
+          <a:ln w="12700">
+            <a:solidFill>
+              <a:srgbClr val="E3E7EB"/>
+            </a:solidFill>
+          </a:ln>
+        </p:spPr>
+        <p:txBody>
+          <a:bodyPr wrap="square" lIns="177800" tIns="177800" rIns="177800" bIns="177800"/>
+          <a:lstStyle/>
+          <a:p>
+            <a:pPr algn="l"/>
+            <a:r>
+              <a:rPr lang="ru-RU" sz="1300" b="0">
+                <a:solidFill>
+                  <a:srgbClr val="1A2730"/>
+                </a:solidFill>
+                <a:latin typeface="Verdana"/>
+                <a:cs typeface="Verdana"/>
+              </a:rPr>
+              <a:t>Что было</a:t>
+            </a:r>
+          </a:p>
+          <a:p>
+            <a:pPr algn="l"/>
+            <a:r>
+              <a:rPr lang="ru-RU" sz="1300" b="0">
+                <a:solidFill>
+                  <a:srgbClr val="1A2730"/>
+                </a:solidFill>
+                <a:latin typeface="Verdana"/>
+                <a:cs typeface="Verdana"/>
+              </a:rPr>
+              <a:t/>
+            </a:r>
+          </a:p>
+          <a:p>
+            <a:pPr algn="l"/>
+            <a:r>
+              <a:rPr lang="ru-RU" sz="1300" b="0">
+                <a:solidFill>
+                  <a:srgbClr val="1A2730"/>
+                </a:solidFill>
+                <a:latin typeface="Verdana"/>
+                <a:cs typeface="Verdana"/>
+              </a:rPr>
+              <a:t>С несколькими экземплярами backend изменения не доходили до части пользователей.</a:t>
+            </a:r>
+          </a:p>
+        </p:txBody>
+      </p:sp>
+      <p:sp>
+        <p:nvSpPr>
+          <p:cNvPr id="23" name="Shape 23"/>
+          <p:cNvSpPr txBox="1"/>
+          <p:nvPr/>
+        </p:nvSpPr>
+        <p:spPr>
+          <a:xfrm>
+            <a:off x="4343400" y="4526280"/>
+            <a:ext cx="3520440" cy="1691640"/>
+          </a:xfrm>
+          <a:prstGeom prst="roundRect">
+            <a:avLst/>
+          </a:prstGeom>
+          <a:solidFill>
+            <a:srgbClr val="FFFFFF"/>
+          </a:solidFill>
+          <a:ln w="12700">
+            <a:solidFill>
+              <a:srgbClr val="E3E7EB"/>
+            </a:solidFill>
+          </a:ln>
+        </p:spPr>
+        <p:txBody>
+          <a:bodyPr wrap="square" lIns="177800" tIns="177800" rIns="177800" bIns="177800"/>
+          <a:lstStyle/>
+          <a:p>
+            <a:pPr algn="l"/>
+            <a:r>
+              <a:rPr lang="ru-RU" sz="1300" b="0">
+                <a:solidFill>
+                  <a:srgbClr val="1A2730"/>
+                </a:solidFill>
+                <a:latin typeface="Verdana"/>
+                <a:cs typeface="Verdana"/>
+              </a:rPr>
+              <a:t>Что сделали</a:t>
+            </a:r>
+          </a:p>
+          <a:p>
+            <a:pPr algn="l"/>
+            <a:r>
+              <a:rPr lang="ru-RU" sz="1300" b="0">
+                <a:solidFill>
+                  <a:srgbClr val="1A2730"/>
+                </a:solidFill>
+                <a:latin typeface="Verdana"/>
+                <a:cs typeface="Verdana"/>
+              </a:rPr>
+              <a:t/>
+            </a:r>
+          </a:p>
+          <a:p>
+            <a:pPr algn="l"/>
+            <a:r>
+              <a:rPr lang="ru-RU" sz="1300" b="0">
+                <a:solidFill>
+                  <a:srgbClr val="1A2730"/>
+                </a:solidFill>
+                <a:latin typeface="Verdana"/>
+                <a:cs typeface="Verdana"/>
+              </a:rPr>
+              <a:t>Два экземпляра за общей точкой входа плюс общий канал событий через Redis.</a:t>
+            </a:r>
+          </a:p>
+        </p:txBody>
+      </p:sp>
+      <p:sp>
+        <p:nvSpPr>
+          <p:cNvPr id="24" name="Shape 24"/>
+          <p:cNvSpPr txBox="1"/>
+          <p:nvPr/>
+        </p:nvSpPr>
+        <p:spPr>
+          <a:xfrm>
+            <a:off x="8001000" y="4526280"/>
+            <a:ext cx="3520440" cy="1691640"/>
+          </a:xfrm>
+          <a:prstGeom prst="roundRect">
+            <a:avLst/>
+          </a:prstGeom>
+          <a:solidFill>
+            <a:srgbClr val="FFFFFF"/>
+          </a:solidFill>
+          <a:ln w="12700">
+            <a:solidFill>
+              <a:srgbClr val="E3E7EB"/>
+            </a:solidFill>
+          </a:ln>
+        </p:spPr>
+        <p:txBody>
+          <a:bodyPr wrap="square" lIns="177800" tIns="177800" rIns="177800" bIns="177800"/>
+          <a:lstStyle/>
+          <a:p>
+            <a:pPr algn="l"/>
+            <a:r>
+              <a:rPr lang="ru-RU" sz="1300" b="0">
+                <a:solidFill>
+                  <a:srgbClr val="1A2730"/>
+                </a:solidFill>
+                <a:latin typeface="Verdana"/>
+                <a:cs typeface="Verdana"/>
+              </a:rPr>
+              <a:t>Чем доказали</a:t>
+            </a:r>
+          </a:p>
+          <a:p>
+            <a:pPr algn="l"/>
+            <a:r>
+              <a:rPr lang="ru-RU" sz="1300" b="0">
+                <a:solidFill>
+                  <a:srgbClr val="1A2730"/>
+                </a:solidFill>
+                <a:latin typeface="Verdana"/>
+                <a:cs typeface="Verdana"/>
+              </a:rPr>
+              <a:t/>
+            </a:r>
+          </a:p>
+          <a:p>
+            <a:pPr algn="l"/>
+            <a:r>
+              <a:rPr lang="ru-RU" sz="1300" b="0">
+                <a:solidFill>
+                  <a:srgbClr val="1A2730"/>
+                </a:solidFill>
+                <a:latin typeface="Verdana"/>
+                <a:cs typeface="Verdana"/>
+              </a:rPr>
+              <a:t>Сравнение «без / с», 30 повторов, переподключение и падение узла.</a:t>
+            </a:r>
+          </a:p>
+        </p:txBody>
+      </p:sp>
+      <p:sp>
+        <p:nvSpPr>
+          <p:cNvPr id="900" name="Shape 900"/>
+          <p:cNvSpPr txBox="1"/>
+          <p:nvPr/>
+        </p:nvSpPr>
+        <p:spPr>
+          <a:xfrm>
+            <a:off x="594360" y="6510528"/>
+            <a:ext cx="7315200" cy="201168"/>
           </a:xfrm>
           <a:prstGeom prst="roundRect">
             <a:avLst/>
@@ -2905,437 +3977,28 @@
           <a:p>
             <a:pPr algn="l"/>
             <a:r>
-              <a:rPr lang="ru-RU" sz="1300" b="0">
+              <a:rPr lang="ru-RU" sz="800" b="0">
                 <a:solidFill>
                   <a:srgbClr val="5E6A75"/>
                 </a:solidFill>
                 <a:latin typeface="Verdana"/>
                 <a:cs typeface="Verdana"/>
               </a:rPr>
-              <a:t>Повторяемость задержки и устойчивость к разрывам и отказам (§5.5–5.6 ВКР)</a:t>
-            </a:r>
-          </a:p>
-        </p:txBody>
-      </p:sp>
-      <p:sp>
-        <p:nvSpPr>
-          <p:cNvPr id="20" name="Shape 20"/>
-          <p:cNvSpPr txBox="1"/>
-          <p:nvPr/>
-        </p:nvSpPr>
-        <p:spPr>
-          <a:xfrm>
-            <a:off x="685800" y="1600200"/>
-            <a:ext cx="3657600" cy="4251960"/>
-          </a:xfrm>
-          <a:prstGeom prst="roundRect">
-            <a:avLst/>
-          </a:prstGeom>
-          <a:solidFill>
-            <a:srgbClr val="FFFFFF"/>
-          </a:solidFill>
-          <a:ln w="12700">
-            <a:solidFill>
-              <a:srgbClr val="E3E7EB"/>
-            </a:solidFill>
-          </a:ln>
-        </p:spPr>
-        <p:txBody>
-          <a:bodyPr wrap="square" lIns="177800" tIns="177800" rIns="177800" bIns="177800"/>
-          <a:lstStyle/>
-          <a:p>
-            <a:pPr algn="l"/>
-            <a:r>
-              <a:rPr lang="ru-RU" sz="1300" b="0">
-                <a:solidFill>
-                  <a:srgbClr val="1A2730"/>
-                </a:solidFill>
-                <a:latin typeface="Verdana"/>
-                <a:cs typeface="Verdana"/>
-              </a:rPr>
-              <a:t>Серийная проверка (§5.5)</a:t>
-            </a:r>
-          </a:p>
-          <a:p>
-            <a:pPr algn="l"/>
-            <a:r>
-              <a:rPr lang="ru-RU" sz="1300" b="0">
-                <a:solidFill>
-                  <a:srgbClr val="1A2730"/>
-                </a:solidFill>
-                <a:latin typeface="Verdana"/>
-                <a:cs typeface="Verdana"/>
-              </a:rPr>
-              <a:t/>
-            </a:r>
-          </a:p>
-          <a:p>
-            <a:pPr algn="l"/>
-            <a:r>
-              <a:rPr lang="ru-RU" sz="1300" b="0">
-                <a:solidFill>
-                  <a:srgbClr val="1A2730"/>
-                </a:solidFill>
-                <a:latin typeface="Verdana"/>
-                <a:cs typeface="Verdana"/>
-              </a:rPr>
-              <a:t>30 повторов подряд в целевом режиме.</a:t>
-            </a:r>
-          </a:p>
-          <a:p>
-            <a:pPr algn="l"/>
-            <a:r>
-              <a:rPr lang="ru-RU" sz="1300" b="0">
-                <a:solidFill>
-                  <a:srgbClr val="1A2730"/>
-                </a:solidFill>
-                <a:latin typeface="Verdana"/>
-                <a:cs typeface="Verdana"/>
-              </a:rPr>
-              <a:t/>
-            </a:r>
-          </a:p>
-          <a:p>
-            <a:pPr algn="l"/>
-            <a:r>
-              <a:rPr lang="ru-RU" sz="1300" b="0">
-                <a:solidFill>
-                  <a:srgbClr val="1A2730"/>
-                </a:solidFill>
-                <a:latin typeface="Verdana"/>
-                <a:cs typeface="Verdana"/>
-              </a:rPr>
-              <a:t>Успешно: 30 из 30</a:t>
-            </a:r>
-          </a:p>
-          <a:p>
-            <a:pPr algn="l"/>
-            <a:r>
-              <a:rPr lang="ru-RU" sz="1300" b="0">
-                <a:solidFill>
-                  <a:srgbClr val="1A2730"/>
-                </a:solidFill>
-                <a:latin typeface="Verdana"/>
-                <a:cs typeface="Verdana"/>
-              </a:rPr>
-              <a:t>среднее 7,2 мс  ·  медиана 6,1 мс</a:t>
-            </a:r>
-          </a:p>
-          <a:p>
-            <a:pPr algn="l"/>
-            <a:r>
-              <a:rPr lang="ru-RU" sz="1300" b="0">
-                <a:solidFill>
-                  <a:srgbClr val="1A2730"/>
-                </a:solidFill>
-                <a:latin typeface="Verdana"/>
-                <a:cs typeface="Verdana"/>
-              </a:rPr>
-              <a:t>минимум 3,8 мс  ·  95 % быстрее 13,8 мс</a:t>
-            </a:r>
-          </a:p>
-          <a:p>
-            <a:pPr algn="l"/>
-            <a:r>
-              <a:rPr lang="ru-RU" sz="1300" b="0">
-                <a:solidFill>
-                  <a:srgbClr val="1A2730"/>
-                </a:solidFill>
-                <a:latin typeface="Verdana"/>
-                <a:cs typeface="Verdana"/>
-              </a:rPr>
-              <a:t/>
-            </a:r>
-          </a:p>
-          <a:p>
-            <a:pPr algn="l"/>
-            <a:r>
-              <a:rPr lang="ru-RU" sz="1300" b="0">
-                <a:solidFill>
-                  <a:srgbClr val="1A2730"/>
-                </a:solidFill>
-                <a:latin typeface="Verdana"/>
-                <a:cs typeface="Verdana"/>
-              </a:rPr>
-              <a:t>Повторяемость доставки и порядок задержки на локальном стенде.</a:t>
-            </a:r>
-          </a:p>
-        </p:txBody>
-      </p:sp>
-      <p:sp>
-        <p:nvSpPr>
-          <p:cNvPr id="21" name="Shape 21"/>
-          <p:cNvSpPr txBox="1"/>
-          <p:nvPr/>
-        </p:nvSpPr>
-        <p:spPr>
-          <a:xfrm>
-            <a:off x="4434840" y="1600200"/>
-            <a:ext cx="3657600" cy="4251960"/>
-          </a:xfrm>
-          <a:prstGeom prst="roundRect">
-            <a:avLst/>
-          </a:prstGeom>
-          <a:solidFill>
-            <a:srgbClr val="FFFFFF"/>
-          </a:solidFill>
-          <a:ln w="12700">
-            <a:solidFill>
-              <a:srgbClr val="E3E7EB"/>
-            </a:solidFill>
-          </a:ln>
-        </p:spPr>
-        <p:txBody>
-          <a:bodyPr wrap="square" lIns="177800" tIns="177800" rIns="177800" bIns="177800"/>
-          <a:lstStyle/>
-          <a:p>
-            <a:pPr algn="l"/>
-            <a:r>
-              <a:rPr lang="ru-RU" sz="1300" b="0">
-                <a:solidFill>
-                  <a:srgbClr val="1A2730"/>
-                </a:solidFill>
-                <a:latin typeface="Verdana"/>
-                <a:cs typeface="Verdana"/>
-              </a:rPr>
-              <a:t>Повторная подписка (§5.6)</a:t>
-            </a:r>
-          </a:p>
-          <a:p>
-            <a:pPr algn="l"/>
-            <a:r>
-              <a:rPr lang="ru-RU" sz="1300" b="0">
-                <a:solidFill>
-                  <a:srgbClr val="1A2730"/>
-                </a:solidFill>
-                <a:latin typeface="Verdana"/>
-                <a:cs typeface="Verdana"/>
-              </a:rPr>
-              <a:t/>
-            </a:r>
-          </a:p>
-          <a:p>
-            <a:pPr algn="l"/>
-            <a:r>
-              <a:rPr lang="ru-RU" sz="1300" b="0">
-                <a:solidFill>
-                  <a:srgbClr val="1A2730"/>
-                </a:solidFill>
-                <a:latin typeface="Verdana"/>
-                <a:cs typeface="Verdana"/>
-              </a:rPr>
-              <a:t>Разрыв соединения, новое подключение, повторное вступление в группу отчёта.</a:t>
-            </a:r>
-          </a:p>
-          <a:p>
-            <a:pPr algn="l"/>
-            <a:r>
-              <a:rPr lang="ru-RU" sz="1300" b="0">
-                <a:solidFill>
-                  <a:srgbClr val="1A2730"/>
-                </a:solidFill>
-                <a:latin typeface="Verdana"/>
-                <a:cs typeface="Verdana"/>
-              </a:rPr>
-              <a:t/>
-            </a:r>
-          </a:p>
-          <a:p>
-            <a:pPr algn="l"/>
-            <a:r>
-              <a:rPr lang="ru-RU" sz="1300" b="0">
-                <a:solidFill>
-                  <a:srgbClr val="1A2730"/>
-                </a:solidFill>
-                <a:latin typeface="Verdana"/>
-                <a:cs typeface="Verdana"/>
-              </a:rPr>
-              <a:t>переподключение 6,5 мс</a:t>
-            </a:r>
-          </a:p>
-          <a:p>
-            <a:pPr algn="l"/>
-            <a:r>
-              <a:rPr lang="ru-RU" sz="1300" b="0">
-                <a:solidFill>
-                  <a:srgbClr val="1A2730"/>
-                </a:solidFill>
-                <a:latin typeface="Verdana"/>
-                <a:cs typeface="Verdana"/>
-              </a:rPr>
-              <a:t>доставка после восстановления 15,2 мс</a:t>
-            </a:r>
-          </a:p>
-          <a:p>
-            <a:pPr algn="l"/>
-            <a:r>
-              <a:rPr lang="ru-RU" sz="1300" b="0">
-                <a:solidFill>
-                  <a:srgbClr val="1A2730"/>
-                </a:solidFill>
-                <a:latin typeface="Verdana"/>
-                <a:cs typeface="Verdana"/>
-              </a:rPr>
-              <a:t/>
-            </a:r>
-          </a:p>
-          <a:p>
-            <a:pPr algn="l"/>
-            <a:r>
-              <a:rPr lang="ru-RU" sz="1300" b="0">
-                <a:solidFill>
-                  <a:srgbClr val="1A2730"/>
-                </a:solidFill>
-                <a:latin typeface="Verdana"/>
-                <a:cs typeface="Verdana"/>
-              </a:rPr>
-              <a:t>Контур устойчив к разрыву клиентского соединения.</a:t>
-            </a:r>
-          </a:p>
-        </p:txBody>
-      </p:sp>
-      <p:sp>
-        <p:nvSpPr>
-          <p:cNvPr id="22" name="Shape 22"/>
-          <p:cNvSpPr txBox="1"/>
-          <p:nvPr/>
-        </p:nvSpPr>
-        <p:spPr>
-          <a:xfrm>
-            <a:off x="8183880" y="1600200"/>
-            <a:ext cx="3657600" cy="4251960"/>
-          </a:xfrm>
-          <a:prstGeom prst="roundRect">
-            <a:avLst/>
-          </a:prstGeom>
-          <a:solidFill>
-            <a:srgbClr val="FFFFFF"/>
-          </a:solidFill>
-          <a:ln w="12700">
-            <a:solidFill>
-              <a:srgbClr val="E3E7EB"/>
-            </a:solidFill>
-          </a:ln>
-        </p:spPr>
-        <p:txBody>
-          <a:bodyPr wrap="square" lIns="177800" tIns="177800" rIns="177800" bIns="177800"/>
-          <a:lstStyle/>
-          <a:p>
-            <a:pPr algn="l"/>
-            <a:r>
-              <a:rPr lang="ru-RU" sz="1300" b="0">
-                <a:solidFill>
-                  <a:srgbClr val="1A2730"/>
-                </a:solidFill>
-                <a:latin typeface="Verdana"/>
-                <a:cs typeface="Verdana"/>
-              </a:rPr>
-              <a:t>Переключение после отказа (§5.6)</a:t>
-            </a:r>
-          </a:p>
-          <a:p>
-            <a:pPr algn="l"/>
-            <a:r>
-              <a:rPr lang="ru-RU" sz="1300" b="0">
-                <a:solidFill>
-                  <a:srgbClr val="1A2730"/>
-                </a:solidFill>
-                <a:latin typeface="Verdana"/>
-                <a:cs typeface="Verdana"/>
-              </a:rPr>
-              <a:t/>
-            </a:r>
-          </a:p>
-          <a:p>
-            <a:pPr algn="l"/>
-            <a:r>
-              <a:rPr lang="ru-RU" sz="1300" b="0">
-                <a:solidFill>
-                  <a:srgbClr val="1A2730"/>
-                </a:solidFill>
-                <a:latin typeface="Verdana"/>
-                <a:cs typeface="Verdana"/>
-              </a:rPr>
-              <a:t>Остановка одного из узлов, переключение через общую точку входа на оставшийся.</a:t>
-            </a:r>
-          </a:p>
-          <a:p>
-            <a:pPr algn="l"/>
-            <a:r>
-              <a:rPr lang="ru-RU" sz="1300" b="0">
-                <a:solidFill>
-                  <a:srgbClr val="1A2730"/>
-                </a:solidFill>
-                <a:latin typeface="Verdana"/>
-                <a:cs typeface="Verdana"/>
-              </a:rPr>
-              <a:t/>
-            </a:r>
-          </a:p>
-          <a:p>
-            <a:pPr algn="l"/>
-            <a:r>
-              <a:rPr lang="ru-RU" sz="1300" b="0">
-                <a:solidFill>
-                  <a:srgbClr val="1A2730"/>
-                </a:solidFill>
-                <a:latin typeface="Verdana"/>
-                <a:cs typeface="Verdana"/>
-              </a:rPr>
-              <a:t>переключение 352 мс</a:t>
-            </a:r>
-          </a:p>
-          <a:p>
-            <a:pPr algn="l"/>
-            <a:r>
-              <a:rPr lang="ru-RU" sz="1300" b="0">
-                <a:solidFill>
-                  <a:srgbClr val="1A2730"/>
-                </a:solidFill>
-                <a:latin typeface="Verdana"/>
-                <a:cs typeface="Verdana"/>
-              </a:rPr>
-              <a:t>доставка после переключения 5,4 мс</a:t>
-            </a:r>
-          </a:p>
-          <a:p>
-            <a:pPr algn="l"/>
-            <a:r>
-              <a:rPr lang="ru-RU" sz="1300" b="0">
-                <a:solidFill>
-                  <a:srgbClr val="1A2730"/>
-                </a:solidFill>
-                <a:latin typeface="Verdana"/>
-                <a:cs typeface="Verdana"/>
-              </a:rPr>
-              <a:t/>
-            </a:r>
-          </a:p>
-          <a:p>
-            <a:pPr algn="l"/>
-            <a:r>
-              <a:rPr lang="ru-RU" sz="1300" b="0">
-                <a:solidFill>
-                  <a:srgbClr val="1A2730"/>
-                </a:solidFill>
-                <a:latin typeface="Verdana"/>
-                <a:cs typeface="Verdana"/>
-              </a:rPr>
-              <a:t>Контур устойчив к отказу одного узла.</a:t>
-            </a:r>
-          </a:p>
-        </p:txBody>
-      </p:sp>
-      <p:sp>
-        <p:nvSpPr>
-          <p:cNvPr id="900" name="Shape 900"/>
-          <p:cNvSpPr txBox="1"/>
-          <p:nvPr/>
-        </p:nvSpPr>
-        <p:spPr>
-          <a:xfrm>
-            <a:off x="594360" y="6510528"/>
-            <a:ext cx="10972800" cy="201168"/>
+              <a:t>В реальном времени</a:t>
+            </a:r>
+          </a:p>
+        </p:txBody>
+      </p:sp>
+      <p:sp>
+        <p:nvSpPr>
+          <p:cNvPr id="901" name="Shape 901"/>
+          <p:cNvSpPr txBox="1"/>
+          <p:nvPr/>
+        </p:nvSpPr>
+        <p:spPr>
+          <a:xfrm>
+            <a:off x="4251960" y="6419088"/>
+            <a:ext cx="7315200" cy="292608"/>
           </a:xfrm>
           <a:prstGeom prst="roundRect">
             <a:avLst/>
@@ -3349,1926 +4012,16 @@
           <a:bodyPr wrap="square" lIns="177800" tIns="177800" rIns="177800" bIns="177800"/>
           <a:lstStyle/>
           <a:p>
-            <a:pPr algn="l"/>
-            <a:r>
-              <a:rPr lang="ru-RU" sz="800" b="0">
+            <a:pPr algn="r"/>
+            <a:r>
+              <a:rPr lang="ru-RU" sz="1200" b="1">
                 <a:solidFill>
                   <a:srgbClr val="5E6A75"/>
                 </a:solidFill>
                 <a:latin typeface="Verdana"/>
                 <a:cs typeface="Verdana"/>
               </a:rPr>
-              <a:t>В реальном времени · 15</a:t>
-            </a:r>
-          </a:p>
-        </p:txBody>
-      </p:sp>
-    </p:spTree>
-  </p:cSld>
-  <p:clrMapOvr>
-    <a:masterClrMapping/>
-  </p:clrMapOvr>
-</p:sld>
-</file>
-
-<file path=ppt/slides/slide16.xml><?xml version="1.0" encoding="utf-8"?>
-<p:sld xmlns:a="http://schemas.openxmlformats.org/drawingml/2006/main" xmlns:r="http://schemas.openxmlformats.org/officeDocument/2006/relationships" xmlns:p="http://schemas.openxmlformats.org/presentationml/2006/main">
-  <p:cSld>
-    <p:bg>
-      <p:bgPr>
-        <a:solidFill>
-          <a:srgbClr val="F8FAFA"/>
-        </a:solidFill>
-        <a:effectLst/>
-      </p:bgPr>
-    </p:bg>
-    <p:spTree>
-      <p:nvGrpSpPr>
-        <p:cNvPr id="1" name=""/>
-        <p:cNvGrpSpPr/>
-        <p:nvPr/>
-      </p:nvGrpSpPr>
-      <p:grpSpPr>
-        <a:xfrm>
-          <a:off x="0" y="0"/>
-          <a:ext cx="0" cy="0"/>
-          <a:chOff x="0" y="0"/>
-          <a:chExt cx="0" cy="0"/>
-        </a:xfrm>
-      </p:grpSpPr>
-      <p:sp>
-        <p:nvSpPr>
-          <p:cNvPr id="10" name="Shape 10"/>
-          <p:cNvSpPr txBox="1"/>
-          <p:nvPr/>
-        </p:nvSpPr>
-        <p:spPr>
-          <a:xfrm>
-            <a:off x="594360" y="411480"/>
-            <a:ext cx="10881360" cy="658368"/>
-          </a:xfrm>
-          <a:prstGeom prst="roundRect">
-            <a:avLst/>
-          </a:prstGeom>
-          <a:noFill/>
-          <a:ln>
-            <a:noFill/>
-          </a:ln>
-        </p:spPr>
-        <p:txBody>
-          <a:bodyPr wrap="square" lIns="177800" tIns="177800" rIns="177800" bIns="177800"/>
-          <a:lstStyle/>
-          <a:p>
-            <a:pPr algn="l"/>
-            <a:r>
-              <a:rPr lang="ru-RU" sz="3000" b="1">
-                <a:solidFill>
-                  <a:srgbClr val="1A2730"/>
-                </a:solidFill>
-                <a:latin typeface="Verdana"/>
-                <a:cs typeface="Verdana"/>
-              </a:rPr>
-              <a:t>Сводка результатов</a:t>
-            </a:r>
-          </a:p>
-        </p:txBody>
-      </p:sp>
-      <p:sp>
-        <p:nvSpPr>
-          <p:cNvPr id="11" name="Shape 11"/>
-          <p:cNvSpPr txBox="1"/>
-          <p:nvPr/>
-        </p:nvSpPr>
-        <p:spPr>
-          <a:xfrm>
-            <a:off x="621792" y="987552"/>
-            <a:ext cx="9875520" cy="320040"/>
-          </a:xfrm>
-          <a:prstGeom prst="roundRect">
-            <a:avLst/>
-          </a:prstGeom>
-          <a:noFill/>
-          <a:ln>
-            <a:noFill/>
-          </a:ln>
-        </p:spPr>
-        <p:txBody>
-          <a:bodyPr wrap="square" lIns="177800" tIns="177800" rIns="177800" bIns="177800"/>
-          <a:lstStyle/>
-          <a:p>
-            <a:pPr algn="l"/>
-            <a:r>
-              <a:rPr lang="ru-RU" sz="1300" b="0">
-                <a:solidFill>
-                  <a:srgbClr val="5E6A75"/>
-                </a:solidFill>
-                <a:latin typeface="Verdana"/>
-                <a:cs typeface="Verdana"/>
-              </a:rPr>
-              <a:t>Сопоставление режимов и сценариев (таблица 5.7 ВКР)</a:t>
-            </a:r>
-          </a:p>
-        </p:txBody>
-      </p:sp>
-      <p:sp>
-        <p:nvSpPr>
-          <p:cNvPr id="80" name="Shape 80"/>
-          <p:cNvSpPr txBox="1"/>
-          <p:nvPr/>
-        </p:nvSpPr>
-        <p:spPr>
-          <a:xfrm>
-            <a:off x="502920" y="1417320"/>
-            <a:ext cx="4434840" cy="365760"/>
-          </a:xfrm>
-          <a:prstGeom prst="roundRect">
-            <a:avLst/>
-          </a:prstGeom>
-          <a:noFill/>
-          <a:ln>
-            <a:noFill/>
-          </a:ln>
-        </p:spPr>
-        <p:txBody>
-          <a:bodyPr wrap="square" lIns="101600" tIns="101600" rIns="101600" bIns="101600"/>
-          <a:lstStyle/>
-          <a:p>
-            <a:pPr algn="l"/>
-            <a:r>
-              <a:rPr lang="ru-RU" sz="1100" b="1">
-                <a:solidFill>
-                  <a:srgbClr val="5E6A75"/>
-                </a:solidFill>
-                <a:latin typeface="Verdana"/>
-                <a:cs typeface="Verdana"/>
-              </a:rPr>
-              <a:t>Сценарий</a:t>
-            </a:r>
-          </a:p>
-        </p:txBody>
-      </p:sp>
-      <p:sp>
-        <p:nvSpPr>
-          <p:cNvPr id="81" name="Shape 81"/>
-          <p:cNvSpPr txBox="1"/>
-          <p:nvPr/>
-        </p:nvSpPr>
-        <p:spPr>
-          <a:xfrm>
-            <a:off x="5029200" y="1417320"/>
-            <a:ext cx="1005840" cy="365760"/>
-          </a:xfrm>
-          <a:prstGeom prst="roundRect">
-            <a:avLst/>
-          </a:prstGeom>
-          <a:noFill/>
-          <a:ln>
-            <a:noFill/>
-          </a:ln>
-        </p:spPr>
-        <p:txBody>
-          <a:bodyPr wrap="square" lIns="50800" tIns="50800" rIns="50800" bIns="50800"/>
-          <a:lstStyle/>
-          <a:p>
-            <a:pPr algn="ctr"/>
-            <a:r>
-              <a:rPr lang="ru-RU" sz="1100" b="1">
-                <a:solidFill>
-                  <a:srgbClr val="5E6A75"/>
-                </a:solidFill>
-                <a:latin typeface="Verdana"/>
-                <a:cs typeface="Verdana"/>
-              </a:rPr>
-              <a:t>Общий канал</a:t>
-            </a:r>
-          </a:p>
-        </p:txBody>
-      </p:sp>
-      <p:sp>
-        <p:nvSpPr>
-          <p:cNvPr id="82" name="Shape 82"/>
-          <p:cNvSpPr txBox="1"/>
-          <p:nvPr/>
-        </p:nvSpPr>
-        <p:spPr>
-          <a:xfrm>
-            <a:off x="6126480" y="1417320"/>
-            <a:ext cx="3429000" cy="365760"/>
-          </a:xfrm>
-          <a:prstGeom prst="roundRect">
-            <a:avLst/>
-          </a:prstGeom>
-          <a:noFill/>
-          <a:ln>
-            <a:noFill/>
-          </a:ln>
-        </p:spPr>
-        <p:txBody>
-          <a:bodyPr wrap="square" lIns="101600" tIns="101600" rIns="101600" bIns="101600"/>
-          <a:lstStyle/>
-          <a:p>
-            <a:pPr algn="l"/>
-            <a:r>
-              <a:rPr lang="ru-RU" sz="1100" b="1">
-                <a:solidFill>
-                  <a:srgbClr val="5E6A75"/>
-                </a:solidFill>
-                <a:latin typeface="Verdana"/>
-                <a:cs typeface="Verdana"/>
-              </a:rPr>
-              <a:t>Фактический результат</a:t>
-            </a:r>
-          </a:p>
-        </p:txBody>
-      </p:sp>
-      <p:sp>
-        <p:nvSpPr>
-          <p:cNvPr id="83" name="Shape 83"/>
-          <p:cNvSpPr txBox="1"/>
-          <p:nvPr/>
-        </p:nvSpPr>
-        <p:spPr>
-          <a:xfrm>
-            <a:off x="9646920" y="1417320"/>
-            <a:ext cx="2103120" cy="365760"/>
-          </a:xfrm>
-          <a:prstGeom prst="roundRect">
-            <a:avLst/>
-          </a:prstGeom>
-          <a:noFill/>
-          <a:ln>
-            <a:noFill/>
-          </a:ln>
-        </p:spPr>
-        <p:txBody>
-          <a:bodyPr wrap="square" lIns="101600" tIns="101600" rIns="101600" bIns="101600"/>
-          <a:lstStyle/>
-          <a:p>
-            <a:pPr algn="l"/>
-            <a:r>
-              <a:rPr lang="ru-RU" sz="1100" b="1">
-                <a:solidFill>
-                  <a:srgbClr val="5E6A75"/>
-                </a:solidFill>
-                <a:latin typeface="Verdana"/>
-                <a:cs typeface="Verdana"/>
-              </a:rPr>
-              <a:t>Вывод</a:t>
-            </a:r>
-          </a:p>
-        </p:txBody>
-      </p:sp>
-      <p:sp>
-        <p:nvSpPr>
-          <p:cNvPr id="200" name="Shape 200"/>
-          <p:cNvSpPr txBox="1"/>
-          <p:nvPr/>
-        </p:nvSpPr>
-        <p:spPr>
-          <a:xfrm>
-            <a:off x="502920" y="1828800"/>
-            <a:ext cx="4434840" cy="685800"/>
-          </a:xfrm>
-          <a:prstGeom prst="roundRect">
-            <a:avLst/>
-          </a:prstGeom>
-          <a:solidFill>
-            <a:srgbClr val="FFFFFF"/>
-          </a:solidFill>
-          <a:ln w="12700">
-            <a:solidFill>
-              <a:srgbClr val="E3E7EB"/>
-            </a:solidFill>
-          </a:ln>
-        </p:spPr>
-        <p:txBody>
-          <a:bodyPr wrap="square" lIns="127000" tIns="127000" rIns="127000" bIns="127000"/>
-          <a:lstStyle/>
-          <a:p>
-            <a:pPr algn="l"/>
-            <a:r>
-              <a:rPr lang="ru-RU" sz="1200" b="0">
-                <a:solidFill>
-                  <a:srgbClr val="1A2730"/>
-                </a:solidFill>
-                <a:latin typeface="Verdana"/>
-                <a:cs typeface="Verdana"/>
-              </a:rPr>
-              <a:t>Доставка без общего канала</a:t>
-            </a:r>
-          </a:p>
-        </p:txBody>
-      </p:sp>
-      <p:sp>
-        <p:nvSpPr>
-          <p:cNvPr id="201" name="Shape 201"/>
-          <p:cNvSpPr txBox="1"/>
-          <p:nvPr/>
-        </p:nvSpPr>
-        <p:spPr>
-          <a:xfrm>
-            <a:off x="5029200" y="1828800"/>
-            <a:ext cx="1005840" cy="685800"/>
-          </a:xfrm>
-          <a:prstGeom prst="roundRect">
-            <a:avLst/>
-          </a:prstGeom>
-          <a:solidFill>
-            <a:srgbClr val="FEE2E2"/>
-          </a:solidFill>
-          <a:ln w="12700">
-            <a:solidFill>
-              <a:srgbClr val="E3E7EB"/>
-            </a:solidFill>
-          </a:ln>
-        </p:spPr>
-        <p:txBody>
-          <a:bodyPr wrap="square" lIns="76200" tIns="76200" rIns="76200" bIns="76200"/>
-          <a:lstStyle/>
-          <a:p>
-            <a:pPr algn="ctr"/>
-            <a:r>
-              <a:rPr lang="ru-RU" sz="1200" b="1">
-                <a:solidFill>
-                  <a:srgbClr val="B91C1C"/>
-                </a:solidFill>
-                <a:latin typeface="Verdana"/>
-                <a:cs typeface="Verdana"/>
-              </a:rPr>
-              <a:t>Нет</a:t>
-            </a:r>
-          </a:p>
-        </p:txBody>
-      </p:sp>
-      <p:sp>
-        <p:nvSpPr>
-          <p:cNvPr id="202" name="Shape 202"/>
-          <p:cNvSpPr txBox="1"/>
-          <p:nvPr/>
-        </p:nvSpPr>
-        <p:spPr>
-          <a:xfrm>
-            <a:off x="6126480" y="1828800"/>
-            <a:ext cx="3429000" cy="685800"/>
-          </a:xfrm>
-          <a:prstGeom prst="roundRect">
-            <a:avLst/>
-          </a:prstGeom>
-          <a:solidFill>
-            <a:srgbClr val="FFFFFF"/>
-          </a:solidFill>
-          <a:ln w="12700">
-            <a:solidFill>
-              <a:srgbClr val="E3E7EB"/>
-            </a:solidFill>
-          </a:ln>
-        </p:spPr>
-        <p:txBody>
-          <a:bodyPr wrap="square" lIns="127000" tIns="127000" rIns="127000" bIns="127000"/>
-          <a:lstStyle/>
-          <a:p>
-            <a:pPr algn="l"/>
-            <a:r>
-              <a:rPr lang="ru-RU" sz="1200" b="0">
-                <a:solidFill>
-                  <a:srgbClr val="1A2730"/>
-                </a:solidFill>
-                <a:latin typeface="Verdana"/>
-                <a:cs typeface="Verdana"/>
-              </a:rPr>
-              <a:t>Тайм-аут 10 000 мс</a:t>
-            </a:r>
-          </a:p>
-        </p:txBody>
-      </p:sp>
-      <p:sp>
-        <p:nvSpPr>
-          <p:cNvPr id="203" name="Shape 203"/>
-          <p:cNvSpPr txBox="1"/>
-          <p:nvPr/>
-        </p:nvSpPr>
-        <p:spPr>
-          <a:xfrm>
-            <a:off x="9646920" y="1828800"/>
-            <a:ext cx="2103120" cy="685800"/>
-          </a:xfrm>
-          <a:prstGeom prst="roundRect">
-            <a:avLst/>
-          </a:prstGeom>
-          <a:solidFill>
-            <a:srgbClr val="FEE2E2"/>
-          </a:solidFill>
-          <a:ln w="12700">
-            <a:solidFill>
-              <a:srgbClr val="E3E7EB"/>
-            </a:solidFill>
-          </a:ln>
-        </p:spPr>
-        <p:txBody>
-          <a:bodyPr wrap="square" lIns="101600" tIns="101600" rIns="101600" bIns="101600"/>
-          <a:lstStyle/>
-          <a:p>
-            <a:pPr algn="ctr"/>
-            <a:r>
-              <a:rPr lang="ru-RU" sz="1100" b="1">
-                <a:solidFill>
-                  <a:srgbClr val="B91C1C"/>
-                </a:solidFill>
-                <a:latin typeface="Verdana"/>
-                <a:cs typeface="Verdana"/>
-              </a:rPr>
-              <a:t>Ограничение воспроизведено</a:t>
-            </a:r>
-          </a:p>
-        </p:txBody>
-      </p:sp>
-      <p:sp>
-        <p:nvSpPr>
-          <p:cNvPr id="210" name="Shape 210"/>
-          <p:cNvSpPr txBox="1"/>
-          <p:nvPr/>
-        </p:nvSpPr>
-        <p:spPr>
-          <a:xfrm>
-            <a:off x="502920" y="2560320"/>
-            <a:ext cx="4434840" cy="685800"/>
-          </a:xfrm>
-          <a:prstGeom prst="roundRect">
-            <a:avLst/>
-          </a:prstGeom>
-          <a:solidFill>
-            <a:srgbClr val="FFFFFF"/>
-          </a:solidFill>
-          <a:ln w="12700">
-            <a:solidFill>
-              <a:srgbClr val="E3E7EB"/>
-            </a:solidFill>
-          </a:ln>
-        </p:spPr>
-        <p:txBody>
-          <a:bodyPr wrap="square" lIns="127000" tIns="127000" rIns="127000" bIns="127000"/>
-          <a:lstStyle/>
-          <a:p>
-            <a:pPr algn="l"/>
-            <a:r>
-              <a:rPr lang="ru-RU" sz="1200" b="0">
-                <a:solidFill>
-                  <a:srgbClr val="1A2730"/>
-                </a:solidFill>
-                <a:latin typeface="Verdana"/>
-                <a:cs typeface="Verdana"/>
-              </a:rPr>
-              <a:t>Доставка с общим каналом</a:t>
-            </a:r>
-          </a:p>
-        </p:txBody>
-      </p:sp>
-      <p:sp>
-        <p:nvSpPr>
-          <p:cNvPr id="211" name="Shape 211"/>
-          <p:cNvSpPr txBox="1"/>
-          <p:nvPr/>
-        </p:nvSpPr>
-        <p:spPr>
-          <a:xfrm>
-            <a:off x="5029200" y="2560320"/>
-            <a:ext cx="1005840" cy="685800"/>
-          </a:xfrm>
-          <a:prstGeom prst="roundRect">
-            <a:avLst/>
-          </a:prstGeom>
-          <a:solidFill>
-            <a:srgbClr val="E6F4F1"/>
-          </a:solidFill>
-          <a:ln w="12700">
-            <a:solidFill>
-              <a:srgbClr val="14A085"/>
-            </a:solidFill>
-          </a:ln>
-        </p:spPr>
-        <p:txBody>
-          <a:bodyPr wrap="square" lIns="76200" tIns="76200" rIns="76200" bIns="76200"/>
-          <a:lstStyle/>
-          <a:p>
-            <a:pPr algn="ctr"/>
-            <a:r>
-              <a:rPr lang="ru-RU" sz="1200" b="1">
-                <a:solidFill>
-                  <a:srgbClr val="14A085"/>
-                </a:solidFill>
-                <a:latin typeface="Verdana"/>
-                <a:cs typeface="Verdana"/>
-              </a:rPr>
-              <a:t>Да</a:t>
-            </a:r>
-          </a:p>
-        </p:txBody>
-      </p:sp>
-      <p:sp>
-        <p:nvSpPr>
-          <p:cNvPr id="212" name="Shape 212"/>
-          <p:cNvSpPr txBox="1"/>
-          <p:nvPr/>
-        </p:nvSpPr>
-        <p:spPr>
-          <a:xfrm>
-            <a:off x="6126480" y="2560320"/>
-            <a:ext cx="3429000" cy="685800"/>
-          </a:xfrm>
-          <a:prstGeom prst="roundRect">
-            <a:avLst/>
-          </a:prstGeom>
-          <a:solidFill>
-            <a:srgbClr val="FFFFFF"/>
-          </a:solidFill>
-          <a:ln w="12700">
-            <a:solidFill>
-              <a:srgbClr val="E3E7EB"/>
-            </a:solidFill>
-          </a:ln>
-        </p:spPr>
-        <p:txBody>
-          <a:bodyPr wrap="square" lIns="127000" tIns="127000" rIns="127000" bIns="127000"/>
-          <a:lstStyle/>
-          <a:p>
-            <a:pPr algn="l"/>
-            <a:r>
-              <a:rPr lang="ru-RU" sz="1200" b="0">
-                <a:solidFill>
-                  <a:srgbClr val="1A2730"/>
-                </a:solidFill>
-                <a:latin typeface="Verdana"/>
-                <a:cs typeface="Verdana"/>
-              </a:rPr>
-              <a:t>Событие доставлено · задержка ≈ 9,5 мс</a:t>
-            </a:r>
-          </a:p>
-        </p:txBody>
-      </p:sp>
-      <p:sp>
-        <p:nvSpPr>
-          <p:cNvPr id="213" name="Shape 213"/>
-          <p:cNvSpPr txBox="1"/>
-          <p:nvPr/>
-        </p:nvSpPr>
-        <p:spPr>
-          <a:xfrm>
-            <a:off x="9646920" y="2560320"/>
-            <a:ext cx="2103120" cy="685800"/>
-          </a:xfrm>
-          <a:prstGeom prst="roundRect">
-            <a:avLst/>
-          </a:prstGeom>
-          <a:solidFill>
-            <a:srgbClr val="E6F4F1"/>
-          </a:solidFill>
-          <a:ln w="12700">
-            <a:solidFill>
-              <a:srgbClr val="14A085"/>
-            </a:solidFill>
-          </a:ln>
-        </p:spPr>
-        <p:txBody>
-          <a:bodyPr wrap="square" lIns="101600" tIns="101600" rIns="101600" bIns="101600"/>
-          <a:lstStyle/>
-          <a:p>
-            <a:pPr algn="ctr"/>
-            <a:r>
-              <a:rPr lang="ru-RU" sz="1100" b="1">
-                <a:solidFill>
-                  <a:srgbClr val="14A085"/>
-                </a:solidFill>
-                <a:latin typeface="Verdana"/>
-                <a:cs typeface="Verdana"/>
-              </a:rPr>
-              <a:t>Ограничение устранено</a:t>
-            </a:r>
-          </a:p>
-        </p:txBody>
-      </p:sp>
-      <p:sp>
-        <p:nvSpPr>
-          <p:cNvPr id="220" name="Shape 220"/>
-          <p:cNvSpPr txBox="1"/>
-          <p:nvPr/>
-        </p:nvSpPr>
-        <p:spPr>
-          <a:xfrm>
-            <a:off x="502920" y="3291840"/>
-            <a:ext cx="4434840" cy="685800"/>
-          </a:xfrm>
-          <a:prstGeom prst="roundRect">
-            <a:avLst/>
-          </a:prstGeom>
-          <a:solidFill>
-            <a:srgbClr val="FFFFFF"/>
-          </a:solidFill>
-          <a:ln w="12700">
-            <a:solidFill>
-              <a:srgbClr val="E3E7EB"/>
-            </a:solidFill>
-          </a:ln>
-        </p:spPr>
-        <p:txBody>
-          <a:bodyPr wrap="square" lIns="127000" tIns="127000" rIns="127000" bIns="127000"/>
-          <a:lstStyle/>
-          <a:p>
-            <a:pPr algn="l"/>
-            <a:r>
-              <a:rPr lang="ru-RU" sz="1200" b="0">
-                <a:solidFill>
-                  <a:srgbClr val="1A2730"/>
-                </a:solidFill>
-                <a:latin typeface="Verdana"/>
-                <a:cs typeface="Verdana"/>
-              </a:rPr>
-              <a:t>Серия из 30 итераций</a:t>
-            </a:r>
-          </a:p>
-        </p:txBody>
-      </p:sp>
-      <p:sp>
-        <p:nvSpPr>
-          <p:cNvPr id="221" name="Shape 221"/>
-          <p:cNvSpPr txBox="1"/>
-          <p:nvPr/>
-        </p:nvSpPr>
-        <p:spPr>
-          <a:xfrm>
-            <a:off x="5029200" y="3291840"/>
-            <a:ext cx="1005840" cy="685800"/>
-          </a:xfrm>
-          <a:prstGeom prst="roundRect">
-            <a:avLst/>
-          </a:prstGeom>
-          <a:solidFill>
-            <a:srgbClr val="FFFFFF"/>
-          </a:solidFill>
-          <a:ln w="12700">
-            <a:solidFill>
-              <a:srgbClr val="E3E7EB"/>
-            </a:solidFill>
-          </a:ln>
-        </p:spPr>
-        <p:txBody>
-          <a:bodyPr wrap="square" lIns="76200" tIns="76200" rIns="76200" bIns="76200"/>
-          <a:lstStyle/>
-          <a:p>
-            <a:pPr algn="ctr"/>
-            <a:r>
-              <a:rPr lang="ru-RU" sz="1200" b="1">
-                <a:solidFill>
-                  <a:srgbClr val="14A085"/>
-                </a:solidFill>
-                <a:latin typeface="Verdana"/>
-                <a:cs typeface="Verdana"/>
-              </a:rPr>
-              <a:t>Да</a:t>
-            </a:r>
-          </a:p>
-        </p:txBody>
-      </p:sp>
-      <p:sp>
-        <p:nvSpPr>
-          <p:cNvPr id="222" name="Shape 222"/>
-          <p:cNvSpPr txBox="1"/>
-          <p:nvPr/>
-        </p:nvSpPr>
-        <p:spPr>
-          <a:xfrm>
-            <a:off x="6126480" y="3291840"/>
-            <a:ext cx="3429000" cy="685800"/>
-          </a:xfrm>
-          <a:prstGeom prst="roundRect">
-            <a:avLst/>
-          </a:prstGeom>
-          <a:solidFill>
-            <a:srgbClr val="FFFFFF"/>
-          </a:solidFill>
-          <a:ln w="12700">
-            <a:solidFill>
-              <a:srgbClr val="E3E7EB"/>
-            </a:solidFill>
-          </a:ln>
-        </p:spPr>
-        <p:txBody>
-          <a:bodyPr wrap="square" lIns="127000" tIns="127000" rIns="127000" bIns="127000"/>
-          <a:lstStyle/>
-          <a:p>
-            <a:pPr algn="l"/>
-            <a:r>
-              <a:rPr lang="ru-RU" sz="1200" b="0">
-                <a:solidFill>
-                  <a:srgbClr val="1A2730"/>
-                </a:solidFill>
-                <a:latin typeface="Verdana"/>
-                <a:cs typeface="Verdana"/>
-              </a:rPr>
-              <a:t>30 из 30 · 95 % быстрее 13,8 мс</a:t>
-            </a:r>
-          </a:p>
-        </p:txBody>
-      </p:sp>
-      <p:sp>
-        <p:nvSpPr>
-          <p:cNvPr id="223" name="Shape 223"/>
-          <p:cNvSpPr txBox="1"/>
-          <p:nvPr/>
-        </p:nvSpPr>
-        <p:spPr>
-          <a:xfrm>
-            <a:off x="9646920" y="3291840"/>
-            <a:ext cx="2103120" cy="685800"/>
-          </a:xfrm>
-          <a:prstGeom prst="roundRect">
-            <a:avLst/>
-          </a:prstGeom>
-          <a:solidFill>
-            <a:srgbClr val="FFFFFF"/>
-          </a:solidFill>
-          <a:ln w="12700">
-            <a:solidFill>
-              <a:srgbClr val="E3E7EB"/>
-            </a:solidFill>
-          </a:ln>
-        </p:spPr>
-        <p:txBody>
-          <a:bodyPr wrap="square" lIns="101600" tIns="101600" rIns="101600" bIns="101600"/>
-          <a:lstStyle/>
-          <a:p>
-            <a:pPr algn="ctr"/>
-            <a:r>
-              <a:rPr lang="ru-RU" sz="1100" b="1">
-                <a:solidFill>
-                  <a:srgbClr val="14A085"/>
-                </a:solidFill>
-                <a:latin typeface="Verdana"/>
-                <a:cs typeface="Verdana"/>
-              </a:rPr>
-              <a:t>Повторяемость подтверждена</a:t>
-            </a:r>
-          </a:p>
-        </p:txBody>
-      </p:sp>
-      <p:sp>
-        <p:nvSpPr>
-          <p:cNvPr id="230" name="Shape 230"/>
-          <p:cNvSpPr txBox="1"/>
-          <p:nvPr/>
-        </p:nvSpPr>
-        <p:spPr>
-          <a:xfrm>
-            <a:off x="502920" y="4023360"/>
-            <a:ext cx="4434840" cy="685800"/>
-          </a:xfrm>
-          <a:prstGeom prst="roundRect">
-            <a:avLst/>
-          </a:prstGeom>
-          <a:solidFill>
-            <a:srgbClr val="FFFFFF"/>
-          </a:solidFill>
-          <a:ln w="12700">
-            <a:solidFill>
-              <a:srgbClr val="E3E7EB"/>
-            </a:solidFill>
-          </a:ln>
-        </p:spPr>
-        <p:txBody>
-          <a:bodyPr wrap="square" lIns="127000" tIns="127000" rIns="127000" bIns="127000"/>
-          <a:lstStyle/>
-          <a:p>
-            <a:pPr algn="l"/>
-            <a:r>
-              <a:rPr lang="ru-RU" sz="1200" b="0">
-                <a:solidFill>
-                  <a:srgbClr val="1A2730"/>
-                </a:solidFill>
-                <a:latin typeface="Verdana"/>
-                <a:cs typeface="Verdana"/>
-              </a:rPr>
-              <a:t>Повторная подписка после разрыва</a:t>
-            </a:r>
-          </a:p>
-        </p:txBody>
-      </p:sp>
-      <p:sp>
-        <p:nvSpPr>
-          <p:cNvPr id="231" name="Shape 231"/>
-          <p:cNvSpPr txBox="1"/>
-          <p:nvPr/>
-        </p:nvSpPr>
-        <p:spPr>
-          <a:xfrm>
-            <a:off x="5029200" y="4023360"/>
-            <a:ext cx="1005840" cy="685800"/>
-          </a:xfrm>
-          <a:prstGeom prst="roundRect">
-            <a:avLst/>
-          </a:prstGeom>
-          <a:solidFill>
-            <a:srgbClr val="FFFFFF"/>
-          </a:solidFill>
-          <a:ln w="12700">
-            <a:solidFill>
-              <a:srgbClr val="E3E7EB"/>
-            </a:solidFill>
-          </a:ln>
-        </p:spPr>
-        <p:txBody>
-          <a:bodyPr wrap="square" lIns="76200" tIns="76200" rIns="76200" bIns="76200"/>
-          <a:lstStyle/>
-          <a:p>
-            <a:pPr algn="ctr"/>
-            <a:r>
-              <a:rPr lang="ru-RU" sz="1200" b="1">
-                <a:solidFill>
-                  <a:srgbClr val="14A085"/>
-                </a:solidFill>
-                <a:latin typeface="Verdana"/>
-                <a:cs typeface="Verdana"/>
-              </a:rPr>
-              <a:t>Да</a:t>
-            </a:r>
-          </a:p>
-        </p:txBody>
-      </p:sp>
-      <p:sp>
-        <p:nvSpPr>
-          <p:cNvPr id="232" name="Shape 232"/>
-          <p:cNvSpPr txBox="1"/>
-          <p:nvPr/>
-        </p:nvSpPr>
-        <p:spPr>
-          <a:xfrm>
-            <a:off x="6126480" y="4023360"/>
-            <a:ext cx="3429000" cy="685800"/>
-          </a:xfrm>
-          <a:prstGeom prst="roundRect">
-            <a:avLst/>
-          </a:prstGeom>
-          <a:solidFill>
-            <a:srgbClr val="FFFFFF"/>
-          </a:solidFill>
-          <a:ln w="12700">
-            <a:solidFill>
-              <a:srgbClr val="E3E7EB"/>
-            </a:solidFill>
-          </a:ln>
-        </p:spPr>
-        <p:txBody>
-          <a:bodyPr wrap="square" lIns="127000" tIns="127000" rIns="127000" bIns="127000"/>
-          <a:lstStyle/>
-          <a:p>
-            <a:pPr algn="l"/>
-            <a:r>
-              <a:rPr lang="ru-RU" sz="1200" b="0">
-                <a:solidFill>
-                  <a:srgbClr val="1A2730"/>
-                </a:solidFill>
-                <a:latin typeface="Verdana"/>
-                <a:cs typeface="Verdana"/>
-              </a:rPr>
-              <a:t>Событие после восстановления · 15,2 мс</a:t>
-            </a:r>
-          </a:p>
-        </p:txBody>
-      </p:sp>
-      <p:sp>
-        <p:nvSpPr>
-          <p:cNvPr id="233" name="Shape 233"/>
-          <p:cNvSpPr txBox="1"/>
-          <p:nvPr/>
-        </p:nvSpPr>
-        <p:spPr>
-          <a:xfrm>
-            <a:off x="9646920" y="4023360"/>
-            <a:ext cx="2103120" cy="685800"/>
-          </a:xfrm>
-          <a:prstGeom prst="roundRect">
-            <a:avLst/>
-          </a:prstGeom>
-          <a:solidFill>
-            <a:srgbClr val="FFFFFF"/>
-          </a:solidFill>
-          <a:ln w="12700">
-            <a:solidFill>
-              <a:srgbClr val="E3E7EB"/>
-            </a:solidFill>
-          </a:ln>
-        </p:spPr>
-        <p:txBody>
-          <a:bodyPr wrap="square" lIns="101600" tIns="101600" rIns="101600" bIns="101600"/>
-          <a:lstStyle/>
-          <a:p>
-            <a:pPr algn="ctr"/>
-            <a:r>
-              <a:rPr lang="ru-RU" sz="1100" b="1">
-                <a:solidFill>
-                  <a:srgbClr val="14A085"/>
-                </a:solidFill>
-                <a:latin typeface="Verdana"/>
-                <a:cs typeface="Verdana"/>
-              </a:rPr>
-              <a:t>Подписка восстановлена</a:t>
-            </a:r>
-          </a:p>
-        </p:txBody>
-      </p:sp>
-      <p:sp>
-        <p:nvSpPr>
-          <p:cNvPr id="240" name="Shape 240"/>
-          <p:cNvSpPr txBox="1"/>
-          <p:nvPr/>
-        </p:nvSpPr>
-        <p:spPr>
-          <a:xfrm>
-            <a:off x="502920" y="4754880"/>
-            <a:ext cx="4434840" cy="685800"/>
-          </a:xfrm>
-          <a:prstGeom prst="roundRect">
-            <a:avLst/>
-          </a:prstGeom>
-          <a:solidFill>
-            <a:srgbClr val="FFFFFF"/>
-          </a:solidFill>
-          <a:ln w="12700">
-            <a:solidFill>
-              <a:srgbClr val="E3E7EB"/>
-            </a:solidFill>
-          </a:ln>
-        </p:spPr>
-        <p:txBody>
-          <a:bodyPr wrap="square" lIns="127000" tIns="127000" rIns="127000" bIns="127000"/>
-          <a:lstStyle/>
-          <a:p>
-            <a:pPr algn="l"/>
-            <a:r>
-              <a:rPr lang="ru-RU" sz="1200" b="0">
-                <a:solidFill>
-                  <a:srgbClr val="1A2730"/>
-                </a:solidFill>
-                <a:latin typeface="Verdana"/>
-                <a:cs typeface="Verdana"/>
-              </a:rPr>
-              <a:t>Переключение после отказа узла</a:t>
-            </a:r>
-          </a:p>
-        </p:txBody>
-      </p:sp>
-      <p:sp>
-        <p:nvSpPr>
-          <p:cNvPr id="241" name="Shape 241"/>
-          <p:cNvSpPr txBox="1"/>
-          <p:nvPr/>
-        </p:nvSpPr>
-        <p:spPr>
-          <a:xfrm>
-            <a:off x="5029200" y="4754880"/>
-            <a:ext cx="1005840" cy="685800"/>
-          </a:xfrm>
-          <a:prstGeom prst="roundRect">
-            <a:avLst/>
-          </a:prstGeom>
-          <a:solidFill>
-            <a:srgbClr val="FFFFFF"/>
-          </a:solidFill>
-          <a:ln w="12700">
-            <a:solidFill>
-              <a:srgbClr val="E3E7EB"/>
-            </a:solidFill>
-          </a:ln>
-        </p:spPr>
-        <p:txBody>
-          <a:bodyPr wrap="square" lIns="76200" tIns="76200" rIns="76200" bIns="76200"/>
-          <a:lstStyle/>
-          <a:p>
-            <a:pPr algn="ctr"/>
-            <a:r>
-              <a:rPr lang="ru-RU" sz="1200" b="1">
-                <a:solidFill>
-                  <a:srgbClr val="14A085"/>
-                </a:solidFill>
-                <a:latin typeface="Verdana"/>
-                <a:cs typeface="Verdana"/>
-              </a:rPr>
-              <a:t>Да</a:t>
-            </a:r>
-          </a:p>
-        </p:txBody>
-      </p:sp>
-      <p:sp>
-        <p:nvSpPr>
-          <p:cNvPr id="242" name="Shape 242"/>
-          <p:cNvSpPr txBox="1"/>
-          <p:nvPr/>
-        </p:nvSpPr>
-        <p:spPr>
-          <a:xfrm>
-            <a:off x="6126480" y="4754880"/>
-            <a:ext cx="3429000" cy="685800"/>
-          </a:xfrm>
-          <a:prstGeom prst="roundRect">
-            <a:avLst/>
-          </a:prstGeom>
-          <a:solidFill>
-            <a:srgbClr val="FFFFFF"/>
-          </a:solidFill>
-          <a:ln w="12700">
-            <a:solidFill>
-              <a:srgbClr val="E3E7EB"/>
-            </a:solidFill>
-          </a:ln>
-        </p:spPr>
-        <p:txBody>
-          <a:bodyPr wrap="square" lIns="127000" tIns="127000" rIns="127000" bIns="127000"/>
-          <a:lstStyle/>
-          <a:p>
-            <a:pPr algn="l"/>
-            <a:r>
-              <a:rPr lang="ru-RU" sz="1200" b="0">
-                <a:solidFill>
-                  <a:srgbClr val="1A2730"/>
-                </a:solidFill>
-                <a:latin typeface="Verdana"/>
-                <a:cs typeface="Verdana"/>
-              </a:rPr>
-              <a:t>Узел 2 → узел 1, событие получено</a:t>
-            </a:r>
-          </a:p>
-        </p:txBody>
-      </p:sp>
-      <p:sp>
-        <p:nvSpPr>
-          <p:cNvPr id="243" name="Shape 243"/>
-          <p:cNvSpPr txBox="1"/>
-          <p:nvPr/>
-        </p:nvSpPr>
-        <p:spPr>
-          <a:xfrm>
-            <a:off x="9646920" y="4754880"/>
-            <a:ext cx="2103120" cy="685800"/>
-          </a:xfrm>
-          <a:prstGeom prst="roundRect">
-            <a:avLst/>
-          </a:prstGeom>
-          <a:solidFill>
-            <a:srgbClr val="FFFFFF"/>
-          </a:solidFill>
-          <a:ln w="12700">
-            <a:solidFill>
-              <a:srgbClr val="E3E7EB"/>
-            </a:solidFill>
-          </a:ln>
-        </p:spPr>
-        <p:txBody>
-          <a:bodyPr wrap="square" lIns="101600" tIns="101600" rIns="101600" bIns="101600"/>
-          <a:lstStyle/>
-          <a:p>
-            <a:pPr algn="ctr"/>
-            <a:r>
-              <a:rPr lang="ru-RU" sz="1100" b="1">
-                <a:solidFill>
-                  <a:srgbClr val="14A085"/>
-                </a:solidFill>
-                <a:latin typeface="Verdana"/>
-                <a:cs typeface="Verdana"/>
-              </a:rPr>
-              <a:t>Восстановление после отказа</a:t>
-            </a:r>
-          </a:p>
-        </p:txBody>
-      </p:sp>
-      <p:sp>
-        <p:nvSpPr>
-          <p:cNvPr id="250" name="Shape 250"/>
-          <p:cNvSpPr txBox="1"/>
-          <p:nvPr/>
-        </p:nvSpPr>
-        <p:spPr>
-          <a:xfrm>
-            <a:off x="502920" y="5669280"/>
-            <a:ext cx="11247120" cy="594360"/>
-          </a:xfrm>
-          <a:prstGeom prst="roundRect">
-            <a:avLst/>
-          </a:prstGeom>
-          <a:noFill/>
-          <a:ln>
-            <a:noFill/>
-          </a:ln>
-        </p:spPr>
-        <p:txBody>
-          <a:bodyPr wrap="square" lIns="177800" tIns="177800" rIns="177800" bIns="177800"/>
-          <a:lstStyle/>
-          <a:p>
-            <a:pPr algn="ctr"/>
-            <a:r>
-              <a:rPr lang="ru-RU" sz="1200" b="0">
-                <a:solidFill>
-                  <a:srgbClr val="5E6A75"/>
-                </a:solidFill>
-                <a:latin typeface="Verdana"/>
-                <a:cs typeface="Verdana"/>
-              </a:rPr>
-              <a:t>Сопоставление режимов на одном стенде с одним кодом показывает причинную связь между включением межузлового канала и доставкой события.</a:t>
-            </a:r>
-          </a:p>
-        </p:txBody>
-      </p:sp>
-      <p:sp>
-        <p:nvSpPr>
-          <p:cNvPr id="900" name="Shape 900"/>
-          <p:cNvSpPr txBox="1"/>
-          <p:nvPr/>
-        </p:nvSpPr>
-        <p:spPr>
-          <a:xfrm>
-            <a:off x="594360" y="6510528"/>
-            <a:ext cx="10972800" cy="201168"/>
-          </a:xfrm>
-          <a:prstGeom prst="roundRect">
-            <a:avLst/>
-          </a:prstGeom>
-          <a:noFill/>
-          <a:ln>
-            <a:noFill/>
-          </a:ln>
-        </p:spPr>
-        <p:txBody>
-          <a:bodyPr wrap="square" lIns="177800" tIns="177800" rIns="177800" bIns="177800"/>
-          <a:lstStyle/>
-          <a:p>
-            <a:pPr algn="l"/>
-            <a:r>
-              <a:rPr lang="ru-RU" sz="800" b="0">
-                <a:solidFill>
-                  <a:srgbClr val="5E6A75"/>
-                </a:solidFill>
-                <a:latin typeface="Verdana"/>
-                <a:cs typeface="Verdana"/>
-              </a:rPr>
-              <a:t>В реальном времени · 16</a:t>
-            </a:r>
-          </a:p>
-        </p:txBody>
-      </p:sp>
-    </p:spTree>
-  </p:cSld>
-  <p:clrMapOvr>
-    <a:masterClrMapping/>
-  </p:clrMapOvr>
-</p:sld>
-</file>
-
-<file path=ppt/slides/slide17.xml><?xml version="1.0" encoding="utf-8"?>
-<p:sld xmlns:a="http://schemas.openxmlformats.org/drawingml/2006/main" xmlns:r="http://schemas.openxmlformats.org/officeDocument/2006/relationships" xmlns:p="http://schemas.openxmlformats.org/presentationml/2006/main">
-  <p:cSld>
-    <p:bg>
-      <p:bgPr>
-        <a:solidFill>
-          <a:srgbClr val="F8FAFA"/>
-        </a:solidFill>
-        <a:effectLst/>
-      </p:bgPr>
-    </p:bg>
-    <p:spTree>
-      <p:nvGrpSpPr>
-        <p:cNvPr id="1" name=""/>
-        <p:cNvGrpSpPr/>
-        <p:nvPr/>
-      </p:nvGrpSpPr>
-      <p:grpSpPr>
-        <a:xfrm>
-          <a:off x="0" y="0"/>
-          <a:ext cx="0" cy="0"/>
-          <a:chOff x="0" y="0"/>
-          <a:chExt cx="0" cy="0"/>
-        </a:xfrm>
-      </p:grpSpPr>
-      <p:sp>
-        <p:nvSpPr>
-          <p:cNvPr id="10" name="Shape 10"/>
-          <p:cNvSpPr txBox="1"/>
-          <p:nvPr/>
-        </p:nvSpPr>
-        <p:spPr>
-          <a:xfrm>
-            <a:off x="594360" y="411480"/>
-            <a:ext cx="10881360" cy="658368"/>
-          </a:xfrm>
-          <a:prstGeom prst="roundRect">
-            <a:avLst/>
-          </a:prstGeom>
-          <a:noFill/>
-          <a:ln>
-            <a:noFill/>
-          </a:ln>
-        </p:spPr>
-        <p:txBody>
-          <a:bodyPr wrap="square" lIns="177800" tIns="177800" rIns="177800" bIns="177800"/>
-          <a:lstStyle/>
-          <a:p>
-            <a:pPr algn="l"/>
-            <a:r>
-              <a:rPr lang="ru-RU" sz="3000" b="1">
-                <a:solidFill>
-                  <a:srgbClr val="1A2730"/>
-                </a:solidFill>
-                <a:latin typeface="Verdana"/>
-                <a:cs typeface="Verdana"/>
-              </a:rPr>
-              <a:t>Чего решение не делает</a:t>
-            </a:r>
-          </a:p>
-        </p:txBody>
-      </p:sp>
-      <p:sp>
-        <p:nvSpPr>
-          <p:cNvPr id="11" name="Shape 11"/>
-          <p:cNvSpPr txBox="1"/>
-          <p:nvPr/>
-        </p:nvSpPr>
-        <p:spPr>
-          <a:xfrm>
-            <a:off x="621792" y="987552"/>
-            <a:ext cx="9875520" cy="320040"/>
-          </a:xfrm>
-          <a:prstGeom prst="roundRect">
-            <a:avLst/>
-          </a:prstGeom>
-          <a:noFill/>
-          <a:ln>
-            <a:noFill/>
-          </a:ln>
-        </p:spPr>
-        <p:txBody>
-          <a:bodyPr wrap="square" lIns="177800" tIns="177800" rIns="177800" bIns="177800"/>
-          <a:lstStyle/>
-          <a:p>
-            <a:pPr algn="l"/>
-            <a:r>
-              <a:rPr lang="ru-RU" sz="1300" b="0">
-                <a:solidFill>
-                  <a:srgbClr val="5E6A75"/>
-                </a:solidFill>
-                <a:latin typeface="Verdana"/>
-                <a:cs typeface="Verdana"/>
-              </a:rPr>
-              <a:t>Это интерфейсная синхронизация, а не строгий промышленный режим реального времени</a:t>
-            </a:r>
-          </a:p>
-        </p:txBody>
-      </p:sp>
-      <p:sp>
-        <p:nvSpPr>
-          <p:cNvPr id="20" name="Shape 20"/>
-          <p:cNvSpPr txBox="1"/>
-          <p:nvPr/>
-        </p:nvSpPr>
-        <p:spPr>
-          <a:xfrm>
-            <a:off x="685800" y="1508760"/>
-            <a:ext cx="3520440" cy="4343400"/>
-          </a:xfrm>
-          <a:prstGeom prst="roundRect">
-            <a:avLst/>
-          </a:prstGeom>
-          <a:solidFill>
-            <a:srgbClr val="FFFFFF"/>
-          </a:solidFill>
-          <a:ln w="12700">
-            <a:solidFill>
-              <a:srgbClr val="E3E7EB"/>
-            </a:solidFill>
-          </a:ln>
-        </p:spPr>
-        <p:txBody>
-          <a:bodyPr wrap="square" lIns="177800" tIns="177800" rIns="177800" bIns="177800"/>
-          <a:lstStyle/>
-          <a:p>
-            <a:pPr algn="l"/>
-            <a:r>
-              <a:rPr lang="ru-RU" sz="1400" b="0">
-                <a:solidFill>
-                  <a:srgbClr val="1A2730"/>
-                </a:solidFill>
-                <a:latin typeface="Verdana"/>
-                <a:cs typeface="Verdana"/>
-              </a:rPr>
-              <a:t>Задержка не нулевая</a:t>
-            </a:r>
-          </a:p>
-          <a:p>
-            <a:pPr algn="l"/>
-            <a:r>
-              <a:rPr lang="ru-RU" sz="1400" b="0">
-                <a:solidFill>
-                  <a:srgbClr val="1A2730"/>
-                </a:solidFill>
-                <a:latin typeface="Verdana"/>
-                <a:cs typeface="Verdana"/>
-              </a:rPr>
-              <a:t/>
-            </a:r>
-          </a:p>
-          <a:p>
-            <a:pPr algn="l"/>
-            <a:r>
-              <a:rPr lang="ru-RU" sz="1400" b="0">
-                <a:solidFill>
-                  <a:srgbClr val="1A2730"/>
-                </a:solidFill>
-                <a:latin typeface="Verdana"/>
-                <a:cs typeface="Verdana"/>
-              </a:rPr>
-              <a:t>Событие проходит через два экземпляра и общий канал.</a:t>
-            </a:r>
-          </a:p>
-          <a:p>
-            <a:pPr algn="l"/>
-            <a:r>
-              <a:rPr lang="ru-RU" sz="1400" b="0">
-                <a:solidFill>
-                  <a:srgbClr val="1A2730"/>
-                </a:solidFill>
-                <a:latin typeface="Verdana"/>
-                <a:cs typeface="Verdana"/>
-              </a:rPr>
-              <a:t/>
-            </a:r>
-          </a:p>
-          <a:p>
-            <a:pPr algn="l"/>
-            <a:r>
-              <a:rPr lang="ru-RU" sz="1400" b="0">
-                <a:solidFill>
-                  <a:srgbClr val="1A2730"/>
-                </a:solidFill>
-                <a:latin typeface="Verdana"/>
-                <a:cs typeface="Verdana"/>
-              </a:rPr>
-              <a:t>На стенде получилось ~7 мс в среднем.</a:t>
-            </a:r>
-          </a:p>
-        </p:txBody>
-      </p:sp>
-      <p:sp>
-        <p:nvSpPr>
-          <p:cNvPr id="21" name="Shape 21"/>
-          <p:cNvSpPr txBox="1"/>
-          <p:nvPr/>
-        </p:nvSpPr>
-        <p:spPr>
-          <a:xfrm>
-            <a:off x="4389120" y="1508760"/>
-            <a:ext cx="3520440" cy="4343400"/>
-          </a:xfrm>
-          <a:prstGeom prst="roundRect">
-            <a:avLst/>
-          </a:prstGeom>
-          <a:solidFill>
-            <a:srgbClr val="FFFFFF"/>
-          </a:solidFill>
-          <a:ln w="12700">
-            <a:solidFill>
-              <a:srgbClr val="E3E7EB"/>
-            </a:solidFill>
-          </a:ln>
-        </p:spPr>
-        <p:txBody>
-          <a:bodyPr wrap="square" lIns="177800" tIns="177800" rIns="177800" bIns="177800"/>
-          <a:lstStyle/>
-          <a:p>
-            <a:pPr algn="l"/>
-            <a:r>
-              <a:rPr lang="ru-RU" sz="1400" b="0">
-                <a:solidFill>
-                  <a:srgbClr val="1A2730"/>
-                </a:solidFill>
-                <a:latin typeface="Verdana"/>
-                <a:cs typeface="Verdana"/>
-              </a:rPr>
-              <a:t>Источник истины — база</a:t>
-            </a:r>
-          </a:p>
-          <a:p>
-            <a:pPr algn="l"/>
-            <a:r>
-              <a:rPr lang="ru-RU" sz="1400" b="0">
-                <a:solidFill>
-                  <a:srgbClr val="1A2730"/>
-                </a:solidFill>
-                <a:latin typeface="Verdana"/>
-                <a:cs typeface="Verdana"/>
-              </a:rPr>
-              <a:t/>
-            </a:r>
-          </a:p>
-          <a:p>
-            <a:pPr algn="l"/>
-            <a:r>
-              <a:rPr lang="ru-RU" sz="1400" b="0">
-                <a:solidFill>
-                  <a:srgbClr val="1A2730"/>
-                </a:solidFill>
-                <a:latin typeface="Verdana"/>
-                <a:cs typeface="Verdana"/>
-              </a:rPr>
-              <a:t>Если возникает сомнение в состоянии, клиент всегда может перечитать его обычным HTTP-запросом.</a:t>
-            </a:r>
-          </a:p>
-        </p:txBody>
-      </p:sp>
-      <p:sp>
-        <p:nvSpPr>
-          <p:cNvPr id="22" name="Shape 22"/>
-          <p:cNvSpPr txBox="1"/>
-          <p:nvPr/>
-        </p:nvSpPr>
-        <p:spPr>
-          <a:xfrm>
-            <a:off x="8092440" y="1508760"/>
-            <a:ext cx="3520440" cy="4343400"/>
-          </a:xfrm>
-          <a:prstGeom prst="roundRect">
-            <a:avLst/>
-          </a:prstGeom>
-          <a:solidFill>
-            <a:srgbClr val="EEF0FE"/>
-          </a:solidFill>
-          <a:ln w="12700">
-            <a:solidFill>
-              <a:srgbClr val="6366F1"/>
-            </a:solidFill>
-          </a:ln>
-        </p:spPr>
-        <p:txBody>
-          <a:bodyPr wrap="square" lIns="177800" tIns="177800" rIns="177800" bIns="177800"/>
-          <a:lstStyle/>
-          <a:p>
-            <a:pPr algn="l"/>
-            <a:r>
-              <a:rPr lang="ru-RU" sz="1400" b="1">
-                <a:solidFill>
-                  <a:srgbClr val="1A2730"/>
-                </a:solidFill>
-                <a:latin typeface="Verdana"/>
-                <a:cs typeface="Verdana"/>
-              </a:rPr>
-              <a:t>Что было бы дальше</a:t>
-            </a:r>
-          </a:p>
-          <a:p>
-            <a:pPr algn="l"/>
-            <a:r>
-              <a:rPr lang="ru-RU" sz="1400" b="1">
-                <a:solidFill>
-                  <a:srgbClr val="1A2730"/>
-                </a:solidFill>
-                <a:latin typeface="Verdana"/>
-                <a:cs typeface="Verdana"/>
-              </a:rPr>
-              <a:t/>
-            </a:r>
-          </a:p>
-          <a:p>
-            <a:pPr algn="l"/>
-            <a:r>
-              <a:rPr lang="ru-RU" sz="1400" b="1">
-                <a:solidFill>
-                  <a:srgbClr val="1A2730"/>
-                </a:solidFill>
-                <a:latin typeface="Verdana"/>
-                <a:cs typeface="Verdana"/>
-              </a:rPr>
-              <a:t>Прочный журнал событий, версии сущностей, гарантии доставки — если потребуется строгая согласованность между сервисами.</a:t>
-            </a:r>
-          </a:p>
-        </p:txBody>
-      </p:sp>
-      <p:sp>
-        <p:nvSpPr>
-          <p:cNvPr id="900" name="Shape 900"/>
-          <p:cNvSpPr txBox="1"/>
-          <p:nvPr/>
-        </p:nvSpPr>
-        <p:spPr>
-          <a:xfrm>
-            <a:off x="594360" y="6510528"/>
-            <a:ext cx="10972800" cy="201168"/>
-          </a:xfrm>
-          <a:prstGeom prst="roundRect">
-            <a:avLst/>
-          </a:prstGeom>
-          <a:noFill/>
-          <a:ln>
-            <a:noFill/>
-          </a:ln>
-        </p:spPr>
-        <p:txBody>
-          <a:bodyPr wrap="square" lIns="177800" tIns="177800" rIns="177800" bIns="177800"/>
-          <a:lstStyle/>
-          <a:p>
-            <a:pPr algn="l"/>
-            <a:r>
-              <a:rPr lang="ru-RU" sz="800" b="0">
-                <a:solidFill>
-                  <a:srgbClr val="5E6A75"/>
-                </a:solidFill>
-                <a:latin typeface="Verdana"/>
-                <a:cs typeface="Verdana"/>
-              </a:rPr>
-              <a:t>В реальном времени · 17</a:t>
-            </a:r>
-          </a:p>
-        </p:txBody>
-      </p:sp>
-    </p:spTree>
-  </p:cSld>
-  <p:clrMapOvr>
-    <a:masterClrMapping/>
-  </p:clrMapOvr>
-</p:sld>
-</file>
-
-<file path=ppt/slides/slide18.xml><?xml version="1.0" encoding="utf-8"?>
-<p:sld xmlns:a="http://schemas.openxmlformats.org/drawingml/2006/main" xmlns:r="http://schemas.openxmlformats.org/officeDocument/2006/relationships" xmlns:p="http://schemas.openxmlformats.org/presentationml/2006/main">
-  <p:cSld>
-    <p:bg>
-      <p:bgPr>
-        <a:solidFill>
-          <a:srgbClr val="F8FAFA"/>
-        </a:solidFill>
-        <a:effectLst/>
-      </p:bgPr>
-    </p:bg>
-    <p:spTree>
-      <p:nvGrpSpPr>
-        <p:cNvPr id="1" name=""/>
-        <p:cNvGrpSpPr/>
-        <p:nvPr/>
-      </p:nvGrpSpPr>
-      <p:grpSpPr>
-        <a:xfrm>
-          <a:off x="0" y="0"/>
-          <a:ext cx="0" cy="0"/>
-          <a:chOff x="0" y="0"/>
-          <a:chExt cx="0" cy="0"/>
-        </a:xfrm>
-      </p:grpSpPr>
-      <p:sp>
-        <p:nvSpPr>
-          <p:cNvPr id="10" name="Shape 10"/>
-          <p:cNvSpPr txBox="1"/>
-          <p:nvPr/>
-        </p:nvSpPr>
-        <p:spPr>
-          <a:xfrm>
-            <a:off x="594360" y="411480"/>
-            <a:ext cx="10881360" cy="658368"/>
-          </a:xfrm>
-          <a:prstGeom prst="roundRect">
-            <a:avLst/>
-          </a:prstGeom>
-          <a:noFill/>
-          <a:ln>
-            <a:noFill/>
-          </a:ln>
-        </p:spPr>
-        <p:txBody>
-          <a:bodyPr wrap="square" lIns="177800" tIns="177800" rIns="177800" bIns="177800"/>
-          <a:lstStyle/>
-          <a:p>
-            <a:pPr algn="l"/>
-            <a:r>
-              <a:rPr lang="ru-RU" sz="3000" b="1">
-                <a:solidFill>
-                  <a:srgbClr val="1A2730"/>
-                </a:solidFill>
-                <a:latin typeface="Verdana"/>
-                <a:cs typeface="Verdana"/>
-              </a:rPr>
-              <a:t>Итог</a:t>
-            </a:r>
-          </a:p>
-        </p:txBody>
-      </p:sp>
-      <p:sp>
-        <p:nvSpPr>
-          <p:cNvPr id="20" name="Shape 20"/>
-          <p:cNvSpPr txBox="1"/>
-          <p:nvPr/>
-        </p:nvSpPr>
-        <p:spPr>
-          <a:xfrm>
-            <a:off x="685800" y="1600200"/>
-            <a:ext cx="10835640" cy="1234440"/>
-          </a:xfrm>
-          <a:prstGeom prst="roundRect">
-            <a:avLst/>
-          </a:prstGeom>
-          <a:solidFill>
-            <a:srgbClr val="E6F4F1"/>
-          </a:solidFill>
-          <a:ln w="12700">
-            <a:solidFill>
-              <a:srgbClr val="14A085"/>
-            </a:solidFill>
-          </a:ln>
-        </p:spPr>
-        <p:txBody>
-          <a:bodyPr wrap="square" lIns="177800" tIns="177800" rIns="177800" bIns="177800"/>
-          <a:lstStyle/>
-          <a:p>
-            <a:pPr algn="ctr"/>
-            <a:r>
-              <a:rPr lang="ru-RU" sz="1800" b="1">
-                <a:solidFill>
-                  <a:srgbClr val="1A2730"/>
-                </a:solidFill>
-                <a:latin typeface="Verdana"/>
-                <a:cs typeface="Verdana"/>
-              </a:rPr>
-              <a:t>Изменения в отчёте теперь доходят до всех участников — независимо от того, к какому экземпляру backend они подключены.</a:t>
-            </a:r>
-          </a:p>
-        </p:txBody>
-      </p:sp>
-      <p:sp>
-        <p:nvSpPr>
-          <p:cNvPr id="21" name="Shape 21"/>
-          <p:cNvSpPr txBox="1"/>
-          <p:nvPr/>
-        </p:nvSpPr>
-        <p:spPr>
-          <a:xfrm>
-            <a:off x="685800" y="3017520"/>
-            <a:ext cx="10835640" cy="1188720"/>
-          </a:xfrm>
-          <a:prstGeom prst="roundRect">
-            <a:avLst/>
-          </a:prstGeom>
-          <a:solidFill>
-            <a:srgbClr val="EEF0FE"/>
-          </a:solidFill>
-          <a:ln w="12700">
-            <a:solidFill>
-              <a:srgbClr val="6366F1"/>
-            </a:solidFill>
-          </a:ln>
-        </p:spPr>
-        <p:txBody>
-          <a:bodyPr wrap="square" lIns="177800" tIns="177800" rIns="177800" bIns="177800"/>
-          <a:lstStyle/>
-          <a:p>
-            <a:pPr algn="ctr"/>
-            <a:r>
-              <a:rPr lang="ru-RU" sz="1400" b="0">
-                <a:solidFill>
-                  <a:srgbClr val="1A2730"/>
-                </a:solidFill>
-                <a:latin typeface="Verdana"/>
-                <a:cs typeface="Verdana"/>
-              </a:rPr>
-              <a:t>Дополнительный эффект — при падении одного экземпляра пользователи продолжают работать через другой.</a:t>
-            </a:r>
-          </a:p>
-        </p:txBody>
-      </p:sp>
-      <p:sp>
-        <p:nvSpPr>
-          <p:cNvPr id="22" name="Shape 22"/>
-          <p:cNvSpPr txBox="1"/>
-          <p:nvPr/>
-        </p:nvSpPr>
-        <p:spPr>
-          <a:xfrm>
-            <a:off x="685800" y="4526280"/>
-            <a:ext cx="3520440" cy="1691640"/>
-          </a:xfrm>
-          <a:prstGeom prst="roundRect">
-            <a:avLst/>
-          </a:prstGeom>
-          <a:solidFill>
-            <a:srgbClr val="FFFFFF"/>
-          </a:solidFill>
-          <a:ln w="12700">
-            <a:solidFill>
-              <a:srgbClr val="E3E7EB"/>
-            </a:solidFill>
-          </a:ln>
-        </p:spPr>
-        <p:txBody>
-          <a:bodyPr wrap="square" lIns="177800" tIns="177800" rIns="177800" bIns="177800"/>
-          <a:lstStyle/>
-          <a:p>
-            <a:pPr algn="l"/>
-            <a:r>
-              <a:rPr lang="ru-RU" sz="1300" b="0">
-                <a:solidFill>
-                  <a:srgbClr val="1A2730"/>
-                </a:solidFill>
-                <a:latin typeface="Verdana"/>
-                <a:cs typeface="Verdana"/>
-              </a:rPr>
-              <a:t>Что было</a:t>
-            </a:r>
-          </a:p>
-          <a:p>
-            <a:pPr algn="l"/>
-            <a:r>
-              <a:rPr lang="ru-RU" sz="1300" b="0">
-                <a:solidFill>
-                  <a:srgbClr val="1A2730"/>
-                </a:solidFill>
-                <a:latin typeface="Verdana"/>
-                <a:cs typeface="Verdana"/>
-              </a:rPr>
-              <a:t/>
-            </a:r>
-          </a:p>
-          <a:p>
-            <a:pPr algn="l"/>
-            <a:r>
-              <a:rPr lang="ru-RU" sz="1300" b="0">
-                <a:solidFill>
-                  <a:srgbClr val="1A2730"/>
-                </a:solidFill>
-                <a:latin typeface="Verdana"/>
-                <a:cs typeface="Verdana"/>
-              </a:rPr>
-              <a:t>С несколькими экземплярами backend изменения не доходили до части пользователей.</a:t>
-            </a:r>
-          </a:p>
-        </p:txBody>
-      </p:sp>
-      <p:sp>
-        <p:nvSpPr>
-          <p:cNvPr id="23" name="Shape 23"/>
-          <p:cNvSpPr txBox="1"/>
-          <p:nvPr/>
-        </p:nvSpPr>
-        <p:spPr>
-          <a:xfrm>
-            <a:off x="4343400" y="4526280"/>
-            <a:ext cx="3520440" cy="1691640"/>
-          </a:xfrm>
-          <a:prstGeom prst="roundRect">
-            <a:avLst/>
-          </a:prstGeom>
-          <a:solidFill>
-            <a:srgbClr val="FFFFFF"/>
-          </a:solidFill>
-          <a:ln w="12700">
-            <a:solidFill>
-              <a:srgbClr val="E3E7EB"/>
-            </a:solidFill>
-          </a:ln>
-        </p:spPr>
-        <p:txBody>
-          <a:bodyPr wrap="square" lIns="177800" tIns="177800" rIns="177800" bIns="177800"/>
-          <a:lstStyle/>
-          <a:p>
-            <a:pPr algn="l"/>
-            <a:r>
-              <a:rPr lang="ru-RU" sz="1300" b="0">
-                <a:solidFill>
-                  <a:srgbClr val="1A2730"/>
-                </a:solidFill>
-                <a:latin typeface="Verdana"/>
-                <a:cs typeface="Verdana"/>
-              </a:rPr>
-              <a:t>Что сделали</a:t>
-            </a:r>
-          </a:p>
-          <a:p>
-            <a:pPr algn="l"/>
-            <a:r>
-              <a:rPr lang="ru-RU" sz="1300" b="0">
-                <a:solidFill>
-                  <a:srgbClr val="1A2730"/>
-                </a:solidFill>
-                <a:latin typeface="Verdana"/>
-                <a:cs typeface="Verdana"/>
-              </a:rPr>
-              <a:t/>
-            </a:r>
-          </a:p>
-          <a:p>
-            <a:pPr algn="l"/>
-            <a:r>
-              <a:rPr lang="ru-RU" sz="1300" b="0">
-                <a:solidFill>
-                  <a:srgbClr val="1A2730"/>
-                </a:solidFill>
-                <a:latin typeface="Verdana"/>
-                <a:cs typeface="Verdana"/>
-              </a:rPr>
-              <a:t>Два экземпляра за общей точкой входа плюс общий канал событий через Redis.</a:t>
-            </a:r>
-          </a:p>
-        </p:txBody>
-      </p:sp>
-      <p:sp>
-        <p:nvSpPr>
-          <p:cNvPr id="24" name="Shape 24"/>
-          <p:cNvSpPr txBox="1"/>
-          <p:nvPr/>
-        </p:nvSpPr>
-        <p:spPr>
-          <a:xfrm>
-            <a:off x="8001000" y="4526280"/>
-            <a:ext cx="3520440" cy="1691640"/>
-          </a:xfrm>
-          <a:prstGeom prst="roundRect">
-            <a:avLst/>
-          </a:prstGeom>
-          <a:solidFill>
-            <a:srgbClr val="FFFFFF"/>
-          </a:solidFill>
-          <a:ln w="12700">
-            <a:solidFill>
-              <a:srgbClr val="E3E7EB"/>
-            </a:solidFill>
-          </a:ln>
-        </p:spPr>
-        <p:txBody>
-          <a:bodyPr wrap="square" lIns="177800" tIns="177800" rIns="177800" bIns="177800"/>
-          <a:lstStyle/>
-          <a:p>
-            <a:pPr algn="l"/>
-            <a:r>
-              <a:rPr lang="ru-RU" sz="1300" b="0">
-                <a:solidFill>
-                  <a:srgbClr val="1A2730"/>
-                </a:solidFill>
-                <a:latin typeface="Verdana"/>
-                <a:cs typeface="Verdana"/>
-              </a:rPr>
-              <a:t>Чем доказали</a:t>
-            </a:r>
-          </a:p>
-          <a:p>
-            <a:pPr algn="l"/>
-            <a:r>
-              <a:rPr lang="ru-RU" sz="1300" b="0">
-                <a:solidFill>
-                  <a:srgbClr val="1A2730"/>
-                </a:solidFill>
-                <a:latin typeface="Verdana"/>
-                <a:cs typeface="Verdana"/>
-              </a:rPr>
-              <a:t/>
-            </a:r>
-          </a:p>
-          <a:p>
-            <a:pPr algn="l"/>
-            <a:r>
-              <a:rPr lang="ru-RU" sz="1300" b="0">
-                <a:solidFill>
-                  <a:srgbClr val="1A2730"/>
-                </a:solidFill>
-                <a:latin typeface="Verdana"/>
-                <a:cs typeface="Verdana"/>
-              </a:rPr>
-              <a:t>Сравнение «без / с», 30 повторов, переподключение и падение узла.</a:t>
-            </a:r>
-          </a:p>
-        </p:txBody>
-      </p:sp>
-      <p:sp>
-        <p:nvSpPr>
-          <p:cNvPr id="900" name="Shape 900"/>
-          <p:cNvSpPr txBox="1"/>
-          <p:nvPr/>
-        </p:nvSpPr>
-        <p:spPr>
-          <a:xfrm>
-            <a:off x="594360" y="6510528"/>
-            <a:ext cx="10972800" cy="201168"/>
-          </a:xfrm>
-          <a:prstGeom prst="roundRect">
-            <a:avLst/>
-          </a:prstGeom>
-          <a:noFill/>
-          <a:ln>
-            <a:noFill/>
-          </a:ln>
-        </p:spPr>
-        <p:txBody>
-          <a:bodyPr wrap="square" lIns="177800" tIns="177800" rIns="177800" bIns="177800"/>
-          <a:lstStyle/>
-          <a:p>
-            <a:pPr algn="l"/>
-            <a:r>
-              <a:rPr lang="ru-RU" sz="800" b="0">
-                <a:solidFill>
-                  <a:srgbClr val="5E6A75"/>
-                </a:solidFill>
-                <a:latin typeface="Verdana"/>
-                <a:cs typeface="Verdana"/>
-              </a:rPr>
-              <a:t>В реальном времени · 18</a:t>
+              <a:t>15/15</a:t>
             </a:r>
           </a:p>
         </p:txBody>
@@ -5734,7 +4487,7 @@
         <p:spPr>
           <a:xfrm>
             <a:off x="594360" y="6510528"/>
-            <a:ext cx="10972800" cy="201168"/>
+            <a:ext cx="7315200" cy="201168"/>
           </a:xfrm>
           <a:prstGeom prst="roundRect">
             <a:avLst/>
@@ -5757,7 +4510,44 @@
                 <a:latin typeface="Verdana"/>
                 <a:cs typeface="Verdana"/>
               </a:rPr>
-              <a:t>В реальном времени · 02</a:t>
+              <a:t>В реальном времени</a:t>
+            </a:r>
+          </a:p>
+        </p:txBody>
+      </p:sp>
+      <p:sp>
+        <p:nvSpPr>
+          <p:cNvPr id="901" name="Shape 901"/>
+          <p:cNvSpPr txBox="1"/>
+          <p:nvPr/>
+        </p:nvSpPr>
+        <p:spPr>
+          <a:xfrm>
+            <a:off x="4251960" y="6419088"/>
+            <a:ext cx="7315200" cy="292608"/>
+          </a:xfrm>
+          <a:prstGeom prst="roundRect">
+            <a:avLst/>
+          </a:prstGeom>
+          <a:noFill/>
+          <a:ln>
+            <a:noFill/>
+          </a:ln>
+        </p:spPr>
+        <p:txBody>
+          <a:bodyPr wrap="square" lIns="177800" tIns="177800" rIns="177800" bIns="177800"/>
+          <a:lstStyle/>
+          <a:p>
+            <a:pPr algn="r"/>
+            <a:r>
+              <a:rPr lang="ru-RU" sz="1200" b="1">
+                <a:solidFill>
+                  <a:srgbClr val="5E6A75"/>
+                </a:solidFill>
+                <a:latin typeface="Verdana"/>
+                <a:cs typeface="Verdana"/>
+              </a:rPr>
+              <a:t>2/15</a:t>
             </a:r>
           </a:p>
         </p:txBody>
@@ -5936,7 +4726,7 @@
         <p:spPr>
           <a:xfrm>
             <a:off x="594360" y="6510528"/>
-            <a:ext cx="10972800" cy="201168"/>
+            <a:ext cx="7315200" cy="201168"/>
           </a:xfrm>
           <a:prstGeom prst="roundRect">
             <a:avLst/>
@@ -5959,7 +4749,44 @@
                 <a:latin typeface="Verdana"/>
                 <a:cs typeface="Verdana"/>
               </a:rPr>
-              <a:t>В реальном времени · 03</a:t>
+              <a:t>В реальном времени</a:t>
+            </a:r>
+          </a:p>
+        </p:txBody>
+      </p:sp>
+      <p:sp>
+        <p:nvSpPr>
+          <p:cNvPr id="901" name="Shape 901"/>
+          <p:cNvSpPr txBox="1"/>
+          <p:nvPr/>
+        </p:nvSpPr>
+        <p:spPr>
+          <a:xfrm>
+            <a:off x="4251960" y="6419088"/>
+            <a:ext cx="7315200" cy="292608"/>
+          </a:xfrm>
+          <a:prstGeom prst="roundRect">
+            <a:avLst/>
+          </a:prstGeom>
+          <a:noFill/>
+          <a:ln>
+            <a:noFill/>
+          </a:ln>
+        </p:spPr>
+        <p:txBody>
+          <a:bodyPr wrap="square" lIns="177800" tIns="177800" rIns="177800" bIns="177800"/>
+          <a:lstStyle/>
+          <a:p>
+            <a:pPr algn="r"/>
+            <a:r>
+              <a:rPr lang="ru-RU" sz="1200" b="1">
+                <a:solidFill>
+                  <a:srgbClr val="5E6A75"/>
+                </a:solidFill>
+                <a:latin typeface="Verdana"/>
+                <a:cs typeface="Verdana"/>
+              </a:rPr>
+              <a:t>3/15</a:t>
             </a:r>
           </a:p>
         </p:txBody>
@@ -6138,7 +4965,7 @@
         <p:spPr>
           <a:xfrm>
             <a:off x="594360" y="6510528"/>
-            <a:ext cx="10972800" cy="201168"/>
+            <a:ext cx="7315200" cy="201168"/>
           </a:xfrm>
           <a:prstGeom prst="roundRect">
             <a:avLst/>
@@ -6161,7 +4988,44 @@
                 <a:latin typeface="Verdana"/>
                 <a:cs typeface="Verdana"/>
               </a:rPr>
-              <a:t>В реальном времени · 04</a:t>
+              <a:t>В реальном времени</a:t>
+            </a:r>
+          </a:p>
+        </p:txBody>
+      </p:sp>
+      <p:sp>
+        <p:nvSpPr>
+          <p:cNvPr id="901" name="Shape 901"/>
+          <p:cNvSpPr txBox="1"/>
+          <p:nvPr/>
+        </p:nvSpPr>
+        <p:spPr>
+          <a:xfrm>
+            <a:off x="4251960" y="6419088"/>
+            <a:ext cx="7315200" cy="292608"/>
+          </a:xfrm>
+          <a:prstGeom prst="roundRect">
+            <a:avLst/>
+          </a:prstGeom>
+          <a:noFill/>
+          <a:ln>
+            <a:noFill/>
+          </a:ln>
+        </p:spPr>
+        <p:txBody>
+          <a:bodyPr wrap="square" lIns="177800" tIns="177800" rIns="177800" bIns="177800"/>
+          <a:lstStyle/>
+          <a:p>
+            <a:pPr algn="r"/>
+            <a:r>
+              <a:rPr lang="ru-RU" sz="1200" b="1">
+                <a:solidFill>
+                  <a:srgbClr val="5E6A75"/>
+                </a:solidFill>
+                <a:latin typeface="Verdana"/>
+                <a:cs typeface="Verdana"/>
+              </a:rPr>
+              <a:t>4/15</a:t>
             </a:r>
           </a:p>
         </p:txBody>
@@ -6376,7 +5240,7 @@
                 <a:latin typeface="Verdana"/>
                 <a:cs typeface="Verdana"/>
               </a:rPr>
-              <a:t>AI-инструменты усиливают ожидание обновлений в реальном времени</a:t>
+              <a:t>AI меняет ожидания от интерфейсов</a:t>
             </a:r>
           </a:p>
           <a:p>
@@ -6402,7 +5266,7 @@
                 <a:latin typeface="Verdana"/>
                 <a:cs typeface="Verdana"/>
               </a:rPr>
-              <a:t>Ассистент может сам создать комментарий, изменить статус, предложить исполнителя.</a:t>
+              <a:t>Взаимодействие всё чаще идёт через диалог с ассистентом: он сам создаёт комментарий, меняет статус, предлагает исполнителя — и пользователь ждёт мгновенного отклика.</a:t>
             </a:r>
           </a:p>
         </p:txBody>
@@ -6469,7 +5333,7 @@
                 <a:latin typeface="Verdana"/>
                 <a:cs typeface="Verdana"/>
               </a:rPr>
-              <a:t>Строить его нужно для нескольких экземпляров серверного сервиса, а не только для одного.</a:t>
+              <a:t>Отзывчивость интерфейса требует масштабируемого и отказоустойчивого контура — на нескольких экземплярах серверного сервиса, а не на одном.</a:t>
             </a:r>
           </a:p>
         </p:txBody>
@@ -6520,7 +5384,7 @@
         <p:spPr>
           <a:xfrm>
             <a:off x="594360" y="6510528"/>
-            <a:ext cx="10972800" cy="201168"/>
+            <a:ext cx="7315200" cy="201168"/>
           </a:xfrm>
           <a:prstGeom prst="roundRect">
             <a:avLst/>
@@ -6543,7 +5407,44 @@
                 <a:latin typeface="Verdana"/>
                 <a:cs typeface="Verdana"/>
               </a:rPr>
-              <a:t>В реальном времени · 05</a:t>
+              <a:t>В реальном времени</a:t>
+            </a:r>
+          </a:p>
+        </p:txBody>
+      </p:sp>
+      <p:sp>
+        <p:nvSpPr>
+          <p:cNvPr id="901" name="Shape 901"/>
+          <p:cNvSpPr txBox="1"/>
+          <p:nvPr/>
+        </p:nvSpPr>
+        <p:spPr>
+          <a:xfrm>
+            <a:off x="4251960" y="6419088"/>
+            <a:ext cx="7315200" cy="292608"/>
+          </a:xfrm>
+          <a:prstGeom prst="roundRect">
+            <a:avLst/>
+          </a:prstGeom>
+          <a:noFill/>
+          <a:ln>
+            <a:noFill/>
+          </a:ln>
+        </p:spPr>
+        <p:txBody>
+          <a:bodyPr wrap="square" lIns="177800" tIns="177800" rIns="177800" bIns="177800"/>
+          <a:lstStyle/>
+          <a:p>
+            <a:pPr algn="r"/>
+            <a:r>
+              <a:rPr lang="ru-RU" sz="1200" b="1">
+                <a:solidFill>
+                  <a:srgbClr val="5E6A75"/>
+                </a:solidFill>
+                <a:latin typeface="Verdana"/>
+                <a:cs typeface="Verdana"/>
+              </a:rPr>
+              <a:t>5/15</a:t>
             </a:r>
           </a:p>
         </p:txBody>
@@ -6876,7 +5777,7 @@
         <p:spPr>
           <a:xfrm>
             <a:off x="594360" y="6510528"/>
-            <a:ext cx="10972800" cy="201168"/>
+            <a:ext cx="7315200" cy="201168"/>
           </a:xfrm>
           <a:prstGeom prst="roundRect">
             <a:avLst/>
@@ -6899,7 +5800,44 @@
                 <a:latin typeface="Verdana"/>
                 <a:cs typeface="Verdana"/>
               </a:rPr>
-              <a:t>В реальном времени · 06</a:t>
+              <a:t>В реальном времени</a:t>
+            </a:r>
+          </a:p>
+        </p:txBody>
+      </p:sp>
+      <p:sp>
+        <p:nvSpPr>
+          <p:cNvPr id="901" name="Shape 901"/>
+          <p:cNvSpPr txBox="1"/>
+          <p:nvPr/>
+        </p:nvSpPr>
+        <p:spPr>
+          <a:xfrm>
+            <a:off x="4251960" y="6419088"/>
+            <a:ext cx="7315200" cy="292608"/>
+          </a:xfrm>
+          <a:prstGeom prst="roundRect">
+            <a:avLst/>
+          </a:prstGeom>
+          <a:noFill/>
+          <a:ln>
+            <a:noFill/>
+          </a:ln>
+        </p:spPr>
+        <p:txBody>
+          <a:bodyPr wrap="square" lIns="177800" tIns="177800" rIns="177800" bIns="177800"/>
+          <a:lstStyle/>
+          <a:p>
+            <a:pPr algn="r"/>
+            <a:r>
+              <a:rPr lang="ru-RU" sz="1200" b="1">
+                <a:solidFill>
+                  <a:srgbClr val="5E6A75"/>
+                </a:solidFill>
+                <a:latin typeface="Verdana"/>
+                <a:cs typeface="Verdana"/>
+              </a:rPr>
+              <a:t>6/15</a:t>
             </a:r>
           </a:p>
         </p:txBody>
@@ -7329,7 +6267,7 @@
         <p:spPr>
           <a:xfrm>
             <a:off x="594360" y="6510528"/>
-            <a:ext cx="10972800" cy="201168"/>
+            <a:ext cx="7315200" cy="201168"/>
           </a:xfrm>
           <a:prstGeom prst="roundRect">
             <a:avLst/>
@@ -7352,7 +6290,44 @@
                 <a:latin typeface="Verdana"/>
                 <a:cs typeface="Verdana"/>
               </a:rPr>
-              <a:t>В реальном времени · 07</a:t>
+              <a:t>В реальном времени</a:t>
+            </a:r>
+          </a:p>
+        </p:txBody>
+      </p:sp>
+      <p:sp>
+        <p:nvSpPr>
+          <p:cNvPr id="901" name="Shape 901"/>
+          <p:cNvSpPr txBox="1"/>
+          <p:nvPr/>
+        </p:nvSpPr>
+        <p:spPr>
+          <a:xfrm>
+            <a:off x="4251960" y="6419088"/>
+            <a:ext cx="7315200" cy="292608"/>
+          </a:xfrm>
+          <a:prstGeom prst="roundRect">
+            <a:avLst/>
+          </a:prstGeom>
+          <a:noFill/>
+          <a:ln>
+            <a:noFill/>
+          </a:ln>
+        </p:spPr>
+        <p:txBody>
+          <a:bodyPr wrap="square" lIns="177800" tIns="177800" rIns="177800" bIns="177800"/>
+          <a:lstStyle/>
+          <a:p>
+            <a:pPr algn="r"/>
+            <a:r>
+              <a:rPr lang="ru-RU" sz="1200" b="1">
+                <a:solidFill>
+                  <a:srgbClr val="5E6A75"/>
+                </a:solidFill>
+                <a:latin typeface="Verdana"/>
+                <a:cs typeface="Verdana"/>
+              </a:rPr>
+              <a:t>7/15</a:t>
             </a:r>
           </a:p>
         </p:txBody>
@@ -8359,7 +7334,7 @@
         <p:spPr>
           <a:xfrm>
             <a:off x="594360" y="6510528"/>
-            <a:ext cx="10972800" cy="201168"/>
+            <a:ext cx="7315200" cy="201168"/>
           </a:xfrm>
           <a:prstGeom prst="roundRect">
             <a:avLst/>
@@ -8382,7 +7357,44 @@
                 <a:latin typeface="Verdana"/>
                 <a:cs typeface="Verdana"/>
               </a:rPr>
-              <a:t>В реальном времени · 08</a:t>
+              <a:t>В реальном времени</a:t>
+            </a:r>
+          </a:p>
+        </p:txBody>
+      </p:sp>
+      <p:sp>
+        <p:nvSpPr>
+          <p:cNvPr id="901" name="Shape 901"/>
+          <p:cNvSpPr txBox="1"/>
+          <p:nvPr/>
+        </p:nvSpPr>
+        <p:spPr>
+          <a:xfrm>
+            <a:off x="4251960" y="6419088"/>
+            <a:ext cx="7315200" cy="292608"/>
+          </a:xfrm>
+          <a:prstGeom prst="roundRect">
+            <a:avLst/>
+          </a:prstGeom>
+          <a:noFill/>
+          <a:ln>
+            <a:noFill/>
+          </a:ln>
+        </p:spPr>
+        <p:txBody>
+          <a:bodyPr wrap="square" lIns="177800" tIns="177800" rIns="177800" bIns="177800"/>
+          <a:lstStyle/>
+          <a:p>
+            <a:pPr algn="r"/>
+            <a:r>
+              <a:rPr lang="ru-RU" sz="1200" b="1">
+                <a:solidFill>
+                  <a:srgbClr val="5E6A75"/>
+                </a:solidFill>
+                <a:latin typeface="Verdana"/>
+                <a:cs typeface="Verdana"/>
+              </a:rPr>
+              <a:t>8/15</a:t>
             </a:r>
           </a:p>
         </p:txBody>
@@ -8957,7 +7969,7 @@
         <p:spPr>
           <a:xfrm>
             <a:off x="594360" y="6510528"/>
-            <a:ext cx="10972800" cy="201168"/>
+            <a:ext cx="7315200" cy="201168"/>
           </a:xfrm>
           <a:prstGeom prst="roundRect">
             <a:avLst/>
@@ -8980,7 +7992,44 @@
                 <a:latin typeface="Verdana"/>
                 <a:cs typeface="Verdana"/>
               </a:rPr>
-              <a:t>В реальном времени · 09</a:t>
+              <a:t>В реальном времени</a:t>
+            </a:r>
+          </a:p>
+        </p:txBody>
+      </p:sp>
+      <p:sp>
+        <p:nvSpPr>
+          <p:cNvPr id="901" name="Shape 901"/>
+          <p:cNvSpPr txBox="1"/>
+          <p:nvPr/>
+        </p:nvSpPr>
+        <p:spPr>
+          <a:xfrm>
+            <a:off x="4251960" y="6419088"/>
+            <a:ext cx="7315200" cy="292608"/>
+          </a:xfrm>
+          <a:prstGeom prst="roundRect">
+            <a:avLst/>
+          </a:prstGeom>
+          <a:noFill/>
+          <a:ln>
+            <a:noFill/>
+          </a:ln>
+        </p:spPr>
+        <p:txBody>
+          <a:bodyPr wrap="square" lIns="177800" tIns="177800" rIns="177800" bIns="177800"/>
+          <a:lstStyle/>
+          <a:p>
+            <a:pPr algn="r"/>
+            <a:r>
+              <a:rPr lang="ru-RU" sz="1200" b="1">
+                <a:solidFill>
+                  <a:srgbClr val="5E6A75"/>
+                </a:solidFill>
+                <a:latin typeface="Verdana"/>
+                <a:cs typeface="Verdana"/>
+              </a:rPr>
+              <a:t>9/15</a:t>
             </a:r>
           </a:p>
         </p:txBody>
